--- a/media/figstudio/bzso_taxonomy/taxonomy_phase_control_editable.pptx
+++ b/media/figstudio/bzso_taxonomy/taxonomy_phase_control_editable.pptx
@@ -502,7 +502,7 @@
           <a:lstStyle/>
           <a:p>
             <a:r>
-              <a:t>BaZn2Si2O7 合成与相控制分类框架（super_teaser S5 F01 → super_img2ppt 重建）</a:t>
+              <a:t>BaZn2Si2O7 合成与相控制分类框架（super_teaser 第二轮 F04 → super_img2ppt 重建）</a:t>
             </a:r>
           </a:p>
         </p:txBody>
@@ -3524,19 +3524,19 @@
         </p:nvSpPr>
         <p:spPr>
           <a:xfrm>
-            <a:off x="555624" y="2174874"/>
-            <a:ext cx="1984374" cy="3651249"/>
-          </a:xfrm>
-          <a:prstGeom prst="roundRect">
-            <a:avLst>
-              <a:gd name="adj" fmla="val 7199"/>
-            </a:avLst>
+            <a:off x="5087937" y="2555874"/>
+            <a:ext cx="2016124" cy="2016124"/>
+          </a:xfrm>
+          <a:prstGeom prst="ellipse">
+            <a:avLst/>
           </a:prstGeom>
           <a:solidFill>
-            <a:srgbClr val="1F6F78"/>
+            <a:srgbClr val="FFFFFF"/>
           </a:solidFill>
-          <a:ln>
-            <a:noFill/>
+          <a:ln w="23812">
+            <a:solidFill>
+              <a:srgbClr val="4A5158"/>
+            </a:solidFill>
           </a:ln>
           <a:effectLst/>
         </p:spPr>
@@ -3570,8 +3570,8 @@
         </p:nvSpPr>
         <p:spPr>
           <a:xfrm>
-            <a:off x="587374" y="3460749"/>
-            <a:ext cx="1920874" cy="1031874"/>
+            <a:off x="5199062" y="3167062"/>
+            <a:ext cx="1793874" cy="793749"/>
           </a:xfrm>
           <a:prstGeom prst="rect">
             <a:avLst/>
@@ -3587,7 +3587,7 @@
           <a:p>
             <a:pPr algn="ctr" fontAlgn="base">
               <a:lnSpc>
-                <a:spcPts val="3187"/>
+                <a:spcPts val="2899"/>
               </a:lnSpc>
               <a:spcBef>
                 <a:spcPts val="0"/>
@@ -3595,9 +3595,9 @@
               <a:spcAft>
                 <a:spcPts val="0"/>
               </a:spcAft>
-              <a:defRPr sz="2124" b="1" i="0" lang="zh-CN" dirty="0">
-                <a:solidFill>
-                  <a:srgbClr val="FFFFFF"/>
+              <a:defRPr sz="1999" b="1" i="0" lang="zh-CN" dirty="0">
+                <a:solidFill>
+                  <a:srgbClr val="1F2326"/>
                 </a:solidFill>
                 <a:latin typeface="DejaVu Sans"/>
                 <a:ea typeface="DejaVu Sans"/>
@@ -3605,9 +3605,9 @@
               </a:defRPr>
             </a:pPr>
             <a:r>
-              <a:rPr sz="2124" b="1" i="0" lang="zh-CN" dirty="0">
-                <a:solidFill>
-                  <a:srgbClr val="FFFFFF"/>
+              <a:rPr sz="1999" b="1" i="0" lang="zh-CN" dirty="0">
+                <a:solidFill>
+                  <a:srgbClr val="1F2326"/>
                 </a:solidFill>
                 <a:latin typeface="DejaVu Sans"/>
                 <a:ea typeface="DejaVu Sans"/>
@@ -3619,7 +3619,7 @@
           <a:p>
             <a:pPr algn="ctr" fontAlgn="base">
               <a:lnSpc>
-                <a:spcPts val="3187"/>
+                <a:spcPts val="2906"/>
               </a:lnSpc>
               <a:spcBef>
                 <a:spcPts val="0"/>
@@ -3627,9 +3627,9 @@
               <a:spcAft>
                 <a:spcPts val="0"/>
               </a:spcAft>
-              <a:defRPr sz="2124" b="1" i="0" lang="zh-CN" dirty="0">
-                <a:solidFill>
-                  <a:srgbClr val="FFFFFF"/>
+              <a:defRPr sz="1999" b="1" i="0" lang="zh-CN" dirty="0">
+                <a:solidFill>
+                  <a:srgbClr val="1F2326"/>
                 </a:solidFill>
                 <a:latin typeface="Noto Sans CJK SC"/>
                 <a:ea typeface="Noto Sans CJK SC"/>
@@ -3637,9 +3637,9 @@
               </a:defRPr>
             </a:pPr>
             <a:r>
-              <a:rPr sz="2124" b="1" i="0" lang="zh-CN" dirty="0">
-                <a:solidFill>
-                  <a:srgbClr val="FFFFFF"/>
+              <a:rPr sz="1999" b="1" i="0" lang="zh-CN" dirty="0">
+                <a:solidFill>
+                  <a:srgbClr val="1F2326"/>
                 </a:solidFill>
                 <a:latin typeface="Noto Sans CJK SC"/>
                 <a:ea typeface="Noto Sans CJK SC"/>
@@ -3650,21 +3650,203 @@
           </a:p>
         </p:txBody>
       </p:sp>
+      <p:sp>
+        <p:nvSpPr>
+          <p:cNvPr id="4" name="k1" descr="Editable shape; source id k1"/>
+          <p:cNvSpPr/>
+          <p:nvPr/>
+        </p:nvSpPr>
+        <p:spPr>
+          <a:xfrm>
+            <a:off x="1865312" y="380999"/>
+            <a:ext cx="3230562" cy="1317624"/>
+          </a:xfrm>
+          <a:prstGeom prst="roundRect">
+            <a:avLst>
+              <a:gd name="adj" fmla="val 8433"/>
+            </a:avLst>
+          </a:prstGeom>
+          <a:solidFill>
+            <a:srgbClr val="FFFFFF"/>
+          </a:solidFill>
+          <a:ln w="19843">
+            <a:solidFill>
+              <a:srgbClr val="4A5158"/>
+            </a:solidFill>
+          </a:ln>
+          <a:effectLst/>
+        </p:spPr>
+        <p:style>
+          <a:lnRef idx="1">
+            <a:schemeClr val="accent1"/>
+          </a:lnRef>
+          <a:fillRef idx="3">
+            <a:schemeClr val="accent1"/>
+          </a:fillRef>
+          <a:effectRef idx="0">
+            <a:schemeClr val="accent1"/>
+          </a:effectRef>
+          <a:fontRef idx="minor">
+            <a:schemeClr val="lt1"/>
+          </a:fontRef>
+        </p:style>
+        <p:txBody>
+          <a:bodyPr rtlCol="0" anchor="ctr"/>
+          <a:lstStyle/>
+          <a:p>
+            <a:pPr algn="ctr"/>
+          </a:p>
+        </p:txBody>
+      </p:sp>
+      <p:sp>
+        <p:nvSpPr>
+          <p:cNvPr id="5" name="k1_t" descr="Editable text; source id k1_t"/>
+          <p:cNvSpPr txBox="1"/>
+          <p:nvPr/>
+        </p:nvSpPr>
+        <p:spPr>
+          <a:xfrm>
+            <a:off x="1960562" y="587374"/>
+            <a:ext cx="3040062" cy="460374"/>
+          </a:xfrm>
+          <a:prstGeom prst="rect">
+            <a:avLst/>
+          </a:prstGeom>
+          <a:noFill/>
+          <a:effectLst/>
+        </p:spPr>
+        <p:txBody>
+          <a:bodyPr wrap="none" anchor="ctr" tIns="0" rIns="0" bIns="0" lIns="0" anchorCtr="0" vertOverflow="overflow">
+            <a:noAutofit/>
+          </a:bodyPr>
+          <a:lstStyle/>
+          <a:p>
+            <a:pPr algn="ctr" fontAlgn="base">
+              <a:lnSpc>
+                <a:spcPts val="3593"/>
+              </a:lnSpc>
+              <a:spcBef>
+                <a:spcPts val="0"/>
+              </a:spcBef>
+              <a:spcAft>
+                <a:spcPts val="0"/>
+              </a:spcAft>
+              <a:defRPr sz="2478" b="1" i="0" lang="zh-CN" dirty="0">
+                <a:solidFill>
+                  <a:srgbClr val="1F2326"/>
+                </a:solidFill>
+                <a:latin typeface="Noto Sans CJK SC"/>
+                <a:ea typeface="Noto Sans CJK SC"/>
+                <a:cs typeface="Noto Sans CJK SC"/>
+              </a:defRPr>
+            </a:pPr>
+            <a:r>
+              <a:rPr sz="2478" b="1" i="0" lang="zh-CN" dirty="0">
+                <a:solidFill>
+                  <a:srgbClr val="1F2326"/>
+                </a:solidFill>
+                <a:latin typeface="Noto Sans CJK SC"/>
+                <a:ea typeface="Noto Sans CJK SC"/>
+                <a:cs typeface="Noto Sans CJK SC"/>
+              </a:rPr>
+              <a:t>结构与多晶型</a:t>
+            </a:r>
+          </a:p>
+        </p:txBody>
+      </p:sp>
+      <p:sp>
+        <p:nvSpPr>
+          <p:cNvPr id="6" name="k1_s" descr="Editable text; source id k1_s"/>
+          <p:cNvSpPr txBox="1"/>
+          <p:nvPr/>
+        </p:nvSpPr>
+        <p:spPr>
+          <a:xfrm>
+            <a:off x="1960562" y="1127124"/>
+            <a:ext cx="3040062" cy="333374"/>
+          </a:xfrm>
+          <a:prstGeom prst="rect">
+            <a:avLst/>
+          </a:prstGeom>
+          <a:noFill/>
+          <a:effectLst/>
+        </p:spPr>
+        <p:txBody>
+          <a:bodyPr wrap="none" anchor="ctr" tIns="0" rIns="0" bIns="0" lIns="0" anchorCtr="0" vertOverflow="overflow">
+            <a:noAutofit/>
+          </a:bodyPr>
+          <a:lstStyle/>
+          <a:p>
+            <a:pPr algn="ctr" fontAlgn="base">
+              <a:lnSpc>
+                <a:spcPts val="2468"/>
+              </a:lnSpc>
+              <a:spcBef>
+                <a:spcPts val="0"/>
+              </a:spcBef>
+              <a:spcAft>
+                <a:spcPts val="0"/>
+              </a:spcAft>
+              <a:defRPr sz="1687" b="0" i="0" lang="zh-CN" dirty="0">
+                <a:solidFill>
+                  <a:srgbClr val="3A4046"/>
+                </a:solidFill>
+                <a:latin typeface="Noto Sans CJK SC"/>
+                <a:ea typeface="Noto Sans CJK SC"/>
+                <a:cs typeface="Noto Sans CJK SC"/>
+              </a:defRPr>
+            </a:pPr>
+            <a:r>
+              <a:rPr sz="1687" b="0" i="0" lang="zh-CN" dirty="0">
+                <a:solidFill>
+                  <a:srgbClr val="3A4046"/>
+                </a:solidFill>
+                <a:latin typeface="Noto Sans CJK SC"/>
+                <a:ea typeface="Noto Sans CJK SC"/>
+                <a:cs typeface="Noto Sans CJK SC"/>
+              </a:rPr>
+              <a:t>相变</a:t>
+            </a:r>
+            <a:r>
+              <a:rPr sz="1687" b="0" i="0" lang="zh-CN" dirty="0">
+                <a:solidFill>
+                  <a:srgbClr val="3A4046"/>
+                </a:solidFill>
+                <a:latin typeface="DejaVu Sans"/>
+                <a:ea typeface="DejaVu Sans"/>
+                <a:cs typeface="DejaVu Sans"/>
+              </a:rPr>
+              <a:t> · </a:t>
+            </a:r>
+            <a:r>
+              <a:rPr sz="1687" b="0" i="0" lang="zh-CN" dirty="0">
+                <a:solidFill>
+                  <a:srgbClr val="3A4046"/>
+                </a:solidFill>
+                <a:latin typeface="Noto Sans CJK SC"/>
+                <a:ea typeface="Noto Sans CJK SC"/>
+                <a:cs typeface="Noto Sans CJK SC"/>
+              </a:rPr>
+              <a:t>配位</a:t>
+            </a:r>
+          </a:p>
+        </p:txBody>
+      </p:sp>
       <p:cxnSp>
         <p:nvCxnSpPr>
-          <p:cNvPr id="4" name="stub" descr="Editable line; source id stub"/>
+          <p:cNvPr id="7" name="s_k1" descr="Editable line; source id s_k1"/>
           <p:cNvCxnSpPr/>
           <p:nvPr/>
         </p:nvCxnSpPr>
         <p:spPr>
-          <a:xfrm>
-            <a:off x="2555874" y="4000499"/>
-            <a:ext cx="333375" cy="0"/>
+          <a:xfrm flipH="1" flipV="1">
+            <a:off x="5151437" y="2619374"/>
+            <a:ext cx="214312" cy="214313"/>
           </a:xfrm>
           <a:prstGeom prst="line">
             <a:avLst/>
           </a:prstGeom>
-          <a:ln w="39687">
+          <a:ln w="23812">
             <a:solidFill>
               <a:srgbClr val="1F6F78"/>
             </a:solidFill>
@@ -3686,88 +3868,16 @@
           </a:fontRef>
         </p:style>
       </p:cxnSp>
-      <p:cxnSp>
-        <p:nvCxnSpPr>
-          <p:cNvPr id="5" name="trunk" descr="Editable line; source id trunk"/>
-          <p:cNvCxnSpPr/>
-          <p:nvPr/>
-        </p:nvCxnSpPr>
-        <p:spPr>
-          <a:xfrm>
-            <a:off x="2889249" y="666749"/>
-            <a:ext cx="0" cy="5381625"/>
-          </a:xfrm>
-          <a:prstGeom prst="line">
-            <a:avLst/>
-          </a:prstGeom>
-          <a:ln w="39687">
-            <a:solidFill>
-              <a:srgbClr val="1F6F78"/>
-            </a:solidFill>
-          </a:ln>
-          <a:effectLst/>
-        </p:spPr>
-        <p:style>
-          <a:lnRef idx="2">
-            <a:schemeClr val="accent1"/>
-          </a:lnRef>
-          <a:fillRef idx="0">
-            <a:schemeClr val="accent1"/>
-          </a:fillRef>
-          <a:effectRef idx="0">
-            <a:schemeClr val="accent1"/>
-          </a:effectRef>
-          <a:fontRef idx="minor">
-            <a:schemeClr val="tx1"/>
-          </a:fontRef>
-        </p:style>
-      </p:cxnSp>
-      <p:cxnSp>
-        <p:nvCxnSpPr>
-          <p:cNvPr id="6" name="br0" descr="Editable line; source id br0"/>
-          <p:cNvCxnSpPr/>
-          <p:nvPr/>
-        </p:nvCxnSpPr>
-        <p:spPr>
-          <a:xfrm>
-            <a:off x="2889249" y="666749"/>
-            <a:ext cx="873125" cy="0"/>
-          </a:xfrm>
-          <a:prstGeom prst="line">
-            <a:avLst/>
-          </a:prstGeom>
-          <a:ln w="39687">
-            <a:solidFill>
-              <a:srgbClr val="1F6F78"/>
-            </a:solidFill>
-          </a:ln>
-          <a:effectLst/>
-        </p:spPr>
-        <p:style>
-          <a:lnRef idx="2">
-            <a:schemeClr val="accent1"/>
-          </a:lnRef>
-          <a:fillRef idx="0">
-            <a:schemeClr val="accent1"/>
-          </a:fillRef>
-          <a:effectRef idx="0">
-            <a:schemeClr val="accent1"/>
-          </a:effectRef>
-          <a:fontRef idx="minor">
-            <a:schemeClr val="tx1"/>
-          </a:fontRef>
-        </p:style>
-      </p:cxnSp>
-      <p:sp>
-        <p:nvSpPr>
-          <p:cNvPr id="7" name="br0b" descr="Editable line; source id br0b"/>
+      <p:sp>
+        <p:nvSpPr>
+          <p:cNvPr id="8" name="s_k1b" descr="Editable line; source id s_k1b"/>
           <p:cNvSpPr/>
           <p:nvPr/>
         </p:nvSpPr>
         <p:spPr>
           <a:xfrm>
-            <a:off x="4778375" y="607219"/>
-            <a:ext cx="1349375" cy="119062"/>
+            <a:off x="4246562" y="1714500"/>
+            <a:ext cx="222734" cy="222734"/>
           </a:xfrm>
           <a:custGeom>
             <a:avLst/>
@@ -3776,27 +3886,27 @@
             <a:cxnLst/>
             <a:rect l="l" t="t" r="r" b="b"/>
             <a:pathLst>
-              <a:path w="170000" h="15000">
+              <a:path w="28061" h="28061">
                 <a:moveTo>
-                  <a:pt x="0" y="5000"/>
+                  <a:pt x="25939" y="28061"/>
                 </a:moveTo>
                 <a:lnTo>
-                  <a:pt x="152000" y="5000"/>
+                  <a:pt x="8839" y="10960"/>
                 </a:lnTo>
                 <a:lnTo>
-                  <a:pt x="152000" y="0"/>
+                  <a:pt x="5657" y="14142"/>
                 </a:lnTo>
                 <a:lnTo>
-                  <a:pt x="170000" y="7500"/>
+                  <a:pt x="0" y="0"/>
                 </a:lnTo>
                 <a:lnTo>
-                  <a:pt x="152000" y="15000"/>
+                  <a:pt x="14142" y="5657"/>
                 </a:lnTo>
                 <a:lnTo>
-                  <a:pt x="152000" y="10000"/>
+                  <a:pt x="10960" y="8839"/>
                 </a:lnTo>
                 <a:lnTo>
-                  <a:pt x="0" y="10000"/>
+                  <a:pt x="28061" y="25939"/>
                 </a:lnTo>
                 <a:close/>
               </a:path>
@@ -3834,14 +3944,14 @@
       </p:sp>
       <p:sp>
         <p:nvSpPr>
-          <p:cNvPr id="8" name="pill0" descr="Editable shape; source id pill0"/>
+          <p:cNvPr id="9" name="s_k1_p" descr="Editable shape; source id s_k1_p"/>
           <p:cNvSpPr/>
           <p:nvPr/>
         </p:nvSpPr>
         <p:spPr>
           <a:xfrm>
-            <a:off x="3778249" y="492124"/>
-            <a:ext cx="984249" cy="349249"/>
+            <a:off x="4365624" y="2079624"/>
+            <a:ext cx="888999" cy="396874"/>
           </a:xfrm>
           <a:prstGeom prst="roundRect">
             <a:avLst>
@@ -3851,7 +3961,7 @@
           <a:solidFill>
             <a:srgbClr val="FFFFFF"/>
           </a:solidFill>
-          <a:ln w="19843">
+          <a:ln w="15874">
             <a:solidFill>
               <a:srgbClr val="1F6F78"/>
             </a:solidFill>
@@ -3882,14 +3992,14 @@
       </p:sp>
       <p:sp>
         <p:nvSpPr>
-          <p:cNvPr id="9" name="pill0_t" descr="Editable text; source id pill0_t"/>
+          <p:cNvPr id="10" name="s_k1_pt" descr="Editable text; source id s_k1_pt"/>
           <p:cNvSpPr txBox="1"/>
           <p:nvPr/>
         </p:nvSpPr>
         <p:spPr>
           <a:xfrm>
-            <a:off x="3825874" y="515937"/>
-            <a:ext cx="888999" cy="301624"/>
+            <a:off x="4413249" y="2103437"/>
+            <a:ext cx="793749" cy="349249"/>
           </a:xfrm>
           <a:prstGeom prst="rect">
             <a:avLst/>
@@ -3938,26 +4048,26 @@
       </p:sp>
       <p:sp>
         <p:nvSpPr>
-          <p:cNvPr id="10" name="card0" descr="Editable shape; source id card0"/>
+          <p:cNvPr id="11" name="k2" descr="Editable shape; source id k2"/>
           <p:cNvSpPr/>
           <p:nvPr/>
         </p:nvSpPr>
         <p:spPr>
           <a:xfrm>
-            <a:off x="6143624" y="182562"/>
-            <a:ext cx="5532437" cy="976312"/>
+            <a:off x="7096124" y="380999"/>
+            <a:ext cx="3238499" cy="1317624"/>
           </a:xfrm>
           <a:prstGeom prst="roundRect">
             <a:avLst>
-              <a:gd name="adj" fmla="val 11382"/>
+              <a:gd name="adj" fmla="val 8433"/>
             </a:avLst>
           </a:prstGeom>
           <a:solidFill>
-            <a:srgbClr val="F3F5F6"/>
+            <a:srgbClr val="FFFFFF"/>
           </a:solidFill>
           <a:ln w="19843">
             <a:solidFill>
-              <a:srgbClr val="C9CFD4"/>
+              <a:srgbClr val="4A5158"/>
             </a:solidFill>
           </a:ln>
           <a:effectLst/>
@@ -3986,14 +4096,14 @@
       </p:sp>
       <p:sp>
         <p:nvSpPr>
-          <p:cNvPr id="11" name="card0_t" descr="Editable text; source id card0_t"/>
+          <p:cNvPr id="12" name="k2_t" descr="Editable text; source id k2_t"/>
           <p:cNvSpPr txBox="1"/>
           <p:nvPr/>
         </p:nvSpPr>
         <p:spPr>
           <a:xfrm>
-            <a:off x="6429374" y="293687"/>
-            <a:ext cx="5079999" cy="460374"/>
+            <a:off x="7191374" y="587374"/>
+            <a:ext cx="3047999" cy="460374"/>
           </a:xfrm>
           <a:prstGeom prst="rect">
             <a:avLst/>
@@ -4007,9 +4117,9 @@
           </a:bodyPr>
           <a:lstStyle/>
           <a:p>
-            <a:pPr algn="l" fontAlgn="base">
+            <a:pPr algn="ctr" fontAlgn="base">
               <a:lnSpc>
-                <a:spcPts val="3281"/>
+                <a:spcPts val="3593"/>
               </a:lnSpc>
               <a:spcBef>
                 <a:spcPts val="0"/>
@@ -4017,9 +4127,9 @@
               <a:spcAft>
                 <a:spcPts val="0"/>
               </a:spcAft>
-              <a:defRPr sz="2249" b="1" i="0" lang="zh-CN" dirty="0">
-                <a:solidFill>
-                  <a:srgbClr val="2B2F33"/>
+              <a:defRPr sz="2478" b="1" i="0" lang="zh-CN" dirty="0">
+                <a:solidFill>
+                  <a:srgbClr val="1F2326"/>
                 </a:solidFill>
                 <a:latin typeface="Noto Sans CJK SC"/>
                 <a:ea typeface="Noto Sans CJK SC"/>
@@ -4027,29 +4137,29 @@
               </a:defRPr>
             </a:pPr>
             <a:r>
-              <a:rPr sz="2249" b="1" i="0" lang="zh-CN" dirty="0">
-                <a:solidFill>
-                  <a:srgbClr val="2B2F33"/>
+              <a:rPr sz="2478" b="1" i="0" lang="zh-CN" dirty="0">
+                <a:solidFill>
+                  <a:srgbClr val="1F2326"/>
                 </a:solidFill>
                 <a:latin typeface="Noto Sans CJK SC"/>
                 <a:ea typeface="Noto Sans CJK SC"/>
                 <a:cs typeface="Noto Sans CJK SC"/>
               </a:rPr>
-              <a:t>结构与多晶型</a:t>
-            </a:r>
-          </a:p>
-        </p:txBody>
-      </p:sp>
-      <p:sp>
-        <p:nvSpPr>
-          <p:cNvPr id="12" name="card0_s" descr="Editable text; source id card0_s"/>
+              <a:t>合成路线</a:t>
+            </a:r>
+          </a:p>
+        </p:txBody>
+      </p:sp>
+      <p:sp>
+        <p:nvSpPr>
+          <p:cNvPr id="13" name="k2_s" descr="Editable text; source id k2_s"/>
           <p:cNvSpPr txBox="1"/>
           <p:nvPr/>
         </p:nvSpPr>
         <p:spPr>
           <a:xfrm>
-            <a:off x="6429374" y="754062"/>
-            <a:ext cx="5079999" cy="317499"/>
+            <a:off x="7191374" y="1127124"/>
+            <a:ext cx="3047999" cy="333374"/>
           </a:xfrm>
           <a:prstGeom prst="rect">
             <a:avLst/>
@@ -4063,7 +4173,7 @@
           </a:bodyPr>
           <a:lstStyle/>
           <a:p>
-            <a:pPr algn="l" fontAlgn="base">
+            <a:pPr algn="ctr" fontAlgn="base">
               <a:lnSpc>
                 <a:spcPts val="2468"/>
               </a:lnSpc>
@@ -4075,7 +4185,7 @@
               </a:spcAft>
               <a:defRPr sz="1687" b="0" i="0" lang="zh-CN" dirty="0">
                 <a:solidFill>
-                  <a:srgbClr val="4A5158"/>
+                  <a:srgbClr val="3A4046"/>
                 </a:solidFill>
                 <a:latin typeface="Noto Sans CJK SC"/>
                 <a:ea typeface="Noto Sans CJK SC"/>
@@ -4085,18 +4195,18 @@
             <a:r>
               <a:rPr sz="1687" b="0" i="0" lang="zh-CN" dirty="0">
                 <a:solidFill>
-                  <a:srgbClr val="4A5158"/>
+                  <a:srgbClr val="3A4046"/>
                 </a:solidFill>
                 <a:latin typeface="Noto Sans CJK SC"/>
                 <a:ea typeface="Noto Sans CJK SC"/>
                 <a:cs typeface="Noto Sans CJK SC"/>
               </a:rPr>
-              <a:t>相变</a:t>
+              <a:t>固相</a:t>
             </a:r>
             <a:r>
               <a:rPr sz="1687" b="0" i="0" lang="zh-CN" dirty="0">
                 <a:solidFill>
-                  <a:srgbClr val="4A5158"/>
+                  <a:srgbClr val="3A4046"/>
                 </a:solidFill>
                 <a:latin typeface="DejaVu Sans"/>
                 <a:ea typeface="DejaVu Sans"/>
@@ -4107,32 +4217,54 @@
             <a:r>
               <a:rPr sz="1687" b="0" i="0" lang="zh-CN" dirty="0">
                 <a:solidFill>
-                  <a:srgbClr val="4A5158"/>
+                  <a:srgbClr val="3A4046"/>
                 </a:solidFill>
                 <a:latin typeface="Noto Sans CJK SC"/>
                 <a:ea typeface="Noto Sans CJK SC"/>
                 <a:cs typeface="Noto Sans CJK SC"/>
               </a:rPr>
-              <a:t>配位</a:t>
+              <a:t>溶胶</a:t>
+            </a:r>
+            <a:r>
+              <a:rPr sz="1687" b="0" i="0" lang="zh-CN" dirty="0">
+                <a:solidFill>
+                  <a:srgbClr val="3A4046"/>
+                </a:solidFill>
+                <a:latin typeface="DejaVu Sans"/>
+                <a:ea typeface="DejaVu Sans"/>
+                <a:cs typeface="DejaVu Sans"/>
+              </a:rPr>
+              <a:t>—</a:t>
+            </a:r>
+            <a:r>
+              <a:rPr sz="1687" b="0" i="0" lang="zh-CN" dirty="0">
+                <a:solidFill>
+                  <a:srgbClr val="3A4046"/>
+                </a:solidFill>
+                <a:latin typeface="Noto Sans CJK SC"/>
+                <a:ea typeface="Noto Sans CJK SC"/>
+                <a:cs typeface="Noto Sans CJK SC"/>
+              </a:rPr>
+              <a:t>凝胶</a:t>
             </a:r>
           </a:p>
         </p:txBody>
       </p:sp>
       <p:cxnSp>
         <p:nvCxnSpPr>
-          <p:cNvPr id="13" name="br1" descr="Editable line; source id br1"/>
+          <p:cNvPr id="14" name="s_k2" descr="Editable line; source id s_k2"/>
           <p:cNvCxnSpPr/>
           <p:nvPr/>
         </p:nvCxnSpPr>
         <p:spPr>
-          <a:xfrm>
-            <a:off x="2889249" y="1746249"/>
-            <a:ext cx="873125" cy="0"/>
+          <a:xfrm flipV="1">
+            <a:off x="6826249" y="2619374"/>
+            <a:ext cx="214313" cy="214313"/>
           </a:xfrm>
           <a:prstGeom prst="line">
             <a:avLst/>
           </a:prstGeom>
-          <a:ln w="39687">
+          <a:ln w="23812">
             <a:solidFill>
               <a:srgbClr val="1F6F78"/>
             </a:solidFill>
@@ -4156,14 +4288,14 @@
       </p:cxnSp>
       <p:sp>
         <p:nvSpPr>
-          <p:cNvPr id="14" name="br1b" descr="Editable line; source id br1b"/>
+          <p:cNvPr id="15" name="s_k2b" descr="Editable line; source id s_k2b"/>
           <p:cNvSpPr/>
           <p:nvPr/>
         </p:nvSpPr>
         <p:spPr>
           <a:xfrm>
-            <a:off x="4778375" y="1686719"/>
-            <a:ext cx="1349375" cy="119062"/>
+            <a:off x="7714766" y="1714500"/>
+            <a:ext cx="222734" cy="222734"/>
           </a:xfrm>
           <a:custGeom>
             <a:avLst/>
@@ -4172,27 +4304,27 @@
             <a:cxnLst/>
             <a:rect l="l" t="t" r="r" b="b"/>
             <a:pathLst>
-              <a:path w="170000" h="15000">
+              <a:path w="28061" h="28061">
                 <a:moveTo>
-                  <a:pt x="0" y="5000"/>
+                  <a:pt x="0" y="25939"/>
                 </a:moveTo>
                 <a:lnTo>
-                  <a:pt x="152000" y="5000"/>
+                  <a:pt x="17101" y="8839"/>
                 </a:lnTo>
                 <a:lnTo>
-                  <a:pt x="152000" y="0"/>
+                  <a:pt x="13919" y="5657"/>
                 </a:lnTo>
                 <a:lnTo>
-                  <a:pt x="170000" y="7500"/>
+                  <a:pt x="28061" y="0"/>
                 </a:lnTo>
                 <a:lnTo>
-                  <a:pt x="152000" y="15000"/>
+                  <a:pt x="22404" y="14142"/>
                 </a:lnTo>
                 <a:lnTo>
-                  <a:pt x="152000" y="10000"/>
+                  <a:pt x="19222" y="10960"/>
                 </a:lnTo>
                 <a:lnTo>
-                  <a:pt x="0" y="10000"/>
+                  <a:pt x="2122" y="28061"/>
                 </a:lnTo>
                 <a:close/>
               </a:path>
@@ -4230,14 +4362,14 @@
       </p:sp>
       <p:sp>
         <p:nvSpPr>
-          <p:cNvPr id="15" name="pill1" descr="Editable shape; source id pill1"/>
+          <p:cNvPr id="16" name="s_k2_p" descr="Editable shape; source id s_k2_p"/>
           <p:cNvSpPr/>
           <p:nvPr/>
         </p:nvSpPr>
         <p:spPr>
           <a:xfrm>
-            <a:off x="3778249" y="1571624"/>
-            <a:ext cx="984249" cy="349249"/>
+            <a:off x="6937374" y="2071687"/>
+            <a:ext cx="888999" cy="396874"/>
           </a:xfrm>
           <a:prstGeom prst="roundRect">
             <a:avLst>
@@ -4247,7 +4379,7 @@
           <a:solidFill>
             <a:srgbClr val="FFFFFF"/>
           </a:solidFill>
-          <a:ln w="19843">
+          <a:ln w="15874">
             <a:solidFill>
               <a:srgbClr val="1F6F78"/>
             </a:solidFill>
@@ -4278,14 +4410,14 @@
       </p:sp>
       <p:sp>
         <p:nvSpPr>
-          <p:cNvPr id="16" name="pill1_t" descr="Editable text; source id pill1_t"/>
+          <p:cNvPr id="17" name="s_k2_pt" descr="Editable text; source id s_k2_pt"/>
           <p:cNvSpPr txBox="1"/>
           <p:nvPr/>
         </p:nvSpPr>
         <p:spPr>
           <a:xfrm>
-            <a:off x="3825874" y="1595437"/>
-            <a:ext cx="888999" cy="301624"/>
+            <a:off x="6984999" y="2095499"/>
+            <a:ext cx="793749" cy="349249"/>
           </a:xfrm>
           <a:prstGeom prst="rect">
             <a:avLst/>
@@ -4334,26 +4466,26 @@
       </p:sp>
       <p:sp>
         <p:nvSpPr>
-          <p:cNvPr id="17" name="card1" descr="Editable shape; source id card1"/>
+          <p:cNvPr id="18" name="k3" descr="Editable shape; source id k3"/>
           <p:cNvSpPr/>
           <p:nvPr/>
         </p:nvSpPr>
         <p:spPr>
           <a:xfrm>
-            <a:off x="6143624" y="1254124"/>
-            <a:ext cx="5532437" cy="976312"/>
+            <a:off x="206374" y="2952749"/>
+            <a:ext cx="2706687" cy="1293812"/>
           </a:xfrm>
           <a:prstGeom prst="roundRect">
             <a:avLst>
-              <a:gd name="adj" fmla="val 11382"/>
+              <a:gd name="adj" fmla="val 8588"/>
             </a:avLst>
           </a:prstGeom>
           <a:solidFill>
-            <a:srgbClr val="F3F5F6"/>
+            <a:srgbClr val="FFFFFF"/>
           </a:solidFill>
           <a:ln w="19843">
             <a:solidFill>
-              <a:srgbClr val="C9CFD4"/>
+              <a:srgbClr val="4A5158"/>
             </a:solidFill>
           </a:ln>
           <a:effectLst/>
@@ -4382,14 +4514,14 @@
       </p:sp>
       <p:sp>
         <p:nvSpPr>
-          <p:cNvPr id="18" name="card1_t" descr="Editable text; source id card1_t"/>
+          <p:cNvPr id="19" name="k3_t" descr="Editable text; source id k3_t"/>
           <p:cNvSpPr txBox="1"/>
           <p:nvPr/>
         </p:nvSpPr>
         <p:spPr>
           <a:xfrm>
-            <a:off x="6429374" y="1365249"/>
-            <a:ext cx="5079999" cy="460374"/>
+            <a:off x="301624" y="3159124"/>
+            <a:ext cx="2516187" cy="460374"/>
           </a:xfrm>
           <a:prstGeom prst="rect">
             <a:avLst/>
@@ -4403,9 +4535,9 @@
           </a:bodyPr>
           <a:lstStyle/>
           <a:p>
-            <a:pPr algn="l" fontAlgn="base">
+            <a:pPr algn="ctr" fontAlgn="base">
               <a:lnSpc>
-                <a:spcPts val="3281"/>
+                <a:spcPts val="3593"/>
               </a:lnSpc>
               <a:spcBef>
                 <a:spcPts val="0"/>
@@ -4413,9 +4545,9 @@
               <a:spcAft>
                 <a:spcPts val="0"/>
               </a:spcAft>
-              <a:defRPr sz="2249" b="1" i="0" lang="zh-CN" dirty="0">
-                <a:solidFill>
-                  <a:srgbClr val="2B2F33"/>
+              <a:defRPr sz="2478" b="1" i="0" lang="zh-CN" dirty="0">
+                <a:solidFill>
+                  <a:srgbClr val="1F2326"/>
                 </a:solidFill>
                 <a:latin typeface="Noto Sans CJK SC"/>
                 <a:ea typeface="Noto Sans CJK SC"/>
@@ -4423,29 +4555,29 @@
               </a:defRPr>
             </a:pPr>
             <a:r>
-              <a:rPr sz="2249" b="1" i="0" lang="zh-CN" dirty="0">
-                <a:solidFill>
-                  <a:srgbClr val="2B2F33"/>
+              <a:rPr sz="2478" b="1" i="0" lang="zh-CN" dirty="0">
+                <a:solidFill>
+                  <a:srgbClr val="1F2326"/>
                 </a:solidFill>
                 <a:latin typeface="Noto Sans CJK SC"/>
                 <a:ea typeface="Noto Sans CJK SC"/>
                 <a:cs typeface="Noto Sans CJK SC"/>
               </a:rPr>
-              <a:t>合成路线</a:t>
-            </a:r>
-          </a:p>
-        </p:txBody>
-      </p:sp>
-      <p:sp>
-        <p:nvSpPr>
-          <p:cNvPr id="19" name="card1_s" descr="Editable text; source id card1_s"/>
+              <a:t>近邻体系</a:t>
+            </a:r>
+          </a:p>
+        </p:txBody>
+      </p:sp>
+      <p:sp>
+        <p:nvSpPr>
+          <p:cNvPr id="20" name="k3_s" descr="Editable text; source id k3_s"/>
           <p:cNvSpPr txBox="1"/>
           <p:nvPr/>
         </p:nvSpPr>
         <p:spPr>
           <a:xfrm>
-            <a:off x="6429374" y="1825624"/>
-            <a:ext cx="5079999" cy="317499"/>
+            <a:off x="301624" y="3698874"/>
+            <a:ext cx="2516187" cy="333374"/>
           </a:xfrm>
           <a:prstGeom prst="rect">
             <a:avLst/>
@@ -4459,7 +4591,7 @@
           </a:bodyPr>
           <a:lstStyle/>
           <a:p>
-            <a:pPr algn="l" fontAlgn="base">
+            <a:pPr algn="ctr" fontAlgn="base">
               <a:lnSpc>
                 <a:spcPts val="2468"/>
               </a:lnSpc>
@@ -4471,86 +4603,53 @@
               </a:spcAft>
               <a:defRPr sz="1687" b="0" i="0" lang="zh-CN" dirty="0">
                 <a:solidFill>
-                  <a:srgbClr val="4A5158"/>
-                </a:solidFill>
-                <a:latin typeface="Noto Sans CJK SC"/>
-                <a:ea typeface="Noto Sans CJK SC"/>
-                <a:cs typeface="Noto Sans CJK SC"/>
+                  <a:srgbClr val="3A4046"/>
+                </a:solidFill>
+                <a:latin typeface="DejaVu Sans"/>
+                <a:ea typeface="DejaVu Sans"/>
+                <a:cs typeface="DejaVu Sans"/>
               </a:defRPr>
             </a:pPr>
             <a:r>
               <a:rPr sz="1687" b="0" i="0" lang="zh-CN" dirty="0">
                 <a:solidFill>
-                  <a:srgbClr val="4A5158"/>
+                  <a:srgbClr val="3A4046"/>
+                </a:solidFill>
+                <a:latin typeface="DejaVu Sans"/>
+                <a:ea typeface="DejaVu Sans"/>
+                <a:cs typeface="DejaVu Sans"/>
+              </a:rPr>
+              <a:t>Ba2ZnSi2O7 </a:t>
+            </a:r>
+            <a:r>
+              <a:rPr sz="1687" b="0" i="0" lang="zh-CN" dirty="0">
+                <a:solidFill>
+                  <a:srgbClr val="3A4046"/>
                 </a:solidFill>
                 <a:latin typeface="Noto Sans CJK SC"/>
                 <a:ea typeface="Noto Sans CJK SC"/>
                 <a:cs typeface="Noto Sans CJK SC"/>
               </a:rPr>
-              <a:t>固相</a:t>
-            </a:r>
-            <a:r>
-              <a:rPr sz="1687" b="0" i="0" lang="zh-CN" dirty="0">
-                <a:solidFill>
-                  <a:srgbClr val="4A5158"/>
-                </a:solidFill>
-                <a:latin typeface="DejaVu Sans"/>
-                <a:ea typeface="DejaVu Sans"/>
-                <a:cs typeface="DejaVu Sans"/>
-              </a:rPr>
-              <a:t> · </a:t>
-            </a:r>
-            <a:r>
-              <a:rPr sz="1687" b="0" i="0" lang="zh-CN" dirty="0">
-                <a:solidFill>
-                  <a:srgbClr val="4A5158"/>
-                </a:solidFill>
-                <a:latin typeface="Noto Sans CJK SC"/>
-                <a:ea typeface="Noto Sans CJK SC"/>
-                <a:cs typeface="Noto Sans CJK SC"/>
-              </a:rPr>
-              <a:t>溶胶</a:t>
-            </a:r>
-            <a:r>
-              <a:rPr sz="1687" b="0" i="0" lang="zh-CN" dirty="0">
-                <a:solidFill>
-                  <a:srgbClr val="4A5158"/>
-                </a:solidFill>
-                <a:latin typeface="DejaVu Sans"/>
-                <a:ea typeface="DejaVu Sans"/>
-                <a:cs typeface="DejaVu Sans"/>
-              </a:rPr>
-              <a:t>—</a:t>
-            </a:r>
-            <a:r>
-              <a:rPr sz="1687" b="0" i="0" lang="zh-CN" dirty="0">
-                <a:solidFill>
-                  <a:srgbClr val="4A5158"/>
-                </a:solidFill>
-                <a:latin typeface="Noto Sans CJK SC"/>
-                <a:ea typeface="Noto Sans CJK SC"/>
-                <a:cs typeface="Noto Sans CJK SC"/>
-              </a:rPr>
-              <a:t>凝胶</a:t>
+              <a:t>等</a:t>
             </a:r>
           </a:p>
         </p:txBody>
       </p:sp>
       <p:cxnSp>
         <p:nvCxnSpPr>
-          <p:cNvPr id="20" name="br2" descr="Editable line; source id br2"/>
+          <p:cNvPr id="21" name="s_k3" descr="Editable line; source id s_k3"/>
           <p:cNvCxnSpPr/>
           <p:nvPr/>
         </p:nvCxnSpPr>
         <p:spPr>
-          <a:xfrm>
-            <a:off x="2889249" y="2817812"/>
-            <a:ext cx="873125" cy="0"/>
+          <a:xfrm flipH="1">
+            <a:off x="4476749" y="3563937"/>
+            <a:ext cx="587375" cy="0"/>
           </a:xfrm>
           <a:prstGeom prst="line">
             <a:avLst/>
           </a:prstGeom>
-          <a:ln w="39687">
+          <a:ln w="23812">
             <a:solidFill>
               <a:srgbClr val="1F6F78"/>
             </a:solidFill>
@@ -4574,14 +4673,14 @@
       </p:cxnSp>
       <p:sp>
         <p:nvSpPr>
-          <p:cNvPr id="21" name="br2b" descr="Editable line; source id br2b"/>
+          <p:cNvPr id="22" name="s_k3b" descr="Editable line; source id s_k3b"/>
           <p:cNvSpPr/>
           <p:nvPr/>
         </p:nvSpPr>
         <p:spPr>
           <a:xfrm>
-            <a:off x="4778375" y="2758281"/>
-            <a:ext cx="1349375" cy="119062"/>
+            <a:off x="2928937" y="3516312"/>
+            <a:ext cx="595312" cy="95250"/>
           </a:xfrm>
           <a:custGeom>
             <a:avLst/>
@@ -4590,27 +4689,27 @@
             <a:cxnLst/>
             <a:rect l="l" t="t" r="r" b="b"/>
             <a:pathLst>
-              <a:path w="170000" h="15000">
+              <a:path w="75000" h="12000">
                 <a:moveTo>
-                  <a:pt x="0" y="5000"/>
+                  <a:pt x="75000" y="7500"/>
                 </a:moveTo>
                 <a:lnTo>
-                  <a:pt x="152000" y="5000"/>
+                  <a:pt x="14000" y="7500"/>
                 </a:lnTo>
                 <a:lnTo>
-                  <a:pt x="152000" y="0"/>
+                  <a:pt x="14000" y="12000"/>
                 </a:lnTo>
                 <a:lnTo>
-                  <a:pt x="170000" y="7500"/>
+                  <a:pt x="0" y="6000"/>
                 </a:lnTo>
                 <a:lnTo>
-                  <a:pt x="152000" y="15000"/>
+                  <a:pt x="14000" y="0"/>
                 </a:lnTo>
                 <a:lnTo>
-                  <a:pt x="152000" y="10000"/>
+                  <a:pt x="14000" y="4500"/>
                 </a:lnTo>
                 <a:lnTo>
-                  <a:pt x="0" y="10000"/>
+                  <a:pt x="75000" y="4500"/>
                 </a:lnTo>
                 <a:close/>
               </a:path>
@@ -4648,14 +4747,14 @@
       </p:sp>
       <p:sp>
         <p:nvSpPr>
-          <p:cNvPr id="22" name="pill2" descr="Editable shape; source id pill2"/>
+          <p:cNvPr id="23" name="s_k3_p" descr="Editable shape; source id s_k3_p"/>
           <p:cNvSpPr/>
           <p:nvPr/>
         </p:nvSpPr>
         <p:spPr>
           <a:xfrm>
-            <a:off x="3778249" y="2643187"/>
-            <a:ext cx="984249" cy="349249"/>
+            <a:off x="3555999" y="3365499"/>
+            <a:ext cx="888999" cy="396874"/>
           </a:xfrm>
           <a:prstGeom prst="roundRect">
             <a:avLst>
@@ -4665,7 +4764,7 @@
           <a:solidFill>
             <a:srgbClr val="FFFFFF"/>
           </a:solidFill>
-          <a:ln w="19843">
+          <a:ln w="15874">
             <a:solidFill>
               <a:srgbClr val="1F6F78"/>
             </a:solidFill>
@@ -4696,14 +4795,14 @@
       </p:sp>
       <p:sp>
         <p:nvSpPr>
-          <p:cNvPr id="23" name="pill2_t" descr="Editable text; source id pill2_t"/>
+          <p:cNvPr id="24" name="s_k3_pt" descr="Editable text; source id s_k3_pt"/>
           <p:cNvSpPr txBox="1"/>
           <p:nvPr/>
         </p:nvSpPr>
         <p:spPr>
           <a:xfrm>
-            <a:off x="3825874" y="2666999"/>
-            <a:ext cx="888999" cy="301624"/>
+            <a:off x="3603624" y="3389312"/>
+            <a:ext cx="793749" cy="349249"/>
           </a:xfrm>
           <a:prstGeom prst="rect">
             <a:avLst/>
@@ -4745,33 +4844,33 @@
                 <a:ea typeface="Noto Sans CJK SC"/>
                 <a:cs typeface="Noto Sans CJK SC"/>
               </a:rPr>
-              <a:t>变量</a:t>
-            </a:r>
-          </a:p>
-        </p:txBody>
-      </p:sp>
-      <p:sp>
-        <p:nvSpPr>
-          <p:cNvPr id="24" name="card2" descr="Editable shape; source id card2"/>
+              <a:t>近邻</a:t>
+            </a:r>
+          </a:p>
+        </p:txBody>
+      </p:sp>
+      <p:sp>
+        <p:nvSpPr>
+          <p:cNvPr id="25" name="k4" descr="Editable shape; source id k4"/>
           <p:cNvSpPr/>
           <p:nvPr/>
         </p:nvSpPr>
         <p:spPr>
           <a:xfrm>
-            <a:off x="6143624" y="2333624"/>
-            <a:ext cx="5532437" cy="976312"/>
+            <a:off x="9270999" y="2952749"/>
+            <a:ext cx="2714624" cy="1293812"/>
           </a:xfrm>
           <a:prstGeom prst="roundRect">
             <a:avLst>
-              <a:gd name="adj" fmla="val 11382"/>
+              <a:gd name="adj" fmla="val 8588"/>
             </a:avLst>
           </a:prstGeom>
           <a:solidFill>
-            <a:srgbClr val="F3F5F6"/>
+            <a:srgbClr val="FFFFFF"/>
           </a:solidFill>
           <a:ln w="19843">
             <a:solidFill>
-              <a:srgbClr val="C9CFD4"/>
+              <a:srgbClr val="4A5158"/>
             </a:solidFill>
           </a:ln>
           <a:effectLst/>
@@ -4800,14 +4899,14 @@
       </p:sp>
       <p:sp>
         <p:nvSpPr>
-          <p:cNvPr id="25" name="card2_t" descr="Editable text; source id card2_t"/>
+          <p:cNvPr id="26" name="k4_t" descr="Editable text; source id k4_t"/>
           <p:cNvSpPr txBox="1"/>
           <p:nvPr/>
         </p:nvSpPr>
         <p:spPr>
           <a:xfrm>
-            <a:off x="6429374" y="2444749"/>
-            <a:ext cx="5079999" cy="460374"/>
+            <a:off x="9366249" y="3159124"/>
+            <a:ext cx="2524124" cy="460374"/>
           </a:xfrm>
           <a:prstGeom prst="rect">
             <a:avLst/>
@@ -4821,9 +4920,9 @@
           </a:bodyPr>
           <a:lstStyle/>
           <a:p>
-            <a:pPr algn="l" fontAlgn="base">
+            <a:pPr algn="ctr" fontAlgn="base">
               <a:lnSpc>
-                <a:spcPts val="3281"/>
+                <a:spcPts val="3593"/>
               </a:lnSpc>
               <a:spcBef>
                 <a:spcPts val="0"/>
@@ -4831,9 +4930,9 @@
               <a:spcAft>
                 <a:spcPts val="0"/>
               </a:spcAft>
-              <a:defRPr sz="2249" b="1" i="0" lang="zh-CN" dirty="0">
-                <a:solidFill>
-                  <a:srgbClr val="2B2F33"/>
+              <a:defRPr sz="2478" b="1" i="0" lang="zh-CN" dirty="0">
+                <a:solidFill>
+                  <a:srgbClr val="1F2326"/>
                 </a:solidFill>
                 <a:latin typeface="Noto Sans CJK SC"/>
                 <a:ea typeface="Noto Sans CJK SC"/>
@@ -4841,29 +4940,29 @@
               </a:defRPr>
             </a:pPr>
             <a:r>
-              <a:rPr sz="2249" b="1" i="0" lang="zh-CN" dirty="0">
-                <a:solidFill>
-                  <a:srgbClr val="2B2F33"/>
+              <a:rPr sz="2478" b="1" i="0" lang="zh-CN" dirty="0">
+                <a:solidFill>
+                  <a:srgbClr val="1F2326"/>
                 </a:solidFill>
                 <a:latin typeface="Noto Sans CJK SC"/>
                 <a:ea typeface="Noto Sans CJK SC"/>
                 <a:cs typeface="Noto Sans CJK SC"/>
               </a:rPr>
-              <a:t>组成与热处理</a:t>
-            </a:r>
-          </a:p>
-        </p:txBody>
-      </p:sp>
-      <p:sp>
-        <p:nvSpPr>
-          <p:cNvPr id="26" name="card2_s" descr="Editable text; source id card2_s"/>
+              <a:t>证据边界</a:t>
+            </a:r>
+          </a:p>
+        </p:txBody>
+      </p:sp>
+      <p:sp>
+        <p:nvSpPr>
+          <p:cNvPr id="27" name="k4_s" descr="Editable text; source id k4_s"/>
           <p:cNvSpPr txBox="1"/>
           <p:nvPr/>
         </p:nvSpPr>
         <p:spPr>
           <a:xfrm>
-            <a:off x="6429374" y="2905124"/>
-            <a:ext cx="5079999" cy="317499"/>
+            <a:off x="9366249" y="3698874"/>
+            <a:ext cx="2524124" cy="333374"/>
           </a:xfrm>
           <a:prstGeom prst="rect">
             <a:avLst/>
@@ -4877,7 +4976,7 @@
           </a:bodyPr>
           <a:lstStyle/>
           <a:p>
-            <a:pPr algn="l" fontAlgn="base">
+            <a:pPr algn="ctr" fontAlgn="base">
               <a:lnSpc>
                 <a:spcPts val="2468"/>
               </a:lnSpc>
@@ -4889,53 +4988,86 @@
               </a:spcAft>
               <a:defRPr sz="1687" b="0" i="0" lang="zh-CN" dirty="0">
                 <a:solidFill>
-                  <a:srgbClr val="4A5158"/>
-                </a:solidFill>
-                <a:latin typeface="DejaVu Sans"/>
-                <a:ea typeface="DejaVu Sans"/>
-                <a:cs typeface="DejaVu Sans"/>
+                  <a:srgbClr val="3A4046"/>
+                </a:solidFill>
+                <a:latin typeface="Noto Sans CJK SC"/>
+                <a:ea typeface="Noto Sans CJK SC"/>
+                <a:cs typeface="Noto Sans CJK SC"/>
               </a:defRPr>
             </a:pPr>
             <a:r>
               <a:rPr sz="1687" b="0" i="0" lang="zh-CN" dirty="0">
                 <a:solidFill>
-                  <a:srgbClr val="4A5158"/>
+                  <a:srgbClr val="3A4046"/>
+                </a:solidFill>
+                <a:latin typeface="Noto Sans CJK SC"/>
+                <a:ea typeface="Noto Sans CJK SC"/>
+                <a:cs typeface="Noto Sans CJK SC"/>
+              </a:rPr>
+              <a:t>直接</a:t>
+            </a:r>
+            <a:r>
+              <a:rPr sz="1687" b="0" i="0" lang="zh-CN" dirty="0">
+                <a:solidFill>
+                  <a:srgbClr val="3A4046"/>
                 </a:solidFill>
                 <a:latin typeface="DejaVu Sans"/>
                 <a:ea typeface="DejaVu Sans"/>
                 <a:cs typeface="DejaVu Sans"/>
               </a:rPr>
-              <a:t>Ba/Sr · Zn </a:t>
+              <a:t> / </a:t>
             </a:r>
             <a:r>
               <a:rPr sz="1687" b="0" i="0" lang="zh-CN" dirty="0">
                 <a:solidFill>
-                  <a:srgbClr val="4A5158"/>
+                  <a:srgbClr val="3A4046"/>
                 </a:solidFill>
                 <a:latin typeface="Noto Sans CJK SC"/>
                 <a:ea typeface="Noto Sans CJK SC"/>
                 <a:cs typeface="Noto Sans CJK SC"/>
               </a:rPr>
-              <a:t>位</a:t>
+              <a:t>近邻</a:t>
+            </a:r>
+            <a:r>
+              <a:rPr sz="1687" b="0" i="0" lang="zh-CN" dirty="0">
+                <a:solidFill>
+                  <a:srgbClr val="3A4046"/>
+                </a:solidFill>
+                <a:latin typeface="DejaVu Sans"/>
+                <a:ea typeface="DejaVu Sans"/>
+                <a:cs typeface="DejaVu Sans"/>
+              </a:rPr>
+              <a:t> / </a:t>
+            </a:r>
+            <a:r>
+              <a:rPr sz="1687" b="0" i="0" lang="zh-CN" dirty="0">
+                <a:solidFill>
+                  <a:srgbClr val="3A4046"/>
+                </a:solidFill>
+                <a:latin typeface="Noto Sans CJK SC"/>
+                <a:ea typeface="Noto Sans CJK SC"/>
+                <a:cs typeface="Noto Sans CJK SC"/>
+              </a:rPr>
+              <a:t>推断</a:t>
             </a:r>
           </a:p>
         </p:txBody>
       </p:sp>
       <p:cxnSp>
         <p:nvCxnSpPr>
-          <p:cNvPr id="27" name="br3" descr="Editable line; source id br3"/>
+          <p:cNvPr id="28" name="s_k4" descr="Editable line; source id s_k4"/>
           <p:cNvCxnSpPr/>
           <p:nvPr/>
         </p:nvCxnSpPr>
         <p:spPr>
           <a:xfrm>
-            <a:off x="2889249" y="3889374"/>
-            <a:ext cx="873125" cy="0"/>
+            <a:off x="7127874" y="3563937"/>
+            <a:ext cx="587375" cy="0"/>
           </a:xfrm>
           <a:prstGeom prst="line">
             <a:avLst/>
           </a:prstGeom>
-          <a:ln w="39687">
+          <a:ln w="23812">
             <a:solidFill>
               <a:srgbClr val="1F6F78"/>
             </a:solidFill>
@@ -4959,14 +5091,14 @@
       </p:cxnSp>
       <p:sp>
         <p:nvSpPr>
-          <p:cNvPr id="28" name="br3b" descr="Editable line; source id br3b"/>
+          <p:cNvPr id="29" name="s_k4b" descr="Editable line; source id s_k4b"/>
           <p:cNvSpPr/>
           <p:nvPr/>
         </p:nvSpPr>
         <p:spPr>
           <a:xfrm>
-            <a:off x="4778375" y="3829844"/>
-            <a:ext cx="1349375" cy="119062"/>
+            <a:off x="8667750" y="3516312"/>
+            <a:ext cx="587375" cy="95250"/>
           </a:xfrm>
           <a:custGeom>
             <a:avLst/>
@@ -4975,27 +5107,27 @@
             <a:cxnLst/>
             <a:rect l="l" t="t" r="r" b="b"/>
             <a:pathLst>
-              <a:path w="170000" h="15000">
+              <a:path w="74000" h="12000">
                 <a:moveTo>
-                  <a:pt x="0" y="5000"/>
+                  <a:pt x="0" y="4500"/>
                 </a:moveTo>
                 <a:lnTo>
-                  <a:pt x="152000" y="5000"/>
+                  <a:pt x="60000" y="4500"/>
                 </a:lnTo>
                 <a:lnTo>
-                  <a:pt x="152000" y="0"/>
+                  <a:pt x="60000" y="0"/>
                 </a:lnTo>
                 <a:lnTo>
-                  <a:pt x="170000" y="7500"/>
+                  <a:pt x="74000" y="6000"/>
                 </a:lnTo>
                 <a:lnTo>
-                  <a:pt x="152000" y="15000"/>
+                  <a:pt x="60000" y="12000"/>
                 </a:lnTo>
                 <a:lnTo>
-                  <a:pt x="152000" y="10000"/>
+                  <a:pt x="60000" y="7500"/>
                 </a:lnTo>
                 <a:lnTo>
-                  <a:pt x="0" y="10000"/>
+                  <a:pt x="0" y="7500"/>
                 </a:lnTo>
                 <a:close/>
               </a:path>
@@ -5033,14 +5165,14 @@
       </p:sp>
       <p:sp>
         <p:nvSpPr>
-          <p:cNvPr id="29" name="pill3" descr="Editable shape; source id pill3"/>
+          <p:cNvPr id="30" name="s_k4_p" descr="Editable shape; source id s_k4_p"/>
           <p:cNvSpPr/>
           <p:nvPr/>
         </p:nvSpPr>
         <p:spPr>
           <a:xfrm>
-            <a:off x="3778249" y="3714749"/>
-            <a:ext cx="984249" cy="349249"/>
+            <a:off x="7746999" y="3365499"/>
+            <a:ext cx="888999" cy="396874"/>
           </a:xfrm>
           <a:prstGeom prst="roundRect">
             <a:avLst>
@@ -5050,7 +5182,7 @@
           <a:solidFill>
             <a:srgbClr val="FFFFFF"/>
           </a:solidFill>
-          <a:ln w="19843">
+          <a:ln w="15874">
             <a:solidFill>
               <a:srgbClr val="1F6F78"/>
             </a:solidFill>
@@ -5081,14 +5213,14 @@
       </p:sp>
       <p:sp>
         <p:nvSpPr>
-          <p:cNvPr id="30" name="pill3_t" descr="Editable text; source id pill3_t"/>
+          <p:cNvPr id="31" name="s_k4_pt" descr="Editable text; source id s_k4_pt"/>
           <p:cNvSpPr txBox="1"/>
           <p:nvPr/>
         </p:nvSpPr>
         <p:spPr>
           <a:xfrm>
-            <a:off x="3825874" y="3738562"/>
-            <a:ext cx="888999" cy="301624"/>
+            <a:off x="7794624" y="3389312"/>
+            <a:ext cx="793749" cy="349249"/>
           </a:xfrm>
           <a:prstGeom prst="rect">
             <a:avLst/>
@@ -5130,33 +5262,33 @@
                 <a:ea typeface="Noto Sans CJK SC"/>
                 <a:cs typeface="Noto Sans CJK SC"/>
               </a:rPr>
-              <a:t>晶化</a:t>
-            </a:r>
-          </a:p>
-        </p:txBody>
-      </p:sp>
-      <p:sp>
-        <p:nvSpPr>
-          <p:cNvPr id="31" name="card3" descr="Editable shape; source id card3"/>
+              <a:t>判读</a:t>
+            </a:r>
+          </a:p>
+        </p:txBody>
+      </p:sp>
+      <p:sp>
+        <p:nvSpPr>
+          <p:cNvPr id="32" name="k5" descr="Editable shape; source id k5"/>
           <p:cNvSpPr/>
           <p:nvPr/>
         </p:nvSpPr>
         <p:spPr>
           <a:xfrm>
-            <a:off x="6143624" y="3405187"/>
-            <a:ext cx="5532437" cy="976312"/>
+            <a:off x="1603374" y="5468937"/>
+            <a:ext cx="2984499" cy="1309687"/>
           </a:xfrm>
           <a:prstGeom prst="roundRect">
             <a:avLst>
-              <a:gd name="adj" fmla="val 11382"/>
+              <a:gd name="adj" fmla="val 8484"/>
             </a:avLst>
           </a:prstGeom>
           <a:solidFill>
-            <a:srgbClr val="F3F5F6"/>
+            <a:srgbClr val="FFFFFF"/>
           </a:solidFill>
           <a:ln w="19843">
             <a:solidFill>
-              <a:srgbClr val="C9CFD4"/>
+              <a:srgbClr val="4A5158"/>
             </a:solidFill>
           </a:ln>
           <a:effectLst/>
@@ -5185,14 +5317,14 @@
       </p:sp>
       <p:sp>
         <p:nvSpPr>
-          <p:cNvPr id="32" name="card3_t" descr="Editable text; source id card3_t"/>
+          <p:cNvPr id="33" name="k5_t" descr="Editable text; source id k5_t"/>
           <p:cNvSpPr txBox="1"/>
           <p:nvPr/>
         </p:nvSpPr>
         <p:spPr>
           <a:xfrm>
-            <a:off x="6429374" y="3516312"/>
-            <a:ext cx="5079999" cy="460374"/>
+            <a:off x="1698624" y="5675312"/>
+            <a:ext cx="2793999" cy="460374"/>
           </a:xfrm>
           <a:prstGeom prst="rect">
             <a:avLst/>
@@ -5206,9 +5338,9 @@
           </a:bodyPr>
           <a:lstStyle/>
           <a:p>
-            <a:pPr algn="l" fontAlgn="base">
+            <a:pPr algn="ctr" fontAlgn="base">
               <a:lnSpc>
-                <a:spcPts val="3281"/>
+                <a:spcPts val="3593"/>
               </a:lnSpc>
               <a:spcBef>
                 <a:spcPts val="0"/>
@@ -5216,9 +5348,9 @@
               <a:spcAft>
                 <a:spcPts val="0"/>
               </a:spcAft>
-              <a:defRPr sz="2249" b="1" i="0" lang="zh-CN" dirty="0">
-                <a:solidFill>
-                  <a:srgbClr val="2B2F33"/>
+              <a:defRPr sz="2478" b="1" i="0" lang="zh-CN" dirty="0">
+                <a:solidFill>
+                  <a:srgbClr val="1F2326"/>
                 </a:solidFill>
                 <a:latin typeface="Noto Sans CJK SC"/>
                 <a:ea typeface="Noto Sans CJK SC"/>
@@ -5226,29 +5358,29 @@
               </a:defRPr>
             </a:pPr>
             <a:r>
-              <a:rPr sz="2249" b="1" i="0" lang="zh-CN" dirty="0">
-                <a:solidFill>
-                  <a:srgbClr val="2B2F33"/>
+              <a:rPr sz="2478" b="1" i="0" lang="zh-CN" dirty="0">
+                <a:solidFill>
+                  <a:srgbClr val="1F2326"/>
                 </a:solidFill>
                 <a:latin typeface="Noto Sans CJK SC"/>
                 <a:ea typeface="Noto Sans CJK SC"/>
                 <a:cs typeface="Noto Sans CJK SC"/>
               </a:rPr>
-              <a:t>玻璃析晶</a:t>
-            </a:r>
-          </a:p>
-        </p:txBody>
-      </p:sp>
-      <p:sp>
-        <p:nvSpPr>
-          <p:cNvPr id="33" name="card3_s" descr="Editable text; source id card3_s"/>
+              <a:t>组成与热处理</a:t>
+            </a:r>
+          </a:p>
+        </p:txBody>
+      </p:sp>
+      <p:sp>
+        <p:nvSpPr>
+          <p:cNvPr id="34" name="k5_s" descr="Editable text; source id k5_s"/>
           <p:cNvSpPr txBox="1"/>
           <p:nvPr/>
         </p:nvSpPr>
         <p:spPr>
           <a:xfrm>
-            <a:off x="6429374" y="3976687"/>
-            <a:ext cx="5079999" cy="317499"/>
+            <a:off x="1698624" y="6215062"/>
+            <a:ext cx="2793999" cy="333374"/>
           </a:xfrm>
           <a:prstGeom prst="rect">
             <a:avLst/>
@@ -5262,7 +5394,7 @@
           </a:bodyPr>
           <a:lstStyle/>
           <a:p>
-            <a:pPr algn="l" fontAlgn="base">
+            <a:pPr algn="ctr" fontAlgn="base">
               <a:lnSpc>
                 <a:spcPts val="2468"/>
               </a:lnSpc>
@@ -5274,64 +5406,53 @@
               </a:spcAft>
               <a:defRPr sz="1687" b="0" i="0" lang="zh-CN" dirty="0">
                 <a:solidFill>
-                  <a:srgbClr val="4A5158"/>
-                </a:solidFill>
-                <a:latin typeface="Noto Sans CJK SC"/>
-                <a:ea typeface="Noto Sans CJK SC"/>
-                <a:cs typeface="Noto Sans CJK SC"/>
+                  <a:srgbClr val="3A4046"/>
+                </a:solidFill>
+                <a:latin typeface="DejaVu Sans"/>
+                <a:ea typeface="DejaVu Sans"/>
+                <a:cs typeface="DejaVu Sans"/>
               </a:defRPr>
             </a:pPr>
             <a:r>
               <a:rPr sz="1687" b="0" i="0" lang="zh-CN" dirty="0">
                 <a:solidFill>
-                  <a:srgbClr val="4A5158"/>
+                  <a:srgbClr val="3A4046"/>
+                </a:solidFill>
+                <a:latin typeface="DejaVu Sans"/>
+                <a:ea typeface="DejaVu Sans"/>
+                <a:cs typeface="DejaVu Sans"/>
+              </a:rPr>
+              <a:t>Ba/Sr · Zn </a:t>
+            </a:r>
+            <a:r>
+              <a:rPr sz="1687" b="0" i="0" lang="zh-CN" dirty="0">
+                <a:solidFill>
+                  <a:srgbClr val="3A4046"/>
                 </a:solidFill>
                 <a:latin typeface="Noto Sans CJK SC"/>
                 <a:ea typeface="Noto Sans CJK SC"/>
                 <a:cs typeface="Noto Sans CJK SC"/>
               </a:rPr>
-              <a:t>成核</a:t>
-            </a:r>
-            <a:r>
-              <a:rPr sz="1687" b="0" i="0" lang="zh-CN" dirty="0">
-                <a:solidFill>
-                  <a:srgbClr val="4A5158"/>
-                </a:solidFill>
-                <a:latin typeface="DejaVu Sans"/>
-                <a:ea typeface="DejaVu Sans"/>
-                <a:cs typeface="DejaVu Sans"/>
-              </a:rPr>
-              <a:t> · </a:t>
-            </a:r>
-            <a:r>
-              <a:rPr sz="1687" b="0" i="0" lang="zh-CN" dirty="0">
-                <a:solidFill>
-                  <a:srgbClr val="4A5158"/>
-                </a:solidFill>
-                <a:latin typeface="Noto Sans CJK SC"/>
-                <a:ea typeface="Noto Sans CJK SC"/>
-                <a:cs typeface="Noto Sans CJK SC"/>
-              </a:rPr>
-              <a:t>生长</a:t>
+              <a:t>位</a:t>
             </a:r>
           </a:p>
         </p:txBody>
       </p:sp>
       <p:cxnSp>
         <p:nvCxnSpPr>
-          <p:cNvPr id="34" name="br4" descr="Editable line; source id br4"/>
+          <p:cNvPr id="35" name="s_k5" descr="Editable line; source id s_k5"/>
           <p:cNvCxnSpPr/>
           <p:nvPr/>
         </p:nvCxnSpPr>
         <p:spPr>
-          <a:xfrm>
-            <a:off x="2889249" y="4968874"/>
-            <a:ext cx="873125" cy="0"/>
+          <a:xfrm flipH="1">
+            <a:off x="5016499" y="4246562"/>
+            <a:ext cx="309563" cy="277812"/>
           </a:xfrm>
           <a:prstGeom prst="line">
             <a:avLst/>
           </a:prstGeom>
-          <a:ln w="39687">
+          <a:ln w="23812">
             <a:solidFill>
               <a:srgbClr val="1F6F78"/>
             </a:solidFill>
@@ -5355,14 +5476,14 @@
       </p:cxnSp>
       <p:sp>
         <p:nvSpPr>
-          <p:cNvPr id="35" name="br4b" descr="Editable line; source id br4b"/>
+          <p:cNvPr id="36" name="s_k5b" descr="Editable line; source id s_k5b"/>
           <p:cNvSpPr/>
           <p:nvPr/>
         </p:nvSpPr>
         <p:spPr>
           <a:xfrm>
-            <a:off x="4778375" y="4909344"/>
-            <a:ext cx="1349375" cy="119062"/>
+            <a:off x="3968750" y="5174210"/>
+            <a:ext cx="317389" cy="278852"/>
           </a:xfrm>
           <a:custGeom>
             <a:avLst/>
@@ -5371,27 +5492,27 @@
             <a:cxnLst/>
             <a:rect l="l" t="t" r="r" b="b"/>
             <a:pathLst>
-              <a:path w="170000" h="15000">
+              <a:path w="39986" h="35131">
                 <a:moveTo>
-                  <a:pt x="0" y="5000"/>
+                  <a:pt x="39986" y="2262"/>
                 </a:moveTo>
                 <a:lnTo>
-                  <a:pt x="152000" y="5000"/>
+                  <a:pt x="11539" y="27062"/>
                 </a:lnTo>
                 <a:lnTo>
-                  <a:pt x="152000" y="0"/>
+                  <a:pt x="14496" y="30454"/>
                 </a:lnTo>
                 <a:lnTo>
-                  <a:pt x="170000" y="7500"/>
+                  <a:pt x="0" y="35131"/>
                 </a:lnTo>
                 <a:lnTo>
-                  <a:pt x="152000" y="15000"/>
+                  <a:pt x="6610" y="21408"/>
                 </a:lnTo>
                 <a:lnTo>
-                  <a:pt x="152000" y="10000"/>
+                  <a:pt x="9567" y="24800"/>
                 </a:lnTo>
                 <a:lnTo>
-                  <a:pt x="0" y="10000"/>
+                  <a:pt x="38014" y="0"/>
                 </a:lnTo>
                 <a:close/>
               </a:path>
@@ -5429,14 +5550,14 @@
       </p:sp>
       <p:sp>
         <p:nvSpPr>
-          <p:cNvPr id="36" name="pill4" descr="Editable shape; source id pill4"/>
+          <p:cNvPr id="37" name="s_k5_p" descr="Editable shape; source id s_k5_p"/>
           <p:cNvSpPr/>
           <p:nvPr/>
         </p:nvSpPr>
         <p:spPr>
           <a:xfrm>
-            <a:off x="3778249" y="4794249"/>
-            <a:ext cx="984249" cy="349249"/>
+            <a:off x="4198937" y="4651374"/>
+            <a:ext cx="888999" cy="396874"/>
           </a:xfrm>
           <a:prstGeom prst="roundRect">
             <a:avLst>
@@ -5446,7 +5567,7 @@
           <a:solidFill>
             <a:srgbClr val="FFFFFF"/>
           </a:solidFill>
-          <a:ln w="19843">
+          <a:ln w="15874">
             <a:solidFill>
               <a:srgbClr val="1F6F78"/>
             </a:solidFill>
@@ -5477,14 +5598,14 @@
       </p:sp>
       <p:sp>
         <p:nvSpPr>
-          <p:cNvPr id="37" name="pill4_t" descr="Editable text; source id pill4_t"/>
+          <p:cNvPr id="38" name="s_k5_pt" descr="Editable text; source id s_k5_pt"/>
           <p:cNvSpPr txBox="1"/>
           <p:nvPr/>
         </p:nvSpPr>
         <p:spPr>
           <a:xfrm>
-            <a:off x="3825874" y="4818062"/>
-            <a:ext cx="888999" cy="301624"/>
+            <a:off x="4246562" y="4675187"/>
+            <a:ext cx="793749" cy="349249"/>
           </a:xfrm>
           <a:prstGeom prst="rect">
             <a:avLst/>
@@ -5526,33 +5647,33 @@
                 <a:ea typeface="Noto Sans CJK SC"/>
                 <a:cs typeface="Noto Sans CJK SC"/>
               </a:rPr>
-              <a:t>近邻</a:t>
-            </a:r>
-          </a:p>
-        </p:txBody>
-      </p:sp>
-      <p:sp>
-        <p:nvSpPr>
-          <p:cNvPr id="38" name="card4" descr="Editable shape; source id card4"/>
+              <a:t>变量</a:t>
+            </a:r>
+          </a:p>
+        </p:txBody>
+      </p:sp>
+      <p:sp>
+        <p:nvSpPr>
+          <p:cNvPr id="39" name="k6" descr="Editable shape; source id k6"/>
           <p:cNvSpPr/>
           <p:nvPr/>
         </p:nvSpPr>
         <p:spPr>
           <a:xfrm>
-            <a:off x="6143624" y="4484687"/>
-            <a:ext cx="5532437" cy="976312"/>
+            <a:off x="7604124" y="5468937"/>
+            <a:ext cx="2984499" cy="1309687"/>
           </a:xfrm>
           <a:prstGeom prst="roundRect">
             <a:avLst>
-              <a:gd name="adj" fmla="val 11382"/>
+              <a:gd name="adj" fmla="val 8484"/>
             </a:avLst>
           </a:prstGeom>
           <a:solidFill>
-            <a:srgbClr val="F3F5F6"/>
+            <a:srgbClr val="FFFFFF"/>
           </a:solidFill>
           <a:ln w="19843">
             <a:solidFill>
-              <a:srgbClr val="C9CFD4"/>
+              <a:srgbClr val="4A5158"/>
             </a:solidFill>
           </a:ln>
           <a:effectLst/>
@@ -5581,14 +5702,14 @@
       </p:sp>
       <p:sp>
         <p:nvSpPr>
-          <p:cNvPr id="39" name="card4_t" descr="Editable text; source id card4_t"/>
+          <p:cNvPr id="40" name="k6_t" descr="Editable text; source id k6_t"/>
           <p:cNvSpPr txBox="1"/>
           <p:nvPr/>
         </p:nvSpPr>
         <p:spPr>
           <a:xfrm>
-            <a:off x="6429374" y="4595812"/>
-            <a:ext cx="5079999" cy="460374"/>
+            <a:off x="7699374" y="5675312"/>
+            <a:ext cx="2793999" cy="460374"/>
           </a:xfrm>
           <a:prstGeom prst="rect">
             <a:avLst/>
@@ -5602,9 +5723,9 @@
           </a:bodyPr>
           <a:lstStyle/>
           <a:p>
-            <a:pPr algn="l" fontAlgn="base">
+            <a:pPr algn="ctr" fontAlgn="base">
               <a:lnSpc>
-                <a:spcPts val="3281"/>
+                <a:spcPts val="3593"/>
               </a:lnSpc>
               <a:spcBef>
                 <a:spcPts val="0"/>
@@ -5612,9 +5733,9 @@
               <a:spcAft>
                 <a:spcPts val="0"/>
               </a:spcAft>
-              <a:defRPr sz="2249" b="1" i="0" lang="zh-CN" dirty="0">
-                <a:solidFill>
-                  <a:srgbClr val="2B2F33"/>
+              <a:defRPr sz="2478" b="1" i="0" lang="zh-CN" dirty="0">
+                <a:solidFill>
+                  <a:srgbClr val="1F2326"/>
                 </a:solidFill>
                 <a:latin typeface="Noto Sans CJK SC"/>
                 <a:ea typeface="Noto Sans CJK SC"/>
@@ -5622,29 +5743,29 @@
               </a:defRPr>
             </a:pPr>
             <a:r>
-              <a:rPr sz="2249" b="1" i="0" lang="zh-CN" dirty="0">
-                <a:solidFill>
-                  <a:srgbClr val="2B2F33"/>
+              <a:rPr sz="2478" b="1" i="0" lang="zh-CN" dirty="0">
+                <a:solidFill>
+                  <a:srgbClr val="1F2326"/>
                 </a:solidFill>
                 <a:latin typeface="Noto Sans CJK SC"/>
                 <a:ea typeface="Noto Sans CJK SC"/>
                 <a:cs typeface="Noto Sans CJK SC"/>
               </a:rPr>
-              <a:t>近邻体系</a:t>
-            </a:r>
-          </a:p>
-        </p:txBody>
-      </p:sp>
-      <p:sp>
-        <p:nvSpPr>
-          <p:cNvPr id="40" name="card4_s" descr="Editable text; source id card4_s"/>
+              <a:t>玻璃析晶</a:t>
+            </a:r>
+          </a:p>
+        </p:txBody>
+      </p:sp>
+      <p:sp>
+        <p:nvSpPr>
+          <p:cNvPr id="41" name="k6_s" descr="Editable text; source id k6_s"/>
           <p:cNvSpPr txBox="1"/>
           <p:nvPr/>
         </p:nvSpPr>
         <p:spPr>
           <a:xfrm>
-            <a:off x="6429374" y="5056187"/>
-            <a:ext cx="5079999" cy="317499"/>
+            <a:off x="7699374" y="6215062"/>
+            <a:ext cx="2793999" cy="333374"/>
           </a:xfrm>
           <a:prstGeom prst="rect">
             <a:avLst/>
@@ -5658,7 +5779,7 @@
           </a:bodyPr>
           <a:lstStyle/>
           <a:p>
-            <a:pPr algn="l" fontAlgn="base">
+            <a:pPr algn="ctr" fontAlgn="base">
               <a:lnSpc>
                 <a:spcPts val="2468"/>
               </a:lnSpc>
@@ -5670,53 +5791,64 @@
               </a:spcAft>
               <a:defRPr sz="1687" b="0" i="0" lang="zh-CN" dirty="0">
                 <a:solidFill>
-                  <a:srgbClr val="4A5158"/>
-                </a:solidFill>
-                <a:latin typeface="DejaVu Sans"/>
-                <a:ea typeface="DejaVu Sans"/>
-                <a:cs typeface="DejaVu Sans"/>
+                  <a:srgbClr val="3A4046"/>
+                </a:solidFill>
+                <a:latin typeface="Noto Sans CJK SC"/>
+                <a:ea typeface="Noto Sans CJK SC"/>
+                <a:cs typeface="Noto Sans CJK SC"/>
               </a:defRPr>
             </a:pPr>
             <a:r>
               <a:rPr sz="1687" b="0" i="0" lang="zh-CN" dirty="0">
                 <a:solidFill>
-                  <a:srgbClr val="4A5158"/>
+                  <a:srgbClr val="3A4046"/>
+                </a:solidFill>
+                <a:latin typeface="Noto Sans CJK SC"/>
+                <a:ea typeface="Noto Sans CJK SC"/>
+                <a:cs typeface="Noto Sans CJK SC"/>
+              </a:rPr>
+              <a:t>成核</a:t>
+            </a:r>
+            <a:r>
+              <a:rPr sz="1687" b="0" i="0" lang="zh-CN" dirty="0">
+                <a:solidFill>
+                  <a:srgbClr val="3A4046"/>
                 </a:solidFill>
                 <a:latin typeface="DejaVu Sans"/>
                 <a:ea typeface="DejaVu Sans"/>
                 <a:cs typeface="DejaVu Sans"/>
               </a:rPr>
-              <a:t>Ba2ZnSi2O7 </a:t>
+              <a:t> · </a:t>
             </a:r>
             <a:r>
               <a:rPr sz="1687" b="0" i="0" lang="zh-CN" dirty="0">
                 <a:solidFill>
-                  <a:srgbClr val="4A5158"/>
+                  <a:srgbClr val="3A4046"/>
                 </a:solidFill>
                 <a:latin typeface="Noto Sans CJK SC"/>
                 <a:ea typeface="Noto Sans CJK SC"/>
                 <a:cs typeface="Noto Sans CJK SC"/>
               </a:rPr>
-              <a:t>等</a:t>
+              <a:t>生长</a:t>
             </a:r>
           </a:p>
         </p:txBody>
       </p:sp>
       <p:cxnSp>
         <p:nvCxnSpPr>
-          <p:cNvPr id="41" name="br5" descr="Editable line; source id br5"/>
+          <p:cNvPr id="42" name="s_k6" descr="Editable line; source id s_k6"/>
           <p:cNvCxnSpPr/>
           <p:nvPr/>
         </p:nvCxnSpPr>
         <p:spPr>
           <a:xfrm>
-            <a:off x="2889249" y="6048374"/>
-            <a:ext cx="873125" cy="0"/>
+            <a:off x="6865937" y="4254499"/>
+            <a:ext cx="301625" cy="269875"/>
           </a:xfrm>
           <a:prstGeom prst="line">
             <a:avLst/>
           </a:prstGeom>
-          <a:ln w="39687">
+          <a:ln w="23812">
             <a:solidFill>
               <a:srgbClr val="1F6F78"/>
             </a:solidFill>
@@ -5740,14 +5872,14 @@
       </p:cxnSp>
       <p:sp>
         <p:nvSpPr>
-          <p:cNvPr id="42" name="br5b" descr="Editable line; source id br5b"/>
+          <p:cNvPr id="43" name="s_k6b" descr="Editable line; source id s_k6b"/>
           <p:cNvSpPr/>
           <p:nvPr/>
         </p:nvSpPr>
         <p:spPr>
           <a:xfrm>
-            <a:off x="4778375" y="5988844"/>
-            <a:ext cx="1349375" cy="119062"/>
+            <a:off x="7905750" y="5174313"/>
+            <a:ext cx="309562" cy="278749"/>
           </a:xfrm>
           <a:custGeom>
             <a:avLst/>
@@ -5756,27 +5888,27 @@
             <a:cxnLst/>
             <a:rect l="l" t="t" r="r" b="b"/>
             <a:pathLst>
-              <a:path w="170000" h="15000">
+              <a:path w="39000" h="35118">
                 <a:moveTo>
-                  <a:pt x="0" y="5000"/>
+                  <a:pt x="2000" y="0"/>
                 </a:moveTo>
                 <a:lnTo>
-                  <a:pt x="152000" y="5000"/>
+                  <a:pt x="29567" y="24665"/>
                 </a:lnTo>
                 <a:lnTo>
-                  <a:pt x="152000" y="0"/>
+                  <a:pt x="32567" y="21311"/>
                 </a:lnTo>
                 <a:lnTo>
-                  <a:pt x="170000" y="7500"/>
+                  <a:pt x="39000" y="35118"/>
                 </a:lnTo>
                 <a:lnTo>
-                  <a:pt x="152000" y="15000"/>
+                  <a:pt x="24566" y="30254"/>
                 </a:lnTo>
                 <a:lnTo>
-                  <a:pt x="152000" y="10000"/>
+                  <a:pt x="27566" y="26901"/>
                 </a:lnTo>
                 <a:lnTo>
-                  <a:pt x="0" y="10000"/>
+                  <a:pt x="0" y="2236"/>
                 </a:lnTo>
                 <a:close/>
               </a:path>
@@ -5814,14 +5946,14 @@
       </p:sp>
       <p:sp>
         <p:nvSpPr>
-          <p:cNvPr id="43" name="pill5" descr="Editable shape; source id pill5"/>
+          <p:cNvPr id="44" name="s_k6_p" descr="Editable shape; source id s_k6_p"/>
           <p:cNvSpPr/>
           <p:nvPr/>
         </p:nvSpPr>
         <p:spPr>
           <a:xfrm>
-            <a:off x="3778249" y="5873749"/>
-            <a:ext cx="984249" cy="349249"/>
+            <a:off x="7096124" y="4651374"/>
+            <a:ext cx="888999" cy="396874"/>
           </a:xfrm>
           <a:prstGeom prst="roundRect">
             <a:avLst>
@@ -5831,7 +5963,7 @@
           <a:solidFill>
             <a:srgbClr val="FFFFFF"/>
           </a:solidFill>
-          <a:ln w="19843">
+          <a:ln w="15874">
             <a:solidFill>
               <a:srgbClr val="1F6F78"/>
             </a:solidFill>
@@ -5862,14 +5994,14 @@
       </p:sp>
       <p:sp>
         <p:nvSpPr>
-          <p:cNvPr id="44" name="pill5_t" descr="Editable text; source id pill5_t"/>
+          <p:cNvPr id="45" name="s_k6_pt" descr="Editable text; source id s_k6_pt"/>
           <p:cNvSpPr txBox="1"/>
           <p:nvPr/>
         </p:nvSpPr>
         <p:spPr>
           <a:xfrm>
-            <a:off x="3825874" y="5897562"/>
-            <a:ext cx="888999" cy="301624"/>
+            <a:off x="7143749" y="4675187"/>
+            <a:ext cx="793749" cy="349249"/>
           </a:xfrm>
           <a:prstGeom prst="rect">
             <a:avLst/>
@@ -5911,34 +6043,37 @@
                 <a:ea typeface="Noto Sans CJK SC"/>
                 <a:cs typeface="Noto Sans CJK SC"/>
               </a:rPr>
-              <a:t>判读</a:t>
-            </a:r>
-          </a:p>
-        </p:txBody>
-      </p:sp>
-      <p:sp>
-        <p:nvSpPr>
-          <p:cNvPr id="45" name="card5" descr="Editable shape; source id card5"/>
+              <a:t>晶化</a:t>
+            </a:r>
+          </a:p>
+        </p:txBody>
+      </p:sp>
+      <p:sp>
+        <p:nvSpPr>
+          <p:cNvPr id="46" name="k7" descr="Editable shape; source id k7"/>
           <p:cNvSpPr/>
           <p:nvPr/>
         </p:nvSpPr>
         <p:spPr>
           <a:xfrm>
-            <a:off x="6143624" y="5564187"/>
-            <a:ext cx="5532437" cy="976312"/>
+            <a:off x="4714874" y="6429374"/>
+            <a:ext cx="2857499" cy="1349374"/>
           </a:xfrm>
           <a:prstGeom prst="roundRect">
             <a:avLst>
-              <a:gd name="adj" fmla="val 11382"/>
+              <a:gd name="adj" fmla="val 8235"/>
             </a:avLst>
           </a:prstGeom>
           <a:solidFill>
-            <a:srgbClr val="F3F5F6"/>
+            <a:srgbClr val="FFFFFF"/>
           </a:solidFill>
           <a:ln w="19843">
             <a:solidFill>
-              <a:srgbClr val="C9CFD4"/>
+              <a:srgbClr val="B8862B"/>
             </a:solidFill>
+            <a:custDash>
+              <a:ds d="640000" sp="400000"/>
+            </a:custDash>
           </a:ln>
           <a:effectLst/>
         </p:spPr>
@@ -5966,14 +6101,14 @@
       </p:sp>
       <p:sp>
         <p:nvSpPr>
-          <p:cNvPr id="46" name="card5_t" descr="Editable text; source id card5_t"/>
+          <p:cNvPr id="47" name="k7_t" descr="Editable text; source id k7_t"/>
           <p:cNvSpPr txBox="1"/>
           <p:nvPr/>
         </p:nvSpPr>
         <p:spPr>
           <a:xfrm>
-            <a:off x="6429374" y="5675312"/>
-            <a:ext cx="5079999" cy="460374"/>
+            <a:off x="4794249" y="6667499"/>
+            <a:ext cx="2698749" cy="396874"/>
           </a:xfrm>
           <a:prstGeom prst="rect">
             <a:avLst/>
@@ -5987,9 +6122,9 @@
           </a:bodyPr>
           <a:lstStyle/>
           <a:p>
-            <a:pPr algn="l" fontAlgn="base">
+            <a:pPr algn="ctr" fontAlgn="base">
               <a:lnSpc>
-                <a:spcPts val="3281"/>
+                <a:spcPts val="2046"/>
               </a:lnSpc>
               <a:spcBef>
                 <a:spcPts val="0"/>
@@ -5997,39 +6132,39 @@
               <a:spcAft>
                 <a:spcPts val="0"/>
               </a:spcAft>
-              <a:defRPr sz="2249" b="1" i="0" lang="zh-CN" dirty="0">
-                <a:solidFill>
-                  <a:srgbClr val="2B2F33"/>
-                </a:solidFill>
-                <a:latin typeface="Noto Sans CJK SC"/>
-                <a:ea typeface="Noto Sans CJK SC"/>
-                <a:cs typeface="Noto Sans CJK SC"/>
+              <a:defRPr sz="1749" b="1" i="0" lang="zh-CN" dirty="0">
+                <a:solidFill>
+                  <a:srgbClr val="1F2326"/>
+                </a:solidFill>
+                <a:latin typeface="DejaVu Sans"/>
+                <a:ea typeface="DejaVu Sans"/>
+                <a:cs typeface="DejaVu Sans"/>
               </a:defRPr>
             </a:pPr>
             <a:r>
-              <a:rPr sz="2249" b="1" i="0" lang="zh-CN" dirty="0">
-                <a:solidFill>
-                  <a:srgbClr val="2B2F33"/>
-                </a:solidFill>
-                <a:latin typeface="Noto Sans CJK SC"/>
-                <a:ea typeface="Noto Sans CJK SC"/>
-                <a:cs typeface="Noto Sans CJK SC"/>
+              <a:rPr sz="1749" b="1" i="0" lang="zh-CN" dirty="0">
+                <a:solidFill>
+                  <a:srgbClr val="1F2326"/>
+                </a:solidFill>
+                <a:latin typeface="DejaVu Sans"/>
+                <a:ea typeface="DejaVu Sans"/>
+                <a:cs typeface="DejaVu Sans"/>
               </a:rPr>
-              <a:t>证据边界</a:t>
-            </a:r>
-          </a:p>
-        </p:txBody>
-      </p:sp>
-      <p:sp>
-        <p:nvSpPr>
-          <p:cNvPr id="47" name="card5_s" descr="Editable text; source id card5_s"/>
+              <a:t>Ba5Y12Zn[O(SiO4)]8</a:t>
+            </a:r>
+          </a:p>
+        </p:txBody>
+      </p:sp>
+      <p:sp>
+        <p:nvSpPr>
+          <p:cNvPr id="48" name="k7_s" descr="Editable text; source id k7_s"/>
           <p:cNvSpPr txBox="1"/>
           <p:nvPr/>
         </p:nvSpPr>
         <p:spPr>
           <a:xfrm>
-            <a:off x="6429374" y="6135687"/>
-            <a:ext cx="5079999" cy="317499"/>
+            <a:off x="4794249" y="7175499"/>
+            <a:ext cx="2698749" cy="333374"/>
           </a:xfrm>
           <a:prstGeom prst="rect">
             <a:avLst/>
@@ -6043,7 +6178,7 @@
           </a:bodyPr>
           <a:lstStyle/>
           <a:p>
-            <a:pPr algn="l" fontAlgn="base">
+            <a:pPr algn="ctr" fontAlgn="base">
               <a:lnSpc>
                 <a:spcPts val="2468"/>
               </a:lnSpc>
@@ -6055,7 +6190,7 @@
               </a:spcAft>
               <a:defRPr sz="1687" b="0" i="0" lang="zh-CN" dirty="0">
                 <a:solidFill>
-                  <a:srgbClr val="4A5158"/>
+                  <a:srgbClr val="3A4046"/>
                 </a:solidFill>
                 <a:latin typeface="Noto Sans CJK SC"/>
                 <a:ea typeface="Noto Sans CJK SC"/>
@@ -6065,81 +6200,37 @@
             <a:r>
               <a:rPr sz="1687" b="0" i="0" lang="zh-CN" dirty="0">
                 <a:solidFill>
-                  <a:srgbClr val="4A5158"/>
+                  <a:srgbClr val="3A4046"/>
                 </a:solidFill>
                 <a:latin typeface="Noto Sans CJK SC"/>
                 <a:ea typeface="Noto Sans CJK SC"/>
                 <a:cs typeface="Noto Sans CJK SC"/>
               </a:rPr>
-              <a:t>直接</a:t>
-            </a:r>
-            <a:r>
-              <a:rPr sz="1687" b="0" i="0" lang="zh-CN" dirty="0">
-                <a:solidFill>
-                  <a:srgbClr val="4A5158"/>
-                </a:solidFill>
-                <a:latin typeface="DejaVu Sans"/>
-                <a:ea typeface="DejaVu Sans"/>
-                <a:cs typeface="DejaVu Sans"/>
-              </a:rPr>
-              <a:t> / </a:t>
-            </a:r>
-            <a:r>
-              <a:rPr sz="1687" b="0" i="0" lang="zh-CN" dirty="0">
-                <a:solidFill>
-                  <a:srgbClr val="4A5158"/>
-                </a:solidFill>
-                <a:latin typeface="Noto Sans CJK SC"/>
-                <a:ea typeface="Noto Sans CJK SC"/>
-                <a:cs typeface="Noto Sans CJK SC"/>
-              </a:rPr>
-              <a:t>近邻</a:t>
-            </a:r>
-            <a:r>
-              <a:rPr sz="1687" b="0" i="0" lang="zh-CN" dirty="0">
-                <a:solidFill>
-                  <a:srgbClr val="4A5158"/>
-                </a:solidFill>
-                <a:latin typeface="DejaVu Sans"/>
-                <a:ea typeface="DejaVu Sans"/>
-                <a:cs typeface="DejaVu Sans"/>
-              </a:rPr>
-              <a:t> / </a:t>
-            </a:r>
-            <a:r>
-              <a:rPr sz="1687" b="0" i="0" lang="zh-CN" dirty="0">
-                <a:solidFill>
-                  <a:srgbClr val="4A5158"/>
-                </a:solidFill>
-                <a:latin typeface="Noto Sans CJK SC"/>
-                <a:ea typeface="Noto Sans CJK SC"/>
-                <a:cs typeface="Noto Sans CJK SC"/>
-              </a:rPr>
-              <a:t>推断</a:t>
+              <a:t>未见直接报道</a:t>
             </a:r>
           </a:p>
         </p:txBody>
       </p:sp>
       <p:cxnSp>
         <p:nvCxnSpPr>
-          <p:cNvPr id="48" name="br6a" descr="Editable line; source id br6a"/>
+          <p:cNvPr id="49" name="s_k7" descr="Editable line; source id s_k7"/>
           <p:cNvCxnSpPr/>
           <p:nvPr/>
         </p:nvCxnSpPr>
         <p:spPr>
           <a:xfrm>
-            <a:off x="2889249" y="6088062"/>
-            <a:ext cx="0" cy="1079500"/>
+            <a:off x="6095999" y="4595812"/>
+            <a:ext cx="0" cy="484187"/>
           </a:xfrm>
           <a:prstGeom prst="line">
             <a:avLst/>
           </a:prstGeom>
-          <a:ln w="31749">
+          <a:ln w="23812">
             <a:solidFill>
               <a:srgbClr val="B8862B"/>
             </a:solidFill>
             <a:custDash>
-              <a:ds d="400000" sp="250000"/>
+              <a:ds d="466667" sp="300000"/>
             </a:custDash>
           </a:ln>
           <a:effectLst/>
@@ -6159,95 +6250,16 @@
           </a:fontRef>
         </p:style>
       </p:cxnSp>
-      <p:cxnSp>
-        <p:nvCxnSpPr>
-          <p:cNvPr id="49" name="br6" descr="Editable line; source id br6"/>
-          <p:cNvCxnSpPr/>
-          <p:nvPr/>
-        </p:nvCxnSpPr>
-        <p:spPr>
-          <a:xfrm>
-            <a:off x="2889249" y="7167562"/>
-            <a:ext cx="873125" cy="0"/>
-          </a:xfrm>
-          <a:prstGeom prst="line">
-            <a:avLst/>
-          </a:prstGeom>
-          <a:ln w="31749">
-            <a:solidFill>
-              <a:srgbClr val="B8862B"/>
-            </a:solidFill>
-            <a:custDash>
-              <a:ds d="400000" sp="250000"/>
-            </a:custDash>
-          </a:ln>
-          <a:effectLst/>
-        </p:spPr>
-        <p:style>
-          <a:lnRef idx="2">
-            <a:schemeClr val="accent1"/>
-          </a:lnRef>
-          <a:fillRef idx="0">
-            <a:schemeClr val="accent1"/>
-          </a:fillRef>
-          <a:effectRef idx="0">
-            <a:schemeClr val="accent1"/>
-          </a:effectRef>
-          <a:fontRef idx="minor">
-            <a:schemeClr val="tx1"/>
-          </a:fontRef>
-        </p:style>
-      </p:cxnSp>
-      <p:cxnSp>
-        <p:nvCxnSpPr>
-          <p:cNvPr id="50" name="br6b" descr="Editable line; source id br6b"/>
-          <p:cNvCxnSpPr/>
-          <p:nvPr/>
-        </p:nvCxnSpPr>
-        <p:spPr>
-          <a:xfrm>
-            <a:off x="4778374" y="7167562"/>
-            <a:ext cx="1349375" cy="0"/>
-          </a:xfrm>
-          <a:prstGeom prst="line">
-            <a:avLst/>
-          </a:prstGeom>
-          <a:ln w="31749">
-            <a:solidFill>
-              <a:srgbClr val="B8862B"/>
-            </a:solidFill>
-            <a:custDash>
-              <a:ds d="400000" sp="250000"/>
-            </a:custDash>
-            <a:tailEnd type="triangle"/>
-          </a:ln>
-          <a:effectLst/>
-        </p:spPr>
-        <p:style>
-          <a:lnRef idx="2">
-            <a:schemeClr val="accent1"/>
-          </a:lnRef>
-          <a:fillRef idx="0">
-            <a:schemeClr val="accent1"/>
-          </a:fillRef>
-          <a:effectRef idx="0">
-            <a:schemeClr val="accent1"/>
-          </a:effectRef>
-          <a:fontRef idx="minor">
-            <a:schemeClr val="tx1"/>
-          </a:fontRef>
-        </p:style>
-      </p:cxnSp>
-      <p:sp>
-        <p:nvSpPr>
-          <p:cNvPr id="51" name="pill6" descr="Editable shape; source id pill6"/>
+      <p:sp>
+        <p:nvSpPr>
+          <p:cNvPr id="50" name="s_k7_p" descr="Editable shape; source id s_k7_p"/>
           <p:cNvSpPr/>
           <p:nvPr/>
         </p:nvSpPr>
         <p:spPr>
           <a:xfrm>
-            <a:off x="3778249" y="6992937"/>
-            <a:ext cx="984249" cy="349249"/>
+            <a:off x="5651499" y="5095874"/>
+            <a:ext cx="888999" cy="396874"/>
           </a:xfrm>
           <a:prstGeom prst="roundRect">
             <a:avLst>
@@ -6257,7 +6269,7 @@
           <a:solidFill>
             <a:srgbClr val="FFFFFF"/>
           </a:solidFill>
-          <a:ln w="19843">
+          <a:ln w="15874">
             <a:solidFill>
               <a:srgbClr val="B8862B"/>
             </a:solidFill>
@@ -6288,14 +6300,14 @@
       </p:sp>
       <p:sp>
         <p:nvSpPr>
-          <p:cNvPr id="52" name="pill6_t" descr="Editable text; source id pill6_t"/>
+          <p:cNvPr id="51" name="s_k7_pt" descr="Editable text; source id s_k7_pt"/>
           <p:cNvSpPr txBox="1"/>
           <p:nvPr/>
         </p:nvSpPr>
         <p:spPr>
           <a:xfrm>
-            <a:off x="3825874" y="7016749"/>
-            <a:ext cx="888999" cy="301624"/>
+            <a:off x="5699124" y="5119687"/>
+            <a:ext cx="793749" cy="349249"/>
           </a:xfrm>
           <a:prstGeom prst="rect">
             <a:avLst/>
@@ -6321,7 +6333,7 @@
               </a:spcAft>
               <a:defRPr sz="1499" b="1" i="0" lang="zh-CN" dirty="0">
                 <a:solidFill>
-                  <a:srgbClr val="B8862B"/>
+                  <a:srgbClr val="7A5A1C"/>
                 </a:solidFill>
                 <a:latin typeface="Noto Sans CJK SC"/>
                 <a:ea typeface="Noto Sans CJK SC"/>
@@ -6331,7 +6343,7 @@
             <a:r>
               <a:rPr sz="1499" b="1" i="0" lang="zh-CN" dirty="0">
                 <a:solidFill>
-                  <a:srgbClr val="B8862B"/>
+                  <a:srgbClr val="7A5A1C"/>
                 </a:solidFill>
                 <a:latin typeface="Noto Sans CJK SC"/>
                 <a:ea typeface="Noto Sans CJK SC"/>
@@ -6342,169 +6354,46 @@
           </a:p>
         </p:txBody>
       </p:sp>
-      <p:sp>
-        <p:nvSpPr>
-          <p:cNvPr id="53" name="card6" descr="Editable shape; source id card6"/>
-          <p:cNvSpPr/>
+      <p:cxnSp>
+        <p:nvCxnSpPr>
+          <p:cNvPr id="52" name="s_k7b" descr="Editable line; source id s_k7b"/>
+          <p:cNvCxnSpPr/>
           <p:nvPr/>
-        </p:nvSpPr>
-        <p:spPr>
-          <a:xfrm>
-            <a:off x="6143624" y="6683374"/>
-            <a:ext cx="5532437" cy="976312"/>
-          </a:xfrm>
-          <a:prstGeom prst="roundRect">
-            <a:avLst>
-              <a:gd name="adj" fmla="val 11382"/>
-            </a:avLst>
+        </p:nvCxnSpPr>
+        <p:spPr>
+          <a:xfrm>
+            <a:off x="6095999" y="5508624"/>
+            <a:ext cx="0" cy="896938"/>
+          </a:xfrm>
+          <a:prstGeom prst="line">
+            <a:avLst/>
           </a:prstGeom>
-          <a:solidFill>
-            <a:srgbClr val="F3F5F6"/>
-          </a:solidFill>
-          <a:ln w="19843">
+          <a:ln w="23812">
             <a:solidFill>
               <a:srgbClr val="B8862B"/>
             </a:solidFill>
             <a:custDash>
-              <a:ds d="640000" sp="400000"/>
+              <a:ds d="466667" sp="300000"/>
             </a:custDash>
+            <a:tailEnd type="triangle"/>
           </a:ln>
           <a:effectLst/>
         </p:spPr>
         <p:style>
-          <a:lnRef idx="1">
+          <a:lnRef idx="2">
             <a:schemeClr val="accent1"/>
           </a:lnRef>
-          <a:fillRef idx="3">
+          <a:fillRef idx="0">
             <a:schemeClr val="accent1"/>
           </a:fillRef>
           <a:effectRef idx="0">
             <a:schemeClr val="accent1"/>
           </a:effectRef>
           <a:fontRef idx="minor">
-            <a:schemeClr val="lt1"/>
+            <a:schemeClr val="tx1"/>
           </a:fontRef>
         </p:style>
-        <p:txBody>
-          <a:bodyPr rtlCol="0" anchor="ctr"/>
-          <a:lstStyle/>
-          <a:p>
-            <a:pPr algn="ctr"/>
-          </a:p>
-        </p:txBody>
-      </p:sp>
-      <p:sp>
-        <p:nvSpPr>
-          <p:cNvPr id="54" name="card6_t" descr="Editable text; source id card6_t"/>
-          <p:cNvSpPr txBox="1"/>
-          <p:nvPr/>
-        </p:nvSpPr>
-        <p:spPr>
-          <a:xfrm>
-            <a:off x="6429374" y="6794499"/>
-            <a:ext cx="5079999" cy="460374"/>
-          </a:xfrm>
-          <a:prstGeom prst="rect">
-            <a:avLst/>
-          </a:prstGeom>
-          <a:noFill/>
-          <a:effectLst/>
-        </p:spPr>
-        <p:txBody>
-          <a:bodyPr wrap="none" anchor="ctr" tIns="0" rIns="0" bIns="0" lIns="0" anchorCtr="0" vertOverflow="overflow">
-            <a:noAutofit/>
-          </a:bodyPr>
-          <a:lstStyle/>
-          <a:p>
-            <a:pPr algn="l" fontAlgn="base">
-              <a:lnSpc>
-                <a:spcPts val="2624"/>
-              </a:lnSpc>
-              <a:spcBef>
-                <a:spcPts val="0"/>
-              </a:spcBef>
-              <a:spcAft>
-                <a:spcPts val="0"/>
-              </a:spcAft>
-              <a:defRPr sz="2249" b="1" i="0" lang="zh-CN" dirty="0">
-                <a:solidFill>
-                  <a:srgbClr val="2B2F33"/>
-                </a:solidFill>
-                <a:latin typeface="DejaVu Sans"/>
-                <a:ea typeface="DejaVu Sans"/>
-                <a:cs typeface="DejaVu Sans"/>
-              </a:defRPr>
-            </a:pPr>
-            <a:r>
-              <a:rPr sz="2249" b="1" i="0" lang="zh-CN" dirty="0">
-                <a:solidFill>
-                  <a:srgbClr val="2B2F33"/>
-                </a:solidFill>
-                <a:latin typeface="DejaVu Sans"/>
-                <a:ea typeface="DejaVu Sans"/>
-                <a:cs typeface="DejaVu Sans"/>
-              </a:rPr>
-              <a:t>Ba5Y12Zn[O(SiO4)]8</a:t>
-            </a:r>
-          </a:p>
-        </p:txBody>
-      </p:sp>
-      <p:sp>
-        <p:nvSpPr>
-          <p:cNvPr id="55" name="card6_s" descr="Editable text; source id card6_s"/>
-          <p:cNvSpPr txBox="1"/>
-          <p:nvPr/>
-        </p:nvSpPr>
-        <p:spPr>
-          <a:xfrm>
-            <a:off x="6429374" y="7254874"/>
-            <a:ext cx="5079999" cy="317499"/>
-          </a:xfrm>
-          <a:prstGeom prst="rect">
-            <a:avLst/>
-          </a:prstGeom>
-          <a:noFill/>
-          <a:effectLst/>
-        </p:spPr>
-        <p:txBody>
-          <a:bodyPr wrap="none" anchor="ctr" tIns="0" rIns="0" bIns="0" lIns="0" anchorCtr="0" vertOverflow="overflow">
-            <a:noAutofit/>
-          </a:bodyPr>
-          <a:lstStyle/>
-          <a:p>
-            <a:pPr algn="l" fontAlgn="base">
-              <a:lnSpc>
-                <a:spcPts val="2468"/>
-              </a:lnSpc>
-              <a:spcBef>
-                <a:spcPts val="0"/>
-              </a:spcBef>
-              <a:spcAft>
-                <a:spcPts val="0"/>
-              </a:spcAft>
-              <a:defRPr sz="1687" b="0" i="0" lang="zh-CN" dirty="0">
-                <a:solidFill>
-                  <a:srgbClr val="4A5158"/>
-                </a:solidFill>
-                <a:latin typeface="Noto Sans CJK SC"/>
-                <a:ea typeface="Noto Sans CJK SC"/>
-                <a:cs typeface="Noto Sans CJK SC"/>
-              </a:defRPr>
-            </a:pPr>
-            <a:r>
-              <a:rPr sz="1687" b="0" i="0" lang="zh-CN" dirty="0">
-                <a:solidFill>
-                  <a:srgbClr val="4A5158"/>
-                </a:solidFill>
-                <a:latin typeface="Noto Sans CJK SC"/>
-                <a:ea typeface="Noto Sans CJK SC"/>
-                <a:cs typeface="Noto Sans CJK SC"/>
-              </a:rPr>
-              <a:t>未见直接报道</a:t>
-            </a:r>
-          </a:p>
-        </p:txBody>
-      </p:sp>
+      </p:cxnSp>
     </p:spTree>
   </p:cSld>
   <p:clrMapOvr>

--- a/media/figstudio/bzso_taxonomy/taxonomy_phase_control_editable.pptx
+++ b/media/figstudio/bzso_taxonomy/taxonomy_phase_control_editable.pptx
@@ -3533,9 +3533,9 @@
           <a:solidFill>
             <a:srgbClr val="FFFFFF"/>
           </a:solidFill>
-          <a:ln w="23812">
+          <a:ln w="31749">
             <a:solidFill>
-              <a:srgbClr val="4A5158"/>
+              <a:srgbClr val="38525E"/>
             </a:solidFill>
           </a:ln>
           <a:effectLst/>
@@ -3597,7 +3597,7 @@
               </a:spcAft>
               <a:defRPr sz="1999" b="1" i="0" lang="zh-CN" dirty="0">
                 <a:solidFill>
-                  <a:srgbClr val="1F2326"/>
+                  <a:srgbClr val="10171F"/>
                 </a:solidFill>
                 <a:latin typeface="DejaVu Sans"/>
                 <a:ea typeface="DejaVu Sans"/>
@@ -3607,7 +3607,7 @@
             <a:r>
               <a:rPr sz="1999" b="1" i="0" lang="zh-CN" dirty="0">
                 <a:solidFill>
-                  <a:srgbClr val="1F2326"/>
+                  <a:srgbClr val="10171F"/>
                 </a:solidFill>
                 <a:latin typeface="DejaVu Sans"/>
                 <a:ea typeface="DejaVu Sans"/>
@@ -3629,7 +3629,7 @@
               </a:spcAft>
               <a:defRPr sz="1999" b="1" i="0" lang="zh-CN" dirty="0">
                 <a:solidFill>
-                  <a:srgbClr val="1F2326"/>
+                  <a:srgbClr val="10171F"/>
                 </a:solidFill>
                 <a:latin typeface="Noto Sans CJK SC"/>
                 <a:ea typeface="Noto Sans CJK SC"/>
@@ -3639,7 +3639,7 @@
             <a:r>
               <a:rPr sz="1999" b="1" i="0" lang="zh-CN" dirty="0">
                 <a:solidFill>
-                  <a:srgbClr val="1F2326"/>
+                  <a:srgbClr val="10171F"/>
                 </a:solidFill>
                 <a:latin typeface="Noto Sans CJK SC"/>
                 <a:ea typeface="Noto Sans CJK SC"/>
@@ -3669,9 +3669,9 @@
           <a:solidFill>
             <a:srgbClr val="FFFFFF"/>
           </a:solidFill>
-          <a:ln w="19843">
+          <a:ln w="27781">
             <a:solidFill>
-              <a:srgbClr val="4A5158"/>
+              <a:srgbClr val="3F4A53"/>
             </a:solidFill>
           </a:ln>
           <a:effectLst/>
@@ -3733,7 +3733,7 @@
               </a:spcAft>
               <a:defRPr sz="2478" b="1" i="0" lang="zh-CN" dirty="0">
                 <a:solidFill>
-                  <a:srgbClr val="1F2326"/>
+                  <a:srgbClr val="10171F"/>
                 </a:solidFill>
                 <a:latin typeface="Noto Sans CJK SC"/>
                 <a:ea typeface="Noto Sans CJK SC"/>
@@ -3743,7 +3743,7 @@
             <a:r>
               <a:rPr sz="2478" b="1" i="0" lang="zh-CN" dirty="0">
                 <a:solidFill>
-                  <a:srgbClr val="1F2326"/>
+                  <a:srgbClr val="10171F"/>
                 </a:solidFill>
                 <a:latin typeface="Noto Sans CJK SC"/>
                 <a:ea typeface="Noto Sans CJK SC"/>
@@ -3789,7 +3789,7 @@
               </a:spcAft>
               <a:defRPr sz="1687" b="0" i="0" lang="zh-CN" dirty="0">
                 <a:solidFill>
-                  <a:srgbClr val="3A4046"/>
+                  <a:srgbClr val="2B333A"/>
                 </a:solidFill>
                 <a:latin typeface="Noto Sans CJK SC"/>
                 <a:ea typeface="Noto Sans CJK SC"/>
@@ -3799,7 +3799,7 @@
             <a:r>
               <a:rPr sz="1687" b="0" i="0" lang="zh-CN" dirty="0">
                 <a:solidFill>
-                  <a:srgbClr val="3A4046"/>
+                  <a:srgbClr val="2B333A"/>
                 </a:solidFill>
                 <a:latin typeface="Noto Sans CJK SC"/>
                 <a:ea typeface="Noto Sans CJK SC"/>
@@ -3810,7 +3810,7 @@
             <a:r>
               <a:rPr sz="1687" b="0" i="0" lang="zh-CN" dirty="0">
                 <a:solidFill>
-                  <a:srgbClr val="3A4046"/>
+                  <a:srgbClr val="2B333A"/>
                 </a:solidFill>
                 <a:latin typeface="DejaVu Sans"/>
                 <a:ea typeface="DejaVu Sans"/>
@@ -3821,7 +3821,7 @@
             <a:r>
               <a:rPr sz="1687" b="0" i="0" lang="zh-CN" dirty="0">
                 <a:solidFill>
-                  <a:srgbClr val="3A4046"/>
+                  <a:srgbClr val="2B333A"/>
                 </a:solidFill>
                 <a:latin typeface="Noto Sans CJK SC"/>
                 <a:ea typeface="Noto Sans CJK SC"/>
@@ -3846,9 +3846,9 @@
           <a:prstGeom prst="line">
             <a:avLst/>
           </a:prstGeom>
-          <a:ln w="23812">
+          <a:ln w="31749">
             <a:solidFill>
-              <a:srgbClr val="1F6F78"/>
+              <a:srgbClr val="1B717D"/>
             </a:solidFill>
           </a:ln>
           <a:effectLst/>
@@ -3877,7 +3877,7 @@
         <p:spPr>
           <a:xfrm>
             <a:off x="4246562" y="1714500"/>
-            <a:ext cx="222734" cy="222734"/>
+            <a:ext cx="225536" cy="225536"/>
           </a:xfrm>
           <a:custGeom>
             <a:avLst/>
@@ -3886,34 +3886,34 @@
             <a:cxnLst/>
             <a:rect l="l" t="t" r="r" b="b"/>
             <a:pathLst>
-              <a:path w="28061" h="28061">
+              <a:path w="28414" h="28414">
                 <a:moveTo>
-                  <a:pt x="25939" y="28061"/>
+                  <a:pt x="25586" y="28414"/>
                 </a:moveTo>
                 <a:lnTo>
-                  <a:pt x="8839" y="10960"/>
+                  <a:pt x="9899" y="12728"/>
                 </a:lnTo>
                 <a:lnTo>
-                  <a:pt x="5657" y="14142"/>
+                  <a:pt x="6364" y="16263"/>
                 </a:lnTo>
                 <a:lnTo>
                   <a:pt x="0" y="0"/>
                 </a:lnTo>
                 <a:lnTo>
-                  <a:pt x="14142" y="5657"/>
+                  <a:pt x="16263" y="6364"/>
                 </a:lnTo>
                 <a:lnTo>
-                  <a:pt x="10960" y="8839"/>
+                  <a:pt x="12728" y="9899"/>
                 </a:lnTo>
                 <a:lnTo>
-                  <a:pt x="28061" y="25939"/>
+                  <a:pt x="28414" y="25586"/>
                 </a:lnTo>
                 <a:close/>
               </a:path>
             </a:pathLst>
           </a:custGeom>
           <a:solidFill>
-            <a:srgbClr val="1F6F78"/>
+            <a:srgbClr val="1B717D"/>
           </a:solidFill>
           <a:ln>
             <a:noFill/>
@@ -3959,11 +3959,11 @@
             </a:avLst>
           </a:prstGeom>
           <a:solidFill>
-            <a:srgbClr val="FFFFFF"/>
+            <a:srgbClr val="E9EDED"/>
           </a:solidFill>
-          <a:ln w="15874">
+          <a:ln w="19843">
             <a:solidFill>
-              <a:srgbClr val="1F6F78"/>
+              <a:srgbClr val="1B717D"/>
             </a:solidFill>
           </a:ln>
           <a:effectLst/>
@@ -4025,7 +4025,7 @@
               </a:spcAft>
               <a:defRPr sz="1499" b="1" i="0" lang="zh-CN" dirty="0">
                 <a:solidFill>
-                  <a:srgbClr val="1F6F78"/>
+                  <a:srgbClr val="1B717D"/>
                 </a:solidFill>
                 <a:latin typeface="Noto Sans CJK SC"/>
                 <a:ea typeface="Noto Sans CJK SC"/>
@@ -4035,7 +4035,7 @@
             <a:r>
               <a:rPr sz="1499" b="1" i="0" lang="zh-CN" dirty="0">
                 <a:solidFill>
-                  <a:srgbClr val="1F6F78"/>
+                  <a:srgbClr val="1B717D"/>
                 </a:solidFill>
                 <a:latin typeface="Noto Sans CJK SC"/>
                 <a:ea typeface="Noto Sans CJK SC"/>
@@ -4065,9 +4065,9 @@
           <a:solidFill>
             <a:srgbClr val="FFFFFF"/>
           </a:solidFill>
-          <a:ln w="19843">
+          <a:ln w="27781">
             <a:solidFill>
-              <a:srgbClr val="4A5158"/>
+              <a:srgbClr val="3F4A53"/>
             </a:solidFill>
           </a:ln>
           <a:effectLst/>
@@ -4129,7 +4129,7 @@
               </a:spcAft>
               <a:defRPr sz="2478" b="1" i="0" lang="zh-CN" dirty="0">
                 <a:solidFill>
-                  <a:srgbClr val="1F2326"/>
+                  <a:srgbClr val="10171F"/>
                 </a:solidFill>
                 <a:latin typeface="Noto Sans CJK SC"/>
                 <a:ea typeface="Noto Sans CJK SC"/>
@@ -4139,7 +4139,7 @@
             <a:r>
               <a:rPr sz="2478" b="1" i="0" lang="zh-CN" dirty="0">
                 <a:solidFill>
-                  <a:srgbClr val="1F2326"/>
+                  <a:srgbClr val="10171F"/>
                 </a:solidFill>
                 <a:latin typeface="Noto Sans CJK SC"/>
                 <a:ea typeface="Noto Sans CJK SC"/>
@@ -4185,7 +4185,7 @@
               </a:spcAft>
               <a:defRPr sz="1687" b="0" i="0" lang="zh-CN" dirty="0">
                 <a:solidFill>
-                  <a:srgbClr val="3A4046"/>
+                  <a:srgbClr val="2B333A"/>
                 </a:solidFill>
                 <a:latin typeface="Noto Sans CJK SC"/>
                 <a:ea typeface="Noto Sans CJK SC"/>
@@ -4195,7 +4195,7 @@
             <a:r>
               <a:rPr sz="1687" b="0" i="0" lang="zh-CN" dirty="0">
                 <a:solidFill>
-                  <a:srgbClr val="3A4046"/>
+                  <a:srgbClr val="2B333A"/>
                 </a:solidFill>
                 <a:latin typeface="Noto Sans CJK SC"/>
                 <a:ea typeface="Noto Sans CJK SC"/>
@@ -4206,7 +4206,7 @@
             <a:r>
               <a:rPr sz="1687" b="0" i="0" lang="zh-CN" dirty="0">
                 <a:solidFill>
-                  <a:srgbClr val="3A4046"/>
+                  <a:srgbClr val="2B333A"/>
                 </a:solidFill>
                 <a:latin typeface="DejaVu Sans"/>
                 <a:ea typeface="DejaVu Sans"/>
@@ -4217,7 +4217,7 @@
             <a:r>
               <a:rPr sz="1687" b="0" i="0" lang="zh-CN" dirty="0">
                 <a:solidFill>
-                  <a:srgbClr val="3A4046"/>
+                  <a:srgbClr val="2B333A"/>
                 </a:solidFill>
                 <a:latin typeface="Noto Sans CJK SC"/>
                 <a:ea typeface="Noto Sans CJK SC"/>
@@ -4228,7 +4228,7 @@
             <a:r>
               <a:rPr sz="1687" b="0" i="0" lang="zh-CN" dirty="0">
                 <a:solidFill>
-                  <a:srgbClr val="3A4046"/>
+                  <a:srgbClr val="2B333A"/>
                 </a:solidFill>
                 <a:latin typeface="DejaVu Sans"/>
                 <a:ea typeface="DejaVu Sans"/>
@@ -4239,7 +4239,7 @@
             <a:r>
               <a:rPr sz="1687" b="0" i="0" lang="zh-CN" dirty="0">
                 <a:solidFill>
-                  <a:srgbClr val="3A4046"/>
+                  <a:srgbClr val="2B333A"/>
                 </a:solidFill>
                 <a:latin typeface="Noto Sans CJK SC"/>
                 <a:ea typeface="Noto Sans CJK SC"/>
@@ -4264,9 +4264,9 @@
           <a:prstGeom prst="line">
             <a:avLst/>
           </a:prstGeom>
-          <a:ln w="23812">
+          <a:ln w="31749">
             <a:solidFill>
-              <a:srgbClr val="1F6F78"/>
+              <a:srgbClr val="1B717D"/>
             </a:solidFill>
           </a:ln>
           <a:effectLst/>
@@ -4294,8 +4294,8 @@
         </p:nvSpPr>
         <p:spPr>
           <a:xfrm>
-            <a:off x="7714766" y="1714500"/>
-            <a:ext cx="222734" cy="222734"/>
+            <a:off x="7711964" y="1714500"/>
+            <a:ext cx="225536" cy="225536"/>
           </a:xfrm>
           <a:custGeom>
             <a:avLst/>
@@ -4304,34 +4304,34 @@
             <a:cxnLst/>
             <a:rect l="l" t="t" r="r" b="b"/>
             <a:pathLst>
-              <a:path w="28061" h="28061">
+              <a:path w="28414" h="28414">
                 <a:moveTo>
-                  <a:pt x="0" y="25939"/>
+                  <a:pt x="0" y="25586"/>
                 </a:moveTo>
                 <a:lnTo>
-                  <a:pt x="17101" y="8839"/>
+                  <a:pt x="15686" y="9899"/>
                 </a:lnTo>
                 <a:lnTo>
-                  <a:pt x="13919" y="5657"/>
+                  <a:pt x="12151" y="6364"/>
                 </a:lnTo>
                 <a:lnTo>
-                  <a:pt x="28061" y="0"/>
+                  <a:pt x="28414" y="0"/>
                 </a:lnTo>
                 <a:lnTo>
-                  <a:pt x="22404" y="14142"/>
+                  <a:pt x="22050" y="16263"/>
                 </a:lnTo>
                 <a:lnTo>
-                  <a:pt x="19222" y="10960"/>
+                  <a:pt x="18515" y="12728"/>
                 </a:lnTo>
                 <a:lnTo>
-                  <a:pt x="2122" y="28061"/>
+                  <a:pt x="2828" y="28414"/>
                 </a:lnTo>
                 <a:close/>
               </a:path>
             </a:pathLst>
           </a:custGeom>
           <a:solidFill>
-            <a:srgbClr val="1F6F78"/>
+            <a:srgbClr val="1B717D"/>
           </a:solidFill>
           <a:ln>
             <a:noFill/>
@@ -4377,11 +4377,11 @@
             </a:avLst>
           </a:prstGeom>
           <a:solidFill>
-            <a:srgbClr val="FFFFFF"/>
+            <a:srgbClr val="E9EDED"/>
           </a:solidFill>
-          <a:ln w="15874">
+          <a:ln w="19843">
             <a:solidFill>
-              <a:srgbClr val="1F6F78"/>
+              <a:srgbClr val="1B717D"/>
             </a:solidFill>
           </a:ln>
           <a:effectLst/>
@@ -4443,7 +4443,7 @@
               </a:spcAft>
               <a:defRPr sz="1499" b="1" i="0" lang="zh-CN" dirty="0">
                 <a:solidFill>
-                  <a:srgbClr val="1F6F78"/>
+                  <a:srgbClr val="1B717D"/>
                 </a:solidFill>
                 <a:latin typeface="Noto Sans CJK SC"/>
                 <a:ea typeface="Noto Sans CJK SC"/>
@@ -4453,7 +4453,7 @@
             <a:r>
               <a:rPr sz="1499" b="1" i="0" lang="zh-CN" dirty="0">
                 <a:solidFill>
-                  <a:srgbClr val="1F6F78"/>
+                  <a:srgbClr val="1B717D"/>
                 </a:solidFill>
                 <a:latin typeface="Noto Sans CJK SC"/>
                 <a:ea typeface="Noto Sans CJK SC"/>
@@ -4483,9 +4483,9 @@
           <a:solidFill>
             <a:srgbClr val="FFFFFF"/>
           </a:solidFill>
-          <a:ln w="19843">
+          <a:ln w="27781">
             <a:solidFill>
-              <a:srgbClr val="4A5158"/>
+              <a:srgbClr val="3F4A53"/>
             </a:solidFill>
           </a:ln>
           <a:effectLst/>
@@ -4547,7 +4547,7 @@
               </a:spcAft>
               <a:defRPr sz="2478" b="1" i="0" lang="zh-CN" dirty="0">
                 <a:solidFill>
-                  <a:srgbClr val="1F2326"/>
+                  <a:srgbClr val="10171F"/>
                 </a:solidFill>
                 <a:latin typeface="Noto Sans CJK SC"/>
                 <a:ea typeface="Noto Sans CJK SC"/>
@@ -4557,7 +4557,7 @@
             <a:r>
               <a:rPr sz="2478" b="1" i="0" lang="zh-CN" dirty="0">
                 <a:solidFill>
-                  <a:srgbClr val="1F2326"/>
+                  <a:srgbClr val="10171F"/>
                 </a:solidFill>
                 <a:latin typeface="Noto Sans CJK SC"/>
                 <a:ea typeface="Noto Sans CJK SC"/>
@@ -4603,7 +4603,7 @@
               </a:spcAft>
               <a:defRPr sz="1687" b="0" i="0" lang="zh-CN" dirty="0">
                 <a:solidFill>
-                  <a:srgbClr val="3A4046"/>
+                  <a:srgbClr val="2B333A"/>
                 </a:solidFill>
                 <a:latin typeface="DejaVu Sans"/>
                 <a:ea typeface="DejaVu Sans"/>
@@ -4613,7 +4613,7 @@
             <a:r>
               <a:rPr sz="1687" b="0" i="0" lang="zh-CN" dirty="0">
                 <a:solidFill>
-                  <a:srgbClr val="3A4046"/>
+                  <a:srgbClr val="2B333A"/>
                 </a:solidFill>
                 <a:latin typeface="DejaVu Sans"/>
                 <a:ea typeface="DejaVu Sans"/>
@@ -4624,7 +4624,7 @@
             <a:r>
               <a:rPr sz="1687" b="0" i="0" lang="zh-CN" dirty="0">
                 <a:solidFill>
-                  <a:srgbClr val="3A4046"/>
+                  <a:srgbClr val="2B333A"/>
                 </a:solidFill>
                 <a:latin typeface="Noto Sans CJK SC"/>
                 <a:ea typeface="Noto Sans CJK SC"/>
@@ -4649,9 +4649,9 @@
           <a:prstGeom prst="line">
             <a:avLst/>
           </a:prstGeom>
-          <a:ln w="23812">
+          <a:ln w="31749">
             <a:solidFill>
-              <a:srgbClr val="1F6F78"/>
+              <a:srgbClr val="1B717D"/>
             </a:solidFill>
           </a:ln>
           <a:effectLst/>
@@ -4679,8 +4679,8 @@
         </p:nvSpPr>
         <p:spPr>
           <a:xfrm>
-            <a:off x="2928937" y="3516312"/>
-            <a:ext cx="595312" cy="95250"/>
+            <a:off x="2928937" y="3508375"/>
+            <a:ext cx="595312" cy="111125"/>
           </a:xfrm>
           <a:custGeom>
             <a:avLst/>
@@ -4689,34 +4689,34 @@
             <a:cxnLst/>
             <a:rect l="l" t="t" r="r" b="b"/>
             <a:pathLst>
-              <a:path w="75000" h="12000">
+              <a:path w="75000" h="14000">
                 <a:moveTo>
-                  <a:pt x="75000" y="7500"/>
+                  <a:pt x="75000" y="9000"/>
                 </a:moveTo>
                 <a:lnTo>
-                  <a:pt x="14000" y="7500"/>
+                  <a:pt x="16000" y="9000"/>
                 </a:lnTo>
                 <a:lnTo>
-                  <a:pt x="14000" y="12000"/>
+                  <a:pt x="16000" y="14000"/>
                 </a:lnTo>
                 <a:lnTo>
-                  <a:pt x="0" y="6000"/>
+                  <a:pt x="0" y="7000"/>
                 </a:lnTo>
                 <a:lnTo>
-                  <a:pt x="14000" y="0"/>
+                  <a:pt x="16000" y="0"/>
                 </a:lnTo>
                 <a:lnTo>
-                  <a:pt x="14000" y="4500"/>
+                  <a:pt x="16000" y="5000"/>
                 </a:lnTo>
                 <a:lnTo>
-                  <a:pt x="75000" y="4500"/>
+                  <a:pt x="75000" y="5000"/>
                 </a:lnTo>
                 <a:close/>
               </a:path>
             </a:pathLst>
           </a:custGeom>
           <a:solidFill>
-            <a:srgbClr val="1F6F78"/>
+            <a:srgbClr val="1B717D"/>
           </a:solidFill>
           <a:ln>
             <a:noFill/>
@@ -4762,11 +4762,11 @@
             </a:avLst>
           </a:prstGeom>
           <a:solidFill>
-            <a:srgbClr val="FFFFFF"/>
+            <a:srgbClr val="E9EDED"/>
           </a:solidFill>
-          <a:ln w="15874">
+          <a:ln w="19843">
             <a:solidFill>
-              <a:srgbClr val="1F6F78"/>
+              <a:srgbClr val="1B717D"/>
             </a:solidFill>
           </a:ln>
           <a:effectLst/>
@@ -4828,7 +4828,7 @@
               </a:spcAft>
               <a:defRPr sz="1499" b="1" i="0" lang="zh-CN" dirty="0">
                 <a:solidFill>
-                  <a:srgbClr val="1F6F78"/>
+                  <a:srgbClr val="1B717D"/>
                 </a:solidFill>
                 <a:latin typeface="Noto Sans CJK SC"/>
                 <a:ea typeface="Noto Sans CJK SC"/>
@@ -4838,7 +4838,7 @@
             <a:r>
               <a:rPr sz="1499" b="1" i="0" lang="zh-CN" dirty="0">
                 <a:solidFill>
-                  <a:srgbClr val="1F6F78"/>
+                  <a:srgbClr val="1B717D"/>
                 </a:solidFill>
                 <a:latin typeface="Noto Sans CJK SC"/>
                 <a:ea typeface="Noto Sans CJK SC"/>
@@ -4868,9 +4868,9 @@
           <a:solidFill>
             <a:srgbClr val="FFFFFF"/>
           </a:solidFill>
-          <a:ln w="19843">
+          <a:ln w="27781">
             <a:solidFill>
-              <a:srgbClr val="4A5158"/>
+              <a:srgbClr val="3F4A53"/>
             </a:solidFill>
           </a:ln>
           <a:effectLst/>
@@ -4932,7 +4932,7 @@
               </a:spcAft>
               <a:defRPr sz="2478" b="1" i="0" lang="zh-CN" dirty="0">
                 <a:solidFill>
-                  <a:srgbClr val="1F2326"/>
+                  <a:srgbClr val="10171F"/>
                 </a:solidFill>
                 <a:latin typeface="Noto Sans CJK SC"/>
                 <a:ea typeface="Noto Sans CJK SC"/>
@@ -4942,7 +4942,7 @@
             <a:r>
               <a:rPr sz="2478" b="1" i="0" lang="zh-CN" dirty="0">
                 <a:solidFill>
-                  <a:srgbClr val="1F2326"/>
+                  <a:srgbClr val="10171F"/>
                 </a:solidFill>
                 <a:latin typeface="Noto Sans CJK SC"/>
                 <a:ea typeface="Noto Sans CJK SC"/>
@@ -4988,7 +4988,7 @@
               </a:spcAft>
               <a:defRPr sz="1687" b="0" i="0" lang="zh-CN" dirty="0">
                 <a:solidFill>
-                  <a:srgbClr val="3A4046"/>
+                  <a:srgbClr val="2B333A"/>
                 </a:solidFill>
                 <a:latin typeface="Noto Sans CJK SC"/>
                 <a:ea typeface="Noto Sans CJK SC"/>
@@ -4998,7 +4998,7 @@
             <a:r>
               <a:rPr sz="1687" b="0" i="0" lang="zh-CN" dirty="0">
                 <a:solidFill>
-                  <a:srgbClr val="3A4046"/>
+                  <a:srgbClr val="2B333A"/>
                 </a:solidFill>
                 <a:latin typeface="Noto Sans CJK SC"/>
                 <a:ea typeface="Noto Sans CJK SC"/>
@@ -5009,7 +5009,7 @@
             <a:r>
               <a:rPr sz="1687" b="0" i="0" lang="zh-CN" dirty="0">
                 <a:solidFill>
-                  <a:srgbClr val="3A4046"/>
+                  <a:srgbClr val="2B333A"/>
                 </a:solidFill>
                 <a:latin typeface="DejaVu Sans"/>
                 <a:ea typeface="DejaVu Sans"/>
@@ -5020,7 +5020,7 @@
             <a:r>
               <a:rPr sz="1687" b="0" i="0" lang="zh-CN" dirty="0">
                 <a:solidFill>
-                  <a:srgbClr val="3A4046"/>
+                  <a:srgbClr val="2B333A"/>
                 </a:solidFill>
                 <a:latin typeface="Noto Sans CJK SC"/>
                 <a:ea typeface="Noto Sans CJK SC"/>
@@ -5031,7 +5031,7 @@
             <a:r>
               <a:rPr sz="1687" b="0" i="0" lang="zh-CN" dirty="0">
                 <a:solidFill>
-                  <a:srgbClr val="3A4046"/>
+                  <a:srgbClr val="2B333A"/>
                 </a:solidFill>
                 <a:latin typeface="DejaVu Sans"/>
                 <a:ea typeface="DejaVu Sans"/>
@@ -5042,7 +5042,7 @@
             <a:r>
               <a:rPr sz="1687" b="0" i="0" lang="zh-CN" dirty="0">
                 <a:solidFill>
-                  <a:srgbClr val="3A4046"/>
+                  <a:srgbClr val="2B333A"/>
                 </a:solidFill>
                 <a:latin typeface="Noto Sans CJK SC"/>
                 <a:ea typeface="Noto Sans CJK SC"/>
@@ -5067,9 +5067,9 @@
           <a:prstGeom prst="line">
             <a:avLst/>
           </a:prstGeom>
-          <a:ln w="23812">
+          <a:ln w="31749">
             <a:solidFill>
-              <a:srgbClr val="1F6F78"/>
+              <a:srgbClr val="1B717D"/>
             </a:solidFill>
           </a:ln>
           <a:effectLst/>
@@ -5097,8 +5097,8 @@
         </p:nvSpPr>
         <p:spPr>
           <a:xfrm>
-            <a:off x="8667750" y="3516312"/>
-            <a:ext cx="587375" cy="95250"/>
+            <a:off x="8667750" y="3508375"/>
+            <a:ext cx="587375" cy="111125"/>
           </a:xfrm>
           <a:custGeom>
             <a:avLst/>
@@ -5107,34 +5107,34 @@
             <a:cxnLst/>
             <a:rect l="l" t="t" r="r" b="b"/>
             <a:pathLst>
-              <a:path w="74000" h="12000">
+              <a:path w="74000" h="14000">
                 <a:moveTo>
-                  <a:pt x="0" y="4500"/>
+                  <a:pt x="0" y="5000"/>
                 </a:moveTo>
                 <a:lnTo>
-                  <a:pt x="60000" y="4500"/>
+                  <a:pt x="58000" y="5000"/>
                 </a:lnTo>
                 <a:lnTo>
-                  <a:pt x="60000" y="0"/>
+                  <a:pt x="58000" y="0"/>
                 </a:lnTo>
                 <a:lnTo>
-                  <a:pt x="74000" y="6000"/>
+                  <a:pt x="74000" y="7000"/>
                 </a:lnTo>
                 <a:lnTo>
-                  <a:pt x="60000" y="12000"/>
+                  <a:pt x="58000" y="14000"/>
                 </a:lnTo>
                 <a:lnTo>
-                  <a:pt x="60000" y="7500"/>
+                  <a:pt x="58000" y="9000"/>
                 </a:lnTo>
                 <a:lnTo>
-                  <a:pt x="0" y="7500"/>
+                  <a:pt x="0" y="9000"/>
                 </a:lnTo>
                 <a:close/>
               </a:path>
             </a:pathLst>
           </a:custGeom>
           <a:solidFill>
-            <a:srgbClr val="1F6F78"/>
+            <a:srgbClr val="1B717D"/>
           </a:solidFill>
           <a:ln>
             <a:noFill/>
@@ -5180,11 +5180,11 @@
             </a:avLst>
           </a:prstGeom>
           <a:solidFill>
-            <a:srgbClr val="FFFFFF"/>
+            <a:srgbClr val="E9EDED"/>
           </a:solidFill>
-          <a:ln w="15874">
+          <a:ln w="19843">
             <a:solidFill>
-              <a:srgbClr val="1F6F78"/>
+              <a:srgbClr val="1B717D"/>
             </a:solidFill>
           </a:ln>
           <a:effectLst/>
@@ -5246,7 +5246,7 @@
               </a:spcAft>
               <a:defRPr sz="1499" b="1" i="0" lang="zh-CN" dirty="0">
                 <a:solidFill>
-                  <a:srgbClr val="1F6F78"/>
+                  <a:srgbClr val="1B717D"/>
                 </a:solidFill>
                 <a:latin typeface="Noto Sans CJK SC"/>
                 <a:ea typeface="Noto Sans CJK SC"/>
@@ -5256,7 +5256,7 @@
             <a:r>
               <a:rPr sz="1499" b="1" i="0" lang="zh-CN" dirty="0">
                 <a:solidFill>
-                  <a:srgbClr val="1F6F78"/>
+                  <a:srgbClr val="1B717D"/>
                 </a:solidFill>
                 <a:latin typeface="Noto Sans CJK SC"/>
                 <a:ea typeface="Noto Sans CJK SC"/>
@@ -5286,9 +5286,9 @@
           <a:solidFill>
             <a:srgbClr val="FFFFFF"/>
           </a:solidFill>
-          <a:ln w="19843">
+          <a:ln w="27781">
             <a:solidFill>
-              <a:srgbClr val="4A5158"/>
+              <a:srgbClr val="3F4A53"/>
             </a:solidFill>
           </a:ln>
           <a:effectLst/>
@@ -5350,7 +5350,7 @@
               </a:spcAft>
               <a:defRPr sz="2478" b="1" i="0" lang="zh-CN" dirty="0">
                 <a:solidFill>
-                  <a:srgbClr val="1F2326"/>
+                  <a:srgbClr val="10171F"/>
                 </a:solidFill>
                 <a:latin typeface="Noto Sans CJK SC"/>
                 <a:ea typeface="Noto Sans CJK SC"/>
@@ -5360,7 +5360,7 @@
             <a:r>
               <a:rPr sz="2478" b="1" i="0" lang="zh-CN" dirty="0">
                 <a:solidFill>
-                  <a:srgbClr val="1F2326"/>
+                  <a:srgbClr val="10171F"/>
                 </a:solidFill>
                 <a:latin typeface="Noto Sans CJK SC"/>
                 <a:ea typeface="Noto Sans CJK SC"/>
@@ -5406,7 +5406,7 @@
               </a:spcAft>
               <a:defRPr sz="1687" b="0" i="0" lang="zh-CN" dirty="0">
                 <a:solidFill>
-                  <a:srgbClr val="3A4046"/>
+                  <a:srgbClr val="2B333A"/>
                 </a:solidFill>
                 <a:latin typeface="DejaVu Sans"/>
                 <a:ea typeface="DejaVu Sans"/>
@@ -5416,7 +5416,7 @@
             <a:r>
               <a:rPr sz="1687" b="0" i="0" lang="zh-CN" dirty="0">
                 <a:solidFill>
-                  <a:srgbClr val="3A4046"/>
+                  <a:srgbClr val="2B333A"/>
                 </a:solidFill>
                 <a:latin typeface="DejaVu Sans"/>
                 <a:ea typeface="DejaVu Sans"/>
@@ -5427,7 +5427,7 @@
             <a:r>
               <a:rPr sz="1687" b="0" i="0" lang="zh-CN" dirty="0">
                 <a:solidFill>
-                  <a:srgbClr val="3A4046"/>
+                  <a:srgbClr val="2B333A"/>
                 </a:solidFill>
                 <a:latin typeface="Noto Sans CJK SC"/>
                 <a:ea typeface="Noto Sans CJK SC"/>
@@ -5452,9 +5452,9 @@
           <a:prstGeom prst="line">
             <a:avLst/>
           </a:prstGeom>
-          <a:ln w="23812">
+          <a:ln w="31749">
             <a:solidFill>
-              <a:srgbClr val="1F6F78"/>
+              <a:srgbClr val="1B717D"/>
             </a:solidFill>
           </a:ln>
           <a:effectLst/>
@@ -5482,8 +5482,8 @@
         </p:nvSpPr>
         <p:spPr>
           <a:xfrm>
-            <a:off x="3968750" y="5174210"/>
-            <a:ext cx="317389" cy="278852"/>
+            <a:off x="3968750" y="5171218"/>
+            <a:ext cx="319992" cy="281845"/>
           </a:xfrm>
           <a:custGeom>
             <a:avLst/>
@@ -5492,34 +5492,34 @@
             <a:cxnLst/>
             <a:rect l="l" t="t" r="r" b="b"/>
             <a:pathLst>
-              <a:path w="39986" h="35131">
+              <a:path w="40314" h="35508">
                 <a:moveTo>
-                  <a:pt x="39986" y="2262"/>
+                  <a:pt x="40314" y="3016"/>
                 </a:moveTo>
                 <a:lnTo>
-                  <a:pt x="11539" y="27062"/>
+                  <a:pt x="13375" y="26501"/>
                 </a:lnTo>
                 <a:lnTo>
-                  <a:pt x="14496" y="30454"/>
+                  <a:pt x="16660" y="30270"/>
                 </a:lnTo>
                 <a:lnTo>
-                  <a:pt x="0" y="35131"/>
+                  <a:pt x="0" y="35508"/>
                 </a:lnTo>
                 <a:lnTo>
-                  <a:pt x="6610" y="21408"/>
+                  <a:pt x="7460" y="19717"/>
                 </a:lnTo>
                 <a:lnTo>
-                  <a:pt x="9567" y="24800"/>
+                  <a:pt x="10746" y="23486"/>
                 </a:lnTo>
                 <a:lnTo>
-                  <a:pt x="38014" y="0"/>
+                  <a:pt x="37686" y="0"/>
                 </a:lnTo>
                 <a:close/>
               </a:path>
             </a:pathLst>
           </a:custGeom>
           <a:solidFill>
-            <a:srgbClr val="1F6F78"/>
+            <a:srgbClr val="1B717D"/>
           </a:solidFill>
           <a:ln>
             <a:noFill/>
@@ -5565,11 +5565,11 @@
             </a:avLst>
           </a:prstGeom>
           <a:solidFill>
-            <a:srgbClr val="FFFFFF"/>
+            <a:srgbClr val="E9EDED"/>
           </a:solidFill>
-          <a:ln w="15874">
+          <a:ln w="19843">
             <a:solidFill>
-              <a:srgbClr val="1F6F78"/>
+              <a:srgbClr val="1B717D"/>
             </a:solidFill>
           </a:ln>
           <a:effectLst/>
@@ -5631,7 +5631,7 @@
               </a:spcAft>
               <a:defRPr sz="1499" b="1" i="0" lang="zh-CN" dirty="0">
                 <a:solidFill>
-                  <a:srgbClr val="1F6F78"/>
+                  <a:srgbClr val="1B717D"/>
                 </a:solidFill>
                 <a:latin typeface="Noto Sans CJK SC"/>
                 <a:ea typeface="Noto Sans CJK SC"/>
@@ -5641,7 +5641,7 @@
             <a:r>
               <a:rPr sz="1499" b="1" i="0" lang="zh-CN" dirty="0">
                 <a:solidFill>
-                  <a:srgbClr val="1F6F78"/>
+                  <a:srgbClr val="1B717D"/>
                 </a:solidFill>
                 <a:latin typeface="Noto Sans CJK SC"/>
                 <a:ea typeface="Noto Sans CJK SC"/>
@@ -5671,9 +5671,9 @@
           <a:solidFill>
             <a:srgbClr val="FFFFFF"/>
           </a:solidFill>
-          <a:ln w="19843">
+          <a:ln w="27781">
             <a:solidFill>
-              <a:srgbClr val="4A5158"/>
+              <a:srgbClr val="3F4A53"/>
             </a:solidFill>
           </a:ln>
           <a:effectLst/>
@@ -5735,7 +5735,7 @@
               </a:spcAft>
               <a:defRPr sz="2478" b="1" i="0" lang="zh-CN" dirty="0">
                 <a:solidFill>
-                  <a:srgbClr val="1F2326"/>
+                  <a:srgbClr val="10171F"/>
                 </a:solidFill>
                 <a:latin typeface="Noto Sans CJK SC"/>
                 <a:ea typeface="Noto Sans CJK SC"/>
@@ -5745,7 +5745,7 @@
             <a:r>
               <a:rPr sz="2478" b="1" i="0" lang="zh-CN" dirty="0">
                 <a:solidFill>
-                  <a:srgbClr val="1F2326"/>
+                  <a:srgbClr val="10171F"/>
                 </a:solidFill>
                 <a:latin typeface="Noto Sans CJK SC"/>
                 <a:ea typeface="Noto Sans CJK SC"/>
@@ -5791,7 +5791,7 @@
               </a:spcAft>
               <a:defRPr sz="1687" b="0" i="0" lang="zh-CN" dirty="0">
                 <a:solidFill>
-                  <a:srgbClr val="3A4046"/>
+                  <a:srgbClr val="2B333A"/>
                 </a:solidFill>
                 <a:latin typeface="Noto Sans CJK SC"/>
                 <a:ea typeface="Noto Sans CJK SC"/>
@@ -5801,7 +5801,7 @@
             <a:r>
               <a:rPr sz="1687" b="0" i="0" lang="zh-CN" dirty="0">
                 <a:solidFill>
-                  <a:srgbClr val="3A4046"/>
+                  <a:srgbClr val="2B333A"/>
                 </a:solidFill>
                 <a:latin typeface="Noto Sans CJK SC"/>
                 <a:ea typeface="Noto Sans CJK SC"/>
@@ -5812,7 +5812,7 @@
             <a:r>
               <a:rPr sz="1687" b="0" i="0" lang="zh-CN" dirty="0">
                 <a:solidFill>
-                  <a:srgbClr val="3A4046"/>
+                  <a:srgbClr val="2B333A"/>
                 </a:solidFill>
                 <a:latin typeface="DejaVu Sans"/>
                 <a:ea typeface="DejaVu Sans"/>
@@ -5823,7 +5823,7 @@
             <a:r>
               <a:rPr sz="1687" b="0" i="0" lang="zh-CN" dirty="0">
                 <a:solidFill>
-                  <a:srgbClr val="3A4046"/>
+                  <a:srgbClr val="2B333A"/>
                 </a:solidFill>
                 <a:latin typeface="Noto Sans CJK SC"/>
                 <a:ea typeface="Noto Sans CJK SC"/>
@@ -5848,9 +5848,9 @@
           <a:prstGeom prst="line">
             <a:avLst/>
           </a:prstGeom>
-          <a:ln w="23812">
+          <a:ln w="31749">
             <a:solidFill>
-              <a:srgbClr val="1F6F78"/>
+              <a:srgbClr val="1B717D"/>
             </a:solidFill>
           </a:ln>
           <a:effectLst/>
@@ -5878,8 +5878,8 @@
         </p:nvSpPr>
         <p:spPr>
           <a:xfrm>
-            <a:off x="7905750" y="5174313"/>
-            <a:ext cx="309562" cy="278749"/>
+            <a:off x="7903099" y="5171360"/>
+            <a:ext cx="312214" cy="281702"/>
           </a:xfrm>
           <a:custGeom>
             <a:avLst/>
@@ -5888,34 +5888,34 @@
             <a:cxnLst/>
             <a:rect l="l" t="t" r="r" b="b"/>
             <a:pathLst>
-              <a:path w="39000" h="35118">
+              <a:path w="39334" h="35490">
                 <a:moveTo>
-                  <a:pt x="2000" y="0"/>
+                  <a:pt x="2668" y="0"/>
                 </a:moveTo>
                 <a:lnTo>
-                  <a:pt x="29567" y="24665"/>
+                  <a:pt x="28744" y="23331"/>
                 </a:lnTo>
                 <a:lnTo>
-                  <a:pt x="32567" y="21311"/>
+                  <a:pt x="32078" y="19605"/>
                 </a:lnTo>
                 <a:lnTo>
-                  <a:pt x="39000" y="35118"/>
+                  <a:pt x="39334" y="35490"/>
                 </a:lnTo>
                 <a:lnTo>
-                  <a:pt x="24566" y="30254"/>
+                  <a:pt x="22743" y="30038"/>
                 </a:lnTo>
                 <a:lnTo>
-                  <a:pt x="27566" y="26901"/>
+                  <a:pt x="26077" y="26312"/>
                 </a:lnTo>
                 <a:lnTo>
-                  <a:pt x="0" y="2236"/>
+                  <a:pt x="0" y="2980"/>
                 </a:lnTo>
                 <a:close/>
               </a:path>
             </a:pathLst>
           </a:custGeom>
           <a:solidFill>
-            <a:srgbClr val="1F6F78"/>
+            <a:srgbClr val="1B717D"/>
           </a:solidFill>
           <a:ln>
             <a:noFill/>
@@ -5961,11 +5961,11 @@
             </a:avLst>
           </a:prstGeom>
           <a:solidFill>
-            <a:srgbClr val="FFFFFF"/>
+            <a:srgbClr val="E9EDED"/>
           </a:solidFill>
-          <a:ln w="15874">
+          <a:ln w="19843">
             <a:solidFill>
-              <a:srgbClr val="1F6F78"/>
+              <a:srgbClr val="1B717D"/>
             </a:solidFill>
           </a:ln>
           <a:effectLst/>
@@ -6027,7 +6027,7 @@
               </a:spcAft>
               <a:defRPr sz="1499" b="1" i="0" lang="zh-CN" dirty="0">
                 <a:solidFill>
-                  <a:srgbClr val="1F6F78"/>
+                  <a:srgbClr val="1B717D"/>
                 </a:solidFill>
                 <a:latin typeface="Noto Sans CJK SC"/>
                 <a:ea typeface="Noto Sans CJK SC"/>
@@ -6037,7 +6037,7 @@
             <a:r>
               <a:rPr sz="1499" b="1" i="0" lang="zh-CN" dirty="0">
                 <a:solidFill>
-                  <a:srgbClr val="1F6F78"/>
+                  <a:srgbClr val="1B717D"/>
                 </a:solidFill>
                 <a:latin typeface="Noto Sans CJK SC"/>
                 <a:ea typeface="Noto Sans CJK SC"/>
@@ -6067,12 +6067,12 @@
           <a:solidFill>
             <a:srgbClr val="FFFFFF"/>
           </a:solidFill>
-          <a:ln w="19843">
+          <a:ln w="27781">
             <a:solidFill>
-              <a:srgbClr val="B8862B"/>
+              <a:srgbClr val="BD8024"/>
             </a:solidFill>
             <a:custDash>
-              <a:ds d="640000" sp="400000"/>
+              <a:ds d="457143" sp="285714"/>
             </a:custDash>
           </a:ln>
           <a:effectLst/>
@@ -6134,7 +6134,7 @@
               </a:spcAft>
               <a:defRPr sz="1749" b="1" i="0" lang="zh-CN" dirty="0">
                 <a:solidFill>
-                  <a:srgbClr val="1F2326"/>
+                  <a:srgbClr val="10171F"/>
                 </a:solidFill>
                 <a:latin typeface="DejaVu Sans"/>
                 <a:ea typeface="DejaVu Sans"/>
@@ -6144,7 +6144,7 @@
             <a:r>
               <a:rPr sz="1749" b="1" i="0" lang="zh-CN" dirty="0">
                 <a:solidFill>
-                  <a:srgbClr val="1F2326"/>
+                  <a:srgbClr val="10171F"/>
                 </a:solidFill>
                 <a:latin typeface="DejaVu Sans"/>
                 <a:ea typeface="DejaVu Sans"/>
@@ -6190,7 +6190,7 @@
               </a:spcAft>
               <a:defRPr sz="1687" b="0" i="0" lang="zh-CN" dirty="0">
                 <a:solidFill>
-                  <a:srgbClr val="3A4046"/>
+                  <a:srgbClr val="2B333A"/>
                 </a:solidFill>
                 <a:latin typeface="Noto Sans CJK SC"/>
                 <a:ea typeface="Noto Sans CJK SC"/>
@@ -6200,7 +6200,7 @@
             <a:r>
               <a:rPr sz="1687" b="0" i="0" lang="zh-CN" dirty="0">
                 <a:solidFill>
-                  <a:srgbClr val="3A4046"/>
+                  <a:srgbClr val="2B333A"/>
                 </a:solidFill>
                 <a:latin typeface="Noto Sans CJK SC"/>
                 <a:ea typeface="Noto Sans CJK SC"/>
@@ -6225,12 +6225,12 @@
           <a:prstGeom prst="line">
             <a:avLst/>
           </a:prstGeom>
-          <a:ln w="23812">
+          <a:ln w="27781">
             <a:solidFill>
-              <a:srgbClr val="B8862B"/>
+              <a:srgbClr val="BD8024"/>
             </a:solidFill>
             <a:custDash>
-              <a:ds d="466667" sp="300000"/>
+              <a:ds d="400000" sp="257143"/>
             </a:custDash>
           </a:ln>
           <a:effectLst/>
@@ -6267,11 +6267,11 @@
             </a:avLst>
           </a:prstGeom>
           <a:solidFill>
-            <a:srgbClr val="FFFFFF"/>
+            <a:srgbClr val="E9EDED"/>
           </a:solidFill>
-          <a:ln w="15874">
+          <a:ln w="19843">
             <a:solidFill>
-              <a:srgbClr val="B8862B"/>
+              <a:srgbClr val="BD8024"/>
             </a:solidFill>
           </a:ln>
           <a:effectLst/>
@@ -6333,7 +6333,7 @@
               </a:spcAft>
               <a:defRPr sz="1499" b="1" i="0" lang="zh-CN" dirty="0">
                 <a:solidFill>
-                  <a:srgbClr val="7A5A1C"/>
+                  <a:srgbClr val="8A5A10"/>
                 </a:solidFill>
                 <a:latin typeface="Noto Sans CJK SC"/>
                 <a:ea typeface="Noto Sans CJK SC"/>
@@ -6343,7 +6343,7 @@
             <a:r>
               <a:rPr sz="1499" b="1" i="0" lang="zh-CN" dirty="0">
                 <a:solidFill>
-                  <a:srgbClr val="7A5A1C"/>
+                  <a:srgbClr val="8A5A10"/>
                 </a:solidFill>
                 <a:latin typeface="Noto Sans CJK SC"/>
                 <a:ea typeface="Noto Sans CJK SC"/>
@@ -6368,12 +6368,12 @@
           <a:prstGeom prst="line">
             <a:avLst/>
           </a:prstGeom>
-          <a:ln w="23812">
+          <a:ln w="27781">
             <a:solidFill>
-              <a:srgbClr val="B8862B"/>
+              <a:srgbClr val="BD8024"/>
             </a:solidFill>
             <a:custDash>
-              <a:ds d="466667" sp="300000"/>
+              <a:ds d="400000" sp="257143"/>
             </a:custDash>
             <a:tailEnd type="triangle"/>
           </a:ln>

--- a/media/figstudio/bzso_taxonomy/taxonomy_phase_control_editable.pptx
+++ b/media/figstudio/bzso_taxonomy/taxonomy_phase_control_editable.pptx
@@ -3531,11 +3531,11 @@
             <a:avLst/>
           </a:prstGeom>
           <a:solidFill>
-            <a:srgbClr val="FFFFFF"/>
+            <a:srgbClr val="1B717D"/>
           </a:solidFill>
           <a:ln w="31749">
             <a:solidFill>
-              <a:srgbClr val="38525E"/>
+              <a:srgbClr val="145159"/>
             </a:solidFill>
           </a:ln>
           <a:effectLst/>
@@ -3597,7 +3597,7 @@
               </a:spcAft>
               <a:defRPr sz="1999" b="1" i="0" lang="zh-CN" dirty="0">
                 <a:solidFill>
-                  <a:srgbClr val="10171F"/>
+                  <a:srgbClr val="FFFFFF"/>
                 </a:solidFill>
                 <a:latin typeface="DejaVu Sans"/>
                 <a:ea typeface="DejaVu Sans"/>
@@ -3607,7 +3607,7 @@
             <a:r>
               <a:rPr sz="1999" b="1" i="0" lang="zh-CN" dirty="0">
                 <a:solidFill>
-                  <a:srgbClr val="10171F"/>
+                  <a:srgbClr val="FFFFFF"/>
                 </a:solidFill>
                 <a:latin typeface="DejaVu Sans"/>
                 <a:ea typeface="DejaVu Sans"/>
@@ -3629,7 +3629,7 @@
               </a:spcAft>
               <a:defRPr sz="1999" b="1" i="0" lang="zh-CN" dirty="0">
                 <a:solidFill>
-                  <a:srgbClr val="10171F"/>
+                  <a:srgbClr val="FFFFFF"/>
                 </a:solidFill>
                 <a:latin typeface="Noto Sans CJK SC"/>
                 <a:ea typeface="Noto Sans CJK SC"/>
@@ -3639,7 +3639,7 @@
             <a:r>
               <a:rPr sz="1999" b="1" i="0" lang="zh-CN" dirty="0">
                 <a:solidFill>
-                  <a:srgbClr val="10171F"/>
+                  <a:srgbClr val="FFFFFF"/>
                 </a:solidFill>
                 <a:latin typeface="Noto Sans CJK SC"/>
                 <a:ea typeface="Noto Sans CJK SC"/>
@@ -3667,7 +3667,7 @@
             </a:avLst>
           </a:prstGeom>
           <a:solidFill>
-            <a:srgbClr val="FFFFFF"/>
+            <a:srgbClr val="F2F5F7"/>
           </a:solidFill>
           <a:ln w="27781">
             <a:solidFill>
@@ -3959,11 +3959,11 @@
             </a:avLst>
           </a:prstGeom>
           <a:solidFill>
-            <a:srgbClr val="E9EDED"/>
+            <a:srgbClr val="1B717D"/>
           </a:solidFill>
           <a:ln w="19843">
             <a:solidFill>
-              <a:srgbClr val="1B717D"/>
+              <a:srgbClr val="145159"/>
             </a:solidFill>
           </a:ln>
           <a:effectLst/>
@@ -4025,7 +4025,7 @@
               </a:spcAft>
               <a:defRPr sz="1499" b="1" i="0" lang="zh-CN" dirty="0">
                 <a:solidFill>
-                  <a:srgbClr val="1B717D"/>
+                  <a:srgbClr val="FFFFFF"/>
                 </a:solidFill>
                 <a:latin typeface="Noto Sans CJK SC"/>
                 <a:ea typeface="Noto Sans CJK SC"/>
@@ -4035,7 +4035,7 @@
             <a:r>
               <a:rPr sz="1499" b="1" i="0" lang="zh-CN" dirty="0">
                 <a:solidFill>
-                  <a:srgbClr val="1B717D"/>
+                  <a:srgbClr val="FFFFFF"/>
                 </a:solidFill>
                 <a:latin typeface="Noto Sans CJK SC"/>
                 <a:ea typeface="Noto Sans CJK SC"/>
@@ -4063,7 +4063,7 @@
             </a:avLst>
           </a:prstGeom>
           <a:solidFill>
-            <a:srgbClr val="FFFFFF"/>
+            <a:srgbClr val="F2F5F7"/>
           </a:solidFill>
           <a:ln w="27781">
             <a:solidFill>
@@ -4377,11 +4377,11 @@
             </a:avLst>
           </a:prstGeom>
           <a:solidFill>
-            <a:srgbClr val="E9EDED"/>
+            <a:srgbClr val="1B717D"/>
           </a:solidFill>
           <a:ln w="19843">
             <a:solidFill>
-              <a:srgbClr val="1B717D"/>
+              <a:srgbClr val="145159"/>
             </a:solidFill>
           </a:ln>
           <a:effectLst/>
@@ -4443,7 +4443,7 @@
               </a:spcAft>
               <a:defRPr sz="1499" b="1" i="0" lang="zh-CN" dirty="0">
                 <a:solidFill>
-                  <a:srgbClr val="1B717D"/>
+                  <a:srgbClr val="FFFFFF"/>
                 </a:solidFill>
                 <a:latin typeface="Noto Sans CJK SC"/>
                 <a:ea typeface="Noto Sans CJK SC"/>
@@ -4453,7 +4453,7 @@
             <a:r>
               <a:rPr sz="1499" b="1" i="0" lang="zh-CN" dirty="0">
                 <a:solidFill>
-                  <a:srgbClr val="1B717D"/>
+                  <a:srgbClr val="FFFFFF"/>
                 </a:solidFill>
                 <a:latin typeface="Noto Sans CJK SC"/>
                 <a:ea typeface="Noto Sans CJK SC"/>
@@ -4481,7 +4481,7 @@
             </a:avLst>
           </a:prstGeom>
           <a:solidFill>
-            <a:srgbClr val="FFFFFF"/>
+            <a:srgbClr val="F2F5F7"/>
           </a:solidFill>
           <a:ln w="27781">
             <a:solidFill>
@@ -4762,11 +4762,11 @@
             </a:avLst>
           </a:prstGeom>
           <a:solidFill>
-            <a:srgbClr val="E9EDED"/>
+            <a:srgbClr val="1B717D"/>
           </a:solidFill>
           <a:ln w="19843">
             <a:solidFill>
-              <a:srgbClr val="1B717D"/>
+              <a:srgbClr val="145159"/>
             </a:solidFill>
           </a:ln>
           <a:effectLst/>
@@ -4828,7 +4828,7 @@
               </a:spcAft>
               <a:defRPr sz="1499" b="1" i="0" lang="zh-CN" dirty="0">
                 <a:solidFill>
-                  <a:srgbClr val="1B717D"/>
+                  <a:srgbClr val="FFFFFF"/>
                 </a:solidFill>
                 <a:latin typeface="Noto Sans CJK SC"/>
                 <a:ea typeface="Noto Sans CJK SC"/>
@@ -4838,7 +4838,7 @@
             <a:r>
               <a:rPr sz="1499" b="1" i="0" lang="zh-CN" dirty="0">
                 <a:solidFill>
-                  <a:srgbClr val="1B717D"/>
+                  <a:srgbClr val="FFFFFF"/>
                 </a:solidFill>
                 <a:latin typeface="Noto Sans CJK SC"/>
                 <a:ea typeface="Noto Sans CJK SC"/>
@@ -4866,7 +4866,7 @@
             </a:avLst>
           </a:prstGeom>
           <a:solidFill>
-            <a:srgbClr val="FFFFFF"/>
+            <a:srgbClr val="F2F5F7"/>
           </a:solidFill>
           <a:ln w="27781">
             <a:solidFill>
@@ -5180,11 +5180,11 @@
             </a:avLst>
           </a:prstGeom>
           <a:solidFill>
-            <a:srgbClr val="E9EDED"/>
+            <a:srgbClr val="1B717D"/>
           </a:solidFill>
           <a:ln w="19843">
             <a:solidFill>
-              <a:srgbClr val="1B717D"/>
+              <a:srgbClr val="145159"/>
             </a:solidFill>
           </a:ln>
           <a:effectLst/>
@@ -5246,7 +5246,7 @@
               </a:spcAft>
               <a:defRPr sz="1499" b="1" i="0" lang="zh-CN" dirty="0">
                 <a:solidFill>
-                  <a:srgbClr val="1B717D"/>
+                  <a:srgbClr val="FFFFFF"/>
                 </a:solidFill>
                 <a:latin typeface="Noto Sans CJK SC"/>
                 <a:ea typeface="Noto Sans CJK SC"/>
@@ -5256,7 +5256,7 @@
             <a:r>
               <a:rPr sz="1499" b="1" i="0" lang="zh-CN" dirty="0">
                 <a:solidFill>
-                  <a:srgbClr val="1B717D"/>
+                  <a:srgbClr val="FFFFFF"/>
                 </a:solidFill>
                 <a:latin typeface="Noto Sans CJK SC"/>
                 <a:ea typeface="Noto Sans CJK SC"/>
@@ -5284,7 +5284,7 @@
             </a:avLst>
           </a:prstGeom>
           <a:solidFill>
-            <a:srgbClr val="FFFFFF"/>
+            <a:srgbClr val="F2F5F7"/>
           </a:solidFill>
           <a:ln w="27781">
             <a:solidFill>
@@ -5565,11 +5565,11 @@
             </a:avLst>
           </a:prstGeom>
           <a:solidFill>
-            <a:srgbClr val="E9EDED"/>
+            <a:srgbClr val="1B717D"/>
           </a:solidFill>
           <a:ln w="19843">
             <a:solidFill>
-              <a:srgbClr val="1B717D"/>
+              <a:srgbClr val="145159"/>
             </a:solidFill>
           </a:ln>
           <a:effectLst/>
@@ -5631,7 +5631,7 @@
               </a:spcAft>
               <a:defRPr sz="1499" b="1" i="0" lang="zh-CN" dirty="0">
                 <a:solidFill>
-                  <a:srgbClr val="1B717D"/>
+                  <a:srgbClr val="FFFFFF"/>
                 </a:solidFill>
                 <a:latin typeface="Noto Sans CJK SC"/>
                 <a:ea typeface="Noto Sans CJK SC"/>
@@ -5641,7 +5641,7 @@
             <a:r>
               <a:rPr sz="1499" b="1" i="0" lang="zh-CN" dirty="0">
                 <a:solidFill>
-                  <a:srgbClr val="1B717D"/>
+                  <a:srgbClr val="FFFFFF"/>
                 </a:solidFill>
                 <a:latin typeface="Noto Sans CJK SC"/>
                 <a:ea typeface="Noto Sans CJK SC"/>
@@ -5669,7 +5669,7 @@
             </a:avLst>
           </a:prstGeom>
           <a:solidFill>
-            <a:srgbClr val="FFFFFF"/>
+            <a:srgbClr val="F2F5F7"/>
           </a:solidFill>
           <a:ln w="27781">
             <a:solidFill>
@@ -5961,11 +5961,11 @@
             </a:avLst>
           </a:prstGeom>
           <a:solidFill>
-            <a:srgbClr val="E9EDED"/>
+            <a:srgbClr val="1B717D"/>
           </a:solidFill>
           <a:ln w="19843">
             <a:solidFill>
-              <a:srgbClr val="1B717D"/>
+              <a:srgbClr val="145159"/>
             </a:solidFill>
           </a:ln>
           <a:effectLst/>
@@ -6027,7 +6027,7 @@
               </a:spcAft>
               <a:defRPr sz="1499" b="1" i="0" lang="zh-CN" dirty="0">
                 <a:solidFill>
-                  <a:srgbClr val="1B717D"/>
+                  <a:srgbClr val="FFFFFF"/>
                 </a:solidFill>
                 <a:latin typeface="Noto Sans CJK SC"/>
                 <a:ea typeface="Noto Sans CJK SC"/>
@@ -6037,7 +6037,7 @@
             <a:r>
               <a:rPr sz="1499" b="1" i="0" lang="zh-CN" dirty="0">
                 <a:solidFill>
-                  <a:srgbClr val="1B717D"/>
+                  <a:srgbClr val="FFFFFF"/>
                 </a:solidFill>
                 <a:latin typeface="Noto Sans CJK SC"/>
                 <a:ea typeface="Noto Sans CJK SC"/>
@@ -6065,11 +6065,11 @@
             </a:avLst>
           </a:prstGeom>
           <a:solidFill>
-            <a:srgbClr val="FFFFFF"/>
+            <a:srgbClr val="FBF1DC"/>
           </a:solidFill>
           <a:ln w="27781">
             <a:solidFill>
-              <a:srgbClr val="BD8024"/>
+              <a:srgbClr val="B8781E"/>
             </a:solidFill>
             <a:custDash>
               <a:ds d="457143" sp="285714"/>
@@ -6227,7 +6227,7 @@
           </a:prstGeom>
           <a:ln w="27781">
             <a:solidFill>
-              <a:srgbClr val="BD8024"/>
+              <a:srgbClr val="B8781E"/>
             </a:solidFill>
             <a:custDash>
               <a:ds d="400000" sp="257143"/>
@@ -6267,11 +6267,11 @@
             </a:avLst>
           </a:prstGeom>
           <a:solidFill>
-            <a:srgbClr val="E9EDED"/>
+            <a:srgbClr val="B8781E"/>
           </a:solidFill>
           <a:ln w="19843">
             <a:solidFill>
-              <a:srgbClr val="BD8024"/>
+              <a:srgbClr val="8A5A10"/>
             </a:solidFill>
           </a:ln>
           <a:effectLst/>
@@ -6333,7 +6333,7 @@
               </a:spcAft>
               <a:defRPr sz="1499" b="1" i="0" lang="zh-CN" dirty="0">
                 <a:solidFill>
-                  <a:srgbClr val="8A5A10"/>
+                  <a:srgbClr val="FFFFFF"/>
                 </a:solidFill>
                 <a:latin typeface="Noto Sans CJK SC"/>
                 <a:ea typeface="Noto Sans CJK SC"/>
@@ -6343,7 +6343,7 @@
             <a:r>
               <a:rPr sz="1499" b="1" i="0" lang="zh-CN" dirty="0">
                 <a:solidFill>
-                  <a:srgbClr val="8A5A10"/>
+                  <a:srgbClr val="FFFFFF"/>
                 </a:solidFill>
                 <a:latin typeface="Noto Sans CJK SC"/>
                 <a:ea typeface="Noto Sans CJK SC"/>
@@ -6370,7 +6370,7 @@
           </a:prstGeom>
           <a:ln w="27781">
             <a:solidFill>
-              <a:srgbClr val="BD8024"/>
+              <a:srgbClr val="B8781E"/>
             </a:solidFill>
             <a:custDash>
               <a:ds d="400000" sp="257143"/>

--- a/media/figstudio/bzso_taxonomy/taxonomy_phase_control_editable.pptx
+++ b/media/figstudio/bzso_taxonomy/taxonomy_phase_control_editable.pptx
@@ -7,7 +7,7 @@
   <p:sldIdLst>
     <p:sldId id="256" r:id="rId7"/>
   </p:sldIdLst>
-  <p:sldSz cx="12191999" cy="8127999" type="screen4x3"/>
+  <p:sldSz cx="12191999" cy="6095999" type="screen4x3"/>
   <p:notesSz cx="6858000" cy="9144000"/>
   <p:defaultTextStyle>
     <a:defPPr>
@@ -502,7 +502,7 @@
           <a:lstStyle/>
           <a:p>
             <a:r>
-              <a:t>BaZn2Si2O7 合成与相控制分类框架（super_teaser 第二轮 F04 → super_img2ppt 重建）</a:t>
+              <a:t>BaZn2Si2O7 合成与相控制分类框架（super_teaser 第三轮 R04 → super_img2ppt 重建）</a:t>
             </a:r>
           </a:p>
         </p:txBody>
@@ -3518,24 +3518,26 @@
       <p:grpSpPr/>
       <p:sp>
         <p:nvSpPr>
-          <p:cNvPr id="2" name="hub" descr="Editable shape; source id hub"/>
+          <p:cNvPr id="2" name="zE" descr="Editable shape; source id zE"/>
           <p:cNvSpPr/>
           <p:nvPr/>
         </p:nvSpPr>
         <p:spPr>
           <a:xfrm>
-            <a:off x="5087937" y="2555874"/>
-            <a:ext cx="2016124" cy="2016124"/>
-          </a:xfrm>
-          <a:prstGeom prst="ellipse">
-            <a:avLst/>
+            <a:off x="3374448" y="501700"/>
+            <a:ext cx="3848658" cy="4810822"/>
+          </a:xfrm>
+          <a:prstGeom prst="roundRect">
+            <a:avLst>
+              <a:gd name="adj" fmla="val 2857"/>
+            </a:avLst>
           </a:prstGeom>
           <a:solidFill>
-            <a:srgbClr val="1B717D"/>
+            <a:srgbClr val="E6F2F3"/>
           </a:solidFill>
-          <a:ln w="31749">
+          <a:ln w="10308">
             <a:solidFill>
-              <a:srgbClr val="145159"/>
+              <a:srgbClr val="1F7F8C"/>
             </a:solidFill>
           </a:ln>
           <a:effectLst/>
@@ -3564,14 +3566,14 @@
       </p:sp>
       <p:sp>
         <p:nvSpPr>
-          <p:cNvPr id="3" name="hub_t" descr="Editable text; source id hub_t"/>
+          <p:cNvPr id="3" name="zE_l" descr="Editable text; source id zE_l"/>
           <p:cNvSpPr txBox="1"/>
           <p:nvPr/>
         </p:nvSpPr>
         <p:spPr>
           <a:xfrm>
-            <a:off x="5199062" y="3167062"/>
-            <a:ext cx="1793874" cy="793749"/>
+            <a:off x="3498155" y="584171"/>
+            <a:ext cx="687260" cy="226795"/>
           </a:xfrm>
           <a:prstGeom prst="rect">
             <a:avLst/>
@@ -3585,9 +3587,9 @@
           </a:bodyPr>
           <a:lstStyle/>
           <a:p>
-            <a:pPr algn="ctr" fontAlgn="base">
+            <a:pPr algn="l" fontAlgn="base">
               <a:lnSpc>
-                <a:spcPts val="2899"/>
+                <a:spcPts val="1745"/>
               </a:lnSpc>
               <a:spcBef>
                 <a:spcPts val="0"/>
@@ -3595,31 +3597,103 @@
               <a:spcAft>
                 <a:spcPts val="0"/>
               </a:spcAft>
-              <a:defRPr sz="1999" b="1" i="0" lang="zh-CN" dirty="0">
-                <a:solidFill>
-                  <a:srgbClr val="FFFFFF"/>
-                </a:solidFill>
-                <a:latin typeface="DejaVu Sans"/>
-                <a:ea typeface="DejaVu Sans"/>
-                <a:cs typeface="DejaVu Sans"/>
+              <a:defRPr sz="1190" b="1" i="0" lang="zh-CN" dirty="0">
+                <a:solidFill>
+                  <a:srgbClr val="0F4F58"/>
+                </a:solidFill>
+                <a:latin typeface="Noto Sans CJK SC"/>
+                <a:ea typeface="Noto Sans CJK SC"/>
+                <a:cs typeface="Noto Sans CJK SC"/>
               </a:defRPr>
             </a:pPr>
             <a:r>
-              <a:rPr sz="1999" b="1" i="0" lang="zh-CN" dirty="0">
-                <a:solidFill>
-                  <a:srgbClr val="FFFFFF"/>
-                </a:solidFill>
-                <a:latin typeface="DejaVu Sans"/>
-                <a:ea typeface="DejaVu Sans"/>
-                <a:cs typeface="DejaVu Sans"/>
+              <a:rPr sz="1190" b="1" i="0" lang="zh-CN" dirty="0">
+                <a:solidFill>
+                  <a:srgbClr val="0F4F58"/>
+                </a:solidFill>
+                <a:latin typeface="Noto Sans CJK SC"/>
+                <a:ea typeface="Noto Sans CJK SC"/>
+                <a:cs typeface="Noto Sans CJK SC"/>
               </a:rPr>
-              <a:t>BaZn2Si2O7</a:t>
-            </a:r>
-          </a:p>
-          <a:p>
-            <a:pPr algn="ctr" fontAlgn="base">
+              <a:t>实验方法</a:t>
+            </a:r>
+          </a:p>
+        </p:txBody>
+      </p:sp>
+      <p:sp>
+        <p:nvSpPr>
+          <p:cNvPr id="4" name="zL" descr="Editable shape; source id zL"/>
+          <p:cNvSpPr/>
+          <p:nvPr/>
+        </p:nvSpPr>
+        <p:spPr>
+          <a:xfrm>
+            <a:off x="8205889" y="501700"/>
+            <a:ext cx="3731824" cy="4810822"/>
+          </a:xfrm>
+          <a:prstGeom prst="roundRect">
+            <a:avLst>
+              <a:gd name="adj" fmla="val 2946"/>
+            </a:avLst>
+          </a:prstGeom>
+          <a:solidFill>
+            <a:srgbClr val="EEF2F7"/>
+          </a:solidFill>
+          <a:ln w="10308">
+            <a:solidFill>
+              <a:srgbClr val="5B7592"/>
+            </a:solidFill>
+          </a:ln>
+          <a:effectLst/>
+        </p:spPr>
+        <p:style>
+          <a:lnRef idx="1">
+            <a:schemeClr val="accent1"/>
+          </a:lnRef>
+          <a:fillRef idx="3">
+            <a:schemeClr val="accent1"/>
+          </a:fillRef>
+          <a:effectRef idx="0">
+            <a:schemeClr val="accent1"/>
+          </a:effectRef>
+          <a:fontRef idx="minor">
+            <a:schemeClr val="lt1"/>
+          </a:fontRef>
+        </p:style>
+        <p:txBody>
+          <a:bodyPr rtlCol="0" anchor="ctr"/>
+          <a:lstStyle/>
+          <a:p>
+            <a:pPr algn="ctr"/>
+          </a:p>
+        </p:txBody>
+      </p:sp>
+      <p:sp>
+        <p:nvSpPr>
+          <p:cNvPr id="5" name="zL_l" descr="Editable text; source id zL_l"/>
+          <p:cNvSpPr txBox="1"/>
+          <p:nvPr/>
+        </p:nvSpPr>
+        <p:spPr>
+          <a:xfrm>
+            <a:off x="8329596" y="584171"/>
+            <a:ext cx="687260" cy="226795"/>
+          </a:xfrm>
+          <a:prstGeom prst="rect">
+            <a:avLst/>
+          </a:prstGeom>
+          <a:noFill/>
+          <a:effectLst/>
+        </p:spPr>
+        <p:txBody>
+          <a:bodyPr wrap="none" anchor="ctr" tIns="0" rIns="0" bIns="0" lIns="0" anchorCtr="0" vertOverflow="overflow">
+            <a:noAutofit/>
+          </a:bodyPr>
+          <a:lstStyle/>
+          <a:p>
+            <a:pPr algn="l" fontAlgn="base">
               <a:lnSpc>
-                <a:spcPts val="2906"/>
+                <a:spcPts val="1745"/>
               </a:lnSpc>
               <a:spcBef>
                 <a:spcPts val="0"/>
@@ -3627,9 +3701,9 @@
               <a:spcAft>
                 <a:spcPts val="0"/>
               </a:spcAft>
-              <a:defRPr sz="1999" b="1" i="0" lang="zh-CN" dirty="0">
-                <a:solidFill>
-                  <a:srgbClr val="FFFFFF"/>
+              <a:defRPr sz="1190" b="1" i="0" lang="zh-CN" dirty="0">
+                <a:solidFill>
+                  <a:srgbClr val="2B3E57"/>
                 </a:solidFill>
                 <a:latin typeface="Noto Sans CJK SC"/>
                 <a:ea typeface="Noto Sans CJK SC"/>
@@ -3637,41 +3711,41 @@
               </a:defRPr>
             </a:pPr>
             <a:r>
-              <a:rPr sz="1999" b="1" i="0" lang="zh-CN" dirty="0">
-                <a:solidFill>
-                  <a:srgbClr val="FFFFFF"/>
+              <a:rPr sz="1190" b="1" i="0" lang="zh-CN" dirty="0">
+                <a:solidFill>
+                  <a:srgbClr val="2B3E57"/>
                 </a:solidFill>
                 <a:latin typeface="Noto Sans CJK SC"/>
                 <a:ea typeface="Noto Sans CJK SC"/>
                 <a:cs typeface="Noto Sans CJK SC"/>
               </a:rPr>
-              <a:t>目标相</a:t>
-            </a:r>
-          </a:p>
-        </p:txBody>
-      </p:sp>
-      <p:sp>
-        <p:nvSpPr>
-          <p:cNvPr id="4" name="k1" descr="Editable shape; source id k1"/>
+              <a:t>文献证据</a:t>
+            </a:r>
+          </a:p>
+        </p:txBody>
+      </p:sp>
+      <p:sp>
+        <p:nvSpPr>
+          <p:cNvPr id="6" name="hub" descr="Editable shape; source id hub"/>
           <p:cNvSpPr/>
           <p:nvPr/>
         </p:nvSpPr>
         <p:spPr>
           <a:xfrm>
-            <a:off x="1865312" y="380999"/>
-            <a:ext cx="3230562" cy="1317624"/>
+            <a:off x="240541" y="501700"/>
+            <a:ext cx="2020545" cy="4810822"/>
           </a:xfrm>
           <a:prstGeom prst="roundRect">
             <a:avLst>
-              <a:gd name="adj" fmla="val 8433"/>
+              <a:gd name="adj" fmla="val 3401"/>
             </a:avLst>
           </a:prstGeom>
           <a:solidFill>
-            <a:srgbClr val="F2F5F7"/>
+            <a:srgbClr val="FFFFFF"/>
           </a:solidFill>
-          <a:ln w="27781">
+          <a:ln w="10308">
             <a:solidFill>
-              <a:srgbClr val="3F4A53"/>
+              <a:srgbClr val="1F7F8C"/>
             </a:solidFill>
           </a:ln>
           <a:effectLst/>
@@ -3700,14 +3774,60 @@
       </p:sp>
       <p:sp>
         <p:nvSpPr>
-          <p:cNvPr id="5" name="k1_t" descr="Editable text; source id k1_t"/>
+          <p:cNvPr id="7" name="hub_s" descr="Editable shape; source id hub_s"/>
+          <p:cNvSpPr/>
+          <p:nvPr/>
+        </p:nvSpPr>
+        <p:spPr>
+          <a:xfrm>
+            <a:off x="240541" y="501700"/>
+            <a:ext cx="2020545" cy="54980"/>
+          </a:xfrm>
+          <a:prstGeom prst="roundRect">
+            <a:avLst>
+              <a:gd name="adj" fmla="val 50000"/>
+            </a:avLst>
+          </a:prstGeom>
+          <a:solidFill>
+            <a:srgbClr val="1F7F8C"/>
+          </a:solidFill>
+          <a:ln>
+            <a:noFill/>
+          </a:ln>
+          <a:effectLst/>
+        </p:spPr>
+        <p:style>
+          <a:lnRef idx="1">
+            <a:schemeClr val="accent1"/>
+          </a:lnRef>
+          <a:fillRef idx="3">
+            <a:schemeClr val="accent1"/>
+          </a:fillRef>
+          <a:effectRef idx="0">
+            <a:schemeClr val="accent1"/>
+          </a:effectRef>
+          <a:fontRef idx="minor">
+            <a:schemeClr val="lt1"/>
+          </a:fontRef>
+        </p:style>
+        <p:txBody>
+          <a:bodyPr rtlCol="0" anchor="ctr"/>
+          <a:lstStyle/>
+          <a:p>
+            <a:pPr algn="ctr"/>
+          </a:p>
+        </p:txBody>
+      </p:sp>
+      <p:sp>
+        <p:nvSpPr>
+          <p:cNvPr id="8" name="hub_t" descr="Editable text; source id hub_t"/>
           <p:cNvSpPr txBox="1"/>
           <p:nvPr/>
         </p:nvSpPr>
         <p:spPr>
           <a:xfrm>
-            <a:off x="1960562" y="587374"/>
-            <a:ext cx="3040062" cy="460374"/>
+            <a:off x="350502" y="2618462"/>
+            <a:ext cx="1800622" cy="350502"/>
           </a:xfrm>
           <a:prstGeom prst="rect">
             <a:avLst/>
@@ -3723,7 +3843,7 @@
           <a:p>
             <a:pPr algn="ctr" fontAlgn="base">
               <a:lnSpc>
-                <a:spcPts val="3593"/>
+                <a:spcPts val="2164"/>
               </a:lnSpc>
               <a:spcBef>
                 <a:spcPts val="0"/>
@@ -3731,39 +3851,39 @@
               <a:spcAft>
                 <a:spcPts val="0"/>
               </a:spcAft>
-              <a:defRPr sz="2478" b="1" i="0" lang="zh-CN" dirty="0">
-                <a:solidFill>
-                  <a:srgbClr val="10171F"/>
-                </a:solidFill>
-                <a:latin typeface="Noto Sans CJK SC"/>
-                <a:ea typeface="Noto Sans CJK SC"/>
-                <a:cs typeface="Noto Sans CJK SC"/>
+              <a:defRPr sz="1839" b="1" i="0" lang="zh-CN" dirty="0">
+                <a:solidFill>
+                  <a:srgbClr val="0F4F58"/>
+                </a:solidFill>
+                <a:latin typeface="DejaVu Sans"/>
+                <a:ea typeface="DejaVu Sans"/>
+                <a:cs typeface="DejaVu Sans"/>
               </a:defRPr>
             </a:pPr>
             <a:r>
-              <a:rPr sz="2478" b="1" i="0" lang="zh-CN" dirty="0">
-                <a:solidFill>
-                  <a:srgbClr val="10171F"/>
-                </a:solidFill>
-                <a:latin typeface="Noto Sans CJK SC"/>
-                <a:ea typeface="Noto Sans CJK SC"/>
-                <a:cs typeface="Noto Sans CJK SC"/>
+              <a:rPr sz="1839" b="1" i="0" lang="zh-CN" dirty="0">
+                <a:solidFill>
+                  <a:srgbClr val="0F4F58"/>
+                </a:solidFill>
+                <a:latin typeface="DejaVu Sans"/>
+                <a:ea typeface="DejaVu Sans"/>
+                <a:cs typeface="DejaVu Sans"/>
               </a:rPr>
-              <a:t>结构与多晶型</a:t>
-            </a:r>
-          </a:p>
-        </p:txBody>
-      </p:sp>
-      <p:sp>
-        <p:nvSpPr>
-          <p:cNvPr id="6" name="k1_s" descr="Editable text; source id k1_s"/>
+              <a:t>BaZn2Si2O7</a:t>
+            </a:r>
+          </a:p>
+        </p:txBody>
+      </p:sp>
+      <p:sp>
+        <p:nvSpPr>
+          <p:cNvPr id="9" name="hub_k0" descr="Editable text; source id hub_k0"/>
           <p:cNvSpPr txBox="1"/>
           <p:nvPr/>
         </p:nvSpPr>
         <p:spPr>
           <a:xfrm>
-            <a:off x="1960562" y="1127124"/>
-            <a:ext cx="3040062" cy="333374"/>
+            <a:off x="350502" y="3023945"/>
+            <a:ext cx="1800622" cy="274904"/>
           </a:xfrm>
           <a:prstGeom prst="rect">
             <a:avLst/>
@@ -3779,7 +3899,7 @@
           <a:p>
             <a:pPr algn="ctr" fontAlgn="base">
               <a:lnSpc>
-                <a:spcPts val="2468"/>
+                <a:spcPts val="2042"/>
               </a:lnSpc>
               <a:spcBef>
                 <a:spcPts val="0"/>
@@ -3787,9 +3907,9 @@
               <a:spcAft>
                 <a:spcPts val="0"/>
               </a:spcAft>
-              <a:defRPr sz="1687" b="0" i="0" lang="zh-CN" dirty="0">
-                <a:solidFill>
-                  <a:srgbClr val="2B333A"/>
+              <a:defRPr sz="1406" b="0" i="0" lang="zh-CN" dirty="0">
+                <a:solidFill>
+                  <a:srgbClr val="3F4854"/>
                 </a:solidFill>
                 <a:latin typeface="Noto Sans CJK SC"/>
                 <a:ea typeface="Noto Sans CJK SC"/>
@@ -3797,9 +3917,240 @@
               </a:defRPr>
             </a:pPr>
             <a:r>
-              <a:rPr sz="1687" b="0" i="0" lang="zh-CN" dirty="0">
-                <a:solidFill>
-                  <a:srgbClr val="2B333A"/>
+              <a:rPr sz="1406" b="0" i="0" lang="zh-CN" dirty="0">
+                <a:solidFill>
+                  <a:srgbClr val="3F4854"/>
+                </a:solidFill>
+                <a:latin typeface="Noto Sans CJK SC"/>
+                <a:ea typeface="Noto Sans CJK SC"/>
+                <a:cs typeface="Noto Sans CJK SC"/>
+              </a:rPr>
+              <a:t>目标相</a:t>
+            </a:r>
+          </a:p>
+        </p:txBody>
+      </p:sp>
+      <p:sp>
+        <p:nvSpPr>
+          <p:cNvPr id="10" name="e1" descr="Editable shape; source id e1"/>
+          <p:cNvSpPr/>
+          <p:nvPr/>
+        </p:nvSpPr>
+        <p:spPr>
+          <a:xfrm>
+            <a:off x="3566881" y="962164"/>
+            <a:ext cx="3450047" cy="962164"/>
+          </a:xfrm>
+          <a:prstGeom prst="roundRect">
+            <a:avLst>
+              <a:gd name="adj" fmla="val 7142"/>
+            </a:avLst>
+          </a:prstGeom>
+          <a:solidFill>
+            <a:srgbClr val="FFFFFF"/>
+          </a:solidFill>
+          <a:ln w="10308">
+            <a:solidFill>
+              <a:srgbClr val="1F7F8C"/>
+            </a:solidFill>
+          </a:ln>
+          <a:effectLst/>
+        </p:spPr>
+        <p:style>
+          <a:lnRef idx="1">
+            <a:schemeClr val="accent1"/>
+          </a:lnRef>
+          <a:fillRef idx="3">
+            <a:schemeClr val="accent1"/>
+          </a:fillRef>
+          <a:effectRef idx="0">
+            <a:schemeClr val="accent1"/>
+          </a:effectRef>
+          <a:fontRef idx="minor">
+            <a:schemeClr val="lt1"/>
+          </a:fontRef>
+        </p:style>
+        <p:txBody>
+          <a:bodyPr rtlCol="0" anchor="ctr"/>
+          <a:lstStyle/>
+          <a:p>
+            <a:pPr algn="ctr"/>
+          </a:p>
+        </p:txBody>
+      </p:sp>
+      <p:sp>
+        <p:nvSpPr>
+          <p:cNvPr id="11" name="e1_s" descr="Editable shape; source id e1_s"/>
+          <p:cNvSpPr/>
+          <p:nvPr/>
+        </p:nvSpPr>
+        <p:spPr>
+          <a:xfrm>
+            <a:off x="3566881" y="962164"/>
+            <a:ext cx="3450047" cy="54980"/>
+          </a:xfrm>
+          <a:prstGeom prst="roundRect">
+            <a:avLst>
+              <a:gd name="adj" fmla="val 50000"/>
+            </a:avLst>
+          </a:prstGeom>
+          <a:solidFill>
+            <a:srgbClr val="1F7F8C"/>
+          </a:solidFill>
+          <a:ln>
+            <a:noFill/>
+          </a:ln>
+          <a:effectLst/>
+        </p:spPr>
+        <p:style>
+          <a:lnRef idx="1">
+            <a:schemeClr val="accent1"/>
+          </a:lnRef>
+          <a:fillRef idx="3">
+            <a:schemeClr val="accent1"/>
+          </a:fillRef>
+          <a:effectRef idx="0">
+            <a:schemeClr val="accent1"/>
+          </a:effectRef>
+          <a:fontRef idx="minor">
+            <a:schemeClr val="lt1"/>
+          </a:fontRef>
+        </p:style>
+        <p:txBody>
+          <a:bodyPr rtlCol="0" anchor="ctr"/>
+          <a:lstStyle/>
+          <a:p>
+            <a:pPr algn="ctr"/>
+          </a:p>
+        </p:txBody>
+      </p:sp>
+      <p:pic>
+        <p:nvPicPr>
+          <p:cNvPr id="12" name="e1_i" descr="exact crop of the generated raster (line motif)"/>
+          <p:cNvPicPr>
+            <a:picLocks noChangeAspect="1"/>
+          </p:cNvPicPr>
+          <p:nvPr/>
+        </p:nvPicPr>
+        <p:blipFill>
+          <a:blip r:embed="rId2"/>
+          <a:stretch>
+            <a:fillRect/>
+          </a:stretch>
+        </p:blipFill>
+        <p:spPr>
+          <a:xfrm>
+            <a:off x="3728387" y="1154597"/>
+            <a:ext cx="226795" cy="302394"/>
+          </a:xfrm>
+          <a:prstGeom prst="rect">
+            <a:avLst/>
+          </a:prstGeom>
+          <a:effectLst/>
+        </p:spPr>
+      </p:pic>
+      <p:sp>
+        <p:nvSpPr>
+          <p:cNvPr id="13" name="e1_t" descr="Editable text; source id e1_t"/>
+          <p:cNvSpPr txBox="1"/>
+          <p:nvPr/>
+        </p:nvSpPr>
+        <p:spPr>
+          <a:xfrm>
+            <a:off x="4075454" y="1168342"/>
+            <a:ext cx="2817767" cy="274904"/>
+          </a:xfrm>
+          <a:prstGeom prst="rect">
+            <a:avLst/>
+          </a:prstGeom>
+          <a:noFill/>
+          <a:effectLst/>
+        </p:spPr>
+        <p:txBody>
+          <a:bodyPr wrap="none" anchor="ctr" tIns="0" rIns="0" bIns="0" lIns="0" anchorCtr="0" vertOverflow="overflow">
+            <a:noAutofit/>
+          </a:bodyPr>
+          <a:lstStyle/>
+          <a:p>
+            <a:pPr algn="l" fontAlgn="base">
+              <a:lnSpc>
+                <a:spcPts val="2137"/>
+              </a:lnSpc>
+              <a:spcBef>
+                <a:spcPts val="0"/>
+              </a:spcBef>
+              <a:spcAft>
+                <a:spcPts val="0"/>
+              </a:spcAft>
+              <a:defRPr sz="1461" b="1" i="0" lang="zh-CN" dirty="0">
+                <a:solidFill>
+                  <a:srgbClr val="0F4F58"/>
+                </a:solidFill>
+                <a:latin typeface="Noto Sans CJK SC"/>
+                <a:ea typeface="Noto Sans CJK SC"/>
+                <a:cs typeface="Noto Sans CJK SC"/>
+              </a:defRPr>
+            </a:pPr>
+            <a:r>
+              <a:rPr sz="1461" b="1" i="0" lang="zh-CN" dirty="0">
+                <a:solidFill>
+                  <a:srgbClr val="0F4F58"/>
+                </a:solidFill>
+                <a:latin typeface="Noto Sans CJK SC"/>
+                <a:ea typeface="Noto Sans CJK SC"/>
+                <a:cs typeface="Noto Sans CJK SC"/>
+              </a:rPr>
+              <a:t>结构与多晶型</a:t>
+            </a:r>
+          </a:p>
+        </p:txBody>
+      </p:sp>
+      <p:sp>
+        <p:nvSpPr>
+          <p:cNvPr id="14" name="e1_k0" descr="Editable text; source id e1_k0"/>
+          <p:cNvSpPr txBox="1"/>
+          <p:nvPr/>
+        </p:nvSpPr>
+        <p:spPr>
+          <a:xfrm>
+            <a:off x="3690588" y="1498227"/>
+            <a:ext cx="3202633" cy="219923"/>
+          </a:xfrm>
+          <a:prstGeom prst="rect">
+            <a:avLst/>
+          </a:prstGeom>
+          <a:noFill/>
+          <a:effectLst/>
+        </p:spPr>
+        <p:txBody>
+          <a:bodyPr wrap="none" anchor="ctr" tIns="0" rIns="0" bIns="0" lIns="0" anchorCtr="0" vertOverflow="overflow">
+            <a:noAutofit/>
+          </a:bodyPr>
+          <a:lstStyle/>
+          <a:p>
+            <a:pPr algn="l" fontAlgn="base">
+              <a:lnSpc>
+                <a:spcPts val="1664"/>
+              </a:lnSpc>
+              <a:spcBef>
+                <a:spcPts val="0"/>
+              </a:spcBef>
+              <a:spcAft>
+                <a:spcPts val="0"/>
+              </a:spcAft>
+              <a:defRPr sz="1136" b="0" i="0" lang="zh-CN" dirty="0">
+                <a:solidFill>
+                  <a:srgbClr val="3F4854"/>
+                </a:solidFill>
+                <a:latin typeface="Noto Sans CJK SC"/>
+                <a:ea typeface="Noto Sans CJK SC"/>
+                <a:cs typeface="Noto Sans CJK SC"/>
+              </a:defRPr>
+            </a:pPr>
+            <a:r>
+              <a:rPr sz="1136" b="0" i="0" lang="zh-CN" dirty="0">
+                <a:solidFill>
+                  <a:srgbClr val="3F4854"/>
                 </a:solidFill>
                 <a:latin typeface="Noto Sans CJK SC"/>
                 <a:ea typeface="Noto Sans CJK SC"/>
@@ -3808,9 +4159,9 @@
               <a:t>相变</a:t>
             </a:r>
             <a:r>
-              <a:rPr sz="1687" b="0" i="0" lang="zh-CN" dirty="0">
-                <a:solidFill>
-                  <a:srgbClr val="2B333A"/>
+              <a:rPr sz="1136" b="0" i="0" lang="zh-CN" dirty="0">
+                <a:solidFill>
+                  <a:srgbClr val="3F4854"/>
                 </a:solidFill>
                 <a:latin typeface="DejaVu Sans"/>
                 <a:ea typeface="DejaVu Sans"/>
@@ -3819,9 +4170,9 @@
               <a:t> · </a:t>
             </a:r>
             <a:r>
-              <a:rPr sz="1687" b="0" i="0" lang="zh-CN" dirty="0">
-                <a:solidFill>
-                  <a:srgbClr val="2B333A"/>
+              <a:rPr sz="1136" b="0" i="0" lang="zh-CN" dirty="0">
+                <a:solidFill>
+                  <a:srgbClr val="3F4854"/>
                 </a:solidFill>
                 <a:latin typeface="Noto Sans CJK SC"/>
                 <a:ea typeface="Noto Sans CJK SC"/>
@@ -3832,23 +4183,1498 @@
           </a:p>
         </p:txBody>
       </p:sp>
+      <p:sp>
+        <p:nvSpPr>
+          <p:cNvPr id="15" name="e2" descr="Editable shape; source id e2"/>
+          <p:cNvSpPr/>
+          <p:nvPr/>
+        </p:nvSpPr>
+        <p:spPr>
+          <a:xfrm>
+            <a:off x="3566881" y="2027418"/>
+            <a:ext cx="3450047" cy="962164"/>
+          </a:xfrm>
+          <a:prstGeom prst="roundRect">
+            <a:avLst>
+              <a:gd name="adj" fmla="val 7142"/>
+            </a:avLst>
+          </a:prstGeom>
+          <a:solidFill>
+            <a:srgbClr val="FFFFFF"/>
+          </a:solidFill>
+          <a:ln w="10308">
+            <a:solidFill>
+              <a:srgbClr val="1F7F8C"/>
+            </a:solidFill>
+          </a:ln>
+          <a:effectLst/>
+        </p:spPr>
+        <p:style>
+          <a:lnRef idx="1">
+            <a:schemeClr val="accent1"/>
+          </a:lnRef>
+          <a:fillRef idx="3">
+            <a:schemeClr val="accent1"/>
+          </a:fillRef>
+          <a:effectRef idx="0">
+            <a:schemeClr val="accent1"/>
+          </a:effectRef>
+          <a:fontRef idx="minor">
+            <a:schemeClr val="lt1"/>
+          </a:fontRef>
+        </p:style>
+        <p:txBody>
+          <a:bodyPr rtlCol="0" anchor="ctr"/>
+          <a:lstStyle/>
+          <a:p>
+            <a:pPr algn="ctr"/>
+          </a:p>
+        </p:txBody>
+      </p:sp>
+      <p:sp>
+        <p:nvSpPr>
+          <p:cNvPr id="16" name="e2_s" descr="Editable shape; source id e2_s"/>
+          <p:cNvSpPr/>
+          <p:nvPr/>
+        </p:nvSpPr>
+        <p:spPr>
+          <a:xfrm>
+            <a:off x="3566881" y="2027418"/>
+            <a:ext cx="3450047" cy="54980"/>
+          </a:xfrm>
+          <a:prstGeom prst="roundRect">
+            <a:avLst>
+              <a:gd name="adj" fmla="val 50000"/>
+            </a:avLst>
+          </a:prstGeom>
+          <a:solidFill>
+            <a:srgbClr val="1F7F8C"/>
+          </a:solidFill>
+          <a:ln>
+            <a:noFill/>
+          </a:ln>
+          <a:effectLst/>
+        </p:spPr>
+        <p:style>
+          <a:lnRef idx="1">
+            <a:schemeClr val="accent1"/>
+          </a:lnRef>
+          <a:fillRef idx="3">
+            <a:schemeClr val="accent1"/>
+          </a:fillRef>
+          <a:effectRef idx="0">
+            <a:schemeClr val="accent1"/>
+          </a:effectRef>
+          <a:fontRef idx="minor">
+            <a:schemeClr val="lt1"/>
+          </a:fontRef>
+        </p:style>
+        <p:txBody>
+          <a:bodyPr rtlCol="0" anchor="ctr"/>
+          <a:lstStyle/>
+          <a:p>
+            <a:pPr algn="ctr"/>
+          </a:p>
+        </p:txBody>
+      </p:sp>
+      <p:pic>
+        <p:nvPicPr>
+          <p:cNvPr id="17" name="e2_i" descr="exact crop of the generated raster (line motif)"/>
+          <p:cNvPicPr>
+            <a:picLocks noChangeAspect="1"/>
+          </p:cNvPicPr>
+          <p:nvPr/>
+        </p:nvPicPr>
+        <p:blipFill>
+          <a:blip r:embed="rId3"/>
+          <a:stretch>
+            <a:fillRect/>
+          </a:stretch>
+        </p:blipFill>
+        <p:spPr>
+          <a:xfrm>
+            <a:off x="3690588" y="2236650"/>
+            <a:ext cx="302394" cy="268795"/>
+          </a:xfrm>
+          <a:prstGeom prst="rect">
+            <a:avLst/>
+          </a:prstGeom>
+          <a:effectLst/>
+        </p:spPr>
+      </p:pic>
+      <p:sp>
+        <p:nvSpPr>
+          <p:cNvPr id="18" name="e2_t" descr="Editable text; source id e2_t"/>
+          <p:cNvSpPr txBox="1"/>
+          <p:nvPr/>
+        </p:nvSpPr>
+        <p:spPr>
+          <a:xfrm>
+            <a:off x="4075454" y="2233596"/>
+            <a:ext cx="2817767" cy="274904"/>
+          </a:xfrm>
+          <a:prstGeom prst="rect">
+            <a:avLst/>
+          </a:prstGeom>
+          <a:noFill/>
+          <a:effectLst/>
+        </p:spPr>
+        <p:txBody>
+          <a:bodyPr wrap="none" anchor="ctr" tIns="0" rIns="0" bIns="0" lIns="0" anchorCtr="0" vertOverflow="overflow">
+            <a:noAutofit/>
+          </a:bodyPr>
+          <a:lstStyle/>
+          <a:p>
+            <a:pPr algn="l" fontAlgn="base">
+              <a:lnSpc>
+                <a:spcPts val="2137"/>
+              </a:lnSpc>
+              <a:spcBef>
+                <a:spcPts val="0"/>
+              </a:spcBef>
+              <a:spcAft>
+                <a:spcPts val="0"/>
+              </a:spcAft>
+              <a:defRPr sz="1461" b="1" i="0" lang="zh-CN" dirty="0">
+                <a:solidFill>
+                  <a:srgbClr val="0F4F58"/>
+                </a:solidFill>
+                <a:latin typeface="Noto Sans CJK SC"/>
+                <a:ea typeface="Noto Sans CJK SC"/>
+                <a:cs typeface="Noto Sans CJK SC"/>
+              </a:defRPr>
+            </a:pPr>
+            <a:r>
+              <a:rPr sz="1461" b="1" i="0" lang="zh-CN" dirty="0">
+                <a:solidFill>
+                  <a:srgbClr val="0F4F58"/>
+                </a:solidFill>
+                <a:latin typeface="Noto Sans CJK SC"/>
+                <a:ea typeface="Noto Sans CJK SC"/>
+                <a:cs typeface="Noto Sans CJK SC"/>
+              </a:rPr>
+              <a:t>合成路线</a:t>
+            </a:r>
+          </a:p>
+        </p:txBody>
+      </p:sp>
+      <p:sp>
+        <p:nvSpPr>
+          <p:cNvPr id="19" name="e2_k0" descr="Editable text; source id e2_k0"/>
+          <p:cNvSpPr txBox="1"/>
+          <p:nvPr/>
+        </p:nvSpPr>
+        <p:spPr>
+          <a:xfrm>
+            <a:off x="3690588" y="2563481"/>
+            <a:ext cx="3202633" cy="219923"/>
+          </a:xfrm>
+          <a:prstGeom prst="rect">
+            <a:avLst/>
+          </a:prstGeom>
+          <a:noFill/>
+          <a:effectLst/>
+        </p:spPr>
+        <p:txBody>
+          <a:bodyPr wrap="none" anchor="ctr" tIns="0" rIns="0" bIns="0" lIns="0" anchorCtr="0" vertOverflow="overflow">
+            <a:noAutofit/>
+          </a:bodyPr>
+          <a:lstStyle/>
+          <a:p>
+            <a:pPr algn="l" fontAlgn="base">
+              <a:lnSpc>
+                <a:spcPts val="1664"/>
+              </a:lnSpc>
+              <a:spcBef>
+                <a:spcPts val="0"/>
+              </a:spcBef>
+              <a:spcAft>
+                <a:spcPts val="0"/>
+              </a:spcAft>
+              <a:defRPr sz="1136" b="0" i="0" lang="zh-CN" dirty="0">
+                <a:solidFill>
+                  <a:srgbClr val="3F4854"/>
+                </a:solidFill>
+                <a:latin typeface="Noto Sans CJK SC"/>
+                <a:ea typeface="Noto Sans CJK SC"/>
+                <a:cs typeface="Noto Sans CJK SC"/>
+              </a:defRPr>
+            </a:pPr>
+            <a:r>
+              <a:rPr sz="1136" b="0" i="0" lang="zh-CN" dirty="0">
+                <a:solidFill>
+                  <a:srgbClr val="3F4854"/>
+                </a:solidFill>
+                <a:latin typeface="Noto Sans CJK SC"/>
+                <a:ea typeface="Noto Sans CJK SC"/>
+                <a:cs typeface="Noto Sans CJK SC"/>
+              </a:rPr>
+              <a:t>固相</a:t>
+            </a:r>
+            <a:r>
+              <a:rPr sz="1136" b="0" i="0" lang="zh-CN" dirty="0">
+                <a:solidFill>
+                  <a:srgbClr val="3F4854"/>
+                </a:solidFill>
+                <a:latin typeface="DejaVu Sans"/>
+                <a:ea typeface="DejaVu Sans"/>
+                <a:cs typeface="DejaVu Sans"/>
+              </a:rPr>
+              <a:t> · </a:t>
+            </a:r>
+            <a:r>
+              <a:rPr sz="1136" b="0" i="0" lang="zh-CN" dirty="0">
+                <a:solidFill>
+                  <a:srgbClr val="3F4854"/>
+                </a:solidFill>
+                <a:latin typeface="Noto Sans CJK SC"/>
+                <a:ea typeface="Noto Sans CJK SC"/>
+                <a:cs typeface="Noto Sans CJK SC"/>
+              </a:rPr>
+              <a:t>溶胶</a:t>
+            </a:r>
+            <a:r>
+              <a:rPr sz="1136" b="0" i="0" lang="zh-CN" dirty="0">
+                <a:solidFill>
+                  <a:srgbClr val="3F4854"/>
+                </a:solidFill>
+                <a:latin typeface="DejaVu Sans"/>
+                <a:ea typeface="DejaVu Sans"/>
+                <a:cs typeface="DejaVu Sans"/>
+              </a:rPr>
+              <a:t>—</a:t>
+            </a:r>
+            <a:r>
+              <a:rPr sz="1136" b="0" i="0" lang="zh-CN" dirty="0">
+                <a:solidFill>
+                  <a:srgbClr val="3F4854"/>
+                </a:solidFill>
+                <a:latin typeface="Noto Sans CJK SC"/>
+                <a:ea typeface="Noto Sans CJK SC"/>
+                <a:cs typeface="Noto Sans CJK SC"/>
+              </a:rPr>
+              <a:t>凝胶</a:t>
+            </a:r>
+          </a:p>
+        </p:txBody>
+      </p:sp>
+      <p:sp>
+        <p:nvSpPr>
+          <p:cNvPr id="20" name="e3" descr="Editable shape; source id e3"/>
+          <p:cNvSpPr/>
+          <p:nvPr/>
+        </p:nvSpPr>
+        <p:spPr>
+          <a:xfrm>
+            <a:off x="3566881" y="3092671"/>
+            <a:ext cx="3450047" cy="962164"/>
+          </a:xfrm>
+          <a:prstGeom prst="roundRect">
+            <a:avLst>
+              <a:gd name="adj" fmla="val 7142"/>
+            </a:avLst>
+          </a:prstGeom>
+          <a:solidFill>
+            <a:srgbClr val="FFFFFF"/>
+          </a:solidFill>
+          <a:ln w="10308">
+            <a:solidFill>
+              <a:srgbClr val="1F7F8C"/>
+            </a:solidFill>
+          </a:ln>
+          <a:effectLst/>
+        </p:spPr>
+        <p:style>
+          <a:lnRef idx="1">
+            <a:schemeClr val="accent1"/>
+          </a:lnRef>
+          <a:fillRef idx="3">
+            <a:schemeClr val="accent1"/>
+          </a:fillRef>
+          <a:effectRef idx="0">
+            <a:schemeClr val="accent1"/>
+          </a:effectRef>
+          <a:fontRef idx="minor">
+            <a:schemeClr val="lt1"/>
+          </a:fontRef>
+        </p:style>
+        <p:txBody>
+          <a:bodyPr rtlCol="0" anchor="ctr"/>
+          <a:lstStyle/>
+          <a:p>
+            <a:pPr algn="ctr"/>
+          </a:p>
+        </p:txBody>
+      </p:sp>
+      <p:sp>
+        <p:nvSpPr>
+          <p:cNvPr id="21" name="e3_s" descr="Editable shape; source id e3_s"/>
+          <p:cNvSpPr/>
+          <p:nvPr/>
+        </p:nvSpPr>
+        <p:spPr>
+          <a:xfrm>
+            <a:off x="3566881" y="3092671"/>
+            <a:ext cx="3450047" cy="54980"/>
+          </a:xfrm>
+          <a:prstGeom prst="roundRect">
+            <a:avLst>
+              <a:gd name="adj" fmla="val 50000"/>
+            </a:avLst>
+          </a:prstGeom>
+          <a:solidFill>
+            <a:srgbClr val="1F7F8C"/>
+          </a:solidFill>
+          <a:ln>
+            <a:noFill/>
+          </a:ln>
+          <a:effectLst/>
+        </p:spPr>
+        <p:style>
+          <a:lnRef idx="1">
+            <a:schemeClr val="accent1"/>
+          </a:lnRef>
+          <a:fillRef idx="3">
+            <a:schemeClr val="accent1"/>
+          </a:fillRef>
+          <a:effectRef idx="0">
+            <a:schemeClr val="accent1"/>
+          </a:effectRef>
+          <a:fontRef idx="minor">
+            <a:schemeClr val="lt1"/>
+          </a:fontRef>
+        </p:style>
+        <p:txBody>
+          <a:bodyPr rtlCol="0" anchor="ctr"/>
+          <a:lstStyle/>
+          <a:p>
+            <a:pPr algn="ctr"/>
+          </a:p>
+        </p:txBody>
+      </p:sp>
+      <p:pic>
+        <p:nvPicPr>
+          <p:cNvPr id="22" name="e3_i" descr="exact crop of the generated raster (line motif)"/>
+          <p:cNvPicPr>
+            <a:picLocks noChangeAspect="1"/>
+          </p:cNvPicPr>
+          <p:nvPr/>
+        </p:nvPicPr>
+        <p:blipFill>
+          <a:blip r:embed="rId4"/>
+          <a:stretch>
+            <a:fillRect/>
+          </a:stretch>
+        </p:blipFill>
+        <p:spPr>
+          <a:xfrm>
+            <a:off x="3762063" y="3285104"/>
+            <a:ext cx="159444" cy="302394"/>
+          </a:xfrm>
+          <a:prstGeom prst="rect">
+            <a:avLst/>
+          </a:prstGeom>
+          <a:effectLst/>
+        </p:spPr>
+      </p:pic>
+      <p:sp>
+        <p:nvSpPr>
+          <p:cNvPr id="23" name="e3_t" descr="Editable text; source id e3_t"/>
+          <p:cNvSpPr txBox="1"/>
+          <p:nvPr/>
+        </p:nvSpPr>
+        <p:spPr>
+          <a:xfrm>
+            <a:off x="4075454" y="3298849"/>
+            <a:ext cx="2817767" cy="274904"/>
+          </a:xfrm>
+          <a:prstGeom prst="rect">
+            <a:avLst/>
+          </a:prstGeom>
+          <a:noFill/>
+          <a:effectLst/>
+        </p:spPr>
+        <p:txBody>
+          <a:bodyPr wrap="none" anchor="ctr" tIns="0" rIns="0" bIns="0" lIns="0" anchorCtr="0" vertOverflow="overflow">
+            <a:noAutofit/>
+          </a:bodyPr>
+          <a:lstStyle/>
+          <a:p>
+            <a:pPr algn="l" fontAlgn="base">
+              <a:lnSpc>
+                <a:spcPts val="2137"/>
+              </a:lnSpc>
+              <a:spcBef>
+                <a:spcPts val="0"/>
+              </a:spcBef>
+              <a:spcAft>
+                <a:spcPts val="0"/>
+              </a:spcAft>
+              <a:defRPr sz="1461" b="1" i="0" lang="zh-CN" dirty="0">
+                <a:solidFill>
+                  <a:srgbClr val="0F4F58"/>
+                </a:solidFill>
+                <a:latin typeface="Noto Sans CJK SC"/>
+                <a:ea typeface="Noto Sans CJK SC"/>
+                <a:cs typeface="Noto Sans CJK SC"/>
+              </a:defRPr>
+            </a:pPr>
+            <a:r>
+              <a:rPr sz="1461" b="1" i="0" lang="zh-CN" dirty="0">
+                <a:solidFill>
+                  <a:srgbClr val="0F4F58"/>
+                </a:solidFill>
+                <a:latin typeface="Noto Sans CJK SC"/>
+                <a:ea typeface="Noto Sans CJK SC"/>
+                <a:cs typeface="Noto Sans CJK SC"/>
+              </a:rPr>
+              <a:t>组成与热处理</a:t>
+            </a:r>
+          </a:p>
+        </p:txBody>
+      </p:sp>
+      <p:sp>
+        <p:nvSpPr>
+          <p:cNvPr id="24" name="e3_k0" descr="Editable text; source id e3_k0"/>
+          <p:cNvSpPr txBox="1"/>
+          <p:nvPr/>
+        </p:nvSpPr>
+        <p:spPr>
+          <a:xfrm>
+            <a:off x="3690588" y="3628734"/>
+            <a:ext cx="3202633" cy="219923"/>
+          </a:xfrm>
+          <a:prstGeom prst="rect">
+            <a:avLst/>
+          </a:prstGeom>
+          <a:noFill/>
+          <a:effectLst/>
+        </p:spPr>
+        <p:txBody>
+          <a:bodyPr wrap="none" anchor="ctr" tIns="0" rIns="0" bIns="0" lIns="0" anchorCtr="0" vertOverflow="overflow">
+            <a:noAutofit/>
+          </a:bodyPr>
+          <a:lstStyle/>
+          <a:p>
+            <a:pPr algn="l" fontAlgn="base">
+              <a:lnSpc>
+                <a:spcPts val="1664"/>
+              </a:lnSpc>
+              <a:spcBef>
+                <a:spcPts val="0"/>
+              </a:spcBef>
+              <a:spcAft>
+                <a:spcPts val="0"/>
+              </a:spcAft>
+              <a:defRPr sz="1136" b="0" i="0" lang="zh-CN" dirty="0">
+                <a:solidFill>
+                  <a:srgbClr val="3F4854"/>
+                </a:solidFill>
+                <a:latin typeface="DejaVu Sans"/>
+                <a:ea typeface="DejaVu Sans"/>
+                <a:cs typeface="DejaVu Sans"/>
+              </a:defRPr>
+            </a:pPr>
+            <a:r>
+              <a:rPr sz="1136" b="0" i="0" lang="zh-CN" dirty="0">
+                <a:solidFill>
+                  <a:srgbClr val="3F4854"/>
+                </a:solidFill>
+                <a:latin typeface="DejaVu Sans"/>
+                <a:ea typeface="DejaVu Sans"/>
+                <a:cs typeface="DejaVu Sans"/>
+              </a:rPr>
+              <a:t>Ba/Sr · Zn </a:t>
+            </a:r>
+            <a:r>
+              <a:rPr sz="1136" b="0" i="0" lang="zh-CN" dirty="0">
+                <a:solidFill>
+                  <a:srgbClr val="3F4854"/>
+                </a:solidFill>
+                <a:latin typeface="Noto Sans CJK SC"/>
+                <a:ea typeface="Noto Sans CJK SC"/>
+                <a:cs typeface="Noto Sans CJK SC"/>
+              </a:rPr>
+              <a:t>位</a:t>
+            </a:r>
+          </a:p>
+        </p:txBody>
+      </p:sp>
+      <p:sp>
+        <p:nvSpPr>
+          <p:cNvPr id="25" name="e4" descr="Editable shape; source id e4"/>
+          <p:cNvSpPr/>
+          <p:nvPr/>
+        </p:nvSpPr>
+        <p:spPr>
+          <a:xfrm>
+            <a:off x="3566881" y="4157925"/>
+            <a:ext cx="3450047" cy="962164"/>
+          </a:xfrm>
+          <a:prstGeom prst="roundRect">
+            <a:avLst>
+              <a:gd name="adj" fmla="val 7142"/>
+            </a:avLst>
+          </a:prstGeom>
+          <a:solidFill>
+            <a:srgbClr val="FFFFFF"/>
+          </a:solidFill>
+          <a:ln w="10308">
+            <a:solidFill>
+              <a:srgbClr val="1F7F8C"/>
+            </a:solidFill>
+          </a:ln>
+          <a:effectLst/>
+        </p:spPr>
+        <p:style>
+          <a:lnRef idx="1">
+            <a:schemeClr val="accent1"/>
+          </a:lnRef>
+          <a:fillRef idx="3">
+            <a:schemeClr val="accent1"/>
+          </a:fillRef>
+          <a:effectRef idx="0">
+            <a:schemeClr val="accent1"/>
+          </a:effectRef>
+          <a:fontRef idx="minor">
+            <a:schemeClr val="lt1"/>
+          </a:fontRef>
+        </p:style>
+        <p:txBody>
+          <a:bodyPr rtlCol="0" anchor="ctr"/>
+          <a:lstStyle/>
+          <a:p>
+            <a:pPr algn="ctr"/>
+          </a:p>
+        </p:txBody>
+      </p:sp>
+      <p:sp>
+        <p:nvSpPr>
+          <p:cNvPr id="26" name="e4_s" descr="Editable shape; source id e4_s"/>
+          <p:cNvSpPr/>
+          <p:nvPr/>
+        </p:nvSpPr>
+        <p:spPr>
+          <a:xfrm>
+            <a:off x="3566881" y="4157925"/>
+            <a:ext cx="3450047" cy="54980"/>
+          </a:xfrm>
+          <a:prstGeom prst="roundRect">
+            <a:avLst>
+              <a:gd name="adj" fmla="val 50000"/>
+            </a:avLst>
+          </a:prstGeom>
+          <a:solidFill>
+            <a:srgbClr val="1F7F8C"/>
+          </a:solidFill>
+          <a:ln>
+            <a:noFill/>
+          </a:ln>
+          <a:effectLst/>
+        </p:spPr>
+        <p:style>
+          <a:lnRef idx="1">
+            <a:schemeClr val="accent1"/>
+          </a:lnRef>
+          <a:fillRef idx="3">
+            <a:schemeClr val="accent1"/>
+          </a:fillRef>
+          <a:effectRef idx="0">
+            <a:schemeClr val="accent1"/>
+          </a:effectRef>
+          <a:fontRef idx="minor">
+            <a:schemeClr val="lt1"/>
+          </a:fontRef>
+        </p:style>
+        <p:txBody>
+          <a:bodyPr rtlCol="0" anchor="ctr"/>
+          <a:lstStyle/>
+          <a:p>
+            <a:pPr algn="ctr"/>
+          </a:p>
+        </p:txBody>
+      </p:sp>
+      <p:pic>
+        <p:nvPicPr>
+          <p:cNvPr id="27" name="e4_i" descr="exact crop of the generated raster (line motif)"/>
+          <p:cNvPicPr>
+            <a:picLocks noChangeAspect="1"/>
+          </p:cNvPicPr>
+          <p:nvPr/>
+        </p:nvPicPr>
+        <p:blipFill>
+          <a:blip r:embed="rId5"/>
+          <a:stretch>
+            <a:fillRect/>
+          </a:stretch>
+        </p:blipFill>
+        <p:spPr>
+          <a:xfrm>
+            <a:off x="3731452" y="4350358"/>
+            <a:ext cx="220666" cy="302394"/>
+          </a:xfrm>
+          <a:prstGeom prst="rect">
+            <a:avLst/>
+          </a:prstGeom>
+          <a:effectLst/>
+        </p:spPr>
+      </p:pic>
+      <p:sp>
+        <p:nvSpPr>
+          <p:cNvPr id="28" name="e4_t" descr="Editable text; source id e4_t"/>
+          <p:cNvSpPr txBox="1"/>
+          <p:nvPr/>
+        </p:nvSpPr>
+        <p:spPr>
+          <a:xfrm>
+            <a:off x="4075454" y="4364103"/>
+            <a:ext cx="2817767" cy="274904"/>
+          </a:xfrm>
+          <a:prstGeom prst="rect">
+            <a:avLst/>
+          </a:prstGeom>
+          <a:noFill/>
+          <a:effectLst/>
+        </p:spPr>
+        <p:txBody>
+          <a:bodyPr wrap="none" anchor="ctr" tIns="0" rIns="0" bIns="0" lIns="0" anchorCtr="0" vertOverflow="overflow">
+            <a:noAutofit/>
+          </a:bodyPr>
+          <a:lstStyle/>
+          <a:p>
+            <a:pPr algn="l" fontAlgn="base">
+              <a:lnSpc>
+                <a:spcPts val="2137"/>
+              </a:lnSpc>
+              <a:spcBef>
+                <a:spcPts val="0"/>
+              </a:spcBef>
+              <a:spcAft>
+                <a:spcPts val="0"/>
+              </a:spcAft>
+              <a:defRPr sz="1461" b="1" i="0" lang="zh-CN" dirty="0">
+                <a:solidFill>
+                  <a:srgbClr val="0F4F58"/>
+                </a:solidFill>
+                <a:latin typeface="Noto Sans CJK SC"/>
+                <a:ea typeface="Noto Sans CJK SC"/>
+                <a:cs typeface="Noto Sans CJK SC"/>
+              </a:defRPr>
+            </a:pPr>
+            <a:r>
+              <a:rPr sz="1461" b="1" i="0" lang="zh-CN" dirty="0">
+                <a:solidFill>
+                  <a:srgbClr val="0F4F58"/>
+                </a:solidFill>
+                <a:latin typeface="Noto Sans CJK SC"/>
+                <a:ea typeface="Noto Sans CJK SC"/>
+                <a:cs typeface="Noto Sans CJK SC"/>
+              </a:rPr>
+              <a:t>玻璃析晶</a:t>
+            </a:r>
+          </a:p>
+        </p:txBody>
+      </p:sp>
+      <p:sp>
+        <p:nvSpPr>
+          <p:cNvPr id="29" name="e4_k0" descr="Editable text; source id e4_k0"/>
+          <p:cNvSpPr txBox="1"/>
+          <p:nvPr/>
+        </p:nvSpPr>
+        <p:spPr>
+          <a:xfrm>
+            <a:off x="3690588" y="4693988"/>
+            <a:ext cx="3202633" cy="219923"/>
+          </a:xfrm>
+          <a:prstGeom prst="rect">
+            <a:avLst/>
+          </a:prstGeom>
+          <a:noFill/>
+          <a:effectLst/>
+        </p:spPr>
+        <p:txBody>
+          <a:bodyPr wrap="none" anchor="ctr" tIns="0" rIns="0" bIns="0" lIns="0" anchorCtr="0" vertOverflow="overflow">
+            <a:noAutofit/>
+          </a:bodyPr>
+          <a:lstStyle/>
+          <a:p>
+            <a:pPr algn="l" fontAlgn="base">
+              <a:lnSpc>
+                <a:spcPts val="1664"/>
+              </a:lnSpc>
+              <a:spcBef>
+                <a:spcPts val="0"/>
+              </a:spcBef>
+              <a:spcAft>
+                <a:spcPts val="0"/>
+              </a:spcAft>
+              <a:defRPr sz="1136" b="0" i="0" lang="zh-CN" dirty="0">
+                <a:solidFill>
+                  <a:srgbClr val="3F4854"/>
+                </a:solidFill>
+                <a:latin typeface="Noto Sans CJK SC"/>
+                <a:ea typeface="Noto Sans CJK SC"/>
+                <a:cs typeface="Noto Sans CJK SC"/>
+              </a:defRPr>
+            </a:pPr>
+            <a:r>
+              <a:rPr sz="1136" b="0" i="0" lang="zh-CN" dirty="0">
+                <a:solidFill>
+                  <a:srgbClr val="3F4854"/>
+                </a:solidFill>
+                <a:latin typeface="Noto Sans CJK SC"/>
+                <a:ea typeface="Noto Sans CJK SC"/>
+                <a:cs typeface="Noto Sans CJK SC"/>
+              </a:rPr>
+              <a:t>成核</a:t>
+            </a:r>
+            <a:r>
+              <a:rPr sz="1136" b="0" i="0" lang="zh-CN" dirty="0">
+                <a:solidFill>
+                  <a:srgbClr val="3F4854"/>
+                </a:solidFill>
+                <a:latin typeface="DejaVu Sans"/>
+                <a:ea typeface="DejaVu Sans"/>
+                <a:cs typeface="DejaVu Sans"/>
+              </a:rPr>
+              <a:t> · </a:t>
+            </a:r>
+            <a:r>
+              <a:rPr sz="1136" b="0" i="0" lang="zh-CN" dirty="0">
+                <a:solidFill>
+                  <a:srgbClr val="3F4854"/>
+                </a:solidFill>
+                <a:latin typeface="Noto Sans CJK SC"/>
+                <a:ea typeface="Noto Sans CJK SC"/>
+                <a:cs typeface="Noto Sans CJK SC"/>
+              </a:rPr>
+              <a:t>生长</a:t>
+            </a:r>
+          </a:p>
+        </p:txBody>
+      </p:sp>
+      <p:sp>
+        <p:nvSpPr>
+          <p:cNvPr id="30" name="l1" descr="Editable shape; source id l1"/>
+          <p:cNvSpPr/>
+          <p:nvPr/>
+        </p:nvSpPr>
+        <p:spPr>
+          <a:xfrm>
+            <a:off x="8425812" y="1030890"/>
+            <a:ext cx="3319467" cy="1030890"/>
+          </a:xfrm>
+          <a:prstGeom prst="roundRect">
+            <a:avLst>
+              <a:gd name="adj" fmla="val 6666"/>
+            </a:avLst>
+          </a:prstGeom>
+          <a:solidFill>
+            <a:srgbClr val="FFFFFF"/>
+          </a:solidFill>
+          <a:ln w="10308">
+            <a:solidFill>
+              <a:srgbClr val="5B7592"/>
+            </a:solidFill>
+          </a:ln>
+          <a:effectLst/>
+        </p:spPr>
+        <p:style>
+          <a:lnRef idx="1">
+            <a:schemeClr val="accent1"/>
+          </a:lnRef>
+          <a:fillRef idx="3">
+            <a:schemeClr val="accent1"/>
+          </a:fillRef>
+          <a:effectRef idx="0">
+            <a:schemeClr val="accent1"/>
+          </a:effectRef>
+          <a:fontRef idx="minor">
+            <a:schemeClr val="lt1"/>
+          </a:fontRef>
+        </p:style>
+        <p:txBody>
+          <a:bodyPr rtlCol="0" anchor="ctr"/>
+          <a:lstStyle/>
+          <a:p>
+            <a:pPr algn="ctr"/>
+          </a:p>
+        </p:txBody>
+      </p:sp>
+      <p:sp>
+        <p:nvSpPr>
+          <p:cNvPr id="31" name="l1_s" descr="Editable shape; source id l1_s"/>
+          <p:cNvSpPr/>
+          <p:nvPr/>
+        </p:nvSpPr>
+        <p:spPr>
+          <a:xfrm>
+            <a:off x="8425812" y="1030890"/>
+            <a:ext cx="3319467" cy="54980"/>
+          </a:xfrm>
+          <a:prstGeom prst="roundRect">
+            <a:avLst>
+              <a:gd name="adj" fmla="val 50000"/>
+            </a:avLst>
+          </a:prstGeom>
+          <a:solidFill>
+            <a:srgbClr val="5B7592"/>
+          </a:solidFill>
+          <a:ln>
+            <a:noFill/>
+          </a:ln>
+          <a:effectLst/>
+        </p:spPr>
+        <p:style>
+          <a:lnRef idx="1">
+            <a:schemeClr val="accent1"/>
+          </a:lnRef>
+          <a:fillRef idx="3">
+            <a:schemeClr val="accent1"/>
+          </a:fillRef>
+          <a:effectRef idx="0">
+            <a:schemeClr val="accent1"/>
+          </a:effectRef>
+          <a:fontRef idx="minor">
+            <a:schemeClr val="lt1"/>
+          </a:fontRef>
+        </p:style>
+        <p:txBody>
+          <a:bodyPr rtlCol="0" anchor="ctr"/>
+          <a:lstStyle/>
+          <a:p>
+            <a:pPr algn="ctr"/>
+          </a:p>
+        </p:txBody>
+      </p:sp>
+      <p:pic>
+        <p:nvPicPr>
+          <p:cNvPr id="32" name="l1_i" descr="exact crop of the generated raster (line motif)"/>
+          <p:cNvPicPr>
+            <a:picLocks noChangeAspect="1"/>
+          </p:cNvPicPr>
+          <p:nvPr/>
+        </p:nvPicPr>
+        <p:blipFill>
+          <a:blip r:embed="rId6"/>
+          <a:stretch>
+            <a:fillRect/>
+          </a:stretch>
+        </p:blipFill>
+        <p:spPr>
+          <a:xfrm>
+            <a:off x="8552268" y="1237068"/>
+            <a:ext cx="296896" cy="302394"/>
+          </a:xfrm>
+          <a:prstGeom prst="rect">
+            <a:avLst/>
+          </a:prstGeom>
+          <a:effectLst/>
+        </p:spPr>
+      </p:pic>
+      <p:sp>
+        <p:nvSpPr>
+          <p:cNvPr id="33" name="l1_t" descr="Editable text; source id l1_t"/>
+          <p:cNvSpPr txBox="1"/>
+          <p:nvPr/>
+        </p:nvSpPr>
+        <p:spPr>
+          <a:xfrm>
+            <a:off x="8934385" y="1250813"/>
+            <a:ext cx="2687188" cy="274904"/>
+          </a:xfrm>
+          <a:prstGeom prst="rect">
+            <a:avLst/>
+          </a:prstGeom>
+          <a:noFill/>
+          <a:effectLst/>
+        </p:spPr>
+        <p:txBody>
+          <a:bodyPr wrap="none" anchor="ctr" tIns="0" rIns="0" bIns="0" lIns="0" anchorCtr="0" vertOverflow="overflow">
+            <a:noAutofit/>
+          </a:bodyPr>
+          <a:lstStyle/>
+          <a:p>
+            <a:pPr algn="l" fontAlgn="base">
+              <a:lnSpc>
+                <a:spcPts val="2137"/>
+              </a:lnSpc>
+              <a:spcBef>
+                <a:spcPts val="0"/>
+              </a:spcBef>
+              <a:spcAft>
+                <a:spcPts val="0"/>
+              </a:spcAft>
+              <a:defRPr sz="1461" b="1" i="0" lang="zh-CN" dirty="0">
+                <a:solidFill>
+                  <a:srgbClr val="2B3E57"/>
+                </a:solidFill>
+                <a:latin typeface="Noto Sans CJK SC"/>
+                <a:ea typeface="Noto Sans CJK SC"/>
+                <a:cs typeface="Noto Sans CJK SC"/>
+              </a:defRPr>
+            </a:pPr>
+            <a:r>
+              <a:rPr sz="1461" b="1" i="0" lang="zh-CN" dirty="0">
+                <a:solidFill>
+                  <a:srgbClr val="2B3E57"/>
+                </a:solidFill>
+                <a:latin typeface="Noto Sans CJK SC"/>
+                <a:ea typeface="Noto Sans CJK SC"/>
+                <a:cs typeface="Noto Sans CJK SC"/>
+              </a:rPr>
+              <a:t>近邻体系</a:t>
+            </a:r>
+          </a:p>
+        </p:txBody>
+      </p:sp>
+      <p:sp>
+        <p:nvSpPr>
+          <p:cNvPr id="34" name="l1_k0" descr="Editable text; source id l1_k0"/>
+          <p:cNvSpPr txBox="1"/>
+          <p:nvPr/>
+        </p:nvSpPr>
+        <p:spPr>
+          <a:xfrm>
+            <a:off x="8549519" y="1580698"/>
+            <a:ext cx="3072054" cy="219923"/>
+          </a:xfrm>
+          <a:prstGeom prst="rect">
+            <a:avLst/>
+          </a:prstGeom>
+          <a:noFill/>
+          <a:effectLst/>
+        </p:spPr>
+        <p:txBody>
+          <a:bodyPr wrap="none" anchor="ctr" tIns="0" rIns="0" bIns="0" lIns="0" anchorCtr="0" vertOverflow="overflow">
+            <a:noAutofit/>
+          </a:bodyPr>
+          <a:lstStyle/>
+          <a:p>
+            <a:pPr algn="l" fontAlgn="base">
+              <a:lnSpc>
+                <a:spcPts val="1664"/>
+              </a:lnSpc>
+              <a:spcBef>
+                <a:spcPts val="0"/>
+              </a:spcBef>
+              <a:spcAft>
+                <a:spcPts val="0"/>
+              </a:spcAft>
+              <a:defRPr sz="1136" b="0" i="0" lang="zh-CN" dirty="0">
+                <a:solidFill>
+                  <a:srgbClr val="3F4854"/>
+                </a:solidFill>
+                <a:latin typeface="DejaVu Sans"/>
+                <a:ea typeface="DejaVu Sans"/>
+                <a:cs typeface="DejaVu Sans"/>
+              </a:defRPr>
+            </a:pPr>
+            <a:r>
+              <a:rPr sz="1136" b="0" i="0" lang="zh-CN" dirty="0">
+                <a:solidFill>
+                  <a:srgbClr val="3F4854"/>
+                </a:solidFill>
+                <a:latin typeface="DejaVu Sans"/>
+                <a:ea typeface="DejaVu Sans"/>
+                <a:cs typeface="DejaVu Sans"/>
+              </a:rPr>
+              <a:t>Ba2ZnSi2O7 </a:t>
+            </a:r>
+            <a:r>
+              <a:rPr sz="1136" b="0" i="0" lang="zh-CN" dirty="0">
+                <a:solidFill>
+                  <a:srgbClr val="3F4854"/>
+                </a:solidFill>
+                <a:latin typeface="Noto Sans CJK SC"/>
+                <a:ea typeface="Noto Sans CJK SC"/>
+                <a:cs typeface="Noto Sans CJK SC"/>
+              </a:rPr>
+              <a:t>等</a:t>
+            </a:r>
+          </a:p>
+        </p:txBody>
+      </p:sp>
+      <p:sp>
+        <p:nvSpPr>
+          <p:cNvPr id="35" name="l2" descr="Editable shape; source id l2"/>
+          <p:cNvSpPr/>
+          <p:nvPr/>
+        </p:nvSpPr>
+        <p:spPr>
+          <a:xfrm>
+            <a:off x="8425812" y="2336685"/>
+            <a:ext cx="3319467" cy="1030890"/>
+          </a:xfrm>
+          <a:prstGeom prst="roundRect">
+            <a:avLst>
+              <a:gd name="adj" fmla="val 6666"/>
+            </a:avLst>
+          </a:prstGeom>
+          <a:solidFill>
+            <a:srgbClr val="FFFFFF"/>
+          </a:solidFill>
+          <a:ln w="10308">
+            <a:solidFill>
+              <a:srgbClr val="5B7592"/>
+            </a:solidFill>
+          </a:ln>
+          <a:effectLst/>
+        </p:spPr>
+        <p:style>
+          <a:lnRef idx="1">
+            <a:schemeClr val="accent1"/>
+          </a:lnRef>
+          <a:fillRef idx="3">
+            <a:schemeClr val="accent1"/>
+          </a:fillRef>
+          <a:effectRef idx="0">
+            <a:schemeClr val="accent1"/>
+          </a:effectRef>
+          <a:fontRef idx="minor">
+            <a:schemeClr val="lt1"/>
+          </a:fontRef>
+        </p:style>
+        <p:txBody>
+          <a:bodyPr rtlCol="0" anchor="ctr"/>
+          <a:lstStyle/>
+          <a:p>
+            <a:pPr algn="ctr"/>
+          </a:p>
+        </p:txBody>
+      </p:sp>
+      <p:sp>
+        <p:nvSpPr>
+          <p:cNvPr id="36" name="l2_s" descr="Editable shape; source id l2_s"/>
+          <p:cNvSpPr/>
+          <p:nvPr/>
+        </p:nvSpPr>
+        <p:spPr>
+          <a:xfrm>
+            <a:off x="8425812" y="2336685"/>
+            <a:ext cx="3319467" cy="54980"/>
+          </a:xfrm>
+          <a:prstGeom prst="roundRect">
+            <a:avLst>
+              <a:gd name="adj" fmla="val 50000"/>
+            </a:avLst>
+          </a:prstGeom>
+          <a:solidFill>
+            <a:srgbClr val="5B7592"/>
+          </a:solidFill>
+          <a:ln>
+            <a:noFill/>
+          </a:ln>
+          <a:effectLst/>
+        </p:spPr>
+        <p:style>
+          <a:lnRef idx="1">
+            <a:schemeClr val="accent1"/>
+          </a:lnRef>
+          <a:fillRef idx="3">
+            <a:schemeClr val="accent1"/>
+          </a:fillRef>
+          <a:effectRef idx="0">
+            <a:schemeClr val="accent1"/>
+          </a:effectRef>
+          <a:fontRef idx="minor">
+            <a:schemeClr val="lt1"/>
+          </a:fontRef>
+        </p:style>
+        <p:txBody>
+          <a:bodyPr rtlCol="0" anchor="ctr"/>
+          <a:lstStyle/>
+          <a:p>
+            <a:pPr algn="ctr"/>
+          </a:p>
+        </p:txBody>
+      </p:sp>
+      <p:pic>
+        <p:nvPicPr>
+          <p:cNvPr id="37" name="l2_i" descr="exact crop of the generated raster (line motif)"/>
+          <p:cNvPicPr>
+            <a:picLocks noChangeAspect="1"/>
+          </p:cNvPicPr>
+          <p:nvPr/>
+        </p:nvPicPr>
+        <p:blipFill>
+          <a:blip r:embed="rId7"/>
+          <a:stretch>
+            <a:fillRect/>
+          </a:stretch>
+        </p:blipFill>
+        <p:spPr>
+          <a:xfrm>
+            <a:off x="8552268" y="2542863"/>
+            <a:ext cx="296896" cy="302394"/>
+          </a:xfrm>
+          <a:prstGeom prst="rect">
+            <a:avLst/>
+          </a:prstGeom>
+          <a:effectLst/>
+        </p:spPr>
+      </p:pic>
+      <p:sp>
+        <p:nvSpPr>
+          <p:cNvPr id="38" name="l2_t" descr="Editable text; source id l2_t"/>
+          <p:cNvSpPr txBox="1"/>
+          <p:nvPr/>
+        </p:nvSpPr>
+        <p:spPr>
+          <a:xfrm>
+            <a:off x="8934385" y="2556608"/>
+            <a:ext cx="2687188" cy="274904"/>
+          </a:xfrm>
+          <a:prstGeom prst="rect">
+            <a:avLst/>
+          </a:prstGeom>
+          <a:noFill/>
+          <a:effectLst/>
+        </p:spPr>
+        <p:txBody>
+          <a:bodyPr wrap="none" anchor="ctr" tIns="0" rIns="0" bIns="0" lIns="0" anchorCtr="0" vertOverflow="overflow">
+            <a:noAutofit/>
+          </a:bodyPr>
+          <a:lstStyle/>
+          <a:p>
+            <a:pPr algn="l" fontAlgn="base">
+              <a:lnSpc>
+                <a:spcPts val="2137"/>
+              </a:lnSpc>
+              <a:spcBef>
+                <a:spcPts val="0"/>
+              </a:spcBef>
+              <a:spcAft>
+                <a:spcPts val="0"/>
+              </a:spcAft>
+              <a:defRPr sz="1461" b="1" i="0" lang="zh-CN" dirty="0">
+                <a:solidFill>
+                  <a:srgbClr val="2B3E57"/>
+                </a:solidFill>
+                <a:latin typeface="Noto Sans CJK SC"/>
+                <a:ea typeface="Noto Sans CJK SC"/>
+                <a:cs typeface="Noto Sans CJK SC"/>
+              </a:defRPr>
+            </a:pPr>
+            <a:r>
+              <a:rPr sz="1461" b="1" i="0" lang="zh-CN" dirty="0">
+                <a:solidFill>
+                  <a:srgbClr val="2B3E57"/>
+                </a:solidFill>
+                <a:latin typeface="Noto Sans CJK SC"/>
+                <a:ea typeface="Noto Sans CJK SC"/>
+                <a:cs typeface="Noto Sans CJK SC"/>
+              </a:rPr>
+              <a:t>证据边界</a:t>
+            </a:r>
+          </a:p>
+        </p:txBody>
+      </p:sp>
+      <p:sp>
+        <p:nvSpPr>
+          <p:cNvPr id="39" name="l2_k0" descr="Editable text; source id l2_k0"/>
+          <p:cNvSpPr txBox="1"/>
+          <p:nvPr/>
+        </p:nvSpPr>
+        <p:spPr>
+          <a:xfrm>
+            <a:off x="8549519" y="2886493"/>
+            <a:ext cx="3072054" cy="219923"/>
+          </a:xfrm>
+          <a:prstGeom prst="rect">
+            <a:avLst/>
+          </a:prstGeom>
+          <a:noFill/>
+          <a:effectLst/>
+        </p:spPr>
+        <p:txBody>
+          <a:bodyPr wrap="none" anchor="ctr" tIns="0" rIns="0" bIns="0" lIns="0" anchorCtr="0" vertOverflow="overflow">
+            <a:noAutofit/>
+          </a:bodyPr>
+          <a:lstStyle/>
+          <a:p>
+            <a:pPr algn="l" fontAlgn="base">
+              <a:lnSpc>
+                <a:spcPts val="1664"/>
+              </a:lnSpc>
+              <a:spcBef>
+                <a:spcPts val="0"/>
+              </a:spcBef>
+              <a:spcAft>
+                <a:spcPts val="0"/>
+              </a:spcAft>
+              <a:defRPr sz="1136" b="0" i="0" lang="zh-CN" dirty="0">
+                <a:solidFill>
+                  <a:srgbClr val="3F4854"/>
+                </a:solidFill>
+                <a:latin typeface="Noto Sans CJK SC"/>
+                <a:ea typeface="Noto Sans CJK SC"/>
+                <a:cs typeface="Noto Sans CJK SC"/>
+              </a:defRPr>
+            </a:pPr>
+            <a:r>
+              <a:rPr sz="1136" b="0" i="0" lang="zh-CN" dirty="0">
+                <a:solidFill>
+                  <a:srgbClr val="3F4854"/>
+                </a:solidFill>
+                <a:latin typeface="Noto Sans CJK SC"/>
+                <a:ea typeface="Noto Sans CJK SC"/>
+                <a:cs typeface="Noto Sans CJK SC"/>
+              </a:rPr>
+              <a:t>直接</a:t>
+            </a:r>
+            <a:r>
+              <a:rPr sz="1136" b="0" i="0" lang="zh-CN" dirty="0">
+                <a:solidFill>
+                  <a:srgbClr val="3F4854"/>
+                </a:solidFill>
+                <a:latin typeface="DejaVu Sans"/>
+                <a:ea typeface="DejaVu Sans"/>
+                <a:cs typeface="DejaVu Sans"/>
+              </a:rPr>
+              <a:t> / </a:t>
+            </a:r>
+            <a:r>
+              <a:rPr sz="1136" b="0" i="0" lang="zh-CN" dirty="0">
+                <a:solidFill>
+                  <a:srgbClr val="3F4854"/>
+                </a:solidFill>
+                <a:latin typeface="Noto Sans CJK SC"/>
+                <a:ea typeface="Noto Sans CJK SC"/>
+                <a:cs typeface="Noto Sans CJK SC"/>
+              </a:rPr>
+              <a:t>近邻</a:t>
+            </a:r>
+            <a:r>
+              <a:rPr sz="1136" b="0" i="0" lang="zh-CN" dirty="0">
+                <a:solidFill>
+                  <a:srgbClr val="3F4854"/>
+                </a:solidFill>
+                <a:latin typeface="DejaVu Sans"/>
+                <a:ea typeface="DejaVu Sans"/>
+                <a:cs typeface="DejaVu Sans"/>
+              </a:rPr>
+              <a:t> / </a:t>
+            </a:r>
+            <a:r>
+              <a:rPr sz="1136" b="0" i="0" lang="zh-CN" dirty="0">
+                <a:solidFill>
+                  <a:srgbClr val="3F4854"/>
+                </a:solidFill>
+                <a:latin typeface="Noto Sans CJK SC"/>
+                <a:ea typeface="Noto Sans CJK SC"/>
+                <a:cs typeface="Noto Sans CJK SC"/>
+              </a:rPr>
+              <a:t>推断</a:t>
+            </a:r>
+          </a:p>
+        </p:txBody>
+      </p:sp>
+      <p:sp>
+        <p:nvSpPr>
+          <p:cNvPr id="40" name="l3" descr="Editable shape; source id l3"/>
+          <p:cNvSpPr/>
+          <p:nvPr/>
+        </p:nvSpPr>
+        <p:spPr>
+          <a:xfrm>
+            <a:off x="8425812" y="3642480"/>
+            <a:ext cx="3319467" cy="1030890"/>
+          </a:xfrm>
+          <a:prstGeom prst="roundRect">
+            <a:avLst>
+              <a:gd name="adj" fmla="val 6666"/>
+            </a:avLst>
+          </a:prstGeom>
+          <a:solidFill>
+            <a:srgbClr val="FFFFFF"/>
+          </a:solidFill>
+          <a:ln w="10308">
+            <a:solidFill>
+              <a:srgbClr val="C48A24"/>
+            </a:solidFill>
+            <a:custDash>
+              <a:ds d="866667" sp="533333"/>
+            </a:custDash>
+          </a:ln>
+          <a:effectLst/>
+        </p:spPr>
+        <p:style>
+          <a:lnRef idx="1">
+            <a:schemeClr val="accent1"/>
+          </a:lnRef>
+          <a:fillRef idx="3">
+            <a:schemeClr val="accent1"/>
+          </a:fillRef>
+          <a:effectRef idx="0">
+            <a:schemeClr val="accent1"/>
+          </a:effectRef>
+          <a:fontRef idx="minor">
+            <a:schemeClr val="lt1"/>
+          </a:fontRef>
+        </p:style>
+        <p:txBody>
+          <a:bodyPr rtlCol="0" anchor="ctr"/>
+          <a:lstStyle/>
+          <a:p>
+            <a:pPr algn="ctr"/>
+          </a:p>
+        </p:txBody>
+      </p:sp>
+      <p:pic>
+        <p:nvPicPr>
+          <p:cNvPr id="41" name="l3_i" descr="exact crop of the generated raster (line motif)"/>
+          <p:cNvPicPr>
+            <a:picLocks noChangeAspect="1"/>
+          </p:cNvPicPr>
+          <p:nvPr/>
+        </p:nvPicPr>
+        <p:blipFill>
+          <a:blip r:embed="rId8"/>
+          <a:stretch>
+            <a:fillRect/>
+          </a:stretch>
+        </p:blipFill>
+        <p:spPr>
+          <a:xfrm>
+            <a:off x="8567458" y="3793677"/>
+            <a:ext cx="266517" cy="302394"/>
+          </a:xfrm>
+          <a:prstGeom prst="rect">
+            <a:avLst/>
+          </a:prstGeom>
+          <a:effectLst/>
+        </p:spPr>
+      </p:pic>
+      <p:sp>
+        <p:nvSpPr>
+          <p:cNvPr id="42" name="l3_t" descr="Editable text; source id l3_t"/>
+          <p:cNvSpPr txBox="1"/>
+          <p:nvPr/>
+        </p:nvSpPr>
+        <p:spPr>
+          <a:xfrm>
+            <a:off x="8934385" y="3807422"/>
+            <a:ext cx="2687188" cy="274904"/>
+          </a:xfrm>
+          <a:prstGeom prst="rect">
+            <a:avLst/>
+          </a:prstGeom>
+          <a:noFill/>
+          <a:effectLst/>
+        </p:spPr>
+        <p:txBody>
+          <a:bodyPr wrap="none" anchor="ctr" tIns="0" rIns="0" bIns="0" lIns="0" anchorCtr="0" vertOverflow="overflow">
+            <a:noAutofit/>
+          </a:bodyPr>
+          <a:lstStyle/>
+          <a:p>
+            <a:pPr algn="l" fontAlgn="base">
+              <a:lnSpc>
+                <a:spcPts val="1718"/>
+              </a:lnSpc>
+              <a:spcBef>
+                <a:spcPts val="0"/>
+              </a:spcBef>
+              <a:spcAft>
+                <a:spcPts val="0"/>
+              </a:spcAft>
+              <a:defRPr sz="1461" b="1" i="0" lang="zh-CN" dirty="0">
+                <a:solidFill>
+                  <a:srgbClr val="7A5410"/>
+                </a:solidFill>
+                <a:latin typeface="DejaVu Sans"/>
+                <a:ea typeface="DejaVu Sans"/>
+                <a:cs typeface="DejaVu Sans"/>
+              </a:defRPr>
+            </a:pPr>
+            <a:r>
+              <a:rPr sz="1461" b="1" i="0" lang="zh-CN" dirty="0">
+                <a:solidFill>
+                  <a:srgbClr val="7A5410"/>
+                </a:solidFill>
+                <a:latin typeface="DejaVu Sans"/>
+                <a:ea typeface="DejaVu Sans"/>
+                <a:cs typeface="DejaVu Sans"/>
+              </a:rPr>
+              <a:t>Ba5Y12Zn[O(SiO4)]8</a:t>
+            </a:r>
+          </a:p>
+        </p:txBody>
+      </p:sp>
+      <p:sp>
+        <p:nvSpPr>
+          <p:cNvPr id="43" name="l3_k0" descr="Editable text; source id l3_k0"/>
+          <p:cNvSpPr txBox="1"/>
+          <p:nvPr/>
+        </p:nvSpPr>
+        <p:spPr>
+          <a:xfrm>
+            <a:off x="8549519" y="4137307"/>
+            <a:ext cx="3072054" cy="219923"/>
+          </a:xfrm>
+          <a:prstGeom prst="rect">
+            <a:avLst/>
+          </a:prstGeom>
+          <a:noFill/>
+          <a:effectLst/>
+        </p:spPr>
+        <p:txBody>
+          <a:bodyPr wrap="none" anchor="ctr" tIns="0" rIns="0" bIns="0" lIns="0" anchorCtr="0" vertOverflow="overflow">
+            <a:noAutofit/>
+          </a:bodyPr>
+          <a:lstStyle/>
+          <a:p>
+            <a:pPr algn="l" fontAlgn="base">
+              <a:lnSpc>
+                <a:spcPts val="1664"/>
+              </a:lnSpc>
+              <a:spcBef>
+                <a:spcPts val="0"/>
+              </a:spcBef>
+              <a:spcAft>
+                <a:spcPts val="0"/>
+              </a:spcAft>
+              <a:defRPr sz="1136" b="0" i="0" lang="zh-CN" dirty="0">
+                <a:solidFill>
+                  <a:srgbClr val="3F4854"/>
+                </a:solidFill>
+                <a:latin typeface="Noto Sans CJK SC"/>
+                <a:ea typeface="Noto Sans CJK SC"/>
+                <a:cs typeface="Noto Sans CJK SC"/>
+              </a:defRPr>
+            </a:pPr>
+            <a:r>
+              <a:rPr sz="1136" b="0" i="0" lang="zh-CN" dirty="0">
+                <a:solidFill>
+                  <a:srgbClr val="3F4854"/>
+                </a:solidFill>
+                <a:latin typeface="Noto Sans CJK SC"/>
+                <a:ea typeface="Noto Sans CJK SC"/>
+                <a:cs typeface="Noto Sans CJK SC"/>
+              </a:rPr>
+              <a:t>未见直接报道</a:t>
+            </a:r>
+          </a:p>
+        </p:txBody>
+      </p:sp>
       <p:cxnSp>
         <p:nvCxnSpPr>
-          <p:cNvPr id="7" name="s_k1" descr="Editable line; source id s_k1"/>
+          <p:cNvPr id="44" name="t0_0" descr="Editable line; source id t0_0"/>
           <p:cNvCxnSpPr/>
           <p:nvPr/>
         </p:nvCxnSpPr>
         <p:spPr>
-          <a:xfrm flipH="1" flipV="1">
-            <a:off x="5151437" y="2619374"/>
-            <a:ext cx="214312" cy="214313"/>
+          <a:xfrm>
+            <a:off x="2261086" y="3023945"/>
+            <a:ext cx="556681" cy="0"/>
           </a:xfrm>
           <a:prstGeom prst="line">
             <a:avLst/>
           </a:prstGeom>
-          <a:ln w="31749">
+          <a:ln w="13745">
             <a:solidFill>
-              <a:srgbClr val="1B717D"/>
+              <a:srgbClr val="4B5563"/>
             </a:solidFill>
           </a:ln>
           <a:effectLst/>
@@ -3868,16 +5694,156 @@
           </a:fontRef>
         </p:style>
       </p:cxnSp>
-      <p:sp>
-        <p:nvSpPr>
-          <p:cNvPr id="8" name="s_k1b" descr="Editable line; source id s_k1b"/>
+      <p:cxnSp>
+        <p:nvCxnSpPr>
+          <p:cNvPr id="45" name="tv_0" descr="Editable line; source id tv_0"/>
+          <p:cNvCxnSpPr/>
+          <p:nvPr/>
+        </p:nvCxnSpPr>
+        <p:spPr>
+          <a:xfrm>
+            <a:off x="2817767" y="1443246"/>
+            <a:ext cx="0" cy="3195761"/>
+          </a:xfrm>
+          <a:prstGeom prst="line">
+            <a:avLst/>
+          </a:prstGeom>
+          <a:ln w="13745">
+            <a:solidFill>
+              <a:srgbClr val="4B5563"/>
+            </a:solidFill>
+          </a:ln>
+          <a:effectLst/>
+        </p:spPr>
+        <p:style>
+          <a:lnRef idx="2">
+            <a:schemeClr val="accent1"/>
+          </a:lnRef>
+          <a:fillRef idx="0">
+            <a:schemeClr val="accent1"/>
+          </a:fillRef>
+          <a:effectRef idx="0">
+            <a:schemeClr val="accent1"/>
+          </a:effectRef>
+          <a:fontRef idx="minor">
+            <a:schemeClr val="tx1"/>
+          </a:fontRef>
+        </p:style>
+      </p:cxnSp>
+      <p:sp>
+        <p:nvSpPr>
+          <p:cNvPr id="46" name="s0_p" descr="Editable shape; source id s0_p"/>
           <p:cNvSpPr/>
           <p:nvPr/>
         </p:nvSpPr>
         <p:spPr>
           <a:xfrm>
-            <a:off x="4246562" y="1714500"/>
-            <a:ext cx="225536" cy="225536"/>
+            <a:off x="2920856" y="1305794"/>
+            <a:ext cx="522317" cy="281776"/>
+          </a:xfrm>
+          <a:prstGeom prst="roundRect">
+            <a:avLst>
+              <a:gd name="adj" fmla="val 50000"/>
+            </a:avLst>
+          </a:prstGeom>
+          <a:solidFill>
+            <a:srgbClr val="FFFFFF"/>
+          </a:solidFill>
+          <a:ln w="8247">
+            <a:solidFill>
+              <a:srgbClr val="C6CCD1"/>
+            </a:solidFill>
+          </a:ln>
+          <a:effectLst/>
+        </p:spPr>
+        <p:style>
+          <a:lnRef idx="1">
+            <a:schemeClr val="accent1"/>
+          </a:lnRef>
+          <a:fillRef idx="3">
+            <a:schemeClr val="accent1"/>
+          </a:fillRef>
+          <a:effectRef idx="0">
+            <a:schemeClr val="accent1"/>
+          </a:effectRef>
+          <a:fontRef idx="minor">
+            <a:schemeClr val="lt1"/>
+          </a:fontRef>
+        </p:style>
+        <p:txBody>
+          <a:bodyPr rtlCol="0" anchor="ctr"/>
+          <a:lstStyle/>
+          <a:p>
+            <a:pPr algn="ctr"/>
+          </a:p>
+        </p:txBody>
+      </p:sp>
+      <p:sp>
+        <p:nvSpPr>
+          <p:cNvPr id="47" name="s0_p_t" descr="Editable text; source id s0_p_t"/>
+          <p:cNvSpPr txBox="1"/>
+          <p:nvPr/>
+        </p:nvSpPr>
+        <p:spPr>
+          <a:xfrm>
+            <a:off x="3003327" y="1333285"/>
+            <a:ext cx="357375" cy="213050"/>
+          </a:xfrm>
+          <a:prstGeom prst="rect">
+            <a:avLst/>
+          </a:prstGeom>
+          <a:noFill/>
+          <a:effectLst/>
+        </p:spPr>
+        <p:txBody>
+          <a:bodyPr wrap="none" anchor="ctr" tIns="0" rIns="0" bIns="0" lIns="0" anchorCtr="0" vertOverflow="overflow">
+            <a:noAutofit/>
+          </a:bodyPr>
+          <a:lstStyle/>
+          <a:p>
+            <a:pPr algn="ctr" fontAlgn="base">
+              <a:lnSpc>
+                <a:spcPts val="1420"/>
+              </a:lnSpc>
+              <a:spcBef>
+                <a:spcPts val="0"/>
+              </a:spcBef>
+              <a:spcAft>
+                <a:spcPts val="0"/>
+              </a:spcAft>
+              <a:defRPr sz="974" b="0" i="0" lang="zh-CN" dirty="0">
+                <a:solidFill>
+                  <a:srgbClr val="3F4854"/>
+                </a:solidFill>
+                <a:latin typeface="Noto Sans CJK SC"/>
+                <a:ea typeface="Noto Sans CJK SC"/>
+                <a:cs typeface="Noto Sans CJK SC"/>
+              </a:defRPr>
+            </a:pPr>
+            <a:r>
+              <a:rPr sz="974" b="0" i="0" lang="zh-CN" dirty="0">
+                <a:solidFill>
+                  <a:srgbClr val="3F4854"/>
+                </a:solidFill>
+                <a:latin typeface="Noto Sans CJK SC"/>
+                <a:ea typeface="Noto Sans CJK SC"/>
+                <a:cs typeface="Noto Sans CJK SC"/>
+              </a:rPr>
+              <a:t>结构</a:t>
+            </a:r>
+          </a:p>
+        </p:txBody>
+      </p:sp>
+      <p:sp>
+        <p:nvSpPr>
+          <p:cNvPr id="48" name="s0_0" descr="Editable line; source id s0_0"/>
+          <p:cNvSpPr/>
+          <p:nvPr/>
+        </p:nvSpPr>
+        <p:spPr>
+          <a:xfrm>
+            <a:off x="2817768" y="1405448"/>
+            <a:ext cx="735369" cy="75599"/>
           </a:xfrm>
           <a:custGeom>
             <a:avLst/>
@@ -3886,34 +5852,34 @@
             <a:cxnLst/>
             <a:rect l="l" t="t" r="r" b="b"/>
             <a:pathLst>
-              <a:path w="28414" h="28414">
+              <a:path w="107000" h="11000">
                 <a:moveTo>
-                  <a:pt x="25586" y="28414"/>
+                  <a:pt x="0" y="4500"/>
                 </a:moveTo>
                 <a:lnTo>
-                  <a:pt x="9899" y="12728"/>
+                  <a:pt x="94000" y="4500"/>
                 </a:lnTo>
                 <a:lnTo>
-                  <a:pt x="6364" y="16263"/>
+                  <a:pt x="94000" y="0"/>
                 </a:lnTo>
                 <a:lnTo>
-                  <a:pt x="0" y="0"/>
+                  <a:pt x="107000" y="5500"/>
                 </a:lnTo>
                 <a:lnTo>
-                  <a:pt x="16263" y="6364"/>
+                  <a:pt x="94000" y="11000"/>
                 </a:lnTo>
                 <a:lnTo>
-                  <a:pt x="12728" y="9899"/>
+                  <a:pt x="94000" y="6500"/>
                 </a:lnTo>
                 <a:lnTo>
-                  <a:pt x="28414" y="25586"/>
+                  <a:pt x="0" y="6500"/>
                 </a:lnTo>
                 <a:close/>
               </a:path>
             </a:pathLst>
           </a:custGeom>
           <a:solidFill>
-            <a:srgbClr val="1B717D"/>
+            <a:srgbClr val="4B5563"/>
           </a:solidFill>
           <a:ln>
             <a:noFill/>
@@ -3944,14 +5910,14 @@
       </p:sp>
       <p:sp>
         <p:nvSpPr>
-          <p:cNvPr id="9" name="s_k1_p" descr="Editable shape; source id s_k1_p"/>
+          <p:cNvPr id="49" name="s1_p" descr="Editable shape; source id s1_p"/>
           <p:cNvSpPr/>
           <p:nvPr/>
         </p:nvSpPr>
         <p:spPr>
           <a:xfrm>
-            <a:off x="4365624" y="2079624"/>
-            <a:ext cx="888999" cy="396874"/>
+            <a:off x="2920856" y="2364175"/>
+            <a:ext cx="522317" cy="281776"/>
           </a:xfrm>
           <a:prstGeom prst="roundRect">
             <a:avLst>
@@ -3959,11 +5925,11 @@
             </a:avLst>
           </a:prstGeom>
           <a:solidFill>
-            <a:srgbClr val="1B717D"/>
+            <a:srgbClr val="FFFFFF"/>
           </a:solidFill>
-          <a:ln w="19843">
+          <a:ln w="8247">
             <a:solidFill>
-              <a:srgbClr val="145159"/>
+              <a:srgbClr val="C6CCD1"/>
             </a:solidFill>
           </a:ln>
           <a:effectLst/>
@@ -3992,14 +5958,14 @@
       </p:sp>
       <p:sp>
         <p:nvSpPr>
-          <p:cNvPr id="10" name="s_k1_pt" descr="Editable text; source id s_k1_pt"/>
+          <p:cNvPr id="50" name="s1_p_t" descr="Editable text; source id s1_p_t"/>
           <p:cNvSpPr txBox="1"/>
           <p:nvPr/>
         </p:nvSpPr>
         <p:spPr>
           <a:xfrm>
-            <a:off x="4413249" y="2103437"/>
-            <a:ext cx="793749" cy="349249"/>
+            <a:off x="3003327" y="2405411"/>
+            <a:ext cx="357375" cy="213050"/>
           </a:xfrm>
           <a:prstGeom prst="rect">
             <a:avLst/>
@@ -4015,7 +5981,7 @@
           <a:p>
             <a:pPr algn="ctr" fontAlgn="base">
               <a:lnSpc>
-                <a:spcPts val="2187"/>
+                <a:spcPts val="1420"/>
               </a:lnSpc>
               <a:spcBef>
                 <a:spcPts val="0"/>
@@ -4023,9 +5989,9 @@
               <a:spcAft>
                 <a:spcPts val="0"/>
               </a:spcAft>
-              <a:defRPr sz="1499" b="1" i="0" lang="zh-CN" dirty="0">
-                <a:solidFill>
-                  <a:srgbClr val="FFFFFF"/>
+              <a:defRPr sz="974" b="0" i="0" lang="zh-CN" dirty="0">
+                <a:solidFill>
+                  <a:srgbClr val="3F4854"/>
                 </a:solidFill>
                 <a:latin typeface="Noto Sans CJK SC"/>
                 <a:ea typeface="Noto Sans CJK SC"/>
@@ -4033,42 +5999,68 @@
               </a:defRPr>
             </a:pPr>
             <a:r>
-              <a:rPr sz="1499" b="1" i="0" lang="zh-CN" dirty="0">
-                <a:solidFill>
-                  <a:srgbClr val="FFFFFF"/>
+              <a:rPr sz="974" b="0" i="0" lang="zh-CN" dirty="0">
+                <a:solidFill>
+                  <a:srgbClr val="3F4854"/>
                 </a:solidFill>
                 <a:latin typeface="Noto Sans CJK SC"/>
                 <a:ea typeface="Noto Sans CJK SC"/>
                 <a:cs typeface="Noto Sans CJK SC"/>
               </a:rPr>
-              <a:t>结构</a:t>
-            </a:r>
-          </a:p>
-        </p:txBody>
-      </p:sp>
-      <p:sp>
-        <p:nvSpPr>
-          <p:cNvPr id="11" name="k2" descr="Editable shape; source id k2"/>
+              <a:t>制备</a:t>
+            </a:r>
+          </a:p>
+        </p:txBody>
+      </p:sp>
+      <p:sp>
+        <p:nvSpPr>
+          <p:cNvPr id="51" name="s1_0" descr="Editable line; source id s1_0"/>
           <p:cNvSpPr/>
           <p:nvPr/>
         </p:nvSpPr>
         <p:spPr>
           <a:xfrm>
-            <a:off x="7096124" y="380999"/>
-            <a:ext cx="3238499" cy="1317624"/>
-          </a:xfrm>
-          <a:prstGeom prst="roundRect">
-            <a:avLst>
-              <a:gd name="adj" fmla="val 8433"/>
-            </a:avLst>
-          </a:prstGeom>
+            <a:off x="2817768" y="2470701"/>
+            <a:ext cx="735369" cy="75599"/>
+          </a:xfrm>
+          <a:custGeom>
+            <a:avLst/>
+            <a:gdLst/>
+            <a:ahLst/>
+            <a:cxnLst/>
+            <a:rect l="l" t="t" r="r" b="b"/>
+            <a:pathLst>
+              <a:path w="107000" h="11000">
+                <a:moveTo>
+                  <a:pt x="0" y="4500"/>
+                </a:moveTo>
+                <a:lnTo>
+                  <a:pt x="94000" y="4500"/>
+                </a:lnTo>
+                <a:lnTo>
+                  <a:pt x="94000" y="0"/>
+                </a:lnTo>
+                <a:lnTo>
+                  <a:pt x="107000" y="5500"/>
+                </a:lnTo>
+                <a:lnTo>
+                  <a:pt x="94000" y="11000"/>
+                </a:lnTo>
+                <a:lnTo>
+                  <a:pt x="94000" y="6500"/>
+                </a:lnTo>
+                <a:lnTo>
+                  <a:pt x="0" y="6500"/>
+                </a:lnTo>
+                <a:close/>
+              </a:path>
+            </a:pathLst>
+          </a:custGeom>
           <a:solidFill>
-            <a:srgbClr val="F2F5F7"/>
+            <a:srgbClr val="4B5563"/>
           </a:solidFill>
-          <a:ln w="27781">
-            <a:solidFill>
-              <a:srgbClr val="3F4A53"/>
-            </a:solidFill>
+          <a:ln>
+            <a:noFill/>
           </a:ln>
           <a:effectLst/>
         </p:spPr>
@@ -4096,14 +6088,62 @@
       </p:sp>
       <p:sp>
         <p:nvSpPr>
-          <p:cNvPr id="12" name="k2_t" descr="Editable text; source id k2_t"/>
+          <p:cNvPr id="52" name="s2_p" descr="Editable shape; source id s2_p"/>
+          <p:cNvSpPr/>
+          <p:nvPr/>
+        </p:nvSpPr>
+        <p:spPr>
+          <a:xfrm>
+            <a:off x="2920856" y="3436302"/>
+            <a:ext cx="522317" cy="281776"/>
+          </a:xfrm>
+          <a:prstGeom prst="roundRect">
+            <a:avLst>
+              <a:gd name="adj" fmla="val 50000"/>
+            </a:avLst>
+          </a:prstGeom>
+          <a:solidFill>
+            <a:srgbClr val="FFFFFF"/>
+          </a:solidFill>
+          <a:ln w="8247">
+            <a:solidFill>
+              <a:srgbClr val="C6CCD1"/>
+            </a:solidFill>
+          </a:ln>
+          <a:effectLst/>
+        </p:spPr>
+        <p:style>
+          <a:lnRef idx="1">
+            <a:schemeClr val="accent1"/>
+          </a:lnRef>
+          <a:fillRef idx="3">
+            <a:schemeClr val="accent1"/>
+          </a:fillRef>
+          <a:effectRef idx="0">
+            <a:schemeClr val="accent1"/>
+          </a:effectRef>
+          <a:fontRef idx="minor">
+            <a:schemeClr val="lt1"/>
+          </a:fontRef>
+        </p:style>
+        <p:txBody>
+          <a:bodyPr rtlCol="0" anchor="ctr"/>
+          <a:lstStyle/>
+          <a:p>
+            <a:pPr algn="ctr"/>
+          </a:p>
+        </p:txBody>
+      </p:sp>
+      <p:sp>
+        <p:nvSpPr>
+          <p:cNvPr id="53" name="s2_p_t" descr="Editable text; source id s2_p_t"/>
           <p:cNvSpPr txBox="1"/>
           <p:nvPr/>
         </p:nvSpPr>
         <p:spPr>
           <a:xfrm>
-            <a:off x="7191374" y="587374"/>
-            <a:ext cx="3047999" cy="460374"/>
+            <a:off x="3003327" y="3463792"/>
+            <a:ext cx="357375" cy="213050"/>
           </a:xfrm>
           <a:prstGeom prst="rect">
             <a:avLst/>
@@ -4119,7 +6159,7 @@
           <a:p>
             <a:pPr algn="ctr" fontAlgn="base">
               <a:lnSpc>
-                <a:spcPts val="3593"/>
+                <a:spcPts val="1420"/>
               </a:lnSpc>
               <a:spcBef>
                 <a:spcPts val="0"/>
@@ -4127,9 +6167,9 @@
               <a:spcAft>
                 <a:spcPts val="0"/>
               </a:spcAft>
-              <a:defRPr sz="2478" b="1" i="0" lang="zh-CN" dirty="0">
-                <a:solidFill>
-                  <a:srgbClr val="10171F"/>
+              <a:defRPr sz="974" b="0" i="0" lang="zh-CN" dirty="0">
+                <a:solidFill>
+                  <a:srgbClr val="3F4854"/>
                 </a:solidFill>
                 <a:latin typeface="Noto Sans CJK SC"/>
                 <a:ea typeface="Noto Sans CJK SC"/>
@@ -4137,29 +6177,151 @@
               </a:defRPr>
             </a:pPr>
             <a:r>
-              <a:rPr sz="2478" b="1" i="0" lang="zh-CN" dirty="0">
-                <a:solidFill>
-                  <a:srgbClr val="10171F"/>
+              <a:rPr sz="974" b="0" i="0" lang="zh-CN" dirty="0">
+                <a:solidFill>
+                  <a:srgbClr val="3F4854"/>
                 </a:solidFill>
                 <a:latin typeface="Noto Sans CJK SC"/>
                 <a:ea typeface="Noto Sans CJK SC"/>
                 <a:cs typeface="Noto Sans CJK SC"/>
               </a:rPr>
-              <a:t>合成路线</a:t>
-            </a:r>
-          </a:p>
-        </p:txBody>
-      </p:sp>
-      <p:sp>
-        <p:nvSpPr>
-          <p:cNvPr id="13" name="k2_s" descr="Editable text; source id k2_s"/>
+              <a:t>变量</a:t>
+            </a:r>
+          </a:p>
+        </p:txBody>
+      </p:sp>
+      <p:sp>
+        <p:nvSpPr>
+          <p:cNvPr id="54" name="s2_0" descr="Editable line; source id s2_0"/>
+          <p:cNvSpPr/>
+          <p:nvPr/>
+        </p:nvSpPr>
+        <p:spPr>
+          <a:xfrm>
+            <a:off x="2817768" y="3535955"/>
+            <a:ext cx="735369" cy="75599"/>
+          </a:xfrm>
+          <a:custGeom>
+            <a:avLst/>
+            <a:gdLst/>
+            <a:ahLst/>
+            <a:cxnLst/>
+            <a:rect l="l" t="t" r="r" b="b"/>
+            <a:pathLst>
+              <a:path w="107000" h="11000">
+                <a:moveTo>
+                  <a:pt x="0" y="4500"/>
+                </a:moveTo>
+                <a:lnTo>
+                  <a:pt x="94000" y="4500"/>
+                </a:lnTo>
+                <a:lnTo>
+                  <a:pt x="94000" y="0"/>
+                </a:lnTo>
+                <a:lnTo>
+                  <a:pt x="107000" y="5500"/>
+                </a:lnTo>
+                <a:lnTo>
+                  <a:pt x="94000" y="11000"/>
+                </a:lnTo>
+                <a:lnTo>
+                  <a:pt x="94000" y="6500"/>
+                </a:lnTo>
+                <a:lnTo>
+                  <a:pt x="0" y="6500"/>
+                </a:lnTo>
+                <a:close/>
+              </a:path>
+            </a:pathLst>
+          </a:custGeom>
+          <a:solidFill>
+            <a:srgbClr val="4B5563"/>
+          </a:solidFill>
+          <a:ln>
+            <a:noFill/>
+          </a:ln>
+          <a:effectLst/>
+        </p:spPr>
+        <p:style>
+          <a:lnRef idx="1">
+            <a:schemeClr val="accent1"/>
+          </a:lnRef>
+          <a:fillRef idx="3">
+            <a:schemeClr val="accent1"/>
+          </a:fillRef>
+          <a:effectRef idx="0">
+            <a:schemeClr val="accent1"/>
+          </a:effectRef>
+          <a:fontRef idx="minor">
+            <a:schemeClr val="lt1"/>
+          </a:fontRef>
+        </p:style>
+        <p:txBody>
+          <a:bodyPr rtlCol="0" anchor="ctr"/>
+          <a:lstStyle/>
+          <a:p>
+            <a:pPr algn="ctr"/>
+          </a:p>
+        </p:txBody>
+      </p:sp>
+      <p:sp>
+        <p:nvSpPr>
+          <p:cNvPr id="55" name="s3_p" descr="Editable shape; source id s3_p"/>
+          <p:cNvSpPr/>
+          <p:nvPr/>
+        </p:nvSpPr>
+        <p:spPr>
+          <a:xfrm>
+            <a:off x="2920856" y="4494683"/>
+            <a:ext cx="522317" cy="281776"/>
+          </a:xfrm>
+          <a:prstGeom prst="roundRect">
+            <a:avLst>
+              <a:gd name="adj" fmla="val 50000"/>
+            </a:avLst>
+          </a:prstGeom>
+          <a:solidFill>
+            <a:srgbClr val="FFFFFF"/>
+          </a:solidFill>
+          <a:ln w="8247">
+            <a:solidFill>
+              <a:srgbClr val="C6CCD1"/>
+            </a:solidFill>
+          </a:ln>
+          <a:effectLst/>
+        </p:spPr>
+        <p:style>
+          <a:lnRef idx="1">
+            <a:schemeClr val="accent1"/>
+          </a:lnRef>
+          <a:fillRef idx="3">
+            <a:schemeClr val="accent1"/>
+          </a:fillRef>
+          <a:effectRef idx="0">
+            <a:schemeClr val="accent1"/>
+          </a:effectRef>
+          <a:fontRef idx="minor">
+            <a:schemeClr val="lt1"/>
+          </a:fontRef>
+        </p:style>
+        <p:txBody>
+          <a:bodyPr rtlCol="0" anchor="ctr"/>
+          <a:lstStyle/>
+          <a:p>
+            <a:pPr algn="ctr"/>
+          </a:p>
+        </p:txBody>
+      </p:sp>
+      <p:sp>
+        <p:nvSpPr>
+          <p:cNvPr id="56" name="s3_p_t" descr="Editable text; source id s3_p_t"/>
           <p:cNvSpPr txBox="1"/>
           <p:nvPr/>
         </p:nvSpPr>
         <p:spPr>
           <a:xfrm>
-            <a:off x="7191374" y="1127124"/>
-            <a:ext cx="3047999" cy="333374"/>
+            <a:off x="3003327" y="4535918"/>
+            <a:ext cx="357375" cy="213050"/>
           </a:xfrm>
           <a:prstGeom prst="rect">
             <a:avLst/>
@@ -4175,7 +6337,7 @@
           <a:p>
             <a:pPr algn="ctr" fontAlgn="base">
               <a:lnSpc>
-                <a:spcPts val="2468"/>
+                <a:spcPts val="1420"/>
               </a:lnSpc>
               <a:spcBef>
                 <a:spcPts val="0"/>
@@ -4183,9 +6345,9 @@
               <a:spcAft>
                 <a:spcPts val="0"/>
               </a:spcAft>
-              <a:defRPr sz="1687" b="0" i="0" lang="zh-CN" dirty="0">
-                <a:solidFill>
-                  <a:srgbClr val="2B333A"/>
+              <a:defRPr sz="974" b="0" i="0" lang="zh-CN" dirty="0">
+                <a:solidFill>
+                  <a:srgbClr val="3F4854"/>
                 </a:solidFill>
                 <a:latin typeface="Noto Sans CJK SC"/>
                 <a:ea typeface="Noto Sans CJK SC"/>
@@ -4193,109 +6355,29 @@
               </a:defRPr>
             </a:pPr>
             <a:r>
-              <a:rPr sz="1687" b="0" i="0" lang="zh-CN" dirty="0">
-                <a:solidFill>
-                  <a:srgbClr val="2B333A"/>
+              <a:rPr sz="974" b="0" i="0" lang="zh-CN" dirty="0">
+                <a:solidFill>
+                  <a:srgbClr val="3F4854"/>
                 </a:solidFill>
                 <a:latin typeface="Noto Sans CJK SC"/>
                 <a:ea typeface="Noto Sans CJK SC"/>
                 <a:cs typeface="Noto Sans CJK SC"/>
               </a:rPr>
-              <a:t>固相</a:t>
-            </a:r>
-            <a:r>
-              <a:rPr sz="1687" b="0" i="0" lang="zh-CN" dirty="0">
-                <a:solidFill>
-                  <a:srgbClr val="2B333A"/>
-                </a:solidFill>
-                <a:latin typeface="DejaVu Sans"/>
-                <a:ea typeface="DejaVu Sans"/>
-                <a:cs typeface="DejaVu Sans"/>
-              </a:rPr>
-              <a:t> · </a:t>
-            </a:r>
-            <a:r>
-              <a:rPr sz="1687" b="0" i="0" lang="zh-CN" dirty="0">
-                <a:solidFill>
-                  <a:srgbClr val="2B333A"/>
-                </a:solidFill>
-                <a:latin typeface="Noto Sans CJK SC"/>
-                <a:ea typeface="Noto Sans CJK SC"/>
-                <a:cs typeface="Noto Sans CJK SC"/>
-              </a:rPr>
-              <a:t>溶胶</a:t>
-            </a:r>
-            <a:r>
-              <a:rPr sz="1687" b="0" i="0" lang="zh-CN" dirty="0">
-                <a:solidFill>
-                  <a:srgbClr val="2B333A"/>
-                </a:solidFill>
-                <a:latin typeface="DejaVu Sans"/>
-                <a:ea typeface="DejaVu Sans"/>
-                <a:cs typeface="DejaVu Sans"/>
-              </a:rPr>
-              <a:t>—</a:t>
-            </a:r>
-            <a:r>
-              <a:rPr sz="1687" b="0" i="0" lang="zh-CN" dirty="0">
-                <a:solidFill>
-                  <a:srgbClr val="2B333A"/>
-                </a:solidFill>
-                <a:latin typeface="Noto Sans CJK SC"/>
-                <a:ea typeface="Noto Sans CJK SC"/>
-                <a:cs typeface="Noto Sans CJK SC"/>
-              </a:rPr>
-              <a:t>凝胶</a:t>
-            </a:r>
-          </a:p>
-        </p:txBody>
-      </p:sp>
-      <p:cxnSp>
-        <p:nvCxnSpPr>
-          <p:cNvPr id="14" name="s_k2" descr="Editable line; source id s_k2"/>
-          <p:cNvCxnSpPr/>
-          <p:nvPr/>
-        </p:nvCxnSpPr>
-        <p:spPr>
-          <a:xfrm flipV="1">
-            <a:off x="6826249" y="2619374"/>
-            <a:ext cx="214313" cy="214313"/>
-          </a:xfrm>
-          <a:prstGeom prst="line">
-            <a:avLst/>
-          </a:prstGeom>
-          <a:ln w="31749">
-            <a:solidFill>
-              <a:srgbClr val="1B717D"/>
-            </a:solidFill>
-          </a:ln>
-          <a:effectLst/>
-        </p:spPr>
-        <p:style>
-          <a:lnRef idx="2">
-            <a:schemeClr val="accent1"/>
-          </a:lnRef>
-          <a:fillRef idx="0">
-            <a:schemeClr val="accent1"/>
-          </a:fillRef>
-          <a:effectRef idx="0">
-            <a:schemeClr val="accent1"/>
-          </a:effectRef>
-          <a:fontRef idx="minor">
-            <a:schemeClr val="tx1"/>
-          </a:fontRef>
-        </p:style>
-      </p:cxnSp>
-      <p:sp>
-        <p:nvSpPr>
-          <p:cNvPr id="15" name="s_k2b" descr="Editable line; source id s_k2b"/>
+              <a:t>晶化</a:t>
+            </a:r>
+          </a:p>
+        </p:txBody>
+      </p:sp>
+      <p:sp>
+        <p:nvSpPr>
+          <p:cNvPr id="57" name="s3_0" descr="Editable line; source id s3_0"/>
           <p:cNvSpPr/>
           <p:nvPr/>
         </p:nvSpPr>
         <p:spPr>
           <a:xfrm>
-            <a:off x="7711964" y="1714500"/>
-            <a:ext cx="225536" cy="225536"/>
+            <a:off x="2817768" y="4601208"/>
+            <a:ext cx="735369" cy="75599"/>
           </a:xfrm>
           <a:custGeom>
             <a:avLst/>
@@ -4304,34 +6386,34 @@
             <a:cxnLst/>
             <a:rect l="l" t="t" r="r" b="b"/>
             <a:pathLst>
-              <a:path w="28414" h="28414">
+              <a:path w="107000" h="11000">
                 <a:moveTo>
-                  <a:pt x="0" y="25586"/>
+                  <a:pt x="0" y="4500"/>
                 </a:moveTo>
                 <a:lnTo>
-                  <a:pt x="15686" y="9899"/>
+                  <a:pt x="94000" y="4500"/>
                 </a:lnTo>
                 <a:lnTo>
-                  <a:pt x="12151" y="6364"/>
+                  <a:pt x="94000" y="0"/>
                 </a:lnTo>
                 <a:lnTo>
-                  <a:pt x="28414" y="0"/>
+                  <a:pt x="107000" y="5500"/>
                 </a:lnTo>
                 <a:lnTo>
-                  <a:pt x="22050" y="16263"/>
+                  <a:pt x="94000" y="11000"/>
                 </a:lnTo>
                 <a:lnTo>
-                  <a:pt x="18515" y="12728"/>
+                  <a:pt x="94000" y="6500"/>
                 </a:lnTo>
                 <a:lnTo>
-                  <a:pt x="2828" y="28414"/>
+                  <a:pt x="0" y="6500"/>
                 </a:lnTo>
                 <a:close/>
               </a:path>
             </a:pathLst>
           </a:custGeom>
           <a:solidFill>
-            <a:srgbClr val="1B717D"/>
+            <a:srgbClr val="4B5563"/>
           </a:solidFill>
           <a:ln>
             <a:noFill/>
@@ -4360,16 +6442,124 @@
           </a:p>
         </p:txBody>
       </p:sp>
-      <p:sp>
-        <p:nvSpPr>
-          <p:cNvPr id="16" name="s_k2_p" descr="Editable shape; source id s_k2_p"/>
+      <p:cxnSp>
+        <p:nvCxnSpPr>
+          <p:cNvPr id="58" name="u0_0" descr="Editable line; source id u0_0"/>
+          <p:cNvCxnSpPr/>
+          <p:nvPr/>
+        </p:nvCxnSpPr>
+        <p:spPr>
+          <a:xfrm>
+            <a:off x="1250813" y="5326268"/>
+            <a:ext cx="0" cy="323012"/>
+          </a:xfrm>
+          <a:prstGeom prst="line">
+            <a:avLst/>
+          </a:prstGeom>
+          <a:ln w="13745">
+            <a:solidFill>
+              <a:srgbClr val="4B5563"/>
+            </a:solidFill>
+          </a:ln>
+          <a:effectLst/>
+        </p:spPr>
+        <p:style>
+          <a:lnRef idx="2">
+            <a:schemeClr val="accent1"/>
+          </a:lnRef>
+          <a:fillRef idx="0">
+            <a:schemeClr val="accent1"/>
+          </a:fillRef>
+          <a:effectRef idx="0">
+            <a:schemeClr val="accent1"/>
+          </a:effectRef>
+          <a:fontRef idx="minor">
+            <a:schemeClr val="tx1"/>
+          </a:fontRef>
+        </p:style>
+      </p:cxnSp>
+      <p:cxnSp>
+        <p:nvCxnSpPr>
+          <p:cNvPr id="59" name="u0_1" descr="Editable line; source id u0_1"/>
+          <p:cNvCxnSpPr/>
+          <p:nvPr/>
+        </p:nvCxnSpPr>
+        <p:spPr>
+          <a:xfrm>
+            <a:off x="1250813" y="5649280"/>
+            <a:ext cx="6652681" cy="0"/>
+          </a:xfrm>
+          <a:prstGeom prst="line">
+            <a:avLst/>
+          </a:prstGeom>
+          <a:ln w="13745">
+            <a:solidFill>
+              <a:srgbClr val="4B5563"/>
+            </a:solidFill>
+          </a:ln>
+          <a:effectLst/>
+        </p:spPr>
+        <p:style>
+          <a:lnRef idx="2">
+            <a:schemeClr val="accent1"/>
+          </a:lnRef>
+          <a:fillRef idx="0">
+            <a:schemeClr val="accent1"/>
+          </a:fillRef>
+          <a:effectRef idx="0">
+            <a:schemeClr val="accent1"/>
+          </a:effectRef>
+          <a:fontRef idx="minor">
+            <a:schemeClr val="tx1"/>
+          </a:fontRef>
+        </p:style>
+      </p:cxnSp>
+      <p:cxnSp>
+        <p:nvCxnSpPr>
+          <p:cNvPr id="60" name="uv_0" descr="Editable line; source id uv_0"/>
+          <p:cNvCxnSpPr/>
+          <p:nvPr/>
+        </p:nvCxnSpPr>
+        <p:spPr>
+          <a:xfrm>
+            <a:off x="7903494" y="1546335"/>
+            <a:ext cx="0" cy="4102945"/>
+          </a:xfrm>
+          <a:prstGeom prst="line">
+            <a:avLst/>
+          </a:prstGeom>
+          <a:ln w="13745">
+            <a:solidFill>
+              <a:srgbClr val="4B5563"/>
+            </a:solidFill>
+          </a:ln>
+          <a:effectLst/>
+        </p:spPr>
+        <p:style>
+          <a:lnRef idx="2">
+            <a:schemeClr val="accent1"/>
+          </a:lnRef>
+          <a:fillRef idx="0">
+            <a:schemeClr val="accent1"/>
+          </a:fillRef>
+          <a:effectRef idx="0">
+            <a:schemeClr val="accent1"/>
+          </a:effectRef>
+          <a:fontRef idx="minor">
+            <a:schemeClr val="tx1"/>
+          </a:fontRef>
+        </p:style>
+      </p:cxnSp>
+      <p:sp>
+        <p:nvSpPr>
+          <p:cNvPr id="61" name="v0_p" descr="Editable shape; source id v0_p"/>
           <p:cNvSpPr/>
           <p:nvPr/>
         </p:nvSpPr>
         <p:spPr>
           <a:xfrm>
-            <a:off x="6937374" y="2071687"/>
-            <a:ext cx="888999" cy="396874"/>
+            <a:off x="7896622" y="1402011"/>
+            <a:ext cx="522317" cy="281776"/>
           </a:xfrm>
           <a:prstGeom prst="roundRect">
             <a:avLst>
@@ -4377,11 +6567,11 @@
             </a:avLst>
           </a:prstGeom>
           <a:solidFill>
-            <a:srgbClr val="1B717D"/>
+            <a:srgbClr val="FFFFFF"/>
           </a:solidFill>
-          <a:ln w="19843">
+          <a:ln w="8247">
             <a:solidFill>
-              <a:srgbClr val="145159"/>
+              <a:srgbClr val="C6CCD1"/>
             </a:solidFill>
           </a:ln>
           <a:effectLst/>
@@ -4410,14 +6600,14 @@
       </p:sp>
       <p:sp>
         <p:nvSpPr>
-          <p:cNvPr id="17" name="s_k2_pt" descr="Editable text; source id s_k2_pt"/>
+          <p:cNvPr id="62" name="v0_p_t" descr="Editable text; source id v0_p_t"/>
           <p:cNvSpPr txBox="1"/>
           <p:nvPr/>
         </p:nvSpPr>
         <p:spPr>
           <a:xfrm>
-            <a:off x="6984999" y="2095499"/>
-            <a:ext cx="793749" cy="349249"/>
+            <a:off x="7979093" y="1443246"/>
+            <a:ext cx="357375" cy="213050"/>
           </a:xfrm>
           <a:prstGeom prst="rect">
             <a:avLst/>
@@ -4433,7 +6623,7 @@
           <a:p>
             <a:pPr algn="ctr" fontAlgn="base">
               <a:lnSpc>
-                <a:spcPts val="2187"/>
+                <a:spcPts val="1420"/>
               </a:lnSpc>
               <a:spcBef>
                 <a:spcPts val="0"/>
@@ -4441,9 +6631,9 @@
               <a:spcAft>
                 <a:spcPts val="0"/>
               </a:spcAft>
-              <a:defRPr sz="1499" b="1" i="0" lang="zh-CN" dirty="0">
-                <a:solidFill>
-                  <a:srgbClr val="FFFFFF"/>
+              <a:defRPr sz="974" b="0" i="0" lang="zh-CN" dirty="0">
+                <a:solidFill>
+                  <a:srgbClr val="3F4854"/>
                 </a:solidFill>
                 <a:latin typeface="Noto Sans CJK SC"/>
                 <a:ea typeface="Noto Sans CJK SC"/>
@@ -4451,42 +6641,68 @@
               </a:defRPr>
             </a:pPr>
             <a:r>
-              <a:rPr sz="1499" b="1" i="0" lang="zh-CN" dirty="0">
-                <a:solidFill>
-                  <a:srgbClr val="FFFFFF"/>
+              <a:rPr sz="974" b="0" i="0" lang="zh-CN" dirty="0">
+                <a:solidFill>
+                  <a:srgbClr val="3F4854"/>
                 </a:solidFill>
                 <a:latin typeface="Noto Sans CJK SC"/>
                 <a:ea typeface="Noto Sans CJK SC"/>
                 <a:cs typeface="Noto Sans CJK SC"/>
               </a:rPr>
-              <a:t>制备</a:t>
-            </a:r>
-          </a:p>
-        </p:txBody>
-      </p:sp>
-      <p:sp>
-        <p:nvSpPr>
-          <p:cNvPr id="18" name="k3" descr="Editable shape; source id k3"/>
+              <a:t>近邻</a:t>
+            </a:r>
+          </a:p>
+        </p:txBody>
+      </p:sp>
+      <p:sp>
+        <p:nvSpPr>
+          <p:cNvPr id="63" name="v0_0" descr="Editable line; source id v0_0"/>
           <p:cNvSpPr/>
           <p:nvPr/>
         </p:nvSpPr>
         <p:spPr>
           <a:xfrm>
-            <a:off x="206374" y="2952749"/>
-            <a:ext cx="2706687" cy="1293812"/>
-          </a:xfrm>
-          <a:prstGeom prst="roundRect">
-            <a:avLst>
-              <a:gd name="adj" fmla="val 8588"/>
-            </a:avLst>
-          </a:prstGeom>
+            <a:off x="7903495" y="1508537"/>
+            <a:ext cx="508573" cy="75599"/>
+          </a:xfrm>
+          <a:custGeom>
+            <a:avLst/>
+            <a:gdLst/>
+            <a:ahLst/>
+            <a:cxnLst/>
+            <a:rect l="l" t="t" r="r" b="b"/>
+            <a:pathLst>
+              <a:path w="74000" h="11000">
+                <a:moveTo>
+                  <a:pt x="0" y="4500"/>
+                </a:moveTo>
+                <a:lnTo>
+                  <a:pt x="61000" y="4500"/>
+                </a:lnTo>
+                <a:lnTo>
+                  <a:pt x="61000" y="0"/>
+                </a:lnTo>
+                <a:lnTo>
+                  <a:pt x="74000" y="5500"/>
+                </a:lnTo>
+                <a:lnTo>
+                  <a:pt x="61000" y="11000"/>
+                </a:lnTo>
+                <a:lnTo>
+                  <a:pt x="61000" y="6500"/>
+                </a:lnTo>
+                <a:lnTo>
+                  <a:pt x="0" y="6500"/>
+                </a:lnTo>
+                <a:close/>
+              </a:path>
+            </a:pathLst>
+          </a:custGeom>
           <a:solidFill>
-            <a:srgbClr val="F2F5F7"/>
+            <a:srgbClr val="4B5563"/>
           </a:solidFill>
-          <a:ln w="27781">
-            <a:solidFill>
-              <a:srgbClr val="3F4A53"/>
-            </a:solidFill>
+          <a:ln>
+            <a:noFill/>
           </a:ln>
           <a:effectLst/>
         </p:spPr>
@@ -4514,14 +6730,62 @@
       </p:sp>
       <p:sp>
         <p:nvSpPr>
-          <p:cNvPr id="19" name="k3_t" descr="Editable text; source id k3_t"/>
+          <p:cNvPr id="64" name="v1_p" descr="Editable shape; source id v1_p"/>
+          <p:cNvSpPr/>
+          <p:nvPr/>
+        </p:nvSpPr>
+        <p:spPr>
+          <a:xfrm>
+            <a:off x="7896622" y="2707806"/>
+            <a:ext cx="522317" cy="281776"/>
+          </a:xfrm>
+          <a:prstGeom prst="roundRect">
+            <a:avLst>
+              <a:gd name="adj" fmla="val 50000"/>
+            </a:avLst>
+          </a:prstGeom>
+          <a:solidFill>
+            <a:srgbClr val="FFFFFF"/>
+          </a:solidFill>
+          <a:ln w="8247">
+            <a:solidFill>
+              <a:srgbClr val="C6CCD1"/>
+            </a:solidFill>
+          </a:ln>
+          <a:effectLst/>
+        </p:spPr>
+        <p:style>
+          <a:lnRef idx="1">
+            <a:schemeClr val="accent1"/>
+          </a:lnRef>
+          <a:fillRef idx="3">
+            <a:schemeClr val="accent1"/>
+          </a:fillRef>
+          <a:effectRef idx="0">
+            <a:schemeClr val="accent1"/>
+          </a:effectRef>
+          <a:fontRef idx="minor">
+            <a:schemeClr val="lt1"/>
+          </a:fontRef>
+        </p:style>
+        <p:txBody>
+          <a:bodyPr rtlCol="0" anchor="ctr"/>
+          <a:lstStyle/>
+          <a:p>
+            <a:pPr algn="ctr"/>
+          </a:p>
+        </p:txBody>
+      </p:sp>
+      <p:sp>
+        <p:nvSpPr>
+          <p:cNvPr id="65" name="v1_p_t" descr="Editable text; source id v1_p_t"/>
           <p:cNvSpPr txBox="1"/>
           <p:nvPr/>
         </p:nvSpPr>
         <p:spPr>
           <a:xfrm>
-            <a:off x="301624" y="3159124"/>
-            <a:ext cx="2516187" cy="460374"/>
+            <a:off x="7979093" y="2749041"/>
+            <a:ext cx="357375" cy="213050"/>
           </a:xfrm>
           <a:prstGeom prst="rect">
             <a:avLst/>
@@ -4537,7 +6801,7 @@
           <a:p>
             <a:pPr algn="ctr" fontAlgn="base">
               <a:lnSpc>
-                <a:spcPts val="3593"/>
+                <a:spcPts val="1420"/>
               </a:lnSpc>
               <a:spcBef>
                 <a:spcPts val="0"/>
@@ -4545,9 +6809,9 @@
               <a:spcAft>
                 <a:spcPts val="0"/>
               </a:spcAft>
-              <a:defRPr sz="2478" b="1" i="0" lang="zh-CN" dirty="0">
-                <a:solidFill>
-                  <a:srgbClr val="10171F"/>
+              <a:defRPr sz="974" b="0" i="0" lang="zh-CN" dirty="0">
+                <a:solidFill>
+                  <a:srgbClr val="3F4854"/>
                 </a:solidFill>
                 <a:latin typeface="Noto Sans CJK SC"/>
                 <a:ea typeface="Noto Sans CJK SC"/>
@@ -4555,29 +6819,151 @@
               </a:defRPr>
             </a:pPr>
             <a:r>
-              <a:rPr sz="2478" b="1" i="0" lang="zh-CN" dirty="0">
-                <a:solidFill>
-                  <a:srgbClr val="10171F"/>
+              <a:rPr sz="974" b="0" i="0" lang="zh-CN" dirty="0">
+                <a:solidFill>
+                  <a:srgbClr val="3F4854"/>
                 </a:solidFill>
                 <a:latin typeface="Noto Sans CJK SC"/>
                 <a:ea typeface="Noto Sans CJK SC"/>
                 <a:cs typeface="Noto Sans CJK SC"/>
               </a:rPr>
-              <a:t>近邻体系</a:t>
-            </a:r>
-          </a:p>
-        </p:txBody>
-      </p:sp>
-      <p:sp>
-        <p:nvSpPr>
-          <p:cNvPr id="20" name="k3_s" descr="Editable text; source id k3_s"/>
+              <a:t>判读</a:t>
+            </a:r>
+          </a:p>
+        </p:txBody>
+      </p:sp>
+      <p:sp>
+        <p:nvSpPr>
+          <p:cNvPr id="66" name="v1_0" descr="Editable line; source id v1_0"/>
+          <p:cNvSpPr/>
+          <p:nvPr/>
+        </p:nvSpPr>
+        <p:spPr>
+          <a:xfrm>
+            <a:off x="7903495" y="2814331"/>
+            <a:ext cx="508573" cy="75599"/>
+          </a:xfrm>
+          <a:custGeom>
+            <a:avLst/>
+            <a:gdLst/>
+            <a:ahLst/>
+            <a:cxnLst/>
+            <a:rect l="l" t="t" r="r" b="b"/>
+            <a:pathLst>
+              <a:path w="74000" h="11000">
+                <a:moveTo>
+                  <a:pt x="0" y="4500"/>
+                </a:moveTo>
+                <a:lnTo>
+                  <a:pt x="61000" y="4500"/>
+                </a:lnTo>
+                <a:lnTo>
+                  <a:pt x="61000" y="0"/>
+                </a:lnTo>
+                <a:lnTo>
+                  <a:pt x="74000" y="5500"/>
+                </a:lnTo>
+                <a:lnTo>
+                  <a:pt x="61000" y="11000"/>
+                </a:lnTo>
+                <a:lnTo>
+                  <a:pt x="61000" y="6500"/>
+                </a:lnTo>
+                <a:lnTo>
+                  <a:pt x="0" y="6500"/>
+                </a:lnTo>
+                <a:close/>
+              </a:path>
+            </a:pathLst>
+          </a:custGeom>
+          <a:solidFill>
+            <a:srgbClr val="4B5563"/>
+          </a:solidFill>
+          <a:ln>
+            <a:noFill/>
+          </a:ln>
+          <a:effectLst/>
+        </p:spPr>
+        <p:style>
+          <a:lnRef idx="1">
+            <a:schemeClr val="accent1"/>
+          </a:lnRef>
+          <a:fillRef idx="3">
+            <a:schemeClr val="accent1"/>
+          </a:fillRef>
+          <a:effectRef idx="0">
+            <a:schemeClr val="accent1"/>
+          </a:effectRef>
+          <a:fontRef idx="minor">
+            <a:schemeClr val="lt1"/>
+          </a:fontRef>
+        </p:style>
+        <p:txBody>
+          <a:bodyPr rtlCol="0" anchor="ctr"/>
+          <a:lstStyle/>
+          <a:p>
+            <a:pPr algn="ctr"/>
+          </a:p>
+        </p:txBody>
+      </p:sp>
+      <p:sp>
+        <p:nvSpPr>
+          <p:cNvPr id="67" name="v2_p" descr="Editable shape; source id v2_p"/>
+          <p:cNvSpPr/>
+          <p:nvPr/>
+        </p:nvSpPr>
+        <p:spPr>
+          <a:xfrm>
+            <a:off x="7896622" y="4013600"/>
+            <a:ext cx="522317" cy="281776"/>
+          </a:xfrm>
+          <a:prstGeom prst="roundRect">
+            <a:avLst>
+              <a:gd name="adj" fmla="val 50000"/>
+            </a:avLst>
+          </a:prstGeom>
+          <a:solidFill>
+            <a:srgbClr val="FFFFFF"/>
+          </a:solidFill>
+          <a:ln w="8247">
+            <a:solidFill>
+              <a:srgbClr val="C6CCD1"/>
+            </a:solidFill>
+          </a:ln>
+          <a:effectLst/>
+        </p:spPr>
+        <p:style>
+          <a:lnRef idx="1">
+            <a:schemeClr val="accent1"/>
+          </a:lnRef>
+          <a:fillRef idx="3">
+            <a:schemeClr val="accent1"/>
+          </a:fillRef>
+          <a:effectRef idx="0">
+            <a:schemeClr val="accent1"/>
+          </a:effectRef>
+          <a:fontRef idx="minor">
+            <a:schemeClr val="lt1"/>
+          </a:fontRef>
+        </p:style>
+        <p:txBody>
+          <a:bodyPr rtlCol="0" anchor="ctr"/>
+          <a:lstStyle/>
+          <a:p>
+            <a:pPr algn="ctr"/>
+          </a:p>
+        </p:txBody>
+      </p:sp>
+      <p:sp>
+        <p:nvSpPr>
+          <p:cNvPr id="68" name="v2_p_t" descr="Editable text; source id v2_p_t"/>
           <p:cNvSpPr txBox="1"/>
           <p:nvPr/>
         </p:nvSpPr>
         <p:spPr>
           <a:xfrm>
-            <a:off x="301624" y="3698874"/>
-            <a:ext cx="2516187" cy="333374"/>
+            <a:off x="7979093" y="4054836"/>
+            <a:ext cx="357375" cy="213050"/>
           </a:xfrm>
           <a:prstGeom prst="rect">
             <a:avLst/>
@@ -4593,7 +6979,7 @@
           <a:p>
             <a:pPr algn="ctr" fontAlgn="base">
               <a:lnSpc>
-                <a:spcPts val="2468"/>
+                <a:spcPts val="1420"/>
               </a:lnSpc>
               <a:spcBef>
                 <a:spcPts val="0"/>
@@ -4601,234 +6987,9 @@
               <a:spcAft>
                 <a:spcPts val="0"/>
               </a:spcAft>
-              <a:defRPr sz="1687" b="0" i="0" lang="zh-CN" dirty="0">
-                <a:solidFill>
-                  <a:srgbClr val="2B333A"/>
-                </a:solidFill>
-                <a:latin typeface="DejaVu Sans"/>
-                <a:ea typeface="DejaVu Sans"/>
-                <a:cs typeface="DejaVu Sans"/>
-              </a:defRPr>
-            </a:pPr>
-            <a:r>
-              <a:rPr sz="1687" b="0" i="0" lang="zh-CN" dirty="0">
-                <a:solidFill>
-                  <a:srgbClr val="2B333A"/>
-                </a:solidFill>
-                <a:latin typeface="DejaVu Sans"/>
-                <a:ea typeface="DejaVu Sans"/>
-                <a:cs typeface="DejaVu Sans"/>
-              </a:rPr>
-              <a:t>Ba2ZnSi2O7 </a:t>
-            </a:r>
-            <a:r>
-              <a:rPr sz="1687" b="0" i="0" lang="zh-CN" dirty="0">
-                <a:solidFill>
-                  <a:srgbClr val="2B333A"/>
-                </a:solidFill>
-                <a:latin typeface="Noto Sans CJK SC"/>
-                <a:ea typeface="Noto Sans CJK SC"/>
-                <a:cs typeface="Noto Sans CJK SC"/>
-              </a:rPr>
-              <a:t>等</a:t>
-            </a:r>
-          </a:p>
-        </p:txBody>
-      </p:sp>
-      <p:cxnSp>
-        <p:nvCxnSpPr>
-          <p:cNvPr id="21" name="s_k3" descr="Editable line; source id s_k3"/>
-          <p:cNvCxnSpPr/>
-          <p:nvPr/>
-        </p:nvCxnSpPr>
-        <p:spPr>
-          <a:xfrm flipH="1">
-            <a:off x="4476749" y="3563937"/>
-            <a:ext cx="587375" cy="0"/>
-          </a:xfrm>
-          <a:prstGeom prst="line">
-            <a:avLst/>
-          </a:prstGeom>
-          <a:ln w="31749">
-            <a:solidFill>
-              <a:srgbClr val="1B717D"/>
-            </a:solidFill>
-          </a:ln>
-          <a:effectLst/>
-        </p:spPr>
-        <p:style>
-          <a:lnRef idx="2">
-            <a:schemeClr val="accent1"/>
-          </a:lnRef>
-          <a:fillRef idx="0">
-            <a:schemeClr val="accent1"/>
-          </a:fillRef>
-          <a:effectRef idx="0">
-            <a:schemeClr val="accent1"/>
-          </a:effectRef>
-          <a:fontRef idx="minor">
-            <a:schemeClr val="tx1"/>
-          </a:fontRef>
-        </p:style>
-      </p:cxnSp>
-      <p:sp>
-        <p:nvSpPr>
-          <p:cNvPr id="22" name="s_k3b" descr="Editable line; source id s_k3b"/>
-          <p:cNvSpPr/>
-          <p:nvPr/>
-        </p:nvSpPr>
-        <p:spPr>
-          <a:xfrm>
-            <a:off x="2928937" y="3508375"/>
-            <a:ext cx="595312" cy="111125"/>
-          </a:xfrm>
-          <a:custGeom>
-            <a:avLst/>
-            <a:gdLst/>
-            <a:ahLst/>
-            <a:cxnLst/>
-            <a:rect l="l" t="t" r="r" b="b"/>
-            <a:pathLst>
-              <a:path w="75000" h="14000">
-                <a:moveTo>
-                  <a:pt x="75000" y="9000"/>
-                </a:moveTo>
-                <a:lnTo>
-                  <a:pt x="16000" y="9000"/>
-                </a:lnTo>
-                <a:lnTo>
-                  <a:pt x="16000" y="14000"/>
-                </a:lnTo>
-                <a:lnTo>
-                  <a:pt x="0" y="7000"/>
-                </a:lnTo>
-                <a:lnTo>
-                  <a:pt x="16000" y="0"/>
-                </a:lnTo>
-                <a:lnTo>
-                  <a:pt x="16000" y="5000"/>
-                </a:lnTo>
-                <a:lnTo>
-                  <a:pt x="75000" y="5000"/>
-                </a:lnTo>
-                <a:close/>
-              </a:path>
-            </a:pathLst>
-          </a:custGeom>
-          <a:solidFill>
-            <a:srgbClr val="1B717D"/>
-          </a:solidFill>
-          <a:ln>
-            <a:noFill/>
-          </a:ln>
-          <a:effectLst/>
-        </p:spPr>
-        <p:style>
-          <a:lnRef idx="1">
-            <a:schemeClr val="accent1"/>
-          </a:lnRef>
-          <a:fillRef idx="3">
-            <a:schemeClr val="accent1"/>
-          </a:fillRef>
-          <a:effectRef idx="0">
-            <a:schemeClr val="accent1"/>
-          </a:effectRef>
-          <a:fontRef idx="minor">
-            <a:schemeClr val="lt1"/>
-          </a:fontRef>
-        </p:style>
-        <p:txBody>
-          <a:bodyPr rtlCol="0" anchor="ctr"/>
-          <a:lstStyle/>
-          <a:p>
-            <a:pPr algn="ctr"/>
-          </a:p>
-        </p:txBody>
-      </p:sp>
-      <p:sp>
-        <p:nvSpPr>
-          <p:cNvPr id="23" name="s_k3_p" descr="Editable shape; source id s_k3_p"/>
-          <p:cNvSpPr/>
-          <p:nvPr/>
-        </p:nvSpPr>
-        <p:spPr>
-          <a:xfrm>
-            <a:off x="3555999" y="3365499"/>
-            <a:ext cx="888999" cy="396874"/>
-          </a:xfrm>
-          <a:prstGeom prst="roundRect">
-            <a:avLst>
-              <a:gd name="adj" fmla="val 50000"/>
-            </a:avLst>
-          </a:prstGeom>
-          <a:solidFill>
-            <a:srgbClr val="1B717D"/>
-          </a:solidFill>
-          <a:ln w="19843">
-            <a:solidFill>
-              <a:srgbClr val="145159"/>
-            </a:solidFill>
-          </a:ln>
-          <a:effectLst/>
-        </p:spPr>
-        <p:style>
-          <a:lnRef idx="1">
-            <a:schemeClr val="accent1"/>
-          </a:lnRef>
-          <a:fillRef idx="3">
-            <a:schemeClr val="accent1"/>
-          </a:fillRef>
-          <a:effectRef idx="0">
-            <a:schemeClr val="accent1"/>
-          </a:effectRef>
-          <a:fontRef idx="minor">
-            <a:schemeClr val="lt1"/>
-          </a:fontRef>
-        </p:style>
-        <p:txBody>
-          <a:bodyPr rtlCol="0" anchor="ctr"/>
-          <a:lstStyle/>
-          <a:p>
-            <a:pPr algn="ctr"/>
-          </a:p>
-        </p:txBody>
-      </p:sp>
-      <p:sp>
-        <p:nvSpPr>
-          <p:cNvPr id="24" name="s_k3_pt" descr="Editable text; source id s_k3_pt"/>
-          <p:cNvSpPr txBox="1"/>
-          <p:nvPr/>
-        </p:nvSpPr>
-        <p:spPr>
-          <a:xfrm>
-            <a:off x="3603624" y="3389312"/>
-            <a:ext cx="793749" cy="349249"/>
-          </a:xfrm>
-          <a:prstGeom prst="rect">
-            <a:avLst/>
-          </a:prstGeom>
-          <a:noFill/>
-          <a:effectLst/>
-        </p:spPr>
-        <p:txBody>
-          <a:bodyPr wrap="none" anchor="ctr" tIns="0" rIns="0" bIns="0" lIns="0" anchorCtr="0" vertOverflow="overflow">
-            <a:noAutofit/>
-          </a:bodyPr>
-          <a:lstStyle/>
-          <a:p>
-            <a:pPr algn="ctr" fontAlgn="base">
-              <a:lnSpc>
-                <a:spcPts val="2187"/>
-              </a:lnSpc>
-              <a:spcBef>
-                <a:spcPts val="0"/>
-              </a:spcBef>
-              <a:spcAft>
-                <a:spcPts val="0"/>
-              </a:spcAft>
-              <a:defRPr sz="1499" b="1" i="0" lang="zh-CN" dirty="0">
-                <a:solidFill>
-                  <a:srgbClr val="FFFFFF"/>
+              <a:defRPr sz="974" b="0" i="0" lang="zh-CN" dirty="0">
+                <a:solidFill>
+                  <a:srgbClr val="3F4854"/>
                 </a:solidFill>
                 <a:latin typeface="Noto Sans CJK SC"/>
                 <a:ea typeface="Noto Sans CJK SC"/>
@@ -4836,1514 +6997,9 @@
               </a:defRPr>
             </a:pPr>
             <a:r>
-              <a:rPr sz="1499" b="1" i="0" lang="zh-CN" dirty="0">
-                <a:solidFill>
-                  <a:srgbClr val="FFFFFF"/>
-                </a:solidFill>
-                <a:latin typeface="Noto Sans CJK SC"/>
-                <a:ea typeface="Noto Sans CJK SC"/>
-                <a:cs typeface="Noto Sans CJK SC"/>
-              </a:rPr>
-              <a:t>近邻</a:t>
-            </a:r>
-          </a:p>
-        </p:txBody>
-      </p:sp>
-      <p:sp>
-        <p:nvSpPr>
-          <p:cNvPr id="25" name="k4" descr="Editable shape; source id k4"/>
-          <p:cNvSpPr/>
-          <p:nvPr/>
-        </p:nvSpPr>
-        <p:spPr>
-          <a:xfrm>
-            <a:off x="9270999" y="2952749"/>
-            <a:ext cx="2714624" cy="1293812"/>
-          </a:xfrm>
-          <a:prstGeom prst="roundRect">
-            <a:avLst>
-              <a:gd name="adj" fmla="val 8588"/>
-            </a:avLst>
-          </a:prstGeom>
-          <a:solidFill>
-            <a:srgbClr val="F2F5F7"/>
-          </a:solidFill>
-          <a:ln w="27781">
-            <a:solidFill>
-              <a:srgbClr val="3F4A53"/>
-            </a:solidFill>
-          </a:ln>
-          <a:effectLst/>
-        </p:spPr>
-        <p:style>
-          <a:lnRef idx="1">
-            <a:schemeClr val="accent1"/>
-          </a:lnRef>
-          <a:fillRef idx="3">
-            <a:schemeClr val="accent1"/>
-          </a:fillRef>
-          <a:effectRef idx="0">
-            <a:schemeClr val="accent1"/>
-          </a:effectRef>
-          <a:fontRef idx="minor">
-            <a:schemeClr val="lt1"/>
-          </a:fontRef>
-        </p:style>
-        <p:txBody>
-          <a:bodyPr rtlCol="0" anchor="ctr"/>
-          <a:lstStyle/>
-          <a:p>
-            <a:pPr algn="ctr"/>
-          </a:p>
-        </p:txBody>
-      </p:sp>
-      <p:sp>
-        <p:nvSpPr>
-          <p:cNvPr id="26" name="k4_t" descr="Editable text; source id k4_t"/>
-          <p:cNvSpPr txBox="1"/>
-          <p:nvPr/>
-        </p:nvSpPr>
-        <p:spPr>
-          <a:xfrm>
-            <a:off x="9366249" y="3159124"/>
-            <a:ext cx="2524124" cy="460374"/>
-          </a:xfrm>
-          <a:prstGeom prst="rect">
-            <a:avLst/>
-          </a:prstGeom>
-          <a:noFill/>
-          <a:effectLst/>
-        </p:spPr>
-        <p:txBody>
-          <a:bodyPr wrap="none" anchor="ctr" tIns="0" rIns="0" bIns="0" lIns="0" anchorCtr="0" vertOverflow="overflow">
-            <a:noAutofit/>
-          </a:bodyPr>
-          <a:lstStyle/>
-          <a:p>
-            <a:pPr algn="ctr" fontAlgn="base">
-              <a:lnSpc>
-                <a:spcPts val="3593"/>
-              </a:lnSpc>
-              <a:spcBef>
-                <a:spcPts val="0"/>
-              </a:spcBef>
-              <a:spcAft>
-                <a:spcPts val="0"/>
-              </a:spcAft>
-              <a:defRPr sz="2478" b="1" i="0" lang="zh-CN" dirty="0">
-                <a:solidFill>
-                  <a:srgbClr val="10171F"/>
-                </a:solidFill>
-                <a:latin typeface="Noto Sans CJK SC"/>
-                <a:ea typeface="Noto Sans CJK SC"/>
-                <a:cs typeface="Noto Sans CJK SC"/>
-              </a:defRPr>
-            </a:pPr>
-            <a:r>
-              <a:rPr sz="2478" b="1" i="0" lang="zh-CN" dirty="0">
-                <a:solidFill>
-                  <a:srgbClr val="10171F"/>
-                </a:solidFill>
-                <a:latin typeface="Noto Sans CJK SC"/>
-                <a:ea typeface="Noto Sans CJK SC"/>
-                <a:cs typeface="Noto Sans CJK SC"/>
-              </a:rPr>
-              <a:t>证据边界</a:t>
-            </a:r>
-          </a:p>
-        </p:txBody>
-      </p:sp>
-      <p:sp>
-        <p:nvSpPr>
-          <p:cNvPr id="27" name="k4_s" descr="Editable text; source id k4_s"/>
-          <p:cNvSpPr txBox="1"/>
-          <p:nvPr/>
-        </p:nvSpPr>
-        <p:spPr>
-          <a:xfrm>
-            <a:off x="9366249" y="3698874"/>
-            <a:ext cx="2524124" cy="333374"/>
-          </a:xfrm>
-          <a:prstGeom prst="rect">
-            <a:avLst/>
-          </a:prstGeom>
-          <a:noFill/>
-          <a:effectLst/>
-        </p:spPr>
-        <p:txBody>
-          <a:bodyPr wrap="none" anchor="ctr" tIns="0" rIns="0" bIns="0" lIns="0" anchorCtr="0" vertOverflow="overflow">
-            <a:noAutofit/>
-          </a:bodyPr>
-          <a:lstStyle/>
-          <a:p>
-            <a:pPr algn="ctr" fontAlgn="base">
-              <a:lnSpc>
-                <a:spcPts val="2468"/>
-              </a:lnSpc>
-              <a:spcBef>
-                <a:spcPts val="0"/>
-              </a:spcBef>
-              <a:spcAft>
-                <a:spcPts val="0"/>
-              </a:spcAft>
-              <a:defRPr sz="1687" b="0" i="0" lang="zh-CN" dirty="0">
-                <a:solidFill>
-                  <a:srgbClr val="2B333A"/>
-                </a:solidFill>
-                <a:latin typeface="Noto Sans CJK SC"/>
-                <a:ea typeface="Noto Sans CJK SC"/>
-                <a:cs typeface="Noto Sans CJK SC"/>
-              </a:defRPr>
-            </a:pPr>
-            <a:r>
-              <a:rPr sz="1687" b="0" i="0" lang="zh-CN" dirty="0">
-                <a:solidFill>
-                  <a:srgbClr val="2B333A"/>
-                </a:solidFill>
-                <a:latin typeface="Noto Sans CJK SC"/>
-                <a:ea typeface="Noto Sans CJK SC"/>
-                <a:cs typeface="Noto Sans CJK SC"/>
-              </a:rPr>
-              <a:t>直接</a:t>
-            </a:r>
-            <a:r>
-              <a:rPr sz="1687" b="0" i="0" lang="zh-CN" dirty="0">
-                <a:solidFill>
-                  <a:srgbClr val="2B333A"/>
-                </a:solidFill>
-                <a:latin typeface="DejaVu Sans"/>
-                <a:ea typeface="DejaVu Sans"/>
-                <a:cs typeface="DejaVu Sans"/>
-              </a:rPr>
-              <a:t> / </a:t>
-            </a:r>
-            <a:r>
-              <a:rPr sz="1687" b="0" i="0" lang="zh-CN" dirty="0">
-                <a:solidFill>
-                  <a:srgbClr val="2B333A"/>
-                </a:solidFill>
-                <a:latin typeface="Noto Sans CJK SC"/>
-                <a:ea typeface="Noto Sans CJK SC"/>
-                <a:cs typeface="Noto Sans CJK SC"/>
-              </a:rPr>
-              <a:t>近邻</a:t>
-            </a:r>
-            <a:r>
-              <a:rPr sz="1687" b="0" i="0" lang="zh-CN" dirty="0">
-                <a:solidFill>
-                  <a:srgbClr val="2B333A"/>
-                </a:solidFill>
-                <a:latin typeface="DejaVu Sans"/>
-                <a:ea typeface="DejaVu Sans"/>
-                <a:cs typeface="DejaVu Sans"/>
-              </a:rPr>
-              <a:t> / </a:t>
-            </a:r>
-            <a:r>
-              <a:rPr sz="1687" b="0" i="0" lang="zh-CN" dirty="0">
-                <a:solidFill>
-                  <a:srgbClr val="2B333A"/>
-                </a:solidFill>
-                <a:latin typeface="Noto Sans CJK SC"/>
-                <a:ea typeface="Noto Sans CJK SC"/>
-                <a:cs typeface="Noto Sans CJK SC"/>
-              </a:rPr>
-              <a:t>推断</a:t>
-            </a:r>
-          </a:p>
-        </p:txBody>
-      </p:sp>
-      <p:cxnSp>
-        <p:nvCxnSpPr>
-          <p:cNvPr id="28" name="s_k4" descr="Editable line; source id s_k4"/>
-          <p:cNvCxnSpPr/>
-          <p:nvPr/>
-        </p:nvCxnSpPr>
-        <p:spPr>
-          <a:xfrm>
-            <a:off x="7127874" y="3563937"/>
-            <a:ext cx="587375" cy="0"/>
-          </a:xfrm>
-          <a:prstGeom prst="line">
-            <a:avLst/>
-          </a:prstGeom>
-          <a:ln w="31749">
-            <a:solidFill>
-              <a:srgbClr val="1B717D"/>
-            </a:solidFill>
-          </a:ln>
-          <a:effectLst/>
-        </p:spPr>
-        <p:style>
-          <a:lnRef idx="2">
-            <a:schemeClr val="accent1"/>
-          </a:lnRef>
-          <a:fillRef idx="0">
-            <a:schemeClr val="accent1"/>
-          </a:fillRef>
-          <a:effectRef idx="0">
-            <a:schemeClr val="accent1"/>
-          </a:effectRef>
-          <a:fontRef idx="minor">
-            <a:schemeClr val="tx1"/>
-          </a:fontRef>
-        </p:style>
-      </p:cxnSp>
-      <p:sp>
-        <p:nvSpPr>
-          <p:cNvPr id="29" name="s_k4b" descr="Editable line; source id s_k4b"/>
-          <p:cNvSpPr/>
-          <p:nvPr/>
-        </p:nvSpPr>
-        <p:spPr>
-          <a:xfrm>
-            <a:off x="8667750" y="3508375"/>
-            <a:ext cx="587375" cy="111125"/>
-          </a:xfrm>
-          <a:custGeom>
-            <a:avLst/>
-            <a:gdLst/>
-            <a:ahLst/>
-            <a:cxnLst/>
-            <a:rect l="l" t="t" r="r" b="b"/>
-            <a:pathLst>
-              <a:path w="74000" h="14000">
-                <a:moveTo>
-                  <a:pt x="0" y="5000"/>
-                </a:moveTo>
-                <a:lnTo>
-                  <a:pt x="58000" y="5000"/>
-                </a:lnTo>
-                <a:lnTo>
-                  <a:pt x="58000" y="0"/>
-                </a:lnTo>
-                <a:lnTo>
-                  <a:pt x="74000" y="7000"/>
-                </a:lnTo>
-                <a:lnTo>
-                  <a:pt x="58000" y="14000"/>
-                </a:lnTo>
-                <a:lnTo>
-                  <a:pt x="58000" y="9000"/>
-                </a:lnTo>
-                <a:lnTo>
-                  <a:pt x="0" y="9000"/>
-                </a:lnTo>
-                <a:close/>
-              </a:path>
-            </a:pathLst>
-          </a:custGeom>
-          <a:solidFill>
-            <a:srgbClr val="1B717D"/>
-          </a:solidFill>
-          <a:ln>
-            <a:noFill/>
-          </a:ln>
-          <a:effectLst/>
-        </p:spPr>
-        <p:style>
-          <a:lnRef idx="1">
-            <a:schemeClr val="accent1"/>
-          </a:lnRef>
-          <a:fillRef idx="3">
-            <a:schemeClr val="accent1"/>
-          </a:fillRef>
-          <a:effectRef idx="0">
-            <a:schemeClr val="accent1"/>
-          </a:effectRef>
-          <a:fontRef idx="minor">
-            <a:schemeClr val="lt1"/>
-          </a:fontRef>
-        </p:style>
-        <p:txBody>
-          <a:bodyPr rtlCol="0" anchor="ctr"/>
-          <a:lstStyle/>
-          <a:p>
-            <a:pPr algn="ctr"/>
-          </a:p>
-        </p:txBody>
-      </p:sp>
-      <p:sp>
-        <p:nvSpPr>
-          <p:cNvPr id="30" name="s_k4_p" descr="Editable shape; source id s_k4_p"/>
-          <p:cNvSpPr/>
-          <p:nvPr/>
-        </p:nvSpPr>
-        <p:spPr>
-          <a:xfrm>
-            <a:off x="7746999" y="3365499"/>
-            <a:ext cx="888999" cy="396874"/>
-          </a:xfrm>
-          <a:prstGeom prst="roundRect">
-            <a:avLst>
-              <a:gd name="adj" fmla="val 50000"/>
-            </a:avLst>
-          </a:prstGeom>
-          <a:solidFill>
-            <a:srgbClr val="1B717D"/>
-          </a:solidFill>
-          <a:ln w="19843">
-            <a:solidFill>
-              <a:srgbClr val="145159"/>
-            </a:solidFill>
-          </a:ln>
-          <a:effectLst/>
-        </p:spPr>
-        <p:style>
-          <a:lnRef idx="1">
-            <a:schemeClr val="accent1"/>
-          </a:lnRef>
-          <a:fillRef idx="3">
-            <a:schemeClr val="accent1"/>
-          </a:fillRef>
-          <a:effectRef idx="0">
-            <a:schemeClr val="accent1"/>
-          </a:effectRef>
-          <a:fontRef idx="minor">
-            <a:schemeClr val="lt1"/>
-          </a:fontRef>
-        </p:style>
-        <p:txBody>
-          <a:bodyPr rtlCol="0" anchor="ctr"/>
-          <a:lstStyle/>
-          <a:p>
-            <a:pPr algn="ctr"/>
-          </a:p>
-        </p:txBody>
-      </p:sp>
-      <p:sp>
-        <p:nvSpPr>
-          <p:cNvPr id="31" name="s_k4_pt" descr="Editable text; source id s_k4_pt"/>
-          <p:cNvSpPr txBox="1"/>
-          <p:nvPr/>
-        </p:nvSpPr>
-        <p:spPr>
-          <a:xfrm>
-            <a:off x="7794624" y="3389312"/>
-            <a:ext cx="793749" cy="349249"/>
-          </a:xfrm>
-          <a:prstGeom prst="rect">
-            <a:avLst/>
-          </a:prstGeom>
-          <a:noFill/>
-          <a:effectLst/>
-        </p:spPr>
-        <p:txBody>
-          <a:bodyPr wrap="none" anchor="ctr" tIns="0" rIns="0" bIns="0" lIns="0" anchorCtr="0" vertOverflow="overflow">
-            <a:noAutofit/>
-          </a:bodyPr>
-          <a:lstStyle/>
-          <a:p>
-            <a:pPr algn="ctr" fontAlgn="base">
-              <a:lnSpc>
-                <a:spcPts val="2187"/>
-              </a:lnSpc>
-              <a:spcBef>
-                <a:spcPts val="0"/>
-              </a:spcBef>
-              <a:spcAft>
-                <a:spcPts val="0"/>
-              </a:spcAft>
-              <a:defRPr sz="1499" b="1" i="0" lang="zh-CN" dirty="0">
-                <a:solidFill>
-                  <a:srgbClr val="FFFFFF"/>
-                </a:solidFill>
-                <a:latin typeface="Noto Sans CJK SC"/>
-                <a:ea typeface="Noto Sans CJK SC"/>
-                <a:cs typeface="Noto Sans CJK SC"/>
-              </a:defRPr>
-            </a:pPr>
-            <a:r>
-              <a:rPr sz="1499" b="1" i="0" lang="zh-CN" dirty="0">
-                <a:solidFill>
-                  <a:srgbClr val="FFFFFF"/>
-                </a:solidFill>
-                <a:latin typeface="Noto Sans CJK SC"/>
-                <a:ea typeface="Noto Sans CJK SC"/>
-                <a:cs typeface="Noto Sans CJK SC"/>
-              </a:rPr>
-              <a:t>判读</a:t>
-            </a:r>
-          </a:p>
-        </p:txBody>
-      </p:sp>
-      <p:sp>
-        <p:nvSpPr>
-          <p:cNvPr id="32" name="k5" descr="Editable shape; source id k5"/>
-          <p:cNvSpPr/>
-          <p:nvPr/>
-        </p:nvSpPr>
-        <p:spPr>
-          <a:xfrm>
-            <a:off x="1603374" y="5468937"/>
-            <a:ext cx="2984499" cy="1309687"/>
-          </a:xfrm>
-          <a:prstGeom prst="roundRect">
-            <a:avLst>
-              <a:gd name="adj" fmla="val 8484"/>
-            </a:avLst>
-          </a:prstGeom>
-          <a:solidFill>
-            <a:srgbClr val="F2F5F7"/>
-          </a:solidFill>
-          <a:ln w="27781">
-            <a:solidFill>
-              <a:srgbClr val="3F4A53"/>
-            </a:solidFill>
-          </a:ln>
-          <a:effectLst/>
-        </p:spPr>
-        <p:style>
-          <a:lnRef idx="1">
-            <a:schemeClr val="accent1"/>
-          </a:lnRef>
-          <a:fillRef idx="3">
-            <a:schemeClr val="accent1"/>
-          </a:fillRef>
-          <a:effectRef idx="0">
-            <a:schemeClr val="accent1"/>
-          </a:effectRef>
-          <a:fontRef idx="minor">
-            <a:schemeClr val="lt1"/>
-          </a:fontRef>
-        </p:style>
-        <p:txBody>
-          <a:bodyPr rtlCol="0" anchor="ctr"/>
-          <a:lstStyle/>
-          <a:p>
-            <a:pPr algn="ctr"/>
-          </a:p>
-        </p:txBody>
-      </p:sp>
-      <p:sp>
-        <p:nvSpPr>
-          <p:cNvPr id="33" name="k5_t" descr="Editable text; source id k5_t"/>
-          <p:cNvSpPr txBox="1"/>
-          <p:nvPr/>
-        </p:nvSpPr>
-        <p:spPr>
-          <a:xfrm>
-            <a:off x="1698624" y="5675312"/>
-            <a:ext cx="2793999" cy="460374"/>
-          </a:xfrm>
-          <a:prstGeom prst="rect">
-            <a:avLst/>
-          </a:prstGeom>
-          <a:noFill/>
-          <a:effectLst/>
-        </p:spPr>
-        <p:txBody>
-          <a:bodyPr wrap="none" anchor="ctr" tIns="0" rIns="0" bIns="0" lIns="0" anchorCtr="0" vertOverflow="overflow">
-            <a:noAutofit/>
-          </a:bodyPr>
-          <a:lstStyle/>
-          <a:p>
-            <a:pPr algn="ctr" fontAlgn="base">
-              <a:lnSpc>
-                <a:spcPts val="3593"/>
-              </a:lnSpc>
-              <a:spcBef>
-                <a:spcPts val="0"/>
-              </a:spcBef>
-              <a:spcAft>
-                <a:spcPts val="0"/>
-              </a:spcAft>
-              <a:defRPr sz="2478" b="1" i="0" lang="zh-CN" dirty="0">
-                <a:solidFill>
-                  <a:srgbClr val="10171F"/>
-                </a:solidFill>
-                <a:latin typeface="Noto Sans CJK SC"/>
-                <a:ea typeface="Noto Sans CJK SC"/>
-                <a:cs typeface="Noto Sans CJK SC"/>
-              </a:defRPr>
-            </a:pPr>
-            <a:r>
-              <a:rPr sz="2478" b="1" i="0" lang="zh-CN" dirty="0">
-                <a:solidFill>
-                  <a:srgbClr val="10171F"/>
-                </a:solidFill>
-                <a:latin typeface="Noto Sans CJK SC"/>
-                <a:ea typeface="Noto Sans CJK SC"/>
-                <a:cs typeface="Noto Sans CJK SC"/>
-              </a:rPr>
-              <a:t>组成与热处理</a:t>
-            </a:r>
-          </a:p>
-        </p:txBody>
-      </p:sp>
-      <p:sp>
-        <p:nvSpPr>
-          <p:cNvPr id="34" name="k5_s" descr="Editable text; source id k5_s"/>
-          <p:cNvSpPr txBox="1"/>
-          <p:nvPr/>
-        </p:nvSpPr>
-        <p:spPr>
-          <a:xfrm>
-            <a:off x="1698624" y="6215062"/>
-            <a:ext cx="2793999" cy="333374"/>
-          </a:xfrm>
-          <a:prstGeom prst="rect">
-            <a:avLst/>
-          </a:prstGeom>
-          <a:noFill/>
-          <a:effectLst/>
-        </p:spPr>
-        <p:txBody>
-          <a:bodyPr wrap="none" anchor="ctr" tIns="0" rIns="0" bIns="0" lIns="0" anchorCtr="0" vertOverflow="overflow">
-            <a:noAutofit/>
-          </a:bodyPr>
-          <a:lstStyle/>
-          <a:p>
-            <a:pPr algn="ctr" fontAlgn="base">
-              <a:lnSpc>
-                <a:spcPts val="2468"/>
-              </a:lnSpc>
-              <a:spcBef>
-                <a:spcPts val="0"/>
-              </a:spcBef>
-              <a:spcAft>
-                <a:spcPts val="0"/>
-              </a:spcAft>
-              <a:defRPr sz="1687" b="0" i="0" lang="zh-CN" dirty="0">
-                <a:solidFill>
-                  <a:srgbClr val="2B333A"/>
-                </a:solidFill>
-                <a:latin typeface="DejaVu Sans"/>
-                <a:ea typeface="DejaVu Sans"/>
-                <a:cs typeface="DejaVu Sans"/>
-              </a:defRPr>
-            </a:pPr>
-            <a:r>
-              <a:rPr sz="1687" b="0" i="0" lang="zh-CN" dirty="0">
-                <a:solidFill>
-                  <a:srgbClr val="2B333A"/>
-                </a:solidFill>
-                <a:latin typeface="DejaVu Sans"/>
-                <a:ea typeface="DejaVu Sans"/>
-                <a:cs typeface="DejaVu Sans"/>
-              </a:rPr>
-              <a:t>Ba/Sr · Zn </a:t>
-            </a:r>
-            <a:r>
-              <a:rPr sz="1687" b="0" i="0" lang="zh-CN" dirty="0">
-                <a:solidFill>
-                  <a:srgbClr val="2B333A"/>
-                </a:solidFill>
-                <a:latin typeface="Noto Sans CJK SC"/>
-                <a:ea typeface="Noto Sans CJK SC"/>
-                <a:cs typeface="Noto Sans CJK SC"/>
-              </a:rPr>
-              <a:t>位</a:t>
-            </a:r>
-          </a:p>
-        </p:txBody>
-      </p:sp>
-      <p:cxnSp>
-        <p:nvCxnSpPr>
-          <p:cNvPr id="35" name="s_k5" descr="Editable line; source id s_k5"/>
-          <p:cNvCxnSpPr/>
-          <p:nvPr/>
-        </p:nvCxnSpPr>
-        <p:spPr>
-          <a:xfrm flipH="1">
-            <a:off x="5016499" y="4246562"/>
-            <a:ext cx="309563" cy="277812"/>
-          </a:xfrm>
-          <a:prstGeom prst="line">
-            <a:avLst/>
-          </a:prstGeom>
-          <a:ln w="31749">
-            <a:solidFill>
-              <a:srgbClr val="1B717D"/>
-            </a:solidFill>
-          </a:ln>
-          <a:effectLst/>
-        </p:spPr>
-        <p:style>
-          <a:lnRef idx="2">
-            <a:schemeClr val="accent1"/>
-          </a:lnRef>
-          <a:fillRef idx="0">
-            <a:schemeClr val="accent1"/>
-          </a:fillRef>
-          <a:effectRef idx="0">
-            <a:schemeClr val="accent1"/>
-          </a:effectRef>
-          <a:fontRef idx="minor">
-            <a:schemeClr val="tx1"/>
-          </a:fontRef>
-        </p:style>
-      </p:cxnSp>
-      <p:sp>
-        <p:nvSpPr>
-          <p:cNvPr id="36" name="s_k5b" descr="Editable line; source id s_k5b"/>
-          <p:cNvSpPr/>
-          <p:nvPr/>
-        </p:nvSpPr>
-        <p:spPr>
-          <a:xfrm>
-            <a:off x="3968750" y="5171218"/>
-            <a:ext cx="319992" cy="281845"/>
-          </a:xfrm>
-          <a:custGeom>
-            <a:avLst/>
-            <a:gdLst/>
-            <a:ahLst/>
-            <a:cxnLst/>
-            <a:rect l="l" t="t" r="r" b="b"/>
-            <a:pathLst>
-              <a:path w="40314" h="35508">
-                <a:moveTo>
-                  <a:pt x="40314" y="3016"/>
-                </a:moveTo>
-                <a:lnTo>
-                  <a:pt x="13375" y="26501"/>
-                </a:lnTo>
-                <a:lnTo>
-                  <a:pt x="16660" y="30270"/>
-                </a:lnTo>
-                <a:lnTo>
-                  <a:pt x="0" y="35508"/>
-                </a:lnTo>
-                <a:lnTo>
-                  <a:pt x="7460" y="19717"/>
-                </a:lnTo>
-                <a:lnTo>
-                  <a:pt x="10746" y="23486"/>
-                </a:lnTo>
-                <a:lnTo>
-                  <a:pt x="37686" y="0"/>
-                </a:lnTo>
-                <a:close/>
-              </a:path>
-            </a:pathLst>
-          </a:custGeom>
-          <a:solidFill>
-            <a:srgbClr val="1B717D"/>
-          </a:solidFill>
-          <a:ln>
-            <a:noFill/>
-          </a:ln>
-          <a:effectLst/>
-        </p:spPr>
-        <p:style>
-          <a:lnRef idx="1">
-            <a:schemeClr val="accent1"/>
-          </a:lnRef>
-          <a:fillRef idx="3">
-            <a:schemeClr val="accent1"/>
-          </a:fillRef>
-          <a:effectRef idx="0">
-            <a:schemeClr val="accent1"/>
-          </a:effectRef>
-          <a:fontRef idx="minor">
-            <a:schemeClr val="lt1"/>
-          </a:fontRef>
-        </p:style>
-        <p:txBody>
-          <a:bodyPr rtlCol="0" anchor="ctr"/>
-          <a:lstStyle/>
-          <a:p>
-            <a:pPr algn="ctr"/>
-          </a:p>
-        </p:txBody>
-      </p:sp>
-      <p:sp>
-        <p:nvSpPr>
-          <p:cNvPr id="37" name="s_k5_p" descr="Editable shape; source id s_k5_p"/>
-          <p:cNvSpPr/>
-          <p:nvPr/>
-        </p:nvSpPr>
-        <p:spPr>
-          <a:xfrm>
-            <a:off x="4198937" y="4651374"/>
-            <a:ext cx="888999" cy="396874"/>
-          </a:xfrm>
-          <a:prstGeom prst="roundRect">
-            <a:avLst>
-              <a:gd name="adj" fmla="val 50000"/>
-            </a:avLst>
-          </a:prstGeom>
-          <a:solidFill>
-            <a:srgbClr val="1B717D"/>
-          </a:solidFill>
-          <a:ln w="19843">
-            <a:solidFill>
-              <a:srgbClr val="145159"/>
-            </a:solidFill>
-          </a:ln>
-          <a:effectLst/>
-        </p:spPr>
-        <p:style>
-          <a:lnRef idx="1">
-            <a:schemeClr val="accent1"/>
-          </a:lnRef>
-          <a:fillRef idx="3">
-            <a:schemeClr val="accent1"/>
-          </a:fillRef>
-          <a:effectRef idx="0">
-            <a:schemeClr val="accent1"/>
-          </a:effectRef>
-          <a:fontRef idx="minor">
-            <a:schemeClr val="lt1"/>
-          </a:fontRef>
-        </p:style>
-        <p:txBody>
-          <a:bodyPr rtlCol="0" anchor="ctr"/>
-          <a:lstStyle/>
-          <a:p>
-            <a:pPr algn="ctr"/>
-          </a:p>
-        </p:txBody>
-      </p:sp>
-      <p:sp>
-        <p:nvSpPr>
-          <p:cNvPr id="38" name="s_k5_pt" descr="Editable text; source id s_k5_pt"/>
-          <p:cNvSpPr txBox="1"/>
-          <p:nvPr/>
-        </p:nvSpPr>
-        <p:spPr>
-          <a:xfrm>
-            <a:off x="4246562" y="4675187"/>
-            <a:ext cx="793749" cy="349249"/>
-          </a:xfrm>
-          <a:prstGeom prst="rect">
-            <a:avLst/>
-          </a:prstGeom>
-          <a:noFill/>
-          <a:effectLst/>
-        </p:spPr>
-        <p:txBody>
-          <a:bodyPr wrap="none" anchor="ctr" tIns="0" rIns="0" bIns="0" lIns="0" anchorCtr="0" vertOverflow="overflow">
-            <a:noAutofit/>
-          </a:bodyPr>
-          <a:lstStyle/>
-          <a:p>
-            <a:pPr algn="ctr" fontAlgn="base">
-              <a:lnSpc>
-                <a:spcPts val="2187"/>
-              </a:lnSpc>
-              <a:spcBef>
-                <a:spcPts val="0"/>
-              </a:spcBef>
-              <a:spcAft>
-                <a:spcPts val="0"/>
-              </a:spcAft>
-              <a:defRPr sz="1499" b="1" i="0" lang="zh-CN" dirty="0">
-                <a:solidFill>
-                  <a:srgbClr val="FFFFFF"/>
-                </a:solidFill>
-                <a:latin typeface="Noto Sans CJK SC"/>
-                <a:ea typeface="Noto Sans CJK SC"/>
-                <a:cs typeface="Noto Sans CJK SC"/>
-              </a:defRPr>
-            </a:pPr>
-            <a:r>
-              <a:rPr sz="1499" b="1" i="0" lang="zh-CN" dirty="0">
-                <a:solidFill>
-                  <a:srgbClr val="FFFFFF"/>
-                </a:solidFill>
-                <a:latin typeface="Noto Sans CJK SC"/>
-                <a:ea typeface="Noto Sans CJK SC"/>
-                <a:cs typeface="Noto Sans CJK SC"/>
-              </a:rPr>
-              <a:t>变量</a:t>
-            </a:r>
-          </a:p>
-        </p:txBody>
-      </p:sp>
-      <p:sp>
-        <p:nvSpPr>
-          <p:cNvPr id="39" name="k6" descr="Editable shape; source id k6"/>
-          <p:cNvSpPr/>
-          <p:nvPr/>
-        </p:nvSpPr>
-        <p:spPr>
-          <a:xfrm>
-            <a:off x="7604124" y="5468937"/>
-            <a:ext cx="2984499" cy="1309687"/>
-          </a:xfrm>
-          <a:prstGeom prst="roundRect">
-            <a:avLst>
-              <a:gd name="adj" fmla="val 8484"/>
-            </a:avLst>
-          </a:prstGeom>
-          <a:solidFill>
-            <a:srgbClr val="F2F5F7"/>
-          </a:solidFill>
-          <a:ln w="27781">
-            <a:solidFill>
-              <a:srgbClr val="3F4A53"/>
-            </a:solidFill>
-          </a:ln>
-          <a:effectLst/>
-        </p:spPr>
-        <p:style>
-          <a:lnRef idx="1">
-            <a:schemeClr val="accent1"/>
-          </a:lnRef>
-          <a:fillRef idx="3">
-            <a:schemeClr val="accent1"/>
-          </a:fillRef>
-          <a:effectRef idx="0">
-            <a:schemeClr val="accent1"/>
-          </a:effectRef>
-          <a:fontRef idx="minor">
-            <a:schemeClr val="lt1"/>
-          </a:fontRef>
-        </p:style>
-        <p:txBody>
-          <a:bodyPr rtlCol="0" anchor="ctr"/>
-          <a:lstStyle/>
-          <a:p>
-            <a:pPr algn="ctr"/>
-          </a:p>
-        </p:txBody>
-      </p:sp>
-      <p:sp>
-        <p:nvSpPr>
-          <p:cNvPr id="40" name="k6_t" descr="Editable text; source id k6_t"/>
-          <p:cNvSpPr txBox="1"/>
-          <p:nvPr/>
-        </p:nvSpPr>
-        <p:spPr>
-          <a:xfrm>
-            <a:off x="7699374" y="5675312"/>
-            <a:ext cx="2793999" cy="460374"/>
-          </a:xfrm>
-          <a:prstGeom prst="rect">
-            <a:avLst/>
-          </a:prstGeom>
-          <a:noFill/>
-          <a:effectLst/>
-        </p:spPr>
-        <p:txBody>
-          <a:bodyPr wrap="none" anchor="ctr" tIns="0" rIns="0" bIns="0" lIns="0" anchorCtr="0" vertOverflow="overflow">
-            <a:noAutofit/>
-          </a:bodyPr>
-          <a:lstStyle/>
-          <a:p>
-            <a:pPr algn="ctr" fontAlgn="base">
-              <a:lnSpc>
-                <a:spcPts val="3593"/>
-              </a:lnSpc>
-              <a:spcBef>
-                <a:spcPts val="0"/>
-              </a:spcBef>
-              <a:spcAft>
-                <a:spcPts val="0"/>
-              </a:spcAft>
-              <a:defRPr sz="2478" b="1" i="0" lang="zh-CN" dirty="0">
-                <a:solidFill>
-                  <a:srgbClr val="10171F"/>
-                </a:solidFill>
-                <a:latin typeface="Noto Sans CJK SC"/>
-                <a:ea typeface="Noto Sans CJK SC"/>
-                <a:cs typeface="Noto Sans CJK SC"/>
-              </a:defRPr>
-            </a:pPr>
-            <a:r>
-              <a:rPr sz="2478" b="1" i="0" lang="zh-CN" dirty="0">
-                <a:solidFill>
-                  <a:srgbClr val="10171F"/>
-                </a:solidFill>
-                <a:latin typeface="Noto Sans CJK SC"/>
-                <a:ea typeface="Noto Sans CJK SC"/>
-                <a:cs typeface="Noto Sans CJK SC"/>
-              </a:rPr>
-              <a:t>玻璃析晶</a:t>
-            </a:r>
-          </a:p>
-        </p:txBody>
-      </p:sp>
-      <p:sp>
-        <p:nvSpPr>
-          <p:cNvPr id="41" name="k6_s" descr="Editable text; source id k6_s"/>
-          <p:cNvSpPr txBox="1"/>
-          <p:nvPr/>
-        </p:nvSpPr>
-        <p:spPr>
-          <a:xfrm>
-            <a:off x="7699374" y="6215062"/>
-            <a:ext cx="2793999" cy="333374"/>
-          </a:xfrm>
-          <a:prstGeom prst="rect">
-            <a:avLst/>
-          </a:prstGeom>
-          <a:noFill/>
-          <a:effectLst/>
-        </p:spPr>
-        <p:txBody>
-          <a:bodyPr wrap="none" anchor="ctr" tIns="0" rIns="0" bIns="0" lIns="0" anchorCtr="0" vertOverflow="overflow">
-            <a:noAutofit/>
-          </a:bodyPr>
-          <a:lstStyle/>
-          <a:p>
-            <a:pPr algn="ctr" fontAlgn="base">
-              <a:lnSpc>
-                <a:spcPts val="2468"/>
-              </a:lnSpc>
-              <a:spcBef>
-                <a:spcPts val="0"/>
-              </a:spcBef>
-              <a:spcAft>
-                <a:spcPts val="0"/>
-              </a:spcAft>
-              <a:defRPr sz="1687" b="0" i="0" lang="zh-CN" dirty="0">
-                <a:solidFill>
-                  <a:srgbClr val="2B333A"/>
-                </a:solidFill>
-                <a:latin typeface="Noto Sans CJK SC"/>
-                <a:ea typeface="Noto Sans CJK SC"/>
-                <a:cs typeface="Noto Sans CJK SC"/>
-              </a:defRPr>
-            </a:pPr>
-            <a:r>
-              <a:rPr sz="1687" b="0" i="0" lang="zh-CN" dirty="0">
-                <a:solidFill>
-                  <a:srgbClr val="2B333A"/>
-                </a:solidFill>
-                <a:latin typeface="Noto Sans CJK SC"/>
-                <a:ea typeface="Noto Sans CJK SC"/>
-                <a:cs typeface="Noto Sans CJK SC"/>
-              </a:rPr>
-              <a:t>成核</a:t>
-            </a:r>
-            <a:r>
-              <a:rPr sz="1687" b="0" i="0" lang="zh-CN" dirty="0">
-                <a:solidFill>
-                  <a:srgbClr val="2B333A"/>
-                </a:solidFill>
-                <a:latin typeface="DejaVu Sans"/>
-                <a:ea typeface="DejaVu Sans"/>
-                <a:cs typeface="DejaVu Sans"/>
-              </a:rPr>
-              <a:t> · </a:t>
-            </a:r>
-            <a:r>
-              <a:rPr sz="1687" b="0" i="0" lang="zh-CN" dirty="0">
-                <a:solidFill>
-                  <a:srgbClr val="2B333A"/>
-                </a:solidFill>
-                <a:latin typeface="Noto Sans CJK SC"/>
-                <a:ea typeface="Noto Sans CJK SC"/>
-                <a:cs typeface="Noto Sans CJK SC"/>
-              </a:rPr>
-              <a:t>生长</a:t>
-            </a:r>
-          </a:p>
-        </p:txBody>
-      </p:sp>
-      <p:cxnSp>
-        <p:nvCxnSpPr>
-          <p:cNvPr id="42" name="s_k6" descr="Editable line; source id s_k6"/>
-          <p:cNvCxnSpPr/>
-          <p:nvPr/>
-        </p:nvCxnSpPr>
-        <p:spPr>
-          <a:xfrm>
-            <a:off x="6865937" y="4254499"/>
-            <a:ext cx="301625" cy="269875"/>
-          </a:xfrm>
-          <a:prstGeom prst="line">
-            <a:avLst/>
-          </a:prstGeom>
-          <a:ln w="31749">
-            <a:solidFill>
-              <a:srgbClr val="1B717D"/>
-            </a:solidFill>
-          </a:ln>
-          <a:effectLst/>
-        </p:spPr>
-        <p:style>
-          <a:lnRef idx="2">
-            <a:schemeClr val="accent1"/>
-          </a:lnRef>
-          <a:fillRef idx="0">
-            <a:schemeClr val="accent1"/>
-          </a:fillRef>
-          <a:effectRef idx="0">
-            <a:schemeClr val="accent1"/>
-          </a:effectRef>
-          <a:fontRef idx="minor">
-            <a:schemeClr val="tx1"/>
-          </a:fontRef>
-        </p:style>
-      </p:cxnSp>
-      <p:sp>
-        <p:nvSpPr>
-          <p:cNvPr id="43" name="s_k6b" descr="Editable line; source id s_k6b"/>
-          <p:cNvSpPr/>
-          <p:nvPr/>
-        </p:nvSpPr>
-        <p:spPr>
-          <a:xfrm>
-            <a:off x="7903099" y="5171360"/>
-            <a:ext cx="312214" cy="281702"/>
-          </a:xfrm>
-          <a:custGeom>
-            <a:avLst/>
-            <a:gdLst/>
-            <a:ahLst/>
-            <a:cxnLst/>
-            <a:rect l="l" t="t" r="r" b="b"/>
-            <a:pathLst>
-              <a:path w="39334" h="35490">
-                <a:moveTo>
-                  <a:pt x="2668" y="0"/>
-                </a:moveTo>
-                <a:lnTo>
-                  <a:pt x="28744" y="23331"/>
-                </a:lnTo>
-                <a:lnTo>
-                  <a:pt x="32078" y="19605"/>
-                </a:lnTo>
-                <a:lnTo>
-                  <a:pt x="39334" y="35490"/>
-                </a:lnTo>
-                <a:lnTo>
-                  <a:pt x="22743" y="30038"/>
-                </a:lnTo>
-                <a:lnTo>
-                  <a:pt x="26077" y="26312"/>
-                </a:lnTo>
-                <a:lnTo>
-                  <a:pt x="0" y="2980"/>
-                </a:lnTo>
-                <a:close/>
-              </a:path>
-            </a:pathLst>
-          </a:custGeom>
-          <a:solidFill>
-            <a:srgbClr val="1B717D"/>
-          </a:solidFill>
-          <a:ln>
-            <a:noFill/>
-          </a:ln>
-          <a:effectLst/>
-        </p:spPr>
-        <p:style>
-          <a:lnRef idx="1">
-            <a:schemeClr val="accent1"/>
-          </a:lnRef>
-          <a:fillRef idx="3">
-            <a:schemeClr val="accent1"/>
-          </a:fillRef>
-          <a:effectRef idx="0">
-            <a:schemeClr val="accent1"/>
-          </a:effectRef>
-          <a:fontRef idx="minor">
-            <a:schemeClr val="lt1"/>
-          </a:fontRef>
-        </p:style>
-        <p:txBody>
-          <a:bodyPr rtlCol="0" anchor="ctr"/>
-          <a:lstStyle/>
-          <a:p>
-            <a:pPr algn="ctr"/>
-          </a:p>
-        </p:txBody>
-      </p:sp>
-      <p:sp>
-        <p:nvSpPr>
-          <p:cNvPr id="44" name="s_k6_p" descr="Editable shape; source id s_k6_p"/>
-          <p:cNvSpPr/>
-          <p:nvPr/>
-        </p:nvSpPr>
-        <p:spPr>
-          <a:xfrm>
-            <a:off x="7096124" y="4651374"/>
-            <a:ext cx="888999" cy="396874"/>
-          </a:xfrm>
-          <a:prstGeom prst="roundRect">
-            <a:avLst>
-              <a:gd name="adj" fmla="val 50000"/>
-            </a:avLst>
-          </a:prstGeom>
-          <a:solidFill>
-            <a:srgbClr val="1B717D"/>
-          </a:solidFill>
-          <a:ln w="19843">
-            <a:solidFill>
-              <a:srgbClr val="145159"/>
-            </a:solidFill>
-          </a:ln>
-          <a:effectLst/>
-        </p:spPr>
-        <p:style>
-          <a:lnRef idx="1">
-            <a:schemeClr val="accent1"/>
-          </a:lnRef>
-          <a:fillRef idx="3">
-            <a:schemeClr val="accent1"/>
-          </a:fillRef>
-          <a:effectRef idx="0">
-            <a:schemeClr val="accent1"/>
-          </a:effectRef>
-          <a:fontRef idx="minor">
-            <a:schemeClr val="lt1"/>
-          </a:fontRef>
-        </p:style>
-        <p:txBody>
-          <a:bodyPr rtlCol="0" anchor="ctr"/>
-          <a:lstStyle/>
-          <a:p>
-            <a:pPr algn="ctr"/>
-          </a:p>
-        </p:txBody>
-      </p:sp>
-      <p:sp>
-        <p:nvSpPr>
-          <p:cNvPr id="45" name="s_k6_pt" descr="Editable text; source id s_k6_pt"/>
-          <p:cNvSpPr txBox="1"/>
-          <p:nvPr/>
-        </p:nvSpPr>
-        <p:spPr>
-          <a:xfrm>
-            <a:off x="7143749" y="4675187"/>
-            <a:ext cx="793749" cy="349249"/>
-          </a:xfrm>
-          <a:prstGeom prst="rect">
-            <a:avLst/>
-          </a:prstGeom>
-          <a:noFill/>
-          <a:effectLst/>
-        </p:spPr>
-        <p:txBody>
-          <a:bodyPr wrap="none" anchor="ctr" tIns="0" rIns="0" bIns="0" lIns="0" anchorCtr="0" vertOverflow="overflow">
-            <a:noAutofit/>
-          </a:bodyPr>
-          <a:lstStyle/>
-          <a:p>
-            <a:pPr algn="ctr" fontAlgn="base">
-              <a:lnSpc>
-                <a:spcPts val="2187"/>
-              </a:lnSpc>
-              <a:spcBef>
-                <a:spcPts val="0"/>
-              </a:spcBef>
-              <a:spcAft>
-                <a:spcPts val="0"/>
-              </a:spcAft>
-              <a:defRPr sz="1499" b="1" i="0" lang="zh-CN" dirty="0">
-                <a:solidFill>
-                  <a:srgbClr val="FFFFFF"/>
-                </a:solidFill>
-                <a:latin typeface="Noto Sans CJK SC"/>
-                <a:ea typeface="Noto Sans CJK SC"/>
-                <a:cs typeface="Noto Sans CJK SC"/>
-              </a:defRPr>
-            </a:pPr>
-            <a:r>
-              <a:rPr sz="1499" b="1" i="0" lang="zh-CN" dirty="0">
-                <a:solidFill>
-                  <a:srgbClr val="FFFFFF"/>
-                </a:solidFill>
-                <a:latin typeface="Noto Sans CJK SC"/>
-                <a:ea typeface="Noto Sans CJK SC"/>
-                <a:cs typeface="Noto Sans CJK SC"/>
-              </a:rPr>
-              <a:t>晶化</a:t>
-            </a:r>
-          </a:p>
-        </p:txBody>
-      </p:sp>
-      <p:sp>
-        <p:nvSpPr>
-          <p:cNvPr id="46" name="k7" descr="Editable shape; source id k7"/>
-          <p:cNvSpPr/>
-          <p:nvPr/>
-        </p:nvSpPr>
-        <p:spPr>
-          <a:xfrm>
-            <a:off x="4714874" y="6429374"/>
-            <a:ext cx="2857499" cy="1349374"/>
-          </a:xfrm>
-          <a:prstGeom prst="roundRect">
-            <a:avLst>
-              <a:gd name="adj" fmla="val 8235"/>
-            </a:avLst>
-          </a:prstGeom>
-          <a:solidFill>
-            <a:srgbClr val="FBF1DC"/>
-          </a:solidFill>
-          <a:ln w="27781">
-            <a:solidFill>
-              <a:srgbClr val="B8781E"/>
-            </a:solidFill>
-            <a:custDash>
-              <a:ds d="457143" sp="285714"/>
-            </a:custDash>
-          </a:ln>
-          <a:effectLst/>
-        </p:spPr>
-        <p:style>
-          <a:lnRef idx="1">
-            <a:schemeClr val="accent1"/>
-          </a:lnRef>
-          <a:fillRef idx="3">
-            <a:schemeClr val="accent1"/>
-          </a:fillRef>
-          <a:effectRef idx="0">
-            <a:schemeClr val="accent1"/>
-          </a:effectRef>
-          <a:fontRef idx="minor">
-            <a:schemeClr val="lt1"/>
-          </a:fontRef>
-        </p:style>
-        <p:txBody>
-          <a:bodyPr rtlCol="0" anchor="ctr"/>
-          <a:lstStyle/>
-          <a:p>
-            <a:pPr algn="ctr"/>
-          </a:p>
-        </p:txBody>
-      </p:sp>
-      <p:sp>
-        <p:nvSpPr>
-          <p:cNvPr id="47" name="k7_t" descr="Editable text; source id k7_t"/>
-          <p:cNvSpPr txBox="1"/>
-          <p:nvPr/>
-        </p:nvSpPr>
-        <p:spPr>
-          <a:xfrm>
-            <a:off x="4794249" y="6667499"/>
-            <a:ext cx="2698749" cy="396874"/>
-          </a:xfrm>
-          <a:prstGeom prst="rect">
-            <a:avLst/>
-          </a:prstGeom>
-          <a:noFill/>
-          <a:effectLst/>
-        </p:spPr>
-        <p:txBody>
-          <a:bodyPr wrap="none" anchor="ctr" tIns="0" rIns="0" bIns="0" lIns="0" anchorCtr="0" vertOverflow="overflow">
-            <a:noAutofit/>
-          </a:bodyPr>
-          <a:lstStyle/>
-          <a:p>
-            <a:pPr algn="ctr" fontAlgn="base">
-              <a:lnSpc>
-                <a:spcPts val="2046"/>
-              </a:lnSpc>
-              <a:spcBef>
-                <a:spcPts val="0"/>
-              </a:spcBef>
-              <a:spcAft>
-                <a:spcPts val="0"/>
-              </a:spcAft>
-              <a:defRPr sz="1749" b="1" i="0" lang="zh-CN" dirty="0">
-                <a:solidFill>
-                  <a:srgbClr val="10171F"/>
-                </a:solidFill>
-                <a:latin typeface="DejaVu Sans"/>
-                <a:ea typeface="DejaVu Sans"/>
-                <a:cs typeface="DejaVu Sans"/>
-              </a:defRPr>
-            </a:pPr>
-            <a:r>
-              <a:rPr sz="1749" b="1" i="0" lang="zh-CN" dirty="0">
-                <a:solidFill>
-                  <a:srgbClr val="10171F"/>
-                </a:solidFill>
-                <a:latin typeface="DejaVu Sans"/>
-                <a:ea typeface="DejaVu Sans"/>
-                <a:cs typeface="DejaVu Sans"/>
-              </a:rPr>
-              <a:t>Ba5Y12Zn[O(SiO4)]8</a:t>
-            </a:r>
-          </a:p>
-        </p:txBody>
-      </p:sp>
-      <p:sp>
-        <p:nvSpPr>
-          <p:cNvPr id="48" name="k7_s" descr="Editable text; source id k7_s"/>
-          <p:cNvSpPr txBox="1"/>
-          <p:nvPr/>
-        </p:nvSpPr>
-        <p:spPr>
-          <a:xfrm>
-            <a:off x="4794249" y="7175499"/>
-            <a:ext cx="2698749" cy="333374"/>
-          </a:xfrm>
-          <a:prstGeom prst="rect">
-            <a:avLst/>
-          </a:prstGeom>
-          <a:noFill/>
-          <a:effectLst/>
-        </p:spPr>
-        <p:txBody>
-          <a:bodyPr wrap="none" anchor="ctr" tIns="0" rIns="0" bIns="0" lIns="0" anchorCtr="0" vertOverflow="overflow">
-            <a:noAutofit/>
-          </a:bodyPr>
-          <a:lstStyle/>
-          <a:p>
-            <a:pPr algn="ctr" fontAlgn="base">
-              <a:lnSpc>
-                <a:spcPts val="2468"/>
-              </a:lnSpc>
-              <a:spcBef>
-                <a:spcPts val="0"/>
-              </a:spcBef>
-              <a:spcAft>
-                <a:spcPts val="0"/>
-              </a:spcAft>
-              <a:defRPr sz="1687" b="0" i="0" lang="zh-CN" dirty="0">
-                <a:solidFill>
-                  <a:srgbClr val="2B333A"/>
-                </a:solidFill>
-                <a:latin typeface="Noto Sans CJK SC"/>
-                <a:ea typeface="Noto Sans CJK SC"/>
-                <a:cs typeface="Noto Sans CJK SC"/>
-              </a:defRPr>
-            </a:pPr>
-            <a:r>
-              <a:rPr sz="1687" b="0" i="0" lang="zh-CN" dirty="0">
-                <a:solidFill>
-                  <a:srgbClr val="2B333A"/>
-                </a:solidFill>
-                <a:latin typeface="Noto Sans CJK SC"/>
-                <a:ea typeface="Noto Sans CJK SC"/>
-                <a:cs typeface="Noto Sans CJK SC"/>
-              </a:rPr>
-              <a:t>未见直接报道</a:t>
-            </a:r>
-          </a:p>
-        </p:txBody>
-      </p:sp>
-      <p:cxnSp>
-        <p:nvCxnSpPr>
-          <p:cNvPr id="49" name="s_k7" descr="Editable line; source id s_k7"/>
-          <p:cNvCxnSpPr/>
-          <p:nvPr/>
-        </p:nvCxnSpPr>
-        <p:spPr>
-          <a:xfrm>
-            <a:off x="6095999" y="4595812"/>
-            <a:ext cx="0" cy="484187"/>
-          </a:xfrm>
-          <a:prstGeom prst="line">
-            <a:avLst/>
-          </a:prstGeom>
-          <a:ln w="27781">
-            <a:solidFill>
-              <a:srgbClr val="B8781E"/>
-            </a:solidFill>
-            <a:custDash>
-              <a:ds d="400000" sp="257143"/>
-            </a:custDash>
-          </a:ln>
-          <a:effectLst/>
-        </p:spPr>
-        <p:style>
-          <a:lnRef idx="2">
-            <a:schemeClr val="accent1"/>
-          </a:lnRef>
-          <a:fillRef idx="0">
-            <a:schemeClr val="accent1"/>
-          </a:fillRef>
-          <a:effectRef idx="0">
-            <a:schemeClr val="accent1"/>
-          </a:effectRef>
-          <a:fontRef idx="minor">
-            <a:schemeClr val="tx1"/>
-          </a:fontRef>
-        </p:style>
-      </p:cxnSp>
-      <p:sp>
-        <p:nvSpPr>
-          <p:cNvPr id="50" name="s_k7_p" descr="Editable shape; source id s_k7_p"/>
-          <p:cNvSpPr/>
-          <p:nvPr/>
-        </p:nvSpPr>
-        <p:spPr>
-          <a:xfrm>
-            <a:off x="5651499" y="5095874"/>
-            <a:ext cx="888999" cy="396874"/>
-          </a:xfrm>
-          <a:prstGeom prst="roundRect">
-            <a:avLst>
-              <a:gd name="adj" fmla="val 50000"/>
-            </a:avLst>
-          </a:prstGeom>
-          <a:solidFill>
-            <a:srgbClr val="B8781E"/>
-          </a:solidFill>
-          <a:ln w="19843">
-            <a:solidFill>
-              <a:srgbClr val="8A5A10"/>
-            </a:solidFill>
-          </a:ln>
-          <a:effectLst/>
-        </p:spPr>
-        <p:style>
-          <a:lnRef idx="1">
-            <a:schemeClr val="accent1"/>
-          </a:lnRef>
-          <a:fillRef idx="3">
-            <a:schemeClr val="accent1"/>
-          </a:fillRef>
-          <a:effectRef idx="0">
-            <a:schemeClr val="accent1"/>
-          </a:effectRef>
-          <a:fontRef idx="minor">
-            <a:schemeClr val="lt1"/>
-          </a:fontRef>
-        </p:style>
-        <p:txBody>
-          <a:bodyPr rtlCol="0" anchor="ctr"/>
-          <a:lstStyle/>
-          <a:p>
-            <a:pPr algn="ctr"/>
-          </a:p>
-        </p:txBody>
-      </p:sp>
-      <p:sp>
-        <p:nvSpPr>
-          <p:cNvPr id="51" name="s_k7_pt" descr="Editable text; source id s_k7_pt"/>
-          <p:cNvSpPr txBox="1"/>
-          <p:nvPr/>
-        </p:nvSpPr>
-        <p:spPr>
-          <a:xfrm>
-            <a:off x="5699124" y="5119687"/>
-            <a:ext cx="793749" cy="349249"/>
-          </a:xfrm>
-          <a:prstGeom prst="rect">
-            <a:avLst/>
-          </a:prstGeom>
-          <a:noFill/>
-          <a:effectLst/>
-        </p:spPr>
-        <p:txBody>
-          <a:bodyPr wrap="none" anchor="ctr" tIns="0" rIns="0" bIns="0" lIns="0" anchorCtr="0" vertOverflow="overflow">
-            <a:noAutofit/>
-          </a:bodyPr>
-          <a:lstStyle/>
-          <a:p>
-            <a:pPr algn="ctr" fontAlgn="base">
-              <a:lnSpc>
-                <a:spcPts val="2187"/>
-              </a:lnSpc>
-              <a:spcBef>
-                <a:spcPts val="0"/>
-              </a:spcBef>
-              <a:spcAft>
-                <a:spcPts val="0"/>
-              </a:spcAft>
-              <a:defRPr sz="1499" b="1" i="0" lang="zh-CN" dirty="0">
-                <a:solidFill>
-                  <a:srgbClr val="FFFFFF"/>
-                </a:solidFill>
-                <a:latin typeface="Noto Sans CJK SC"/>
-                <a:ea typeface="Noto Sans CJK SC"/>
-                <a:cs typeface="Noto Sans CJK SC"/>
-              </a:defRPr>
-            </a:pPr>
-            <a:r>
-              <a:rPr sz="1499" b="1" i="0" lang="zh-CN" dirty="0">
-                <a:solidFill>
-                  <a:srgbClr val="FFFFFF"/>
+              <a:rPr sz="974" b="0" i="0" lang="zh-CN" dirty="0">
+                <a:solidFill>
+                  <a:srgbClr val="3F4854"/>
                 </a:solidFill>
                 <a:latin typeface="Noto Sans CJK SC"/>
                 <a:ea typeface="Noto Sans CJK SC"/>
@@ -6356,24 +7012,24 @@
       </p:sp>
       <p:cxnSp>
         <p:nvCxnSpPr>
-          <p:cNvPr id="52" name="s_k7b" descr="Editable line; source id s_k7b"/>
+          <p:cNvPr id="69" name="v2_0" descr="Editable line; source id v2_0"/>
           <p:cNvCxnSpPr/>
           <p:nvPr/>
         </p:nvCxnSpPr>
         <p:spPr>
           <a:xfrm>
-            <a:off x="6095999" y="5508624"/>
-            <a:ext cx="0" cy="896938"/>
+            <a:off x="7903494" y="4157925"/>
+            <a:ext cx="508573" cy="0"/>
           </a:xfrm>
           <a:prstGeom prst="line">
             <a:avLst/>
           </a:prstGeom>
-          <a:ln w="27781">
+          <a:ln w="13745">
             <a:solidFill>
-              <a:srgbClr val="B8781E"/>
+              <a:srgbClr val="C48A24"/>
             </a:solidFill>
             <a:custDash>
-              <a:ds d="400000" sp="257143"/>
+              <a:ds d="600000" sp="400000"/>
             </a:custDash>
             <a:tailEnd type="triangle"/>
           </a:ln>

--- a/media/figstudio/bzso_taxonomy/taxonomy_phase_control_editable.pptx
+++ b/media/figstudio/bzso_taxonomy/taxonomy_phase_control_editable.pptx
@@ -7,7 +7,7 @@
   <p:sldIdLst>
     <p:sldId id="256" r:id="rId7"/>
   </p:sldIdLst>
-  <p:sldSz cx="12191999" cy="6095999" type="screen4x3"/>
+  <p:sldSz cx="12191999" cy="8127999" type="screen4x3"/>
   <p:notesSz cx="6858000" cy="9144000"/>
   <p:defaultTextStyle>
     <a:defPPr>
@@ -502,7 +502,7 @@
           <a:lstStyle/>
           <a:p>
             <a:r>
-              <a:t>BaZn2Si2O7 合成与相控制分类框架（super_teaser 第三轮 R04 → super_img2ppt 重建）</a:t>
+              <a:t>BaZn2Si2O7 合成与相控制分类框架（super_teaser 第四轮 R05 → super_img2ppt 重建）</a:t>
             </a:r>
           </a:p>
         </p:txBody>
@@ -3524,18 +3524,18 @@
         </p:nvSpPr>
         <p:spPr>
           <a:xfrm>
-            <a:off x="3374448" y="501700"/>
-            <a:ext cx="3848658" cy="4810822"/>
+            <a:off x="3190874" y="222249"/>
+            <a:ext cx="4683124" cy="7683499"/>
           </a:xfrm>
           <a:prstGeom prst="roundRect">
             <a:avLst>
-              <a:gd name="adj" fmla="val 2857"/>
+              <a:gd name="adj" fmla="val 2372"/>
             </a:avLst>
           </a:prstGeom>
           <a:solidFill>
             <a:srgbClr val="E6F2F3"/>
           </a:solidFill>
-          <a:ln w="10308">
+          <a:ln w="9524">
             <a:solidFill>
               <a:srgbClr val="1F7F8C"/>
             </a:solidFill>
@@ -3572,8 +3572,8 @@
         </p:nvSpPr>
         <p:spPr>
           <a:xfrm>
-            <a:off x="3498155" y="584171"/>
-            <a:ext cx="687260" cy="226795"/>
+            <a:off x="3333749" y="301624"/>
+            <a:ext cx="904874" cy="293687"/>
           </a:xfrm>
           <a:prstGeom prst="rect">
             <a:avLst/>
@@ -3589,7 +3589,7 @@
           <a:p>
             <a:pPr algn="l" fontAlgn="base">
               <a:lnSpc>
-                <a:spcPts val="1745"/>
+                <a:spcPts val="1921"/>
               </a:lnSpc>
               <a:spcBef>
                 <a:spcPts val="0"/>
@@ -3597,7 +3597,7 @@
               <a:spcAft>
                 <a:spcPts val="0"/>
               </a:spcAft>
-              <a:defRPr sz="1190" b="1" i="0" lang="zh-CN" dirty="0">
+              <a:defRPr sz="1312" b="1" i="0" lang="zh-CN" dirty="0">
                 <a:solidFill>
                   <a:srgbClr val="0F4F58"/>
                 </a:solidFill>
@@ -3607,7 +3607,7 @@
               </a:defRPr>
             </a:pPr>
             <a:r>
-              <a:rPr sz="1190" b="1" i="0" lang="zh-CN" dirty="0">
+              <a:rPr sz="1312" b="1" i="0" lang="zh-CN" dirty="0">
                 <a:solidFill>
                   <a:srgbClr val="0F4F58"/>
                 </a:solidFill>
@@ -3628,18 +3628,18 @@
         </p:nvSpPr>
         <p:spPr>
           <a:xfrm>
-            <a:off x="8205889" y="501700"/>
-            <a:ext cx="3731824" cy="4810822"/>
+            <a:off x="8127999" y="222249"/>
+            <a:ext cx="3857624" cy="7683499"/>
           </a:xfrm>
           <a:prstGeom prst="roundRect">
             <a:avLst>
-              <a:gd name="adj" fmla="val 2946"/>
+              <a:gd name="adj" fmla="val 2880"/>
             </a:avLst>
           </a:prstGeom>
           <a:solidFill>
             <a:srgbClr val="EEF2F7"/>
           </a:solidFill>
-          <a:ln w="10308">
+          <a:ln w="9524">
             <a:solidFill>
               <a:srgbClr val="5B7592"/>
             </a:solidFill>
@@ -3676,8 +3676,8 @@
         </p:nvSpPr>
         <p:spPr>
           <a:xfrm>
-            <a:off x="8329596" y="584171"/>
-            <a:ext cx="687260" cy="226795"/>
+            <a:off x="8270874" y="301624"/>
+            <a:ext cx="904874" cy="293687"/>
           </a:xfrm>
           <a:prstGeom prst="rect">
             <a:avLst/>
@@ -3693,7 +3693,7 @@
           <a:p>
             <a:pPr algn="l" fontAlgn="base">
               <a:lnSpc>
-                <a:spcPts val="1745"/>
+                <a:spcPts val="1921"/>
               </a:lnSpc>
               <a:spcBef>
                 <a:spcPts val="0"/>
@@ -3701,7 +3701,7 @@
               <a:spcAft>
                 <a:spcPts val="0"/>
               </a:spcAft>
-              <a:defRPr sz="1190" b="1" i="0" lang="zh-CN" dirty="0">
+              <a:defRPr sz="1312" b="1" i="0" lang="zh-CN" dirty="0">
                 <a:solidFill>
                   <a:srgbClr val="2B3E57"/>
                 </a:solidFill>
@@ -3711,7 +3711,7 @@
               </a:defRPr>
             </a:pPr>
             <a:r>
-              <a:rPr sz="1190" b="1" i="0" lang="zh-CN" dirty="0">
+              <a:rPr sz="1312" b="1" i="0" lang="zh-CN" dirty="0">
                 <a:solidFill>
                   <a:srgbClr val="2B3E57"/>
                 </a:solidFill>
@@ -3732,18 +3732,18 @@
         </p:nvSpPr>
         <p:spPr>
           <a:xfrm>
-            <a:off x="240541" y="501700"/>
-            <a:ext cx="2020545" cy="4810822"/>
+            <a:off x="238124" y="2666999"/>
+            <a:ext cx="2127249" cy="2730499"/>
           </a:xfrm>
           <a:prstGeom prst="roundRect">
             <a:avLst>
-              <a:gd name="adj" fmla="val 3401"/>
+              <a:gd name="adj" fmla="val 3358"/>
             </a:avLst>
           </a:prstGeom>
           <a:solidFill>
             <a:srgbClr val="FFFFFF"/>
           </a:solidFill>
-          <a:ln w="10308">
+          <a:ln w="11112">
             <a:solidFill>
               <a:srgbClr val="1F7F8C"/>
             </a:solidFill>
@@ -3774,14 +3774,14 @@
       </p:sp>
       <p:sp>
         <p:nvSpPr>
-          <p:cNvPr id="7" name="hub_s" descr="Editable shape; source id hub_s"/>
+          <p:cNvPr id="7" name="hub_a" descr="Editable shape; source id hub_a"/>
           <p:cNvSpPr/>
           <p:nvPr/>
         </p:nvSpPr>
         <p:spPr>
           <a:xfrm>
-            <a:off x="240541" y="501700"/>
-            <a:ext cx="2020545" cy="54980"/>
+            <a:off x="238124" y="2666999"/>
+            <a:ext cx="2127249" cy="47624"/>
           </a:xfrm>
           <a:prstGeom prst="roundRect">
             <a:avLst>
@@ -3826,8 +3826,8 @@
         </p:nvSpPr>
         <p:spPr>
           <a:xfrm>
-            <a:off x="350502" y="2618462"/>
-            <a:ext cx="1800622" cy="350502"/>
+            <a:off x="396874" y="4190999"/>
+            <a:ext cx="1809749" cy="341312"/>
           </a:xfrm>
           <a:prstGeom prst="rect">
             <a:avLst/>
@@ -3843,7 +3843,7 @@
           <a:p>
             <a:pPr algn="ctr" fontAlgn="base">
               <a:lnSpc>
-                <a:spcPts val="2164"/>
+                <a:spcPts val="2124"/>
               </a:lnSpc>
               <a:spcBef>
                 <a:spcPts val="0"/>
@@ -3851,7 +3851,7 @@
               <a:spcAft>
                 <a:spcPts val="0"/>
               </a:spcAft>
-              <a:defRPr sz="1839" b="1" i="0" lang="zh-CN" dirty="0">
+              <a:defRPr sz="1801" b="1" i="0" lang="zh-CN" dirty="0">
                 <a:solidFill>
                   <a:srgbClr val="0F4F58"/>
                 </a:solidFill>
@@ -3861,7 +3861,7 @@
               </a:defRPr>
             </a:pPr>
             <a:r>
-              <a:rPr sz="1839" b="1" i="0" lang="zh-CN" dirty="0">
+              <a:rPr sz="1801" b="1" i="0" lang="zh-CN" dirty="0">
                 <a:solidFill>
                   <a:srgbClr val="0F4F58"/>
                 </a:solidFill>
@@ -3874,16 +3874,628 @@
           </a:p>
         </p:txBody>
       </p:sp>
-      <p:sp>
-        <p:nvSpPr>
-          <p:cNvPr id="9" name="hub_k0" descr="Editable text; source id hub_k0"/>
+      <p:cxnSp>
+        <p:nvCxnSpPr>
+          <p:cNvPr id="9" name="hub_g_h0" descr="Editable line; source id hub_g_h0"/>
+          <p:cNvCxnSpPr/>
+          <p:nvPr/>
+        </p:nvCxnSpPr>
+        <p:spPr>
+          <a:xfrm>
+            <a:off x="1039812" y="3198812"/>
+            <a:ext cx="492125" cy="0"/>
+          </a:xfrm>
+          <a:prstGeom prst="line">
+            <a:avLst/>
+          </a:prstGeom>
+          <a:ln w="15239">
+            <a:solidFill>
+              <a:srgbClr val="1F2937"/>
+            </a:solidFill>
+          </a:ln>
+          <a:effectLst/>
+        </p:spPr>
+        <p:style>
+          <a:lnRef idx="2">
+            <a:schemeClr val="accent1"/>
+          </a:lnRef>
+          <a:fillRef idx="0">
+            <a:schemeClr val="accent1"/>
+          </a:fillRef>
+          <a:effectRef idx="0">
+            <a:schemeClr val="accent1"/>
+          </a:effectRef>
+          <a:fontRef idx="minor">
+            <a:schemeClr val="tx1"/>
+          </a:fontRef>
+        </p:style>
+      </p:cxnSp>
+      <p:cxnSp>
+        <p:nvCxnSpPr>
+          <p:cNvPr id="10" name="hub_g_v0" descr="Editable line; source id hub_g_v0"/>
+          <p:cNvCxnSpPr/>
+          <p:nvPr/>
+        </p:nvCxnSpPr>
+        <p:spPr>
+          <a:xfrm>
+            <a:off x="1039812" y="3198812"/>
+            <a:ext cx="0" cy="492125"/>
+          </a:xfrm>
+          <a:prstGeom prst="line">
+            <a:avLst/>
+          </a:prstGeom>
+          <a:ln w="15239">
+            <a:solidFill>
+              <a:srgbClr val="1F2937"/>
+            </a:solidFill>
+          </a:ln>
+          <a:effectLst/>
+        </p:spPr>
+        <p:style>
+          <a:lnRef idx="2">
+            <a:schemeClr val="accent1"/>
+          </a:lnRef>
+          <a:fillRef idx="0">
+            <a:schemeClr val="accent1"/>
+          </a:fillRef>
+          <a:effectRef idx="0">
+            <a:schemeClr val="accent1"/>
+          </a:effectRef>
+          <a:fontRef idx="minor">
+            <a:schemeClr val="tx1"/>
+          </a:fontRef>
+        </p:style>
+      </p:cxnSp>
+      <p:cxnSp>
+        <p:nvCxnSpPr>
+          <p:cNvPr id="11" name="hub_g_h1" descr="Editable line; source id hub_g_h1"/>
+          <p:cNvCxnSpPr/>
+          <p:nvPr/>
+        </p:nvCxnSpPr>
+        <p:spPr>
+          <a:xfrm>
+            <a:off x="1039812" y="3444874"/>
+            <a:ext cx="492125" cy="0"/>
+          </a:xfrm>
+          <a:prstGeom prst="line">
+            <a:avLst/>
+          </a:prstGeom>
+          <a:ln w="15239">
+            <a:solidFill>
+              <a:srgbClr val="1F2937"/>
+            </a:solidFill>
+          </a:ln>
+          <a:effectLst/>
+        </p:spPr>
+        <p:style>
+          <a:lnRef idx="2">
+            <a:schemeClr val="accent1"/>
+          </a:lnRef>
+          <a:fillRef idx="0">
+            <a:schemeClr val="accent1"/>
+          </a:fillRef>
+          <a:effectRef idx="0">
+            <a:schemeClr val="accent1"/>
+          </a:effectRef>
+          <a:fontRef idx="minor">
+            <a:schemeClr val="tx1"/>
+          </a:fontRef>
+        </p:style>
+      </p:cxnSp>
+      <p:cxnSp>
+        <p:nvCxnSpPr>
+          <p:cNvPr id="12" name="hub_g_v1" descr="Editable line; source id hub_g_v1"/>
+          <p:cNvCxnSpPr/>
+          <p:nvPr/>
+        </p:nvCxnSpPr>
+        <p:spPr>
+          <a:xfrm>
+            <a:off x="1285874" y="3198812"/>
+            <a:ext cx="0" cy="492125"/>
+          </a:xfrm>
+          <a:prstGeom prst="line">
+            <a:avLst/>
+          </a:prstGeom>
+          <a:ln w="15239">
+            <a:solidFill>
+              <a:srgbClr val="1F2937"/>
+            </a:solidFill>
+          </a:ln>
+          <a:effectLst/>
+        </p:spPr>
+        <p:style>
+          <a:lnRef idx="2">
+            <a:schemeClr val="accent1"/>
+          </a:lnRef>
+          <a:fillRef idx="0">
+            <a:schemeClr val="accent1"/>
+          </a:fillRef>
+          <a:effectRef idx="0">
+            <a:schemeClr val="accent1"/>
+          </a:effectRef>
+          <a:fontRef idx="minor">
+            <a:schemeClr val="tx1"/>
+          </a:fontRef>
+        </p:style>
+      </p:cxnSp>
+      <p:cxnSp>
+        <p:nvCxnSpPr>
+          <p:cNvPr id="13" name="hub_g_h2" descr="Editable line; source id hub_g_h2"/>
+          <p:cNvCxnSpPr/>
+          <p:nvPr/>
+        </p:nvCxnSpPr>
+        <p:spPr>
+          <a:xfrm>
+            <a:off x="1039812" y="3690937"/>
+            <a:ext cx="492125" cy="0"/>
+          </a:xfrm>
+          <a:prstGeom prst="line">
+            <a:avLst/>
+          </a:prstGeom>
+          <a:ln w="15239">
+            <a:solidFill>
+              <a:srgbClr val="1F2937"/>
+            </a:solidFill>
+          </a:ln>
+          <a:effectLst/>
+        </p:spPr>
+        <p:style>
+          <a:lnRef idx="2">
+            <a:schemeClr val="accent1"/>
+          </a:lnRef>
+          <a:fillRef idx="0">
+            <a:schemeClr val="accent1"/>
+          </a:fillRef>
+          <a:effectRef idx="0">
+            <a:schemeClr val="accent1"/>
+          </a:effectRef>
+          <a:fontRef idx="minor">
+            <a:schemeClr val="tx1"/>
+          </a:fontRef>
+        </p:style>
+      </p:cxnSp>
+      <p:cxnSp>
+        <p:nvCxnSpPr>
+          <p:cNvPr id="14" name="hub_g_v2" descr="Editable line; source id hub_g_v2"/>
+          <p:cNvCxnSpPr/>
+          <p:nvPr/>
+        </p:nvCxnSpPr>
+        <p:spPr>
+          <a:xfrm>
+            <a:off x="1531937" y="3198812"/>
+            <a:ext cx="0" cy="492125"/>
+          </a:xfrm>
+          <a:prstGeom prst="line">
+            <a:avLst/>
+          </a:prstGeom>
+          <a:ln w="15239">
+            <a:solidFill>
+              <a:srgbClr val="1F2937"/>
+            </a:solidFill>
+          </a:ln>
+          <a:effectLst/>
+        </p:spPr>
+        <p:style>
+          <a:lnRef idx="2">
+            <a:schemeClr val="accent1"/>
+          </a:lnRef>
+          <a:fillRef idx="0">
+            <a:schemeClr val="accent1"/>
+          </a:fillRef>
+          <a:effectRef idx="0">
+            <a:schemeClr val="accent1"/>
+          </a:effectRef>
+          <a:fontRef idx="minor">
+            <a:schemeClr val="tx1"/>
+          </a:fontRef>
+        </p:style>
+      </p:cxnSp>
+      <p:sp>
+        <p:nvSpPr>
+          <p:cNvPr id="15" name="hub_g_d00" descr="Editable shape; source id hub_g_d00"/>
+          <p:cNvSpPr/>
+          <p:nvPr/>
+        </p:nvSpPr>
+        <p:spPr>
+          <a:xfrm>
+            <a:off x="992187" y="3151187"/>
+            <a:ext cx="103187" cy="103187"/>
+          </a:xfrm>
+          <a:prstGeom prst="ellipse">
+            <a:avLst/>
+          </a:prstGeom>
+          <a:solidFill>
+            <a:srgbClr val="FFFFFF"/>
+          </a:solidFill>
+          <a:ln>
+            <a:noFill/>
+          </a:ln>
+          <a:effectLst/>
+        </p:spPr>
+        <p:style>
+          <a:lnRef idx="1">
+            <a:schemeClr val="accent1"/>
+          </a:lnRef>
+          <a:fillRef idx="3">
+            <a:schemeClr val="accent1"/>
+          </a:fillRef>
+          <a:effectRef idx="0">
+            <a:schemeClr val="accent1"/>
+          </a:effectRef>
+          <a:fontRef idx="minor">
+            <a:schemeClr val="lt1"/>
+          </a:fontRef>
+        </p:style>
+        <p:txBody>
+          <a:bodyPr rtlCol="0" anchor="ctr"/>
+          <a:lstStyle/>
+          <a:p>
+            <a:pPr algn="ctr"/>
+          </a:p>
+        </p:txBody>
+      </p:sp>
+      <p:sp>
+        <p:nvSpPr>
+          <p:cNvPr id="16" name="hub_g_d01" descr="Editable shape; source id hub_g_d01"/>
+          <p:cNvSpPr/>
+          <p:nvPr/>
+        </p:nvSpPr>
+        <p:spPr>
+          <a:xfrm>
+            <a:off x="992187" y="3389312"/>
+            <a:ext cx="103187" cy="103187"/>
+          </a:xfrm>
+          <a:prstGeom prst="ellipse">
+            <a:avLst/>
+          </a:prstGeom>
+          <a:solidFill>
+            <a:srgbClr val="FFFFFF"/>
+          </a:solidFill>
+          <a:ln>
+            <a:noFill/>
+          </a:ln>
+          <a:effectLst/>
+        </p:spPr>
+        <p:style>
+          <a:lnRef idx="1">
+            <a:schemeClr val="accent1"/>
+          </a:lnRef>
+          <a:fillRef idx="3">
+            <a:schemeClr val="accent1"/>
+          </a:fillRef>
+          <a:effectRef idx="0">
+            <a:schemeClr val="accent1"/>
+          </a:effectRef>
+          <a:fontRef idx="minor">
+            <a:schemeClr val="lt1"/>
+          </a:fontRef>
+        </p:style>
+        <p:txBody>
+          <a:bodyPr rtlCol="0" anchor="ctr"/>
+          <a:lstStyle/>
+          <a:p>
+            <a:pPr algn="ctr"/>
+          </a:p>
+        </p:txBody>
+      </p:sp>
+      <p:sp>
+        <p:nvSpPr>
+          <p:cNvPr id="17" name="hub_g_d02" descr="Editable shape; source id hub_g_d02"/>
+          <p:cNvSpPr/>
+          <p:nvPr/>
+        </p:nvSpPr>
+        <p:spPr>
+          <a:xfrm>
+            <a:off x="992187" y="3635374"/>
+            <a:ext cx="103187" cy="103187"/>
+          </a:xfrm>
+          <a:prstGeom prst="ellipse">
+            <a:avLst/>
+          </a:prstGeom>
+          <a:solidFill>
+            <a:srgbClr val="FFFFFF"/>
+          </a:solidFill>
+          <a:ln>
+            <a:noFill/>
+          </a:ln>
+          <a:effectLst/>
+        </p:spPr>
+        <p:style>
+          <a:lnRef idx="1">
+            <a:schemeClr val="accent1"/>
+          </a:lnRef>
+          <a:fillRef idx="3">
+            <a:schemeClr val="accent1"/>
+          </a:fillRef>
+          <a:effectRef idx="0">
+            <a:schemeClr val="accent1"/>
+          </a:effectRef>
+          <a:fontRef idx="minor">
+            <a:schemeClr val="lt1"/>
+          </a:fontRef>
+        </p:style>
+        <p:txBody>
+          <a:bodyPr rtlCol="0" anchor="ctr"/>
+          <a:lstStyle/>
+          <a:p>
+            <a:pPr algn="ctr"/>
+          </a:p>
+        </p:txBody>
+      </p:sp>
+      <p:sp>
+        <p:nvSpPr>
+          <p:cNvPr id="18" name="hub_g_d10" descr="Editable shape; source id hub_g_d10"/>
+          <p:cNvSpPr/>
+          <p:nvPr/>
+        </p:nvSpPr>
+        <p:spPr>
+          <a:xfrm>
+            <a:off x="1230312" y="3151187"/>
+            <a:ext cx="103187" cy="103187"/>
+          </a:xfrm>
+          <a:prstGeom prst="ellipse">
+            <a:avLst/>
+          </a:prstGeom>
+          <a:solidFill>
+            <a:srgbClr val="FFFFFF"/>
+          </a:solidFill>
+          <a:ln>
+            <a:noFill/>
+          </a:ln>
+          <a:effectLst/>
+        </p:spPr>
+        <p:style>
+          <a:lnRef idx="1">
+            <a:schemeClr val="accent1"/>
+          </a:lnRef>
+          <a:fillRef idx="3">
+            <a:schemeClr val="accent1"/>
+          </a:fillRef>
+          <a:effectRef idx="0">
+            <a:schemeClr val="accent1"/>
+          </a:effectRef>
+          <a:fontRef idx="minor">
+            <a:schemeClr val="lt1"/>
+          </a:fontRef>
+        </p:style>
+        <p:txBody>
+          <a:bodyPr rtlCol="0" anchor="ctr"/>
+          <a:lstStyle/>
+          <a:p>
+            <a:pPr algn="ctr"/>
+          </a:p>
+        </p:txBody>
+      </p:sp>
+      <p:sp>
+        <p:nvSpPr>
+          <p:cNvPr id="19" name="hub_g_d11" descr="Editable shape; source id hub_g_d11"/>
+          <p:cNvSpPr/>
+          <p:nvPr/>
+        </p:nvSpPr>
+        <p:spPr>
+          <a:xfrm>
+            <a:off x="1230312" y="3389312"/>
+            <a:ext cx="103187" cy="103187"/>
+          </a:xfrm>
+          <a:prstGeom prst="ellipse">
+            <a:avLst/>
+          </a:prstGeom>
+          <a:solidFill>
+            <a:srgbClr val="1F2937"/>
+          </a:solidFill>
+          <a:ln>
+            <a:noFill/>
+          </a:ln>
+          <a:effectLst/>
+        </p:spPr>
+        <p:style>
+          <a:lnRef idx="1">
+            <a:schemeClr val="accent1"/>
+          </a:lnRef>
+          <a:fillRef idx="3">
+            <a:schemeClr val="accent1"/>
+          </a:fillRef>
+          <a:effectRef idx="0">
+            <a:schemeClr val="accent1"/>
+          </a:effectRef>
+          <a:fontRef idx="minor">
+            <a:schemeClr val="lt1"/>
+          </a:fontRef>
+        </p:style>
+        <p:txBody>
+          <a:bodyPr rtlCol="0" anchor="ctr"/>
+          <a:lstStyle/>
+          <a:p>
+            <a:pPr algn="ctr"/>
+          </a:p>
+        </p:txBody>
+      </p:sp>
+      <p:sp>
+        <p:nvSpPr>
+          <p:cNvPr id="20" name="hub_g_d12" descr="Editable shape; source id hub_g_d12"/>
+          <p:cNvSpPr/>
+          <p:nvPr/>
+        </p:nvSpPr>
+        <p:spPr>
+          <a:xfrm>
+            <a:off x="1230312" y="3635374"/>
+            <a:ext cx="103187" cy="103187"/>
+          </a:xfrm>
+          <a:prstGeom prst="ellipse">
+            <a:avLst/>
+          </a:prstGeom>
+          <a:solidFill>
+            <a:srgbClr val="FFFFFF"/>
+          </a:solidFill>
+          <a:ln>
+            <a:noFill/>
+          </a:ln>
+          <a:effectLst/>
+        </p:spPr>
+        <p:style>
+          <a:lnRef idx="1">
+            <a:schemeClr val="accent1"/>
+          </a:lnRef>
+          <a:fillRef idx="3">
+            <a:schemeClr val="accent1"/>
+          </a:fillRef>
+          <a:effectRef idx="0">
+            <a:schemeClr val="accent1"/>
+          </a:effectRef>
+          <a:fontRef idx="minor">
+            <a:schemeClr val="lt1"/>
+          </a:fontRef>
+        </p:style>
+        <p:txBody>
+          <a:bodyPr rtlCol="0" anchor="ctr"/>
+          <a:lstStyle/>
+          <a:p>
+            <a:pPr algn="ctr"/>
+          </a:p>
+        </p:txBody>
+      </p:sp>
+      <p:sp>
+        <p:nvSpPr>
+          <p:cNvPr id="21" name="hub_g_d20" descr="Editable shape; source id hub_g_d20"/>
+          <p:cNvSpPr/>
+          <p:nvPr/>
+        </p:nvSpPr>
+        <p:spPr>
+          <a:xfrm>
+            <a:off x="1476374" y="3151187"/>
+            <a:ext cx="103187" cy="103187"/>
+          </a:xfrm>
+          <a:prstGeom prst="ellipse">
+            <a:avLst/>
+          </a:prstGeom>
+          <a:solidFill>
+            <a:srgbClr val="FFFFFF"/>
+          </a:solidFill>
+          <a:ln>
+            <a:noFill/>
+          </a:ln>
+          <a:effectLst/>
+        </p:spPr>
+        <p:style>
+          <a:lnRef idx="1">
+            <a:schemeClr val="accent1"/>
+          </a:lnRef>
+          <a:fillRef idx="3">
+            <a:schemeClr val="accent1"/>
+          </a:fillRef>
+          <a:effectRef idx="0">
+            <a:schemeClr val="accent1"/>
+          </a:effectRef>
+          <a:fontRef idx="minor">
+            <a:schemeClr val="lt1"/>
+          </a:fontRef>
+        </p:style>
+        <p:txBody>
+          <a:bodyPr rtlCol="0" anchor="ctr"/>
+          <a:lstStyle/>
+          <a:p>
+            <a:pPr algn="ctr"/>
+          </a:p>
+        </p:txBody>
+      </p:sp>
+      <p:sp>
+        <p:nvSpPr>
+          <p:cNvPr id="22" name="hub_g_d21" descr="Editable shape; source id hub_g_d21"/>
+          <p:cNvSpPr/>
+          <p:nvPr/>
+        </p:nvSpPr>
+        <p:spPr>
+          <a:xfrm>
+            <a:off x="1476374" y="3389312"/>
+            <a:ext cx="103187" cy="103187"/>
+          </a:xfrm>
+          <a:prstGeom prst="ellipse">
+            <a:avLst/>
+          </a:prstGeom>
+          <a:solidFill>
+            <a:srgbClr val="FFFFFF"/>
+          </a:solidFill>
+          <a:ln>
+            <a:noFill/>
+          </a:ln>
+          <a:effectLst/>
+        </p:spPr>
+        <p:style>
+          <a:lnRef idx="1">
+            <a:schemeClr val="accent1"/>
+          </a:lnRef>
+          <a:fillRef idx="3">
+            <a:schemeClr val="accent1"/>
+          </a:fillRef>
+          <a:effectRef idx="0">
+            <a:schemeClr val="accent1"/>
+          </a:effectRef>
+          <a:fontRef idx="minor">
+            <a:schemeClr val="lt1"/>
+          </a:fontRef>
+        </p:style>
+        <p:txBody>
+          <a:bodyPr rtlCol="0" anchor="ctr"/>
+          <a:lstStyle/>
+          <a:p>
+            <a:pPr algn="ctr"/>
+          </a:p>
+        </p:txBody>
+      </p:sp>
+      <p:sp>
+        <p:nvSpPr>
+          <p:cNvPr id="23" name="hub_g_d22" descr="Editable shape; source id hub_g_d22"/>
+          <p:cNvSpPr/>
+          <p:nvPr/>
+        </p:nvSpPr>
+        <p:spPr>
+          <a:xfrm>
+            <a:off x="1476374" y="3635374"/>
+            <a:ext cx="103187" cy="103187"/>
+          </a:xfrm>
+          <a:prstGeom prst="ellipse">
+            <a:avLst/>
+          </a:prstGeom>
+          <a:solidFill>
+            <a:srgbClr val="FFFFFF"/>
+          </a:solidFill>
+          <a:ln>
+            <a:noFill/>
+          </a:ln>
+          <a:effectLst/>
+        </p:spPr>
+        <p:style>
+          <a:lnRef idx="1">
+            <a:schemeClr val="accent1"/>
+          </a:lnRef>
+          <a:fillRef idx="3">
+            <a:schemeClr val="accent1"/>
+          </a:fillRef>
+          <a:effectRef idx="0">
+            <a:schemeClr val="accent1"/>
+          </a:effectRef>
+          <a:fontRef idx="minor">
+            <a:schemeClr val="lt1"/>
+          </a:fontRef>
+        </p:style>
+        <p:txBody>
+          <a:bodyPr rtlCol="0" anchor="ctr"/>
+          <a:lstStyle/>
+          <a:p>
+            <a:pPr algn="ctr"/>
+          </a:p>
+        </p:txBody>
+      </p:sp>
+      <p:sp>
+        <p:nvSpPr>
+          <p:cNvPr id="24" name="hub_s" descr="Editable text; source id hub_s"/>
           <p:cNvSpPr txBox="1"/>
           <p:nvPr/>
         </p:nvSpPr>
         <p:spPr>
           <a:xfrm>
-            <a:off x="350502" y="3023945"/>
-            <a:ext cx="1800622" cy="274904"/>
+            <a:off x="380999" y="4587874"/>
+            <a:ext cx="1841499" cy="301624"/>
           </a:xfrm>
           <a:prstGeom prst="rect">
             <a:avLst/>
@@ -3899,7 +4511,7 @@
           <a:p>
             <a:pPr algn="ctr" fontAlgn="base">
               <a:lnSpc>
-                <a:spcPts val="2042"/>
+                <a:spcPts val="2015"/>
               </a:lnSpc>
               <a:spcBef>
                 <a:spcPts val="0"/>
@@ -3907,7 +4519,513 @@
               <a:spcAft>
                 <a:spcPts val="0"/>
               </a:spcAft>
-              <a:defRPr sz="1406" b="0" i="0" lang="zh-CN" dirty="0">
+              <a:defRPr sz="1374" b="0" i="0" lang="zh-CN" dirty="0">
+                <a:solidFill>
+                  <a:srgbClr val="0F4F58"/>
+                </a:solidFill>
+                <a:latin typeface="Noto Sans CJK SC"/>
+                <a:ea typeface="Noto Sans CJK SC"/>
+                <a:cs typeface="Noto Sans CJK SC"/>
+              </a:defRPr>
+            </a:pPr>
+            <a:r>
+              <a:rPr sz="1374" b="0" i="0" lang="zh-CN" dirty="0">
+                <a:solidFill>
+                  <a:srgbClr val="0F4F58"/>
+                </a:solidFill>
+                <a:latin typeface="Noto Sans CJK SC"/>
+                <a:ea typeface="Noto Sans CJK SC"/>
+                <a:cs typeface="Noto Sans CJK SC"/>
+              </a:rPr>
+              <a:t>目标相</a:t>
+            </a:r>
+          </a:p>
+        </p:txBody>
+      </p:sp>
+      <p:sp>
+        <p:nvSpPr>
+          <p:cNvPr id="25" name="e1" descr="Editable shape; source id e1"/>
+          <p:cNvSpPr/>
+          <p:nvPr/>
+        </p:nvSpPr>
+        <p:spPr>
+          <a:xfrm>
+            <a:off x="3397249" y="730249"/>
+            <a:ext cx="4270374" cy="1206499"/>
+          </a:xfrm>
+          <a:prstGeom prst="roundRect">
+            <a:avLst>
+              <a:gd name="adj" fmla="val 5921"/>
+            </a:avLst>
+          </a:prstGeom>
+          <a:solidFill>
+            <a:srgbClr val="FFFFFF"/>
+          </a:solidFill>
+          <a:ln w="11112">
+            <a:solidFill>
+              <a:srgbClr val="1F7F8C"/>
+            </a:solidFill>
+          </a:ln>
+          <a:effectLst/>
+        </p:spPr>
+        <p:style>
+          <a:lnRef idx="1">
+            <a:schemeClr val="accent1"/>
+          </a:lnRef>
+          <a:fillRef idx="3">
+            <a:schemeClr val="accent1"/>
+          </a:fillRef>
+          <a:effectRef idx="0">
+            <a:schemeClr val="accent1"/>
+          </a:effectRef>
+          <a:fontRef idx="minor">
+            <a:schemeClr val="lt1"/>
+          </a:fontRef>
+        </p:style>
+        <p:txBody>
+          <a:bodyPr rtlCol="0" anchor="ctr"/>
+          <a:lstStyle/>
+          <a:p>
+            <a:pPr algn="ctr"/>
+          </a:p>
+        </p:txBody>
+      </p:sp>
+      <p:sp>
+        <p:nvSpPr>
+          <p:cNvPr id="26" name="e1_a" descr="Editable shape; source id e1_a"/>
+          <p:cNvSpPr/>
+          <p:nvPr/>
+        </p:nvSpPr>
+        <p:spPr>
+          <a:xfrm>
+            <a:off x="3397249" y="730249"/>
+            <a:ext cx="4270374" cy="47624"/>
+          </a:xfrm>
+          <a:prstGeom prst="roundRect">
+            <a:avLst>
+              <a:gd name="adj" fmla="val 50000"/>
+            </a:avLst>
+          </a:prstGeom>
+          <a:solidFill>
+            <a:srgbClr val="1F7F8C"/>
+          </a:solidFill>
+          <a:ln>
+            <a:noFill/>
+          </a:ln>
+          <a:effectLst/>
+        </p:spPr>
+        <p:style>
+          <a:lnRef idx="1">
+            <a:schemeClr val="accent1"/>
+          </a:lnRef>
+          <a:fillRef idx="3">
+            <a:schemeClr val="accent1"/>
+          </a:fillRef>
+          <a:effectRef idx="0">
+            <a:schemeClr val="accent1"/>
+          </a:effectRef>
+          <a:fontRef idx="minor">
+            <a:schemeClr val="lt1"/>
+          </a:fontRef>
+        </p:style>
+        <p:txBody>
+          <a:bodyPr rtlCol="0" anchor="ctr"/>
+          <a:lstStyle/>
+          <a:p>
+            <a:pPr algn="ctr"/>
+          </a:p>
+        </p:txBody>
+      </p:sp>
+      <p:cxnSp>
+        <p:nvCxnSpPr>
+          <p:cNvPr id="27" name="e1_g_o_0" descr="Editable line; source id e1_g_o_0"/>
+          <p:cNvCxnSpPr/>
+          <p:nvPr/>
+        </p:nvCxnSpPr>
+        <p:spPr>
+          <a:xfrm>
+            <a:off x="3675062" y="952499"/>
+            <a:ext cx="111125" cy="71438"/>
+          </a:xfrm>
+          <a:prstGeom prst="line">
+            <a:avLst/>
+          </a:prstGeom>
+          <a:ln w="7937">
+            <a:solidFill>
+              <a:srgbClr val="1F2937"/>
+            </a:solidFill>
+          </a:ln>
+          <a:effectLst/>
+        </p:spPr>
+        <p:style>
+          <a:lnRef idx="2">
+            <a:schemeClr val="accent1"/>
+          </a:lnRef>
+          <a:fillRef idx="0">
+            <a:schemeClr val="accent1"/>
+          </a:fillRef>
+          <a:effectRef idx="0">
+            <a:schemeClr val="accent1"/>
+          </a:effectRef>
+          <a:fontRef idx="minor">
+            <a:schemeClr val="tx1"/>
+          </a:fontRef>
+        </p:style>
+      </p:cxnSp>
+      <p:cxnSp>
+        <p:nvCxnSpPr>
+          <p:cNvPr id="28" name="e1_g_o_1" descr="Editable line; source id e1_g_o_1"/>
+          <p:cNvCxnSpPr/>
+          <p:nvPr/>
+        </p:nvCxnSpPr>
+        <p:spPr>
+          <a:xfrm flipH="1">
+            <a:off x="3730624" y="1023937"/>
+            <a:ext cx="55563" cy="142875"/>
+          </a:xfrm>
+          <a:prstGeom prst="line">
+            <a:avLst/>
+          </a:prstGeom>
+          <a:ln w="7937">
+            <a:solidFill>
+              <a:srgbClr val="1F2937"/>
+            </a:solidFill>
+          </a:ln>
+          <a:effectLst/>
+        </p:spPr>
+        <p:style>
+          <a:lnRef idx="2">
+            <a:schemeClr val="accent1"/>
+          </a:lnRef>
+          <a:fillRef idx="0">
+            <a:schemeClr val="accent1"/>
+          </a:fillRef>
+          <a:effectRef idx="0">
+            <a:schemeClr val="accent1"/>
+          </a:effectRef>
+          <a:fontRef idx="minor">
+            <a:schemeClr val="tx1"/>
+          </a:fontRef>
+        </p:style>
+      </p:cxnSp>
+      <p:cxnSp>
+        <p:nvCxnSpPr>
+          <p:cNvPr id="29" name="e1_g_o_2" descr="Editable line; source id e1_g_o_2"/>
+          <p:cNvCxnSpPr/>
+          <p:nvPr/>
+        </p:nvCxnSpPr>
+        <p:spPr>
+          <a:xfrm flipH="1">
+            <a:off x="3619499" y="1166812"/>
+            <a:ext cx="111125" cy="0"/>
+          </a:xfrm>
+          <a:prstGeom prst="line">
+            <a:avLst/>
+          </a:prstGeom>
+          <a:ln w="7937">
+            <a:solidFill>
+              <a:srgbClr val="1F2937"/>
+            </a:solidFill>
+          </a:ln>
+          <a:effectLst/>
+        </p:spPr>
+        <p:style>
+          <a:lnRef idx="2">
+            <a:schemeClr val="accent1"/>
+          </a:lnRef>
+          <a:fillRef idx="0">
+            <a:schemeClr val="accent1"/>
+          </a:fillRef>
+          <a:effectRef idx="0">
+            <a:schemeClr val="accent1"/>
+          </a:effectRef>
+          <a:fontRef idx="minor">
+            <a:schemeClr val="tx1"/>
+          </a:fontRef>
+        </p:style>
+      </p:cxnSp>
+      <p:cxnSp>
+        <p:nvCxnSpPr>
+          <p:cNvPr id="30" name="e1_g_o_3" descr="Editable line; source id e1_g_o_3"/>
+          <p:cNvCxnSpPr/>
+          <p:nvPr/>
+        </p:nvCxnSpPr>
+        <p:spPr>
+          <a:xfrm flipH="1" flipV="1">
+            <a:off x="3563937" y="1023937"/>
+            <a:ext cx="55562" cy="142875"/>
+          </a:xfrm>
+          <a:prstGeom prst="line">
+            <a:avLst/>
+          </a:prstGeom>
+          <a:ln w="7937">
+            <a:solidFill>
+              <a:srgbClr val="1F2937"/>
+            </a:solidFill>
+          </a:ln>
+          <a:effectLst/>
+        </p:spPr>
+        <p:style>
+          <a:lnRef idx="2">
+            <a:schemeClr val="accent1"/>
+          </a:lnRef>
+          <a:fillRef idx="0">
+            <a:schemeClr val="accent1"/>
+          </a:fillRef>
+          <a:effectRef idx="0">
+            <a:schemeClr val="accent1"/>
+          </a:effectRef>
+          <a:fontRef idx="minor">
+            <a:schemeClr val="tx1"/>
+          </a:fontRef>
+        </p:style>
+      </p:cxnSp>
+      <p:cxnSp>
+        <p:nvCxnSpPr>
+          <p:cNvPr id="31" name="e1_g_o_4" descr="Editable line; source id e1_g_o_4"/>
+          <p:cNvCxnSpPr/>
+          <p:nvPr/>
+        </p:nvCxnSpPr>
+        <p:spPr>
+          <a:xfrm flipV="1">
+            <a:off x="3563937" y="952499"/>
+            <a:ext cx="111125" cy="71438"/>
+          </a:xfrm>
+          <a:prstGeom prst="line">
+            <a:avLst/>
+          </a:prstGeom>
+          <a:ln w="7937">
+            <a:solidFill>
+              <a:srgbClr val="1F2937"/>
+            </a:solidFill>
+          </a:ln>
+          <a:effectLst/>
+        </p:spPr>
+        <p:style>
+          <a:lnRef idx="2">
+            <a:schemeClr val="accent1"/>
+          </a:lnRef>
+          <a:fillRef idx="0">
+            <a:schemeClr val="accent1"/>
+          </a:fillRef>
+          <a:effectRef idx="0">
+            <a:schemeClr val="accent1"/>
+          </a:effectRef>
+          <a:fontRef idx="minor">
+            <a:schemeClr val="tx1"/>
+          </a:fontRef>
+        </p:style>
+      </p:cxnSp>
+      <p:cxnSp>
+        <p:nvCxnSpPr>
+          <p:cNvPr id="32" name="e1_g_a" descr="Editable line; source id e1_g_a"/>
+          <p:cNvCxnSpPr/>
+          <p:nvPr/>
+        </p:nvCxnSpPr>
+        <p:spPr>
+          <a:xfrm>
+            <a:off x="3675062" y="952499"/>
+            <a:ext cx="0" cy="214313"/>
+          </a:xfrm>
+          <a:prstGeom prst="line">
+            <a:avLst/>
+          </a:prstGeom>
+          <a:ln w="7937">
+            <a:solidFill>
+              <a:srgbClr val="1F2937"/>
+            </a:solidFill>
+          </a:ln>
+          <a:effectLst/>
+        </p:spPr>
+        <p:style>
+          <a:lnRef idx="2">
+            <a:schemeClr val="accent1"/>
+          </a:lnRef>
+          <a:fillRef idx="0">
+            <a:schemeClr val="accent1"/>
+          </a:fillRef>
+          <a:effectRef idx="0">
+            <a:schemeClr val="accent1"/>
+          </a:effectRef>
+          <a:fontRef idx="minor">
+            <a:schemeClr val="tx1"/>
+          </a:fontRef>
+        </p:style>
+      </p:cxnSp>
+      <p:cxnSp>
+        <p:nvCxnSpPr>
+          <p:cNvPr id="33" name="e1_g_b" descr="Editable line; source id e1_g_b"/>
+          <p:cNvCxnSpPr/>
+          <p:nvPr/>
+        </p:nvCxnSpPr>
+        <p:spPr>
+          <a:xfrm>
+            <a:off x="3563937" y="1023937"/>
+            <a:ext cx="222250" cy="0"/>
+          </a:xfrm>
+          <a:prstGeom prst="line">
+            <a:avLst/>
+          </a:prstGeom>
+          <a:ln w="7937">
+            <a:solidFill>
+              <a:srgbClr val="1F2937"/>
+            </a:solidFill>
+          </a:ln>
+          <a:effectLst/>
+        </p:spPr>
+        <p:style>
+          <a:lnRef idx="2">
+            <a:schemeClr val="accent1"/>
+          </a:lnRef>
+          <a:fillRef idx="0">
+            <a:schemeClr val="accent1"/>
+          </a:fillRef>
+          <a:effectRef idx="0">
+            <a:schemeClr val="accent1"/>
+          </a:effectRef>
+          <a:fontRef idx="minor">
+            <a:schemeClr val="tx1"/>
+          </a:fontRef>
+        </p:style>
+      </p:cxnSp>
+      <p:sp>
+        <p:nvSpPr>
+          <p:cNvPr id="34" name="e1_t" descr="Editable text; source id e1_t"/>
+          <p:cNvSpPr txBox="1"/>
+          <p:nvPr/>
+        </p:nvSpPr>
+        <p:spPr>
+          <a:xfrm>
+            <a:off x="3889374" y="920749"/>
+            <a:ext cx="3635374" cy="285749"/>
+          </a:xfrm>
+          <a:prstGeom prst="rect">
+            <a:avLst/>
+          </a:prstGeom>
+          <a:noFill/>
+          <a:effectLst/>
+        </p:spPr>
+        <p:txBody>
+          <a:bodyPr wrap="none" anchor="ctr" tIns="0" rIns="0" bIns="0" lIns="0" anchorCtr="0" vertOverflow="overflow">
+            <a:noAutofit/>
+          </a:bodyPr>
+          <a:lstStyle/>
+          <a:p>
+            <a:pPr algn="l" fontAlgn="base">
+              <a:lnSpc>
+                <a:spcPts val="2187"/>
+              </a:lnSpc>
+              <a:spcBef>
+                <a:spcPts val="0"/>
+              </a:spcBef>
+              <a:spcAft>
+                <a:spcPts val="0"/>
+              </a:spcAft>
+              <a:defRPr sz="1501" b="1" i="0" lang="zh-CN" dirty="0">
+                <a:solidFill>
+                  <a:srgbClr val="0F4F58"/>
+                </a:solidFill>
+                <a:latin typeface="Noto Sans CJK SC"/>
+                <a:ea typeface="Noto Sans CJK SC"/>
+                <a:cs typeface="Noto Sans CJK SC"/>
+              </a:defRPr>
+            </a:pPr>
+            <a:r>
+              <a:rPr sz="1501" b="1" i="0" lang="zh-CN" dirty="0">
+                <a:solidFill>
+                  <a:srgbClr val="0F4F58"/>
+                </a:solidFill>
+                <a:latin typeface="Noto Sans CJK SC"/>
+                <a:ea typeface="Noto Sans CJK SC"/>
+                <a:cs typeface="Noto Sans CJK SC"/>
+              </a:rPr>
+              <a:t>结构与多晶型</a:t>
+            </a:r>
+          </a:p>
+        </p:txBody>
+      </p:sp>
+      <p:sp>
+        <p:nvSpPr>
+          <p:cNvPr id="35" name="e1_s" descr="Editable shape; source id e1_s"/>
+          <p:cNvSpPr/>
+          <p:nvPr/>
+        </p:nvSpPr>
+        <p:spPr>
+          <a:xfrm>
+            <a:off x="3540124" y="1349374"/>
+            <a:ext cx="3984624" cy="444499"/>
+          </a:xfrm>
+          <a:prstGeom prst="roundRect">
+            <a:avLst>
+              <a:gd name="adj" fmla="val 10714"/>
+            </a:avLst>
+          </a:prstGeom>
+          <a:solidFill>
+            <a:srgbClr val="F7F9FB"/>
+          </a:solidFill>
+          <a:ln w="9524">
+            <a:solidFill>
+              <a:srgbClr val="CBD3DA"/>
+            </a:solidFill>
+          </a:ln>
+          <a:effectLst/>
+        </p:spPr>
+        <p:style>
+          <a:lnRef idx="1">
+            <a:schemeClr val="accent1"/>
+          </a:lnRef>
+          <a:fillRef idx="3">
+            <a:schemeClr val="accent1"/>
+          </a:fillRef>
+          <a:effectRef idx="0">
+            <a:schemeClr val="accent1"/>
+          </a:effectRef>
+          <a:fontRef idx="minor">
+            <a:schemeClr val="lt1"/>
+          </a:fontRef>
+        </p:style>
+        <p:txBody>
+          <a:bodyPr rtlCol="0" anchor="ctr"/>
+          <a:lstStyle/>
+          <a:p>
+            <a:pPr algn="ctr"/>
+          </a:p>
+        </p:txBody>
+      </p:sp>
+      <p:sp>
+        <p:nvSpPr>
+          <p:cNvPr id="36" name="e1_s_t" descr="Editable text; source id e1_s_t"/>
+          <p:cNvSpPr txBox="1"/>
+          <p:nvPr/>
+        </p:nvSpPr>
+        <p:spPr>
+          <a:xfrm>
+            <a:off x="3595687" y="1381124"/>
+            <a:ext cx="3873499" cy="380999"/>
+          </a:xfrm>
+          <a:prstGeom prst="rect">
+            <a:avLst/>
+          </a:prstGeom>
+          <a:noFill/>
+          <a:effectLst/>
+        </p:spPr>
+        <p:txBody>
+          <a:bodyPr wrap="none" anchor="ctr" tIns="0" rIns="0" bIns="0" lIns="0" anchorCtr="0" vertOverflow="overflow">
+            <a:noAutofit/>
+          </a:bodyPr>
+          <a:lstStyle/>
+          <a:p>
+            <a:pPr algn="ctr" fontAlgn="base">
+              <a:lnSpc>
+                <a:spcPts val="1734"/>
+              </a:lnSpc>
+              <a:spcBef>
+                <a:spcPts val="0"/>
+              </a:spcBef>
+              <a:spcAft>
+                <a:spcPts val="0"/>
+              </a:spcAft>
+              <a:defRPr sz="1187" b="0" i="0" lang="zh-CN" dirty="0">
                 <a:solidFill>
                   <a:srgbClr val="3F4854"/>
                 </a:solidFill>
@@ -3917,7 +5035,7 @@
               </a:defRPr>
             </a:pPr>
             <a:r>
-              <a:rPr sz="1406" b="0" i="0" lang="zh-CN" dirty="0">
+              <a:rPr sz="1187" b="0" i="0" lang="zh-CN" dirty="0">
                 <a:solidFill>
                   <a:srgbClr val="3F4854"/>
                 </a:solidFill>
@@ -3925,31 +5043,53 @@
                 <a:ea typeface="Noto Sans CJK SC"/>
                 <a:cs typeface="Noto Sans CJK SC"/>
               </a:rPr>
-              <a:t>目标相</a:t>
-            </a:r>
-          </a:p>
-        </p:txBody>
-      </p:sp>
-      <p:sp>
-        <p:nvSpPr>
-          <p:cNvPr id="10" name="e1" descr="Editable shape; source id e1"/>
+              <a:t>相变</a:t>
+            </a:r>
+            <a:r>
+              <a:rPr sz="1187" b="0" i="0" lang="zh-CN" dirty="0">
+                <a:solidFill>
+                  <a:srgbClr val="3F4854"/>
+                </a:solidFill>
+                <a:latin typeface="DejaVu Sans"/>
+                <a:ea typeface="DejaVu Sans"/>
+                <a:cs typeface="DejaVu Sans"/>
+              </a:rPr>
+              <a:t> · </a:t>
+            </a:r>
+            <a:r>
+              <a:rPr sz="1187" b="0" i="0" lang="zh-CN" dirty="0">
+                <a:solidFill>
+                  <a:srgbClr val="3F4854"/>
+                </a:solidFill>
+                <a:latin typeface="Noto Sans CJK SC"/>
+                <a:ea typeface="Noto Sans CJK SC"/>
+                <a:cs typeface="Noto Sans CJK SC"/>
+              </a:rPr>
+              <a:t>配位</a:t>
+            </a:r>
+          </a:p>
+        </p:txBody>
+      </p:sp>
+      <p:sp>
+        <p:nvSpPr>
+          <p:cNvPr id="37" name="e2" descr="Editable shape; source id e2"/>
           <p:cNvSpPr/>
           <p:nvPr/>
         </p:nvSpPr>
         <p:spPr>
           <a:xfrm>
-            <a:off x="3566881" y="962164"/>
-            <a:ext cx="3450047" cy="962164"/>
+            <a:off x="3397249" y="2635249"/>
+            <a:ext cx="4270374" cy="1206499"/>
           </a:xfrm>
           <a:prstGeom prst="roundRect">
             <a:avLst>
-              <a:gd name="adj" fmla="val 7142"/>
+              <a:gd name="adj" fmla="val 5921"/>
             </a:avLst>
           </a:prstGeom>
           <a:solidFill>
             <a:srgbClr val="FFFFFF"/>
           </a:solidFill>
-          <a:ln w="10308">
+          <a:ln w="11112">
             <a:solidFill>
               <a:srgbClr val="1F7F8C"/>
             </a:solidFill>
@@ -3980,14 +5120,14 @@
       </p:sp>
       <p:sp>
         <p:nvSpPr>
-          <p:cNvPr id="11" name="e1_s" descr="Editable shape; source id e1_s"/>
+          <p:cNvPr id="38" name="e2_a" descr="Editable shape; source id e2_a"/>
           <p:cNvSpPr/>
           <p:nvPr/>
         </p:nvSpPr>
         <p:spPr>
           <a:xfrm>
-            <a:off x="3566881" y="962164"/>
-            <a:ext cx="3450047" cy="54980"/>
+            <a:off x="3397249" y="2635249"/>
+            <a:ext cx="4270374" cy="47624"/>
           </a:xfrm>
           <a:prstGeom prst="roundRect">
             <a:avLst>
@@ -4024,41 +5164,160 @@
           </a:p>
         </p:txBody>
       </p:sp>
-      <p:pic>
-        <p:nvPicPr>
-          <p:cNvPr id="12" name="e1_i" descr="exact crop of the generated raster (line motif)"/>
-          <p:cNvPicPr>
-            <a:picLocks noChangeAspect="1"/>
-          </p:cNvPicPr>
-          <p:nvPr/>
-        </p:nvPicPr>
-        <p:blipFill>
-          <a:blip r:embed="rId2"/>
-          <a:stretch>
-            <a:fillRect/>
-          </a:stretch>
-        </p:blipFill>
-        <p:spPr>
-          <a:xfrm>
-            <a:off x="3728387" y="1154597"/>
-            <a:ext cx="226795" cy="302394"/>
-          </a:xfrm>
-          <a:prstGeom prst="rect">
-            <a:avLst/>
-          </a:prstGeom>
-          <a:effectLst/>
-        </p:spPr>
-      </p:pic>
-      <p:sp>
-        <p:nvSpPr>
-          <p:cNvPr id="13" name="e1_t" descr="Editable text; source id e1_t"/>
+      <p:cxnSp>
+        <p:nvCxnSpPr>
+          <p:cNvPr id="39" name="e2_g_b_0" descr="Editable line; source id e2_g_b_0"/>
+          <p:cNvCxnSpPr/>
+          <p:nvPr/>
+        </p:nvCxnSpPr>
+        <p:spPr>
+          <a:xfrm>
+            <a:off x="3595687" y="2913062"/>
+            <a:ext cx="31750" cy="150812"/>
+          </a:xfrm>
+          <a:prstGeom prst="line">
+            <a:avLst/>
+          </a:prstGeom>
+          <a:ln w="7937">
+            <a:solidFill>
+              <a:srgbClr val="1F2937"/>
+            </a:solidFill>
+          </a:ln>
+          <a:effectLst/>
+        </p:spPr>
+        <p:style>
+          <a:lnRef idx="2">
+            <a:schemeClr val="accent1"/>
+          </a:lnRef>
+          <a:fillRef idx="0">
+            <a:schemeClr val="accent1"/>
+          </a:fillRef>
+          <a:effectRef idx="0">
+            <a:schemeClr val="accent1"/>
+          </a:effectRef>
+          <a:fontRef idx="minor">
+            <a:schemeClr val="tx1"/>
+          </a:fontRef>
+        </p:style>
+      </p:cxnSp>
+      <p:cxnSp>
+        <p:nvCxnSpPr>
+          <p:cNvPr id="40" name="e2_g_b_1" descr="Editable line; source id e2_g_b_1"/>
+          <p:cNvCxnSpPr/>
+          <p:nvPr/>
+        </p:nvCxnSpPr>
+        <p:spPr>
+          <a:xfrm>
+            <a:off x="3627437" y="3063874"/>
+            <a:ext cx="95250" cy="0"/>
+          </a:xfrm>
+          <a:prstGeom prst="line">
+            <a:avLst/>
+          </a:prstGeom>
+          <a:ln w="7937">
+            <a:solidFill>
+              <a:srgbClr val="1F2937"/>
+            </a:solidFill>
+          </a:ln>
+          <a:effectLst/>
+        </p:spPr>
+        <p:style>
+          <a:lnRef idx="2">
+            <a:schemeClr val="accent1"/>
+          </a:lnRef>
+          <a:fillRef idx="0">
+            <a:schemeClr val="accent1"/>
+          </a:fillRef>
+          <a:effectRef idx="0">
+            <a:schemeClr val="accent1"/>
+          </a:effectRef>
+          <a:fontRef idx="minor">
+            <a:schemeClr val="tx1"/>
+          </a:fontRef>
+        </p:style>
+      </p:cxnSp>
+      <p:cxnSp>
+        <p:nvCxnSpPr>
+          <p:cNvPr id="41" name="e2_g_b_2" descr="Editable line; source id e2_g_b_2"/>
+          <p:cNvCxnSpPr/>
+          <p:nvPr/>
+        </p:nvCxnSpPr>
+        <p:spPr>
+          <a:xfrm flipV="1">
+            <a:off x="3722687" y="2913062"/>
+            <a:ext cx="31750" cy="150812"/>
+          </a:xfrm>
+          <a:prstGeom prst="line">
+            <a:avLst/>
+          </a:prstGeom>
+          <a:ln w="7937">
+            <a:solidFill>
+              <a:srgbClr val="1F2937"/>
+            </a:solidFill>
+          </a:ln>
+          <a:effectLst/>
+        </p:spPr>
+        <p:style>
+          <a:lnRef idx="2">
+            <a:schemeClr val="accent1"/>
+          </a:lnRef>
+          <a:fillRef idx="0">
+            <a:schemeClr val="accent1"/>
+          </a:fillRef>
+          <a:effectRef idx="0">
+            <a:schemeClr val="accent1"/>
+          </a:effectRef>
+          <a:fontRef idx="minor">
+            <a:schemeClr val="tx1"/>
+          </a:fontRef>
+        </p:style>
+      </p:cxnSp>
+      <p:cxnSp>
+        <p:nvCxnSpPr>
+          <p:cNvPr id="42" name="e2_g_r" descr="Editable line; source id e2_g_r"/>
+          <p:cNvCxnSpPr/>
+          <p:nvPr/>
+        </p:nvCxnSpPr>
+        <p:spPr>
+          <a:xfrm>
+            <a:off x="3579812" y="2913062"/>
+            <a:ext cx="190500" cy="0"/>
+          </a:xfrm>
+          <a:prstGeom prst="line">
+            <a:avLst/>
+          </a:prstGeom>
+          <a:ln w="7937">
+            <a:solidFill>
+              <a:srgbClr val="1F2937"/>
+            </a:solidFill>
+          </a:ln>
+          <a:effectLst/>
+        </p:spPr>
+        <p:style>
+          <a:lnRef idx="2">
+            <a:schemeClr val="accent1"/>
+          </a:lnRef>
+          <a:fillRef idx="0">
+            <a:schemeClr val="accent1"/>
+          </a:fillRef>
+          <a:effectRef idx="0">
+            <a:schemeClr val="accent1"/>
+          </a:effectRef>
+          <a:fontRef idx="minor">
+            <a:schemeClr val="tx1"/>
+          </a:fontRef>
+        </p:style>
+      </p:cxnSp>
+      <p:sp>
+        <p:nvSpPr>
+          <p:cNvPr id="43" name="e2_t" descr="Editable text; source id e2_t"/>
           <p:cNvSpPr txBox="1"/>
           <p:nvPr/>
         </p:nvSpPr>
         <p:spPr>
           <a:xfrm>
-            <a:off x="4075454" y="1168342"/>
-            <a:ext cx="2817767" cy="274904"/>
+            <a:off x="3889374" y="2825749"/>
+            <a:ext cx="3635374" cy="285749"/>
           </a:xfrm>
           <a:prstGeom prst="rect">
             <a:avLst/>
@@ -4074,7 +5333,7 @@
           <a:p>
             <a:pPr algn="l" fontAlgn="base">
               <a:lnSpc>
-                <a:spcPts val="2137"/>
+                <a:spcPts val="2187"/>
               </a:lnSpc>
               <a:spcBef>
                 <a:spcPts val="0"/>
@@ -4082,7 +5341,7 @@
               <a:spcAft>
                 <a:spcPts val="0"/>
               </a:spcAft>
-              <a:defRPr sz="1461" b="1" i="0" lang="zh-CN" dirty="0">
+              <a:defRPr sz="1501" b="1" i="0" lang="zh-CN" dirty="0">
                 <a:solidFill>
                   <a:srgbClr val="0F4F58"/>
                 </a:solidFill>
@@ -4092,7 +5351,7 @@
               </a:defRPr>
             </a:pPr>
             <a:r>
-              <a:rPr sz="1461" b="1" i="0" lang="zh-CN" dirty="0">
+              <a:rPr sz="1501" b="1" i="0" lang="zh-CN" dirty="0">
                 <a:solidFill>
                   <a:srgbClr val="0F4F58"/>
                 </a:solidFill>
@@ -4100,21 +5359,69 @@
                 <a:ea typeface="Noto Sans CJK SC"/>
                 <a:cs typeface="Noto Sans CJK SC"/>
               </a:rPr>
-              <a:t>结构与多晶型</a:t>
-            </a:r>
-          </a:p>
-        </p:txBody>
-      </p:sp>
-      <p:sp>
-        <p:nvSpPr>
-          <p:cNvPr id="14" name="e1_k0" descr="Editable text; source id e1_k0"/>
+              <a:t>合成路线</a:t>
+            </a:r>
+          </a:p>
+        </p:txBody>
+      </p:sp>
+      <p:sp>
+        <p:nvSpPr>
+          <p:cNvPr id="44" name="e2_s" descr="Editable shape; source id e2_s"/>
+          <p:cNvSpPr/>
+          <p:nvPr/>
+        </p:nvSpPr>
+        <p:spPr>
+          <a:xfrm>
+            <a:off x="3540124" y="3254374"/>
+            <a:ext cx="3984624" cy="444499"/>
+          </a:xfrm>
+          <a:prstGeom prst="roundRect">
+            <a:avLst>
+              <a:gd name="adj" fmla="val 10714"/>
+            </a:avLst>
+          </a:prstGeom>
+          <a:solidFill>
+            <a:srgbClr val="F7F9FB"/>
+          </a:solidFill>
+          <a:ln w="9524">
+            <a:solidFill>
+              <a:srgbClr val="CBD3DA"/>
+            </a:solidFill>
+          </a:ln>
+          <a:effectLst/>
+        </p:spPr>
+        <p:style>
+          <a:lnRef idx="1">
+            <a:schemeClr val="accent1"/>
+          </a:lnRef>
+          <a:fillRef idx="3">
+            <a:schemeClr val="accent1"/>
+          </a:fillRef>
+          <a:effectRef idx="0">
+            <a:schemeClr val="accent1"/>
+          </a:effectRef>
+          <a:fontRef idx="minor">
+            <a:schemeClr val="lt1"/>
+          </a:fontRef>
+        </p:style>
+        <p:txBody>
+          <a:bodyPr rtlCol="0" anchor="ctr"/>
+          <a:lstStyle/>
+          <a:p>
+            <a:pPr algn="ctr"/>
+          </a:p>
+        </p:txBody>
+      </p:sp>
+      <p:sp>
+        <p:nvSpPr>
+          <p:cNvPr id="45" name="e2_s_t" descr="Editable text; source id e2_s_t"/>
           <p:cNvSpPr txBox="1"/>
           <p:nvPr/>
         </p:nvSpPr>
         <p:spPr>
           <a:xfrm>
-            <a:off x="3690588" y="1498227"/>
-            <a:ext cx="3202633" cy="219923"/>
+            <a:off x="3595687" y="3286124"/>
+            <a:ext cx="3873499" cy="380999"/>
           </a:xfrm>
           <a:prstGeom prst="rect">
             <a:avLst/>
@@ -4128,9 +5435,9 @@
           </a:bodyPr>
           <a:lstStyle/>
           <a:p>
-            <a:pPr algn="l" fontAlgn="base">
+            <a:pPr algn="ctr" fontAlgn="base">
               <a:lnSpc>
-                <a:spcPts val="1664"/>
+                <a:spcPts val="1734"/>
               </a:lnSpc>
               <a:spcBef>
                 <a:spcPts val="0"/>
@@ -4138,7 +5445,7 @@
               <a:spcAft>
                 <a:spcPts val="0"/>
               </a:spcAft>
-              <a:defRPr sz="1136" b="0" i="0" lang="zh-CN" dirty="0">
+              <a:defRPr sz="1187" b="0" i="0" lang="zh-CN" dirty="0">
                 <a:solidFill>
                   <a:srgbClr val="3F4854"/>
                 </a:solidFill>
@@ -4148,7 +5455,7 @@
               </a:defRPr>
             </a:pPr>
             <a:r>
-              <a:rPr sz="1136" b="0" i="0" lang="zh-CN" dirty="0">
+              <a:rPr sz="1187" b="0" i="0" lang="zh-CN" dirty="0">
                 <a:solidFill>
                   <a:srgbClr val="3F4854"/>
                 </a:solidFill>
@@ -4156,10 +5463,10 @@
                 <a:ea typeface="Noto Sans CJK SC"/>
                 <a:cs typeface="Noto Sans CJK SC"/>
               </a:rPr>
-              <a:t>相变</a:t>
-            </a:r>
-            <a:r>
-              <a:rPr sz="1136" b="0" i="0" lang="zh-CN" dirty="0">
+              <a:t>固相</a:t>
+            </a:r>
+            <a:r>
+              <a:rPr sz="1187" b="0" i="0" lang="zh-CN" dirty="0">
                 <a:solidFill>
                   <a:srgbClr val="3F4854"/>
                 </a:solidFill>
@@ -4170,7 +5477,7 @@
               <a:t> · </a:t>
             </a:r>
             <a:r>
-              <a:rPr sz="1136" b="0" i="0" lang="zh-CN" dirty="0">
+              <a:rPr sz="1187" b="0" i="0" lang="zh-CN" dirty="0">
                 <a:solidFill>
                   <a:srgbClr val="3F4854"/>
                 </a:solidFill>
@@ -4178,31 +5485,53 @@
                 <a:ea typeface="Noto Sans CJK SC"/>
                 <a:cs typeface="Noto Sans CJK SC"/>
               </a:rPr>
-              <a:t>配位</a:t>
-            </a:r>
-          </a:p>
-        </p:txBody>
-      </p:sp>
-      <p:sp>
-        <p:nvSpPr>
-          <p:cNvPr id="15" name="e2" descr="Editable shape; source id e2"/>
+              <a:t>溶胶</a:t>
+            </a:r>
+            <a:r>
+              <a:rPr sz="1187" b="0" i="0" lang="zh-CN" dirty="0">
+                <a:solidFill>
+                  <a:srgbClr val="3F4854"/>
+                </a:solidFill>
+                <a:latin typeface="DejaVu Sans"/>
+                <a:ea typeface="DejaVu Sans"/>
+                <a:cs typeface="DejaVu Sans"/>
+              </a:rPr>
+              <a:t>—</a:t>
+            </a:r>
+            <a:r>
+              <a:rPr sz="1187" b="0" i="0" lang="zh-CN" dirty="0">
+                <a:solidFill>
+                  <a:srgbClr val="3F4854"/>
+                </a:solidFill>
+                <a:latin typeface="Noto Sans CJK SC"/>
+                <a:ea typeface="Noto Sans CJK SC"/>
+                <a:cs typeface="Noto Sans CJK SC"/>
+              </a:rPr>
+              <a:t>凝胶</a:t>
+            </a:r>
+          </a:p>
+        </p:txBody>
+      </p:sp>
+      <p:sp>
+        <p:nvSpPr>
+          <p:cNvPr id="46" name="e3" descr="Editable shape; source id e3"/>
           <p:cNvSpPr/>
           <p:nvPr/>
         </p:nvSpPr>
         <p:spPr>
           <a:xfrm>
-            <a:off x="3566881" y="2027418"/>
-            <a:ext cx="3450047" cy="962164"/>
+            <a:off x="3397249" y="4540249"/>
+            <a:ext cx="4270374" cy="1206499"/>
           </a:xfrm>
           <a:prstGeom prst="roundRect">
             <a:avLst>
-              <a:gd name="adj" fmla="val 7142"/>
+              <a:gd name="adj" fmla="val 5921"/>
             </a:avLst>
           </a:prstGeom>
           <a:solidFill>
             <a:srgbClr val="FFFFFF"/>
           </a:solidFill>
-          <a:ln w="10308">
+          <a:ln w="11112">
             <a:solidFill>
               <a:srgbClr val="1F7F8C"/>
             </a:solidFill>
@@ -4233,14 +5562,14 @@
       </p:sp>
       <p:sp>
         <p:nvSpPr>
-          <p:cNvPr id="16" name="e2_s" descr="Editable shape; source id e2_s"/>
+          <p:cNvPr id="47" name="e3_a" descr="Editable shape; source id e3_a"/>
           <p:cNvSpPr/>
           <p:nvPr/>
         </p:nvSpPr>
         <p:spPr>
           <a:xfrm>
-            <a:off x="3566881" y="2027418"/>
-            <a:ext cx="3450047" cy="54980"/>
+            <a:off x="3397249" y="4540249"/>
+            <a:ext cx="4270374" cy="47624"/>
           </a:xfrm>
           <a:prstGeom prst="roundRect">
             <a:avLst>
@@ -4277,41 +5606,214 @@
           </a:p>
         </p:txBody>
       </p:sp>
-      <p:pic>
-        <p:nvPicPr>
-          <p:cNvPr id="17" name="e2_i" descr="exact crop of the generated raster (line motif)"/>
-          <p:cNvPicPr>
-            <a:picLocks noChangeAspect="1"/>
-          </p:cNvPicPr>
-          <p:nvPr/>
-        </p:nvPicPr>
-        <p:blipFill>
-          <a:blip r:embed="rId3"/>
-          <a:stretch>
-            <a:fillRect/>
-          </a:stretch>
-        </p:blipFill>
-        <p:spPr>
-          <a:xfrm>
-            <a:off x="3690588" y="2236650"/>
-            <a:ext cx="302394" cy="268795"/>
-          </a:xfrm>
-          <a:prstGeom prst="rect">
-            <a:avLst/>
-          </a:prstGeom>
-          <a:effectLst/>
-        </p:spPr>
-      </p:pic>
-      <p:sp>
-        <p:nvSpPr>
-          <p:cNvPr id="18" name="e2_t" descr="Editable text; source id e2_t"/>
+      <p:sp>
+        <p:nvSpPr>
+          <p:cNvPr id="48" name="e3_g_t" descr="Editable shape; source id e3_g_t"/>
+          <p:cNvSpPr/>
+          <p:nvPr/>
+        </p:nvSpPr>
+        <p:spPr>
+          <a:xfrm>
+            <a:off x="3651249" y="4762499"/>
+            <a:ext cx="55562" cy="158749"/>
+          </a:xfrm>
+          <a:prstGeom prst="roundRect">
+            <a:avLst>
+              <a:gd name="adj" fmla="val 48571"/>
+            </a:avLst>
+          </a:prstGeom>
+          <a:noFill/>
+          <a:ln w="7937">
+            <a:solidFill>
+              <a:srgbClr val="1F2937"/>
+            </a:solidFill>
+          </a:ln>
+          <a:effectLst/>
+        </p:spPr>
+        <p:style>
+          <a:lnRef idx="1">
+            <a:schemeClr val="accent1"/>
+          </a:lnRef>
+          <a:fillRef idx="3">
+            <a:schemeClr val="accent1"/>
+          </a:fillRef>
+          <a:effectRef idx="0">
+            <a:schemeClr val="accent1"/>
+          </a:effectRef>
+          <a:fontRef idx="minor">
+            <a:schemeClr val="lt1"/>
+          </a:fontRef>
+        </p:style>
+        <p:txBody>
+          <a:bodyPr rtlCol="0" anchor="ctr"/>
+          <a:lstStyle/>
+          <a:p>
+            <a:pPr algn="ctr"/>
+          </a:p>
+        </p:txBody>
+      </p:sp>
+      <p:sp>
+        <p:nvSpPr>
+          <p:cNvPr id="49" name="e3_g_b" descr="Editable shape; source id e3_g_b"/>
+          <p:cNvSpPr/>
+          <p:nvPr/>
+        </p:nvSpPr>
+        <p:spPr>
+          <a:xfrm>
+            <a:off x="3635374" y="4913312"/>
+            <a:ext cx="87312" cy="87312"/>
+          </a:xfrm>
+          <a:prstGeom prst="ellipse">
+            <a:avLst/>
+          </a:prstGeom>
+          <a:noFill/>
+          <a:ln w="7937">
+            <a:solidFill>
+              <a:srgbClr val="1F2937"/>
+            </a:solidFill>
+          </a:ln>
+          <a:effectLst/>
+        </p:spPr>
+        <p:style>
+          <a:lnRef idx="1">
+            <a:schemeClr val="accent1"/>
+          </a:lnRef>
+          <a:fillRef idx="3">
+            <a:schemeClr val="accent1"/>
+          </a:fillRef>
+          <a:effectRef idx="0">
+            <a:schemeClr val="accent1"/>
+          </a:effectRef>
+          <a:fontRef idx="minor">
+            <a:schemeClr val="lt1"/>
+          </a:fontRef>
+        </p:style>
+        <p:txBody>
+          <a:bodyPr rtlCol="0" anchor="ctr"/>
+          <a:lstStyle/>
+          <a:p>
+            <a:pPr algn="ctr"/>
+          </a:p>
+        </p:txBody>
+      </p:sp>
+      <p:cxnSp>
+        <p:nvCxnSpPr>
+          <p:cNvPr id="50" name="e3_g_m0" descr="Editable line; source id e3_g_m0"/>
+          <p:cNvCxnSpPr/>
+          <p:nvPr/>
+        </p:nvCxnSpPr>
+        <p:spPr>
+          <a:xfrm>
+            <a:off x="3706812" y="4802187"/>
+            <a:ext cx="31750" cy="0"/>
+          </a:xfrm>
+          <a:prstGeom prst="line">
+            <a:avLst/>
+          </a:prstGeom>
+          <a:ln w="7937">
+            <a:solidFill>
+              <a:srgbClr val="1F2937"/>
+            </a:solidFill>
+          </a:ln>
+          <a:effectLst/>
+        </p:spPr>
+        <p:style>
+          <a:lnRef idx="2">
+            <a:schemeClr val="accent1"/>
+          </a:lnRef>
+          <a:fillRef idx="0">
+            <a:schemeClr val="accent1"/>
+          </a:fillRef>
+          <a:effectRef idx="0">
+            <a:schemeClr val="accent1"/>
+          </a:effectRef>
+          <a:fontRef idx="minor">
+            <a:schemeClr val="tx1"/>
+          </a:fontRef>
+        </p:style>
+      </p:cxnSp>
+      <p:cxnSp>
+        <p:nvCxnSpPr>
+          <p:cNvPr id="51" name="e3_g_m1" descr="Editable line; source id e3_g_m1"/>
+          <p:cNvCxnSpPr/>
+          <p:nvPr/>
+        </p:nvCxnSpPr>
+        <p:spPr>
+          <a:xfrm>
+            <a:off x="3706812" y="4833937"/>
+            <a:ext cx="31750" cy="0"/>
+          </a:xfrm>
+          <a:prstGeom prst="line">
+            <a:avLst/>
+          </a:prstGeom>
+          <a:ln w="7937">
+            <a:solidFill>
+              <a:srgbClr val="1F2937"/>
+            </a:solidFill>
+          </a:ln>
+          <a:effectLst/>
+        </p:spPr>
+        <p:style>
+          <a:lnRef idx="2">
+            <a:schemeClr val="accent1"/>
+          </a:lnRef>
+          <a:fillRef idx="0">
+            <a:schemeClr val="accent1"/>
+          </a:fillRef>
+          <a:effectRef idx="0">
+            <a:schemeClr val="accent1"/>
+          </a:effectRef>
+          <a:fontRef idx="minor">
+            <a:schemeClr val="tx1"/>
+          </a:fontRef>
+        </p:style>
+      </p:cxnSp>
+      <p:cxnSp>
+        <p:nvCxnSpPr>
+          <p:cNvPr id="52" name="e3_g_m2" descr="Editable line; source id e3_g_m2"/>
+          <p:cNvCxnSpPr/>
+          <p:nvPr/>
+        </p:nvCxnSpPr>
+        <p:spPr>
+          <a:xfrm>
+            <a:off x="3706812" y="4865687"/>
+            <a:ext cx="31750" cy="0"/>
+          </a:xfrm>
+          <a:prstGeom prst="line">
+            <a:avLst/>
+          </a:prstGeom>
+          <a:ln w="7937">
+            <a:solidFill>
+              <a:srgbClr val="1F2937"/>
+            </a:solidFill>
+          </a:ln>
+          <a:effectLst/>
+        </p:spPr>
+        <p:style>
+          <a:lnRef idx="2">
+            <a:schemeClr val="accent1"/>
+          </a:lnRef>
+          <a:fillRef idx="0">
+            <a:schemeClr val="accent1"/>
+          </a:fillRef>
+          <a:effectRef idx="0">
+            <a:schemeClr val="accent1"/>
+          </a:effectRef>
+          <a:fontRef idx="minor">
+            <a:schemeClr val="tx1"/>
+          </a:fontRef>
+        </p:style>
+      </p:cxnSp>
+      <p:sp>
+        <p:nvSpPr>
+          <p:cNvPr id="53" name="e3_t" descr="Editable text; source id e3_t"/>
           <p:cNvSpPr txBox="1"/>
           <p:nvPr/>
         </p:nvSpPr>
         <p:spPr>
           <a:xfrm>
-            <a:off x="4075454" y="2233596"/>
-            <a:ext cx="2817767" cy="274904"/>
+            <a:off x="3889374" y="4730749"/>
+            <a:ext cx="3635374" cy="285749"/>
           </a:xfrm>
           <a:prstGeom prst="rect">
             <a:avLst/>
@@ -4327,7 +5829,7 @@
           <a:p>
             <a:pPr algn="l" fontAlgn="base">
               <a:lnSpc>
-                <a:spcPts val="2137"/>
+                <a:spcPts val="2187"/>
               </a:lnSpc>
               <a:spcBef>
                 <a:spcPts val="0"/>
@@ -4335,7 +5837,7 @@
               <a:spcAft>
                 <a:spcPts val="0"/>
               </a:spcAft>
-              <a:defRPr sz="1461" b="1" i="0" lang="zh-CN" dirty="0">
+              <a:defRPr sz="1501" b="1" i="0" lang="zh-CN" dirty="0">
                 <a:solidFill>
                   <a:srgbClr val="0F4F58"/>
                 </a:solidFill>
@@ -4345,7 +5847,7 @@
               </a:defRPr>
             </a:pPr>
             <a:r>
-              <a:rPr sz="1461" b="1" i="0" lang="zh-CN" dirty="0">
+              <a:rPr sz="1501" b="1" i="0" lang="zh-CN" dirty="0">
                 <a:solidFill>
                   <a:srgbClr val="0F4F58"/>
                 </a:solidFill>
@@ -4353,21 +5855,69 @@
                 <a:ea typeface="Noto Sans CJK SC"/>
                 <a:cs typeface="Noto Sans CJK SC"/>
               </a:rPr>
-              <a:t>合成路线</a:t>
-            </a:r>
-          </a:p>
-        </p:txBody>
-      </p:sp>
-      <p:sp>
-        <p:nvSpPr>
-          <p:cNvPr id="19" name="e2_k0" descr="Editable text; source id e2_k0"/>
+              <a:t>组成与热处理</a:t>
+            </a:r>
+          </a:p>
+        </p:txBody>
+      </p:sp>
+      <p:sp>
+        <p:nvSpPr>
+          <p:cNvPr id="54" name="e3_s" descr="Editable shape; source id e3_s"/>
+          <p:cNvSpPr/>
+          <p:nvPr/>
+        </p:nvSpPr>
+        <p:spPr>
+          <a:xfrm>
+            <a:off x="3540124" y="5159374"/>
+            <a:ext cx="3984624" cy="444499"/>
+          </a:xfrm>
+          <a:prstGeom prst="roundRect">
+            <a:avLst>
+              <a:gd name="adj" fmla="val 10714"/>
+            </a:avLst>
+          </a:prstGeom>
+          <a:solidFill>
+            <a:srgbClr val="F7F9FB"/>
+          </a:solidFill>
+          <a:ln w="9524">
+            <a:solidFill>
+              <a:srgbClr val="CBD3DA"/>
+            </a:solidFill>
+          </a:ln>
+          <a:effectLst/>
+        </p:spPr>
+        <p:style>
+          <a:lnRef idx="1">
+            <a:schemeClr val="accent1"/>
+          </a:lnRef>
+          <a:fillRef idx="3">
+            <a:schemeClr val="accent1"/>
+          </a:fillRef>
+          <a:effectRef idx="0">
+            <a:schemeClr val="accent1"/>
+          </a:effectRef>
+          <a:fontRef idx="minor">
+            <a:schemeClr val="lt1"/>
+          </a:fontRef>
+        </p:style>
+        <p:txBody>
+          <a:bodyPr rtlCol="0" anchor="ctr"/>
+          <a:lstStyle/>
+          <a:p>
+            <a:pPr algn="ctr"/>
+          </a:p>
+        </p:txBody>
+      </p:sp>
+      <p:sp>
+        <p:nvSpPr>
+          <p:cNvPr id="55" name="e3_s_t" descr="Editable text; source id e3_s_t"/>
           <p:cNvSpPr txBox="1"/>
           <p:nvPr/>
         </p:nvSpPr>
         <p:spPr>
           <a:xfrm>
-            <a:off x="3690588" y="2563481"/>
-            <a:ext cx="3202633" cy="219923"/>
+            <a:off x="3595687" y="5191124"/>
+            <a:ext cx="3873499" cy="380999"/>
           </a:xfrm>
           <a:prstGeom prst="rect">
             <a:avLst/>
@@ -4381,9 +5931,9 @@
           </a:bodyPr>
           <a:lstStyle/>
           <a:p>
-            <a:pPr algn="l" fontAlgn="base">
+            <a:pPr algn="ctr" fontAlgn="base">
               <a:lnSpc>
-                <a:spcPts val="1664"/>
+                <a:spcPts val="1734"/>
               </a:lnSpc>
               <a:spcBef>
                 <a:spcPts val="0"/>
@@ -4391,7 +5941,584 @@
               <a:spcAft>
                 <a:spcPts val="0"/>
               </a:spcAft>
-              <a:defRPr sz="1136" b="0" i="0" lang="zh-CN" dirty="0">
+              <a:defRPr sz="1187" b="0" i="0" lang="zh-CN" dirty="0">
+                <a:solidFill>
+                  <a:srgbClr val="3F4854"/>
+                </a:solidFill>
+                <a:latin typeface="DejaVu Sans"/>
+                <a:ea typeface="DejaVu Sans"/>
+                <a:cs typeface="DejaVu Sans"/>
+              </a:defRPr>
+            </a:pPr>
+            <a:r>
+              <a:rPr sz="1187" b="0" i="0" lang="zh-CN" dirty="0">
+                <a:solidFill>
+                  <a:srgbClr val="3F4854"/>
+                </a:solidFill>
+                <a:latin typeface="DejaVu Sans"/>
+                <a:ea typeface="DejaVu Sans"/>
+                <a:cs typeface="DejaVu Sans"/>
+              </a:rPr>
+              <a:t>Ba/Sr · Zn </a:t>
+            </a:r>
+            <a:r>
+              <a:rPr sz="1187" b="0" i="0" lang="zh-CN" dirty="0">
+                <a:solidFill>
+                  <a:srgbClr val="3F4854"/>
+                </a:solidFill>
+                <a:latin typeface="Noto Sans CJK SC"/>
+                <a:ea typeface="Noto Sans CJK SC"/>
+                <a:cs typeface="Noto Sans CJK SC"/>
+              </a:rPr>
+              <a:t>位</a:t>
+            </a:r>
+          </a:p>
+        </p:txBody>
+      </p:sp>
+      <p:sp>
+        <p:nvSpPr>
+          <p:cNvPr id="56" name="e4" descr="Editable shape; source id e4"/>
+          <p:cNvSpPr/>
+          <p:nvPr/>
+        </p:nvSpPr>
+        <p:spPr>
+          <a:xfrm>
+            <a:off x="3397249" y="6445249"/>
+            <a:ext cx="4270374" cy="1206499"/>
+          </a:xfrm>
+          <a:prstGeom prst="roundRect">
+            <a:avLst>
+              <a:gd name="adj" fmla="val 5921"/>
+            </a:avLst>
+          </a:prstGeom>
+          <a:solidFill>
+            <a:srgbClr val="FFFFFF"/>
+          </a:solidFill>
+          <a:ln w="11112">
+            <a:solidFill>
+              <a:srgbClr val="1F7F8C"/>
+            </a:solidFill>
+          </a:ln>
+          <a:effectLst/>
+        </p:spPr>
+        <p:style>
+          <a:lnRef idx="1">
+            <a:schemeClr val="accent1"/>
+          </a:lnRef>
+          <a:fillRef idx="3">
+            <a:schemeClr val="accent1"/>
+          </a:fillRef>
+          <a:effectRef idx="0">
+            <a:schemeClr val="accent1"/>
+          </a:effectRef>
+          <a:fontRef idx="minor">
+            <a:schemeClr val="lt1"/>
+          </a:fontRef>
+        </p:style>
+        <p:txBody>
+          <a:bodyPr rtlCol="0" anchor="ctr"/>
+          <a:lstStyle/>
+          <a:p>
+            <a:pPr algn="ctr"/>
+          </a:p>
+        </p:txBody>
+      </p:sp>
+      <p:sp>
+        <p:nvSpPr>
+          <p:cNvPr id="57" name="e4_a" descr="Editable shape; source id e4_a"/>
+          <p:cNvSpPr/>
+          <p:nvPr/>
+        </p:nvSpPr>
+        <p:spPr>
+          <a:xfrm>
+            <a:off x="3397249" y="6445249"/>
+            <a:ext cx="4270374" cy="47624"/>
+          </a:xfrm>
+          <a:prstGeom prst="roundRect">
+            <a:avLst>
+              <a:gd name="adj" fmla="val 50000"/>
+            </a:avLst>
+          </a:prstGeom>
+          <a:solidFill>
+            <a:srgbClr val="1F7F8C"/>
+          </a:solidFill>
+          <a:ln>
+            <a:noFill/>
+          </a:ln>
+          <a:effectLst/>
+        </p:spPr>
+        <p:style>
+          <a:lnRef idx="1">
+            <a:schemeClr val="accent1"/>
+          </a:lnRef>
+          <a:fillRef idx="3">
+            <a:schemeClr val="accent1"/>
+          </a:fillRef>
+          <a:effectRef idx="0">
+            <a:schemeClr val="accent1"/>
+          </a:effectRef>
+          <a:fontRef idx="minor">
+            <a:schemeClr val="lt1"/>
+          </a:fontRef>
+        </p:style>
+        <p:txBody>
+          <a:bodyPr rtlCol="0" anchor="ctr"/>
+          <a:lstStyle/>
+          <a:p>
+            <a:pPr algn="ctr"/>
+          </a:p>
+        </p:txBody>
+      </p:sp>
+      <p:cxnSp>
+        <p:nvCxnSpPr>
+          <p:cNvPr id="58" name="e4_g_d_0" descr="Editable line; source id e4_g_d_0"/>
+          <p:cNvCxnSpPr/>
+          <p:nvPr/>
+        </p:nvCxnSpPr>
+        <p:spPr>
+          <a:xfrm>
+            <a:off x="3675062" y="6667499"/>
+            <a:ext cx="63500" cy="103188"/>
+          </a:xfrm>
+          <a:prstGeom prst="line">
+            <a:avLst/>
+          </a:prstGeom>
+          <a:ln w="7937">
+            <a:solidFill>
+              <a:srgbClr val="1F2937"/>
+            </a:solidFill>
+          </a:ln>
+          <a:effectLst/>
+        </p:spPr>
+        <p:style>
+          <a:lnRef idx="2">
+            <a:schemeClr val="accent1"/>
+          </a:lnRef>
+          <a:fillRef idx="0">
+            <a:schemeClr val="accent1"/>
+          </a:fillRef>
+          <a:effectRef idx="0">
+            <a:schemeClr val="accent1"/>
+          </a:effectRef>
+          <a:fontRef idx="minor">
+            <a:schemeClr val="tx1"/>
+          </a:fontRef>
+        </p:style>
+      </p:cxnSp>
+      <p:cxnSp>
+        <p:nvCxnSpPr>
+          <p:cNvPr id="59" name="e4_g_d_1" descr="Editable line; source id e4_g_d_1"/>
+          <p:cNvCxnSpPr/>
+          <p:nvPr/>
+        </p:nvCxnSpPr>
+        <p:spPr>
+          <a:xfrm flipH="1">
+            <a:off x="3706812" y="6770687"/>
+            <a:ext cx="31750" cy="55562"/>
+          </a:xfrm>
+          <a:prstGeom prst="line">
+            <a:avLst/>
+          </a:prstGeom>
+          <a:ln w="7937">
+            <a:solidFill>
+              <a:srgbClr val="1F2937"/>
+            </a:solidFill>
+          </a:ln>
+          <a:effectLst/>
+        </p:spPr>
+        <p:style>
+          <a:lnRef idx="2">
+            <a:schemeClr val="accent1"/>
+          </a:lnRef>
+          <a:fillRef idx="0">
+            <a:schemeClr val="accent1"/>
+          </a:fillRef>
+          <a:effectRef idx="0">
+            <a:schemeClr val="accent1"/>
+          </a:effectRef>
+          <a:fontRef idx="minor">
+            <a:schemeClr val="tx1"/>
+          </a:fontRef>
+        </p:style>
+      </p:cxnSp>
+      <p:cxnSp>
+        <p:nvCxnSpPr>
+          <p:cNvPr id="60" name="e4_g_d_2" descr="Editable line; source id e4_g_d_2"/>
+          <p:cNvCxnSpPr/>
+          <p:nvPr/>
+        </p:nvCxnSpPr>
+        <p:spPr>
+          <a:xfrm flipH="1">
+            <a:off x="3643312" y="6826249"/>
+            <a:ext cx="63500" cy="0"/>
+          </a:xfrm>
+          <a:prstGeom prst="line">
+            <a:avLst/>
+          </a:prstGeom>
+          <a:ln w="7937">
+            <a:solidFill>
+              <a:srgbClr val="1F2937"/>
+            </a:solidFill>
+          </a:ln>
+          <a:effectLst/>
+        </p:spPr>
+        <p:style>
+          <a:lnRef idx="2">
+            <a:schemeClr val="accent1"/>
+          </a:lnRef>
+          <a:fillRef idx="0">
+            <a:schemeClr val="accent1"/>
+          </a:fillRef>
+          <a:effectRef idx="0">
+            <a:schemeClr val="accent1"/>
+          </a:effectRef>
+          <a:fontRef idx="minor">
+            <a:schemeClr val="tx1"/>
+          </a:fontRef>
+        </p:style>
+      </p:cxnSp>
+      <p:cxnSp>
+        <p:nvCxnSpPr>
+          <p:cNvPr id="61" name="e4_g_d_3" descr="Editable line; source id e4_g_d_3"/>
+          <p:cNvCxnSpPr/>
+          <p:nvPr/>
+        </p:nvCxnSpPr>
+        <p:spPr>
+          <a:xfrm flipH="1" flipV="1">
+            <a:off x="3611562" y="6770687"/>
+            <a:ext cx="31750" cy="55562"/>
+          </a:xfrm>
+          <a:prstGeom prst="line">
+            <a:avLst/>
+          </a:prstGeom>
+          <a:ln w="7937">
+            <a:solidFill>
+              <a:srgbClr val="1F2937"/>
+            </a:solidFill>
+          </a:ln>
+          <a:effectLst/>
+        </p:spPr>
+        <p:style>
+          <a:lnRef idx="2">
+            <a:schemeClr val="accent1"/>
+          </a:lnRef>
+          <a:fillRef idx="0">
+            <a:schemeClr val="accent1"/>
+          </a:fillRef>
+          <a:effectRef idx="0">
+            <a:schemeClr val="accent1"/>
+          </a:effectRef>
+          <a:fontRef idx="minor">
+            <a:schemeClr val="tx1"/>
+          </a:fontRef>
+        </p:style>
+      </p:cxnSp>
+      <p:cxnSp>
+        <p:nvCxnSpPr>
+          <p:cNvPr id="62" name="e4_g_d_4" descr="Editable line; source id e4_g_d_4"/>
+          <p:cNvCxnSpPr/>
+          <p:nvPr/>
+        </p:nvCxnSpPr>
+        <p:spPr>
+          <a:xfrm flipV="1">
+            <a:off x="3611562" y="6667499"/>
+            <a:ext cx="63500" cy="103188"/>
+          </a:xfrm>
+          <a:prstGeom prst="line">
+            <a:avLst/>
+          </a:prstGeom>
+          <a:ln w="7937">
+            <a:solidFill>
+              <a:srgbClr val="1F2937"/>
+            </a:solidFill>
+          </a:ln>
+          <a:effectLst/>
+        </p:spPr>
+        <p:style>
+          <a:lnRef idx="2">
+            <a:schemeClr val="accent1"/>
+          </a:lnRef>
+          <a:fillRef idx="0">
+            <a:schemeClr val="accent1"/>
+          </a:fillRef>
+          <a:effectRef idx="0">
+            <a:schemeClr val="accent1"/>
+          </a:effectRef>
+          <a:fontRef idx="minor">
+            <a:schemeClr val="tx1"/>
+          </a:fontRef>
+        </p:style>
+      </p:cxnSp>
+      <p:sp>
+        <p:nvSpPr>
+          <p:cNvPr id="63" name="e4_g_n0" descr="Editable shape; source id e4_g_n0"/>
+          <p:cNvSpPr/>
+          <p:nvPr/>
+        </p:nvSpPr>
+        <p:spPr>
+          <a:xfrm>
+            <a:off x="3619499" y="6857999"/>
+            <a:ext cx="31749" cy="31749"/>
+          </a:xfrm>
+          <a:prstGeom prst="ellipse">
+            <a:avLst/>
+          </a:prstGeom>
+          <a:solidFill>
+            <a:srgbClr val="1F2937"/>
+          </a:solidFill>
+          <a:ln>
+            <a:noFill/>
+          </a:ln>
+          <a:effectLst/>
+        </p:spPr>
+        <p:style>
+          <a:lnRef idx="1">
+            <a:schemeClr val="accent1"/>
+          </a:lnRef>
+          <a:fillRef idx="3">
+            <a:schemeClr val="accent1"/>
+          </a:fillRef>
+          <a:effectRef idx="0">
+            <a:schemeClr val="accent1"/>
+          </a:effectRef>
+          <a:fontRef idx="minor">
+            <a:schemeClr val="lt1"/>
+          </a:fontRef>
+        </p:style>
+        <p:txBody>
+          <a:bodyPr rtlCol="0" anchor="ctr"/>
+          <a:lstStyle/>
+          <a:p>
+            <a:pPr algn="ctr"/>
+          </a:p>
+        </p:txBody>
+      </p:sp>
+      <p:sp>
+        <p:nvSpPr>
+          <p:cNvPr id="64" name="e4_g_n1" descr="Editable shape; source id e4_g_n1"/>
+          <p:cNvSpPr/>
+          <p:nvPr/>
+        </p:nvSpPr>
+        <p:spPr>
+          <a:xfrm>
+            <a:off x="3667124" y="6865937"/>
+            <a:ext cx="31749" cy="31749"/>
+          </a:xfrm>
+          <a:prstGeom prst="ellipse">
+            <a:avLst/>
+          </a:prstGeom>
+          <a:solidFill>
+            <a:srgbClr val="1F2937"/>
+          </a:solidFill>
+          <a:ln>
+            <a:noFill/>
+          </a:ln>
+          <a:effectLst/>
+        </p:spPr>
+        <p:style>
+          <a:lnRef idx="1">
+            <a:schemeClr val="accent1"/>
+          </a:lnRef>
+          <a:fillRef idx="3">
+            <a:schemeClr val="accent1"/>
+          </a:fillRef>
+          <a:effectRef idx="0">
+            <a:schemeClr val="accent1"/>
+          </a:effectRef>
+          <a:fontRef idx="minor">
+            <a:schemeClr val="lt1"/>
+          </a:fontRef>
+        </p:style>
+        <p:txBody>
+          <a:bodyPr rtlCol="0" anchor="ctr"/>
+          <a:lstStyle/>
+          <a:p>
+            <a:pPr algn="ctr"/>
+          </a:p>
+        </p:txBody>
+      </p:sp>
+      <p:sp>
+        <p:nvSpPr>
+          <p:cNvPr id="65" name="e4_g_n2" descr="Editable shape; source id e4_g_n2"/>
+          <p:cNvSpPr/>
+          <p:nvPr/>
+        </p:nvSpPr>
+        <p:spPr>
+          <a:xfrm>
+            <a:off x="3714749" y="6842124"/>
+            <a:ext cx="31749" cy="31749"/>
+          </a:xfrm>
+          <a:prstGeom prst="ellipse">
+            <a:avLst/>
+          </a:prstGeom>
+          <a:solidFill>
+            <a:srgbClr val="1F2937"/>
+          </a:solidFill>
+          <a:ln>
+            <a:noFill/>
+          </a:ln>
+          <a:effectLst/>
+        </p:spPr>
+        <p:style>
+          <a:lnRef idx="1">
+            <a:schemeClr val="accent1"/>
+          </a:lnRef>
+          <a:fillRef idx="3">
+            <a:schemeClr val="accent1"/>
+          </a:fillRef>
+          <a:effectRef idx="0">
+            <a:schemeClr val="accent1"/>
+          </a:effectRef>
+          <a:fontRef idx="minor">
+            <a:schemeClr val="lt1"/>
+          </a:fontRef>
+        </p:style>
+        <p:txBody>
+          <a:bodyPr rtlCol="0" anchor="ctr"/>
+          <a:lstStyle/>
+          <a:p>
+            <a:pPr algn="ctr"/>
+          </a:p>
+        </p:txBody>
+      </p:sp>
+      <p:sp>
+        <p:nvSpPr>
+          <p:cNvPr id="66" name="e4_t" descr="Editable text; source id e4_t"/>
+          <p:cNvSpPr txBox="1"/>
+          <p:nvPr/>
+        </p:nvSpPr>
+        <p:spPr>
+          <a:xfrm>
+            <a:off x="3889374" y="6635749"/>
+            <a:ext cx="3635374" cy="285749"/>
+          </a:xfrm>
+          <a:prstGeom prst="rect">
+            <a:avLst/>
+          </a:prstGeom>
+          <a:noFill/>
+          <a:effectLst/>
+        </p:spPr>
+        <p:txBody>
+          <a:bodyPr wrap="none" anchor="ctr" tIns="0" rIns="0" bIns="0" lIns="0" anchorCtr="0" vertOverflow="overflow">
+            <a:noAutofit/>
+          </a:bodyPr>
+          <a:lstStyle/>
+          <a:p>
+            <a:pPr algn="l" fontAlgn="base">
+              <a:lnSpc>
+                <a:spcPts val="2187"/>
+              </a:lnSpc>
+              <a:spcBef>
+                <a:spcPts val="0"/>
+              </a:spcBef>
+              <a:spcAft>
+                <a:spcPts val="0"/>
+              </a:spcAft>
+              <a:defRPr sz="1501" b="1" i="0" lang="zh-CN" dirty="0">
+                <a:solidFill>
+                  <a:srgbClr val="0F4F58"/>
+                </a:solidFill>
+                <a:latin typeface="Noto Sans CJK SC"/>
+                <a:ea typeface="Noto Sans CJK SC"/>
+                <a:cs typeface="Noto Sans CJK SC"/>
+              </a:defRPr>
+            </a:pPr>
+            <a:r>
+              <a:rPr sz="1501" b="1" i="0" lang="zh-CN" dirty="0">
+                <a:solidFill>
+                  <a:srgbClr val="0F4F58"/>
+                </a:solidFill>
+                <a:latin typeface="Noto Sans CJK SC"/>
+                <a:ea typeface="Noto Sans CJK SC"/>
+                <a:cs typeface="Noto Sans CJK SC"/>
+              </a:rPr>
+              <a:t>玻璃析晶</a:t>
+            </a:r>
+          </a:p>
+        </p:txBody>
+      </p:sp>
+      <p:sp>
+        <p:nvSpPr>
+          <p:cNvPr id="67" name="e4_s" descr="Editable shape; source id e4_s"/>
+          <p:cNvSpPr/>
+          <p:nvPr/>
+        </p:nvSpPr>
+        <p:spPr>
+          <a:xfrm>
+            <a:off x="3540124" y="7064374"/>
+            <a:ext cx="3984624" cy="444499"/>
+          </a:xfrm>
+          <a:prstGeom prst="roundRect">
+            <a:avLst>
+              <a:gd name="adj" fmla="val 10714"/>
+            </a:avLst>
+          </a:prstGeom>
+          <a:solidFill>
+            <a:srgbClr val="F7F9FB"/>
+          </a:solidFill>
+          <a:ln w="9524">
+            <a:solidFill>
+              <a:srgbClr val="CBD3DA"/>
+            </a:solidFill>
+          </a:ln>
+          <a:effectLst/>
+        </p:spPr>
+        <p:style>
+          <a:lnRef idx="1">
+            <a:schemeClr val="accent1"/>
+          </a:lnRef>
+          <a:fillRef idx="3">
+            <a:schemeClr val="accent1"/>
+          </a:fillRef>
+          <a:effectRef idx="0">
+            <a:schemeClr val="accent1"/>
+          </a:effectRef>
+          <a:fontRef idx="minor">
+            <a:schemeClr val="lt1"/>
+          </a:fontRef>
+        </p:style>
+        <p:txBody>
+          <a:bodyPr rtlCol="0" anchor="ctr"/>
+          <a:lstStyle/>
+          <a:p>
+            <a:pPr algn="ctr"/>
+          </a:p>
+        </p:txBody>
+      </p:sp>
+      <p:sp>
+        <p:nvSpPr>
+          <p:cNvPr id="68" name="e4_s_t" descr="Editable text; source id e4_s_t"/>
+          <p:cNvSpPr txBox="1"/>
+          <p:nvPr/>
+        </p:nvSpPr>
+        <p:spPr>
+          <a:xfrm>
+            <a:off x="3595687" y="7096124"/>
+            <a:ext cx="3873499" cy="380999"/>
+          </a:xfrm>
+          <a:prstGeom prst="rect">
+            <a:avLst/>
+          </a:prstGeom>
+          <a:noFill/>
+          <a:effectLst/>
+        </p:spPr>
+        <p:txBody>
+          <a:bodyPr wrap="none" anchor="ctr" tIns="0" rIns="0" bIns="0" lIns="0" anchorCtr="0" vertOverflow="overflow">
+            <a:noAutofit/>
+          </a:bodyPr>
+          <a:lstStyle/>
+          <a:p>
+            <a:pPr algn="ctr" fontAlgn="base">
+              <a:lnSpc>
+                <a:spcPts val="1734"/>
+              </a:lnSpc>
+              <a:spcBef>
+                <a:spcPts val="0"/>
+              </a:spcBef>
+              <a:spcAft>
+                <a:spcPts val="0"/>
+              </a:spcAft>
+              <a:defRPr sz="1187" b="0" i="0" lang="zh-CN" dirty="0">
                 <a:solidFill>
                   <a:srgbClr val="3F4854"/>
                 </a:solidFill>
@@ -4401,7 +6528,7 @@
               </a:defRPr>
             </a:pPr>
             <a:r>
-              <a:rPr sz="1136" b="0" i="0" lang="zh-CN" dirty="0">
+              <a:rPr sz="1187" b="0" i="0" lang="zh-CN" dirty="0">
                 <a:solidFill>
                   <a:srgbClr val="3F4854"/>
                 </a:solidFill>
@@ -4409,10 +6536,10 @@
                 <a:ea typeface="Noto Sans CJK SC"/>
                 <a:cs typeface="Noto Sans CJK SC"/>
               </a:rPr>
-              <a:t>固相</a:t>
-            </a:r>
-            <a:r>
-              <a:rPr sz="1136" b="0" i="0" lang="zh-CN" dirty="0">
+              <a:t>成核</a:t>
+            </a:r>
+            <a:r>
+              <a:rPr sz="1187" b="0" i="0" lang="zh-CN" dirty="0">
                 <a:solidFill>
                   <a:srgbClr val="3F4854"/>
                 </a:solidFill>
@@ -4423,7 +6550,7 @@
               <a:t> · </a:t>
             </a:r>
             <a:r>
-              <a:rPr sz="1136" b="0" i="0" lang="zh-CN" dirty="0">
+              <a:rPr sz="1187" b="0" i="0" lang="zh-CN" dirty="0">
                 <a:solidFill>
                   <a:srgbClr val="3F4854"/>
                 </a:solidFill>
@@ -4431,55 +6558,33 @@
                 <a:ea typeface="Noto Sans CJK SC"/>
                 <a:cs typeface="Noto Sans CJK SC"/>
               </a:rPr>
-              <a:t>溶胶</a:t>
-            </a:r>
-            <a:r>
-              <a:rPr sz="1136" b="0" i="0" lang="zh-CN" dirty="0">
-                <a:solidFill>
-                  <a:srgbClr val="3F4854"/>
-                </a:solidFill>
-                <a:latin typeface="DejaVu Sans"/>
-                <a:ea typeface="DejaVu Sans"/>
-                <a:cs typeface="DejaVu Sans"/>
-              </a:rPr>
-              <a:t>—</a:t>
-            </a:r>
-            <a:r>
-              <a:rPr sz="1136" b="0" i="0" lang="zh-CN" dirty="0">
-                <a:solidFill>
-                  <a:srgbClr val="3F4854"/>
-                </a:solidFill>
-                <a:latin typeface="Noto Sans CJK SC"/>
-                <a:ea typeface="Noto Sans CJK SC"/>
-                <a:cs typeface="Noto Sans CJK SC"/>
-              </a:rPr>
-              <a:t>凝胶</a:t>
-            </a:r>
-          </a:p>
-        </p:txBody>
-      </p:sp>
-      <p:sp>
-        <p:nvSpPr>
-          <p:cNvPr id="20" name="e3" descr="Editable shape; source id e3"/>
+              <a:t>生长</a:t>
+            </a:r>
+          </a:p>
+        </p:txBody>
+      </p:sp>
+      <p:sp>
+        <p:nvSpPr>
+          <p:cNvPr id="69" name="l1" descr="Editable shape; source id l1"/>
           <p:cNvSpPr/>
           <p:nvPr/>
         </p:nvSpPr>
         <p:spPr>
           <a:xfrm>
-            <a:off x="3566881" y="3092671"/>
-            <a:ext cx="3450047" cy="962164"/>
+            <a:off x="8334374" y="730249"/>
+            <a:ext cx="3444874" cy="1365249"/>
           </a:xfrm>
           <a:prstGeom prst="roundRect">
             <a:avLst>
-              <a:gd name="adj" fmla="val 7142"/>
+              <a:gd name="adj" fmla="val 5232"/>
             </a:avLst>
           </a:prstGeom>
           <a:solidFill>
             <a:srgbClr val="FFFFFF"/>
           </a:solidFill>
-          <a:ln w="10308">
+          <a:ln w="11112">
             <a:solidFill>
-              <a:srgbClr val="1F7F8C"/>
+              <a:srgbClr val="5B7592"/>
             </a:solidFill>
           </a:ln>
           <a:effectLst/>
@@ -4508,14 +6613,14 @@
       </p:sp>
       <p:sp>
         <p:nvSpPr>
-          <p:cNvPr id="21" name="e3_s" descr="Editable shape; source id e3_s"/>
+          <p:cNvPr id="70" name="l1_a" descr="Editable shape; source id l1_a"/>
           <p:cNvSpPr/>
           <p:nvPr/>
         </p:nvSpPr>
         <p:spPr>
           <a:xfrm>
-            <a:off x="3566881" y="3092671"/>
-            <a:ext cx="3450047" cy="54980"/>
+            <a:off x="8334374" y="730249"/>
+            <a:ext cx="3444874" cy="47624"/>
           </a:xfrm>
           <a:prstGeom prst="roundRect">
             <a:avLst>
@@ -4523,7 +6628,7 @@
             </a:avLst>
           </a:prstGeom>
           <a:solidFill>
-            <a:srgbClr val="1F7F8C"/>
+            <a:srgbClr val="5B7592"/>
           </a:solidFill>
           <a:ln>
             <a:noFill/>
@@ -4552,41 +6657,628 @@
           </a:p>
         </p:txBody>
       </p:sp>
-      <p:pic>
-        <p:nvPicPr>
-          <p:cNvPr id="22" name="e3_i" descr="exact crop of the generated raster (line motif)"/>
-          <p:cNvPicPr>
-            <a:picLocks noChangeAspect="1"/>
-          </p:cNvPicPr>
-          <p:nvPr/>
-        </p:nvPicPr>
-        <p:blipFill>
-          <a:blip r:embed="rId4"/>
-          <a:stretch>
-            <a:fillRect/>
-          </a:stretch>
-        </p:blipFill>
-        <p:spPr>
-          <a:xfrm>
-            <a:off x="3762063" y="3285104"/>
-            <a:ext cx="159444" cy="302394"/>
-          </a:xfrm>
-          <a:prstGeom prst="rect">
-            <a:avLst/>
-          </a:prstGeom>
-          <a:effectLst/>
-        </p:spPr>
-      </p:pic>
-      <p:sp>
-        <p:nvSpPr>
-          <p:cNvPr id="23" name="e3_t" descr="Editable text; source id e3_t"/>
+      <p:cxnSp>
+        <p:nvCxnSpPr>
+          <p:cNvPr id="71" name="l1_g_h0" descr="Editable line; source id l1_g_h0"/>
+          <p:cNvCxnSpPr/>
+          <p:nvPr/>
+        </p:nvCxnSpPr>
+        <p:spPr>
+          <a:xfrm>
+            <a:off x="8524874" y="968374"/>
+            <a:ext cx="174625" cy="0"/>
+          </a:xfrm>
+          <a:prstGeom prst="line">
+            <a:avLst/>
+          </a:prstGeom>
+          <a:ln w="7937">
+            <a:solidFill>
+              <a:srgbClr val="1F2937"/>
+            </a:solidFill>
+          </a:ln>
+          <a:effectLst/>
+        </p:spPr>
+        <p:style>
+          <a:lnRef idx="2">
+            <a:schemeClr val="accent1"/>
+          </a:lnRef>
+          <a:fillRef idx="0">
+            <a:schemeClr val="accent1"/>
+          </a:fillRef>
+          <a:effectRef idx="0">
+            <a:schemeClr val="accent1"/>
+          </a:effectRef>
+          <a:fontRef idx="minor">
+            <a:schemeClr val="tx1"/>
+          </a:fontRef>
+        </p:style>
+      </p:cxnSp>
+      <p:cxnSp>
+        <p:nvCxnSpPr>
+          <p:cNvPr id="72" name="l1_g_v0" descr="Editable line; source id l1_g_v0"/>
+          <p:cNvCxnSpPr/>
+          <p:nvPr/>
+        </p:nvCxnSpPr>
+        <p:spPr>
+          <a:xfrm>
+            <a:off x="8524874" y="968374"/>
+            <a:ext cx="0" cy="174625"/>
+          </a:xfrm>
+          <a:prstGeom prst="line">
+            <a:avLst/>
+          </a:prstGeom>
+          <a:ln w="7937">
+            <a:solidFill>
+              <a:srgbClr val="1F2937"/>
+            </a:solidFill>
+          </a:ln>
+          <a:effectLst/>
+        </p:spPr>
+        <p:style>
+          <a:lnRef idx="2">
+            <a:schemeClr val="accent1"/>
+          </a:lnRef>
+          <a:fillRef idx="0">
+            <a:schemeClr val="accent1"/>
+          </a:fillRef>
+          <a:effectRef idx="0">
+            <a:schemeClr val="accent1"/>
+          </a:effectRef>
+          <a:fontRef idx="minor">
+            <a:schemeClr val="tx1"/>
+          </a:fontRef>
+        </p:style>
+      </p:cxnSp>
+      <p:cxnSp>
+        <p:nvCxnSpPr>
+          <p:cNvPr id="73" name="l1_g_h1" descr="Editable line; source id l1_g_h1"/>
+          <p:cNvCxnSpPr/>
+          <p:nvPr/>
+        </p:nvCxnSpPr>
+        <p:spPr>
+          <a:xfrm>
+            <a:off x="8524874" y="1055687"/>
+            <a:ext cx="174625" cy="0"/>
+          </a:xfrm>
+          <a:prstGeom prst="line">
+            <a:avLst/>
+          </a:prstGeom>
+          <a:ln w="7937">
+            <a:solidFill>
+              <a:srgbClr val="1F2937"/>
+            </a:solidFill>
+          </a:ln>
+          <a:effectLst/>
+        </p:spPr>
+        <p:style>
+          <a:lnRef idx="2">
+            <a:schemeClr val="accent1"/>
+          </a:lnRef>
+          <a:fillRef idx="0">
+            <a:schemeClr val="accent1"/>
+          </a:fillRef>
+          <a:effectRef idx="0">
+            <a:schemeClr val="accent1"/>
+          </a:effectRef>
+          <a:fontRef idx="minor">
+            <a:schemeClr val="tx1"/>
+          </a:fontRef>
+        </p:style>
+      </p:cxnSp>
+      <p:cxnSp>
+        <p:nvCxnSpPr>
+          <p:cNvPr id="74" name="l1_g_v1" descr="Editable line; source id l1_g_v1"/>
+          <p:cNvCxnSpPr/>
+          <p:nvPr/>
+        </p:nvCxnSpPr>
+        <p:spPr>
+          <a:xfrm>
+            <a:off x="8612187" y="968374"/>
+            <a:ext cx="0" cy="174625"/>
+          </a:xfrm>
+          <a:prstGeom prst="line">
+            <a:avLst/>
+          </a:prstGeom>
+          <a:ln w="7937">
+            <a:solidFill>
+              <a:srgbClr val="1F2937"/>
+            </a:solidFill>
+          </a:ln>
+          <a:effectLst/>
+        </p:spPr>
+        <p:style>
+          <a:lnRef idx="2">
+            <a:schemeClr val="accent1"/>
+          </a:lnRef>
+          <a:fillRef idx="0">
+            <a:schemeClr val="accent1"/>
+          </a:fillRef>
+          <a:effectRef idx="0">
+            <a:schemeClr val="accent1"/>
+          </a:effectRef>
+          <a:fontRef idx="minor">
+            <a:schemeClr val="tx1"/>
+          </a:fontRef>
+        </p:style>
+      </p:cxnSp>
+      <p:cxnSp>
+        <p:nvCxnSpPr>
+          <p:cNvPr id="75" name="l1_g_h2" descr="Editable line; source id l1_g_h2"/>
+          <p:cNvCxnSpPr/>
+          <p:nvPr/>
+        </p:nvCxnSpPr>
+        <p:spPr>
+          <a:xfrm>
+            <a:off x="8524874" y="1142999"/>
+            <a:ext cx="174625" cy="0"/>
+          </a:xfrm>
+          <a:prstGeom prst="line">
+            <a:avLst/>
+          </a:prstGeom>
+          <a:ln w="7937">
+            <a:solidFill>
+              <a:srgbClr val="1F2937"/>
+            </a:solidFill>
+          </a:ln>
+          <a:effectLst/>
+        </p:spPr>
+        <p:style>
+          <a:lnRef idx="2">
+            <a:schemeClr val="accent1"/>
+          </a:lnRef>
+          <a:fillRef idx="0">
+            <a:schemeClr val="accent1"/>
+          </a:fillRef>
+          <a:effectRef idx="0">
+            <a:schemeClr val="accent1"/>
+          </a:effectRef>
+          <a:fontRef idx="minor">
+            <a:schemeClr val="tx1"/>
+          </a:fontRef>
+        </p:style>
+      </p:cxnSp>
+      <p:cxnSp>
+        <p:nvCxnSpPr>
+          <p:cNvPr id="76" name="l1_g_v2" descr="Editable line; source id l1_g_v2"/>
+          <p:cNvCxnSpPr/>
+          <p:nvPr/>
+        </p:nvCxnSpPr>
+        <p:spPr>
+          <a:xfrm>
+            <a:off x="8699499" y="968374"/>
+            <a:ext cx="0" cy="174625"/>
+          </a:xfrm>
+          <a:prstGeom prst="line">
+            <a:avLst/>
+          </a:prstGeom>
+          <a:ln w="7937">
+            <a:solidFill>
+              <a:srgbClr val="1F2937"/>
+            </a:solidFill>
+          </a:ln>
+          <a:effectLst/>
+        </p:spPr>
+        <p:style>
+          <a:lnRef idx="2">
+            <a:schemeClr val="accent1"/>
+          </a:lnRef>
+          <a:fillRef idx="0">
+            <a:schemeClr val="accent1"/>
+          </a:fillRef>
+          <a:effectRef idx="0">
+            <a:schemeClr val="accent1"/>
+          </a:effectRef>
+          <a:fontRef idx="minor">
+            <a:schemeClr val="tx1"/>
+          </a:fontRef>
+        </p:style>
+      </p:cxnSp>
+      <p:sp>
+        <p:nvSpPr>
+          <p:cNvPr id="77" name="l1_g_d00" descr="Editable shape; source id l1_g_d00"/>
+          <p:cNvSpPr/>
+          <p:nvPr/>
+        </p:nvSpPr>
+        <p:spPr>
+          <a:xfrm>
+            <a:off x="8508999" y="952499"/>
+            <a:ext cx="39687" cy="39687"/>
+          </a:xfrm>
+          <a:prstGeom prst="ellipse">
+            <a:avLst/>
+          </a:prstGeom>
+          <a:solidFill>
+            <a:srgbClr val="FFFFFF"/>
+          </a:solidFill>
+          <a:ln>
+            <a:noFill/>
+          </a:ln>
+          <a:effectLst/>
+        </p:spPr>
+        <p:style>
+          <a:lnRef idx="1">
+            <a:schemeClr val="accent1"/>
+          </a:lnRef>
+          <a:fillRef idx="3">
+            <a:schemeClr val="accent1"/>
+          </a:fillRef>
+          <a:effectRef idx="0">
+            <a:schemeClr val="accent1"/>
+          </a:effectRef>
+          <a:fontRef idx="minor">
+            <a:schemeClr val="lt1"/>
+          </a:fontRef>
+        </p:style>
+        <p:txBody>
+          <a:bodyPr rtlCol="0" anchor="ctr"/>
+          <a:lstStyle/>
+          <a:p>
+            <a:pPr algn="ctr"/>
+          </a:p>
+        </p:txBody>
+      </p:sp>
+      <p:sp>
+        <p:nvSpPr>
+          <p:cNvPr id="78" name="l1_g_d01" descr="Editable shape; source id l1_g_d01"/>
+          <p:cNvSpPr/>
+          <p:nvPr/>
+        </p:nvSpPr>
+        <p:spPr>
+          <a:xfrm>
+            <a:off x="8508999" y="1039812"/>
+            <a:ext cx="39687" cy="39687"/>
+          </a:xfrm>
+          <a:prstGeom prst="ellipse">
+            <a:avLst/>
+          </a:prstGeom>
+          <a:solidFill>
+            <a:srgbClr val="FFFFFF"/>
+          </a:solidFill>
+          <a:ln>
+            <a:noFill/>
+          </a:ln>
+          <a:effectLst/>
+        </p:spPr>
+        <p:style>
+          <a:lnRef idx="1">
+            <a:schemeClr val="accent1"/>
+          </a:lnRef>
+          <a:fillRef idx="3">
+            <a:schemeClr val="accent1"/>
+          </a:fillRef>
+          <a:effectRef idx="0">
+            <a:schemeClr val="accent1"/>
+          </a:effectRef>
+          <a:fontRef idx="minor">
+            <a:schemeClr val="lt1"/>
+          </a:fontRef>
+        </p:style>
+        <p:txBody>
+          <a:bodyPr rtlCol="0" anchor="ctr"/>
+          <a:lstStyle/>
+          <a:p>
+            <a:pPr algn="ctr"/>
+          </a:p>
+        </p:txBody>
+      </p:sp>
+      <p:sp>
+        <p:nvSpPr>
+          <p:cNvPr id="79" name="l1_g_d02" descr="Editable shape; source id l1_g_d02"/>
+          <p:cNvSpPr/>
+          <p:nvPr/>
+        </p:nvSpPr>
+        <p:spPr>
+          <a:xfrm>
+            <a:off x="8508999" y="1127124"/>
+            <a:ext cx="39687" cy="39687"/>
+          </a:xfrm>
+          <a:prstGeom prst="ellipse">
+            <a:avLst/>
+          </a:prstGeom>
+          <a:solidFill>
+            <a:srgbClr val="FFFFFF"/>
+          </a:solidFill>
+          <a:ln>
+            <a:noFill/>
+          </a:ln>
+          <a:effectLst/>
+        </p:spPr>
+        <p:style>
+          <a:lnRef idx="1">
+            <a:schemeClr val="accent1"/>
+          </a:lnRef>
+          <a:fillRef idx="3">
+            <a:schemeClr val="accent1"/>
+          </a:fillRef>
+          <a:effectRef idx="0">
+            <a:schemeClr val="accent1"/>
+          </a:effectRef>
+          <a:fontRef idx="minor">
+            <a:schemeClr val="lt1"/>
+          </a:fontRef>
+        </p:style>
+        <p:txBody>
+          <a:bodyPr rtlCol="0" anchor="ctr"/>
+          <a:lstStyle/>
+          <a:p>
+            <a:pPr algn="ctr"/>
+          </a:p>
+        </p:txBody>
+      </p:sp>
+      <p:sp>
+        <p:nvSpPr>
+          <p:cNvPr id="80" name="l1_g_d10" descr="Editable shape; source id l1_g_d10"/>
+          <p:cNvSpPr/>
+          <p:nvPr/>
+        </p:nvSpPr>
+        <p:spPr>
+          <a:xfrm>
+            <a:off x="8596312" y="952499"/>
+            <a:ext cx="39687" cy="39687"/>
+          </a:xfrm>
+          <a:prstGeom prst="ellipse">
+            <a:avLst/>
+          </a:prstGeom>
+          <a:solidFill>
+            <a:srgbClr val="FFFFFF"/>
+          </a:solidFill>
+          <a:ln>
+            <a:noFill/>
+          </a:ln>
+          <a:effectLst/>
+        </p:spPr>
+        <p:style>
+          <a:lnRef idx="1">
+            <a:schemeClr val="accent1"/>
+          </a:lnRef>
+          <a:fillRef idx="3">
+            <a:schemeClr val="accent1"/>
+          </a:fillRef>
+          <a:effectRef idx="0">
+            <a:schemeClr val="accent1"/>
+          </a:effectRef>
+          <a:fontRef idx="minor">
+            <a:schemeClr val="lt1"/>
+          </a:fontRef>
+        </p:style>
+        <p:txBody>
+          <a:bodyPr rtlCol="0" anchor="ctr"/>
+          <a:lstStyle/>
+          <a:p>
+            <a:pPr algn="ctr"/>
+          </a:p>
+        </p:txBody>
+      </p:sp>
+      <p:sp>
+        <p:nvSpPr>
+          <p:cNvPr id="81" name="l1_g_d11" descr="Editable shape; source id l1_g_d11"/>
+          <p:cNvSpPr/>
+          <p:nvPr/>
+        </p:nvSpPr>
+        <p:spPr>
+          <a:xfrm>
+            <a:off x="8596312" y="1039812"/>
+            <a:ext cx="39687" cy="39687"/>
+          </a:xfrm>
+          <a:prstGeom prst="ellipse">
+            <a:avLst/>
+          </a:prstGeom>
+          <a:solidFill>
+            <a:srgbClr val="1F2937"/>
+          </a:solidFill>
+          <a:ln>
+            <a:noFill/>
+          </a:ln>
+          <a:effectLst/>
+        </p:spPr>
+        <p:style>
+          <a:lnRef idx="1">
+            <a:schemeClr val="accent1"/>
+          </a:lnRef>
+          <a:fillRef idx="3">
+            <a:schemeClr val="accent1"/>
+          </a:fillRef>
+          <a:effectRef idx="0">
+            <a:schemeClr val="accent1"/>
+          </a:effectRef>
+          <a:fontRef idx="minor">
+            <a:schemeClr val="lt1"/>
+          </a:fontRef>
+        </p:style>
+        <p:txBody>
+          <a:bodyPr rtlCol="0" anchor="ctr"/>
+          <a:lstStyle/>
+          <a:p>
+            <a:pPr algn="ctr"/>
+          </a:p>
+        </p:txBody>
+      </p:sp>
+      <p:sp>
+        <p:nvSpPr>
+          <p:cNvPr id="82" name="l1_g_d12" descr="Editable shape; source id l1_g_d12"/>
+          <p:cNvSpPr/>
+          <p:nvPr/>
+        </p:nvSpPr>
+        <p:spPr>
+          <a:xfrm>
+            <a:off x="8596312" y="1127124"/>
+            <a:ext cx="39687" cy="39687"/>
+          </a:xfrm>
+          <a:prstGeom prst="ellipse">
+            <a:avLst/>
+          </a:prstGeom>
+          <a:solidFill>
+            <a:srgbClr val="FFFFFF"/>
+          </a:solidFill>
+          <a:ln>
+            <a:noFill/>
+          </a:ln>
+          <a:effectLst/>
+        </p:spPr>
+        <p:style>
+          <a:lnRef idx="1">
+            <a:schemeClr val="accent1"/>
+          </a:lnRef>
+          <a:fillRef idx="3">
+            <a:schemeClr val="accent1"/>
+          </a:fillRef>
+          <a:effectRef idx="0">
+            <a:schemeClr val="accent1"/>
+          </a:effectRef>
+          <a:fontRef idx="minor">
+            <a:schemeClr val="lt1"/>
+          </a:fontRef>
+        </p:style>
+        <p:txBody>
+          <a:bodyPr rtlCol="0" anchor="ctr"/>
+          <a:lstStyle/>
+          <a:p>
+            <a:pPr algn="ctr"/>
+          </a:p>
+        </p:txBody>
+      </p:sp>
+      <p:sp>
+        <p:nvSpPr>
+          <p:cNvPr id="83" name="l1_g_d20" descr="Editable shape; source id l1_g_d20"/>
+          <p:cNvSpPr/>
+          <p:nvPr/>
+        </p:nvSpPr>
+        <p:spPr>
+          <a:xfrm>
+            <a:off x="8683624" y="952499"/>
+            <a:ext cx="39687" cy="39687"/>
+          </a:xfrm>
+          <a:prstGeom prst="ellipse">
+            <a:avLst/>
+          </a:prstGeom>
+          <a:solidFill>
+            <a:srgbClr val="FFFFFF"/>
+          </a:solidFill>
+          <a:ln>
+            <a:noFill/>
+          </a:ln>
+          <a:effectLst/>
+        </p:spPr>
+        <p:style>
+          <a:lnRef idx="1">
+            <a:schemeClr val="accent1"/>
+          </a:lnRef>
+          <a:fillRef idx="3">
+            <a:schemeClr val="accent1"/>
+          </a:fillRef>
+          <a:effectRef idx="0">
+            <a:schemeClr val="accent1"/>
+          </a:effectRef>
+          <a:fontRef idx="minor">
+            <a:schemeClr val="lt1"/>
+          </a:fontRef>
+        </p:style>
+        <p:txBody>
+          <a:bodyPr rtlCol="0" anchor="ctr"/>
+          <a:lstStyle/>
+          <a:p>
+            <a:pPr algn="ctr"/>
+          </a:p>
+        </p:txBody>
+      </p:sp>
+      <p:sp>
+        <p:nvSpPr>
+          <p:cNvPr id="84" name="l1_g_d21" descr="Editable shape; source id l1_g_d21"/>
+          <p:cNvSpPr/>
+          <p:nvPr/>
+        </p:nvSpPr>
+        <p:spPr>
+          <a:xfrm>
+            <a:off x="8683624" y="1039812"/>
+            <a:ext cx="39687" cy="39687"/>
+          </a:xfrm>
+          <a:prstGeom prst="ellipse">
+            <a:avLst/>
+          </a:prstGeom>
+          <a:solidFill>
+            <a:srgbClr val="FFFFFF"/>
+          </a:solidFill>
+          <a:ln>
+            <a:noFill/>
+          </a:ln>
+          <a:effectLst/>
+        </p:spPr>
+        <p:style>
+          <a:lnRef idx="1">
+            <a:schemeClr val="accent1"/>
+          </a:lnRef>
+          <a:fillRef idx="3">
+            <a:schemeClr val="accent1"/>
+          </a:fillRef>
+          <a:effectRef idx="0">
+            <a:schemeClr val="accent1"/>
+          </a:effectRef>
+          <a:fontRef idx="minor">
+            <a:schemeClr val="lt1"/>
+          </a:fontRef>
+        </p:style>
+        <p:txBody>
+          <a:bodyPr rtlCol="0" anchor="ctr"/>
+          <a:lstStyle/>
+          <a:p>
+            <a:pPr algn="ctr"/>
+          </a:p>
+        </p:txBody>
+      </p:sp>
+      <p:sp>
+        <p:nvSpPr>
+          <p:cNvPr id="85" name="l1_g_d22" descr="Editable shape; source id l1_g_d22"/>
+          <p:cNvSpPr/>
+          <p:nvPr/>
+        </p:nvSpPr>
+        <p:spPr>
+          <a:xfrm>
+            <a:off x="8683624" y="1127124"/>
+            <a:ext cx="39687" cy="39687"/>
+          </a:xfrm>
+          <a:prstGeom prst="ellipse">
+            <a:avLst/>
+          </a:prstGeom>
+          <a:solidFill>
+            <a:srgbClr val="FFFFFF"/>
+          </a:solidFill>
+          <a:ln>
+            <a:noFill/>
+          </a:ln>
+          <a:effectLst/>
+        </p:spPr>
+        <p:style>
+          <a:lnRef idx="1">
+            <a:schemeClr val="accent1"/>
+          </a:lnRef>
+          <a:fillRef idx="3">
+            <a:schemeClr val="accent1"/>
+          </a:fillRef>
+          <a:effectRef idx="0">
+            <a:schemeClr val="accent1"/>
+          </a:effectRef>
+          <a:fontRef idx="minor">
+            <a:schemeClr val="lt1"/>
+          </a:fontRef>
+        </p:style>
+        <p:txBody>
+          <a:bodyPr rtlCol="0" anchor="ctr"/>
+          <a:lstStyle/>
+          <a:p>
+            <a:pPr algn="ctr"/>
+          </a:p>
+        </p:txBody>
+      </p:sp>
+      <p:sp>
+        <p:nvSpPr>
+          <p:cNvPr id="86" name="l1_t" descr="Editable text; source id l1_t"/>
           <p:cNvSpPr txBox="1"/>
           <p:nvPr/>
         </p:nvSpPr>
         <p:spPr>
           <a:xfrm>
-            <a:off x="4075454" y="3298849"/>
-            <a:ext cx="2817767" cy="274904"/>
+            <a:off x="8826499" y="920749"/>
+            <a:ext cx="2809874" cy="269874"/>
           </a:xfrm>
           <a:prstGeom prst="rect">
             <a:avLst/>
@@ -4602,7 +7294,7 @@
           <a:p>
             <a:pPr algn="l" fontAlgn="base">
               <a:lnSpc>
-                <a:spcPts val="2137"/>
+                <a:spcPts val="2093"/>
               </a:lnSpc>
               <a:spcBef>
                 <a:spcPts val="0"/>
@@ -4610,9 +7302,9 @@
               <a:spcAft>
                 <a:spcPts val="0"/>
               </a:spcAft>
-              <a:defRPr sz="1461" b="1" i="0" lang="zh-CN" dirty="0">
+              <a:defRPr sz="1441" b="1" i="0" lang="zh-CN" dirty="0">
                 <a:solidFill>
-                  <a:srgbClr val="0F4F58"/>
+                  <a:srgbClr val="2B3E57"/>
                 </a:solidFill>
                 <a:latin typeface="Noto Sans CJK SC"/>
                 <a:ea typeface="Noto Sans CJK SC"/>
@@ -4620,29 +7312,77 @@
               </a:defRPr>
             </a:pPr>
             <a:r>
-              <a:rPr sz="1461" b="1" i="0" lang="zh-CN" dirty="0">
+              <a:rPr sz="1441" b="1" i="0" lang="zh-CN" dirty="0">
                 <a:solidFill>
-                  <a:srgbClr val="0F4F58"/>
+                  <a:srgbClr val="2B3E57"/>
                 </a:solidFill>
                 <a:latin typeface="Noto Sans CJK SC"/>
                 <a:ea typeface="Noto Sans CJK SC"/>
                 <a:cs typeface="Noto Sans CJK SC"/>
               </a:rPr>
-              <a:t>组成与热处理</a:t>
-            </a:r>
-          </a:p>
-        </p:txBody>
-      </p:sp>
-      <p:sp>
-        <p:nvSpPr>
-          <p:cNvPr id="24" name="e3_k0" descr="Editable text; source id e3_k0"/>
+              <a:t>近邻体系</a:t>
+            </a:r>
+          </a:p>
+        </p:txBody>
+      </p:sp>
+      <p:sp>
+        <p:nvSpPr>
+          <p:cNvPr id="87" name="l1_s" descr="Editable shape; source id l1_s"/>
+          <p:cNvSpPr/>
+          <p:nvPr/>
+        </p:nvSpPr>
+        <p:spPr>
+          <a:xfrm>
+            <a:off x="8477249" y="1349374"/>
+            <a:ext cx="3159124" cy="460374"/>
+          </a:xfrm>
+          <a:prstGeom prst="roundRect">
+            <a:avLst>
+              <a:gd name="adj" fmla="val 10344"/>
+            </a:avLst>
+          </a:prstGeom>
+          <a:solidFill>
+            <a:srgbClr val="F7F9FB"/>
+          </a:solidFill>
+          <a:ln w="9524">
+            <a:solidFill>
+              <a:srgbClr val="CBD3DA"/>
+            </a:solidFill>
+          </a:ln>
+          <a:effectLst/>
+        </p:spPr>
+        <p:style>
+          <a:lnRef idx="1">
+            <a:schemeClr val="accent1"/>
+          </a:lnRef>
+          <a:fillRef idx="3">
+            <a:schemeClr val="accent1"/>
+          </a:fillRef>
+          <a:effectRef idx="0">
+            <a:schemeClr val="accent1"/>
+          </a:effectRef>
+          <a:fontRef idx="minor">
+            <a:schemeClr val="lt1"/>
+          </a:fontRef>
+        </p:style>
+        <p:txBody>
+          <a:bodyPr rtlCol="0" anchor="ctr"/>
+          <a:lstStyle/>
+          <a:p>
+            <a:pPr algn="ctr"/>
+          </a:p>
+        </p:txBody>
+      </p:sp>
+      <p:sp>
+        <p:nvSpPr>
+          <p:cNvPr id="88" name="l1_s_t" descr="Editable text; source id l1_s_t"/>
           <p:cNvSpPr txBox="1"/>
           <p:nvPr/>
         </p:nvSpPr>
         <p:spPr>
           <a:xfrm>
-            <a:off x="3690588" y="3628734"/>
-            <a:ext cx="3202633" cy="219923"/>
+            <a:off x="8532812" y="1381124"/>
+            <a:ext cx="3047999" cy="396874"/>
           </a:xfrm>
           <a:prstGeom prst="rect">
             <a:avLst/>
@@ -4656,9 +7396,9 @@
           </a:bodyPr>
           <a:lstStyle/>
           <a:p>
-            <a:pPr algn="l" fontAlgn="base">
+            <a:pPr algn="ctr" fontAlgn="base">
               <a:lnSpc>
-                <a:spcPts val="1664"/>
+                <a:spcPts val="1734"/>
               </a:lnSpc>
               <a:spcBef>
                 <a:spcPts val="0"/>
@@ -4666,7 +7406,7 @@
               <a:spcAft>
                 <a:spcPts val="0"/>
               </a:spcAft>
-              <a:defRPr sz="1136" b="0" i="0" lang="zh-CN" dirty="0">
+              <a:defRPr sz="1187" b="0" i="0" lang="zh-CN" dirty="0">
                 <a:solidFill>
                   <a:srgbClr val="3F4854"/>
                 </a:solidFill>
@@ -4676,7 +7416,7 @@
               </a:defRPr>
             </a:pPr>
             <a:r>
-              <a:rPr sz="1136" b="0" i="0" lang="zh-CN" dirty="0">
+              <a:rPr sz="1187" b="0" i="0" lang="zh-CN" dirty="0">
                 <a:solidFill>
                   <a:srgbClr val="3F4854"/>
                 </a:solidFill>
@@ -4684,10 +7424,10 @@
                 <a:ea typeface="DejaVu Sans"/>
                 <a:cs typeface="DejaVu Sans"/>
               </a:rPr>
-              <a:t>Ba/Sr · Zn </a:t>
-            </a:r>
-            <a:r>
-              <a:rPr sz="1136" b="0" i="0" lang="zh-CN" dirty="0">
+              <a:t>Ba2ZnSi2O7 </a:t>
+            </a:r>
+            <a:r>
+              <a:rPr sz="1187" b="0" i="0" lang="zh-CN" dirty="0">
                 <a:solidFill>
                   <a:srgbClr val="3F4854"/>
                 </a:solidFill>
@@ -4695,33 +7435,33 @@
                 <a:ea typeface="Noto Sans CJK SC"/>
                 <a:cs typeface="Noto Sans CJK SC"/>
               </a:rPr>
-              <a:t>位</a:t>
-            </a:r>
-          </a:p>
-        </p:txBody>
-      </p:sp>
-      <p:sp>
-        <p:nvSpPr>
-          <p:cNvPr id="25" name="e4" descr="Editable shape; source id e4"/>
+              <a:t>等</a:t>
+            </a:r>
+          </a:p>
+        </p:txBody>
+      </p:sp>
+      <p:sp>
+        <p:nvSpPr>
+          <p:cNvPr id="89" name="l2" descr="Editable shape; source id l2"/>
           <p:cNvSpPr/>
           <p:nvPr/>
         </p:nvSpPr>
         <p:spPr>
           <a:xfrm>
-            <a:off x="3566881" y="4157925"/>
-            <a:ext cx="3450047" cy="962164"/>
+            <a:off x="8334374" y="3365499"/>
+            <a:ext cx="3444874" cy="1365249"/>
           </a:xfrm>
           <a:prstGeom prst="roundRect">
             <a:avLst>
-              <a:gd name="adj" fmla="val 7142"/>
+              <a:gd name="adj" fmla="val 5232"/>
             </a:avLst>
           </a:prstGeom>
           <a:solidFill>
             <a:srgbClr val="FFFFFF"/>
           </a:solidFill>
-          <a:ln w="10308">
+          <a:ln w="11112">
             <a:solidFill>
-              <a:srgbClr val="1F7F8C"/>
+              <a:srgbClr val="5B7592"/>
             </a:solidFill>
           </a:ln>
           <a:effectLst/>
@@ -4750,14 +7490,14 @@
       </p:sp>
       <p:sp>
         <p:nvSpPr>
-          <p:cNvPr id="26" name="e4_s" descr="Editable shape; source id e4_s"/>
+          <p:cNvPr id="90" name="l2_a" descr="Editable shape; source id l2_a"/>
           <p:cNvSpPr/>
           <p:nvPr/>
         </p:nvSpPr>
         <p:spPr>
           <a:xfrm>
-            <a:off x="3566881" y="4157925"/>
-            <a:ext cx="3450047" cy="54980"/>
+            <a:off x="8334374" y="3365499"/>
+            <a:ext cx="3444874" cy="47624"/>
           </a:xfrm>
           <a:prstGeom prst="roundRect">
             <a:avLst>
@@ -4765,7 +7505,7 @@
             </a:avLst>
           </a:prstGeom>
           <a:solidFill>
-            <a:srgbClr val="1F7F8C"/>
+            <a:srgbClr val="5B7592"/>
           </a:solidFill>
           <a:ln>
             <a:noFill/>
@@ -4794,41 +7534,63 @@
           </a:p>
         </p:txBody>
       </p:sp>
-      <p:pic>
-        <p:nvPicPr>
-          <p:cNvPr id="27" name="e4_i" descr="exact crop of the generated raster (line motif)"/>
-          <p:cNvPicPr>
-            <a:picLocks noChangeAspect="1"/>
-          </p:cNvPicPr>
-          <p:nvPr/>
-        </p:nvPicPr>
-        <p:blipFill>
-          <a:blip r:embed="rId5"/>
-          <a:stretch>
-            <a:fillRect/>
-          </a:stretch>
-        </p:blipFill>
-        <p:spPr>
-          <a:xfrm>
-            <a:off x="3731452" y="4350358"/>
-            <a:ext cx="220666" cy="302394"/>
+      <p:sp>
+        <p:nvSpPr>
+          <p:cNvPr id="91" name="l2_g_b" descr="Editable shape; source id l2_g_b"/>
+          <p:cNvSpPr/>
+          <p:nvPr/>
+        </p:nvSpPr>
+        <p:spPr>
+          <a:xfrm>
+            <a:off x="8508999" y="3611562"/>
+            <a:ext cx="206374" cy="166687"/>
           </a:xfrm>
           <a:prstGeom prst="rect">
             <a:avLst/>
           </a:prstGeom>
-          <a:effectLst/>
-        </p:spPr>
-      </p:pic>
-      <p:sp>
-        <p:nvSpPr>
-          <p:cNvPr id="28" name="e4_t" descr="Editable text; source id e4_t"/>
+          <a:noFill/>
+          <a:ln w="7937">
+            <a:solidFill>
+              <a:srgbClr val="1F2937"/>
+            </a:solidFill>
+            <a:custDash>
+              <a:ds d="238000" sp="204000"/>
+            </a:custDash>
+          </a:ln>
+          <a:effectLst/>
+        </p:spPr>
+        <p:style>
+          <a:lnRef idx="1">
+            <a:schemeClr val="accent1"/>
+          </a:lnRef>
+          <a:fillRef idx="3">
+            <a:schemeClr val="accent1"/>
+          </a:fillRef>
+          <a:effectRef idx="0">
+            <a:schemeClr val="accent1"/>
+          </a:effectRef>
+          <a:fontRef idx="minor">
+            <a:schemeClr val="lt1"/>
+          </a:fontRef>
+        </p:style>
+        <p:txBody>
+          <a:bodyPr rtlCol="0" anchor="ctr"/>
+          <a:lstStyle/>
+          <a:p>
+            <a:pPr algn="ctr"/>
+          </a:p>
+        </p:txBody>
+      </p:sp>
+      <p:sp>
+        <p:nvSpPr>
+          <p:cNvPr id="92" name="l2_t" descr="Editable text; source id l2_t"/>
           <p:cNvSpPr txBox="1"/>
           <p:nvPr/>
         </p:nvSpPr>
         <p:spPr>
           <a:xfrm>
-            <a:off x="4075454" y="4364103"/>
-            <a:ext cx="2817767" cy="274904"/>
+            <a:off x="8826499" y="3555999"/>
+            <a:ext cx="2809874" cy="269874"/>
           </a:xfrm>
           <a:prstGeom prst="rect">
             <a:avLst/>
@@ -4844,7 +7606,7 @@
           <a:p>
             <a:pPr algn="l" fontAlgn="base">
               <a:lnSpc>
-                <a:spcPts val="2137"/>
+                <a:spcPts val="2093"/>
               </a:lnSpc>
               <a:spcBef>
                 <a:spcPts val="0"/>
@@ -4852,9 +7614,9 @@
               <a:spcAft>
                 <a:spcPts val="0"/>
               </a:spcAft>
-              <a:defRPr sz="1461" b="1" i="0" lang="zh-CN" dirty="0">
+              <a:defRPr sz="1441" b="1" i="0" lang="zh-CN" dirty="0">
                 <a:solidFill>
-                  <a:srgbClr val="0F4F58"/>
+                  <a:srgbClr val="2B3E57"/>
                 </a:solidFill>
                 <a:latin typeface="Noto Sans CJK SC"/>
                 <a:ea typeface="Noto Sans CJK SC"/>
@@ -4862,29 +7624,77 @@
               </a:defRPr>
             </a:pPr>
             <a:r>
-              <a:rPr sz="1461" b="1" i="0" lang="zh-CN" dirty="0">
+              <a:rPr sz="1441" b="1" i="0" lang="zh-CN" dirty="0">
                 <a:solidFill>
-                  <a:srgbClr val="0F4F58"/>
+                  <a:srgbClr val="2B3E57"/>
                 </a:solidFill>
                 <a:latin typeface="Noto Sans CJK SC"/>
                 <a:ea typeface="Noto Sans CJK SC"/>
                 <a:cs typeface="Noto Sans CJK SC"/>
               </a:rPr>
-              <a:t>玻璃析晶</a:t>
-            </a:r>
-          </a:p>
-        </p:txBody>
-      </p:sp>
-      <p:sp>
-        <p:nvSpPr>
-          <p:cNvPr id="29" name="e4_k0" descr="Editable text; source id e4_k0"/>
+              <a:t>证据边界</a:t>
+            </a:r>
+          </a:p>
+        </p:txBody>
+      </p:sp>
+      <p:sp>
+        <p:nvSpPr>
+          <p:cNvPr id="93" name="l2_s" descr="Editable shape; source id l2_s"/>
+          <p:cNvSpPr/>
+          <p:nvPr/>
+        </p:nvSpPr>
+        <p:spPr>
+          <a:xfrm>
+            <a:off x="8477249" y="3984624"/>
+            <a:ext cx="3159124" cy="460374"/>
+          </a:xfrm>
+          <a:prstGeom prst="roundRect">
+            <a:avLst>
+              <a:gd name="adj" fmla="val 10344"/>
+            </a:avLst>
+          </a:prstGeom>
+          <a:solidFill>
+            <a:srgbClr val="F7F9FB"/>
+          </a:solidFill>
+          <a:ln w="9524">
+            <a:solidFill>
+              <a:srgbClr val="CBD3DA"/>
+            </a:solidFill>
+          </a:ln>
+          <a:effectLst/>
+        </p:spPr>
+        <p:style>
+          <a:lnRef idx="1">
+            <a:schemeClr val="accent1"/>
+          </a:lnRef>
+          <a:fillRef idx="3">
+            <a:schemeClr val="accent1"/>
+          </a:fillRef>
+          <a:effectRef idx="0">
+            <a:schemeClr val="accent1"/>
+          </a:effectRef>
+          <a:fontRef idx="minor">
+            <a:schemeClr val="lt1"/>
+          </a:fontRef>
+        </p:style>
+        <p:txBody>
+          <a:bodyPr rtlCol="0" anchor="ctr"/>
+          <a:lstStyle/>
+          <a:p>
+            <a:pPr algn="ctr"/>
+          </a:p>
+        </p:txBody>
+      </p:sp>
+      <p:sp>
+        <p:nvSpPr>
+          <p:cNvPr id="94" name="l2_s_t" descr="Editable text; source id l2_s_t"/>
           <p:cNvSpPr txBox="1"/>
           <p:nvPr/>
         </p:nvSpPr>
         <p:spPr>
           <a:xfrm>
-            <a:off x="3690588" y="4693988"/>
-            <a:ext cx="3202633" cy="219923"/>
+            <a:off x="8532812" y="4016374"/>
+            <a:ext cx="3047999" cy="396874"/>
           </a:xfrm>
           <a:prstGeom prst="rect">
             <a:avLst/>
@@ -4898,9 +7708,9 @@
           </a:bodyPr>
           <a:lstStyle/>
           <a:p>
-            <a:pPr algn="l" fontAlgn="base">
+            <a:pPr algn="ctr" fontAlgn="base">
               <a:lnSpc>
-                <a:spcPts val="1664"/>
+                <a:spcPts val="1734"/>
               </a:lnSpc>
               <a:spcBef>
                 <a:spcPts val="0"/>
@@ -4908,7 +7718,7 @@
               <a:spcAft>
                 <a:spcPts val="0"/>
               </a:spcAft>
-              <a:defRPr sz="1136" b="0" i="0" lang="zh-CN" dirty="0">
+              <a:defRPr sz="1187" b="0" i="0" lang="zh-CN" dirty="0">
                 <a:solidFill>
                   <a:srgbClr val="3F4854"/>
                 </a:solidFill>
@@ -4918,7 +7728,7 @@
               </a:defRPr>
             </a:pPr>
             <a:r>
-              <a:rPr sz="1136" b="0" i="0" lang="zh-CN" dirty="0">
+              <a:rPr sz="1187" b="0" i="0" lang="zh-CN" dirty="0">
                 <a:solidFill>
                   <a:srgbClr val="3F4854"/>
                 </a:solidFill>
@@ -4926,10 +7736,10 @@
                 <a:ea typeface="Noto Sans CJK SC"/>
                 <a:cs typeface="Noto Sans CJK SC"/>
               </a:rPr>
-              <a:t>成核</a:t>
-            </a:r>
-            <a:r>
-              <a:rPr sz="1136" b="0" i="0" lang="zh-CN" dirty="0">
+              <a:t>直接</a:t>
+            </a:r>
+            <a:r>
+              <a:rPr sz="1187" b="0" i="0" lang="zh-CN" dirty="0">
                 <a:solidFill>
                   <a:srgbClr val="3F4854"/>
                 </a:solidFill>
@@ -4937,10 +7747,10 @@
                 <a:ea typeface="DejaVu Sans"/>
                 <a:cs typeface="DejaVu Sans"/>
               </a:rPr>
-              <a:t> · </a:t>
-            </a:r>
-            <a:r>
-              <a:rPr sz="1136" b="0" i="0" lang="zh-CN" dirty="0">
+              <a:t> / </a:t>
+            </a:r>
+            <a:r>
+              <a:rPr sz="1187" b="0" i="0" lang="zh-CN" dirty="0">
                 <a:solidFill>
                   <a:srgbClr val="3F4854"/>
                 </a:solidFill>
@@ -4948,34 +7758,59 @@
                 <a:ea typeface="Noto Sans CJK SC"/>
                 <a:cs typeface="Noto Sans CJK SC"/>
               </a:rPr>
-              <a:t>生长</a:t>
-            </a:r>
-          </a:p>
-        </p:txBody>
-      </p:sp>
-      <p:sp>
-        <p:nvSpPr>
-          <p:cNvPr id="30" name="l1" descr="Editable shape; source id l1"/>
+              <a:t>近邻</a:t>
+            </a:r>
+            <a:r>
+              <a:rPr sz="1187" b="0" i="0" lang="zh-CN" dirty="0">
+                <a:solidFill>
+                  <a:srgbClr val="3F4854"/>
+                </a:solidFill>
+                <a:latin typeface="DejaVu Sans"/>
+                <a:ea typeface="DejaVu Sans"/>
+                <a:cs typeface="DejaVu Sans"/>
+              </a:rPr>
+              <a:t> / </a:t>
+            </a:r>
+            <a:r>
+              <a:rPr sz="1187" b="0" i="0" lang="zh-CN" dirty="0">
+                <a:solidFill>
+                  <a:srgbClr val="3F4854"/>
+                </a:solidFill>
+                <a:latin typeface="Noto Sans CJK SC"/>
+                <a:ea typeface="Noto Sans CJK SC"/>
+                <a:cs typeface="Noto Sans CJK SC"/>
+              </a:rPr>
+              <a:t>推断</a:t>
+            </a:r>
+          </a:p>
+        </p:txBody>
+      </p:sp>
+      <p:sp>
+        <p:nvSpPr>
+          <p:cNvPr id="95" name="l3" descr="Editable shape; source id l3"/>
           <p:cNvSpPr/>
           <p:nvPr/>
         </p:nvSpPr>
         <p:spPr>
           <a:xfrm>
-            <a:off x="8425812" y="1030890"/>
-            <a:ext cx="3319467" cy="1030890"/>
+            <a:off x="8334374" y="6000749"/>
+            <a:ext cx="3444874" cy="1365249"/>
           </a:xfrm>
           <a:prstGeom prst="roundRect">
             <a:avLst>
-              <a:gd name="adj" fmla="val 6666"/>
+              <a:gd name="adj" fmla="val 5232"/>
             </a:avLst>
           </a:prstGeom>
           <a:solidFill>
             <a:srgbClr val="FFFFFF"/>
           </a:solidFill>
-          <a:ln w="10308">
+          <a:ln w="11112">
             <a:solidFill>
-              <a:srgbClr val="5B7592"/>
+              <a:srgbClr val="C48A24"/>
             </a:solidFill>
+            <a:custDash>
+              <a:ds d="857143" sp="571429"/>
+            </a:custDash>
           </a:ln>
           <a:effectLst/>
         </p:spPr>
@@ -5003,25 +7838,23 @@
       </p:sp>
       <p:sp>
         <p:nvSpPr>
-          <p:cNvPr id="31" name="l1_s" descr="Editable shape; source id l1_s"/>
+          <p:cNvPr id="96" name="l3_g_s0" descr="Editable shape; source id l3_g_s0"/>
           <p:cNvSpPr/>
           <p:nvPr/>
         </p:nvSpPr>
         <p:spPr>
           <a:xfrm>
-            <a:off x="8425812" y="1030890"/>
-            <a:ext cx="3319467" cy="54980"/>
-          </a:xfrm>
-          <a:prstGeom prst="roundRect">
-            <a:avLst>
-              <a:gd name="adj" fmla="val 50000"/>
-            </a:avLst>
-          </a:prstGeom>
-          <a:solidFill>
-            <a:srgbClr val="5B7592"/>
-          </a:solidFill>
-          <a:ln>
-            <a:noFill/>
+            <a:off x="8524874" y="6183312"/>
+            <a:ext cx="126999" cy="190499"/>
+          </a:xfrm>
+          <a:prstGeom prst="rect">
+            <a:avLst/>
+          </a:prstGeom>
+          <a:noFill/>
+          <a:ln w="7937">
+            <a:solidFill>
+              <a:srgbClr val="1F2937"/>
+            </a:solidFill>
           </a:ln>
           <a:effectLst/>
         </p:spPr>
@@ -5047,41 +7880,268 @@
           </a:p>
         </p:txBody>
       </p:sp>
-      <p:pic>
-        <p:nvPicPr>
-          <p:cNvPr id="32" name="l1_i" descr="exact crop of the generated raster (line motif)"/>
-          <p:cNvPicPr>
-            <a:picLocks noChangeAspect="1"/>
-          </p:cNvPicPr>
-          <p:nvPr/>
-        </p:nvPicPr>
-        <p:blipFill>
-          <a:blip r:embed="rId6"/>
-          <a:stretch>
-            <a:fillRect/>
-          </a:stretch>
-        </p:blipFill>
-        <p:spPr>
-          <a:xfrm>
-            <a:off x="8552268" y="1237068"/>
-            <a:ext cx="296896" cy="302394"/>
-          </a:xfrm>
-          <a:prstGeom prst="rect">
-            <a:avLst/>
-          </a:prstGeom>
-          <a:effectLst/>
-        </p:spPr>
-      </p:pic>
-      <p:sp>
-        <p:nvSpPr>
-          <p:cNvPr id="33" name="l1_t" descr="Editable text; source id l1_t"/>
+      <p:cxnSp>
+        <p:nvCxnSpPr>
+          <p:cNvPr id="97" name="l3_g_l1" descr="Editable line; source id l3_g_l1"/>
+          <p:cNvCxnSpPr/>
+          <p:nvPr/>
+        </p:nvCxnSpPr>
+        <p:spPr>
+          <a:xfrm>
+            <a:off x="8556624" y="6254749"/>
+            <a:ext cx="87313" cy="0"/>
+          </a:xfrm>
+          <a:prstGeom prst="line">
+            <a:avLst/>
+          </a:prstGeom>
+          <a:ln w="7937">
+            <a:solidFill>
+              <a:srgbClr val="1F2937"/>
+            </a:solidFill>
+          </a:ln>
+          <a:effectLst/>
+        </p:spPr>
+        <p:style>
+          <a:lnRef idx="2">
+            <a:schemeClr val="accent1"/>
+          </a:lnRef>
+          <a:fillRef idx="0">
+            <a:schemeClr val="accent1"/>
+          </a:fillRef>
+          <a:effectRef idx="0">
+            <a:schemeClr val="accent1"/>
+          </a:effectRef>
+          <a:fontRef idx="minor">
+            <a:schemeClr val="tx1"/>
+          </a:fontRef>
+        </p:style>
+      </p:cxnSp>
+      <p:cxnSp>
+        <p:nvCxnSpPr>
+          <p:cNvPr id="98" name="l3_g_l2" descr="Editable line; source id l3_g_l2"/>
+          <p:cNvCxnSpPr/>
+          <p:nvPr/>
+        </p:nvCxnSpPr>
+        <p:spPr>
+          <a:xfrm>
+            <a:off x="8556624" y="6286499"/>
+            <a:ext cx="87313" cy="0"/>
+          </a:xfrm>
+          <a:prstGeom prst="line">
+            <a:avLst/>
+          </a:prstGeom>
+          <a:ln w="7937">
+            <a:solidFill>
+              <a:srgbClr val="1F2937"/>
+            </a:solidFill>
+          </a:ln>
+          <a:effectLst/>
+        </p:spPr>
+        <p:style>
+          <a:lnRef idx="2">
+            <a:schemeClr val="accent1"/>
+          </a:lnRef>
+          <a:fillRef idx="0">
+            <a:schemeClr val="accent1"/>
+          </a:fillRef>
+          <a:effectRef idx="0">
+            <a:schemeClr val="accent1"/>
+          </a:effectRef>
+          <a:fontRef idx="minor">
+            <a:schemeClr val="tx1"/>
+          </a:fontRef>
+        </p:style>
+      </p:cxnSp>
+      <p:cxnSp>
+        <p:nvCxnSpPr>
+          <p:cNvPr id="99" name="l3_g_l3" descr="Editable line; source id l3_g_l3"/>
+          <p:cNvCxnSpPr/>
+          <p:nvPr/>
+        </p:nvCxnSpPr>
+        <p:spPr>
+          <a:xfrm>
+            <a:off x="8556624" y="6326187"/>
+            <a:ext cx="63500" cy="0"/>
+          </a:xfrm>
+          <a:prstGeom prst="line">
+            <a:avLst/>
+          </a:prstGeom>
+          <a:ln w="7937">
+            <a:solidFill>
+              <a:srgbClr val="1F2937"/>
+            </a:solidFill>
+          </a:ln>
+          <a:effectLst/>
+        </p:spPr>
+        <p:style>
+          <a:lnRef idx="2">
+            <a:schemeClr val="accent1"/>
+          </a:lnRef>
+          <a:fillRef idx="0">
+            <a:schemeClr val="accent1"/>
+          </a:fillRef>
+          <a:effectRef idx="0">
+            <a:schemeClr val="accent1"/>
+          </a:effectRef>
+          <a:fontRef idx="minor">
+            <a:schemeClr val="tx1"/>
+          </a:fontRef>
+        </p:style>
+      </p:cxnSp>
+      <p:cxnSp>
+        <p:nvCxnSpPr>
+          <p:cNvPr id="100" name="l3_g_q_0" descr="Editable line; source id l3_g_q_0"/>
+          <p:cNvCxnSpPr/>
+          <p:nvPr/>
+        </p:nvCxnSpPr>
+        <p:spPr>
+          <a:xfrm>
+            <a:off x="8588374" y="6262687"/>
+            <a:ext cx="39688" cy="0"/>
+          </a:xfrm>
+          <a:prstGeom prst="line">
+            <a:avLst/>
+          </a:prstGeom>
+          <a:ln w="7937">
+            <a:solidFill>
+              <a:srgbClr val="1F2937"/>
+            </a:solidFill>
+          </a:ln>
+          <a:effectLst/>
+        </p:spPr>
+        <p:style>
+          <a:lnRef idx="2">
+            <a:schemeClr val="accent1"/>
+          </a:lnRef>
+          <a:fillRef idx="0">
+            <a:schemeClr val="accent1"/>
+          </a:fillRef>
+          <a:effectRef idx="0">
+            <a:schemeClr val="accent1"/>
+          </a:effectRef>
+          <a:fontRef idx="minor">
+            <a:schemeClr val="tx1"/>
+          </a:fontRef>
+        </p:style>
+      </p:cxnSp>
+      <p:cxnSp>
+        <p:nvCxnSpPr>
+          <p:cNvPr id="101" name="l3_g_q_1" descr="Editable line; source id l3_g_q_1"/>
+          <p:cNvCxnSpPr/>
+          <p:nvPr/>
+        </p:nvCxnSpPr>
+        <p:spPr>
+          <a:xfrm>
+            <a:off x="8628062" y="6262687"/>
+            <a:ext cx="0" cy="39687"/>
+          </a:xfrm>
+          <a:prstGeom prst="line">
+            <a:avLst/>
+          </a:prstGeom>
+          <a:ln w="7937">
+            <a:solidFill>
+              <a:srgbClr val="1F2937"/>
+            </a:solidFill>
+          </a:ln>
+          <a:effectLst/>
+        </p:spPr>
+        <p:style>
+          <a:lnRef idx="2">
+            <a:schemeClr val="accent1"/>
+          </a:lnRef>
+          <a:fillRef idx="0">
+            <a:schemeClr val="accent1"/>
+          </a:fillRef>
+          <a:effectRef idx="0">
+            <a:schemeClr val="accent1"/>
+          </a:effectRef>
+          <a:fontRef idx="minor">
+            <a:schemeClr val="tx1"/>
+          </a:fontRef>
+        </p:style>
+      </p:cxnSp>
+      <p:cxnSp>
+        <p:nvCxnSpPr>
+          <p:cNvPr id="102" name="l3_g_q_2" descr="Editable line; source id l3_g_q_2"/>
+          <p:cNvCxnSpPr/>
+          <p:nvPr/>
+        </p:nvCxnSpPr>
+        <p:spPr>
+          <a:xfrm flipH="1">
+            <a:off x="8604249" y="6302374"/>
+            <a:ext cx="23813" cy="0"/>
+          </a:xfrm>
+          <a:prstGeom prst="line">
+            <a:avLst/>
+          </a:prstGeom>
+          <a:ln w="7937">
+            <a:solidFill>
+              <a:srgbClr val="1F2937"/>
+            </a:solidFill>
+          </a:ln>
+          <a:effectLst/>
+        </p:spPr>
+        <p:style>
+          <a:lnRef idx="2">
+            <a:schemeClr val="accent1"/>
+          </a:lnRef>
+          <a:fillRef idx="0">
+            <a:schemeClr val="accent1"/>
+          </a:fillRef>
+          <a:effectRef idx="0">
+            <a:schemeClr val="accent1"/>
+          </a:effectRef>
+          <a:fontRef idx="minor">
+            <a:schemeClr val="tx1"/>
+          </a:fontRef>
+        </p:style>
+      </p:cxnSp>
+      <p:cxnSp>
+        <p:nvCxnSpPr>
+          <p:cNvPr id="103" name="l3_g_q_3" descr="Editable line; source id l3_g_q_3"/>
+          <p:cNvCxnSpPr/>
+          <p:nvPr/>
+        </p:nvCxnSpPr>
+        <p:spPr>
+          <a:xfrm>
+            <a:off x="8604249" y="6302374"/>
+            <a:ext cx="0" cy="31750"/>
+          </a:xfrm>
+          <a:prstGeom prst="line">
+            <a:avLst/>
+          </a:prstGeom>
+          <a:ln w="7937">
+            <a:solidFill>
+              <a:srgbClr val="1F2937"/>
+            </a:solidFill>
+          </a:ln>
+          <a:effectLst/>
+        </p:spPr>
+        <p:style>
+          <a:lnRef idx="2">
+            <a:schemeClr val="accent1"/>
+          </a:lnRef>
+          <a:fillRef idx="0">
+            <a:schemeClr val="accent1"/>
+          </a:fillRef>
+          <a:effectRef idx="0">
+            <a:schemeClr val="accent1"/>
+          </a:effectRef>
+          <a:fontRef idx="minor">
+            <a:schemeClr val="tx1"/>
+          </a:fontRef>
+        </p:style>
+      </p:cxnSp>
+      <p:sp>
+        <p:nvSpPr>
+          <p:cNvPr id="104" name="l3_t" descr="Editable text; source id l3_t"/>
           <p:cNvSpPr txBox="1"/>
           <p:nvPr/>
         </p:nvSpPr>
         <p:spPr>
           <a:xfrm>
-            <a:off x="8934385" y="1250813"/>
-            <a:ext cx="2687188" cy="274904"/>
+            <a:off x="8826499" y="6143624"/>
+            <a:ext cx="2809874" cy="269874"/>
           </a:xfrm>
           <a:prstGeom prst="rect">
             <a:avLst/>
@@ -5097,7 +8157,7 @@
           <a:p>
             <a:pPr algn="l" fontAlgn="base">
               <a:lnSpc>
-                <a:spcPts val="2137"/>
+                <a:spcPts val="1687"/>
               </a:lnSpc>
               <a:spcBef>
                 <a:spcPts val="0"/>
@@ -5105,39 +8165,87 @@
               <a:spcAft>
                 <a:spcPts val="0"/>
               </a:spcAft>
-              <a:defRPr sz="1461" b="1" i="0" lang="zh-CN" dirty="0">
+              <a:defRPr sz="1441" b="1" i="0" lang="zh-CN" dirty="0">
                 <a:solidFill>
-                  <a:srgbClr val="2B3E57"/>
+                  <a:srgbClr val="7A5410"/>
                 </a:solidFill>
-                <a:latin typeface="Noto Sans CJK SC"/>
-                <a:ea typeface="Noto Sans CJK SC"/>
-                <a:cs typeface="Noto Sans CJK SC"/>
+                <a:latin typeface="DejaVu Sans"/>
+                <a:ea typeface="DejaVu Sans"/>
+                <a:cs typeface="DejaVu Sans"/>
               </a:defRPr>
             </a:pPr>
             <a:r>
-              <a:rPr sz="1461" b="1" i="0" lang="zh-CN" dirty="0">
+              <a:rPr sz="1441" b="1" i="0" lang="zh-CN" dirty="0">
                 <a:solidFill>
-                  <a:srgbClr val="2B3E57"/>
+                  <a:srgbClr val="7A5410"/>
                 </a:solidFill>
-                <a:latin typeface="Noto Sans CJK SC"/>
-                <a:ea typeface="Noto Sans CJK SC"/>
-                <a:cs typeface="Noto Sans CJK SC"/>
+                <a:latin typeface="DejaVu Sans"/>
+                <a:ea typeface="DejaVu Sans"/>
+                <a:cs typeface="DejaVu Sans"/>
               </a:rPr>
-              <a:t>近邻体系</a:t>
-            </a:r>
-          </a:p>
-        </p:txBody>
-      </p:sp>
-      <p:sp>
-        <p:nvSpPr>
-          <p:cNvPr id="34" name="l1_k0" descr="Editable text; source id l1_k0"/>
+              <a:t>Ba5Y12Zn[O(SiO4)]8</a:t>
+            </a:r>
+          </a:p>
+        </p:txBody>
+      </p:sp>
+      <p:sp>
+        <p:nvSpPr>
+          <p:cNvPr id="105" name="l3_s" descr="Editable shape; source id l3_s"/>
+          <p:cNvSpPr/>
+          <p:nvPr/>
+        </p:nvSpPr>
+        <p:spPr>
+          <a:xfrm>
+            <a:off x="8477249" y="6572249"/>
+            <a:ext cx="3159124" cy="460374"/>
+          </a:xfrm>
+          <a:prstGeom prst="roundRect">
+            <a:avLst>
+              <a:gd name="adj" fmla="val 10344"/>
+            </a:avLst>
+          </a:prstGeom>
+          <a:solidFill>
+            <a:srgbClr val="F7F9FB"/>
+          </a:solidFill>
+          <a:ln w="9524">
+            <a:solidFill>
+              <a:srgbClr val="CBD3DA"/>
+            </a:solidFill>
+          </a:ln>
+          <a:effectLst/>
+        </p:spPr>
+        <p:style>
+          <a:lnRef idx="1">
+            <a:schemeClr val="accent1"/>
+          </a:lnRef>
+          <a:fillRef idx="3">
+            <a:schemeClr val="accent1"/>
+          </a:fillRef>
+          <a:effectRef idx="0">
+            <a:schemeClr val="accent1"/>
+          </a:effectRef>
+          <a:fontRef idx="minor">
+            <a:schemeClr val="lt1"/>
+          </a:fontRef>
+        </p:style>
+        <p:txBody>
+          <a:bodyPr rtlCol="0" anchor="ctr"/>
+          <a:lstStyle/>
+          <a:p>
+            <a:pPr algn="ctr"/>
+          </a:p>
+        </p:txBody>
+      </p:sp>
+      <p:sp>
+        <p:nvSpPr>
+          <p:cNvPr id="106" name="l3_s_t" descr="Editable text; source id l3_s_t"/>
           <p:cNvSpPr txBox="1"/>
           <p:nvPr/>
         </p:nvSpPr>
         <p:spPr>
           <a:xfrm>
-            <a:off x="8549519" y="1580698"/>
-            <a:ext cx="3072054" cy="219923"/>
+            <a:off x="8532812" y="6603999"/>
+            <a:ext cx="3047999" cy="396874"/>
           </a:xfrm>
           <a:prstGeom prst="rect">
             <a:avLst/>
@@ -5151,9 +8259,9 @@
           </a:bodyPr>
           <a:lstStyle/>
           <a:p>
-            <a:pPr algn="l" fontAlgn="base">
+            <a:pPr algn="ctr" fontAlgn="base">
               <a:lnSpc>
-                <a:spcPts val="1664"/>
+                <a:spcPts val="1734"/>
               </a:lnSpc>
               <a:spcBef>
                 <a:spcPts val="0"/>
@@ -5161,249 +8269,7 @@
               <a:spcAft>
                 <a:spcPts val="0"/>
               </a:spcAft>
-              <a:defRPr sz="1136" b="0" i="0" lang="zh-CN" dirty="0">
-                <a:solidFill>
-                  <a:srgbClr val="3F4854"/>
-                </a:solidFill>
-                <a:latin typeface="DejaVu Sans"/>
-                <a:ea typeface="DejaVu Sans"/>
-                <a:cs typeface="DejaVu Sans"/>
-              </a:defRPr>
-            </a:pPr>
-            <a:r>
-              <a:rPr sz="1136" b="0" i="0" lang="zh-CN" dirty="0">
-                <a:solidFill>
-                  <a:srgbClr val="3F4854"/>
-                </a:solidFill>
-                <a:latin typeface="DejaVu Sans"/>
-                <a:ea typeface="DejaVu Sans"/>
-                <a:cs typeface="DejaVu Sans"/>
-              </a:rPr>
-              <a:t>Ba2ZnSi2O7 </a:t>
-            </a:r>
-            <a:r>
-              <a:rPr sz="1136" b="0" i="0" lang="zh-CN" dirty="0">
-                <a:solidFill>
-                  <a:srgbClr val="3F4854"/>
-                </a:solidFill>
-                <a:latin typeface="Noto Sans CJK SC"/>
-                <a:ea typeface="Noto Sans CJK SC"/>
-                <a:cs typeface="Noto Sans CJK SC"/>
-              </a:rPr>
-              <a:t>等</a:t>
-            </a:r>
-          </a:p>
-        </p:txBody>
-      </p:sp>
-      <p:sp>
-        <p:nvSpPr>
-          <p:cNvPr id="35" name="l2" descr="Editable shape; source id l2"/>
-          <p:cNvSpPr/>
-          <p:nvPr/>
-        </p:nvSpPr>
-        <p:spPr>
-          <a:xfrm>
-            <a:off x="8425812" y="2336685"/>
-            <a:ext cx="3319467" cy="1030890"/>
-          </a:xfrm>
-          <a:prstGeom prst="roundRect">
-            <a:avLst>
-              <a:gd name="adj" fmla="val 6666"/>
-            </a:avLst>
-          </a:prstGeom>
-          <a:solidFill>
-            <a:srgbClr val="FFFFFF"/>
-          </a:solidFill>
-          <a:ln w="10308">
-            <a:solidFill>
-              <a:srgbClr val="5B7592"/>
-            </a:solidFill>
-          </a:ln>
-          <a:effectLst/>
-        </p:spPr>
-        <p:style>
-          <a:lnRef idx="1">
-            <a:schemeClr val="accent1"/>
-          </a:lnRef>
-          <a:fillRef idx="3">
-            <a:schemeClr val="accent1"/>
-          </a:fillRef>
-          <a:effectRef idx="0">
-            <a:schemeClr val="accent1"/>
-          </a:effectRef>
-          <a:fontRef idx="minor">
-            <a:schemeClr val="lt1"/>
-          </a:fontRef>
-        </p:style>
-        <p:txBody>
-          <a:bodyPr rtlCol="0" anchor="ctr"/>
-          <a:lstStyle/>
-          <a:p>
-            <a:pPr algn="ctr"/>
-          </a:p>
-        </p:txBody>
-      </p:sp>
-      <p:sp>
-        <p:nvSpPr>
-          <p:cNvPr id="36" name="l2_s" descr="Editable shape; source id l2_s"/>
-          <p:cNvSpPr/>
-          <p:nvPr/>
-        </p:nvSpPr>
-        <p:spPr>
-          <a:xfrm>
-            <a:off x="8425812" y="2336685"/>
-            <a:ext cx="3319467" cy="54980"/>
-          </a:xfrm>
-          <a:prstGeom prst="roundRect">
-            <a:avLst>
-              <a:gd name="adj" fmla="val 50000"/>
-            </a:avLst>
-          </a:prstGeom>
-          <a:solidFill>
-            <a:srgbClr val="5B7592"/>
-          </a:solidFill>
-          <a:ln>
-            <a:noFill/>
-          </a:ln>
-          <a:effectLst/>
-        </p:spPr>
-        <p:style>
-          <a:lnRef idx="1">
-            <a:schemeClr val="accent1"/>
-          </a:lnRef>
-          <a:fillRef idx="3">
-            <a:schemeClr val="accent1"/>
-          </a:fillRef>
-          <a:effectRef idx="0">
-            <a:schemeClr val="accent1"/>
-          </a:effectRef>
-          <a:fontRef idx="minor">
-            <a:schemeClr val="lt1"/>
-          </a:fontRef>
-        </p:style>
-        <p:txBody>
-          <a:bodyPr rtlCol="0" anchor="ctr"/>
-          <a:lstStyle/>
-          <a:p>
-            <a:pPr algn="ctr"/>
-          </a:p>
-        </p:txBody>
-      </p:sp>
-      <p:pic>
-        <p:nvPicPr>
-          <p:cNvPr id="37" name="l2_i" descr="exact crop of the generated raster (line motif)"/>
-          <p:cNvPicPr>
-            <a:picLocks noChangeAspect="1"/>
-          </p:cNvPicPr>
-          <p:nvPr/>
-        </p:nvPicPr>
-        <p:blipFill>
-          <a:blip r:embed="rId7"/>
-          <a:stretch>
-            <a:fillRect/>
-          </a:stretch>
-        </p:blipFill>
-        <p:spPr>
-          <a:xfrm>
-            <a:off x="8552268" y="2542863"/>
-            <a:ext cx="296896" cy="302394"/>
-          </a:xfrm>
-          <a:prstGeom prst="rect">
-            <a:avLst/>
-          </a:prstGeom>
-          <a:effectLst/>
-        </p:spPr>
-      </p:pic>
-      <p:sp>
-        <p:nvSpPr>
-          <p:cNvPr id="38" name="l2_t" descr="Editable text; source id l2_t"/>
-          <p:cNvSpPr txBox="1"/>
-          <p:nvPr/>
-        </p:nvSpPr>
-        <p:spPr>
-          <a:xfrm>
-            <a:off x="8934385" y="2556608"/>
-            <a:ext cx="2687188" cy="274904"/>
-          </a:xfrm>
-          <a:prstGeom prst="rect">
-            <a:avLst/>
-          </a:prstGeom>
-          <a:noFill/>
-          <a:effectLst/>
-        </p:spPr>
-        <p:txBody>
-          <a:bodyPr wrap="none" anchor="ctr" tIns="0" rIns="0" bIns="0" lIns="0" anchorCtr="0" vertOverflow="overflow">
-            <a:noAutofit/>
-          </a:bodyPr>
-          <a:lstStyle/>
-          <a:p>
-            <a:pPr algn="l" fontAlgn="base">
-              <a:lnSpc>
-                <a:spcPts val="2137"/>
-              </a:lnSpc>
-              <a:spcBef>
-                <a:spcPts val="0"/>
-              </a:spcBef>
-              <a:spcAft>
-                <a:spcPts val="0"/>
-              </a:spcAft>
-              <a:defRPr sz="1461" b="1" i="0" lang="zh-CN" dirty="0">
-                <a:solidFill>
-                  <a:srgbClr val="2B3E57"/>
-                </a:solidFill>
-                <a:latin typeface="Noto Sans CJK SC"/>
-                <a:ea typeface="Noto Sans CJK SC"/>
-                <a:cs typeface="Noto Sans CJK SC"/>
-              </a:defRPr>
-            </a:pPr>
-            <a:r>
-              <a:rPr sz="1461" b="1" i="0" lang="zh-CN" dirty="0">
-                <a:solidFill>
-                  <a:srgbClr val="2B3E57"/>
-                </a:solidFill>
-                <a:latin typeface="Noto Sans CJK SC"/>
-                <a:ea typeface="Noto Sans CJK SC"/>
-                <a:cs typeface="Noto Sans CJK SC"/>
-              </a:rPr>
-              <a:t>证据边界</a:t>
-            </a:r>
-          </a:p>
-        </p:txBody>
-      </p:sp>
-      <p:sp>
-        <p:nvSpPr>
-          <p:cNvPr id="39" name="l2_k0" descr="Editable text; source id l2_k0"/>
-          <p:cNvSpPr txBox="1"/>
-          <p:nvPr/>
-        </p:nvSpPr>
-        <p:spPr>
-          <a:xfrm>
-            <a:off x="8549519" y="2886493"/>
-            <a:ext cx="3072054" cy="219923"/>
-          </a:xfrm>
-          <a:prstGeom prst="rect">
-            <a:avLst/>
-          </a:prstGeom>
-          <a:noFill/>
-          <a:effectLst/>
-        </p:spPr>
-        <p:txBody>
-          <a:bodyPr wrap="none" anchor="ctr" tIns="0" rIns="0" bIns="0" lIns="0" anchorCtr="0" vertOverflow="overflow">
-            <a:noAutofit/>
-          </a:bodyPr>
-          <a:lstStyle/>
-          <a:p>
-            <a:pPr algn="l" fontAlgn="base">
-              <a:lnSpc>
-                <a:spcPts val="1664"/>
-              </a:lnSpc>
-              <a:spcBef>
-                <a:spcPts val="0"/>
-              </a:spcBef>
-              <a:spcAft>
-                <a:spcPts val="0"/>
-              </a:spcAft>
-              <a:defRPr sz="1136" b="0" i="0" lang="zh-CN" dirty="0">
+              <a:defRPr sz="1187" b="0" i="0" lang="zh-CN" dirty="0">
                 <a:solidFill>
                   <a:srgbClr val="3F4854"/>
                 </a:solidFill>
@@ -5413,239 +8279,7 @@
               </a:defRPr>
             </a:pPr>
             <a:r>
-              <a:rPr sz="1136" b="0" i="0" lang="zh-CN" dirty="0">
-                <a:solidFill>
-                  <a:srgbClr val="3F4854"/>
-                </a:solidFill>
-                <a:latin typeface="Noto Sans CJK SC"/>
-                <a:ea typeface="Noto Sans CJK SC"/>
-                <a:cs typeface="Noto Sans CJK SC"/>
-              </a:rPr>
-              <a:t>直接</a:t>
-            </a:r>
-            <a:r>
-              <a:rPr sz="1136" b="0" i="0" lang="zh-CN" dirty="0">
-                <a:solidFill>
-                  <a:srgbClr val="3F4854"/>
-                </a:solidFill>
-                <a:latin typeface="DejaVu Sans"/>
-                <a:ea typeface="DejaVu Sans"/>
-                <a:cs typeface="DejaVu Sans"/>
-              </a:rPr>
-              <a:t> / </a:t>
-            </a:r>
-            <a:r>
-              <a:rPr sz="1136" b="0" i="0" lang="zh-CN" dirty="0">
-                <a:solidFill>
-                  <a:srgbClr val="3F4854"/>
-                </a:solidFill>
-                <a:latin typeface="Noto Sans CJK SC"/>
-                <a:ea typeface="Noto Sans CJK SC"/>
-                <a:cs typeface="Noto Sans CJK SC"/>
-              </a:rPr>
-              <a:t>近邻</a:t>
-            </a:r>
-            <a:r>
-              <a:rPr sz="1136" b="0" i="0" lang="zh-CN" dirty="0">
-                <a:solidFill>
-                  <a:srgbClr val="3F4854"/>
-                </a:solidFill>
-                <a:latin typeface="DejaVu Sans"/>
-                <a:ea typeface="DejaVu Sans"/>
-                <a:cs typeface="DejaVu Sans"/>
-              </a:rPr>
-              <a:t> / </a:t>
-            </a:r>
-            <a:r>
-              <a:rPr sz="1136" b="0" i="0" lang="zh-CN" dirty="0">
-                <a:solidFill>
-                  <a:srgbClr val="3F4854"/>
-                </a:solidFill>
-                <a:latin typeface="Noto Sans CJK SC"/>
-                <a:ea typeface="Noto Sans CJK SC"/>
-                <a:cs typeface="Noto Sans CJK SC"/>
-              </a:rPr>
-              <a:t>推断</a:t>
-            </a:r>
-          </a:p>
-        </p:txBody>
-      </p:sp>
-      <p:sp>
-        <p:nvSpPr>
-          <p:cNvPr id="40" name="l3" descr="Editable shape; source id l3"/>
-          <p:cNvSpPr/>
-          <p:nvPr/>
-        </p:nvSpPr>
-        <p:spPr>
-          <a:xfrm>
-            <a:off x="8425812" y="3642480"/>
-            <a:ext cx="3319467" cy="1030890"/>
-          </a:xfrm>
-          <a:prstGeom prst="roundRect">
-            <a:avLst>
-              <a:gd name="adj" fmla="val 6666"/>
-            </a:avLst>
-          </a:prstGeom>
-          <a:solidFill>
-            <a:srgbClr val="FFFFFF"/>
-          </a:solidFill>
-          <a:ln w="10308">
-            <a:solidFill>
-              <a:srgbClr val="C48A24"/>
-            </a:solidFill>
-            <a:custDash>
-              <a:ds d="866667" sp="533333"/>
-            </a:custDash>
-          </a:ln>
-          <a:effectLst/>
-        </p:spPr>
-        <p:style>
-          <a:lnRef idx="1">
-            <a:schemeClr val="accent1"/>
-          </a:lnRef>
-          <a:fillRef idx="3">
-            <a:schemeClr val="accent1"/>
-          </a:fillRef>
-          <a:effectRef idx="0">
-            <a:schemeClr val="accent1"/>
-          </a:effectRef>
-          <a:fontRef idx="minor">
-            <a:schemeClr val="lt1"/>
-          </a:fontRef>
-        </p:style>
-        <p:txBody>
-          <a:bodyPr rtlCol="0" anchor="ctr"/>
-          <a:lstStyle/>
-          <a:p>
-            <a:pPr algn="ctr"/>
-          </a:p>
-        </p:txBody>
-      </p:sp>
-      <p:pic>
-        <p:nvPicPr>
-          <p:cNvPr id="41" name="l3_i" descr="exact crop of the generated raster (line motif)"/>
-          <p:cNvPicPr>
-            <a:picLocks noChangeAspect="1"/>
-          </p:cNvPicPr>
-          <p:nvPr/>
-        </p:nvPicPr>
-        <p:blipFill>
-          <a:blip r:embed="rId8"/>
-          <a:stretch>
-            <a:fillRect/>
-          </a:stretch>
-        </p:blipFill>
-        <p:spPr>
-          <a:xfrm>
-            <a:off x="8567458" y="3793677"/>
-            <a:ext cx="266517" cy="302394"/>
-          </a:xfrm>
-          <a:prstGeom prst="rect">
-            <a:avLst/>
-          </a:prstGeom>
-          <a:effectLst/>
-        </p:spPr>
-      </p:pic>
-      <p:sp>
-        <p:nvSpPr>
-          <p:cNvPr id="42" name="l3_t" descr="Editable text; source id l3_t"/>
-          <p:cNvSpPr txBox="1"/>
-          <p:nvPr/>
-        </p:nvSpPr>
-        <p:spPr>
-          <a:xfrm>
-            <a:off x="8934385" y="3807422"/>
-            <a:ext cx="2687188" cy="274904"/>
-          </a:xfrm>
-          <a:prstGeom prst="rect">
-            <a:avLst/>
-          </a:prstGeom>
-          <a:noFill/>
-          <a:effectLst/>
-        </p:spPr>
-        <p:txBody>
-          <a:bodyPr wrap="none" anchor="ctr" tIns="0" rIns="0" bIns="0" lIns="0" anchorCtr="0" vertOverflow="overflow">
-            <a:noAutofit/>
-          </a:bodyPr>
-          <a:lstStyle/>
-          <a:p>
-            <a:pPr algn="l" fontAlgn="base">
-              <a:lnSpc>
-                <a:spcPts val="1718"/>
-              </a:lnSpc>
-              <a:spcBef>
-                <a:spcPts val="0"/>
-              </a:spcBef>
-              <a:spcAft>
-                <a:spcPts val="0"/>
-              </a:spcAft>
-              <a:defRPr sz="1461" b="1" i="0" lang="zh-CN" dirty="0">
-                <a:solidFill>
-                  <a:srgbClr val="7A5410"/>
-                </a:solidFill>
-                <a:latin typeface="DejaVu Sans"/>
-                <a:ea typeface="DejaVu Sans"/>
-                <a:cs typeface="DejaVu Sans"/>
-              </a:defRPr>
-            </a:pPr>
-            <a:r>
-              <a:rPr sz="1461" b="1" i="0" lang="zh-CN" dirty="0">
-                <a:solidFill>
-                  <a:srgbClr val="7A5410"/>
-                </a:solidFill>
-                <a:latin typeface="DejaVu Sans"/>
-                <a:ea typeface="DejaVu Sans"/>
-                <a:cs typeface="DejaVu Sans"/>
-              </a:rPr>
-              <a:t>Ba5Y12Zn[O(SiO4)]8</a:t>
-            </a:r>
-          </a:p>
-        </p:txBody>
-      </p:sp>
-      <p:sp>
-        <p:nvSpPr>
-          <p:cNvPr id="43" name="l3_k0" descr="Editable text; source id l3_k0"/>
-          <p:cNvSpPr txBox="1"/>
-          <p:nvPr/>
-        </p:nvSpPr>
-        <p:spPr>
-          <a:xfrm>
-            <a:off x="8549519" y="4137307"/>
-            <a:ext cx="3072054" cy="219923"/>
-          </a:xfrm>
-          <a:prstGeom prst="rect">
-            <a:avLst/>
-          </a:prstGeom>
-          <a:noFill/>
-          <a:effectLst/>
-        </p:spPr>
-        <p:txBody>
-          <a:bodyPr wrap="none" anchor="ctr" tIns="0" rIns="0" bIns="0" lIns="0" anchorCtr="0" vertOverflow="overflow">
-            <a:noAutofit/>
-          </a:bodyPr>
-          <a:lstStyle/>
-          <a:p>
-            <a:pPr algn="l" fontAlgn="base">
-              <a:lnSpc>
-                <a:spcPts val="1664"/>
-              </a:lnSpc>
-              <a:spcBef>
-                <a:spcPts val="0"/>
-              </a:spcBef>
-              <a:spcAft>
-                <a:spcPts val="0"/>
-              </a:spcAft>
-              <a:defRPr sz="1136" b="0" i="0" lang="zh-CN" dirty="0">
-                <a:solidFill>
-                  <a:srgbClr val="3F4854"/>
-                </a:solidFill>
-                <a:latin typeface="Noto Sans CJK SC"/>
-                <a:ea typeface="Noto Sans CJK SC"/>
-                <a:cs typeface="Noto Sans CJK SC"/>
-              </a:defRPr>
-            </a:pPr>
-            <a:r>
-              <a:rPr sz="1136" b="0" i="0" lang="zh-CN" dirty="0">
+              <a:rPr sz="1187" b="0" i="0" lang="zh-CN" dirty="0">
                 <a:solidFill>
                   <a:srgbClr val="3F4854"/>
                 </a:solidFill>
@@ -5660,19 +8294,19 @@
       </p:sp>
       <p:cxnSp>
         <p:nvCxnSpPr>
-          <p:cNvPr id="44" name="t0_0" descr="Editable line; source id t0_0"/>
+          <p:cNvPr id="107" name="t0_0" descr="Editable line; source id t0_0"/>
           <p:cNvCxnSpPr/>
           <p:nvPr/>
         </p:nvCxnSpPr>
         <p:spPr>
           <a:xfrm>
-            <a:off x="2261086" y="3023945"/>
-            <a:ext cx="556681" cy="0"/>
+            <a:off x="2397124" y="4032249"/>
+            <a:ext cx="349250" cy="0"/>
           </a:xfrm>
           <a:prstGeom prst="line">
             <a:avLst/>
           </a:prstGeom>
-          <a:ln w="13745">
+          <a:ln w="14287">
             <a:solidFill>
               <a:srgbClr val="4B5563"/>
             </a:solidFill>
@@ -5696,19 +8330,19 @@
       </p:cxnSp>
       <p:cxnSp>
         <p:nvCxnSpPr>
-          <p:cNvPr id="45" name="tv_0" descr="Editable line; source id tv_0"/>
+          <p:cNvPr id="108" name="tv_0" descr="Editable line; source id tv_0"/>
           <p:cNvCxnSpPr/>
           <p:nvPr/>
         </p:nvCxnSpPr>
         <p:spPr>
           <a:xfrm>
-            <a:off x="2817767" y="1443246"/>
-            <a:ext cx="0" cy="3195761"/>
+            <a:off x="2746374" y="1333499"/>
+            <a:ext cx="0" cy="5715000"/>
           </a:xfrm>
           <a:prstGeom prst="line">
             <a:avLst/>
           </a:prstGeom>
-          <a:ln w="13745">
+          <a:ln w="14287">
             <a:solidFill>
               <a:srgbClr val="4B5563"/>
             </a:solidFill>
@@ -5732,118 +8366,14 @@
       </p:cxnSp>
       <p:sp>
         <p:nvSpPr>
-          <p:cNvPr id="46" name="s0_p" descr="Editable shape; source id s0_p"/>
+          <p:cNvPr id="109" name="s_e1_0" descr="Editable line; source id s_e1_0"/>
           <p:cNvSpPr/>
           <p:nvPr/>
         </p:nvSpPr>
         <p:spPr>
           <a:xfrm>
-            <a:off x="2920856" y="1305794"/>
-            <a:ext cx="522317" cy="281776"/>
-          </a:xfrm>
-          <a:prstGeom prst="roundRect">
-            <a:avLst>
-              <a:gd name="adj" fmla="val 50000"/>
-            </a:avLst>
-          </a:prstGeom>
-          <a:solidFill>
-            <a:srgbClr val="FFFFFF"/>
-          </a:solidFill>
-          <a:ln w="8247">
-            <a:solidFill>
-              <a:srgbClr val="C6CCD1"/>
-            </a:solidFill>
-          </a:ln>
-          <a:effectLst/>
-        </p:spPr>
-        <p:style>
-          <a:lnRef idx="1">
-            <a:schemeClr val="accent1"/>
-          </a:lnRef>
-          <a:fillRef idx="3">
-            <a:schemeClr val="accent1"/>
-          </a:fillRef>
-          <a:effectRef idx="0">
-            <a:schemeClr val="accent1"/>
-          </a:effectRef>
-          <a:fontRef idx="minor">
-            <a:schemeClr val="lt1"/>
-          </a:fontRef>
-        </p:style>
-        <p:txBody>
-          <a:bodyPr rtlCol="0" anchor="ctr"/>
-          <a:lstStyle/>
-          <a:p>
-            <a:pPr algn="ctr"/>
-          </a:p>
-        </p:txBody>
-      </p:sp>
-      <p:sp>
-        <p:nvSpPr>
-          <p:cNvPr id="47" name="s0_p_t" descr="Editable text; source id s0_p_t"/>
-          <p:cNvSpPr txBox="1"/>
-          <p:nvPr/>
-        </p:nvSpPr>
-        <p:spPr>
-          <a:xfrm>
-            <a:off x="3003327" y="1333285"/>
-            <a:ext cx="357375" cy="213050"/>
-          </a:xfrm>
-          <a:prstGeom prst="rect">
-            <a:avLst/>
-          </a:prstGeom>
-          <a:noFill/>
-          <a:effectLst/>
-        </p:spPr>
-        <p:txBody>
-          <a:bodyPr wrap="none" anchor="ctr" tIns="0" rIns="0" bIns="0" lIns="0" anchorCtr="0" vertOverflow="overflow">
-            <a:noAutofit/>
-          </a:bodyPr>
-          <a:lstStyle/>
-          <a:p>
-            <a:pPr algn="ctr" fontAlgn="base">
-              <a:lnSpc>
-                <a:spcPts val="1420"/>
-              </a:lnSpc>
-              <a:spcBef>
-                <a:spcPts val="0"/>
-              </a:spcBef>
-              <a:spcAft>
-                <a:spcPts val="0"/>
-              </a:spcAft>
-              <a:defRPr sz="974" b="0" i="0" lang="zh-CN" dirty="0">
-                <a:solidFill>
-                  <a:srgbClr val="3F4854"/>
-                </a:solidFill>
-                <a:latin typeface="Noto Sans CJK SC"/>
-                <a:ea typeface="Noto Sans CJK SC"/>
-                <a:cs typeface="Noto Sans CJK SC"/>
-              </a:defRPr>
-            </a:pPr>
-            <a:r>
-              <a:rPr sz="974" b="0" i="0" lang="zh-CN" dirty="0">
-                <a:solidFill>
-                  <a:srgbClr val="3F4854"/>
-                </a:solidFill>
-                <a:latin typeface="Noto Sans CJK SC"/>
-                <a:ea typeface="Noto Sans CJK SC"/>
-                <a:cs typeface="Noto Sans CJK SC"/>
-              </a:rPr>
-              <a:t>结构</a:t>
-            </a:r>
-          </a:p>
-        </p:txBody>
-      </p:sp>
-      <p:sp>
-        <p:nvSpPr>
-          <p:cNvPr id="48" name="s0_0" descr="Editable line; source id s0_0"/>
-          <p:cNvSpPr/>
-          <p:nvPr/>
-        </p:nvSpPr>
-        <p:spPr>
-          <a:xfrm>
-            <a:off x="2817768" y="1405448"/>
-            <a:ext cx="735369" cy="75599"/>
+            <a:off x="2746375" y="1293812"/>
+            <a:ext cx="619125" cy="79375"/>
           </a:xfrm>
           <a:custGeom>
             <a:avLst/>
@@ -5852,27 +8382,27 @@
             <a:cxnLst/>
             <a:rect l="l" t="t" r="r" b="b"/>
             <a:pathLst>
-              <a:path w="107000" h="11000">
+              <a:path w="78000" h="10000">
                 <a:moveTo>
-                  <a:pt x="0" y="4500"/>
+                  <a:pt x="0" y="4100"/>
                 </a:moveTo>
                 <a:lnTo>
-                  <a:pt x="94000" y="4500"/>
+                  <a:pt x="66000" y="4100"/>
                 </a:lnTo>
                 <a:lnTo>
-                  <a:pt x="94000" y="0"/>
+                  <a:pt x="66000" y="0"/>
                 </a:lnTo>
                 <a:lnTo>
-                  <a:pt x="107000" y="5500"/>
+                  <a:pt x="78000" y="5000"/>
                 </a:lnTo>
                 <a:lnTo>
-                  <a:pt x="94000" y="11000"/>
+                  <a:pt x="66000" y="10000"/>
                 </a:lnTo>
                 <a:lnTo>
-                  <a:pt x="94000" y="6500"/>
+                  <a:pt x="66000" y="5900"/>
                 </a:lnTo>
                 <a:lnTo>
-                  <a:pt x="0" y="6500"/>
+                  <a:pt x="0" y="5900"/>
                 </a:lnTo>
                 <a:close/>
               </a:path>
@@ -5910,14 +8440,14 @@
       </p:sp>
       <p:sp>
         <p:nvSpPr>
-          <p:cNvPr id="49" name="s1_p" descr="Editable shape; source id s1_p"/>
+          <p:cNvPr id="110" name="s_e1_p" descr="Editable shape; source id s_e1_p"/>
           <p:cNvSpPr/>
           <p:nvPr/>
         </p:nvSpPr>
         <p:spPr>
           <a:xfrm>
-            <a:off x="2920856" y="2364175"/>
-            <a:ext cx="522317" cy="281776"/>
+            <a:off x="2778124" y="936624"/>
+            <a:ext cx="555624" cy="293687"/>
           </a:xfrm>
           <a:prstGeom prst="roundRect">
             <a:avLst>
@@ -5927,9 +8457,9 @@
           <a:solidFill>
             <a:srgbClr val="FFFFFF"/>
           </a:solidFill>
-          <a:ln w="8247">
+          <a:ln w="8731">
             <a:solidFill>
-              <a:srgbClr val="C6CCD1"/>
+              <a:srgbClr val="CBD3DA"/>
             </a:solidFill>
           </a:ln>
           <a:effectLst/>
@@ -5958,14 +8488,14 @@
       </p:sp>
       <p:sp>
         <p:nvSpPr>
-          <p:cNvPr id="50" name="s1_p_t" descr="Editable text; source id s1_p_t"/>
+          <p:cNvPr id="111" name="s_e1_p_t" descr="Editable text; source id s_e1_p_t"/>
           <p:cNvSpPr txBox="1"/>
           <p:nvPr/>
         </p:nvSpPr>
         <p:spPr>
           <a:xfrm>
-            <a:off x="3003327" y="2405411"/>
-            <a:ext cx="357375" cy="213050"/>
+            <a:off x="2857499" y="968374"/>
+            <a:ext cx="396874" cy="230187"/>
           </a:xfrm>
           <a:prstGeom prst="rect">
             <a:avLst/>
@@ -5981,7 +8511,7 @@
           <a:p>
             <a:pPr algn="ctr" fontAlgn="base">
               <a:lnSpc>
-                <a:spcPts val="1420"/>
+                <a:spcPts val="1546"/>
               </a:lnSpc>
               <a:spcBef>
                 <a:spcPts val="0"/>
@@ -5989,7 +8519,7 @@
               <a:spcAft>
                 <a:spcPts val="0"/>
               </a:spcAft>
-              <a:defRPr sz="974" b="0" i="0" lang="zh-CN" dirty="0">
+              <a:defRPr sz="1062" b="0" i="0" lang="zh-CN" dirty="0">
                 <a:solidFill>
                   <a:srgbClr val="3F4854"/>
                 </a:solidFill>
@@ -5999,7 +8529,7 @@
               </a:defRPr>
             </a:pPr>
             <a:r>
-              <a:rPr sz="974" b="0" i="0" lang="zh-CN" dirty="0">
+              <a:rPr sz="1062" b="0" i="0" lang="zh-CN" dirty="0">
                 <a:solidFill>
                   <a:srgbClr val="3F4854"/>
                 </a:solidFill>
@@ -6007,21 +8537,21 @@
                 <a:ea typeface="Noto Sans CJK SC"/>
                 <a:cs typeface="Noto Sans CJK SC"/>
               </a:rPr>
-              <a:t>制备</a:t>
-            </a:r>
-          </a:p>
-        </p:txBody>
-      </p:sp>
-      <p:sp>
-        <p:nvSpPr>
-          <p:cNvPr id="51" name="s1_0" descr="Editable line; source id s1_0"/>
+              <a:t>结构</a:t>
+            </a:r>
+          </a:p>
+        </p:txBody>
+      </p:sp>
+      <p:sp>
+        <p:nvSpPr>
+          <p:cNvPr id="112" name="s_e2_0" descr="Editable line; source id s_e2_0"/>
           <p:cNvSpPr/>
           <p:nvPr/>
         </p:nvSpPr>
         <p:spPr>
           <a:xfrm>
-            <a:off x="2817768" y="2470701"/>
-            <a:ext cx="735369" cy="75599"/>
+            <a:off x="2746375" y="3198812"/>
+            <a:ext cx="619125" cy="79375"/>
           </a:xfrm>
           <a:custGeom>
             <a:avLst/>
@@ -6030,27 +8560,27 @@
             <a:cxnLst/>
             <a:rect l="l" t="t" r="r" b="b"/>
             <a:pathLst>
-              <a:path w="107000" h="11000">
+              <a:path w="78000" h="10000">
                 <a:moveTo>
-                  <a:pt x="0" y="4500"/>
+                  <a:pt x="0" y="4100"/>
                 </a:moveTo>
                 <a:lnTo>
-                  <a:pt x="94000" y="4500"/>
+                  <a:pt x="66000" y="4100"/>
                 </a:lnTo>
                 <a:lnTo>
-                  <a:pt x="94000" y="0"/>
+                  <a:pt x="66000" y="0"/>
                 </a:lnTo>
                 <a:lnTo>
-                  <a:pt x="107000" y="5500"/>
+                  <a:pt x="78000" y="5000"/>
                 </a:lnTo>
                 <a:lnTo>
-                  <a:pt x="94000" y="11000"/>
+                  <a:pt x="66000" y="10000"/>
                 </a:lnTo>
                 <a:lnTo>
-                  <a:pt x="94000" y="6500"/>
+                  <a:pt x="66000" y="5900"/>
                 </a:lnTo>
                 <a:lnTo>
-                  <a:pt x="0" y="6500"/>
+                  <a:pt x="0" y="5900"/>
                 </a:lnTo>
                 <a:close/>
               </a:path>
@@ -6088,14 +8618,14 @@
       </p:sp>
       <p:sp>
         <p:nvSpPr>
-          <p:cNvPr id="52" name="s2_p" descr="Editable shape; source id s2_p"/>
+          <p:cNvPr id="113" name="s_e2_p" descr="Editable shape; source id s_e2_p"/>
           <p:cNvSpPr/>
           <p:nvPr/>
         </p:nvSpPr>
         <p:spPr>
           <a:xfrm>
-            <a:off x="2920856" y="3436302"/>
-            <a:ext cx="522317" cy="281776"/>
+            <a:off x="2778124" y="2841624"/>
+            <a:ext cx="555624" cy="293687"/>
           </a:xfrm>
           <a:prstGeom prst="roundRect">
             <a:avLst>
@@ -6105,9 +8635,9 @@
           <a:solidFill>
             <a:srgbClr val="FFFFFF"/>
           </a:solidFill>
-          <a:ln w="8247">
+          <a:ln w="8731">
             <a:solidFill>
-              <a:srgbClr val="C6CCD1"/>
+              <a:srgbClr val="CBD3DA"/>
             </a:solidFill>
           </a:ln>
           <a:effectLst/>
@@ -6136,14 +8666,14 @@
       </p:sp>
       <p:sp>
         <p:nvSpPr>
-          <p:cNvPr id="53" name="s2_p_t" descr="Editable text; source id s2_p_t"/>
+          <p:cNvPr id="114" name="s_e2_p_t" descr="Editable text; source id s_e2_p_t"/>
           <p:cNvSpPr txBox="1"/>
           <p:nvPr/>
         </p:nvSpPr>
         <p:spPr>
           <a:xfrm>
-            <a:off x="3003327" y="3463792"/>
-            <a:ext cx="357375" cy="213050"/>
+            <a:off x="2857499" y="2873374"/>
+            <a:ext cx="396874" cy="230187"/>
           </a:xfrm>
           <a:prstGeom prst="rect">
             <a:avLst/>
@@ -6159,7 +8689,7 @@
           <a:p>
             <a:pPr algn="ctr" fontAlgn="base">
               <a:lnSpc>
-                <a:spcPts val="1420"/>
+                <a:spcPts val="1546"/>
               </a:lnSpc>
               <a:spcBef>
                 <a:spcPts val="0"/>
@@ -6167,7 +8697,7 @@
               <a:spcAft>
                 <a:spcPts val="0"/>
               </a:spcAft>
-              <a:defRPr sz="974" b="0" i="0" lang="zh-CN" dirty="0">
+              <a:defRPr sz="1062" b="0" i="0" lang="zh-CN" dirty="0">
                 <a:solidFill>
                   <a:srgbClr val="3F4854"/>
                 </a:solidFill>
@@ -6177,7 +8707,7 @@
               </a:defRPr>
             </a:pPr>
             <a:r>
-              <a:rPr sz="974" b="0" i="0" lang="zh-CN" dirty="0">
+              <a:rPr sz="1062" b="0" i="0" lang="zh-CN" dirty="0">
                 <a:solidFill>
                   <a:srgbClr val="3F4854"/>
                 </a:solidFill>
@@ -6185,21 +8715,21 @@
                 <a:ea typeface="Noto Sans CJK SC"/>
                 <a:cs typeface="Noto Sans CJK SC"/>
               </a:rPr>
-              <a:t>变量</a:t>
-            </a:r>
-          </a:p>
-        </p:txBody>
-      </p:sp>
-      <p:sp>
-        <p:nvSpPr>
-          <p:cNvPr id="54" name="s2_0" descr="Editable line; source id s2_0"/>
+              <a:t>制备</a:t>
+            </a:r>
+          </a:p>
+        </p:txBody>
+      </p:sp>
+      <p:sp>
+        <p:nvSpPr>
+          <p:cNvPr id="115" name="s_e3_0" descr="Editable line; source id s_e3_0"/>
           <p:cNvSpPr/>
           <p:nvPr/>
         </p:nvSpPr>
         <p:spPr>
           <a:xfrm>
-            <a:off x="2817768" y="3535955"/>
-            <a:ext cx="735369" cy="75599"/>
+            <a:off x="2746375" y="5103812"/>
+            <a:ext cx="619125" cy="79375"/>
           </a:xfrm>
           <a:custGeom>
             <a:avLst/>
@@ -6208,27 +8738,27 @@
             <a:cxnLst/>
             <a:rect l="l" t="t" r="r" b="b"/>
             <a:pathLst>
-              <a:path w="107000" h="11000">
+              <a:path w="78000" h="10000">
                 <a:moveTo>
-                  <a:pt x="0" y="4500"/>
+                  <a:pt x="0" y="4100"/>
                 </a:moveTo>
                 <a:lnTo>
-                  <a:pt x="94000" y="4500"/>
+                  <a:pt x="66000" y="4100"/>
                 </a:lnTo>
                 <a:lnTo>
-                  <a:pt x="94000" y="0"/>
+                  <a:pt x="66000" y="0"/>
                 </a:lnTo>
                 <a:lnTo>
-                  <a:pt x="107000" y="5500"/>
+                  <a:pt x="78000" y="5000"/>
                 </a:lnTo>
                 <a:lnTo>
-                  <a:pt x="94000" y="11000"/>
+                  <a:pt x="66000" y="10000"/>
                 </a:lnTo>
                 <a:lnTo>
-                  <a:pt x="94000" y="6500"/>
+                  <a:pt x="66000" y="5900"/>
                 </a:lnTo>
                 <a:lnTo>
-                  <a:pt x="0" y="6500"/>
+                  <a:pt x="0" y="5900"/>
                 </a:lnTo>
                 <a:close/>
               </a:path>
@@ -6266,14 +8796,14 @@
       </p:sp>
       <p:sp>
         <p:nvSpPr>
-          <p:cNvPr id="55" name="s3_p" descr="Editable shape; source id s3_p"/>
+          <p:cNvPr id="116" name="s_e3_p" descr="Editable shape; source id s_e3_p"/>
           <p:cNvSpPr/>
           <p:nvPr/>
         </p:nvSpPr>
         <p:spPr>
           <a:xfrm>
-            <a:off x="2920856" y="4494683"/>
-            <a:ext cx="522317" cy="281776"/>
+            <a:off x="2778124" y="4746624"/>
+            <a:ext cx="555624" cy="293687"/>
           </a:xfrm>
           <a:prstGeom prst="roundRect">
             <a:avLst>
@@ -6283,9 +8813,9 @@
           <a:solidFill>
             <a:srgbClr val="FFFFFF"/>
           </a:solidFill>
-          <a:ln w="8247">
+          <a:ln w="8731">
             <a:solidFill>
-              <a:srgbClr val="C6CCD1"/>
+              <a:srgbClr val="CBD3DA"/>
             </a:solidFill>
           </a:ln>
           <a:effectLst/>
@@ -6314,14 +8844,14 @@
       </p:sp>
       <p:sp>
         <p:nvSpPr>
-          <p:cNvPr id="56" name="s3_p_t" descr="Editable text; source id s3_p_t"/>
+          <p:cNvPr id="117" name="s_e3_p_t" descr="Editable text; source id s_e3_p_t"/>
           <p:cNvSpPr txBox="1"/>
           <p:nvPr/>
         </p:nvSpPr>
         <p:spPr>
           <a:xfrm>
-            <a:off x="3003327" y="4535918"/>
-            <a:ext cx="357375" cy="213050"/>
+            <a:off x="2857499" y="4778374"/>
+            <a:ext cx="396874" cy="230187"/>
           </a:xfrm>
           <a:prstGeom prst="rect">
             <a:avLst/>
@@ -6337,7 +8867,7 @@
           <a:p>
             <a:pPr algn="ctr" fontAlgn="base">
               <a:lnSpc>
-                <a:spcPts val="1420"/>
+                <a:spcPts val="1546"/>
               </a:lnSpc>
               <a:spcBef>
                 <a:spcPts val="0"/>
@@ -6345,7 +8875,7 @@
               <a:spcAft>
                 <a:spcPts val="0"/>
               </a:spcAft>
-              <a:defRPr sz="974" b="0" i="0" lang="zh-CN" dirty="0">
+              <a:defRPr sz="1062" b="0" i="0" lang="zh-CN" dirty="0">
                 <a:solidFill>
                   <a:srgbClr val="3F4854"/>
                 </a:solidFill>
@@ -6355,7 +8885,7 @@
               </a:defRPr>
             </a:pPr>
             <a:r>
-              <a:rPr sz="974" b="0" i="0" lang="zh-CN" dirty="0">
+              <a:rPr sz="1062" b="0" i="0" lang="zh-CN" dirty="0">
                 <a:solidFill>
                   <a:srgbClr val="3F4854"/>
                 </a:solidFill>
@@ -6363,21 +8893,21 @@
                 <a:ea typeface="Noto Sans CJK SC"/>
                 <a:cs typeface="Noto Sans CJK SC"/>
               </a:rPr>
-              <a:t>晶化</a:t>
-            </a:r>
-          </a:p>
-        </p:txBody>
-      </p:sp>
-      <p:sp>
-        <p:nvSpPr>
-          <p:cNvPr id="57" name="s3_0" descr="Editable line; source id s3_0"/>
+              <a:t>变量</a:t>
+            </a:r>
+          </a:p>
+        </p:txBody>
+      </p:sp>
+      <p:sp>
+        <p:nvSpPr>
+          <p:cNvPr id="118" name="s_e4_0" descr="Editable line; source id s_e4_0"/>
           <p:cNvSpPr/>
           <p:nvPr/>
         </p:nvSpPr>
         <p:spPr>
           <a:xfrm>
-            <a:off x="2817768" y="4601208"/>
-            <a:ext cx="735369" cy="75599"/>
+            <a:off x="2746375" y="7008812"/>
+            <a:ext cx="619125" cy="79375"/>
           </a:xfrm>
           <a:custGeom>
             <a:avLst/>
@@ -6386,27 +8916,27 @@
             <a:cxnLst/>
             <a:rect l="l" t="t" r="r" b="b"/>
             <a:pathLst>
-              <a:path w="107000" h="11000">
+              <a:path w="78000" h="10000">
                 <a:moveTo>
-                  <a:pt x="0" y="4500"/>
+                  <a:pt x="0" y="4100"/>
                 </a:moveTo>
                 <a:lnTo>
-                  <a:pt x="94000" y="4500"/>
+                  <a:pt x="66000" y="4100"/>
                 </a:lnTo>
                 <a:lnTo>
-                  <a:pt x="94000" y="0"/>
+                  <a:pt x="66000" y="0"/>
                 </a:lnTo>
                 <a:lnTo>
-                  <a:pt x="107000" y="5500"/>
+                  <a:pt x="78000" y="5000"/>
                 </a:lnTo>
                 <a:lnTo>
-                  <a:pt x="94000" y="11000"/>
+                  <a:pt x="66000" y="10000"/>
                 </a:lnTo>
                 <a:lnTo>
-                  <a:pt x="94000" y="6500"/>
+                  <a:pt x="66000" y="5900"/>
                 </a:lnTo>
                 <a:lnTo>
-                  <a:pt x="0" y="6500"/>
+                  <a:pt x="0" y="5900"/>
                 </a:lnTo>
                 <a:close/>
               </a:path>
@@ -6442,124 +8972,16 @@
           </a:p>
         </p:txBody>
       </p:sp>
-      <p:cxnSp>
-        <p:nvCxnSpPr>
-          <p:cNvPr id="58" name="u0_0" descr="Editable line; source id u0_0"/>
-          <p:cNvCxnSpPr/>
-          <p:nvPr/>
-        </p:nvCxnSpPr>
-        <p:spPr>
-          <a:xfrm>
-            <a:off x="1250813" y="5326268"/>
-            <a:ext cx="0" cy="323012"/>
-          </a:xfrm>
-          <a:prstGeom prst="line">
-            <a:avLst/>
-          </a:prstGeom>
-          <a:ln w="13745">
-            <a:solidFill>
-              <a:srgbClr val="4B5563"/>
-            </a:solidFill>
-          </a:ln>
-          <a:effectLst/>
-        </p:spPr>
-        <p:style>
-          <a:lnRef idx="2">
-            <a:schemeClr val="accent1"/>
-          </a:lnRef>
-          <a:fillRef idx="0">
-            <a:schemeClr val="accent1"/>
-          </a:fillRef>
-          <a:effectRef idx="0">
-            <a:schemeClr val="accent1"/>
-          </a:effectRef>
-          <a:fontRef idx="minor">
-            <a:schemeClr val="tx1"/>
-          </a:fontRef>
-        </p:style>
-      </p:cxnSp>
-      <p:cxnSp>
-        <p:nvCxnSpPr>
-          <p:cNvPr id="59" name="u0_1" descr="Editable line; source id u0_1"/>
-          <p:cNvCxnSpPr/>
-          <p:nvPr/>
-        </p:nvCxnSpPr>
-        <p:spPr>
-          <a:xfrm>
-            <a:off x="1250813" y="5649280"/>
-            <a:ext cx="6652681" cy="0"/>
-          </a:xfrm>
-          <a:prstGeom prst="line">
-            <a:avLst/>
-          </a:prstGeom>
-          <a:ln w="13745">
-            <a:solidFill>
-              <a:srgbClr val="4B5563"/>
-            </a:solidFill>
-          </a:ln>
-          <a:effectLst/>
-        </p:spPr>
-        <p:style>
-          <a:lnRef idx="2">
-            <a:schemeClr val="accent1"/>
-          </a:lnRef>
-          <a:fillRef idx="0">
-            <a:schemeClr val="accent1"/>
-          </a:fillRef>
-          <a:effectRef idx="0">
-            <a:schemeClr val="accent1"/>
-          </a:effectRef>
-          <a:fontRef idx="minor">
-            <a:schemeClr val="tx1"/>
-          </a:fontRef>
-        </p:style>
-      </p:cxnSp>
-      <p:cxnSp>
-        <p:nvCxnSpPr>
-          <p:cNvPr id="60" name="uv_0" descr="Editable line; source id uv_0"/>
-          <p:cNvCxnSpPr/>
-          <p:nvPr/>
-        </p:nvCxnSpPr>
-        <p:spPr>
-          <a:xfrm>
-            <a:off x="7903494" y="1546335"/>
-            <a:ext cx="0" cy="4102945"/>
-          </a:xfrm>
-          <a:prstGeom prst="line">
-            <a:avLst/>
-          </a:prstGeom>
-          <a:ln w="13745">
-            <a:solidFill>
-              <a:srgbClr val="4B5563"/>
-            </a:solidFill>
-          </a:ln>
-          <a:effectLst/>
-        </p:spPr>
-        <p:style>
-          <a:lnRef idx="2">
-            <a:schemeClr val="accent1"/>
-          </a:lnRef>
-          <a:fillRef idx="0">
-            <a:schemeClr val="accent1"/>
-          </a:fillRef>
-          <a:effectRef idx="0">
-            <a:schemeClr val="accent1"/>
-          </a:effectRef>
-          <a:fontRef idx="minor">
-            <a:schemeClr val="tx1"/>
-          </a:fontRef>
-        </p:style>
-      </p:cxnSp>
-      <p:sp>
-        <p:nvSpPr>
-          <p:cNvPr id="61" name="v0_p" descr="Editable shape; source id v0_p"/>
+      <p:sp>
+        <p:nvSpPr>
+          <p:cNvPr id="119" name="s_e4_p" descr="Editable shape; source id s_e4_p"/>
           <p:cNvSpPr/>
           <p:nvPr/>
         </p:nvSpPr>
         <p:spPr>
           <a:xfrm>
-            <a:off x="7896622" y="1402011"/>
-            <a:ext cx="522317" cy="281776"/>
+            <a:off x="2778124" y="6651624"/>
+            <a:ext cx="555624" cy="293687"/>
           </a:xfrm>
           <a:prstGeom prst="roundRect">
             <a:avLst>
@@ -6569,9 +8991,9 @@
           <a:solidFill>
             <a:srgbClr val="FFFFFF"/>
           </a:solidFill>
-          <a:ln w="8247">
+          <a:ln w="8731">
             <a:solidFill>
-              <a:srgbClr val="C6CCD1"/>
+              <a:srgbClr val="CBD3DA"/>
             </a:solidFill>
           </a:ln>
           <a:effectLst/>
@@ -6600,14 +9022,14 @@
       </p:sp>
       <p:sp>
         <p:nvSpPr>
-          <p:cNvPr id="62" name="v0_p_t" descr="Editable text; source id v0_p_t"/>
+          <p:cNvPr id="120" name="s_e4_p_t" descr="Editable text; source id s_e4_p_t"/>
           <p:cNvSpPr txBox="1"/>
           <p:nvPr/>
         </p:nvSpPr>
         <p:spPr>
           <a:xfrm>
-            <a:off x="7979093" y="1443246"/>
-            <a:ext cx="357375" cy="213050"/>
+            <a:off x="2857499" y="6683374"/>
+            <a:ext cx="396874" cy="230187"/>
           </a:xfrm>
           <a:prstGeom prst="rect">
             <a:avLst/>
@@ -6623,7 +9045,7 @@
           <a:p>
             <a:pPr algn="ctr" fontAlgn="base">
               <a:lnSpc>
-                <a:spcPts val="1420"/>
+                <a:spcPts val="1546"/>
               </a:lnSpc>
               <a:spcBef>
                 <a:spcPts val="0"/>
@@ -6631,7 +9053,7 @@
               <a:spcAft>
                 <a:spcPts val="0"/>
               </a:spcAft>
-              <a:defRPr sz="974" b="0" i="0" lang="zh-CN" dirty="0">
+              <a:defRPr sz="1062" b="0" i="0" lang="zh-CN" dirty="0">
                 <a:solidFill>
                   <a:srgbClr val="3F4854"/>
                 </a:solidFill>
@@ -6641,7 +9063,7 @@
               </a:defRPr>
             </a:pPr>
             <a:r>
-              <a:rPr sz="974" b="0" i="0" lang="zh-CN" dirty="0">
+              <a:rPr sz="1062" b="0" i="0" lang="zh-CN" dirty="0">
                 <a:solidFill>
                   <a:srgbClr val="3F4854"/>
                 </a:solidFill>
@@ -6649,21 +9071,129 @@
                 <a:ea typeface="Noto Sans CJK SC"/>
                 <a:cs typeface="Noto Sans CJK SC"/>
               </a:rPr>
-              <a:t>近邻</a:t>
-            </a:r>
-          </a:p>
-        </p:txBody>
-      </p:sp>
-      <p:sp>
-        <p:nvSpPr>
-          <p:cNvPr id="63" name="v0_0" descr="Editable line; source id v0_0"/>
+              <a:t>晶化</a:t>
+            </a:r>
+          </a:p>
+        </p:txBody>
+      </p:sp>
+      <p:cxnSp>
+        <p:nvCxnSpPr>
+          <p:cNvPr id="121" name="u0_0" descr="Editable line; source id u0_0"/>
+          <p:cNvCxnSpPr/>
+          <p:nvPr/>
+        </p:nvCxnSpPr>
+        <p:spPr>
+          <a:xfrm>
+            <a:off x="1301749" y="5429249"/>
+            <a:ext cx="0" cy="2333625"/>
+          </a:xfrm>
+          <a:prstGeom prst="line">
+            <a:avLst/>
+          </a:prstGeom>
+          <a:ln w="14287">
+            <a:solidFill>
+              <a:srgbClr val="4B5563"/>
+            </a:solidFill>
+          </a:ln>
+          <a:effectLst/>
+        </p:spPr>
+        <p:style>
+          <a:lnRef idx="2">
+            <a:schemeClr val="accent1"/>
+          </a:lnRef>
+          <a:fillRef idx="0">
+            <a:schemeClr val="accent1"/>
+          </a:fillRef>
+          <a:effectRef idx="0">
+            <a:schemeClr val="accent1"/>
+          </a:effectRef>
+          <a:fontRef idx="minor">
+            <a:schemeClr val="tx1"/>
+          </a:fontRef>
+        </p:style>
+      </p:cxnSp>
+      <p:cxnSp>
+        <p:nvCxnSpPr>
+          <p:cNvPr id="122" name="u0_1" descr="Editable line; source id u0_1"/>
+          <p:cNvCxnSpPr/>
+          <p:nvPr/>
+        </p:nvCxnSpPr>
+        <p:spPr>
+          <a:xfrm>
+            <a:off x="1301749" y="7762874"/>
+            <a:ext cx="6683375" cy="0"/>
+          </a:xfrm>
+          <a:prstGeom prst="line">
+            <a:avLst/>
+          </a:prstGeom>
+          <a:ln w="14287">
+            <a:solidFill>
+              <a:srgbClr val="4B5563"/>
+            </a:solidFill>
+          </a:ln>
+          <a:effectLst/>
+        </p:spPr>
+        <p:style>
+          <a:lnRef idx="2">
+            <a:schemeClr val="accent1"/>
+          </a:lnRef>
+          <a:fillRef idx="0">
+            <a:schemeClr val="accent1"/>
+          </a:fillRef>
+          <a:effectRef idx="0">
+            <a:schemeClr val="accent1"/>
+          </a:effectRef>
+          <a:fontRef idx="minor">
+            <a:schemeClr val="tx1"/>
+          </a:fontRef>
+        </p:style>
+      </p:cxnSp>
+      <p:cxnSp>
+        <p:nvCxnSpPr>
+          <p:cNvPr id="123" name="u0_2" descr="Editable line; source id u0_2"/>
+          <p:cNvCxnSpPr/>
+          <p:nvPr/>
+        </p:nvCxnSpPr>
+        <p:spPr>
+          <a:xfrm flipV="1">
+            <a:off x="7985124" y="1412874"/>
+            <a:ext cx="0" cy="6350000"/>
+          </a:xfrm>
+          <a:prstGeom prst="line">
+            <a:avLst/>
+          </a:prstGeom>
+          <a:ln w="14287">
+            <a:solidFill>
+              <a:srgbClr val="4B5563"/>
+            </a:solidFill>
+          </a:ln>
+          <a:effectLst/>
+        </p:spPr>
+        <p:style>
+          <a:lnRef idx="2">
+            <a:schemeClr val="accent1"/>
+          </a:lnRef>
+          <a:fillRef idx="0">
+            <a:schemeClr val="accent1"/>
+          </a:fillRef>
+          <a:effectRef idx="0">
+            <a:schemeClr val="accent1"/>
+          </a:effectRef>
+          <a:fontRef idx="minor">
+            <a:schemeClr val="tx1"/>
+          </a:fontRef>
+        </p:style>
+      </p:cxnSp>
+      <p:sp>
+        <p:nvSpPr>
+          <p:cNvPr id="124" name="v_l1_0" descr="Editable line; source id v_l1_0"/>
           <p:cNvSpPr/>
           <p:nvPr/>
         </p:nvSpPr>
         <p:spPr>
           <a:xfrm>
-            <a:off x="7903495" y="1508537"/>
-            <a:ext cx="508573" cy="75599"/>
+            <a:off x="7985125" y="1373187"/>
+            <a:ext cx="317500" cy="79375"/>
           </a:xfrm>
           <a:custGeom>
             <a:avLst/>
@@ -6672,27 +9202,27 @@
             <a:cxnLst/>
             <a:rect l="l" t="t" r="r" b="b"/>
             <a:pathLst>
-              <a:path w="74000" h="11000">
+              <a:path w="40000" h="10000">
                 <a:moveTo>
-                  <a:pt x="0" y="4500"/>
+                  <a:pt x="0" y="4100"/>
                 </a:moveTo>
                 <a:lnTo>
-                  <a:pt x="61000" y="4500"/>
+                  <a:pt x="28000" y="4100"/>
                 </a:lnTo>
                 <a:lnTo>
-                  <a:pt x="61000" y="0"/>
+                  <a:pt x="28000" y="0"/>
                 </a:lnTo>
                 <a:lnTo>
-                  <a:pt x="74000" y="5500"/>
+                  <a:pt x="40000" y="5000"/>
                 </a:lnTo>
                 <a:lnTo>
-                  <a:pt x="61000" y="11000"/>
+                  <a:pt x="28000" y="10000"/>
                 </a:lnTo>
                 <a:lnTo>
-                  <a:pt x="61000" y="6500"/>
+                  <a:pt x="28000" y="5900"/>
                 </a:lnTo>
                 <a:lnTo>
-                  <a:pt x="0" y="6500"/>
+                  <a:pt x="0" y="5900"/>
                 </a:lnTo>
                 <a:close/>
               </a:path>
@@ -6730,14 +9260,14 @@
       </p:sp>
       <p:sp>
         <p:nvSpPr>
-          <p:cNvPr id="64" name="v1_p" descr="Editable shape; source id v1_p"/>
+          <p:cNvPr id="125" name="v_l1_p" descr="Editable shape; source id v_l1_p"/>
           <p:cNvSpPr/>
           <p:nvPr/>
         </p:nvSpPr>
         <p:spPr>
           <a:xfrm>
-            <a:off x="7896622" y="2707806"/>
-            <a:ext cx="522317" cy="281776"/>
+            <a:off x="7866062" y="1015999"/>
+            <a:ext cx="555624" cy="293687"/>
           </a:xfrm>
           <a:prstGeom prst="roundRect">
             <a:avLst>
@@ -6747,9 +9277,9 @@
           <a:solidFill>
             <a:srgbClr val="FFFFFF"/>
           </a:solidFill>
-          <a:ln w="8247">
+          <a:ln w="8731">
             <a:solidFill>
-              <a:srgbClr val="C6CCD1"/>
+              <a:srgbClr val="CBD3DA"/>
             </a:solidFill>
           </a:ln>
           <a:effectLst/>
@@ -6778,14 +9308,14 @@
       </p:sp>
       <p:sp>
         <p:nvSpPr>
-          <p:cNvPr id="65" name="v1_p_t" descr="Editable text; source id v1_p_t"/>
+          <p:cNvPr id="126" name="v_l1_p_t" descr="Editable text; source id v_l1_p_t"/>
           <p:cNvSpPr txBox="1"/>
           <p:nvPr/>
         </p:nvSpPr>
         <p:spPr>
           <a:xfrm>
-            <a:off x="7979093" y="2749041"/>
-            <a:ext cx="357375" cy="213050"/>
+            <a:off x="7945437" y="1047749"/>
+            <a:ext cx="396874" cy="230187"/>
           </a:xfrm>
           <a:prstGeom prst="rect">
             <a:avLst/>
@@ -6801,7 +9331,7 @@
           <a:p>
             <a:pPr algn="ctr" fontAlgn="base">
               <a:lnSpc>
-                <a:spcPts val="1420"/>
+                <a:spcPts val="1546"/>
               </a:lnSpc>
               <a:spcBef>
                 <a:spcPts val="0"/>
@@ -6809,7 +9339,7 @@
               <a:spcAft>
                 <a:spcPts val="0"/>
               </a:spcAft>
-              <a:defRPr sz="974" b="0" i="0" lang="zh-CN" dirty="0">
+              <a:defRPr sz="1062" b="0" i="0" lang="zh-CN" dirty="0">
                 <a:solidFill>
                   <a:srgbClr val="3F4854"/>
                 </a:solidFill>
@@ -6819,7 +9349,7 @@
               </a:defRPr>
             </a:pPr>
             <a:r>
-              <a:rPr sz="974" b="0" i="0" lang="zh-CN" dirty="0">
+              <a:rPr sz="1062" b="0" i="0" lang="zh-CN" dirty="0">
                 <a:solidFill>
                   <a:srgbClr val="3F4854"/>
                 </a:solidFill>
@@ -6827,21 +9357,21 @@
                 <a:ea typeface="Noto Sans CJK SC"/>
                 <a:cs typeface="Noto Sans CJK SC"/>
               </a:rPr>
-              <a:t>判读</a:t>
-            </a:r>
-          </a:p>
-        </p:txBody>
-      </p:sp>
-      <p:sp>
-        <p:nvSpPr>
-          <p:cNvPr id="66" name="v1_0" descr="Editable line; source id v1_0"/>
+              <a:t>近邻</a:t>
+            </a:r>
+          </a:p>
+        </p:txBody>
+      </p:sp>
+      <p:sp>
+        <p:nvSpPr>
+          <p:cNvPr id="127" name="v_l2_0" descr="Editable line; source id v_l2_0"/>
           <p:cNvSpPr/>
           <p:nvPr/>
         </p:nvSpPr>
         <p:spPr>
           <a:xfrm>
-            <a:off x="7903495" y="2814331"/>
-            <a:ext cx="508573" cy="75599"/>
+            <a:off x="7985125" y="4008437"/>
+            <a:ext cx="317500" cy="79375"/>
           </a:xfrm>
           <a:custGeom>
             <a:avLst/>
@@ -6850,27 +9380,27 @@
             <a:cxnLst/>
             <a:rect l="l" t="t" r="r" b="b"/>
             <a:pathLst>
-              <a:path w="74000" h="11000">
+              <a:path w="40000" h="10000">
                 <a:moveTo>
-                  <a:pt x="0" y="4500"/>
+                  <a:pt x="0" y="4100"/>
                 </a:moveTo>
                 <a:lnTo>
-                  <a:pt x="61000" y="4500"/>
+                  <a:pt x="28000" y="4100"/>
                 </a:lnTo>
                 <a:lnTo>
-                  <a:pt x="61000" y="0"/>
+                  <a:pt x="28000" y="0"/>
                 </a:lnTo>
                 <a:lnTo>
-                  <a:pt x="74000" y="5500"/>
+                  <a:pt x="40000" y="5000"/>
                 </a:lnTo>
                 <a:lnTo>
-                  <a:pt x="61000" y="11000"/>
+                  <a:pt x="28000" y="10000"/>
                 </a:lnTo>
                 <a:lnTo>
-                  <a:pt x="61000" y="6500"/>
+                  <a:pt x="28000" y="5900"/>
                 </a:lnTo>
                 <a:lnTo>
-                  <a:pt x="0" y="6500"/>
+                  <a:pt x="0" y="5900"/>
                 </a:lnTo>
                 <a:close/>
               </a:path>
@@ -6908,14 +9438,14 @@
       </p:sp>
       <p:sp>
         <p:nvSpPr>
-          <p:cNvPr id="67" name="v2_p" descr="Editable shape; source id v2_p"/>
+          <p:cNvPr id="128" name="v_l2_p" descr="Editable shape; source id v_l2_p"/>
           <p:cNvSpPr/>
           <p:nvPr/>
         </p:nvSpPr>
         <p:spPr>
           <a:xfrm>
-            <a:off x="7896622" y="4013600"/>
-            <a:ext cx="522317" cy="281776"/>
+            <a:off x="7866062" y="3651249"/>
+            <a:ext cx="555624" cy="293687"/>
           </a:xfrm>
           <a:prstGeom prst="roundRect">
             <a:avLst>
@@ -6925,9 +9455,9 @@
           <a:solidFill>
             <a:srgbClr val="FFFFFF"/>
           </a:solidFill>
-          <a:ln w="8247">
+          <a:ln w="8731">
             <a:solidFill>
-              <a:srgbClr val="C6CCD1"/>
+              <a:srgbClr val="CBD3DA"/>
             </a:solidFill>
           </a:ln>
           <a:effectLst/>
@@ -6956,14 +9486,14 @@
       </p:sp>
       <p:sp>
         <p:nvSpPr>
-          <p:cNvPr id="68" name="v2_p_t" descr="Editable text; source id v2_p_t"/>
+          <p:cNvPr id="129" name="v_l2_p_t" descr="Editable text; source id v_l2_p_t"/>
           <p:cNvSpPr txBox="1"/>
           <p:nvPr/>
         </p:nvSpPr>
         <p:spPr>
           <a:xfrm>
-            <a:off x="7979093" y="4054836"/>
-            <a:ext cx="357375" cy="213050"/>
+            <a:off x="7945437" y="3682999"/>
+            <a:ext cx="396874" cy="230187"/>
           </a:xfrm>
           <a:prstGeom prst="rect">
             <a:avLst/>
@@ -6979,7 +9509,7 @@
           <a:p>
             <a:pPr algn="ctr" fontAlgn="base">
               <a:lnSpc>
-                <a:spcPts val="1420"/>
+                <a:spcPts val="1546"/>
               </a:lnSpc>
               <a:spcBef>
                 <a:spcPts val="0"/>
@@ -6987,7 +9517,7 @@
               <a:spcAft>
                 <a:spcPts val="0"/>
               </a:spcAft>
-              <a:defRPr sz="974" b="0" i="0" lang="zh-CN" dirty="0">
+              <a:defRPr sz="1062" b="0" i="0" lang="zh-CN" dirty="0">
                 <a:solidFill>
                   <a:srgbClr val="3F4854"/>
                 </a:solidFill>
@@ -6997,7 +9527,7 @@
               </a:defRPr>
             </a:pPr>
             <a:r>
-              <a:rPr sz="974" b="0" i="0" lang="zh-CN" dirty="0">
+              <a:rPr sz="1062" b="0" i="0" lang="zh-CN" dirty="0">
                 <a:solidFill>
                   <a:srgbClr val="3F4854"/>
                 </a:solidFill>
@@ -7005,31 +9535,31 @@
                 <a:ea typeface="Noto Sans CJK SC"/>
                 <a:cs typeface="Noto Sans CJK SC"/>
               </a:rPr>
-              <a:t>类比</a:t>
+              <a:t>判读</a:t>
             </a:r>
           </a:p>
         </p:txBody>
       </p:sp>
       <p:cxnSp>
         <p:nvCxnSpPr>
-          <p:cNvPr id="69" name="v2_0" descr="Editable line; source id v2_0"/>
+          <p:cNvPr id="130" name="v_l3_0" descr="Editable line; source id v_l3_0"/>
           <p:cNvCxnSpPr/>
           <p:nvPr/>
         </p:nvCxnSpPr>
         <p:spPr>
           <a:xfrm>
-            <a:off x="7903494" y="4157925"/>
-            <a:ext cx="508573" cy="0"/>
+            <a:off x="7985124" y="6683374"/>
+            <a:ext cx="317500" cy="0"/>
           </a:xfrm>
           <a:prstGeom prst="line">
             <a:avLst/>
           </a:prstGeom>
-          <a:ln w="13745">
+          <a:ln w="14287">
             <a:solidFill>
               <a:srgbClr val="C48A24"/>
             </a:solidFill>
             <a:custDash>
-              <a:ds d="600000" sp="400000"/>
+              <a:ds d="611111" sp="388889"/>
             </a:custDash>
             <a:tailEnd type="triangle"/>
           </a:ln>
@@ -7050,6 +9580,110 @@
           </a:fontRef>
         </p:style>
       </p:cxnSp>
+      <p:sp>
+        <p:nvSpPr>
+          <p:cNvPr id="131" name="v_l3_p" descr="Editable shape; source id v_l3_p"/>
+          <p:cNvSpPr/>
+          <p:nvPr/>
+        </p:nvSpPr>
+        <p:spPr>
+          <a:xfrm>
+            <a:off x="7866062" y="6286499"/>
+            <a:ext cx="555624" cy="293687"/>
+          </a:xfrm>
+          <a:prstGeom prst="roundRect">
+            <a:avLst>
+              <a:gd name="adj" fmla="val 50000"/>
+            </a:avLst>
+          </a:prstGeom>
+          <a:solidFill>
+            <a:srgbClr val="FFF6E3"/>
+          </a:solidFill>
+          <a:ln w="8731">
+            <a:solidFill>
+              <a:srgbClr val="C48A24"/>
+            </a:solidFill>
+          </a:ln>
+          <a:effectLst/>
+        </p:spPr>
+        <p:style>
+          <a:lnRef idx="1">
+            <a:schemeClr val="accent1"/>
+          </a:lnRef>
+          <a:fillRef idx="3">
+            <a:schemeClr val="accent1"/>
+          </a:fillRef>
+          <a:effectRef idx="0">
+            <a:schemeClr val="accent1"/>
+          </a:effectRef>
+          <a:fontRef idx="minor">
+            <a:schemeClr val="lt1"/>
+          </a:fontRef>
+        </p:style>
+        <p:txBody>
+          <a:bodyPr rtlCol="0" anchor="ctr"/>
+          <a:lstStyle/>
+          <a:p>
+            <a:pPr algn="ctr"/>
+          </a:p>
+        </p:txBody>
+      </p:sp>
+      <p:sp>
+        <p:nvSpPr>
+          <p:cNvPr id="132" name="v_l3_p_t" descr="Editable text; source id v_l3_p_t"/>
+          <p:cNvSpPr txBox="1"/>
+          <p:nvPr/>
+        </p:nvSpPr>
+        <p:spPr>
+          <a:xfrm>
+            <a:off x="7945437" y="6318249"/>
+            <a:ext cx="396874" cy="230187"/>
+          </a:xfrm>
+          <a:prstGeom prst="rect">
+            <a:avLst/>
+          </a:prstGeom>
+          <a:noFill/>
+          <a:effectLst/>
+        </p:spPr>
+        <p:txBody>
+          <a:bodyPr wrap="none" anchor="ctr" tIns="0" rIns="0" bIns="0" lIns="0" anchorCtr="0" vertOverflow="overflow">
+            <a:noAutofit/>
+          </a:bodyPr>
+          <a:lstStyle/>
+          <a:p>
+            <a:pPr algn="ctr" fontAlgn="base">
+              <a:lnSpc>
+                <a:spcPts val="1546"/>
+              </a:lnSpc>
+              <a:spcBef>
+                <a:spcPts val="0"/>
+              </a:spcBef>
+              <a:spcAft>
+                <a:spcPts val="0"/>
+              </a:spcAft>
+              <a:defRPr sz="1062" b="0" i="0" lang="zh-CN" dirty="0">
+                <a:solidFill>
+                  <a:srgbClr val="7A5410"/>
+                </a:solidFill>
+                <a:latin typeface="Noto Sans CJK SC"/>
+                <a:ea typeface="Noto Sans CJK SC"/>
+                <a:cs typeface="Noto Sans CJK SC"/>
+              </a:defRPr>
+            </a:pPr>
+            <a:r>
+              <a:rPr sz="1062" b="0" i="0" lang="zh-CN" dirty="0">
+                <a:solidFill>
+                  <a:srgbClr val="7A5410"/>
+                </a:solidFill>
+                <a:latin typeface="Noto Sans CJK SC"/>
+                <a:ea typeface="Noto Sans CJK SC"/>
+                <a:cs typeface="Noto Sans CJK SC"/>
+              </a:rPr>
+              <a:t>类比</a:t>
+            </a:r>
+          </a:p>
+        </p:txBody>
+      </p:sp>
     </p:spTree>
   </p:cSld>
   <p:clrMapOvr>

--- a/media/figstudio/bzso_taxonomy/taxonomy_phase_control_editable.pptx
+++ b/media/figstudio/bzso_taxonomy/taxonomy_phase_control_editable.pptx
@@ -502,7 +502,7 @@
           <a:lstStyle/>
           <a:p>
             <a:r>
-              <a:t>BaZn2Si2O7 合成与相控制分类框架（super_teaser 第四轮 R05 → super_img2ppt 重建）</a:t>
+              <a:t>BaZn2Si2O7 合成与相控制的分类框架（第五轮 F02 双栏对照 → super_img2ppt 重建；箭头一律由枢纽指向分支，全图只有一段虚线）</a:t>
             </a:r>
           </a:p>
         </p:txBody>
@@ -3524,12 +3524,12 @@
         </p:nvSpPr>
         <p:spPr>
           <a:xfrm>
-            <a:off x="3190874" y="222249"/>
-            <a:ext cx="4683124" cy="7683499"/>
+            <a:off x="285749" y="317499"/>
+            <a:ext cx="4921249" cy="7492999"/>
           </a:xfrm>
           <a:prstGeom prst="roundRect">
             <a:avLst>
-              <a:gd name="adj" fmla="val 2372"/>
+              <a:gd name="adj" fmla="val 2258"/>
             </a:avLst>
           </a:prstGeom>
           <a:solidFill>
@@ -3572,8 +3572,8 @@
         </p:nvSpPr>
         <p:spPr>
           <a:xfrm>
-            <a:off x="3333749" y="301624"/>
-            <a:ext cx="904874" cy="293687"/>
+            <a:off x="428624" y="396874"/>
+            <a:ext cx="1063624" cy="357187"/>
           </a:xfrm>
           <a:prstGeom prst="rect">
             <a:avLst/>
@@ -3589,7 +3589,7 @@
           <a:p>
             <a:pPr algn="l" fontAlgn="base">
               <a:lnSpc>
-                <a:spcPts val="1921"/>
+                <a:spcPts val="2359"/>
               </a:lnSpc>
               <a:spcBef>
                 <a:spcPts val="0"/>
@@ -3597,7 +3597,7 @@
               <a:spcAft>
                 <a:spcPts val="0"/>
               </a:spcAft>
-              <a:defRPr sz="1312" b="1" i="0" lang="zh-CN" dirty="0">
+              <a:defRPr sz="1624" b="1" i="0" lang="zh-CN" dirty="0">
                 <a:solidFill>
                   <a:srgbClr val="0F4F58"/>
                 </a:solidFill>
@@ -3607,7 +3607,7 @@
               </a:defRPr>
             </a:pPr>
             <a:r>
-              <a:rPr sz="1312" b="1" i="0" lang="zh-CN" dirty="0">
+              <a:rPr sz="1624" b="1" i="0" lang="zh-CN" dirty="0">
                 <a:solidFill>
                   <a:srgbClr val="0F4F58"/>
                 </a:solidFill>
@@ -3628,12 +3628,12 @@
         </p:nvSpPr>
         <p:spPr>
           <a:xfrm>
-            <a:off x="8127999" y="222249"/>
-            <a:ext cx="3857624" cy="7683499"/>
+            <a:off x="6984999" y="317499"/>
+            <a:ext cx="4889499" cy="7492999"/>
           </a:xfrm>
           <a:prstGeom prst="roundRect">
             <a:avLst>
-              <a:gd name="adj" fmla="val 2880"/>
+              <a:gd name="adj" fmla="val 2272"/>
             </a:avLst>
           </a:prstGeom>
           <a:solidFill>
@@ -3676,8 +3676,8 @@
         </p:nvSpPr>
         <p:spPr>
           <a:xfrm>
-            <a:off x="8270874" y="301624"/>
-            <a:ext cx="904874" cy="293687"/>
+            <a:off x="7127874" y="396874"/>
+            <a:ext cx="1063624" cy="357187"/>
           </a:xfrm>
           <a:prstGeom prst="rect">
             <a:avLst/>
@@ -3693,7 +3693,7 @@
           <a:p>
             <a:pPr algn="l" fontAlgn="base">
               <a:lnSpc>
-                <a:spcPts val="1921"/>
+                <a:spcPts val="2359"/>
               </a:lnSpc>
               <a:spcBef>
                 <a:spcPts val="0"/>
@@ -3701,7 +3701,7 @@
               <a:spcAft>
                 <a:spcPts val="0"/>
               </a:spcAft>
-              <a:defRPr sz="1312" b="1" i="0" lang="zh-CN" dirty="0">
+              <a:defRPr sz="1624" b="1" i="0" lang="zh-CN" dirty="0">
                 <a:solidFill>
                   <a:srgbClr val="2B3E57"/>
                 </a:solidFill>
@@ -3711,7 +3711,7 @@
               </a:defRPr>
             </a:pPr>
             <a:r>
-              <a:rPr sz="1312" b="1" i="0" lang="zh-CN" dirty="0">
+              <a:rPr sz="1624" b="1" i="0" lang="zh-CN" dirty="0">
                 <a:solidFill>
                   <a:srgbClr val="2B3E57"/>
                 </a:solidFill>
@@ -3732,12 +3732,12 @@
         </p:nvSpPr>
         <p:spPr>
           <a:xfrm>
-            <a:off x="238124" y="2666999"/>
-            <a:ext cx="2127249" cy="2730499"/>
+            <a:off x="5222874" y="3016249"/>
+            <a:ext cx="1746249" cy="2222499"/>
           </a:xfrm>
           <a:prstGeom prst="roundRect">
             <a:avLst>
-              <a:gd name="adj" fmla="val 3358"/>
+              <a:gd name="adj" fmla="val 4090"/>
             </a:avLst>
           </a:prstGeom>
           <a:solidFill>
@@ -3772,24 +3772,238 @@
           </a:p>
         </p:txBody>
       </p:sp>
-      <p:sp>
-        <p:nvSpPr>
-          <p:cNvPr id="7" name="hub_a" descr="Editable shape; source id hub_a"/>
+      <p:cxnSp>
+        <p:nvCxnSpPr>
+          <p:cNvPr id="7" name="hub_g_h0" descr="Editable line; source id hub_g_h0"/>
+          <p:cNvCxnSpPr/>
+          <p:nvPr/>
+        </p:nvCxnSpPr>
+        <p:spPr>
+          <a:xfrm>
+            <a:off x="5841999" y="3476624"/>
+            <a:ext cx="508000" cy="0"/>
+          </a:xfrm>
+          <a:prstGeom prst="line">
+            <a:avLst/>
+          </a:prstGeom>
+          <a:ln w="15874">
+            <a:solidFill>
+              <a:srgbClr val="1F2937"/>
+            </a:solidFill>
+          </a:ln>
+          <a:effectLst/>
+        </p:spPr>
+        <p:style>
+          <a:lnRef idx="2">
+            <a:schemeClr val="accent1"/>
+          </a:lnRef>
+          <a:fillRef idx="0">
+            <a:schemeClr val="accent1"/>
+          </a:fillRef>
+          <a:effectRef idx="0">
+            <a:schemeClr val="accent1"/>
+          </a:effectRef>
+          <a:fontRef idx="minor">
+            <a:schemeClr val="tx1"/>
+          </a:fontRef>
+        </p:style>
+      </p:cxnSp>
+      <p:cxnSp>
+        <p:nvCxnSpPr>
+          <p:cNvPr id="8" name="hub_g_v0" descr="Editable line; source id hub_g_v0"/>
+          <p:cNvCxnSpPr/>
+          <p:nvPr/>
+        </p:nvCxnSpPr>
+        <p:spPr>
+          <a:xfrm>
+            <a:off x="5841999" y="3476624"/>
+            <a:ext cx="0" cy="508000"/>
+          </a:xfrm>
+          <a:prstGeom prst="line">
+            <a:avLst/>
+          </a:prstGeom>
+          <a:ln w="15874">
+            <a:solidFill>
+              <a:srgbClr val="1F2937"/>
+            </a:solidFill>
+          </a:ln>
+          <a:effectLst/>
+        </p:spPr>
+        <p:style>
+          <a:lnRef idx="2">
+            <a:schemeClr val="accent1"/>
+          </a:lnRef>
+          <a:fillRef idx="0">
+            <a:schemeClr val="accent1"/>
+          </a:fillRef>
+          <a:effectRef idx="0">
+            <a:schemeClr val="accent1"/>
+          </a:effectRef>
+          <a:fontRef idx="minor">
+            <a:schemeClr val="tx1"/>
+          </a:fontRef>
+        </p:style>
+      </p:cxnSp>
+      <p:cxnSp>
+        <p:nvCxnSpPr>
+          <p:cNvPr id="9" name="hub_g_h1" descr="Editable line; source id hub_g_h1"/>
+          <p:cNvCxnSpPr/>
+          <p:nvPr/>
+        </p:nvCxnSpPr>
+        <p:spPr>
+          <a:xfrm>
+            <a:off x="5841999" y="3730624"/>
+            <a:ext cx="508000" cy="0"/>
+          </a:xfrm>
+          <a:prstGeom prst="line">
+            <a:avLst/>
+          </a:prstGeom>
+          <a:ln w="15874">
+            <a:solidFill>
+              <a:srgbClr val="1F2937"/>
+            </a:solidFill>
+          </a:ln>
+          <a:effectLst/>
+        </p:spPr>
+        <p:style>
+          <a:lnRef idx="2">
+            <a:schemeClr val="accent1"/>
+          </a:lnRef>
+          <a:fillRef idx="0">
+            <a:schemeClr val="accent1"/>
+          </a:fillRef>
+          <a:effectRef idx="0">
+            <a:schemeClr val="accent1"/>
+          </a:effectRef>
+          <a:fontRef idx="minor">
+            <a:schemeClr val="tx1"/>
+          </a:fontRef>
+        </p:style>
+      </p:cxnSp>
+      <p:cxnSp>
+        <p:nvCxnSpPr>
+          <p:cNvPr id="10" name="hub_g_v1" descr="Editable line; source id hub_g_v1"/>
+          <p:cNvCxnSpPr/>
+          <p:nvPr/>
+        </p:nvCxnSpPr>
+        <p:spPr>
+          <a:xfrm>
+            <a:off x="6095999" y="3476624"/>
+            <a:ext cx="0" cy="508000"/>
+          </a:xfrm>
+          <a:prstGeom prst="line">
+            <a:avLst/>
+          </a:prstGeom>
+          <a:ln w="15874">
+            <a:solidFill>
+              <a:srgbClr val="1F2937"/>
+            </a:solidFill>
+          </a:ln>
+          <a:effectLst/>
+        </p:spPr>
+        <p:style>
+          <a:lnRef idx="2">
+            <a:schemeClr val="accent1"/>
+          </a:lnRef>
+          <a:fillRef idx="0">
+            <a:schemeClr val="accent1"/>
+          </a:fillRef>
+          <a:effectRef idx="0">
+            <a:schemeClr val="accent1"/>
+          </a:effectRef>
+          <a:fontRef idx="minor">
+            <a:schemeClr val="tx1"/>
+          </a:fontRef>
+        </p:style>
+      </p:cxnSp>
+      <p:cxnSp>
+        <p:nvCxnSpPr>
+          <p:cNvPr id="11" name="hub_g_h2" descr="Editable line; source id hub_g_h2"/>
+          <p:cNvCxnSpPr/>
+          <p:nvPr/>
+        </p:nvCxnSpPr>
+        <p:spPr>
+          <a:xfrm>
+            <a:off x="5841999" y="3984624"/>
+            <a:ext cx="508000" cy="0"/>
+          </a:xfrm>
+          <a:prstGeom prst="line">
+            <a:avLst/>
+          </a:prstGeom>
+          <a:ln w="15874">
+            <a:solidFill>
+              <a:srgbClr val="1F2937"/>
+            </a:solidFill>
+          </a:ln>
+          <a:effectLst/>
+        </p:spPr>
+        <p:style>
+          <a:lnRef idx="2">
+            <a:schemeClr val="accent1"/>
+          </a:lnRef>
+          <a:fillRef idx="0">
+            <a:schemeClr val="accent1"/>
+          </a:fillRef>
+          <a:effectRef idx="0">
+            <a:schemeClr val="accent1"/>
+          </a:effectRef>
+          <a:fontRef idx="minor">
+            <a:schemeClr val="tx1"/>
+          </a:fontRef>
+        </p:style>
+      </p:cxnSp>
+      <p:cxnSp>
+        <p:nvCxnSpPr>
+          <p:cNvPr id="12" name="hub_g_v2" descr="Editable line; source id hub_g_v2"/>
+          <p:cNvCxnSpPr/>
+          <p:nvPr/>
+        </p:nvCxnSpPr>
+        <p:spPr>
+          <a:xfrm>
+            <a:off x="6349999" y="3476624"/>
+            <a:ext cx="0" cy="508000"/>
+          </a:xfrm>
+          <a:prstGeom prst="line">
+            <a:avLst/>
+          </a:prstGeom>
+          <a:ln w="15874">
+            <a:solidFill>
+              <a:srgbClr val="1F2937"/>
+            </a:solidFill>
+          </a:ln>
+          <a:effectLst/>
+        </p:spPr>
+        <p:style>
+          <a:lnRef idx="2">
+            <a:schemeClr val="accent1"/>
+          </a:lnRef>
+          <a:fillRef idx="0">
+            <a:schemeClr val="accent1"/>
+          </a:fillRef>
+          <a:effectRef idx="0">
+            <a:schemeClr val="accent1"/>
+          </a:effectRef>
+          <a:fontRef idx="minor">
+            <a:schemeClr val="tx1"/>
+          </a:fontRef>
+        </p:style>
+      </p:cxnSp>
+      <p:sp>
+        <p:nvSpPr>
+          <p:cNvPr id="13" name="hub_g_d00" descr="Editable shape; source id hub_g_d00"/>
           <p:cNvSpPr/>
           <p:nvPr/>
         </p:nvSpPr>
         <p:spPr>
           <a:xfrm>
-            <a:off x="238124" y="2666999"/>
-            <a:ext cx="2127249" cy="47624"/>
-          </a:xfrm>
-          <a:prstGeom prst="roundRect">
-            <a:avLst>
-              <a:gd name="adj" fmla="val 50000"/>
-            </a:avLst>
+            <a:off x="5786437" y="3421062"/>
+            <a:ext cx="111124" cy="111124"/>
+          </a:xfrm>
+          <a:prstGeom prst="ellipse">
+            <a:avLst/>
           </a:prstGeom>
           <a:solidFill>
-            <a:srgbClr val="1F7F8C"/>
+            <a:srgbClr val="FFFFFF"/>
           </a:solidFill>
           <a:ln>
             <a:noFill/>
@@ -3820,14 +4034,366 @@
       </p:sp>
       <p:sp>
         <p:nvSpPr>
-          <p:cNvPr id="8" name="hub_t" descr="Editable text; source id hub_t"/>
+          <p:cNvPr id="14" name="hub_g_d01" descr="Editable shape; source id hub_g_d01"/>
+          <p:cNvSpPr/>
+          <p:nvPr/>
+        </p:nvSpPr>
+        <p:spPr>
+          <a:xfrm>
+            <a:off x="5786437" y="3675062"/>
+            <a:ext cx="111124" cy="111124"/>
+          </a:xfrm>
+          <a:prstGeom prst="ellipse">
+            <a:avLst/>
+          </a:prstGeom>
+          <a:solidFill>
+            <a:srgbClr val="FFFFFF"/>
+          </a:solidFill>
+          <a:ln>
+            <a:noFill/>
+          </a:ln>
+          <a:effectLst/>
+        </p:spPr>
+        <p:style>
+          <a:lnRef idx="1">
+            <a:schemeClr val="accent1"/>
+          </a:lnRef>
+          <a:fillRef idx="3">
+            <a:schemeClr val="accent1"/>
+          </a:fillRef>
+          <a:effectRef idx="0">
+            <a:schemeClr val="accent1"/>
+          </a:effectRef>
+          <a:fontRef idx="minor">
+            <a:schemeClr val="lt1"/>
+          </a:fontRef>
+        </p:style>
+        <p:txBody>
+          <a:bodyPr rtlCol="0" anchor="ctr"/>
+          <a:lstStyle/>
+          <a:p>
+            <a:pPr algn="ctr"/>
+          </a:p>
+        </p:txBody>
+      </p:sp>
+      <p:sp>
+        <p:nvSpPr>
+          <p:cNvPr id="15" name="hub_g_d02" descr="Editable shape; source id hub_g_d02"/>
+          <p:cNvSpPr/>
+          <p:nvPr/>
+        </p:nvSpPr>
+        <p:spPr>
+          <a:xfrm>
+            <a:off x="5786437" y="3929062"/>
+            <a:ext cx="111124" cy="111124"/>
+          </a:xfrm>
+          <a:prstGeom prst="ellipse">
+            <a:avLst/>
+          </a:prstGeom>
+          <a:solidFill>
+            <a:srgbClr val="FFFFFF"/>
+          </a:solidFill>
+          <a:ln>
+            <a:noFill/>
+          </a:ln>
+          <a:effectLst/>
+        </p:spPr>
+        <p:style>
+          <a:lnRef idx="1">
+            <a:schemeClr val="accent1"/>
+          </a:lnRef>
+          <a:fillRef idx="3">
+            <a:schemeClr val="accent1"/>
+          </a:fillRef>
+          <a:effectRef idx="0">
+            <a:schemeClr val="accent1"/>
+          </a:effectRef>
+          <a:fontRef idx="minor">
+            <a:schemeClr val="lt1"/>
+          </a:fontRef>
+        </p:style>
+        <p:txBody>
+          <a:bodyPr rtlCol="0" anchor="ctr"/>
+          <a:lstStyle/>
+          <a:p>
+            <a:pPr algn="ctr"/>
+          </a:p>
+        </p:txBody>
+      </p:sp>
+      <p:sp>
+        <p:nvSpPr>
+          <p:cNvPr id="16" name="hub_g_d10" descr="Editable shape; source id hub_g_d10"/>
+          <p:cNvSpPr/>
+          <p:nvPr/>
+        </p:nvSpPr>
+        <p:spPr>
+          <a:xfrm>
+            <a:off x="6040437" y="3421062"/>
+            <a:ext cx="111124" cy="111124"/>
+          </a:xfrm>
+          <a:prstGeom prst="ellipse">
+            <a:avLst/>
+          </a:prstGeom>
+          <a:solidFill>
+            <a:srgbClr val="FFFFFF"/>
+          </a:solidFill>
+          <a:ln>
+            <a:noFill/>
+          </a:ln>
+          <a:effectLst/>
+        </p:spPr>
+        <p:style>
+          <a:lnRef idx="1">
+            <a:schemeClr val="accent1"/>
+          </a:lnRef>
+          <a:fillRef idx="3">
+            <a:schemeClr val="accent1"/>
+          </a:fillRef>
+          <a:effectRef idx="0">
+            <a:schemeClr val="accent1"/>
+          </a:effectRef>
+          <a:fontRef idx="minor">
+            <a:schemeClr val="lt1"/>
+          </a:fontRef>
+        </p:style>
+        <p:txBody>
+          <a:bodyPr rtlCol="0" anchor="ctr"/>
+          <a:lstStyle/>
+          <a:p>
+            <a:pPr algn="ctr"/>
+          </a:p>
+        </p:txBody>
+      </p:sp>
+      <p:sp>
+        <p:nvSpPr>
+          <p:cNvPr id="17" name="hub_g_d11" descr="Editable shape; source id hub_g_d11"/>
+          <p:cNvSpPr/>
+          <p:nvPr/>
+        </p:nvSpPr>
+        <p:spPr>
+          <a:xfrm>
+            <a:off x="6040437" y="3675062"/>
+            <a:ext cx="111124" cy="111124"/>
+          </a:xfrm>
+          <a:prstGeom prst="ellipse">
+            <a:avLst/>
+          </a:prstGeom>
+          <a:solidFill>
+            <a:srgbClr val="1F2937"/>
+          </a:solidFill>
+          <a:ln>
+            <a:noFill/>
+          </a:ln>
+          <a:effectLst/>
+        </p:spPr>
+        <p:style>
+          <a:lnRef idx="1">
+            <a:schemeClr val="accent1"/>
+          </a:lnRef>
+          <a:fillRef idx="3">
+            <a:schemeClr val="accent1"/>
+          </a:fillRef>
+          <a:effectRef idx="0">
+            <a:schemeClr val="accent1"/>
+          </a:effectRef>
+          <a:fontRef idx="minor">
+            <a:schemeClr val="lt1"/>
+          </a:fontRef>
+        </p:style>
+        <p:txBody>
+          <a:bodyPr rtlCol="0" anchor="ctr"/>
+          <a:lstStyle/>
+          <a:p>
+            <a:pPr algn="ctr"/>
+          </a:p>
+        </p:txBody>
+      </p:sp>
+      <p:sp>
+        <p:nvSpPr>
+          <p:cNvPr id="18" name="hub_g_d12" descr="Editable shape; source id hub_g_d12"/>
+          <p:cNvSpPr/>
+          <p:nvPr/>
+        </p:nvSpPr>
+        <p:spPr>
+          <a:xfrm>
+            <a:off x="6040437" y="3929062"/>
+            <a:ext cx="111124" cy="111124"/>
+          </a:xfrm>
+          <a:prstGeom prst="ellipse">
+            <a:avLst/>
+          </a:prstGeom>
+          <a:solidFill>
+            <a:srgbClr val="FFFFFF"/>
+          </a:solidFill>
+          <a:ln>
+            <a:noFill/>
+          </a:ln>
+          <a:effectLst/>
+        </p:spPr>
+        <p:style>
+          <a:lnRef idx="1">
+            <a:schemeClr val="accent1"/>
+          </a:lnRef>
+          <a:fillRef idx="3">
+            <a:schemeClr val="accent1"/>
+          </a:fillRef>
+          <a:effectRef idx="0">
+            <a:schemeClr val="accent1"/>
+          </a:effectRef>
+          <a:fontRef idx="minor">
+            <a:schemeClr val="lt1"/>
+          </a:fontRef>
+        </p:style>
+        <p:txBody>
+          <a:bodyPr rtlCol="0" anchor="ctr"/>
+          <a:lstStyle/>
+          <a:p>
+            <a:pPr algn="ctr"/>
+          </a:p>
+        </p:txBody>
+      </p:sp>
+      <p:sp>
+        <p:nvSpPr>
+          <p:cNvPr id="19" name="hub_g_d20" descr="Editable shape; source id hub_g_d20"/>
+          <p:cNvSpPr/>
+          <p:nvPr/>
+        </p:nvSpPr>
+        <p:spPr>
+          <a:xfrm>
+            <a:off x="6294437" y="3421062"/>
+            <a:ext cx="111124" cy="111124"/>
+          </a:xfrm>
+          <a:prstGeom prst="ellipse">
+            <a:avLst/>
+          </a:prstGeom>
+          <a:solidFill>
+            <a:srgbClr val="FFFFFF"/>
+          </a:solidFill>
+          <a:ln>
+            <a:noFill/>
+          </a:ln>
+          <a:effectLst/>
+        </p:spPr>
+        <p:style>
+          <a:lnRef idx="1">
+            <a:schemeClr val="accent1"/>
+          </a:lnRef>
+          <a:fillRef idx="3">
+            <a:schemeClr val="accent1"/>
+          </a:fillRef>
+          <a:effectRef idx="0">
+            <a:schemeClr val="accent1"/>
+          </a:effectRef>
+          <a:fontRef idx="minor">
+            <a:schemeClr val="lt1"/>
+          </a:fontRef>
+        </p:style>
+        <p:txBody>
+          <a:bodyPr rtlCol="0" anchor="ctr"/>
+          <a:lstStyle/>
+          <a:p>
+            <a:pPr algn="ctr"/>
+          </a:p>
+        </p:txBody>
+      </p:sp>
+      <p:sp>
+        <p:nvSpPr>
+          <p:cNvPr id="20" name="hub_g_d21" descr="Editable shape; source id hub_g_d21"/>
+          <p:cNvSpPr/>
+          <p:nvPr/>
+        </p:nvSpPr>
+        <p:spPr>
+          <a:xfrm>
+            <a:off x="6294437" y="3675062"/>
+            <a:ext cx="111124" cy="111124"/>
+          </a:xfrm>
+          <a:prstGeom prst="ellipse">
+            <a:avLst/>
+          </a:prstGeom>
+          <a:solidFill>
+            <a:srgbClr val="FFFFFF"/>
+          </a:solidFill>
+          <a:ln>
+            <a:noFill/>
+          </a:ln>
+          <a:effectLst/>
+        </p:spPr>
+        <p:style>
+          <a:lnRef idx="1">
+            <a:schemeClr val="accent1"/>
+          </a:lnRef>
+          <a:fillRef idx="3">
+            <a:schemeClr val="accent1"/>
+          </a:fillRef>
+          <a:effectRef idx="0">
+            <a:schemeClr val="accent1"/>
+          </a:effectRef>
+          <a:fontRef idx="minor">
+            <a:schemeClr val="lt1"/>
+          </a:fontRef>
+        </p:style>
+        <p:txBody>
+          <a:bodyPr rtlCol="0" anchor="ctr"/>
+          <a:lstStyle/>
+          <a:p>
+            <a:pPr algn="ctr"/>
+          </a:p>
+        </p:txBody>
+      </p:sp>
+      <p:sp>
+        <p:nvSpPr>
+          <p:cNvPr id="21" name="hub_g_d22" descr="Editable shape; source id hub_g_d22"/>
+          <p:cNvSpPr/>
+          <p:nvPr/>
+        </p:nvSpPr>
+        <p:spPr>
+          <a:xfrm>
+            <a:off x="6294437" y="3929062"/>
+            <a:ext cx="111124" cy="111124"/>
+          </a:xfrm>
+          <a:prstGeom prst="ellipse">
+            <a:avLst/>
+          </a:prstGeom>
+          <a:solidFill>
+            <a:srgbClr val="FFFFFF"/>
+          </a:solidFill>
+          <a:ln>
+            <a:noFill/>
+          </a:ln>
+          <a:effectLst/>
+        </p:spPr>
+        <p:style>
+          <a:lnRef idx="1">
+            <a:schemeClr val="accent1"/>
+          </a:lnRef>
+          <a:fillRef idx="3">
+            <a:schemeClr val="accent1"/>
+          </a:fillRef>
+          <a:effectRef idx="0">
+            <a:schemeClr val="accent1"/>
+          </a:effectRef>
+          <a:fontRef idx="minor">
+            <a:schemeClr val="lt1"/>
+          </a:fontRef>
+        </p:style>
+        <p:txBody>
+          <a:bodyPr rtlCol="0" anchor="ctr"/>
+          <a:lstStyle/>
+          <a:p>
+            <a:pPr algn="ctr"/>
+          </a:p>
+        </p:txBody>
+      </p:sp>
+      <p:sp>
+        <p:nvSpPr>
+          <p:cNvPr id="22" name="hub_t" descr="Editable text; source id hub_t"/>
           <p:cNvSpPr txBox="1"/>
           <p:nvPr/>
         </p:nvSpPr>
         <p:spPr>
           <a:xfrm>
-            <a:off x="396874" y="4190999"/>
-            <a:ext cx="1809749" cy="341312"/>
+            <a:off x="5286374" y="4302124"/>
+            <a:ext cx="1619249" cy="380999"/>
           </a:xfrm>
           <a:prstGeom prst="rect">
             <a:avLst/>
@@ -3843,7 +4409,7 @@
           <a:p>
             <a:pPr algn="ctr" fontAlgn="base">
               <a:lnSpc>
-                <a:spcPts val="2124"/>
+                <a:spcPts val="1984"/>
               </a:lnSpc>
               <a:spcBef>
                 <a:spcPts val="0"/>
@@ -3851,7 +4417,7 @@
               <a:spcAft>
                 <a:spcPts val="0"/>
               </a:spcAft>
-              <a:defRPr sz="1801" b="1" i="0" lang="zh-CN" dirty="0">
+              <a:defRPr sz="1687" b="1" i="0" lang="zh-CN" dirty="0">
                 <a:solidFill>
                   <a:srgbClr val="0F4F58"/>
                 </a:solidFill>
@@ -3861,7 +4427,7 @@
               </a:defRPr>
             </a:pPr>
             <a:r>
-              <a:rPr sz="1801" b="1" i="0" lang="zh-CN" dirty="0">
+              <a:rPr sz="1687" b="1" i="0" lang="zh-CN" dirty="0">
                 <a:solidFill>
                   <a:srgbClr val="0F4F58"/>
                 </a:solidFill>
@@ -3874,21 +4440,171 @@
           </a:p>
         </p:txBody>
       </p:sp>
+      <p:sp>
+        <p:nvSpPr>
+          <p:cNvPr id="23" name="hub_s" descr="Editable text; source id hub_s"/>
+          <p:cNvSpPr txBox="1"/>
+          <p:nvPr/>
+        </p:nvSpPr>
+        <p:spPr>
+          <a:xfrm>
+            <a:off x="5381624" y="4714874"/>
+            <a:ext cx="1428749" cy="285749"/>
+          </a:xfrm>
+          <a:prstGeom prst="rect">
+            <a:avLst/>
+          </a:prstGeom>
+          <a:noFill/>
+          <a:effectLst/>
+        </p:spPr>
+        <p:txBody>
+          <a:bodyPr wrap="none" anchor="ctr" tIns="0" rIns="0" bIns="0" lIns="0" anchorCtr="0" vertOverflow="overflow">
+            <a:noAutofit/>
+          </a:bodyPr>
+          <a:lstStyle/>
+          <a:p>
+            <a:pPr algn="ctr" fontAlgn="base">
+              <a:lnSpc>
+                <a:spcPts val="1828"/>
+              </a:lnSpc>
+              <a:spcBef>
+                <a:spcPts val="0"/>
+              </a:spcBef>
+              <a:spcAft>
+                <a:spcPts val="0"/>
+              </a:spcAft>
+              <a:defRPr sz="1249" b="0" i="0" lang="zh-CN" dirty="0">
+                <a:solidFill>
+                  <a:srgbClr val="0F4F58"/>
+                </a:solidFill>
+                <a:latin typeface="Noto Sans CJK SC"/>
+                <a:ea typeface="Noto Sans CJK SC"/>
+                <a:cs typeface="Noto Sans CJK SC"/>
+              </a:defRPr>
+            </a:pPr>
+            <a:r>
+              <a:rPr sz="1249" b="0" i="0" lang="zh-CN" dirty="0">
+                <a:solidFill>
+                  <a:srgbClr val="0F4F58"/>
+                </a:solidFill>
+                <a:latin typeface="Noto Sans CJK SC"/>
+                <a:ea typeface="Noto Sans CJK SC"/>
+                <a:cs typeface="Noto Sans CJK SC"/>
+              </a:rPr>
+              <a:t>目标相</a:t>
+            </a:r>
+          </a:p>
+        </p:txBody>
+      </p:sp>
+      <p:sp>
+        <p:nvSpPr>
+          <p:cNvPr id="24" name="e1" descr="Editable shape; source id e1"/>
+          <p:cNvSpPr/>
+          <p:nvPr/>
+        </p:nvSpPr>
+        <p:spPr>
+          <a:xfrm>
+            <a:off x="523874" y="952499"/>
+            <a:ext cx="3651249" cy="1396999"/>
+          </a:xfrm>
+          <a:prstGeom prst="roundRect">
+            <a:avLst>
+              <a:gd name="adj" fmla="val 5113"/>
+            </a:avLst>
+          </a:prstGeom>
+          <a:solidFill>
+            <a:srgbClr val="FFFFFF"/>
+          </a:solidFill>
+          <a:ln w="11112">
+            <a:solidFill>
+              <a:srgbClr val="1F7F8C"/>
+            </a:solidFill>
+          </a:ln>
+          <a:effectLst/>
+        </p:spPr>
+        <p:style>
+          <a:lnRef idx="1">
+            <a:schemeClr val="accent1"/>
+          </a:lnRef>
+          <a:fillRef idx="3">
+            <a:schemeClr val="accent1"/>
+          </a:fillRef>
+          <a:effectRef idx="0">
+            <a:schemeClr val="accent1"/>
+          </a:effectRef>
+          <a:fontRef idx="minor">
+            <a:schemeClr val="lt1"/>
+          </a:fontRef>
+        </p:style>
+        <p:txBody>
+          <a:bodyPr rtlCol="0" anchor="ctr"/>
+          <a:lstStyle/>
+          <a:p>
+            <a:pPr algn="ctr"/>
+          </a:p>
+        </p:txBody>
+      </p:sp>
+      <p:sp>
+        <p:nvSpPr>
+          <p:cNvPr id="25" name="e1_b" descr="Editable shape; source id e1_b"/>
+          <p:cNvSpPr/>
+          <p:nvPr/>
+        </p:nvSpPr>
+        <p:spPr>
+          <a:xfrm>
+            <a:off x="523874" y="952499"/>
+            <a:ext cx="63499" cy="1396999"/>
+          </a:xfrm>
+          <a:prstGeom prst="roundRect">
+            <a:avLst>
+              <a:gd name="adj" fmla="val 37500"/>
+            </a:avLst>
+          </a:prstGeom>
+          <a:solidFill>
+            <a:srgbClr val="1F7F8C"/>
+          </a:solidFill>
+          <a:ln>
+            <a:noFill/>
+          </a:ln>
+          <a:effectLst/>
+        </p:spPr>
+        <p:style>
+          <a:lnRef idx="1">
+            <a:schemeClr val="accent1"/>
+          </a:lnRef>
+          <a:fillRef idx="3">
+            <a:schemeClr val="accent1"/>
+          </a:fillRef>
+          <a:effectRef idx="0">
+            <a:schemeClr val="accent1"/>
+          </a:effectRef>
+          <a:fontRef idx="minor">
+            <a:schemeClr val="lt1"/>
+          </a:fontRef>
+        </p:style>
+        <p:txBody>
+          <a:bodyPr rtlCol="0" anchor="ctr"/>
+          <a:lstStyle/>
+          <a:p>
+            <a:pPr algn="ctr"/>
+          </a:p>
+        </p:txBody>
+      </p:sp>
       <p:cxnSp>
         <p:nvCxnSpPr>
-          <p:cNvPr id="9" name="hub_g_h0" descr="Editable line; source id hub_g_h0"/>
+          <p:cNvPr id="26" name="e1_g_h0" descr="Editable line; source id e1_g_h0"/>
           <p:cNvCxnSpPr/>
           <p:nvPr/>
         </p:nvCxnSpPr>
         <p:spPr>
           <a:xfrm>
-            <a:off x="1039812" y="3198812"/>
-            <a:ext cx="492125" cy="0"/>
+            <a:off x="825499" y="1357312"/>
+            <a:ext cx="269875" cy="0"/>
           </a:xfrm>
           <a:prstGeom prst="line">
             <a:avLst/>
           </a:prstGeom>
-          <a:ln w="15239">
+          <a:ln w="8572">
             <a:solidFill>
               <a:srgbClr val="1F2937"/>
             </a:solidFill>
@@ -3912,19 +4628,19 @@
       </p:cxnSp>
       <p:cxnSp>
         <p:nvCxnSpPr>
-          <p:cNvPr id="10" name="hub_g_v0" descr="Editable line; source id hub_g_v0"/>
+          <p:cNvPr id="27" name="e1_g_v0" descr="Editable line; source id e1_g_v0"/>
           <p:cNvCxnSpPr/>
           <p:nvPr/>
         </p:nvCxnSpPr>
         <p:spPr>
           <a:xfrm>
-            <a:off x="1039812" y="3198812"/>
-            <a:ext cx="0" cy="492125"/>
+            <a:off x="825499" y="1357312"/>
+            <a:ext cx="0" cy="277812"/>
           </a:xfrm>
           <a:prstGeom prst="line">
             <a:avLst/>
           </a:prstGeom>
-          <a:ln w="15239">
+          <a:ln w="8572">
             <a:solidFill>
               <a:srgbClr val="1F2937"/>
             </a:solidFill>
@@ -3948,19 +4664,19 @@
       </p:cxnSp>
       <p:cxnSp>
         <p:nvCxnSpPr>
-          <p:cNvPr id="11" name="hub_g_h1" descr="Editable line; source id hub_g_h1"/>
+          <p:cNvPr id="28" name="e1_g_h1" descr="Editable line; source id e1_g_h1"/>
           <p:cNvCxnSpPr/>
           <p:nvPr/>
         </p:nvCxnSpPr>
         <p:spPr>
           <a:xfrm>
-            <a:off x="1039812" y="3444874"/>
-            <a:ext cx="492125" cy="0"/>
+            <a:off x="825499" y="1492249"/>
+            <a:ext cx="269875" cy="0"/>
           </a:xfrm>
           <a:prstGeom prst="line">
             <a:avLst/>
           </a:prstGeom>
-          <a:ln w="15239">
+          <a:ln w="8572">
             <a:solidFill>
               <a:srgbClr val="1F2937"/>
             </a:solidFill>
@@ -3984,19 +4700,19 @@
       </p:cxnSp>
       <p:cxnSp>
         <p:nvCxnSpPr>
-          <p:cNvPr id="12" name="hub_g_v1" descr="Editable line; source id hub_g_v1"/>
+          <p:cNvPr id="29" name="e1_g_v1" descr="Editable line; source id e1_g_v1"/>
           <p:cNvCxnSpPr/>
           <p:nvPr/>
         </p:nvCxnSpPr>
         <p:spPr>
           <a:xfrm>
-            <a:off x="1285874" y="3198812"/>
-            <a:ext cx="0" cy="492125"/>
+            <a:off x="960437" y="1357312"/>
+            <a:ext cx="0" cy="277812"/>
           </a:xfrm>
           <a:prstGeom prst="line">
             <a:avLst/>
           </a:prstGeom>
-          <a:ln w="15239">
+          <a:ln w="8572">
             <a:solidFill>
               <a:srgbClr val="1F2937"/>
             </a:solidFill>
@@ -4020,19 +4736,19 @@
       </p:cxnSp>
       <p:cxnSp>
         <p:nvCxnSpPr>
-          <p:cNvPr id="13" name="hub_g_h2" descr="Editable line; source id hub_g_h2"/>
+          <p:cNvPr id="30" name="e1_g_h2" descr="Editable line; source id e1_g_h2"/>
           <p:cNvCxnSpPr/>
           <p:nvPr/>
         </p:nvCxnSpPr>
         <p:spPr>
           <a:xfrm>
-            <a:off x="1039812" y="3690937"/>
-            <a:ext cx="492125" cy="0"/>
+            <a:off x="825499" y="1635124"/>
+            <a:ext cx="269875" cy="0"/>
           </a:xfrm>
           <a:prstGeom prst="line">
             <a:avLst/>
           </a:prstGeom>
-          <a:ln w="15239">
+          <a:ln w="8572">
             <a:solidFill>
               <a:srgbClr val="1F2937"/>
             </a:solidFill>
@@ -4056,19 +4772,19 @@
       </p:cxnSp>
       <p:cxnSp>
         <p:nvCxnSpPr>
-          <p:cNvPr id="14" name="hub_g_v2" descr="Editable line; source id hub_g_v2"/>
+          <p:cNvPr id="31" name="e1_g_v2" descr="Editable line; source id e1_g_v2"/>
           <p:cNvCxnSpPr/>
           <p:nvPr/>
         </p:nvCxnSpPr>
         <p:spPr>
           <a:xfrm>
-            <a:off x="1531937" y="3198812"/>
-            <a:ext cx="0" cy="492125"/>
+            <a:off x="1095374" y="1357312"/>
+            <a:ext cx="0" cy="277812"/>
           </a:xfrm>
           <a:prstGeom prst="line">
             <a:avLst/>
           </a:prstGeom>
-          <a:ln w="15239">
+          <a:ln w="8572">
             <a:solidFill>
               <a:srgbClr val="1F2937"/>
             </a:solidFill>
@@ -4092,14 +4808,14 @@
       </p:cxnSp>
       <p:sp>
         <p:nvSpPr>
-          <p:cNvPr id="15" name="hub_g_d00" descr="Editable shape; source id hub_g_d00"/>
+          <p:cNvPr id="32" name="e1_g_d00" descr="Editable shape; source id e1_g_d00"/>
           <p:cNvSpPr/>
           <p:nvPr/>
         </p:nvSpPr>
         <p:spPr>
           <a:xfrm>
-            <a:off x="992187" y="3151187"/>
-            <a:ext cx="103187" cy="103187"/>
+            <a:off x="793749" y="1325562"/>
+            <a:ext cx="63499" cy="63499"/>
           </a:xfrm>
           <a:prstGeom prst="ellipse">
             <a:avLst/>
@@ -4136,14 +4852,14 @@
       </p:sp>
       <p:sp>
         <p:nvSpPr>
-          <p:cNvPr id="16" name="hub_g_d01" descr="Editable shape; source id hub_g_d01"/>
+          <p:cNvPr id="33" name="e1_g_d01" descr="Editable shape; source id e1_g_d01"/>
           <p:cNvSpPr/>
           <p:nvPr/>
         </p:nvSpPr>
         <p:spPr>
           <a:xfrm>
-            <a:off x="992187" y="3389312"/>
-            <a:ext cx="103187" cy="103187"/>
+            <a:off x="793749" y="1468437"/>
+            <a:ext cx="63499" cy="63499"/>
           </a:xfrm>
           <a:prstGeom prst="ellipse">
             <a:avLst/>
@@ -4180,14 +4896,14 @@
       </p:sp>
       <p:sp>
         <p:nvSpPr>
-          <p:cNvPr id="17" name="hub_g_d02" descr="Editable shape; source id hub_g_d02"/>
+          <p:cNvPr id="34" name="e1_g_d02" descr="Editable shape; source id e1_g_d02"/>
           <p:cNvSpPr/>
           <p:nvPr/>
         </p:nvSpPr>
         <p:spPr>
           <a:xfrm>
-            <a:off x="992187" y="3635374"/>
-            <a:ext cx="103187" cy="103187"/>
+            <a:off x="793749" y="1603374"/>
+            <a:ext cx="63499" cy="63499"/>
           </a:xfrm>
           <a:prstGeom prst="ellipse">
             <a:avLst/>
@@ -4224,14 +4940,14 @@
       </p:sp>
       <p:sp>
         <p:nvSpPr>
-          <p:cNvPr id="18" name="hub_g_d10" descr="Editable shape; source id hub_g_d10"/>
+          <p:cNvPr id="35" name="e1_g_d10" descr="Editable shape; source id e1_g_d10"/>
           <p:cNvSpPr/>
           <p:nvPr/>
         </p:nvSpPr>
         <p:spPr>
           <a:xfrm>
-            <a:off x="1230312" y="3151187"/>
-            <a:ext cx="103187" cy="103187"/>
+            <a:off x="928687" y="1325562"/>
+            <a:ext cx="63499" cy="63499"/>
           </a:xfrm>
           <a:prstGeom prst="ellipse">
             <a:avLst/>
@@ -4268,14 +4984,14 @@
       </p:sp>
       <p:sp>
         <p:nvSpPr>
-          <p:cNvPr id="19" name="hub_g_d11" descr="Editable shape; source id hub_g_d11"/>
+          <p:cNvPr id="36" name="e1_g_d11" descr="Editable shape; source id e1_g_d11"/>
           <p:cNvSpPr/>
           <p:nvPr/>
         </p:nvSpPr>
         <p:spPr>
           <a:xfrm>
-            <a:off x="1230312" y="3389312"/>
-            <a:ext cx="103187" cy="103187"/>
+            <a:off x="928687" y="1468437"/>
+            <a:ext cx="63499" cy="63499"/>
           </a:xfrm>
           <a:prstGeom prst="ellipse">
             <a:avLst/>
@@ -4312,14 +5028,14 @@
       </p:sp>
       <p:sp>
         <p:nvSpPr>
-          <p:cNvPr id="20" name="hub_g_d12" descr="Editable shape; source id hub_g_d12"/>
+          <p:cNvPr id="37" name="e1_g_d12" descr="Editable shape; source id e1_g_d12"/>
           <p:cNvSpPr/>
           <p:nvPr/>
         </p:nvSpPr>
         <p:spPr>
           <a:xfrm>
-            <a:off x="1230312" y="3635374"/>
-            <a:ext cx="103187" cy="103187"/>
+            <a:off x="928687" y="1603374"/>
+            <a:ext cx="63499" cy="63499"/>
           </a:xfrm>
           <a:prstGeom prst="ellipse">
             <a:avLst/>
@@ -4356,14 +5072,14 @@
       </p:sp>
       <p:sp>
         <p:nvSpPr>
-          <p:cNvPr id="21" name="hub_g_d20" descr="Editable shape; source id hub_g_d20"/>
+          <p:cNvPr id="38" name="e1_g_d20" descr="Editable shape; source id e1_g_d20"/>
           <p:cNvSpPr/>
           <p:nvPr/>
         </p:nvSpPr>
         <p:spPr>
           <a:xfrm>
-            <a:off x="1476374" y="3151187"/>
-            <a:ext cx="103187" cy="103187"/>
+            <a:off x="1063624" y="1325562"/>
+            <a:ext cx="63499" cy="63499"/>
           </a:xfrm>
           <a:prstGeom prst="ellipse">
             <a:avLst/>
@@ -4400,14 +5116,14 @@
       </p:sp>
       <p:sp>
         <p:nvSpPr>
-          <p:cNvPr id="22" name="hub_g_d21" descr="Editable shape; source id hub_g_d21"/>
+          <p:cNvPr id="39" name="e1_g_d21" descr="Editable shape; source id e1_g_d21"/>
           <p:cNvSpPr/>
           <p:nvPr/>
         </p:nvSpPr>
         <p:spPr>
           <a:xfrm>
-            <a:off x="1476374" y="3389312"/>
-            <a:ext cx="103187" cy="103187"/>
+            <a:off x="1063624" y="1468437"/>
+            <a:ext cx="63499" cy="63499"/>
           </a:xfrm>
           <a:prstGeom prst="ellipse">
             <a:avLst/>
@@ -4444,14 +5160,14 @@
       </p:sp>
       <p:sp>
         <p:nvSpPr>
-          <p:cNvPr id="23" name="hub_g_d22" descr="Editable shape; source id hub_g_d22"/>
+          <p:cNvPr id="40" name="e1_g_d22" descr="Editable shape; source id e1_g_d22"/>
           <p:cNvSpPr/>
           <p:nvPr/>
         </p:nvSpPr>
         <p:spPr>
           <a:xfrm>
-            <a:off x="1476374" y="3635374"/>
-            <a:ext cx="103187" cy="103187"/>
+            <a:off x="1063624" y="1603374"/>
+            <a:ext cx="63499" cy="63499"/>
           </a:xfrm>
           <a:prstGeom prst="ellipse">
             <a:avLst/>
@@ -4488,14 +5204,14 @@
       </p:sp>
       <p:sp>
         <p:nvSpPr>
-          <p:cNvPr id="24" name="hub_s" descr="Editable text; source id hub_s"/>
+          <p:cNvPr id="41" name="e1_t" descr="Editable text; source id e1_t"/>
           <p:cNvSpPr txBox="1"/>
           <p:nvPr/>
         </p:nvSpPr>
         <p:spPr>
           <a:xfrm>
-            <a:off x="380999" y="4587874"/>
-            <a:ext cx="1841499" cy="301624"/>
+            <a:off x="1269999" y="1325562"/>
+            <a:ext cx="2746374" cy="341312"/>
           </a:xfrm>
           <a:prstGeom prst="rect">
             <a:avLst/>
@@ -4509,9 +5225,9 @@
           </a:bodyPr>
           <a:lstStyle/>
           <a:p>
-            <a:pPr algn="ctr" fontAlgn="base">
+            <a:pPr algn="l" fontAlgn="base">
               <a:lnSpc>
-                <a:spcPts val="2015"/>
+                <a:spcPts val="2265"/>
               </a:lnSpc>
               <a:spcBef>
                 <a:spcPts val="0"/>
@@ -4519,7 +5235,7 @@
               <a:spcAft>
                 <a:spcPts val="0"/>
               </a:spcAft>
-              <a:defRPr sz="1374" b="0" i="0" lang="zh-CN" dirty="0">
+              <a:defRPr sz="1562" b="1" i="0" lang="zh-CN" dirty="0">
                 <a:solidFill>
                   <a:srgbClr val="0F4F58"/>
                 </a:solidFill>
@@ -4529,7 +5245,7 @@
               </a:defRPr>
             </a:pPr>
             <a:r>
-              <a:rPr sz="1374" b="0" i="0" lang="zh-CN" dirty="0">
+              <a:rPr sz="1562" b="1" i="0" lang="zh-CN" dirty="0">
                 <a:solidFill>
                   <a:srgbClr val="0F4F58"/>
                 </a:solidFill>
@@ -4537,25 +5253,103 @@
                 <a:ea typeface="Noto Sans CJK SC"/>
                 <a:cs typeface="Noto Sans CJK SC"/>
               </a:rPr>
-              <a:t>目标相</a:t>
-            </a:r>
-          </a:p>
-        </p:txBody>
-      </p:sp>
-      <p:sp>
-        <p:nvSpPr>
-          <p:cNvPr id="25" name="e1" descr="Editable shape; source id e1"/>
+              <a:t>结构与多晶型</a:t>
+            </a:r>
+          </a:p>
+        </p:txBody>
+      </p:sp>
+      <p:sp>
+        <p:nvSpPr>
+          <p:cNvPr id="42" name="e1_s" descr="Editable text; source id e1_s"/>
+          <p:cNvSpPr txBox="1"/>
+          <p:nvPr/>
+        </p:nvSpPr>
+        <p:spPr>
+          <a:xfrm>
+            <a:off x="1269999" y="1698624"/>
+            <a:ext cx="2746374" cy="277812"/>
+          </a:xfrm>
+          <a:prstGeom prst="rect">
+            <a:avLst/>
+          </a:prstGeom>
+          <a:noFill/>
+          <a:effectLst/>
+        </p:spPr>
+        <p:txBody>
+          <a:bodyPr wrap="none" anchor="ctr" tIns="0" rIns="0" bIns="0" lIns="0" anchorCtr="0" vertOverflow="overflow">
+            <a:noAutofit/>
+          </a:bodyPr>
+          <a:lstStyle/>
+          <a:p>
+            <a:pPr algn="l" fontAlgn="base">
+              <a:lnSpc>
+                <a:spcPts val="1828"/>
+              </a:lnSpc>
+              <a:spcBef>
+                <a:spcPts val="0"/>
+              </a:spcBef>
+              <a:spcAft>
+                <a:spcPts val="0"/>
+              </a:spcAft>
+              <a:defRPr sz="1249" b="0" i="0" lang="zh-CN" dirty="0">
+                <a:solidFill>
+                  <a:srgbClr val="3F4854"/>
+                </a:solidFill>
+                <a:latin typeface="Noto Sans CJK SC"/>
+                <a:ea typeface="Noto Sans CJK SC"/>
+                <a:cs typeface="Noto Sans CJK SC"/>
+              </a:defRPr>
+            </a:pPr>
+            <a:r>
+              <a:rPr sz="1249" b="0" i="0" lang="zh-CN" dirty="0">
+                <a:solidFill>
+                  <a:srgbClr val="3F4854"/>
+                </a:solidFill>
+                <a:latin typeface="Noto Sans CJK SC"/>
+                <a:ea typeface="Noto Sans CJK SC"/>
+                <a:cs typeface="Noto Sans CJK SC"/>
+              </a:rPr>
+              <a:t>相变</a:t>
+            </a:r>
+            <a:r>
+              <a:rPr sz="1249" b="0" i="0" lang="zh-CN" dirty="0">
+                <a:solidFill>
+                  <a:srgbClr val="3F4854"/>
+                </a:solidFill>
+                <a:latin typeface="DejaVu Sans"/>
+                <a:ea typeface="DejaVu Sans"/>
+                <a:cs typeface="DejaVu Sans"/>
+              </a:rPr>
+              <a:t> · </a:t>
+            </a:r>
+            <a:r>
+              <a:rPr sz="1249" b="0" i="0" lang="zh-CN" dirty="0">
+                <a:solidFill>
+                  <a:srgbClr val="3F4854"/>
+                </a:solidFill>
+                <a:latin typeface="Noto Sans CJK SC"/>
+                <a:ea typeface="Noto Sans CJK SC"/>
+                <a:cs typeface="Noto Sans CJK SC"/>
+              </a:rPr>
+              <a:t>配位</a:t>
+            </a:r>
+          </a:p>
+        </p:txBody>
+      </p:sp>
+      <p:sp>
+        <p:nvSpPr>
+          <p:cNvPr id="43" name="e2" descr="Editable shape; source id e2"/>
           <p:cNvSpPr/>
           <p:nvPr/>
         </p:nvSpPr>
         <p:spPr>
           <a:xfrm>
-            <a:off x="3397249" y="730249"/>
-            <a:ext cx="4270374" cy="1206499"/>
+            <a:off x="523874" y="2619374"/>
+            <a:ext cx="3651249" cy="1396999"/>
           </a:xfrm>
           <a:prstGeom prst="roundRect">
             <a:avLst>
-              <a:gd name="adj" fmla="val 5921"/>
+              <a:gd name="adj" fmla="val 5113"/>
             </a:avLst>
           </a:prstGeom>
           <a:solidFill>
@@ -4592,18 +5386,18 @@
       </p:sp>
       <p:sp>
         <p:nvSpPr>
-          <p:cNvPr id="26" name="e1_a" descr="Editable shape; source id e1_a"/>
+          <p:cNvPr id="44" name="e2_b" descr="Editable shape; source id e2_b"/>
           <p:cNvSpPr/>
           <p:nvPr/>
         </p:nvSpPr>
         <p:spPr>
           <a:xfrm>
-            <a:off x="3397249" y="730249"/>
-            <a:ext cx="4270374" cy="47624"/>
+            <a:off x="523874" y="2619374"/>
+            <a:ext cx="63499" cy="1396999"/>
           </a:xfrm>
           <a:prstGeom prst="roundRect">
             <a:avLst>
-              <a:gd name="adj" fmla="val 50000"/>
+              <a:gd name="adj" fmla="val 37500"/>
             </a:avLst>
           </a:prstGeom>
           <a:solidFill>
@@ -4638,19 +5432,19 @@
       </p:sp>
       <p:cxnSp>
         <p:nvCxnSpPr>
-          <p:cNvPr id="27" name="e1_g_o_0" descr="Editable line; source id e1_g_o_0"/>
+          <p:cNvPr id="45" name="e2_g_n_0" descr="Editable line; source id e2_g_n_0"/>
           <p:cNvCxnSpPr/>
           <p:nvPr/>
         </p:nvCxnSpPr>
         <p:spPr>
           <a:xfrm>
-            <a:off x="3675062" y="952499"/>
-            <a:ext cx="111125" cy="71438"/>
+            <a:off x="920749" y="2992437"/>
+            <a:ext cx="0" cy="119062"/>
           </a:xfrm>
           <a:prstGeom prst="line">
             <a:avLst/>
           </a:prstGeom>
-          <a:ln w="7937">
+          <a:ln w="8572">
             <a:solidFill>
               <a:srgbClr val="1F2937"/>
             </a:solidFill>
@@ -4674,19 +5468,19 @@
       </p:cxnSp>
       <p:cxnSp>
         <p:nvCxnSpPr>
-          <p:cNvPr id="28" name="e1_g_o_1" descr="Editable line; source id e1_g_o_1"/>
+          <p:cNvPr id="46" name="e2_g_n_1" descr="Editable line; source id e2_g_n_1"/>
           <p:cNvCxnSpPr/>
           <p:nvPr/>
         </p:nvCxnSpPr>
         <p:spPr>
           <a:xfrm flipH="1">
-            <a:off x="3730624" y="1023937"/>
-            <a:ext cx="55563" cy="142875"/>
+            <a:off x="809624" y="3111499"/>
+            <a:ext cx="111125" cy="214313"/>
           </a:xfrm>
           <a:prstGeom prst="line">
             <a:avLst/>
           </a:prstGeom>
-          <a:ln w="7937">
+          <a:ln w="8572">
             <a:solidFill>
               <a:srgbClr val="1F2937"/>
             </a:solidFill>
@@ -4710,19 +5504,19 @@
       </p:cxnSp>
       <p:cxnSp>
         <p:nvCxnSpPr>
-          <p:cNvPr id="29" name="e1_g_o_2" descr="Editable line; source id e1_g_o_2"/>
+          <p:cNvPr id="47" name="e2_g_n_2" descr="Editable line; source id e2_g_n_2"/>
           <p:cNvCxnSpPr/>
           <p:nvPr/>
         </p:nvCxnSpPr>
         <p:spPr>
-          <a:xfrm flipH="1">
-            <a:off x="3619499" y="1166812"/>
-            <a:ext cx="111125" cy="0"/>
+          <a:xfrm>
+            <a:off x="809624" y="3325812"/>
+            <a:ext cx="301625" cy="0"/>
           </a:xfrm>
           <a:prstGeom prst="line">
             <a:avLst/>
           </a:prstGeom>
-          <a:ln w="7937">
+          <a:ln w="8572">
             <a:solidFill>
               <a:srgbClr val="1F2937"/>
             </a:solidFill>
@@ -4746,19 +5540,19 @@
       </p:cxnSp>
       <p:cxnSp>
         <p:nvCxnSpPr>
-          <p:cNvPr id="30" name="e1_g_o_3" descr="Editable line; source id e1_g_o_3"/>
+          <p:cNvPr id="48" name="e2_g_n_3" descr="Editable line; source id e2_g_n_3"/>
           <p:cNvCxnSpPr/>
           <p:nvPr/>
         </p:nvCxnSpPr>
         <p:spPr>
           <a:xfrm flipH="1" flipV="1">
-            <a:off x="3563937" y="1023937"/>
-            <a:ext cx="55562" cy="142875"/>
+            <a:off x="1000124" y="3111499"/>
+            <a:ext cx="111125" cy="214313"/>
           </a:xfrm>
           <a:prstGeom prst="line">
             <a:avLst/>
           </a:prstGeom>
-          <a:ln w="7937">
+          <a:ln w="8572">
             <a:solidFill>
               <a:srgbClr val="1F2937"/>
             </a:solidFill>
@@ -4782,19 +5576,19 @@
       </p:cxnSp>
       <p:cxnSp>
         <p:nvCxnSpPr>
-          <p:cNvPr id="31" name="e1_g_o_4" descr="Editable line; source id e1_g_o_4"/>
+          <p:cNvPr id="49" name="e2_g_n_4" descr="Editable line; source id e2_g_n_4"/>
           <p:cNvCxnSpPr/>
           <p:nvPr/>
         </p:nvCxnSpPr>
         <p:spPr>
           <a:xfrm flipV="1">
-            <a:off x="3563937" y="952499"/>
-            <a:ext cx="111125" cy="71438"/>
+            <a:off x="1000124" y="2992437"/>
+            <a:ext cx="0" cy="119062"/>
           </a:xfrm>
           <a:prstGeom prst="line">
             <a:avLst/>
           </a:prstGeom>
-          <a:ln w="7937">
+          <a:ln w="8572">
             <a:solidFill>
               <a:srgbClr val="1F2937"/>
             </a:solidFill>
@@ -4818,19 +5612,483 @@
       </p:cxnSp>
       <p:cxnSp>
         <p:nvCxnSpPr>
-          <p:cNvPr id="32" name="e1_g_a" descr="Editable line; source id e1_g_a"/>
+          <p:cNvPr id="50" name="e2_g_m" descr="Editable line; source id e2_g_m"/>
           <p:cNvCxnSpPr/>
           <p:nvPr/>
         </p:nvCxnSpPr>
         <p:spPr>
           <a:xfrm>
-            <a:off x="3675062" y="952499"/>
-            <a:ext cx="0" cy="214313"/>
+            <a:off x="896937" y="2992437"/>
+            <a:ext cx="127000" cy="0"/>
           </a:xfrm>
           <a:prstGeom prst="line">
             <a:avLst/>
           </a:prstGeom>
-          <a:ln w="7937">
+          <a:ln w="8572">
+            <a:solidFill>
+              <a:srgbClr val="1F2937"/>
+            </a:solidFill>
+          </a:ln>
+          <a:effectLst/>
+        </p:spPr>
+        <p:style>
+          <a:lnRef idx="2">
+            <a:schemeClr val="accent1"/>
+          </a:lnRef>
+          <a:fillRef idx="0">
+            <a:schemeClr val="accent1"/>
+          </a:fillRef>
+          <a:effectRef idx="0">
+            <a:schemeClr val="accent1"/>
+          </a:effectRef>
+          <a:fontRef idx="minor">
+            <a:schemeClr val="tx1"/>
+          </a:fontRef>
+        </p:style>
+      </p:cxnSp>
+      <p:sp>
+        <p:nvSpPr>
+          <p:cNvPr id="51" name="e2_g_d1" descr="Editable shape; source id e2_g_d1"/>
+          <p:cNvSpPr/>
+          <p:nvPr/>
+        </p:nvSpPr>
+        <p:spPr>
+          <a:xfrm>
+            <a:off x="912812" y="3230562"/>
+            <a:ext cx="31749" cy="31749"/>
+          </a:xfrm>
+          <a:prstGeom prst="ellipse">
+            <a:avLst/>
+          </a:prstGeom>
+          <a:noFill/>
+          <a:ln w="8572">
+            <a:solidFill>
+              <a:srgbClr val="1F2937"/>
+            </a:solidFill>
+          </a:ln>
+          <a:effectLst/>
+        </p:spPr>
+        <p:style>
+          <a:lnRef idx="1">
+            <a:schemeClr val="accent1"/>
+          </a:lnRef>
+          <a:fillRef idx="3">
+            <a:schemeClr val="accent1"/>
+          </a:fillRef>
+          <a:effectRef idx="0">
+            <a:schemeClr val="accent1"/>
+          </a:effectRef>
+          <a:fontRef idx="minor">
+            <a:schemeClr val="lt1"/>
+          </a:fontRef>
+        </p:style>
+        <p:txBody>
+          <a:bodyPr rtlCol="0" anchor="ctr"/>
+          <a:lstStyle/>
+          <a:p>
+            <a:pPr algn="ctr"/>
+          </a:p>
+        </p:txBody>
+      </p:sp>
+      <p:sp>
+        <p:nvSpPr>
+          <p:cNvPr id="52" name="e2_g_d2" descr="Editable shape; source id e2_g_d2"/>
+          <p:cNvSpPr/>
+          <p:nvPr/>
+        </p:nvSpPr>
+        <p:spPr>
+          <a:xfrm>
+            <a:off x="984249" y="3262312"/>
+            <a:ext cx="23812" cy="23812"/>
+          </a:xfrm>
+          <a:prstGeom prst="ellipse">
+            <a:avLst/>
+          </a:prstGeom>
+          <a:noFill/>
+          <a:ln w="8572">
+            <a:solidFill>
+              <a:srgbClr val="1F2937"/>
+            </a:solidFill>
+          </a:ln>
+          <a:effectLst/>
+        </p:spPr>
+        <p:style>
+          <a:lnRef idx="1">
+            <a:schemeClr val="accent1"/>
+          </a:lnRef>
+          <a:fillRef idx="3">
+            <a:schemeClr val="accent1"/>
+          </a:fillRef>
+          <a:effectRef idx="0">
+            <a:schemeClr val="accent1"/>
+          </a:effectRef>
+          <a:fontRef idx="minor">
+            <a:schemeClr val="lt1"/>
+          </a:fontRef>
+        </p:style>
+        <p:txBody>
+          <a:bodyPr rtlCol="0" anchor="ctr"/>
+          <a:lstStyle/>
+          <a:p>
+            <a:pPr algn="ctr"/>
+          </a:p>
+        </p:txBody>
+      </p:sp>
+      <p:sp>
+        <p:nvSpPr>
+          <p:cNvPr id="53" name="e2_t" descr="Editable text; source id e2_t"/>
+          <p:cNvSpPr txBox="1"/>
+          <p:nvPr/>
+        </p:nvSpPr>
+        <p:spPr>
+          <a:xfrm>
+            <a:off x="1269999" y="2992437"/>
+            <a:ext cx="2746374" cy="341312"/>
+          </a:xfrm>
+          <a:prstGeom prst="rect">
+            <a:avLst/>
+          </a:prstGeom>
+          <a:noFill/>
+          <a:effectLst/>
+        </p:spPr>
+        <p:txBody>
+          <a:bodyPr wrap="none" anchor="ctr" tIns="0" rIns="0" bIns="0" lIns="0" anchorCtr="0" vertOverflow="overflow">
+            <a:noAutofit/>
+          </a:bodyPr>
+          <a:lstStyle/>
+          <a:p>
+            <a:pPr algn="l" fontAlgn="base">
+              <a:lnSpc>
+                <a:spcPts val="2265"/>
+              </a:lnSpc>
+              <a:spcBef>
+                <a:spcPts val="0"/>
+              </a:spcBef>
+              <a:spcAft>
+                <a:spcPts val="0"/>
+              </a:spcAft>
+              <a:defRPr sz="1562" b="1" i="0" lang="zh-CN" dirty="0">
+                <a:solidFill>
+                  <a:srgbClr val="0F4F58"/>
+                </a:solidFill>
+                <a:latin typeface="Noto Sans CJK SC"/>
+                <a:ea typeface="Noto Sans CJK SC"/>
+                <a:cs typeface="Noto Sans CJK SC"/>
+              </a:defRPr>
+            </a:pPr>
+            <a:r>
+              <a:rPr sz="1562" b="1" i="0" lang="zh-CN" dirty="0">
+                <a:solidFill>
+                  <a:srgbClr val="0F4F58"/>
+                </a:solidFill>
+                <a:latin typeface="Noto Sans CJK SC"/>
+                <a:ea typeface="Noto Sans CJK SC"/>
+                <a:cs typeface="Noto Sans CJK SC"/>
+              </a:rPr>
+              <a:t>合成路线</a:t>
+            </a:r>
+          </a:p>
+        </p:txBody>
+      </p:sp>
+      <p:sp>
+        <p:nvSpPr>
+          <p:cNvPr id="54" name="e2_s" descr="Editable text; source id e2_s"/>
+          <p:cNvSpPr txBox="1"/>
+          <p:nvPr/>
+        </p:nvSpPr>
+        <p:spPr>
+          <a:xfrm>
+            <a:off x="1269999" y="3365499"/>
+            <a:ext cx="2746374" cy="277812"/>
+          </a:xfrm>
+          <a:prstGeom prst="rect">
+            <a:avLst/>
+          </a:prstGeom>
+          <a:noFill/>
+          <a:effectLst/>
+        </p:spPr>
+        <p:txBody>
+          <a:bodyPr wrap="none" anchor="ctr" tIns="0" rIns="0" bIns="0" lIns="0" anchorCtr="0" vertOverflow="overflow">
+            <a:noAutofit/>
+          </a:bodyPr>
+          <a:lstStyle/>
+          <a:p>
+            <a:pPr algn="l" fontAlgn="base">
+              <a:lnSpc>
+                <a:spcPts val="1828"/>
+              </a:lnSpc>
+              <a:spcBef>
+                <a:spcPts val="0"/>
+              </a:spcBef>
+              <a:spcAft>
+                <a:spcPts val="0"/>
+              </a:spcAft>
+              <a:defRPr sz="1249" b="0" i="0" lang="zh-CN" dirty="0">
+                <a:solidFill>
+                  <a:srgbClr val="3F4854"/>
+                </a:solidFill>
+                <a:latin typeface="Noto Sans CJK SC"/>
+                <a:ea typeface="Noto Sans CJK SC"/>
+                <a:cs typeface="Noto Sans CJK SC"/>
+              </a:defRPr>
+            </a:pPr>
+            <a:r>
+              <a:rPr sz="1249" b="0" i="0" lang="zh-CN" dirty="0">
+                <a:solidFill>
+                  <a:srgbClr val="3F4854"/>
+                </a:solidFill>
+                <a:latin typeface="Noto Sans CJK SC"/>
+                <a:ea typeface="Noto Sans CJK SC"/>
+                <a:cs typeface="Noto Sans CJK SC"/>
+              </a:rPr>
+              <a:t>固相</a:t>
+            </a:r>
+            <a:r>
+              <a:rPr sz="1249" b="0" i="0" lang="zh-CN" dirty="0">
+                <a:solidFill>
+                  <a:srgbClr val="3F4854"/>
+                </a:solidFill>
+                <a:latin typeface="DejaVu Sans"/>
+                <a:ea typeface="DejaVu Sans"/>
+                <a:cs typeface="DejaVu Sans"/>
+              </a:rPr>
+              <a:t> · </a:t>
+            </a:r>
+            <a:r>
+              <a:rPr sz="1249" b="0" i="0" lang="zh-CN" dirty="0">
+                <a:solidFill>
+                  <a:srgbClr val="3F4854"/>
+                </a:solidFill>
+                <a:latin typeface="Noto Sans CJK SC"/>
+                <a:ea typeface="Noto Sans CJK SC"/>
+                <a:cs typeface="Noto Sans CJK SC"/>
+              </a:rPr>
+              <a:t>溶胶</a:t>
+            </a:r>
+            <a:r>
+              <a:rPr sz="1249" b="0" i="0" lang="zh-CN" dirty="0">
+                <a:solidFill>
+                  <a:srgbClr val="3F4854"/>
+                </a:solidFill>
+                <a:latin typeface="DejaVu Sans"/>
+                <a:ea typeface="DejaVu Sans"/>
+                <a:cs typeface="DejaVu Sans"/>
+              </a:rPr>
+              <a:t>—</a:t>
+            </a:r>
+            <a:r>
+              <a:rPr sz="1249" b="0" i="0" lang="zh-CN" dirty="0">
+                <a:solidFill>
+                  <a:srgbClr val="3F4854"/>
+                </a:solidFill>
+                <a:latin typeface="Noto Sans CJK SC"/>
+                <a:ea typeface="Noto Sans CJK SC"/>
+                <a:cs typeface="Noto Sans CJK SC"/>
+              </a:rPr>
+              <a:t>凝胶</a:t>
+            </a:r>
+          </a:p>
+        </p:txBody>
+      </p:sp>
+      <p:sp>
+        <p:nvSpPr>
+          <p:cNvPr id="55" name="e3" descr="Editable shape; source id e3"/>
+          <p:cNvSpPr/>
+          <p:nvPr/>
+        </p:nvSpPr>
+        <p:spPr>
+          <a:xfrm>
+            <a:off x="523874" y="4286249"/>
+            <a:ext cx="3651249" cy="1396999"/>
+          </a:xfrm>
+          <a:prstGeom prst="roundRect">
+            <a:avLst>
+              <a:gd name="adj" fmla="val 5113"/>
+            </a:avLst>
+          </a:prstGeom>
+          <a:solidFill>
+            <a:srgbClr val="FFFFFF"/>
+          </a:solidFill>
+          <a:ln w="11112">
+            <a:solidFill>
+              <a:srgbClr val="1F7F8C"/>
+            </a:solidFill>
+          </a:ln>
+          <a:effectLst/>
+        </p:spPr>
+        <p:style>
+          <a:lnRef idx="1">
+            <a:schemeClr val="accent1"/>
+          </a:lnRef>
+          <a:fillRef idx="3">
+            <a:schemeClr val="accent1"/>
+          </a:fillRef>
+          <a:effectRef idx="0">
+            <a:schemeClr val="accent1"/>
+          </a:effectRef>
+          <a:fontRef idx="minor">
+            <a:schemeClr val="lt1"/>
+          </a:fontRef>
+        </p:style>
+        <p:txBody>
+          <a:bodyPr rtlCol="0" anchor="ctr"/>
+          <a:lstStyle/>
+          <a:p>
+            <a:pPr algn="ctr"/>
+          </a:p>
+        </p:txBody>
+      </p:sp>
+      <p:sp>
+        <p:nvSpPr>
+          <p:cNvPr id="56" name="e3_b" descr="Editable shape; source id e3_b"/>
+          <p:cNvSpPr/>
+          <p:nvPr/>
+        </p:nvSpPr>
+        <p:spPr>
+          <a:xfrm>
+            <a:off x="523874" y="4286249"/>
+            <a:ext cx="63499" cy="1396999"/>
+          </a:xfrm>
+          <a:prstGeom prst="roundRect">
+            <a:avLst>
+              <a:gd name="adj" fmla="val 37500"/>
+            </a:avLst>
+          </a:prstGeom>
+          <a:solidFill>
+            <a:srgbClr val="1F7F8C"/>
+          </a:solidFill>
+          <a:ln>
+            <a:noFill/>
+          </a:ln>
+          <a:effectLst/>
+        </p:spPr>
+        <p:style>
+          <a:lnRef idx="1">
+            <a:schemeClr val="accent1"/>
+          </a:lnRef>
+          <a:fillRef idx="3">
+            <a:schemeClr val="accent1"/>
+          </a:fillRef>
+          <a:effectRef idx="0">
+            <a:schemeClr val="accent1"/>
+          </a:effectRef>
+          <a:fontRef idx="minor">
+            <a:schemeClr val="lt1"/>
+          </a:fontRef>
+        </p:style>
+        <p:txBody>
+          <a:bodyPr rtlCol="0" anchor="ctr"/>
+          <a:lstStyle/>
+          <a:p>
+            <a:pPr algn="ctr"/>
+          </a:p>
+        </p:txBody>
+      </p:sp>
+      <p:sp>
+        <p:nvSpPr>
+          <p:cNvPr id="57" name="e3_g_t" descr="Editable shape; source id e3_g_t"/>
+          <p:cNvSpPr/>
+          <p:nvPr/>
+        </p:nvSpPr>
+        <p:spPr>
+          <a:xfrm>
+            <a:off x="920749" y="4651374"/>
+            <a:ext cx="87312" cy="246062"/>
+          </a:xfrm>
+          <a:prstGeom prst="roundRect">
+            <a:avLst>
+              <a:gd name="adj" fmla="val 49090"/>
+            </a:avLst>
+          </a:prstGeom>
+          <a:noFill/>
+          <a:ln w="8572">
+            <a:solidFill>
+              <a:srgbClr val="1F2937"/>
+            </a:solidFill>
+          </a:ln>
+          <a:effectLst/>
+        </p:spPr>
+        <p:style>
+          <a:lnRef idx="1">
+            <a:schemeClr val="accent1"/>
+          </a:lnRef>
+          <a:fillRef idx="3">
+            <a:schemeClr val="accent1"/>
+          </a:fillRef>
+          <a:effectRef idx="0">
+            <a:schemeClr val="accent1"/>
+          </a:effectRef>
+          <a:fontRef idx="minor">
+            <a:schemeClr val="lt1"/>
+          </a:fontRef>
+        </p:style>
+        <p:txBody>
+          <a:bodyPr rtlCol="0" anchor="ctr"/>
+          <a:lstStyle/>
+          <a:p>
+            <a:pPr algn="ctr"/>
+          </a:p>
+        </p:txBody>
+      </p:sp>
+      <p:sp>
+        <p:nvSpPr>
+          <p:cNvPr id="58" name="e3_g_b" descr="Editable shape; source id e3_g_b"/>
+          <p:cNvSpPr/>
+          <p:nvPr/>
+        </p:nvSpPr>
+        <p:spPr>
+          <a:xfrm>
+            <a:off x="888999" y="4889499"/>
+            <a:ext cx="134937" cy="134937"/>
+          </a:xfrm>
+          <a:prstGeom prst="ellipse">
+            <a:avLst/>
+          </a:prstGeom>
+          <a:noFill/>
+          <a:ln w="8572">
+            <a:solidFill>
+              <a:srgbClr val="1F2937"/>
+            </a:solidFill>
+          </a:ln>
+          <a:effectLst/>
+        </p:spPr>
+        <p:style>
+          <a:lnRef idx="1">
+            <a:schemeClr val="accent1"/>
+          </a:lnRef>
+          <a:fillRef idx="3">
+            <a:schemeClr val="accent1"/>
+          </a:fillRef>
+          <a:effectRef idx="0">
+            <a:schemeClr val="accent1"/>
+          </a:effectRef>
+          <a:fontRef idx="minor">
+            <a:schemeClr val="lt1"/>
+          </a:fontRef>
+        </p:style>
+        <p:txBody>
+          <a:bodyPr rtlCol="0" anchor="ctr"/>
+          <a:lstStyle/>
+          <a:p>
+            <a:pPr algn="ctr"/>
+          </a:p>
+        </p:txBody>
+      </p:sp>
+      <p:cxnSp>
+        <p:nvCxnSpPr>
+          <p:cNvPr id="59" name="e3_g_m0" descr="Editable line; source id e3_g_m0"/>
+          <p:cNvCxnSpPr/>
+          <p:nvPr/>
+        </p:nvCxnSpPr>
+        <p:spPr>
+          <a:xfrm>
+            <a:off x="1008062" y="4714874"/>
+            <a:ext cx="55562" cy="0"/>
+          </a:xfrm>
+          <a:prstGeom prst="line">
+            <a:avLst/>
+          </a:prstGeom>
+          <a:ln w="8572">
             <a:solidFill>
               <a:srgbClr val="1F2937"/>
             </a:solidFill>
@@ -4854,19 +6112,19 @@
       </p:cxnSp>
       <p:cxnSp>
         <p:nvCxnSpPr>
-          <p:cNvPr id="33" name="e1_g_b" descr="Editable line; source id e1_g_b"/>
+          <p:cNvPr id="60" name="e3_g_m1" descr="Editable line; source id e3_g_m1"/>
           <p:cNvCxnSpPr/>
           <p:nvPr/>
         </p:nvCxnSpPr>
         <p:spPr>
           <a:xfrm>
-            <a:off x="3563937" y="1023937"/>
-            <a:ext cx="222250" cy="0"/>
+            <a:off x="1008062" y="4770437"/>
+            <a:ext cx="55562" cy="0"/>
           </a:xfrm>
           <a:prstGeom prst="line">
             <a:avLst/>
           </a:prstGeom>
-          <a:ln w="7937">
+          <a:ln w="8572">
             <a:solidFill>
               <a:srgbClr val="1F2937"/>
             </a:solidFill>
@@ -4888,16 +6146,989 @@
           </a:fontRef>
         </p:style>
       </p:cxnSp>
-      <p:sp>
-        <p:nvSpPr>
-          <p:cNvPr id="34" name="e1_t" descr="Editable text; source id e1_t"/>
+      <p:cxnSp>
+        <p:nvCxnSpPr>
+          <p:cNvPr id="61" name="e3_g_m2" descr="Editable line; source id e3_g_m2"/>
+          <p:cNvCxnSpPr/>
+          <p:nvPr/>
+        </p:nvCxnSpPr>
+        <p:spPr>
+          <a:xfrm>
+            <a:off x="1008062" y="4818062"/>
+            <a:ext cx="55562" cy="0"/>
+          </a:xfrm>
+          <a:prstGeom prst="line">
+            <a:avLst/>
+          </a:prstGeom>
+          <a:ln w="8572">
+            <a:solidFill>
+              <a:srgbClr val="1F2937"/>
+            </a:solidFill>
+          </a:ln>
+          <a:effectLst/>
+        </p:spPr>
+        <p:style>
+          <a:lnRef idx="2">
+            <a:schemeClr val="accent1"/>
+          </a:lnRef>
+          <a:fillRef idx="0">
+            <a:schemeClr val="accent1"/>
+          </a:fillRef>
+          <a:effectRef idx="0">
+            <a:schemeClr val="accent1"/>
+          </a:effectRef>
+          <a:fontRef idx="minor">
+            <a:schemeClr val="tx1"/>
+          </a:fontRef>
+        </p:style>
+      </p:cxnSp>
+      <p:sp>
+        <p:nvSpPr>
+          <p:cNvPr id="62" name="e3_t" descr="Editable text; source id e3_t"/>
           <p:cNvSpPr txBox="1"/>
           <p:nvPr/>
         </p:nvSpPr>
         <p:spPr>
           <a:xfrm>
-            <a:off x="3889374" y="920749"/>
-            <a:ext cx="3635374" cy="285749"/>
+            <a:off x="1269999" y="4659312"/>
+            <a:ext cx="2746374" cy="341312"/>
+          </a:xfrm>
+          <a:prstGeom prst="rect">
+            <a:avLst/>
+          </a:prstGeom>
+          <a:noFill/>
+          <a:effectLst/>
+        </p:spPr>
+        <p:txBody>
+          <a:bodyPr wrap="none" anchor="ctr" tIns="0" rIns="0" bIns="0" lIns="0" anchorCtr="0" vertOverflow="overflow">
+            <a:noAutofit/>
+          </a:bodyPr>
+          <a:lstStyle/>
+          <a:p>
+            <a:pPr algn="l" fontAlgn="base">
+              <a:lnSpc>
+                <a:spcPts val="2265"/>
+              </a:lnSpc>
+              <a:spcBef>
+                <a:spcPts val="0"/>
+              </a:spcBef>
+              <a:spcAft>
+                <a:spcPts val="0"/>
+              </a:spcAft>
+              <a:defRPr sz="1562" b="1" i="0" lang="zh-CN" dirty="0">
+                <a:solidFill>
+                  <a:srgbClr val="0F4F58"/>
+                </a:solidFill>
+                <a:latin typeface="Noto Sans CJK SC"/>
+                <a:ea typeface="Noto Sans CJK SC"/>
+                <a:cs typeface="Noto Sans CJK SC"/>
+              </a:defRPr>
+            </a:pPr>
+            <a:r>
+              <a:rPr sz="1562" b="1" i="0" lang="zh-CN" dirty="0">
+                <a:solidFill>
+                  <a:srgbClr val="0F4F58"/>
+                </a:solidFill>
+                <a:latin typeface="Noto Sans CJK SC"/>
+                <a:ea typeface="Noto Sans CJK SC"/>
+                <a:cs typeface="Noto Sans CJK SC"/>
+              </a:rPr>
+              <a:t>组成与热处理</a:t>
+            </a:r>
+          </a:p>
+        </p:txBody>
+      </p:sp>
+      <p:sp>
+        <p:nvSpPr>
+          <p:cNvPr id="63" name="e3_s" descr="Editable text; source id e3_s"/>
+          <p:cNvSpPr txBox="1"/>
+          <p:nvPr/>
+        </p:nvSpPr>
+        <p:spPr>
+          <a:xfrm>
+            <a:off x="1269999" y="5032374"/>
+            <a:ext cx="2746374" cy="277812"/>
+          </a:xfrm>
+          <a:prstGeom prst="rect">
+            <a:avLst/>
+          </a:prstGeom>
+          <a:noFill/>
+          <a:effectLst/>
+        </p:spPr>
+        <p:txBody>
+          <a:bodyPr wrap="none" anchor="ctr" tIns="0" rIns="0" bIns="0" lIns="0" anchorCtr="0" vertOverflow="overflow">
+            <a:noAutofit/>
+          </a:bodyPr>
+          <a:lstStyle/>
+          <a:p>
+            <a:pPr algn="l" fontAlgn="base">
+              <a:lnSpc>
+                <a:spcPts val="1828"/>
+              </a:lnSpc>
+              <a:spcBef>
+                <a:spcPts val="0"/>
+              </a:spcBef>
+              <a:spcAft>
+                <a:spcPts val="0"/>
+              </a:spcAft>
+              <a:defRPr sz="1249" b="0" i="0" lang="zh-CN" dirty="0">
+                <a:solidFill>
+                  <a:srgbClr val="3F4854"/>
+                </a:solidFill>
+                <a:latin typeface="DejaVu Sans"/>
+                <a:ea typeface="DejaVu Sans"/>
+                <a:cs typeface="DejaVu Sans"/>
+              </a:defRPr>
+            </a:pPr>
+            <a:r>
+              <a:rPr sz="1249" b="0" i="0" lang="zh-CN" dirty="0">
+                <a:solidFill>
+                  <a:srgbClr val="3F4854"/>
+                </a:solidFill>
+                <a:latin typeface="DejaVu Sans"/>
+                <a:ea typeface="DejaVu Sans"/>
+                <a:cs typeface="DejaVu Sans"/>
+              </a:rPr>
+              <a:t>Ba/Sr · Zn </a:t>
+            </a:r>
+            <a:r>
+              <a:rPr sz="1249" b="0" i="0" lang="zh-CN" dirty="0">
+                <a:solidFill>
+                  <a:srgbClr val="3F4854"/>
+                </a:solidFill>
+                <a:latin typeface="Noto Sans CJK SC"/>
+                <a:ea typeface="Noto Sans CJK SC"/>
+                <a:cs typeface="Noto Sans CJK SC"/>
+              </a:rPr>
+              <a:t>位</a:t>
+            </a:r>
+          </a:p>
+        </p:txBody>
+      </p:sp>
+      <p:sp>
+        <p:nvSpPr>
+          <p:cNvPr id="64" name="e4" descr="Editable shape; source id e4"/>
+          <p:cNvSpPr/>
+          <p:nvPr/>
+        </p:nvSpPr>
+        <p:spPr>
+          <a:xfrm>
+            <a:off x="523874" y="5953124"/>
+            <a:ext cx="3651249" cy="1396999"/>
+          </a:xfrm>
+          <a:prstGeom prst="roundRect">
+            <a:avLst>
+              <a:gd name="adj" fmla="val 5113"/>
+            </a:avLst>
+          </a:prstGeom>
+          <a:solidFill>
+            <a:srgbClr val="FFFFFF"/>
+          </a:solidFill>
+          <a:ln w="11112">
+            <a:solidFill>
+              <a:srgbClr val="1F7F8C"/>
+            </a:solidFill>
+          </a:ln>
+          <a:effectLst/>
+        </p:spPr>
+        <p:style>
+          <a:lnRef idx="1">
+            <a:schemeClr val="accent1"/>
+          </a:lnRef>
+          <a:fillRef idx="3">
+            <a:schemeClr val="accent1"/>
+          </a:fillRef>
+          <a:effectRef idx="0">
+            <a:schemeClr val="accent1"/>
+          </a:effectRef>
+          <a:fontRef idx="minor">
+            <a:schemeClr val="lt1"/>
+          </a:fontRef>
+        </p:style>
+        <p:txBody>
+          <a:bodyPr rtlCol="0" anchor="ctr"/>
+          <a:lstStyle/>
+          <a:p>
+            <a:pPr algn="ctr"/>
+          </a:p>
+        </p:txBody>
+      </p:sp>
+      <p:sp>
+        <p:nvSpPr>
+          <p:cNvPr id="65" name="e4_b" descr="Editable shape; source id e4_b"/>
+          <p:cNvSpPr/>
+          <p:nvPr/>
+        </p:nvSpPr>
+        <p:spPr>
+          <a:xfrm>
+            <a:off x="523874" y="5953124"/>
+            <a:ext cx="63499" cy="1396999"/>
+          </a:xfrm>
+          <a:prstGeom prst="roundRect">
+            <a:avLst>
+              <a:gd name="adj" fmla="val 37500"/>
+            </a:avLst>
+          </a:prstGeom>
+          <a:solidFill>
+            <a:srgbClr val="1F7F8C"/>
+          </a:solidFill>
+          <a:ln>
+            <a:noFill/>
+          </a:ln>
+          <a:effectLst/>
+        </p:spPr>
+        <p:style>
+          <a:lnRef idx="1">
+            <a:schemeClr val="accent1"/>
+          </a:lnRef>
+          <a:fillRef idx="3">
+            <a:schemeClr val="accent1"/>
+          </a:fillRef>
+          <a:effectRef idx="0">
+            <a:schemeClr val="accent1"/>
+          </a:effectRef>
+          <a:fontRef idx="minor">
+            <a:schemeClr val="lt1"/>
+          </a:fontRef>
+        </p:style>
+        <p:txBody>
+          <a:bodyPr rtlCol="0" anchor="ctr"/>
+          <a:lstStyle/>
+          <a:p>
+            <a:pPr algn="ctr"/>
+          </a:p>
+        </p:txBody>
+      </p:sp>
+      <p:cxnSp>
+        <p:nvCxnSpPr>
+          <p:cNvPr id="66" name="e4_g_a_0" descr="Editable line; source id e4_g_a_0"/>
+          <p:cNvCxnSpPr/>
+          <p:nvPr/>
+        </p:nvCxnSpPr>
+        <p:spPr>
+          <a:xfrm flipH="1" flipV="1">
+            <a:off x="849312" y="6476999"/>
+            <a:ext cx="63500" cy="198438"/>
+          </a:xfrm>
+          <a:prstGeom prst="line">
+            <a:avLst/>
+          </a:prstGeom>
+          <a:ln w="8572">
+            <a:solidFill>
+              <a:srgbClr val="1F2937"/>
+            </a:solidFill>
+          </a:ln>
+          <a:effectLst/>
+        </p:spPr>
+        <p:style>
+          <a:lnRef idx="2">
+            <a:schemeClr val="accent1"/>
+          </a:lnRef>
+          <a:fillRef idx="0">
+            <a:schemeClr val="accent1"/>
+          </a:fillRef>
+          <a:effectRef idx="0">
+            <a:schemeClr val="accent1"/>
+          </a:effectRef>
+          <a:fontRef idx="minor">
+            <a:schemeClr val="tx1"/>
+          </a:fontRef>
+        </p:style>
+      </p:cxnSp>
+      <p:cxnSp>
+        <p:nvCxnSpPr>
+          <p:cNvPr id="67" name="e4_g_a_1" descr="Editable line; source id e4_g_a_1"/>
+          <p:cNvCxnSpPr/>
+          <p:nvPr/>
+        </p:nvCxnSpPr>
+        <p:spPr>
+          <a:xfrm flipV="1">
+            <a:off x="849312" y="6365874"/>
+            <a:ext cx="71437" cy="111125"/>
+          </a:xfrm>
+          <a:prstGeom prst="line">
+            <a:avLst/>
+          </a:prstGeom>
+          <a:ln w="8572">
+            <a:solidFill>
+              <a:srgbClr val="1F2937"/>
+            </a:solidFill>
+          </a:ln>
+          <a:effectLst/>
+        </p:spPr>
+        <p:style>
+          <a:lnRef idx="2">
+            <a:schemeClr val="accent1"/>
+          </a:lnRef>
+          <a:fillRef idx="0">
+            <a:schemeClr val="accent1"/>
+          </a:fillRef>
+          <a:effectRef idx="0">
+            <a:schemeClr val="accent1"/>
+          </a:effectRef>
+          <a:fontRef idx="minor">
+            <a:schemeClr val="tx1"/>
+          </a:fontRef>
+        </p:style>
+      </p:cxnSp>
+      <p:cxnSp>
+        <p:nvCxnSpPr>
+          <p:cNvPr id="68" name="e4_g_a_2" descr="Editable line; source id e4_g_a_2"/>
+          <p:cNvCxnSpPr/>
+          <p:nvPr/>
+        </p:nvCxnSpPr>
+        <p:spPr>
+          <a:xfrm>
+            <a:off x="920749" y="6365874"/>
+            <a:ext cx="47625" cy="127000"/>
+          </a:xfrm>
+          <a:prstGeom prst="line">
+            <a:avLst/>
+          </a:prstGeom>
+          <a:ln w="8572">
+            <a:solidFill>
+              <a:srgbClr val="1F2937"/>
+            </a:solidFill>
+          </a:ln>
+          <a:effectLst/>
+        </p:spPr>
+        <p:style>
+          <a:lnRef idx="2">
+            <a:schemeClr val="accent1"/>
+          </a:lnRef>
+          <a:fillRef idx="0">
+            <a:schemeClr val="accent1"/>
+          </a:fillRef>
+          <a:effectRef idx="0">
+            <a:schemeClr val="accent1"/>
+          </a:effectRef>
+          <a:fontRef idx="minor">
+            <a:schemeClr val="tx1"/>
+          </a:fontRef>
+        </p:style>
+      </p:cxnSp>
+      <p:cxnSp>
+        <p:nvCxnSpPr>
+          <p:cNvPr id="69" name="e4_g_a_3" descr="Editable line; source id e4_g_a_3"/>
+          <p:cNvCxnSpPr/>
+          <p:nvPr/>
+        </p:nvCxnSpPr>
+        <p:spPr>
+          <a:xfrm flipH="1">
+            <a:off x="912812" y="6492874"/>
+            <a:ext cx="55562" cy="182563"/>
+          </a:xfrm>
+          <a:prstGeom prst="line">
+            <a:avLst/>
+          </a:prstGeom>
+          <a:ln w="8572">
+            <a:solidFill>
+              <a:srgbClr val="1F2937"/>
+            </a:solidFill>
+          </a:ln>
+          <a:effectLst/>
+        </p:spPr>
+        <p:style>
+          <a:lnRef idx="2">
+            <a:schemeClr val="accent1"/>
+          </a:lnRef>
+          <a:fillRef idx="0">
+            <a:schemeClr val="accent1"/>
+          </a:fillRef>
+          <a:effectRef idx="0">
+            <a:schemeClr val="accent1"/>
+          </a:effectRef>
+          <a:fontRef idx="minor">
+            <a:schemeClr val="tx1"/>
+          </a:fontRef>
+        </p:style>
+      </p:cxnSp>
+      <p:cxnSp>
+        <p:nvCxnSpPr>
+          <p:cNvPr id="70" name="e4_g_b_0" descr="Editable line; source id e4_g_b_0"/>
+          <p:cNvCxnSpPr/>
+          <p:nvPr/>
+        </p:nvCxnSpPr>
+        <p:spPr>
+          <a:xfrm flipH="1" flipV="1">
+            <a:off x="976312" y="6516687"/>
+            <a:ext cx="31750" cy="158750"/>
+          </a:xfrm>
+          <a:prstGeom prst="line">
+            <a:avLst/>
+          </a:prstGeom>
+          <a:ln w="8572">
+            <a:solidFill>
+              <a:srgbClr val="1F2937"/>
+            </a:solidFill>
+          </a:ln>
+          <a:effectLst/>
+        </p:spPr>
+        <p:style>
+          <a:lnRef idx="2">
+            <a:schemeClr val="accent1"/>
+          </a:lnRef>
+          <a:fillRef idx="0">
+            <a:schemeClr val="accent1"/>
+          </a:fillRef>
+          <a:effectRef idx="0">
+            <a:schemeClr val="accent1"/>
+          </a:effectRef>
+          <a:fontRef idx="minor">
+            <a:schemeClr val="tx1"/>
+          </a:fontRef>
+        </p:style>
+      </p:cxnSp>
+      <p:cxnSp>
+        <p:nvCxnSpPr>
+          <p:cNvPr id="71" name="e4_g_b_1" descr="Editable line; source id e4_g_b_1"/>
+          <p:cNvCxnSpPr/>
+          <p:nvPr/>
+        </p:nvCxnSpPr>
+        <p:spPr>
+          <a:xfrm flipV="1">
+            <a:off x="976312" y="6429374"/>
+            <a:ext cx="63500" cy="87313"/>
+          </a:xfrm>
+          <a:prstGeom prst="line">
+            <a:avLst/>
+          </a:prstGeom>
+          <a:ln w="8572">
+            <a:solidFill>
+              <a:srgbClr val="1F2937"/>
+            </a:solidFill>
+          </a:ln>
+          <a:effectLst/>
+        </p:spPr>
+        <p:style>
+          <a:lnRef idx="2">
+            <a:schemeClr val="accent1"/>
+          </a:lnRef>
+          <a:fillRef idx="0">
+            <a:schemeClr val="accent1"/>
+          </a:fillRef>
+          <a:effectRef idx="0">
+            <a:schemeClr val="accent1"/>
+          </a:effectRef>
+          <a:fontRef idx="minor">
+            <a:schemeClr val="tx1"/>
+          </a:fontRef>
+        </p:style>
+      </p:cxnSp>
+      <p:cxnSp>
+        <p:nvCxnSpPr>
+          <p:cNvPr id="72" name="e4_g_b_2" descr="Editable line; source id e4_g_b_2"/>
+          <p:cNvCxnSpPr/>
+          <p:nvPr/>
+        </p:nvCxnSpPr>
+        <p:spPr>
+          <a:xfrm>
+            <a:off x="1039812" y="6429374"/>
+            <a:ext cx="47625" cy="103188"/>
+          </a:xfrm>
+          <a:prstGeom prst="line">
+            <a:avLst/>
+          </a:prstGeom>
+          <a:ln w="8572">
+            <a:solidFill>
+              <a:srgbClr val="1F2937"/>
+            </a:solidFill>
+          </a:ln>
+          <a:effectLst/>
+        </p:spPr>
+        <p:style>
+          <a:lnRef idx="2">
+            <a:schemeClr val="accent1"/>
+          </a:lnRef>
+          <a:fillRef idx="0">
+            <a:schemeClr val="accent1"/>
+          </a:fillRef>
+          <a:effectRef idx="0">
+            <a:schemeClr val="accent1"/>
+          </a:effectRef>
+          <a:fontRef idx="minor">
+            <a:schemeClr val="tx1"/>
+          </a:fontRef>
+        </p:style>
+      </p:cxnSp>
+      <p:cxnSp>
+        <p:nvCxnSpPr>
+          <p:cNvPr id="73" name="e4_g_b_3" descr="Editable line; source id e4_g_b_3"/>
+          <p:cNvCxnSpPr/>
+          <p:nvPr/>
+        </p:nvCxnSpPr>
+        <p:spPr>
+          <a:xfrm flipH="1">
+            <a:off x="1055687" y="6532562"/>
+            <a:ext cx="31750" cy="142875"/>
+          </a:xfrm>
+          <a:prstGeom prst="line">
+            <a:avLst/>
+          </a:prstGeom>
+          <a:ln w="8572">
+            <a:solidFill>
+              <a:srgbClr val="1F2937"/>
+            </a:solidFill>
+          </a:ln>
+          <a:effectLst/>
+        </p:spPr>
+        <p:style>
+          <a:lnRef idx="2">
+            <a:schemeClr val="accent1"/>
+          </a:lnRef>
+          <a:fillRef idx="0">
+            <a:schemeClr val="accent1"/>
+          </a:fillRef>
+          <a:effectRef idx="0">
+            <a:schemeClr val="accent1"/>
+          </a:effectRef>
+          <a:fontRef idx="minor">
+            <a:schemeClr val="tx1"/>
+          </a:fontRef>
+        </p:style>
+      </p:cxnSp>
+      <p:sp>
+        <p:nvSpPr>
+          <p:cNvPr id="74" name="e4_t" descr="Editable text; source id e4_t"/>
+          <p:cNvSpPr txBox="1"/>
+          <p:nvPr/>
+        </p:nvSpPr>
+        <p:spPr>
+          <a:xfrm>
+            <a:off x="1269999" y="6326187"/>
+            <a:ext cx="2746374" cy="341312"/>
+          </a:xfrm>
+          <a:prstGeom prst="rect">
+            <a:avLst/>
+          </a:prstGeom>
+          <a:noFill/>
+          <a:effectLst/>
+        </p:spPr>
+        <p:txBody>
+          <a:bodyPr wrap="none" anchor="ctr" tIns="0" rIns="0" bIns="0" lIns="0" anchorCtr="0" vertOverflow="overflow">
+            <a:noAutofit/>
+          </a:bodyPr>
+          <a:lstStyle/>
+          <a:p>
+            <a:pPr algn="l" fontAlgn="base">
+              <a:lnSpc>
+                <a:spcPts val="2265"/>
+              </a:lnSpc>
+              <a:spcBef>
+                <a:spcPts val="0"/>
+              </a:spcBef>
+              <a:spcAft>
+                <a:spcPts val="0"/>
+              </a:spcAft>
+              <a:defRPr sz="1562" b="1" i="0" lang="zh-CN" dirty="0">
+                <a:solidFill>
+                  <a:srgbClr val="0F4F58"/>
+                </a:solidFill>
+                <a:latin typeface="Noto Sans CJK SC"/>
+                <a:ea typeface="Noto Sans CJK SC"/>
+                <a:cs typeface="Noto Sans CJK SC"/>
+              </a:defRPr>
+            </a:pPr>
+            <a:r>
+              <a:rPr sz="1562" b="1" i="0" lang="zh-CN" dirty="0">
+                <a:solidFill>
+                  <a:srgbClr val="0F4F58"/>
+                </a:solidFill>
+                <a:latin typeface="Noto Sans CJK SC"/>
+                <a:ea typeface="Noto Sans CJK SC"/>
+                <a:cs typeface="Noto Sans CJK SC"/>
+              </a:rPr>
+              <a:t>玻璃析晶</a:t>
+            </a:r>
+          </a:p>
+        </p:txBody>
+      </p:sp>
+      <p:sp>
+        <p:nvSpPr>
+          <p:cNvPr id="75" name="e4_s" descr="Editable text; source id e4_s"/>
+          <p:cNvSpPr txBox="1"/>
+          <p:nvPr/>
+        </p:nvSpPr>
+        <p:spPr>
+          <a:xfrm>
+            <a:off x="1269999" y="6699249"/>
+            <a:ext cx="2746374" cy="277812"/>
+          </a:xfrm>
+          <a:prstGeom prst="rect">
+            <a:avLst/>
+          </a:prstGeom>
+          <a:noFill/>
+          <a:effectLst/>
+        </p:spPr>
+        <p:txBody>
+          <a:bodyPr wrap="none" anchor="ctr" tIns="0" rIns="0" bIns="0" lIns="0" anchorCtr="0" vertOverflow="overflow">
+            <a:noAutofit/>
+          </a:bodyPr>
+          <a:lstStyle/>
+          <a:p>
+            <a:pPr algn="l" fontAlgn="base">
+              <a:lnSpc>
+                <a:spcPts val="1828"/>
+              </a:lnSpc>
+              <a:spcBef>
+                <a:spcPts val="0"/>
+              </a:spcBef>
+              <a:spcAft>
+                <a:spcPts val="0"/>
+              </a:spcAft>
+              <a:defRPr sz="1249" b="0" i="0" lang="zh-CN" dirty="0">
+                <a:solidFill>
+                  <a:srgbClr val="3F4854"/>
+                </a:solidFill>
+                <a:latin typeface="Noto Sans CJK SC"/>
+                <a:ea typeface="Noto Sans CJK SC"/>
+                <a:cs typeface="Noto Sans CJK SC"/>
+              </a:defRPr>
+            </a:pPr>
+            <a:r>
+              <a:rPr sz="1249" b="0" i="0" lang="zh-CN" dirty="0">
+                <a:solidFill>
+                  <a:srgbClr val="3F4854"/>
+                </a:solidFill>
+                <a:latin typeface="Noto Sans CJK SC"/>
+                <a:ea typeface="Noto Sans CJK SC"/>
+                <a:cs typeface="Noto Sans CJK SC"/>
+              </a:rPr>
+              <a:t>成核</a:t>
+            </a:r>
+            <a:r>
+              <a:rPr sz="1249" b="0" i="0" lang="zh-CN" dirty="0">
+                <a:solidFill>
+                  <a:srgbClr val="3F4854"/>
+                </a:solidFill>
+                <a:latin typeface="DejaVu Sans"/>
+                <a:ea typeface="DejaVu Sans"/>
+                <a:cs typeface="DejaVu Sans"/>
+              </a:rPr>
+              <a:t> · </a:t>
+            </a:r>
+            <a:r>
+              <a:rPr sz="1249" b="0" i="0" lang="zh-CN" dirty="0">
+                <a:solidFill>
+                  <a:srgbClr val="3F4854"/>
+                </a:solidFill>
+                <a:latin typeface="Noto Sans CJK SC"/>
+                <a:ea typeface="Noto Sans CJK SC"/>
+                <a:cs typeface="Noto Sans CJK SC"/>
+              </a:rPr>
+              <a:t>生长</a:t>
+            </a:r>
+          </a:p>
+        </p:txBody>
+      </p:sp>
+      <p:sp>
+        <p:nvSpPr>
+          <p:cNvPr id="76" name="l1" descr="Editable shape; source id l1"/>
+          <p:cNvSpPr/>
+          <p:nvPr/>
+        </p:nvSpPr>
+        <p:spPr>
+          <a:xfrm>
+            <a:off x="7778749" y="1190624"/>
+            <a:ext cx="3889374" cy="1587499"/>
+          </a:xfrm>
+          <a:prstGeom prst="roundRect">
+            <a:avLst>
+              <a:gd name="adj" fmla="val 4500"/>
+            </a:avLst>
+          </a:prstGeom>
+          <a:solidFill>
+            <a:srgbClr val="FFFFFF"/>
+          </a:solidFill>
+          <a:ln w="11112">
+            <a:solidFill>
+              <a:srgbClr val="5B7592"/>
+            </a:solidFill>
+          </a:ln>
+          <a:effectLst/>
+        </p:spPr>
+        <p:style>
+          <a:lnRef idx="1">
+            <a:schemeClr val="accent1"/>
+          </a:lnRef>
+          <a:fillRef idx="3">
+            <a:schemeClr val="accent1"/>
+          </a:fillRef>
+          <a:effectRef idx="0">
+            <a:schemeClr val="accent1"/>
+          </a:effectRef>
+          <a:fontRef idx="minor">
+            <a:schemeClr val="lt1"/>
+          </a:fontRef>
+        </p:style>
+        <p:txBody>
+          <a:bodyPr rtlCol="0" anchor="ctr"/>
+          <a:lstStyle/>
+          <a:p>
+            <a:pPr algn="ctr"/>
+          </a:p>
+        </p:txBody>
+      </p:sp>
+      <p:sp>
+        <p:nvSpPr>
+          <p:cNvPr id="77" name="l1_b" descr="Editable shape; source id l1_b"/>
+          <p:cNvSpPr/>
+          <p:nvPr/>
+        </p:nvSpPr>
+        <p:spPr>
+          <a:xfrm>
+            <a:off x="7778749" y="1190624"/>
+            <a:ext cx="63499" cy="1587499"/>
+          </a:xfrm>
+          <a:prstGeom prst="roundRect">
+            <a:avLst>
+              <a:gd name="adj" fmla="val 37500"/>
+            </a:avLst>
+          </a:prstGeom>
+          <a:solidFill>
+            <a:srgbClr val="5B7592"/>
+          </a:solidFill>
+          <a:ln>
+            <a:noFill/>
+          </a:ln>
+          <a:effectLst/>
+        </p:spPr>
+        <p:style>
+          <a:lnRef idx="1">
+            <a:schemeClr val="accent1"/>
+          </a:lnRef>
+          <a:fillRef idx="3">
+            <a:schemeClr val="accent1"/>
+          </a:fillRef>
+          <a:effectRef idx="0">
+            <a:schemeClr val="accent1"/>
+          </a:effectRef>
+          <a:fontRef idx="minor">
+            <a:schemeClr val="lt1"/>
+          </a:fontRef>
+        </p:style>
+        <p:txBody>
+          <a:bodyPr rtlCol="0" anchor="ctr"/>
+          <a:lstStyle/>
+          <a:p>
+            <a:pPr algn="ctr"/>
+          </a:p>
+        </p:txBody>
+      </p:sp>
+      <p:sp>
+        <p:nvSpPr>
+          <p:cNvPr id="78" name="l1_g_a" descr="Editable shape; source id l1_g_a"/>
+          <p:cNvSpPr/>
+          <p:nvPr/>
+        </p:nvSpPr>
+        <p:spPr>
+          <a:xfrm>
+            <a:off x="8151812" y="1650999"/>
+            <a:ext cx="119062" cy="119062"/>
+          </a:xfrm>
+          <a:prstGeom prst="rect">
+            <a:avLst/>
+          </a:prstGeom>
+          <a:noFill/>
+          <a:ln w="8572">
+            <a:solidFill>
+              <a:srgbClr val="1F2937"/>
+            </a:solidFill>
+          </a:ln>
+          <a:effectLst/>
+        </p:spPr>
+        <p:style>
+          <a:lnRef idx="1">
+            <a:schemeClr val="accent1"/>
+          </a:lnRef>
+          <a:fillRef idx="3">
+            <a:schemeClr val="accent1"/>
+          </a:fillRef>
+          <a:effectRef idx="0">
+            <a:schemeClr val="accent1"/>
+          </a:effectRef>
+          <a:fontRef idx="minor">
+            <a:schemeClr val="lt1"/>
+          </a:fontRef>
+        </p:style>
+        <p:txBody>
+          <a:bodyPr rtlCol="0" anchor="ctr"/>
+          <a:lstStyle/>
+          <a:p>
+            <a:pPr algn="ctr"/>
+          </a:p>
+        </p:txBody>
+      </p:sp>
+      <p:sp>
+        <p:nvSpPr>
+          <p:cNvPr id="79" name="l1_g_b" descr="Editable shape; source id l1_g_b"/>
+          <p:cNvSpPr/>
+          <p:nvPr/>
+        </p:nvSpPr>
+        <p:spPr>
+          <a:xfrm>
+            <a:off x="8024812" y="1873249"/>
+            <a:ext cx="119062" cy="119062"/>
+          </a:xfrm>
+          <a:prstGeom prst="rect">
+            <a:avLst/>
+          </a:prstGeom>
+          <a:noFill/>
+          <a:ln w="8572">
+            <a:solidFill>
+              <a:srgbClr val="1F2937"/>
+            </a:solidFill>
+          </a:ln>
+          <a:effectLst/>
+        </p:spPr>
+        <p:style>
+          <a:lnRef idx="1">
+            <a:schemeClr val="accent1"/>
+          </a:lnRef>
+          <a:fillRef idx="3">
+            <a:schemeClr val="accent1"/>
+          </a:fillRef>
+          <a:effectRef idx="0">
+            <a:schemeClr val="accent1"/>
+          </a:effectRef>
+          <a:fontRef idx="minor">
+            <a:schemeClr val="lt1"/>
+          </a:fontRef>
+        </p:style>
+        <p:txBody>
+          <a:bodyPr rtlCol="0" anchor="ctr"/>
+          <a:lstStyle/>
+          <a:p>
+            <a:pPr algn="ctr"/>
+          </a:p>
+        </p:txBody>
+      </p:sp>
+      <p:sp>
+        <p:nvSpPr>
+          <p:cNvPr id="80" name="l1_g_c" descr="Editable shape; source id l1_g_c"/>
+          <p:cNvSpPr/>
+          <p:nvPr/>
+        </p:nvSpPr>
+        <p:spPr>
+          <a:xfrm>
+            <a:off x="8286749" y="1873249"/>
+            <a:ext cx="119062" cy="119062"/>
+          </a:xfrm>
+          <a:prstGeom prst="rect">
+            <a:avLst/>
+          </a:prstGeom>
+          <a:noFill/>
+          <a:ln w="8572">
+            <a:solidFill>
+              <a:srgbClr val="1F2937"/>
+            </a:solidFill>
+          </a:ln>
+          <a:effectLst/>
+        </p:spPr>
+        <p:style>
+          <a:lnRef idx="1">
+            <a:schemeClr val="accent1"/>
+          </a:lnRef>
+          <a:fillRef idx="3">
+            <a:schemeClr val="accent1"/>
+          </a:fillRef>
+          <a:effectRef idx="0">
+            <a:schemeClr val="accent1"/>
+          </a:effectRef>
+          <a:fontRef idx="minor">
+            <a:schemeClr val="lt1"/>
+          </a:fontRef>
+        </p:style>
+        <p:txBody>
+          <a:bodyPr rtlCol="0" anchor="ctr"/>
+          <a:lstStyle/>
+          <a:p>
+            <a:pPr algn="ctr"/>
+          </a:p>
+        </p:txBody>
+      </p:sp>
+      <p:cxnSp>
+        <p:nvCxnSpPr>
+          <p:cNvPr id="81" name="l1_g_l" descr="Editable line; source id l1_g_l"/>
+          <p:cNvCxnSpPr/>
+          <p:nvPr/>
+        </p:nvCxnSpPr>
+        <p:spPr>
+          <a:xfrm flipH="1">
+            <a:off x="8088312" y="1770062"/>
+            <a:ext cx="127000" cy="103187"/>
+          </a:xfrm>
+          <a:prstGeom prst="line">
+            <a:avLst/>
+          </a:prstGeom>
+          <a:ln w="8572">
+            <a:solidFill>
+              <a:srgbClr val="1F2937"/>
+            </a:solidFill>
+          </a:ln>
+          <a:effectLst/>
+        </p:spPr>
+        <p:style>
+          <a:lnRef idx="2">
+            <a:schemeClr val="accent1"/>
+          </a:lnRef>
+          <a:fillRef idx="0">
+            <a:schemeClr val="accent1"/>
+          </a:fillRef>
+          <a:effectRef idx="0">
+            <a:schemeClr val="accent1"/>
+          </a:effectRef>
+          <a:fontRef idx="minor">
+            <a:schemeClr val="tx1"/>
+          </a:fontRef>
+        </p:style>
+      </p:cxnSp>
+      <p:cxnSp>
+        <p:nvCxnSpPr>
+          <p:cNvPr id="82" name="l1_g_r" descr="Editable line; source id l1_g_r"/>
+          <p:cNvCxnSpPr/>
+          <p:nvPr/>
+        </p:nvCxnSpPr>
+        <p:spPr>
+          <a:xfrm>
+            <a:off x="8215312" y="1770062"/>
+            <a:ext cx="127000" cy="103187"/>
+          </a:xfrm>
+          <a:prstGeom prst="line">
+            <a:avLst/>
+          </a:prstGeom>
+          <a:ln w="8572">
+            <a:solidFill>
+              <a:srgbClr val="1F2937"/>
+            </a:solidFill>
+          </a:ln>
+          <a:effectLst/>
+        </p:spPr>
+        <p:style>
+          <a:lnRef idx="2">
+            <a:schemeClr val="accent1"/>
+          </a:lnRef>
+          <a:fillRef idx="0">
+            <a:schemeClr val="accent1"/>
+          </a:fillRef>
+          <a:effectRef idx="0">
+            <a:schemeClr val="accent1"/>
+          </a:effectRef>
+          <a:fontRef idx="minor">
+            <a:schemeClr val="tx1"/>
+          </a:fontRef>
+        </p:style>
+      </p:cxnSp>
+      <p:sp>
+        <p:nvSpPr>
+          <p:cNvPr id="83" name="l1_t" descr="Editable text; source id l1_t"/>
+          <p:cNvSpPr txBox="1"/>
+          <p:nvPr/>
+        </p:nvSpPr>
+        <p:spPr>
+          <a:xfrm>
+            <a:off x="8524874" y="1666874"/>
+            <a:ext cx="2984499" cy="325437"/>
           </a:xfrm>
           <a:prstGeom prst="rect">
             <a:avLst/>
@@ -4921,9 +7152,9 @@
               <a:spcAft>
                 <a:spcPts val="0"/>
               </a:spcAft>
-              <a:defRPr sz="1501" b="1" i="0" lang="zh-CN" dirty="0">
+              <a:defRPr sz="1499" b="1" i="0" lang="zh-CN" dirty="0">
                 <a:solidFill>
-                  <a:srgbClr val="0F4F58"/>
+                  <a:srgbClr val="2B3E57"/>
                 </a:solidFill>
                 <a:latin typeface="Noto Sans CJK SC"/>
                 <a:ea typeface="Noto Sans CJK SC"/>
@@ -4931,77 +7162,29 @@
               </a:defRPr>
             </a:pPr>
             <a:r>
-              <a:rPr sz="1501" b="1" i="0" lang="zh-CN" dirty="0">
+              <a:rPr sz="1499" b="1" i="0" lang="zh-CN" dirty="0">
                 <a:solidFill>
-                  <a:srgbClr val="0F4F58"/>
+                  <a:srgbClr val="2B3E57"/>
                 </a:solidFill>
                 <a:latin typeface="Noto Sans CJK SC"/>
                 <a:ea typeface="Noto Sans CJK SC"/>
                 <a:cs typeface="Noto Sans CJK SC"/>
               </a:rPr>
-              <a:t>结构与多晶型</a:t>
-            </a:r>
-          </a:p>
-        </p:txBody>
-      </p:sp>
-      <p:sp>
-        <p:nvSpPr>
-          <p:cNvPr id="35" name="e1_s" descr="Editable shape; source id e1_s"/>
-          <p:cNvSpPr/>
-          <p:nvPr/>
-        </p:nvSpPr>
-        <p:spPr>
-          <a:xfrm>
-            <a:off x="3540124" y="1349374"/>
-            <a:ext cx="3984624" cy="444499"/>
-          </a:xfrm>
-          <a:prstGeom prst="roundRect">
-            <a:avLst>
-              <a:gd name="adj" fmla="val 10714"/>
-            </a:avLst>
-          </a:prstGeom>
-          <a:solidFill>
-            <a:srgbClr val="F7F9FB"/>
-          </a:solidFill>
-          <a:ln w="9524">
-            <a:solidFill>
-              <a:srgbClr val="CBD3DA"/>
-            </a:solidFill>
-          </a:ln>
-          <a:effectLst/>
-        </p:spPr>
-        <p:style>
-          <a:lnRef idx="1">
-            <a:schemeClr val="accent1"/>
-          </a:lnRef>
-          <a:fillRef idx="3">
-            <a:schemeClr val="accent1"/>
-          </a:fillRef>
-          <a:effectRef idx="0">
-            <a:schemeClr val="accent1"/>
-          </a:effectRef>
-          <a:fontRef idx="minor">
-            <a:schemeClr val="lt1"/>
-          </a:fontRef>
-        </p:style>
-        <p:txBody>
-          <a:bodyPr rtlCol="0" anchor="ctr"/>
-          <a:lstStyle/>
-          <a:p>
-            <a:pPr algn="ctr"/>
-          </a:p>
-        </p:txBody>
-      </p:sp>
-      <p:sp>
-        <p:nvSpPr>
-          <p:cNvPr id="36" name="e1_s_t" descr="Editable text; source id e1_s_t"/>
+              <a:t>近邻体系</a:t>
+            </a:r>
+          </a:p>
+        </p:txBody>
+      </p:sp>
+      <p:sp>
+        <p:nvSpPr>
+          <p:cNvPr id="84" name="l1_s" descr="Editable text; source id l1_s"/>
           <p:cNvSpPr txBox="1"/>
           <p:nvPr/>
         </p:nvSpPr>
         <p:spPr>
           <a:xfrm>
-            <a:off x="3595687" y="1381124"/>
-            <a:ext cx="3873499" cy="380999"/>
+            <a:off x="8524874" y="2024062"/>
+            <a:ext cx="2984499" cy="277812"/>
           </a:xfrm>
           <a:prstGeom prst="rect">
             <a:avLst/>
@@ -5015,9 +7198,9 @@
           </a:bodyPr>
           <a:lstStyle/>
           <a:p>
-            <a:pPr algn="ctr" fontAlgn="base">
+            <a:pPr algn="l" fontAlgn="base">
               <a:lnSpc>
-                <a:spcPts val="1734"/>
+                <a:spcPts val="1828"/>
               </a:lnSpc>
               <a:spcBef>
                 <a:spcPts val="0"/>
@@ -5025,17 +7208,28 @@
               <a:spcAft>
                 <a:spcPts val="0"/>
               </a:spcAft>
-              <a:defRPr sz="1187" b="0" i="0" lang="zh-CN" dirty="0">
+              <a:defRPr sz="1249" b="0" i="0" lang="zh-CN" dirty="0">
                 <a:solidFill>
                   <a:srgbClr val="3F4854"/>
                 </a:solidFill>
-                <a:latin typeface="Noto Sans CJK SC"/>
-                <a:ea typeface="Noto Sans CJK SC"/>
-                <a:cs typeface="Noto Sans CJK SC"/>
+                <a:latin typeface="DejaVu Sans"/>
+                <a:ea typeface="DejaVu Sans"/>
+                <a:cs typeface="DejaVu Sans"/>
               </a:defRPr>
             </a:pPr>
             <a:r>
-              <a:rPr sz="1187" b="0" i="0" lang="zh-CN" dirty="0">
+              <a:rPr sz="1249" b="0" i="0" lang="zh-CN" dirty="0">
+                <a:solidFill>
+                  <a:srgbClr val="3F4854"/>
+                </a:solidFill>
+                <a:latin typeface="DejaVu Sans"/>
+                <a:ea typeface="DejaVu Sans"/>
+                <a:cs typeface="DejaVu Sans"/>
+              </a:rPr>
+              <a:t>Ba2ZnSi2O7 </a:t>
+            </a:r>
+            <a:r>
+              <a:rPr sz="1249" b="0" i="0" lang="zh-CN" dirty="0">
                 <a:solidFill>
                   <a:srgbClr val="3F4854"/>
                 </a:solidFill>
@@ -5043,47 +7237,25 @@
                 <a:ea typeface="Noto Sans CJK SC"/>
                 <a:cs typeface="Noto Sans CJK SC"/>
               </a:rPr>
-              <a:t>相变</a:t>
-            </a:r>
-            <a:r>
-              <a:rPr sz="1187" b="0" i="0" lang="zh-CN" dirty="0">
-                <a:solidFill>
-                  <a:srgbClr val="3F4854"/>
-                </a:solidFill>
-                <a:latin typeface="DejaVu Sans"/>
-                <a:ea typeface="DejaVu Sans"/>
-                <a:cs typeface="DejaVu Sans"/>
-              </a:rPr>
-              <a:t> · </a:t>
-            </a:r>
-            <a:r>
-              <a:rPr sz="1187" b="0" i="0" lang="zh-CN" dirty="0">
-                <a:solidFill>
-                  <a:srgbClr val="3F4854"/>
-                </a:solidFill>
-                <a:latin typeface="Noto Sans CJK SC"/>
-                <a:ea typeface="Noto Sans CJK SC"/>
-                <a:cs typeface="Noto Sans CJK SC"/>
-              </a:rPr>
-              <a:t>配位</a:t>
-            </a:r>
-          </a:p>
-        </p:txBody>
-      </p:sp>
-      <p:sp>
-        <p:nvSpPr>
-          <p:cNvPr id="37" name="e2" descr="Editable shape; source id e2"/>
+              <a:t>等</a:t>
+            </a:r>
+          </a:p>
+        </p:txBody>
+      </p:sp>
+      <p:sp>
+        <p:nvSpPr>
+          <p:cNvPr id="85" name="l2" descr="Editable shape; source id l2"/>
           <p:cNvSpPr/>
           <p:nvPr/>
         </p:nvSpPr>
         <p:spPr>
           <a:xfrm>
-            <a:off x="3397249" y="2635249"/>
-            <a:ext cx="4270374" cy="1206499"/>
+            <a:off x="7778749" y="3413124"/>
+            <a:ext cx="3889374" cy="1587499"/>
           </a:xfrm>
           <a:prstGeom prst="roundRect">
             <a:avLst>
-              <a:gd name="adj" fmla="val 5921"/>
+              <a:gd name="adj" fmla="val 4500"/>
             </a:avLst>
           </a:prstGeom>
           <a:solidFill>
@@ -5091,7 +7263,7 @@
           </a:solidFill>
           <a:ln w="11112">
             <a:solidFill>
-              <a:srgbClr val="1F7F8C"/>
+              <a:srgbClr val="5B7592"/>
             </a:solidFill>
           </a:ln>
           <a:effectLst/>
@@ -5120,22 +7292,22 @@
       </p:sp>
       <p:sp>
         <p:nvSpPr>
-          <p:cNvPr id="38" name="e2_a" descr="Editable shape; source id e2_a"/>
+          <p:cNvPr id="86" name="l2_b" descr="Editable shape; source id l2_b"/>
           <p:cNvSpPr/>
           <p:nvPr/>
         </p:nvSpPr>
         <p:spPr>
           <a:xfrm>
-            <a:off x="3397249" y="2635249"/>
-            <a:ext cx="4270374" cy="47624"/>
+            <a:off x="7778749" y="3413124"/>
+            <a:ext cx="63499" cy="1587499"/>
           </a:xfrm>
           <a:prstGeom prst="roundRect">
             <a:avLst>
-              <a:gd name="adj" fmla="val 50000"/>
+              <a:gd name="adj" fmla="val 37500"/>
             </a:avLst>
           </a:prstGeom>
           <a:solidFill>
-            <a:srgbClr val="1F7F8C"/>
+            <a:srgbClr val="5B7592"/>
           </a:solidFill>
           <a:ln>
             <a:noFill/>
@@ -5164,160 +7336,63 @@
           </a:p>
         </p:txBody>
       </p:sp>
-      <p:cxnSp>
-        <p:nvCxnSpPr>
-          <p:cNvPr id="39" name="e2_g_b_0" descr="Editable line; source id e2_g_b_0"/>
-          <p:cNvCxnSpPr/>
-          <p:nvPr/>
-        </p:nvCxnSpPr>
-        <p:spPr>
-          <a:xfrm>
-            <a:off x="3595687" y="2913062"/>
-            <a:ext cx="31750" cy="150812"/>
-          </a:xfrm>
-          <a:prstGeom prst="line">
-            <a:avLst/>
-          </a:prstGeom>
-          <a:ln w="7937">
+      <p:sp>
+        <p:nvSpPr>
+          <p:cNvPr id="87" name="l2_g_b" descr="Editable shape; source id l2_g_b"/>
+          <p:cNvSpPr/>
+          <p:nvPr/>
+        </p:nvSpPr>
+        <p:spPr>
+          <a:xfrm>
+            <a:off x="8048624" y="3921124"/>
+            <a:ext cx="325437" cy="261937"/>
+          </a:xfrm>
+          <a:prstGeom prst="rect">
+            <a:avLst/>
+          </a:prstGeom>
+          <a:noFill/>
+          <a:ln w="8572">
             <a:solidFill>
               <a:srgbClr val="1F2937"/>
             </a:solidFill>
+            <a:custDash>
+              <a:ds d="350000" sp="300000"/>
+            </a:custDash>
           </a:ln>
           <a:effectLst/>
         </p:spPr>
         <p:style>
-          <a:lnRef idx="2">
+          <a:lnRef idx="1">
             <a:schemeClr val="accent1"/>
           </a:lnRef>
-          <a:fillRef idx="0">
+          <a:fillRef idx="3">
             <a:schemeClr val="accent1"/>
           </a:fillRef>
           <a:effectRef idx="0">
             <a:schemeClr val="accent1"/>
           </a:effectRef>
           <a:fontRef idx="minor">
-            <a:schemeClr val="tx1"/>
+            <a:schemeClr val="lt1"/>
           </a:fontRef>
         </p:style>
-      </p:cxnSp>
-      <p:cxnSp>
-        <p:nvCxnSpPr>
-          <p:cNvPr id="40" name="e2_g_b_1" descr="Editable line; source id e2_g_b_1"/>
-          <p:cNvCxnSpPr/>
-          <p:nvPr/>
-        </p:nvCxnSpPr>
-        <p:spPr>
-          <a:xfrm>
-            <a:off x="3627437" y="3063874"/>
-            <a:ext cx="95250" cy="0"/>
-          </a:xfrm>
-          <a:prstGeom prst="line">
-            <a:avLst/>
-          </a:prstGeom>
-          <a:ln w="7937">
-            <a:solidFill>
-              <a:srgbClr val="1F2937"/>
-            </a:solidFill>
-          </a:ln>
-          <a:effectLst/>
-        </p:spPr>
-        <p:style>
-          <a:lnRef idx="2">
-            <a:schemeClr val="accent1"/>
-          </a:lnRef>
-          <a:fillRef idx="0">
-            <a:schemeClr val="accent1"/>
-          </a:fillRef>
-          <a:effectRef idx="0">
-            <a:schemeClr val="accent1"/>
-          </a:effectRef>
-          <a:fontRef idx="minor">
-            <a:schemeClr val="tx1"/>
-          </a:fontRef>
-        </p:style>
-      </p:cxnSp>
-      <p:cxnSp>
-        <p:nvCxnSpPr>
-          <p:cNvPr id="41" name="e2_g_b_2" descr="Editable line; source id e2_g_b_2"/>
-          <p:cNvCxnSpPr/>
-          <p:nvPr/>
-        </p:nvCxnSpPr>
-        <p:spPr>
-          <a:xfrm flipV="1">
-            <a:off x="3722687" y="2913062"/>
-            <a:ext cx="31750" cy="150812"/>
-          </a:xfrm>
-          <a:prstGeom prst="line">
-            <a:avLst/>
-          </a:prstGeom>
-          <a:ln w="7937">
-            <a:solidFill>
-              <a:srgbClr val="1F2937"/>
-            </a:solidFill>
-          </a:ln>
-          <a:effectLst/>
-        </p:spPr>
-        <p:style>
-          <a:lnRef idx="2">
-            <a:schemeClr val="accent1"/>
-          </a:lnRef>
-          <a:fillRef idx="0">
-            <a:schemeClr val="accent1"/>
-          </a:fillRef>
-          <a:effectRef idx="0">
-            <a:schemeClr val="accent1"/>
-          </a:effectRef>
-          <a:fontRef idx="minor">
-            <a:schemeClr val="tx1"/>
-          </a:fontRef>
-        </p:style>
-      </p:cxnSp>
-      <p:cxnSp>
-        <p:nvCxnSpPr>
-          <p:cNvPr id="42" name="e2_g_r" descr="Editable line; source id e2_g_r"/>
-          <p:cNvCxnSpPr/>
-          <p:nvPr/>
-        </p:nvCxnSpPr>
-        <p:spPr>
-          <a:xfrm>
-            <a:off x="3579812" y="2913062"/>
-            <a:ext cx="190500" cy="0"/>
-          </a:xfrm>
-          <a:prstGeom prst="line">
-            <a:avLst/>
-          </a:prstGeom>
-          <a:ln w="7937">
-            <a:solidFill>
-              <a:srgbClr val="1F2937"/>
-            </a:solidFill>
-          </a:ln>
-          <a:effectLst/>
-        </p:spPr>
-        <p:style>
-          <a:lnRef idx="2">
-            <a:schemeClr val="accent1"/>
-          </a:lnRef>
-          <a:fillRef idx="0">
-            <a:schemeClr val="accent1"/>
-          </a:fillRef>
-          <a:effectRef idx="0">
-            <a:schemeClr val="accent1"/>
-          </a:effectRef>
-          <a:fontRef idx="minor">
-            <a:schemeClr val="tx1"/>
-          </a:fontRef>
-        </p:style>
-      </p:cxnSp>
-      <p:sp>
-        <p:nvSpPr>
-          <p:cNvPr id="43" name="e2_t" descr="Editable text; source id e2_t"/>
+        <p:txBody>
+          <a:bodyPr rtlCol="0" anchor="ctr"/>
+          <a:lstStyle/>
+          <a:p>
+            <a:pPr algn="ctr"/>
+          </a:p>
+        </p:txBody>
+      </p:sp>
+      <p:sp>
+        <p:nvSpPr>
+          <p:cNvPr id="88" name="l2_t" descr="Editable text; source id l2_t"/>
           <p:cNvSpPr txBox="1"/>
           <p:nvPr/>
         </p:nvSpPr>
         <p:spPr>
           <a:xfrm>
-            <a:off x="3889374" y="2825749"/>
-            <a:ext cx="3635374" cy="285749"/>
+            <a:off x="8524874" y="3889374"/>
+            <a:ext cx="2984499" cy="325437"/>
           </a:xfrm>
           <a:prstGeom prst="rect">
             <a:avLst/>
@@ -5341,9 +7416,9 @@
               <a:spcAft>
                 <a:spcPts val="0"/>
               </a:spcAft>
-              <a:defRPr sz="1501" b="1" i="0" lang="zh-CN" dirty="0">
+              <a:defRPr sz="1499" b="1" i="0" lang="zh-CN" dirty="0">
                 <a:solidFill>
-                  <a:srgbClr val="0F4F58"/>
+                  <a:srgbClr val="2B3E57"/>
                 </a:solidFill>
                 <a:latin typeface="Noto Sans CJK SC"/>
                 <a:ea typeface="Noto Sans CJK SC"/>
@@ -5351,77 +7426,29 @@
               </a:defRPr>
             </a:pPr>
             <a:r>
-              <a:rPr sz="1501" b="1" i="0" lang="zh-CN" dirty="0">
+              <a:rPr sz="1499" b="1" i="0" lang="zh-CN" dirty="0">
                 <a:solidFill>
-                  <a:srgbClr val="0F4F58"/>
+                  <a:srgbClr val="2B3E57"/>
                 </a:solidFill>
                 <a:latin typeface="Noto Sans CJK SC"/>
                 <a:ea typeface="Noto Sans CJK SC"/>
                 <a:cs typeface="Noto Sans CJK SC"/>
               </a:rPr>
-              <a:t>合成路线</a:t>
-            </a:r>
-          </a:p>
-        </p:txBody>
-      </p:sp>
-      <p:sp>
-        <p:nvSpPr>
-          <p:cNvPr id="44" name="e2_s" descr="Editable shape; source id e2_s"/>
-          <p:cNvSpPr/>
-          <p:nvPr/>
-        </p:nvSpPr>
-        <p:spPr>
-          <a:xfrm>
-            <a:off x="3540124" y="3254374"/>
-            <a:ext cx="3984624" cy="444499"/>
-          </a:xfrm>
-          <a:prstGeom prst="roundRect">
-            <a:avLst>
-              <a:gd name="adj" fmla="val 10714"/>
-            </a:avLst>
-          </a:prstGeom>
-          <a:solidFill>
-            <a:srgbClr val="F7F9FB"/>
-          </a:solidFill>
-          <a:ln w="9524">
-            <a:solidFill>
-              <a:srgbClr val="CBD3DA"/>
-            </a:solidFill>
-          </a:ln>
-          <a:effectLst/>
-        </p:spPr>
-        <p:style>
-          <a:lnRef idx="1">
-            <a:schemeClr val="accent1"/>
-          </a:lnRef>
-          <a:fillRef idx="3">
-            <a:schemeClr val="accent1"/>
-          </a:fillRef>
-          <a:effectRef idx="0">
-            <a:schemeClr val="accent1"/>
-          </a:effectRef>
-          <a:fontRef idx="minor">
-            <a:schemeClr val="lt1"/>
-          </a:fontRef>
-        </p:style>
-        <p:txBody>
-          <a:bodyPr rtlCol="0" anchor="ctr"/>
-          <a:lstStyle/>
-          <a:p>
-            <a:pPr algn="ctr"/>
-          </a:p>
-        </p:txBody>
-      </p:sp>
-      <p:sp>
-        <p:nvSpPr>
-          <p:cNvPr id="45" name="e2_s_t" descr="Editable text; source id e2_s_t"/>
+              <a:t>证据边界</a:t>
+            </a:r>
+          </a:p>
+        </p:txBody>
+      </p:sp>
+      <p:sp>
+        <p:nvSpPr>
+          <p:cNvPr id="89" name="l2_s" descr="Editable text; source id l2_s"/>
           <p:cNvSpPr txBox="1"/>
           <p:nvPr/>
         </p:nvSpPr>
         <p:spPr>
           <a:xfrm>
-            <a:off x="3595687" y="3286124"/>
-            <a:ext cx="3873499" cy="380999"/>
+            <a:off x="8524874" y="4246562"/>
+            <a:ext cx="2984499" cy="277812"/>
           </a:xfrm>
           <a:prstGeom prst="rect">
             <a:avLst/>
@@ -5435,9 +7462,9 @@
           </a:bodyPr>
           <a:lstStyle/>
           <a:p>
-            <a:pPr algn="ctr" fontAlgn="base">
+            <a:pPr algn="l" fontAlgn="base">
               <a:lnSpc>
-                <a:spcPts val="1734"/>
+                <a:spcPts val="1828"/>
               </a:lnSpc>
               <a:spcBef>
                 <a:spcPts val="0"/>
@@ -5445,7 +7472,7 @@
               <a:spcAft>
                 <a:spcPts val="0"/>
               </a:spcAft>
-              <a:defRPr sz="1187" b="0" i="0" lang="zh-CN" dirty="0">
+              <a:defRPr sz="1249" b="0" i="0" lang="zh-CN" dirty="0">
                 <a:solidFill>
                   <a:srgbClr val="3F4854"/>
                 </a:solidFill>
@@ -5455,2280 +7482,7 @@
               </a:defRPr>
             </a:pPr>
             <a:r>
-              <a:rPr sz="1187" b="0" i="0" lang="zh-CN" dirty="0">
-                <a:solidFill>
-                  <a:srgbClr val="3F4854"/>
-                </a:solidFill>
-                <a:latin typeface="Noto Sans CJK SC"/>
-                <a:ea typeface="Noto Sans CJK SC"/>
-                <a:cs typeface="Noto Sans CJK SC"/>
-              </a:rPr>
-              <a:t>固相</a:t>
-            </a:r>
-            <a:r>
-              <a:rPr sz="1187" b="0" i="0" lang="zh-CN" dirty="0">
-                <a:solidFill>
-                  <a:srgbClr val="3F4854"/>
-                </a:solidFill>
-                <a:latin typeface="DejaVu Sans"/>
-                <a:ea typeface="DejaVu Sans"/>
-                <a:cs typeface="DejaVu Sans"/>
-              </a:rPr>
-              <a:t> · </a:t>
-            </a:r>
-            <a:r>
-              <a:rPr sz="1187" b="0" i="0" lang="zh-CN" dirty="0">
-                <a:solidFill>
-                  <a:srgbClr val="3F4854"/>
-                </a:solidFill>
-                <a:latin typeface="Noto Sans CJK SC"/>
-                <a:ea typeface="Noto Sans CJK SC"/>
-                <a:cs typeface="Noto Sans CJK SC"/>
-              </a:rPr>
-              <a:t>溶胶</a:t>
-            </a:r>
-            <a:r>
-              <a:rPr sz="1187" b="0" i="0" lang="zh-CN" dirty="0">
-                <a:solidFill>
-                  <a:srgbClr val="3F4854"/>
-                </a:solidFill>
-                <a:latin typeface="DejaVu Sans"/>
-                <a:ea typeface="DejaVu Sans"/>
-                <a:cs typeface="DejaVu Sans"/>
-              </a:rPr>
-              <a:t>—</a:t>
-            </a:r>
-            <a:r>
-              <a:rPr sz="1187" b="0" i="0" lang="zh-CN" dirty="0">
-                <a:solidFill>
-                  <a:srgbClr val="3F4854"/>
-                </a:solidFill>
-                <a:latin typeface="Noto Sans CJK SC"/>
-                <a:ea typeface="Noto Sans CJK SC"/>
-                <a:cs typeface="Noto Sans CJK SC"/>
-              </a:rPr>
-              <a:t>凝胶</a:t>
-            </a:r>
-          </a:p>
-        </p:txBody>
-      </p:sp>
-      <p:sp>
-        <p:nvSpPr>
-          <p:cNvPr id="46" name="e3" descr="Editable shape; source id e3"/>
-          <p:cNvSpPr/>
-          <p:nvPr/>
-        </p:nvSpPr>
-        <p:spPr>
-          <a:xfrm>
-            <a:off x="3397249" y="4540249"/>
-            <a:ext cx="4270374" cy="1206499"/>
-          </a:xfrm>
-          <a:prstGeom prst="roundRect">
-            <a:avLst>
-              <a:gd name="adj" fmla="val 5921"/>
-            </a:avLst>
-          </a:prstGeom>
-          <a:solidFill>
-            <a:srgbClr val="FFFFFF"/>
-          </a:solidFill>
-          <a:ln w="11112">
-            <a:solidFill>
-              <a:srgbClr val="1F7F8C"/>
-            </a:solidFill>
-          </a:ln>
-          <a:effectLst/>
-        </p:spPr>
-        <p:style>
-          <a:lnRef idx="1">
-            <a:schemeClr val="accent1"/>
-          </a:lnRef>
-          <a:fillRef idx="3">
-            <a:schemeClr val="accent1"/>
-          </a:fillRef>
-          <a:effectRef idx="0">
-            <a:schemeClr val="accent1"/>
-          </a:effectRef>
-          <a:fontRef idx="minor">
-            <a:schemeClr val="lt1"/>
-          </a:fontRef>
-        </p:style>
-        <p:txBody>
-          <a:bodyPr rtlCol="0" anchor="ctr"/>
-          <a:lstStyle/>
-          <a:p>
-            <a:pPr algn="ctr"/>
-          </a:p>
-        </p:txBody>
-      </p:sp>
-      <p:sp>
-        <p:nvSpPr>
-          <p:cNvPr id="47" name="e3_a" descr="Editable shape; source id e3_a"/>
-          <p:cNvSpPr/>
-          <p:nvPr/>
-        </p:nvSpPr>
-        <p:spPr>
-          <a:xfrm>
-            <a:off x="3397249" y="4540249"/>
-            <a:ext cx="4270374" cy="47624"/>
-          </a:xfrm>
-          <a:prstGeom prst="roundRect">
-            <a:avLst>
-              <a:gd name="adj" fmla="val 50000"/>
-            </a:avLst>
-          </a:prstGeom>
-          <a:solidFill>
-            <a:srgbClr val="1F7F8C"/>
-          </a:solidFill>
-          <a:ln>
-            <a:noFill/>
-          </a:ln>
-          <a:effectLst/>
-        </p:spPr>
-        <p:style>
-          <a:lnRef idx="1">
-            <a:schemeClr val="accent1"/>
-          </a:lnRef>
-          <a:fillRef idx="3">
-            <a:schemeClr val="accent1"/>
-          </a:fillRef>
-          <a:effectRef idx="0">
-            <a:schemeClr val="accent1"/>
-          </a:effectRef>
-          <a:fontRef idx="minor">
-            <a:schemeClr val="lt1"/>
-          </a:fontRef>
-        </p:style>
-        <p:txBody>
-          <a:bodyPr rtlCol="0" anchor="ctr"/>
-          <a:lstStyle/>
-          <a:p>
-            <a:pPr algn="ctr"/>
-          </a:p>
-        </p:txBody>
-      </p:sp>
-      <p:sp>
-        <p:nvSpPr>
-          <p:cNvPr id="48" name="e3_g_t" descr="Editable shape; source id e3_g_t"/>
-          <p:cNvSpPr/>
-          <p:nvPr/>
-        </p:nvSpPr>
-        <p:spPr>
-          <a:xfrm>
-            <a:off x="3651249" y="4762499"/>
-            <a:ext cx="55562" cy="158749"/>
-          </a:xfrm>
-          <a:prstGeom prst="roundRect">
-            <a:avLst>
-              <a:gd name="adj" fmla="val 48571"/>
-            </a:avLst>
-          </a:prstGeom>
-          <a:noFill/>
-          <a:ln w="7937">
-            <a:solidFill>
-              <a:srgbClr val="1F2937"/>
-            </a:solidFill>
-          </a:ln>
-          <a:effectLst/>
-        </p:spPr>
-        <p:style>
-          <a:lnRef idx="1">
-            <a:schemeClr val="accent1"/>
-          </a:lnRef>
-          <a:fillRef idx="3">
-            <a:schemeClr val="accent1"/>
-          </a:fillRef>
-          <a:effectRef idx="0">
-            <a:schemeClr val="accent1"/>
-          </a:effectRef>
-          <a:fontRef idx="minor">
-            <a:schemeClr val="lt1"/>
-          </a:fontRef>
-        </p:style>
-        <p:txBody>
-          <a:bodyPr rtlCol="0" anchor="ctr"/>
-          <a:lstStyle/>
-          <a:p>
-            <a:pPr algn="ctr"/>
-          </a:p>
-        </p:txBody>
-      </p:sp>
-      <p:sp>
-        <p:nvSpPr>
-          <p:cNvPr id="49" name="e3_g_b" descr="Editable shape; source id e3_g_b"/>
-          <p:cNvSpPr/>
-          <p:nvPr/>
-        </p:nvSpPr>
-        <p:spPr>
-          <a:xfrm>
-            <a:off x="3635374" y="4913312"/>
-            <a:ext cx="87312" cy="87312"/>
-          </a:xfrm>
-          <a:prstGeom prst="ellipse">
-            <a:avLst/>
-          </a:prstGeom>
-          <a:noFill/>
-          <a:ln w="7937">
-            <a:solidFill>
-              <a:srgbClr val="1F2937"/>
-            </a:solidFill>
-          </a:ln>
-          <a:effectLst/>
-        </p:spPr>
-        <p:style>
-          <a:lnRef idx="1">
-            <a:schemeClr val="accent1"/>
-          </a:lnRef>
-          <a:fillRef idx="3">
-            <a:schemeClr val="accent1"/>
-          </a:fillRef>
-          <a:effectRef idx="0">
-            <a:schemeClr val="accent1"/>
-          </a:effectRef>
-          <a:fontRef idx="minor">
-            <a:schemeClr val="lt1"/>
-          </a:fontRef>
-        </p:style>
-        <p:txBody>
-          <a:bodyPr rtlCol="0" anchor="ctr"/>
-          <a:lstStyle/>
-          <a:p>
-            <a:pPr algn="ctr"/>
-          </a:p>
-        </p:txBody>
-      </p:sp>
-      <p:cxnSp>
-        <p:nvCxnSpPr>
-          <p:cNvPr id="50" name="e3_g_m0" descr="Editable line; source id e3_g_m0"/>
-          <p:cNvCxnSpPr/>
-          <p:nvPr/>
-        </p:nvCxnSpPr>
-        <p:spPr>
-          <a:xfrm>
-            <a:off x="3706812" y="4802187"/>
-            <a:ext cx="31750" cy="0"/>
-          </a:xfrm>
-          <a:prstGeom prst="line">
-            <a:avLst/>
-          </a:prstGeom>
-          <a:ln w="7937">
-            <a:solidFill>
-              <a:srgbClr val="1F2937"/>
-            </a:solidFill>
-          </a:ln>
-          <a:effectLst/>
-        </p:spPr>
-        <p:style>
-          <a:lnRef idx="2">
-            <a:schemeClr val="accent1"/>
-          </a:lnRef>
-          <a:fillRef idx="0">
-            <a:schemeClr val="accent1"/>
-          </a:fillRef>
-          <a:effectRef idx="0">
-            <a:schemeClr val="accent1"/>
-          </a:effectRef>
-          <a:fontRef idx="minor">
-            <a:schemeClr val="tx1"/>
-          </a:fontRef>
-        </p:style>
-      </p:cxnSp>
-      <p:cxnSp>
-        <p:nvCxnSpPr>
-          <p:cNvPr id="51" name="e3_g_m1" descr="Editable line; source id e3_g_m1"/>
-          <p:cNvCxnSpPr/>
-          <p:nvPr/>
-        </p:nvCxnSpPr>
-        <p:spPr>
-          <a:xfrm>
-            <a:off x="3706812" y="4833937"/>
-            <a:ext cx="31750" cy="0"/>
-          </a:xfrm>
-          <a:prstGeom prst="line">
-            <a:avLst/>
-          </a:prstGeom>
-          <a:ln w="7937">
-            <a:solidFill>
-              <a:srgbClr val="1F2937"/>
-            </a:solidFill>
-          </a:ln>
-          <a:effectLst/>
-        </p:spPr>
-        <p:style>
-          <a:lnRef idx="2">
-            <a:schemeClr val="accent1"/>
-          </a:lnRef>
-          <a:fillRef idx="0">
-            <a:schemeClr val="accent1"/>
-          </a:fillRef>
-          <a:effectRef idx="0">
-            <a:schemeClr val="accent1"/>
-          </a:effectRef>
-          <a:fontRef idx="minor">
-            <a:schemeClr val="tx1"/>
-          </a:fontRef>
-        </p:style>
-      </p:cxnSp>
-      <p:cxnSp>
-        <p:nvCxnSpPr>
-          <p:cNvPr id="52" name="e3_g_m2" descr="Editable line; source id e3_g_m2"/>
-          <p:cNvCxnSpPr/>
-          <p:nvPr/>
-        </p:nvCxnSpPr>
-        <p:spPr>
-          <a:xfrm>
-            <a:off x="3706812" y="4865687"/>
-            <a:ext cx="31750" cy="0"/>
-          </a:xfrm>
-          <a:prstGeom prst="line">
-            <a:avLst/>
-          </a:prstGeom>
-          <a:ln w="7937">
-            <a:solidFill>
-              <a:srgbClr val="1F2937"/>
-            </a:solidFill>
-          </a:ln>
-          <a:effectLst/>
-        </p:spPr>
-        <p:style>
-          <a:lnRef idx="2">
-            <a:schemeClr val="accent1"/>
-          </a:lnRef>
-          <a:fillRef idx="0">
-            <a:schemeClr val="accent1"/>
-          </a:fillRef>
-          <a:effectRef idx="0">
-            <a:schemeClr val="accent1"/>
-          </a:effectRef>
-          <a:fontRef idx="minor">
-            <a:schemeClr val="tx1"/>
-          </a:fontRef>
-        </p:style>
-      </p:cxnSp>
-      <p:sp>
-        <p:nvSpPr>
-          <p:cNvPr id="53" name="e3_t" descr="Editable text; source id e3_t"/>
-          <p:cNvSpPr txBox="1"/>
-          <p:nvPr/>
-        </p:nvSpPr>
-        <p:spPr>
-          <a:xfrm>
-            <a:off x="3889374" y="4730749"/>
-            <a:ext cx="3635374" cy="285749"/>
-          </a:xfrm>
-          <a:prstGeom prst="rect">
-            <a:avLst/>
-          </a:prstGeom>
-          <a:noFill/>
-          <a:effectLst/>
-        </p:spPr>
-        <p:txBody>
-          <a:bodyPr wrap="none" anchor="ctr" tIns="0" rIns="0" bIns="0" lIns="0" anchorCtr="0" vertOverflow="overflow">
-            <a:noAutofit/>
-          </a:bodyPr>
-          <a:lstStyle/>
-          <a:p>
-            <a:pPr algn="l" fontAlgn="base">
-              <a:lnSpc>
-                <a:spcPts val="2187"/>
-              </a:lnSpc>
-              <a:spcBef>
-                <a:spcPts val="0"/>
-              </a:spcBef>
-              <a:spcAft>
-                <a:spcPts val="0"/>
-              </a:spcAft>
-              <a:defRPr sz="1501" b="1" i="0" lang="zh-CN" dirty="0">
-                <a:solidFill>
-                  <a:srgbClr val="0F4F58"/>
-                </a:solidFill>
-                <a:latin typeface="Noto Sans CJK SC"/>
-                <a:ea typeface="Noto Sans CJK SC"/>
-                <a:cs typeface="Noto Sans CJK SC"/>
-              </a:defRPr>
-            </a:pPr>
-            <a:r>
-              <a:rPr sz="1501" b="1" i="0" lang="zh-CN" dirty="0">
-                <a:solidFill>
-                  <a:srgbClr val="0F4F58"/>
-                </a:solidFill>
-                <a:latin typeface="Noto Sans CJK SC"/>
-                <a:ea typeface="Noto Sans CJK SC"/>
-                <a:cs typeface="Noto Sans CJK SC"/>
-              </a:rPr>
-              <a:t>组成与热处理</a:t>
-            </a:r>
-          </a:p>
-        </p:txBody>
-      </p:sp>
-      <p:sp>
-        <p:nvSpPr>
-          <p:cNvPr id="54" name="e3_s" descr="Editable shape; source id e3_s"/>
-          <p:cNvSpPr/>
-          <p:nvPr/>
-        </p:nvSpPr>
-        <p:spPr>
-          <a:xfrm>
-            <a:off x="3540124" y="5159374"/>
-            <a:ext cx="3984624" cy="444499"/>
-          </a:xfrm>
-          <a:prstGeom prst="roundRect">
-            <a:avLst>
-              <a:gd name="adj" fmla="val 10714"/>
-            </a:avLst>
-          </a:prstGeom>
-          <a:solidFill>
-            <a:srgbClr val="F7F9FB"/>
-          </a:solidFill>
-          <a:ln w="9524">
-            <a:solidFill>
-              <a:srgbClr val="CBD3DA"/>
-            </a:solidFill>
-          </a:ln>
-          <a:effectLst/>
-        </p:spPr>
-        <p:style>
-          <a:lnRef idx="1">
-            <a:schemeClr val="accent1"/>
-          </a:lnRef>
-          <a:fillRef idx="3">
-            <a:schemeClr val="accent1"/>
-          </a:fillRef>
-          <a:effectRef idx="0">
-            <a:schemeClr val="accent1"/>
-          </a:effectRef>
-          <a:fontRef idx="minor">
-            <a:schemeClr val="lt1"/>
-          </a:fontRef>
-        </p:style>
-        <p:txBody>
-          <a:bodyPr rtlCol="0" anchor="ctr"/>
-          <a:lstStyle/>
-          <a:p>
-            <a:pPr algn="ctr"/>
-          </a:p>
-        </p:txBody>
-      </p:sp>
-      <p:sp>
-        <p:nvSpPr>
-          <p:cNvPr id="55" name="e3_s_t" descr="Editable text; source id e3_s_t"/>
-          <p:cNvSpPr txBox="1"/>
-          <p:nvPr/>
-        </p:nvSpPr>
-        <p:spPr>
-          <a:xfrm>
-            <a:off x="3595687" y="5191124"/>
-            <a:ext cx="3873499" cy="380999"/>
-          </a:xfrm>
-          <a:prstGeom prst="rect">
-            <a:avLst/>
-          </a:prstGeom>
-          <a:noFill/>
-          <a:effectLst/>
-        </p:spPr>
-        <p:txBody>
-          <a:bodyPr wrap="none" anchor="ctr" tIns="0" rIns="0" bIns="0" lIns="0" anchorCtr="0" vertOverflow="overflow">
-            <a:noAutofit/>
-          </a:bodyPr>
-          <a:lstStyle/>
-          <a:p>
-            <a:pPr algn="ctr" fontAlgn="base">
-              <a:lnSpc>
-                <a:spcPts val="1734"/>
-              </a:lnSpc>
-              <a:spcBef>
-                <a:spcPts val="0"/>
-              </a:spcBef>
-              <a:spcAft>
-                <a:spcPts val="0"/>
-              </a:spcAft>
-              <a:defRPr sz="1187" b="0" i="0" lang="zh-CN" dirty="0">
-                <a:solidFill>
-                  <a:srgbClr val="3F4854"/>
-                </a:solidFill>
-                <a:latin typeface="DejaVu Sans"/>
-                <a:ea typeface="DejaVu Sans"/>
-                <a:cs typeface="DejaVu Sans"/>
-              </a:defRPr>
-            </a:pPr>
-            <a:r>
-              <a:rPr sz="1187" b="0" i="0" lang="zh-CN" dirty="0">
-                <a:solidFill>
-                  <a:srgbClr val="3F4854"/>
-                </a:solidFill>
-                <a:latin typeface="DejaVu Sans"/>
-                <a:ea typeface="DejaVu Sans"/>
-                <a:cs typeface="DejaVu Sans"/>
-              </a:rPr>
-              <a:t>Ba/Sr · Zn </a:t>
-            </a:r>
-            <a:r>
-              <a:rPr sz="1187" b="0" i="0" lang="zh-CN" dirty="0">
-                <a:solidFill>
-                  <a:srgbClr val="3F4854"/>
-                </a:solidFill>
-                <a:latin typeface="Noto Sans CJK SC"/>
-                <a:ea typeface="Noto Sans CJK SC"/>
-                <a:cs typeface="Noto Sans CJK SC"/>
-              </a:rPr>
-              <a:t>位</a:t>
-            </a:r>
-          </a:p>
-        </p:txBody>
-      </p:sp>
-      <p:sp>
-        <p:nvSpPr>
-          <p:cNvPr id="56" name="e4" descr="Editable shape; source id e4"/>
-          <p:cNvSpPr/>
-          <p:nvPr/>
-        </p:nvSpPr>
-        <p:spPr>
-          <a:xfrm>
-            <a:off x="3397249" y="6445249"/>
-            <a:ext cx="4270374" cy="1206499"/>
-          </a:xfrm>
-          <a:prstGeom prst="roundRect">
-            <a:avLst>
-              <a:gd name="adj" fmla="val 5921"/>
-            </a:avLst>
-          </a:prstGeom>
-          <a:solidFill>
-            <a:srgbClr val="FFFFFF"/>
-          </a:solidFill>
-          <a:ln w="11112">
-            <a:solidFill>
-              <a:srgbClr val="1F7F8C"/>
-            </a:solidFill>
-          </a:ln>
-          <a:effectLst/>
-        </p:spPr>
-        <p:style>
-          <a:lnRef idx="1">
-            <a:schemeClr val="accent1"/>
-          </a:lnRef>
-          <a:fillRef idx="3">
-            <a:schemeClr val="accent1"/>
-          </a:fillRef>
-          <a:effectRef idx="0">
-            <a:schemeClr val="accent1"/>
-          </a:effectRef>
-          <a:fontRef idx="minor">
-            <a:schemeClr val="lt1"/>
-          </a:fontRef>
-        </p:style>
-        <p:txBody>
-          <a:bodyPr rtlCol="0" anchor="ctr"/>
-          <a:lstStyle/>
-          <a:p>
-            <a:pPr algn="ctr"/>
-          </a:p>
-        </p:txBody>
-      </p:sp>
-      <p:sp>
-        <p:nvSpPr>
-          <p:cNvPr id="57" name="e4_a" descr="Editable shape; source id e4_a"/>
-          <p:cNvSpPr/>
-          <p:nvPr/>
-        </p:nvSpPr>
-        <p:spPr>
-          <a:xfrm>
-            <a:off x="3397249" y="6445249"/>
-            <a:ext cx="4270374" cy="47624"/>
-          </a:xfrm>
-          <a:prstGeom prst="roundRect">
-            <a:avLst>
-              <a:gd name="adj" fmla="val 50000"/>
-            </a:avLst>
-          </a:prstGeom>
-          <a:solidFill>
-            <a:srgbClr val="1F7F8C"/>
-          </a:solidFill>
-          <a:ln>
-            <a:noFill/>
-          </a:ln>
-          <a:effectLst/>
-        </p:spPr>
-        <p:style>
-          <a:lnRef idx="1">
-            <a:schemeClr val="accent1"/>
-          </a:lnRef>
-          <a:fillRef idx="3">
-            <a:schemeClr val="accent1"/>
-          </a:fillRef>
-          <a:effectRef idx="0">
-            <a:schemeClr val="accent1"/>
-          </a:effectRef>
-          <a:fontRef idx="minor">
-            <a:schemeClr val="lt1"/>
-          </a:fontRef>
-        </p:style>
-        <p:txBody>
-          <a:bodyPr rtlCol="0" anchor="ctr"/>
-          <a:lstStyle/>
-          <a:p>
-            <a:pPr algn="ctr"/>
-          </a:p>
-        </p:txBody>
-      </p:sp>
-      <p:cxnSp>
-        <p:nvCxnSpPr>
-          <p:cNvPr id="58" name="e4_g_d_0" descr="Editable line; source id e4_g_d_0"/>
-          <p:cNvCxnSpPr/>
-          <p:nvPr/>
-        </p:nvCxnSpPr>
-        <p:spPr>
-          <a:xfrm>
-            <a:off x="3675062" y="6667499"/>
-            <a:ext cx="63500" cy="103188"/>
-          </a:xfrm>
-          <a:prstGeom prst="line">
-            <a:avLst/>
-          </a:prstGeom>
-          <a:ln w="7937">
-            <a:solidFill>
-              <a:srgbClr val="1F2937"/>
-            </a:solidFill>
-          </a:ln>
-          <a:effectLst/>
-        </p:spPr>
-        <p:style>
-          <a:lnRef idx="2">
-            <a:schemeClr val="accent1"/>
-          </a:lnRef>
-          <a:fillRef idx="0">
-            <a:schemeClr val="accent1"/>
-          </a:fillRef>
-          <a:effectRef idx="0">
-            <a:schemeClr val="accent1"/>
-          </a:effectRef>
-          <a:fontRef idx="minor">
-            <a:schemeClr val="tx1"/>
-          </a:fontRef>
-        </p:style>
-      </p:cxnSp>
-      <p:cxnSp>
-        <p:nvCxnSpPr>
-          <p:cNvPr id="59" name="e4_g_d_1" descr="Editable line; source id e4_g_d_1"/>
-          <p:cNvCxnSpPr/>
-          <p:nvPr/>
-        </p:nvCxnSpPr>
-        <p:spPr>
-          <a:xfrm flipH="1">
-            <a:off x="3706812" y="6770687"/>
-            <a:ext cx="31750" cy="55562"/>
-          </a:xfrm>
-          <a:prstGeom prst="line">
-            <a:avLst/>
-          </a:prstGeom>
-          <a:ln w="7937">
-            <a:solidFill>
-              <a:srgbClr val="1F2937"/>
-            </a:solidFill>
-          </a:ln>
-          <a:effectLst/>
-        </p:spPr>
-        <p:style>
-          <a:lnRef idx="2">
-            <a:schemeClr val="accent1"/>
-          </a:lnRef>
-          <a:fillRef idx="0">
-            <a:schemeClr val="accent1"/>
-          </a:fillRef>
-          <a:effectRef idx="0">
-            <a:schemeClr val="accent1"/>
-          </a:effectRef>
-          <a:fontRef idx="minor">
-            <a:schemeClr val="tx1"/>
-          </a:fontRef>
-        </p:style>
-      </p:cxnSp>
-      <p:cxnSp>
-        <p:nvCxnSpPr>
-          <p:cNvPr id="60" name="e4_g_d_2" descr="Editable line; source id e4_g_d_2"/>
-          <p:cNvCxnSpPr/>
-          <p:nvPr/>
-        </p:nvCxnSpPr>
-        <p:spPr>
-          <a:xfrm flipH="1">
-            <a:off x="3643312" y="6826249"/>
-            <a:ext cx="63500" cy="0"/>
-          </a:xfrm>
-          <a:prstGeom prst="line">
-            <a:avLst/>
-          </a:prstGeom>
-          <a:ln w="7937">
-            <a:solidFill>
-              <a:srgbClr val="1F2937"/>
-            </a:solidFill>
-          </a:ln>
-          <a:effectLst/>
-        </p:spPr>
-        <p:style>
-          <a:lnRef idx="2">
-            <a:schemeClr val="accent1"/>
-          </a:lnRef>
-          <a:fillRef idx="0">
-            <a:schemeClr val="accent1"/>
-          </a:fillRef>
-          <a:effectRef idx="0">
-            <a:schemeClr val="accent1"/>
-          </a:effectRef>
-          <a:fontRef idx="minor">
-            <a:schemeClr val="tx1"/>
-          </a:fontRef>
-        </p:style>
-      </p:cxnSp>
-      <p:cxnSp>
-        <p:nvCxnSpPr>
-          <p:cNvPr id="61" name="e4_g_d_3" descr="Editable line; source id e4_g_d_3"/>
-          <p:cNvCxnSpPr/>
-          <p:nvPr/>
-        </p:nvCxnSpPr>
-        <p:spPr>
-          <a:xfrm flipH="1" flipV="1">
-            <a:off x="3611562" y="6770687"/>
-            <a:ext cx="31750" cy="55562"/>
-          </a:xfrm>
-          <a:prstGeom prst="line">
-            <a:avLst/>
-          </a:prstGeom>
-          <a:ln w="7937">
-            <a:solidFill>
-              <a:srgbClr val="1F2937"/>
-            </a:solidFill>
-          </a:ln>
-          <a:effectLst/>
-        </p:spPr>
-        <p:style>
-          <a:lnRef idx="2">
-            <a:schemeClr val="accent1"/>
-          </a:lnRef>
-          <a:fillRef idx="0">
-            <a:schemeClr val="accent1"/>
-          </a:fillRef>
-          <a:effectRef idx="0">
-            <a:schemeClr val="accent1"/>
-          </a:effectRef>
-          <a:fontRef idx="minor">
-            <a:schemeClr val="tx1"/>
-          </a:fontRef>
-        </p:style>
-      </p:cxnSp>
-      <p:cxnSp>
-        <p:nvCxnSpPr>
-          <p:cNvPr id="62" name="e4_g_d_4" descr="Editable line; source id e4_g_d_4"/>
-          <p:cNvCxnSpPr/>
-          <p:nvPr/>
-        </p:nvCxnSpPr>
-        <p:spPr>
-          <a:xfrm flipV="1">
-            <a:off x="3611562" y="6667499"/>
-            <a:ext cx="63500" cy="103188"/>
-          </a:xfrm>
-          <a:prstGeom prst="line">
-            <a:avLst/>
-          </a:prstGeom>
-          <a:ln w="7937">
-            <a:solidFill>
-              <a:srgbClr val="1F2937"/>
-            </a:solidFill>
-          </a:ln>
-          <a:effectLst/>
-        </p:spPr>
-        <p:style>
-          <a:lnRef idx="2">
-            <a:schemeClr val="accent1"/>
-          </a:lnRef>
-          <a:fillRef idx="0">
-            <a:schemeClr val="accent1"/>
-          </a:fillRef>
-          <a:effectRef idx="0">
-            <a:schemeClr val="accent1"/>
-          </a:effectRef>
-          <a:fontRef idx="minor">
-            <a:schemeClr val="tx1"/>
-          </a:fontRef>
-        </p:style>
-      </p:cxnSp>
-      <p:sp>
-        <p:nvSpPr>
-          <p:cNvPr id="63" name="e4_g_n0" descr="Editable shape; source id e4_g_n0"/>
-          <p:cNvSpPr/>
-          <p:nvPr/>
-        </p:nvSpPr>
-        <p:spPr>
-          <a:xfrm>
-            <a:off x="3619499" y="6857999"/>
-            <a:ext cx="31749" cy="31749"/>
-          </a:xfrm>
-          <a:prstGeom prst="ellipse">
-            <a:avLst/>
-          </a:prstGeom>
-          <a:solidFill>
-            <a:srgbClr val="1F2937"/>
-          </a:solidFill>
-          <a:ln>
-            <a:noFill/>
-          </a:ln>
-          <a:effectLst/>
-        </p:spPr>
-        <p:style>
-          <a:lnRef idx="1">
-            <a:schemeClr val="accent1"/>
-          </a:lnRef>
-          <a:fillRef idx="3">
-            <a:schemeClr val="accent1"/>
-          </a:fillRef>
-          <a:effectRef idx="0">
-            <a:schemeClr val="accent1"/>
-          </a:effectRef>
-          <a:fontRef idx="minor">
-            <a:schemeClr val="lt1"/>
-          </a:fontRef>
-        </p:style>
-        <p:txBody>
-          <a:bodyPr rtlCol="0" anchor="ctr"/>
-          <a:lstStyle/>
-          <a:p>
-            <a:pPr algn="ctr"/>
-          </a:p>
-        </p:txBody>
-      </p:sp>
-      <p:sp>
-        <p:nvSpPr>
-          <p:cNvPr id="64" name="e4_g_n1" descr="Editable shape; source id e4_g_n1"/>
-          <p:cNvSpPr/>
-          <p:nvPr/>
-        </p:nvSpPr>
-        <p:spPr>
-          <a:xfrm>
-            <a:off x="3667124" y="6865937"/>
-            <a:ext cx="31749" cy="31749"/>
-          </a:xfrm>
-          <a:prstGeom prst="ellipse">
-            <a:avLst/>
-          </a:prstGeom>
-          <a:solidFill>
-            <a:srgbClr val="1F2937"/>
-          </a:solidFill>
-          <a:ln>
-            <a:noFill/>
-          </a:ln>
-          <a:effectLst/>
-        </p:spPr>
-        <p:style>
-          <a:lnRef idx="1">
-            <a:schemeClr val="accent1"/>
-          </a:lnRef>
-          <a:fillRef idx="3">
-            <a:schemeClr val="accent1"/>
-          </a:fillRef>
-          <a:effectRef idx="0">
-            <a:schemeClr val="accent1"/>
-          </a:effectRef>
-          <a:fontRef idx="minor">
-            <a:schemeClr val="lt1"/>
-          </a:fontRef>
-        </p:style>
-        <p:txBody>
-          <a:bodyPr rtlCol="0" anchor="ctr"/>
-          <a:lstStyle/>
-          <a:p>
-            <a:pPr algn="ctr"/>
-          </a:p>
-        </p:txBody>
-      </p:sp>
-      <p:sp>
-        <p:nvSpPr>
-          <p:cNvPr id="65" name="e4_g_n2" descr="Editable shape; source id e4_g_n2"/>
-          <p:cNvSpPr/>
-          <p:nvPr/>
-        </p:nvSpPr>
-        <p:spPr>
-          <a:xfrm>
-            <a:off x="3714749" y="6842124"/>
-            <a:ext cx="31749" cy="31749"/>
-          </a:xfrm>
-          <a:prstGeom prst="ellipse">
-            <a:avLst/>
-          </a:prstGeom>
-          <a:solidFill>
-            <a:srgbClr val="1F2937"/>
-          </a:solidFill>
-          <a:ln>
-            <a:noFill/>
-          </a:ln>
-          <a:effectLst/>
-        </p:spPr>
-        <p:style>
-          <a:lnRef idx="1">
-            <a:schemeClr val="accent1"/>
-          </a:lnRef>
-          <a:fillRef idx="3">
-            <a:schemeClr val="accent1"/>
-          </a:fillRef>
-          <a:effectRef idx="0">
-            <a:schemeClr val="accent1"/>
-          </a:effectRef>
-          <a:fontRef idx="minor">
-            <a:schemeClr val="lt1"/>
-          </a:fontRef>
-        </p:style>
-        <p:txBody>
-          <a:bodyPr rtlCol="0" anchor="ctr"/>
-          <a:lstStyle/>
-          <a:p>
-            <a:pPr algn="ctr"/>
-          </a:p>
-        </p:txBody>
-      </p:sp>
-      <p:sp>
-        <p:nvSpPr>
-          <p:cNvPr id="66" name="e4_t" descr="Editable text; source id e4_t"/>
-          <p:cNvSpPr txBox="1"/>
-          <p:nvPr/>
-        </p:nvSpPr>
-        <p:spPr>
-          <a:xfrm>
-            <a:off x="3889374" y="6635749"/>
-            <a:ext cx="3635374" cy="285749"/>
-          </a:xfrm>
-          <a:prstGeom prst="rect">
-            <a:avLst/>
-          </a:prstGeom>
-          <a:noFill/>
-          <a:effectLst/>
-        </p:spPr>
-        <p:txBody>
-          <a:bodyPr wrap="none" anchor="ctr" tIns="0" rIns="0" bIns="0" lIns="0" anchorCtr="0" vertOverflow="overflow">
-            <a:noAutofit/>
-          </a:bodyPr>
-          <a:lstStyle/>
-          <a:p>
-            <a:pPr algn="l" fontAlgn="base">
-              <a:lnSpc>
-                <a:spcPts val="2187"/>
-              </a:lnSpc>
-              <a:spcBef>
-                <a:spcPts val="0"/>
-              </a:spcBef>
-              <a:spcAft>
-                <a:spcPts val="0"/>
-              </a:spcAft>
-              <a:defRPr sz="1501" b="1" i="0" lang="zh-CN" dirty="0">
-                <a:solidFill>
-                  <a:srgbClr val="0F4F58"/>
-                </a:solidFill>
-                <a:latin typeface="Noto Sans CJK SC"/>
-                <a:ea typeface="Noto Sans CJK SC"/>
-                <a:cs typeface="Noto Sans CJK SC"/>
-              </a:defRPr>
-            </a:pPr>
-            <a:r>
-              <a:rPr sz="1501" b="1" i="0" lang="zh-CN" dirty="0">
-                <a:solidFill>
-                  <a:srgbClr val="0F4F58"/>
-                </a:solidFill>
-                <a:latin typeface="Noto Sans CJK SC"/>
-                <a:ea typeface="Noto Sans CJK SC"/>
-                <a:cs typeface="Noto Sans CJK SC"/>
-              </a:rPr>
-              <a:t>玻璃析晶</a:t>
-            </a:r>
-          </a:p>
-        </p:txBody>
-      </p:sp>
-      <p:sp>
-        <p:nvSpPr>
-          <p:cNvPr id="67" name="e4_s" descr="Editable shape; source id e4_s"/>
-          <p:cNvSpPr/>
-          <p:nvPr/>
-        </p:nvSpPr>
-        <p:spPr>
-          <a:xfrm>
-            <a:off x="3540124" y="7064374"/>
-            <a:ext cx="3984624" cy="444499"/>
-          </a:xfrm>
-          <a:prstGeom prst="roundRect">
-            <a:avLst>
-              <a:gd name="adj" fmla="val 10714"/>
-            </a:avLst>
-          </a:prstGeom>
-          <a:solidFill>
-            <a:srgbClr val="F7F9FB"/>
-          </a:solidFill>
-          <a:ln w="9524">
-            <a:solidFill>
-              <a:srgbClr val="CBD3DA"/>
-            </a:solidFill>
-          </a:ln>
-          <a:effectLst/>
-        </p:spPr>
-        <p:style>
-          <a:lnRef idx="1">
-            <a:schemeClr val="accent1"/>
-          </a:lnRef>
-          <a:fillRef idx="3">
-            <a:schemeClr val="accent1"/>
-          </a:fillRef>
-          <a:effectRef idx="0">
-            <a:schemeClr val="accent1"/>
-          </a:effectRef>
-          <a:fontRef idx="minor">
-            <a:schemeClr val="lt1"/>
-          </a:fontRef>
-        </p:style>
-        <p:txBody>
-          <a:bodyPr rtlCol="0" anchor="ctr"/>
-          <a:lstStyle/>
-          <a:p>
-            <a:pPr algn="ctr"/>
-          </a:p>
-        </p:txBody>
-      </p:sp>
-      <p:sp>
-        <p:nvSpPr>
-          <p:cNvPr id="68" name="e4_s_t" descr="Editable text; source id e4_s_t"/>
-          <p:cNvSpPr txBox="1"/>
-          <p:nvPr/>
-        </p:nvSpPr>
-        <p:spPr>
-          <a:xfrm>
-            <a:off x="3595687" y="7096124"/>
-            <a:ext cx="3873499" cy="380999"/>
-          </a:xfrm>
-          <a:prstGeom prst="rect">
-            <a:avLst/>
-          </a:prstGeom>
-          <a:noFill/>
-          <a:effectLst/>
-        </p:spPr>
-        <p:txBody>
-          <a:bodyPr wrap="none" anchor="ctr" tIns="0" rIns="0" bIns="0" lIns="0" anchorCtr="0" vertOverflow="overflow">
-            <a:noAutofit/>
-          </a:bodyPr>
-          <a:lstStyle/>
-          <a:p>
-            <a:pPr algn="ctr" fontAlgn="base">
-              <a:lnSpc>
-                <a:spcPts val="1734"/>
-              </a:lnSpc>
-              <a:spcBef>
-                <a:spcPts val="0"/>
-              </a:spcBef>
-              <a:spcAft>
-                <a:spcPts val="0"/>
-              </a:spcAft>
-              <a:defRPr sz="1187" b="0" i="0" lang="zh-CN" dirty="0">
-                <a:solidFill>
-                  <a:srgbClr val="3F4854"/>
-                </a:solidFill>
-                <a:latin typeface="Noto Sans CJK SC"/>
-                <a:ea typeface="Noto Sans CJK SC"/>
-                <a:cs typeface="Noto Sans CJK SC"/>
-              </a:defRPr>
-            </a:pPr>
-            <a:r>
-              <a:rPr sz="1187" b="0" i="0" lang="zh-CN" dirty="0">
-                <a:solidFill>
-                  <a:srgbClr val="3F4854"/>
-                </a:solidFill>
-                <a:latin typeface="Noto Sans CJK SC"/>
-                <a:ea typeface="Noto Sans CJK SC"/>
-                <a:cs typeface="Noto Sans CJK SC"/>
-              </a:rPr>
-              <a:t>成核</a:t>
-            </a:r>
-            <a:r>
-              <a:rPr sz="1187" b="0" i="0" lang="zh-CN" dirty="0">
-                <a:solidFill>
-                  <a:srgbClr val="3F4854"/>
-                </a:solidFill>
-                <a:latin typeface="DejaVu Sans"/>
-                <a:ea typeface="DejaVu Sans"/>
-                <a:cs typeface="DejaVu Sans"/>
-              </a:rPr>
-              <a:t> · </a:t>
-            </a:r>
-            <a:r>
-              <a:rPr sz="1187" b="0" i="0" lang="zh-CN" dirty="0">
-                <a:solidFill>
-                  <a:srgbClr val="3F4854"/>
-                </a:solidFill>
-                <a:latin typeface="Noto Sans CJK SC"/>
-                <a:ea typeface="Noto Sans CJK SC"/>
-                <a:cs typeface="Noto Sans CJK SC"/>
-              </a:rPr>
-              <a:t>生长</a:t>
-            </a:r>
-          </a:p>
-        </p:txBody>
-      </p:sp>
-      <p:sp>
-        <p:nvSpPr>
-          <p:cNvPr id="69" name="l1" descr="Editable shape; source id l1"/>
-          <p:cNvSpPr/>
-          <p:nvPr/>
-        </p:nvSpPr>
-        <p:spPr>
-          <a:xfrm>
-            <a:off x="8334374" y="730249"/>
-            <a:ext cx="3444874" cy="1365249"/>
-          </a:xfrm>
-          <a:prstGeom prst="roundRect">
-            <a:avLst>
-              <a:gd name="adj" fmla="val 5232"/>
-            </a:avLst>
-          </a:prstGeom>
-          <a:solidFill>
-            <a:srgbClr val="FFFFFF"/>
-          </a:solidFill>
-          <a:ln w="11112">
-            <a:solidFill>
-              <a:srgbClr val="5B7592"/>
-            </a:solidFill>
-          </a:ln>
-          <a:effectLst/>
-        </p:spPr>
-        <p:style>
-          <a:lnRef idx="1">
-            <a:schemeClr val="accent1"/>
-          </a:lnRef>
-          <a:fillRef idx="3">
-            <a:schemeClr val="accent1"/>
-          </a:fillRef>
-          <a:effectRef idx="0">
-            <a:schemeClr val="accent1"/>
-          </a:effectRef>
-          <a:fontRef idx="minor">
-            <a:schemeClr val="lt1"/>
-          </a:fontRef>
-        </p:style>
-        <p:txBody>
-          <a:bodyPr rtlCol="0" anchor="ctr"/>
-          <a:lstStyle/>
-          <a:p>
-            <a:pPr algn="ctr"/>
-          </a:p>
-        </p:txBody>
-      </p:sp>
-      <p:sp>
-        <p:nvSpPr>
-          <p:cNvPr id="70" name="l1_a" descr="Editable shape; source id l1_a"/>
-          <p:cNvSpPr/>
-          <p:nvPr/>
-        </p:nvSpPr>
-        <p:spPr>
-          <a:xfrm>
-            <a:off x="8334374" y="730249"/>
-            <a:ext cx="3444874" cy="47624"/>
-          </a:xfrm>
-          <a:prstGeom prst="roundRect">
-            <a:avLst>
-              <a:gd name="adj" fmla="val 50000"/>
-            </a:avLst>
-          </a:prstGeom>
-          <a:solidFill>
-            <a:srgbClr val="5B7592"/>
-          </a:solidFill>
-          <a:ln>
-            <a:noFill/>
-          </a:ln>
-          <a:effectLst/>
-        </p:spPr>
-        <p:style>
-          <a:lnRef idx="1">
-            <a:schemeClr val="accent1"/>
-          </a:lnRef>
-          <a:fillRef idx="3">
-            <a:schemeClr val="accent1"/>
-          </a:fillRef>
-          <a:effectRef idx="0">
-            <a:schemeClr val="accent1"/>
-          </a:effectRef>
-          <a:fontRef idx="minor">
-            <a:schemeClr val="lt1"/>
-          </a:fontRef>
-        </p:style>
-        <p:txBody>
-          <a:bodyPr rtlCol="0" anchor="ctr"/>
-          <a:lstStyle/>
-          <a:p>
-            <a:pPr algn="ctr"/>
-          </a:p>
-        </p:txBody>
-      </p:sp>
-      <p:cxnSp>
-        <p:nvCxnSpPr>
-          <p:cNvPr id="71" name="l1_g_h0" descr="Editable line; source id l1_g_h0"/>
-          <p:cNvCxnSpPr/>
-          <p:nvPr/>
-        </p:nvCxnSpPr>
-        <p:spPr>
-          <a:xfrm>
-            <a:off x="8524874" y="968374"/>
-            <a:ext cx="174625" cy="0"/>
-          </a:xfrm>
-          <a:prstGeom prst="line">
-            <a:avLst/>
-          </a:prstGeom>
-          <a:ln w="7937">
-            <a:solidFill>
-              <a:srgbClr val="1F2937"/>
-            </a:solidFill>
-          </a:ln>
-          <a:effectLst/>
-        </p:spPr>
-        <p:style>
-          <a:lnRef idx="2">
-            <a:schemeClr val="accent1"/>
-          </a:lnRef>
-          <a:fillRef idx="0">
-            <a:schemeClr val="accent1"/>
-          </a:fillRef>
-          <a:effectRef idx="0">
-            <a:schemeClr val="accent1"/>
-          </a:effectRef>
-          <a:fontRef idx="minor">
-            <a:schemeClr val="tx1"/>
-          </a:fontRef>
-        </p:style>
-      </p:cxnSp>
-      <p:cxnSp>
-        <p:nvCxnSpPr>
-          <p:cNvPr id="72" name="l1_g_v0" descr="Editable line; source id l1_g_v0"/>
-          <p:cNvCxnSpPr/>
-          <p:nvPr/>
-        </p:nvCxnSpPr>
-        <p:spPr>
-          <a:xfrm>
-            <a:off x="8524874" y="968374"/>
-            <a:ext cx="0" cy="174625"/>
-          </a:xfrm>
-          <a:prstGeom prst="line">
-            <a:avLst/>
-          </a:prstGeom>
-          <a:ln w="7937">
-            <a:solidFill>
-              <a:srgbClr val="1F2937"/>
-            </a:solidFill>
-          </a:ln>
-          <a:effectLst/>
-        </p:spPr>
-        <p:style>
-          <a:lnRef idx="2">
-            <a:schemeClr val="accent1"/>
-          </a:lnRef>
-          <a:fillRef idx="0">
-            <a:schemeClr val="accent1"/>
-          </a:fillRef>
-          <a:effectRef idx="0">
-            <a:schemeClr val="accent1"/>
-          </a:effectRef>
-          <a:fontRef idx="minor">
-            <a:schemeClr val="tx1"/>
-          </a:fontRef>
-        </p:style>
-      </p:cxnSp>
-      <p:cxnSp>
-        <p:nvCxnSpPr>
-          <p:cNvPr id="73" name="l1_g_h1" descr="Editable line; source id l1_g_h1"/>
-          <p:cNvCxnSpPr/>
-          <p:nvPr/>
-        </p:nvCxnSpPr>
-        <p:spPr>
-          <a:xfrm>
-            <a:off x="8524874" y="1055687"/>
-            <a:ext cx="174625" cy="0"/>
-          </a:xfrm>
-          <a:prstGeom prst="line">
-            <a:avLst/>
-          </a:prstGeom>
-          <a:ln w="7937">
-            <a:solidFill>
-              <a:srgbClr val="1F2937"/>
-            </a:solidFill>
-          </a:ln>
-          <a:effectLst/>
-        </p:spPr>
-        <p:style>
-          <a:lnRef idx="2">
-            <a:schemeClr val="accent1"/>
-          </a:lnRef>
-          <a:fillRef idx="0">
-            <a:schemeClr val="accent1"/>
-          </a:fillRef>
-          <a:effectRef idx="0">
-            <a:schemeClr val="accent1"/>
-          </a:effectRef>
-          <a:fontRef idx="minor">
-            <a:schemeClr val="tx1"/>
-          </a:fontRef>
-        </p:style>
-      </p:cxnSp>
-      <p:cxnSp>
-        <p:nvCxnSpPr>
-          <p:cNvPr id="74" name="l1_g_v1" descr="Editable line; source id l1_g_v1"/>
-          <p:cNvCxnSpPr/>
-          <p:nvPr/>
-        </p:nvCxnSpPr>
-        <p:spPr>
-          <a:xfrm>
-            <a:off x="8612187" y="968374"/>
-            <a:ext cx="0" cy="174625"/>
-          </a:xfrm>
-          <a:prstGeom prst="line">
-            <a:avLst/>
-          </a:prstGeom>
-          <a:ln w="7937">
-            <a:solidFill>
-              <a:srgbClr val="1F2937"/>
-            </a:solidFill>
-          </a:ln>
-          <a:effectLst/>
-        </p:spPr>
-        <p:style>
-          <a:lnRef idx="2">
-            <a:schemeClr val="accent1"/>
-          </a:lnRef>
-          <a:fillRef idx="0">
-            <a:schemeClr val="accent1"/>
-          </a:fillRef>
-          <a:effectRef idx="0">
-            <a:schemeClr val="accent1"/>
-          </a:effectRef>
-          <a:fontRef idx="minor">
-            <a:schemeClr val="tx1"/>
-          </a:fontRef>
-        </p:style>
-      </p:cxnSp>
-      <p:cxnSp>
-        <p:nvCxnSpPr>
-          <p:cNvPr id="75" name="l1_g_h2" descr="Editable line; source id l1_g_h2"/>
-          <p:cNvCxnSpPr/>
-          <p:nvPr/>
-        </p:nvCxnSpPr>
-        <p:spPr>
-          <a:xfrm>
-            <a:off x="8524874" y="1142999"/>
-            <a:ext cx="174625" cy="0"/>
-          </a:xfrm>
-          <a:prstGeom prst="line">
-            <a:avLst/>
-          </a:prstGeom>
-          <a:ln w="7937">
-            <a:solidFill>
-              <a:srgbClr val="1F2937"/>
-            </a:solidFill>
-          </a:ln>
-          <a:effectLst/>
-        </p:spPr>
-        <p:style>
-          <a:lnRef idx="2">
-            <a:schemeClr val="accent1"/>
-          </a:lnRef>
-          <a:fillRef idx="0">
-            <a:schemeClr val="accent1"/>
-          </a:fillRef>
-          <a:effectRef idx="0">
-            <a:schemeClr val="accent1"/>
-          </a:effectRef>
-          <a:fontRef idx="minor">
-            <a:schemeClr val="tx1"/>
-          </a:fontRef>
-        </p:style>
-      </p:cxnSp>
-      <p:cxnSp>
-        <p:nvCxnSpPr>
-          <p:cNvPr id="76" name="l1_g_v2" descr="Editable line; source id l1_g_v2"/>
-          <p:cNvCxnSpPr/>
-          <p:nvPr/>
-        </p:nvCxnSpPr>
-        <p:spPr>
-          <a:xfrm>
-            <a:off x="8699499" y="968374"/>
-            <a:ext cx="0" cy="174625"/>
-          </a:xfrm>
-          <a:prstGeom prst="line">
-            <a:avLst/>
-          </a:prstGeom>
-          <a:ln w="7937">
-            <a:solidFill>
-              <a:srgbClr val="1F2937"/>
-            </a:solidFill>
-          </a:ln>
-          <a:effectLst/>
-        </p:spPr>
-        <p:style>
-          <a:lnRef idx="2">
-            <a:schemeClr val="accent1"/>
-          </a:lnRef>
-          <a:fillRef idx="0">
-            <a:schemeClr val="accent1"/>
-          </a:fillRef>
-          <a:effectRef idx="0">
-            <a:schemeClr val="accent1"/>
-          </a:effectRef>
-          <a:fontRef idx="minor">
-            <a:schemeClr val="tx1"/>
-          </a:fontRef>
-        </p:style>
-      </p:cxnSp>
-      <p:sp>
-        <p:nvSpPr>
-          <p:cNvPr id="77" name="l1_g_d00" descr="Editable shape; source id l1_g_d00"/>
-          <p:cNvSpPr/>
-          <p:nvPr/>
-        </p:nvSpPr>
-        <p:spPr>
-          <a:xfrm>
-            <a:off x="8508999" y="952499"/>
-            <a:ext cx="39687" cy="39687"/>
-          </a:xfrm>
-          <a:prstGeom prst="ellipse">
-            <a:avLst/>
-          </a:prstGeom>
-          <a:solidFill>
-            <a:srgbClr val="FFFFFF"/>
-          </a:solidFill>
-          <a:ln>
-            <a:noFill/>
-          </a:ln>
-          <a:effectLst/>
-        </p:spPr>
-        <p:style>
-          <a:lnRef idx="1">
-            <a:schemeClr val="accent1"/>
-          </a:lnRef>
-          <a:fillRef idx="3">
-            <a:schemeClr val="accent1"/>
-          </a:fillRef>
-          <a:effectRef idx="0">
-            <a:schemeClr val="accent1"/>
-          </a:effectRef>
-          <a:fontRef idx="minor">
-            <a:schemeClr val="lt1"/>
-          </a:fontRef>
-        </p:style>
-        <p:txBody>
-          <a:bodyPr rtlCol="0" anchor="ctr"/>
-          <a:lstStyle/>
-          <a:p>
-            <a:pPr algn="ctr"/>
-          </a:p>
-        </p:txBody>
-      </p:sp>
-      <p:sp>
-        <p:nvSpPr>
-          <p:cNvPr id="78" name="l1_g_d01" descr="Editable shape; source id l1_g_d01"/>
-          <p:cNvSpPr/>
-          <p:nvPr/>
-        </p:nvSpPr>
-        <p:spPr>
-          <a:xfrm>
-            <a:off x="8508999" y="1039812"/>
-            <a:ext cx="39687" cy="39687"/>
-          </a:xfrm>
-          <a:prstGeom prst="ellipse">
-            <a:avLst/>
-          </a:prstGeom>
-          <a:solidFill>
-            <a:srgbClr val="FFFFFF"/>
-          </a:solidFill>
-          <a:ln>
-            <a:noFill/>
-          </a:ln>
-          <a:effectLst/>
-        </p:spPr>
-        <p:style>
-          <a:lnRef idx="1">
-            <a:schemeClr val="accent1"/>
-          </a:lnRef>
-          <a:fillRef idx="3">
-            <a:schemeClr val="accent1"/>
-          </a:fillRef>
-          <a:effectRef idx="0">
-            <a:schemeClr val="accent1"/>
-          </a:effectRef>
-          <a:fontRef idx="minor">
-            <a:schemeClr val="lt1"/>
-          </a:fontRef>
-        </p:style>
-        <p:txBody>
-          <a:bodyPr rtlCol="0" anchor="ctr"/>
-          <a:lstStyle/>
-          <a:p>
-            <a:pPr algn="ctr"/>
-          </a:p>
-        </p:txBody>
-      </p:sp>
-      <p:sp>
-        <p:nvSpPr>
-          <p:cNvPr id="79" name="l1_g_d02" descr="Editable shape; source id l1_g_d02"/>
-          <p:cNvSpPr/>
-          <p:nvPr/>
-        </p:nvSpPr>
-        <p:spPr>
-          <a:xfrm>
-            <a:off x="8508999" y="1127124"/>
-            <a:ext cx="39687" cy="39687"/>
-          </a:xfrm>
-          <a:prstGeom prst="ellipse">
-            <a:avLst/>
-          </a:prstGeom>
-          <a:solidFill>
-            <a:srgbClr val="FFFFFF"/>
-          </a:solidFill>
-          <a:ln>
-            <a:noFill/>
-          </a:ln>
-          <a:effectLst/>
-        </p:spPr>
-        <p:style>
-          <a:lnRef idx="1">
-            <a:schemeClr val="accent1"/>
-          </a:lnRef>
-          <a:fillRef idx="3">
-            <a:schemeClr val="accent1"/>
-          </a:fillRef>
-          <a:effectRef idx="0">
-            <a:schemeClr val="accent1"/>
-          </a:effectRef>
-          <a:fontRef idx="minor">
-            <a:schemeClr val="lt1"/>
-          </a:fontRef>
-        </p:style>
-        <p:txBody>
-          <a:bodyPr rtlCol="0" anchor="ctr"/>
-          <a:lstStyle/>
-          <a:p>
-            <a:pPr algn="ctr"/>
-          </a:p>
-        </p:txBody>
-      </p:sp>
-      <p:sp>
-        <p:nvSpPr>
-          <p:cNvPr id="80" name="l1_g_d10" descr="Editable shape; source id l1_g_d10"/>
-          <p:cNvSpPr/>
-          <p:nvPr/>
-        </p:nvSpPr>
-        <p:spPr>
-          <a:xfrm>
-            <a:off x="8596312" y="952499"/>
-            <a:ext cx="39687" cy="39687"/>
-          </a:xfrm>
-          <a:prstGeom prst="ellipse">
-            <a:avLst/>
-          </a:prstGeom>
-          <a:solidFill>
-            <a:srgbClr val="FFFFFF"/>
-          </a:solidFill>
-          <a:ln>
-            <a:noFill/>
-          </a:ln>
-          <a:effectLst/>
-        </p:spPr>
-        <p:style>
-          <a:lnRef idx="1">
-            <a:schemeClr val="accent1"/>
-          </a:lnRef>
-          <a:fillRef idx="3">
-            <a:schemeClr val="accent1"/>
-          </a:fillRef>
-          <a:effectRef idx="0">
-            <a:schemeClr val="accent1"/>
-          </a:effectRef>
-          <a:fontRef idx="minor">
-            <a:schemeClr val="lt1"/>
-          </a:fontRef>
-        </p:style>
-        <p:txBody>
-          <a:bodyPr rtlCol="0" anchor="ctr"/>
-          <a:lstStyle/>
-          <a:p>
-            <a:pPr algn="ctr"/>
-          </a:p>
-        </p:txBody>
-      </p:sp>
-      <p:sp>
-        <p:nvSpPr>
-          <p:cNvPr id="81" name="l1_g_d11" descr="Editable shape; source id l1_g_d11"/>
-          <p:cNvSpPr/>
-          <p:nvPr/>
-        </p:nvSpPr>
-        <p:spPr>
-          <a:xfrm>
-            <a:off x="8596312" y="1039812"/>
-            <a:ext cx="39687" cy="39687"/>
-          </a:xfrm>
-          <a:prstGeom prst="ellipse">
-            <a:avLst/>
-          </a:prstGeom>
-          <a:solidFill>
-            <a:srgbClr val="1F2937"/>
-          </a:solidFill>
-          <a:ln>
-            <a:noFill/>
-          </a:ln>
-          <a:effectLst/>
-        </p:spPr>
-        <p:style>
-          <a:lnRef idx="1">
-            <a:schemeClr val="accent1"/>
-          </a:lnRef>
-          <a:fillRef idx="3">
-            <a:schemeClr val="accent1"/>
-          </a:fillRef>
-          <a:effectRef idx="0">
-            <a:schemeClr val="accent1"/>
-          </a:effectRef>
-          <a:fontRef idx="minor">
-            <a:schemeClr val="lt1"/>
-          </a:fontRef>
-        </p:style>
-        <p:txBody>
-          <a:bodyPr rtlCol="0" anchor="ctr"/>
-          <a:lstStyle/>
-          <a:p>
-            <a:pPr algn="ctr"/>
-          </a:p>
-        </p:txBody>
-      </p:sp>
-      <p:sp>
-        <p:nvSpPr>
-          <p:cNvPr id="82" name="l1_g_d12" descr="Editable shape; source id l1_g_d12"/>
-          <p:cNvSpPr/>
-          <p:nvPr/>
-        </p:nvSpPr>
-        <p:spPr>
-          <a:xfrm>
-            <a:off x="8596312" y="1127124"/>
-            <a:ext cx="39687" cy="39687"/>
-          </a:xfrm>
-          <a:prstGeom prst="ellipse">
-            <a:avLst/>
-          </a:prstGeom>
-          <a:solidFill>
-            <a:srgbClr val="FFFFFF"/>
-          </a:solidFill>
-          <a:ln>
-            <a:noFill/>
-          </a:ln>
-          <a:effectLst/>
-        </p:spPr>
-        <p:style>
-          <a:lnRef idx="1">
-            <a:schemeClr val="accent1"/>
-          </a:lnRef>
-          <a:fillRef idx="3">
-            <a:schemeClr val="accent1"/>
-          </a:fillRef>
-          <a:effectRef idx="0">
-            <a:schemeClr val="accent1"/>
-          </a:effectRef>
-          <a:fontRef idx="minor">
-            <a:schemeClr val="lt1"/>
-          </a:fontRef>
-        </p:style>
-        <p:txBody>
-          <a:bodyPr rtlCol="0" anchor="ctr"/>
-          <a:lstStyle/>
-          <a:p>
-            <a:pPr algn="ctr"/>
-          </a:p>
-        </p:txBody>
-      </p:sp>
-      <p:sp>
-        <p:nvSpPr>
-          <p:cNvPr id="83" name="l1_g_d20" descr="Editable shape; source id l1_g_d20"/>
-          <p:cNvSpPr/>
-          <p:nvPr/>
-        </p:nvSpPr>
-        <p:spPr>
-          <a:xfrm>
-            <a:off x="8683624" y="952499"/>
-            <a:ext cx="39687" cy="39687"/>
-          </a:xfrm>
-          <a:prstGeom prst="ellipse">
-            <a:avLst/>
-          </a:prstGeom>
-          <a:solidFill>
-            <a:srgbClr val="FFFFFF"/>
-          </a:solidFill>
-          <a:ln>
-            <a:noFill/>
-          </a:ln>
-          <a:effectLst/>
-        </p:spPr>
-        <p:style>
-          <a:lnRef idx="1">
-            <a:schemeClr val="accent1"/>
-          </a:lnRef>
-          <a:fillRef idx="3">
-            <a:schemeClr val="accent1"/>
-          </a:fillRef>
-          <a:effectRef idx="0">
-            <a:schemeClr val="accent1"/>
-          </a:effectRef>
-          <a:fontRef idx="minor">
-            <a:schemeClr val="lt1"/>
-          </a:fontRef>
-        </p:style>
-        <p:txBody>
-          <a:bodyPr rtlCol="0" anchor="ctr"/>
-          <a:lstStyle/>
-          <a:p>
-            <a:pPr algn="ctr"/>
-          </a:p>
-        </p:txBody>
-      </p:sp>
-      <p:sp>
-        <p:nvSpPr>
-          <p:cNvPr id="84" name="l1_g_d21" descr="Editable shape; source id l1_g_d21"/>
-          <p:cNvSpPr/>
-          <p:nvPr/>
-        </p:nvSpPr>
-        <p:spPr>
-          <a:xfrm>
-            <a:off x="8683624" y="1039812"/>
-            <a:ext cx="39687" cy="39687"/>
-          </a:xfrm>
-          <a:prstGeom prst="ellipse">
-            <a:avLst/>
-          </a:prstGeom>
-          <a:solidFill>
-            <a:srgbClr val="FFFFFF"/>
-          </a:solidFill>
-          <a:ln>
-            <a:noFill/>
-          </a:ln>
-          <a:effectLst/>
-        </p:spPr>
-        <p:style>
-          <a:lnRef idx="1">
-            <a:schemeClr val="accent1"/>
-          </a:lnRef>
-          <a:fillRef idx="3">
-            <a:schemeClr val="accent1"/>
-          </a:fillRef>
-          <a:effectRef idx="0">
-            <a:schemeClr val="accent1"/>
-          </a:effectRef>
-          <a:fontRef idx="minor">
-            <a:schemeClr val="lt1"/>
-          </a:fontRef>
-        </p:style>
-        <p:txBody>
-          <a:bodyPr rtlCol="0" anchor="ctr"/>
-          <a:lstStyle/>
-          <a:p>
-            <a:pPr algn="ctr"/>
-          </a:p>
-        </p:txBody>
-      </p:sp>
-      <p:sp>
-        <p:nvSpPr>
-          <p:cNvPr id="85" name="l1_g_d22" descr="Editable shape; source id l1_g_d22"/>
-          <p:cNvSpPr/>
-          <p:nvPr/>
-        </p:nvSpPr>
-        <p:spPr>
-          <a:xfrm>
-            <a:off x="8683624" y="1127124"/>
-            <a:ext cx="39687" cy="39687"/>
-          </a:xfrm>
-          <a:prstGeom prst="ellipse">
-            <a:avLst/>
-          </a:prstGeom>
-          <a:solidFill>
-            <a:srgbClr val="FFFFFF"/>
-          </a:solidFill>
-          <a:ln>
-            <a:noFill/>
-          </a:ln>
-          <a:effectLst/>
-        </p:spPr>
-        <p:style>
-          <a:lnRef idx="1">
-            <a:schemeClr val="accent1"/>
-          </a:lnRef>
-          <a:fillRef idx="3">
-            <a:schemeClr val="accent1"/>
-          </a:fillRef>
-          <a:effectRef idx="0">
-            <a:schemeClr val="accent1"/>
-          </a:effectRef>
-          <a:fontRef idx="minor">
-            <a:schemeClr val="lt1"/>
-          </a:fontRef>
-        </p:style>
-        <p:txBody>
-          <a:bodyPr rtlCol="0" anchor="ctr"/>
-          <a:lstStyle/>
-          <a:p>
-            <a:pPr algn="ctr"/>
-          </a:p>
-        </p:txBody>
-      </p:sp>
-      <p:sp>
-        <p:nvSpPr>
-          <p:cNvPr id="86" name="l1_t" descr="Editable text; source id l1_t"/>
-          <p:cNvSpPr txBox="1"/>
-          <p:nvPr/>
-        </p:nvSpPr>
-        <p:spPr>
-          <a:xfrm>
-            <a:off x="8826499" y="920749"/>
-            <a:ext cx="2809874" cy="269874"/>
-          </a:xfrm>
-          <a:prstGeom prst="rect">
-            <a:avLst/>
-          </a:prstGeom>
-          <a:noFill/>
-          <a:effectLst/>
-        </p:spPr>
-        <p:txBody>
-          <a:bodyPr wrap="none" anchor="ctr" tIns="0" rIns="0" bIns="0" lIns="0" anchorCtr="0" vertOverflow="overflow">
-            <a:noAutofit/>
-          </a:bodyPr>
-          <a:lstStyle/>
-          <a:p>
-            <a:pPr algn="l" fontAlgn="base">
-              <a:lnSpc>
-                <a:spcPts val="2093"/>
-              </a:lnSpc>
-              <a:spcBef>
-                <a:spcPts val="0"/>
-              </a:spcBef>
-              <a:spcAft>
-                <a:spcPts val="0"/>
-              </a:spcAft>
-              <a:defRPr sz="1441" b="1" i="0" lang="zh-CN" dirty="0">
-                <a:solidFill>
-                  <a:srgbClr val="2B3E57"/>
-                </a:solidFill>
-                <a:latin typeface="Noto Sans CJK SC"/>
-                <a:ea typeface="Noto Sans CJK SC"/>
-                <a:cs typeface="Noto Sans CJK SC"/>
-              </a:defRPr>
-            </a:pPr>
-            <a:r>
-              <a:rPr sz="1441" b="1" i="0" lang="zh-CN" dirty="0">
-                <a:solidFill>
-                  <a:srgbClr val="2B3E57"/>
-                </a:solidFill>
-                <a:latin typeface="Noto Sans CJK SC"/>
-                <a:ea typeface="Noto Sans CJK SC"/>
-                <a:cs typeface="Noto Sans CJK SC"/>
-              </a:rPr>
-              <a:t>近邻体系</a:t>
-            </a:r>
-          </a:p>
-        </p:txBody>
-      </p:sp>
-      <p:sp>
-        <p:nvSpPr>
-          <p:cNvPr id="87" name="l1_s" descr="Editable shape; source id l1_s"/>
-          <p:cNvSpPr/>
-          <p:nvPr/>
-        </p:nvSpPr>
-        <p:spPr>
-          <a:xfrm>
-            <a:off x="8477249" y="1349374"/>
-            <a:ext cx="3159124" cy="460374"/>
-          </a:xfrm>
-          <a:prstGeom prst="roundRect">
-            <a:avLst>
-              <a:gd name="adj" fmla="val 10344"/>
-            </a:avLst>
-          </a:prstGeom>
-          <a:solidFill>
-            <a:srgbClr val="F7F9FB"/>
-          </a:solidFill>
-          <a:ln w="9524">
-            <a:solidFill>
-              <a:srgbClr val="CBD3DA"/>
-            </a:solidFill>
-          </a:ln>
-          <a:effectLst/>
-        </p:spPr>
-        <p:style>
-          <a:lnRef idx="1">
-            <a:schemeClr val="accent1"/>
-          </a:lnRef>
-          <a:fillRef idx="3">
-            <a:schemeClr val="accent1"/>
-          </a:fillRef>
-          <a:effectRef idx="0">
-            <a:schemeClr val="accent1"/>
-          </a:effectRef>
-          <a:fontRef idx="minor">
-            <a:schemeClr val="lt1"/>
-          </a:fontRef>
-        </p:style>
-        <p:txBody>
-          <a:bodyPr rtlCol="0" anchor="ctr"/>
-          <a:lstStyle/>
-          <a:p>
-            <a:pPr algn="ctr"/>
-          </a:p>
-        </p:txBody>
-      </p:sp>
-      <p:sp>
-        <p:nvSpPr>
-          <p:cNvPr id="88" name="l1_s_t" descr="Editable text; source id l1_s_t"/>
-          <p:cNvSpPr txBox="1"/>
-          <p:nvPr/>
-        </p:nvSpPr>
-        <p:spPr>
-          <a:xfrm>
-            <a:off x="8532812" y="1381124"/>
-            <a:ext cx="3047999" cy="396874"/>
-          </a:xfrm>
-          <a:prstGeom prst="rect">
-            <a:avLst/>
-          </a:prstGeom>
-          <a:noFill/>
-          <a:effectLst/>
-        </p:spPr>
-        <p:txBody>
-          <a:bodyPr wrap="none" anchor="ctr" tIns="0" rIns="0" bIns="0" lIns="0" anchorCtr="0" vertOverflow="overflow">
-            <a:noAutofit/>
-          </a:bodyPr>
-          <a:lstStyle/>
-          <a:p>
-            <a:pPr algn="ctr" fontAlgn="base">
-              <a:lnSpc>
-                <a:spcPts val="1734"/>
-              </a:lnSpc>
-              <a:spcBef>
-                <a:spcPts val="0"/>
-              </a:spcBef>
-              <a:spcAft>
-                <a:spcPts val="0"/>
-              </a:spcAft>
-              <a:defRPr sz="1187" b="0" i="0" lang="zh-CN" dirty="0">
-                <a:solidFill>
-                  <a:srgbClr val="3F4854"/>
-                </a:solidFill>
-                <a:latin typeface="DejaVu Sans"/>
-                <a:ea typeface="DejaVu Sans"/>
-                <a:cs typeface="DejaVu Sans"/>
-              </a:defRPr>
-            </a:pPr>
-            <a:r>
-              <a:rPr sz="1187" b="0" i="0" lang="zh-CN" dirty="0">
-                <a:solidFill>
-                  <a:srgbClr val="3F4854"/>
-                </a:solidFill>
-                <a:latin typeface="DejaVu Sans"/>
-                <a:ea typeface="DejaVu Sans"/>
-                <a:cs typeface="DejaVu Sans"/>
-              </a:rPr>
-              <a:t>Ba2ZnSi2O7 </a:t>
-            </a:r>
-            <a:r>
-              <a:rPr sz="1187" b="0" i="0" lang="zh-CN" dirty="0">
-                <a:solidFill>
-                  <a:srgbClr val="3F4854"/>
-                </a:solidFill>
-                <a:latin typeface="Noto Sans CJK SC"/>
-                <a:ea typeface="Noto Sans CJK SC"/>
-                <a:cs typeface="Noto Sans CJK SC"/>
-              </a:rPr>
-              <a:t>等</a:t>
-            </a:r>
-          </a:p>
-        </p:txBody>
-      </p:sp>
-      <p:sp>
-        <p:nvSpPr>
-          <p:cNvPr id="89" name="l2" descr="Editable shape; source id l2"/>
-          <p:cNvSpPr/>
-          <p:nvPr/>
-        </p:nvSpPr>
-        <p:spPr>
-          <a:xfrm>
-            <a:off x="8334374" y="3365499"/>
-            <a:ext cx="3444874" cy="1365249"/>
-          </a:xfrm>
-          <a:prstGeom prst="roundRect">
-            <a:avLst>
-              <a:gd name="adj" fmla="val 5232"/>
-            </a:avLst>
-          </a:prstGeom>
-          <a:solidFill>
-            <a:srgbClr val="FFFFFF"/>
-          </a:solidFill>
-          <a:ln w="11112">
-            <a:solidFill>
-              <a:srgbClr val="5B7592"/>
-            </a:solidFill>
-          </a:ln>
-          <a:effectLst/>
-        </p:spPr>
-        <p:style>
-          <a:lnRef idx="1">
-            <a:schemeClr val="accent1"/>
-          </a:lnRef>
-          <a:fillRef idx="3">
-            <a:schemeClr val="accent1"/>
-          </a:fillRef>
-          <a:effectRef idx="0">
-            <a:schemeClr val="accent1"/>
-          </a:effectRef>
-          <a:fontRef idx="minor">
-            <a:schemeClr val="lt1"/>
-          </a:fontRef>
-        </p:style>
-        <p:txBody>
-          <a:bodyPr rtlCol="0" anchor="ctr"/>
-          <a:lstStyle/>
-          <a:p>
-            <a:pPr algn="ctr"/>
-          </a:p>
-        </p:txBody>
-      </p:sp>
-      <p:sp>
-        <p:nvSpPr>
-          <p:cNvPr id="90" name="l2_a" descr="Editable shape; source id l2_a"/>
-          <p:cNvSpPr/>
-          <p:nvPr/>
-        </p:nvSpPr>
-        <p:spPr>
-          <a:xfrm>
-            <a:off x="8334374" y="3365499"/>
-            <a:ext cx="3444874" cy="47624"/>
-          </a:xfrm>
-          <a:prstGeom prst="roundRect">
-            <a:avLst>
-              <a:gd name="adj" fmla="val 50000"/>
-            </a:avLst>
-          </a:prstGeom>
-          <a:solidFill>
-            <a:srgbClr val="5B7592"/>
-          </a:solidFill>
-          <a:ln>
-            <a:noFill/>
-          </a:ln>
-          <a:effectLst/>
-        </p:spPr>
-        <p:style>
-          <a:lnRef idx="1">
-            <a:schemeClr val="accent1"/>
-          </a:lnRef>
-          <a:fillRef idx="3">
-            <a:schemeClr val="accent1"/>
-          </a:fillRef>
-          <a:effectRef idx="0">
-            <a:schemeClr val="accent1"/>
-          </a:effectRef>
-          <a:fontRef idx="minor">
-            <a:schemeClr val="lt1"/>
-          </a:fontRef>
-        </p:style>
-        <p:txBody>
-          <a:bodyPr rtlCol="0" anchor="ctr"/>
-          <a:lstStyle/>
-          <a:p>
-            <a:pPr algn="ctr"/>
-          </a:p>
-        </p:txBody>
-      </p:sp>
-      <p:sp>
-        <p:nvSpPr>
-          <p:cNvPr id="91" name="l2_g_b" descr="Editable shape; source id l2_g_b"/>
-          <p:cNvSpPr/>
-          <p:nvPr/>
-        </p:nvSpPr>
-        <p:spPr>
-          <a:xfrm>
-            <a:off x="8508999" y="3611562"/>
-            <a:ext cx="206374" cy="166687"/>
-          </a:xfrm>
-          <a:prstGeom prst="rect">
-            <a:avLst/>
-          </a:prstGeom>
-          <a:noFill/>
-          <a:ln w="7937">
-            <a:solidFill>
-              <a:srgbClr val="1F2937"/>
-            </a:solidFill>
-            <a:custDash>
-              <a:ds d="238000" sp="204000"/>
-            </a:custDash>
-          </a:ln>
-          <a:effectLst/>
-        </p:spPr>
-        <p:style>
-          <a:lnRef idx="1">
-            <a:schemeClr val="accent1"/>
-          </a:lnRef>
-          <a:fillRef idx="3">
-            <a:schemeClr val="accent1"/>
-          </a:fillRef>
-          <a:effectRef idx="0">
-            <a:schemeClr val="accent1"/>
-          </a:effectRef>
-          <a:fontRef idx="minor">
-            <a:schemeClr val="lt1"/>
-          </a:fontRef>
-        </p:style>
-        <p:txBody>
-          <a:bodyPr rtlCol="0" anchor="ctr"/>
-          <a:lstStyle/>
-          <a:p>
-            <a:pPr algn="ctr"/>
-          </a:p>
-        </p:txBody>
-      </p:sp>
-      <p:sp>
-        <p:nvSpPr>
-          <p:cNvPr id="92" name="l2_t" descr="Editable text; source id l2_t"/>
-          <p:cNvSpPr txBox="1"/>
-          <p:nvPr/>
-        </p:nvSpPr>
-        <p:spPr>
-          <a:xfrm>
-            <a:off x="8826499" y="3555999"/>
-            <a:ext cx="2809874" cy="269874"/>
-          </a:xfrm>
-          <a:prstGeom prst="rect">
-            <a:avLst/>
-          </a:prstGeom>
-          <a:noFill/>
-          <a:effectLst/>
-        </p:spPr>
-        <p:txBody>
-          <a:bodyPr wrap="none" anchor="ctr" tIns="0" rIns="0" bIns="0" lIns="0" anchorCtr="0" vertOverflow="overflow">
-            <a:noAutofit/>
-          </a:bodyPr>
-          <a:lstStyle/>
-          <a:p>
-            <a:pPr algn="l" fontAlgn="base">
-              <a:lnSpc>
-                <a:spcPts val="2093"/>
-              </a:lnSpc>
-              <a:spcBef>
-                <a:spcPts val="0"/>
-              </a:spcBef>
-              <a:spcAft>
-                <a:spcPts val="0"/>
-              </a:spcAft>
-              <a:defRPr sz="1441" b="1" i="0" lang="zh-CN" dirty="0">
-                <a:solidFill>
-                  <a:srgbClr val="2B3E57"/>
-                </a:solidFill>
-                <a:latin typeface="Noto Sans CJK SC"/>
-                <a:ea typeface="Noto Sans CJK SC"/>
-                <a:cs typeface="Noto Sans CJK SC"/>
-              </a:defRPr>
-            </a:pPr>
-            <a:r>
-              <a:rPr sz="1441" b="1" i="0" lang="zh-CN" dirty="0">
-                <a:solidFill>
-                  <a:srgbClr val="2B3E57"/>
-                </a:solidFill>
-                <a:latin typeface="Noto Sans CJK SC"/>
-                <a:ea typeface="Noto Sans CJK SC"/>
-                <a:cs typeface="Noto Sans CJK SC"/>
-              </a:rPr>
-              <a:t>证据边界</a:t>
-            </a:r>
-          </a:p>
-        </p:txBody>
-      </p:sp>
-      <p:sp>
-        <p:nvSpPr>
-          <p:cNvPr id="93" name="l2_s" descr="Editable shape; source id l2_s"/>
-          <p:cNvSpPr/>
-          <p:nvPr/>
-        </p:nvSpPr>
-        <p:spPr>
-          <a:xfrm>
-            <a:off x="8477249" y="3984624"/>
-            <a:ext cx="3159124" cy="460374"/>
-          </a:xfrm>
-          <a:prstGeom prst="roundRect">
-            <a:avLst>
-              <a:gd name="adj" fmla="val 10344"/>
-            </a:avLst>
-          </a:prstGeom>
-          <a:solidFill>
-            <a:srgbClr val="F7F9FB"/>
-          </a:solidFill>
-          <a:ln w="9524">
-            <a:solidFill>
-              <a:srgbClr val="CBD3DA"/>
-            </a:solidFill>
-          </a:ln>
-          <a:effectLst/>
-        </p:spPr>
-        <p:style>
-          <a:lnRef idx="1">
-            <a:schemeClr val="accent1"/>
-          </a:lnRef>
-          <a:fillRef idx="3">
-            <a:schemeClr val="accent1"/>
-          </a:fillRef>
-          <a:effectRef idx="0">
-            <a:schemeClr val="accent1"/>
-          </a:effectRef>
-          <a:fontRef idx="minor">
-            <a:schemeClr val="lt1"/>
-          </a:fontRef>
-        </p:style>
-        <p:txBody>
-          <a:bodyPr rtlCol="0" anchor="ctr"/>
-          <a:lstStyle/>
-          <a:p>
-            <a:pPr algn="ctr"/>
-          </a:p>
-        </p:txBody>
-      </p:sp>
-      <p:sp>
-        <p:nvSpPr>
-          <p:cNvPr id="94" name="l2_s_t" descr="Editable text; source id l2_s_t"/>
-          <p:cNvSpPr txBox="1"/>
-          <p:nvPr/>
-        </p:nvSpPr>
-        <p:spPr>
-          <a:xfrm>
-            <a:off x="8532812" y="4016374"/>
-            <a:ext cx="3047999" cy="396874"/>
-          </a:xfrm>
-          <a:prstGeom prst="rect">
-            <a:avLst/>
-          </a:prstGeom>
-          <a:noFill/>
-          <a:effectLst/>
-        </p:spPr>
-        <p:txBody>
-          <a:bodyPr wrap="none" anchor="ctr" tIns="0" rIns="0" bIns="0" lIns="0" anchorCtr="0" vertOverflow="overflow">
-            <a:noAutofit/>
-          </a:bodyPr>
-          <a:lstStyle/>
-          <a:p>
-            <a:pPr algn="ctr" fontAlgn="base">
-              <a:lnSpc>
-                <a:spcPts val="1734"/>
-              </a:lnSpc>
-              <a:spcBef>
-                <a:spcPts val="0"/>
-              </a:spcBef>
-              <a:spcAft>
-                <a:spcPts val="0"/>
-              </a:spcAft>
-              <a:defRPr sz="1187" b="0" i="0" lang="zh-CN" dirty="0">
-                <a:solidFill>
-                  <a:srgbClr val="3F4854"/>
-                </a:solidFill>
-                <a:latin typeface="Noto Sans CJK SC"/>
-                <a:ea typeface="Noto Sans CJK SC"/>
-                <a:cs typeface="Noto Sans CJK SC"/>
-              </a:defRPr>
-            </a:pPr>
-            <a:r>
-              <a:rPr sz="1187" b="0" i="0" lang="zh-CN" dirty="0">
+              <a:rPr sz="1249" b="0" i="0" lang="zh-CN" dirty="0">
                 <a:solidFill>
                   <a:srgbClr val="3F4854"/>
                 </a:solidFill>
@@ -7739,7 +7493,7 @@
               <a:t>直接</a:t>
             </a:r>
             <a:r>
-              <a:rPr sz="1187" b="0" i="0" lang="zh-CN" dirty="0">
+              <a:rPr sz="1249" b="0" i="0" lang="zh-CN" dirty="0">
                 <a:solidFill>
                   <a:srgbClr val="3F4854"/>
                 </a:solidFill>
@@ -7750,7 +7504,7 @@
               <a:t> / </a:t>
             </a:r>
             <a:r>
-              <a:rPr sz="1187" b="0" i="0" lang="zh-CN" dirty="0">
+              <a:rPr sz="1249" b="0" i="0" lang="zh-CN" dirty="0">
                 <a:solidFill>
                   <a:srgbClr val="3F4854"/>
                 </a:solidFill>
@@ -7761,7 +7515,7 @@
               <a:t>近邻</a:t>
             </a:r>
             <a:r>
-              <a:rPr sz="1187" b="0" i="0" lang="zh-CN" dirty="0">
+              <a:rPr sz="1249" b="0" i="0" lang="zh-CN" dirty="0">
                 <a:solidFill>
                   <a:srgbClr val="3F4854"/>
                 </a:solidFill>
@@ -7772,7 +7526,7 @@
               <a:t> / </a:t>
             </a:r>
             <a:r>
-              <a:rPr sz="1187" b="0" i="0" lang="zh-CN" dirty="0">
+              <a:rPr sz="1249" b="0" i="0" lang="zh-CN" dirty="0">
                 <a:solidFill>
                   <a:srgbClr val="3F4854"/>
                 </a:solidFill>
@@ -7787,22 +7541,22 @@
       </p:sp>
       <p:sp>
         <p:nvSpPr>
-          <p:cNvPr id="95" name="l3" descr="Editable shape; source id l3"/>
+          <p:cNvPr id="90" name="l3" descr="Editable shape; source id l3"/>
           <p:cNvSpPr/>
           <p:nvPr/>
         </p:nvSpPr>
         <p:spPr>
           <a:xfrm>
-            <a:off x="8334374" y="6000749"/>
-            <a:ext cx="3444874" cy="1365249"/>
+            <a:off x="7778749" y="5635624"/>
+            <a:ext cx="3889374" cy="1587499"/>
           </a:xfrm>
           <a:prstGeom prst="roundRect">
             <a:avLst>
-              <a:gd name="adj" fmla="val 5232"/>
+              <a:gd name="adj" fmla="val 4500"/>
             </a:avLst>
           </a:prstGeom>
           <a:solidFill>
-            <a:srgbClr val="FFFFFF"/>
+            <a:srgbClr val="FFFAF0"/>
           </a:solidFill>
           <a:ln w="11112">
             <a:solidFill>
@@ -7838,20 +7592,20 @@
       </p:sp>
       <p:sp>
         <p:nvSpPr>
-          <p:cNvPr id="96" name="l3_g_s0" descr="Editable shape; source id l3_g_s0"/>
+          <p:cNvPr id="91" name="l3_g_a" descr="Editable shape; source id l3_g_a"/>
           <p:cNvSpPr/>
           <p:nvPr/>
         </p:nvSpPr>
         <p:spPr>
           <a:xfrm>
-            <a:off x="8524874" y="6183312"/>
-            <a:ext cx="126999" cy="190499"/>
+            <a:off x="8151812" y="6095999"/>
+            <a:ext cx="119062" cy="119062"/>
           </a:xfrm>
           <a:prstGeom prst="rect">
             <a:avLst/>
           </a:prstGeom>
           <a:noFill/>
-          <a:ln w="7937">
+          <a:ln w="8572">
             <a:solidFill>
               <a:srgbClr val="1F2937"/>
             </a:solidFill>
@@ -7880,21 +7634,109 @@
           </a:p>
         </p:txBody>
       </p:sp>
+      <p:sp>
+        <p:nvSpPr>
+          <p:cNvPr id="92" name="l3_g_b" descr="Editable shape; source id l3_g_b"/>
+          <p:cNvSpPr/>
+          <p:nvPr/>
+        </p:nvSpPr>
+        <p:spPr>
+          <a:xfrm>
+            <a:off x="8024812" y="6318249"/>
+            <a:ext cx="119062" cy="119062"/>
+          </a:xfrm>
+          <a:prstGeom prst="rect">
+            <a:avLst/>
+          </a:prstGeom>
+          <a:noFill/>
+          <a:ln w="8572">
+            <a:solidFill>
+              <a:srgbClr val="1F2937"/>
+            </a:solidFill>
+          </a:ln>
+          <a:effectLst/>
+        </p:spPr>
+        <p:style>
+          <a:lnRef idx="1">
+            <a:schemeClr val="accent1"/>
+          </a:lnRef>
+          <a:fillRef idx="3">
+            <a:schemeClr val="accent1"/>
+          </a:fillRef>
+          <a:effectRef idx="0">
+            <a:schemeClr val="accent1"/>
+          </a:effectRef>
+          <a:fontRef idx="minor">
+            <a:schemeClr val="lt1"/>
+          </a:fontRef>
+        </p:style>
+        <p:txBody>
+          <a:bodyPr rtlCol="0" anchor="ctr"/>
+          <a:lstStyle/>
+          <a:p>
+            <a:pPr algn="ctr"/>
+          </a:p>
+        </p:txBody>
+      </p:sp>
+      <p:sp>
+        <p:nvSpPr>
+          <p:cNvPr id="93" name="l3_g_c" descr="Editable shape; source id l3_g_c"/>
+          <p:cNvSpPr/>
+          <p:nvPr/>
+        </p:nvSpPr>
+        <p:spPr>
+          <a:xfrm>
+            <a:off x="8286749" y="6318249"/>
+            <a:ext cx="119062" cy="119062"/>
+          </a:xfrm>
+          <a:prstGeom prst="rect">
+            <a:avLst/>
+          </a:prstGeom>
+          <a:noFill/>
+          <a:ln w="8572">
+            <a:solidFill>
+              <a:srgbClr val="1F2937"/>
+            </a:solidFill>
+          </a:ln>
+          <a:effectLst/>
+        </p:spPr>
+        <p:style>
+          <a:lnRef idx="1">
+            <a:schemeClr val="accent1"/>
+          </a:lnRef>
+          <a:fillRef idx="3">
+            <a:schemeClr val="accent1"/>
+          </a:fillRef>
+          <a:effectRef idx="0">
+            <a:schemeClr val="accent1"/>
+          </a:effectRef>
+          <a:fontRef idx="minor">
+            <a:schemeClr val="lt1"/>
+          </a:fontRef>
+        </p:style>
+        <p:txBody>
+          <a:bodyPr rtlCol="0" anchor="ctr"/>
+          <a:lstStyle/>
+          <a:p>
+            <a:pPr algn="ctr"/>
+          </a:p>
+        </p:txBody>
+      </p:sp>
       <p:cxnSp>
         <p:nvCxnSpPr>
-          <p:cNvPr id="97" name="l3_g_l1" descr="Editable line; source id l3_g_l1"/>
+          <p:cNvPr id="94" name="l3_g_l" descr="Editable line; source id l3_g_l"/>
           <p:cNvCxnSpPr/>
           <p:nvPr/>
         </p:nvCxnSpPr>
         <p:spPr>
-          <a:xfrm>
-            <a:off x="8556624" y="6254749"/>
-            <a:ext cx="87313" cy="0"/>
+          <a:xfrm flipH="1">
+            <a:off x="8088312" y="6215062"/>
+            <a:ext cx="127000" cy="103187"/>
           </a:xfrm>
           <a:prstGeom prst="line">
             <a:avLst/>
           </a:prstGeom>
-          <a:ln w="7937">
+          <a:ln w="8572">
             <a:solidFill>
               <a:srgbClr val="1F2937"/>
             </a:solidFill>
@@ -7918,21 +7760,169 @@
       </p:cxnSp>
       <p:cxnSp>
         <p:nvCxnSpPr>
-          <p:cNvPr id="98" name="l3_g_l2" descr="Editable line; source id l3_g_l2"/>
+          <p:cNvPr id="95" name="l3_g_r" descr="Editable line; source id l3_g_r"/>
           <p:cNvCxnSpPr/>
           <p:nvPr/>
         </p:nvCxnSpPr>
         <p:spPr>
           <a:xfrm>
-            <a:off x="8556624" y="6286499"/>
-            <a:ext cx="87313" cy="0"/>
+            <a:off x="8215312" y="6215062"/>
+            <a:ext cx="127000" cy="103187"/>
           </a:xfrm>
           <a:prstGeom prst="line">
             <a:avLst/>
           </a:prstGeom>
-          <a:ln w="7937">
+          <a:ln w="8572">
             <a:solidFill>
               <a:srgbClr val="1F2937"/>
+            </a:solidFill>
+          </a:ln>
+          <a:effectLst/>
+        </p:spPr>
+        <p:style>
+          <a:lnRef idx="2">
+            <a:schemeClr val="accent1"/>
+          </a:lnRef>
+          <a:fillRef idx="0">
+            <a:schemeClr val="accent1"/>
+          </a:fillRef>
+          <a:effectRef idx="0">
+            <a:schemeClr val="accent1"/>
+          </a:effectRef>
+          <a:fontRef idx="minor">
+            <a:schemeClr val="tx1"/>
+          </a:fontRef>
+        </p:style>
+      </p:cxnSp>
+      <p:sp>
+        <p:nvSpPr>
+          <p:cNvPr id="96" name="l3_t" descr="Editable text; source id l3_t"/>
+          <p:cNvSpPr txBox="1"/>
+          <p:nvPr/>
+        </p:nvSpPr>
+        <p:spPr>
+          <a:xfrm>
+            <a:off x="8524874" y="6111874"/>
+            <a:ext cx="2984499" cy="325437"/>
+          </a:xfrm>
+          <a:prstGeom prst="rect">
+            <a:avLst/>
+          </a:prstGeom>
+          <a:noFill/>
+          <a:effectLst/>
+        </p:spPr>
+        <p:txBody>
+          <a:bodyPr wrap="none" anchor="ctr" tIns="0" rIns="0" bIns="0" lIns="0" anchorCtr="0" vertOverflow="overflow">
+            <a:noAutofit/>
+          </a:bodyPr>
+          <a:lstStyle/>
+          <a:p>
+            <a:pPr algn="l" fontAlgn="base">
+              <a:lnSpc>
+                <a:spcPts val="1765"/>
+              </a:lnSpc>
+              <a:spcBef>
+                <a:spcPts val="0"/>
+              </a:spcBef>
+              <a:spcAft>
+                <a:spcPts val="0"/>
+              </a:spcAft>
+              <a:defRPr sz="1499" b="1" i="0" lang="zh-CN" dirty="0">
+                <a:solidFill>
+                  <a:srgbClr val="7A5410"/>
+                </a:solidFill>
+                <a:latin typeface="DejaVu Sans"/>
+                <a:ea typeface="DejaVu Sans"/>
+                <a:cs typeface="DejaVu Sans"/>
+              </a:defRPr>
+            </a:pPr>
+            <a:r>
+              <a:rPr sz="1499" b="1" i="0" lang="zh-CN" dirty="0">
+                <a:solidFill>
+                  <a:srgbClr val="7A5410"/>
+                </a:solidFill>
+                <a:latin typeface="DejaVu Sans"/>
+                <a:ea typeface="DejaVu Sans"/>
+                <a:cs typeface="DejaVu Sans"/>
+              </a:rPr>
+              <a:t>Ba5Y12Zn[O(SiO4)]8</a:t>
+            </a:r>
+          </a:p>
+        </p:txBody>
+      </p:sp>
+      <p:sp>
+        <p:nvSpPr>
+          <p:cNvPr id="97" name="l3_s" descr="Editable text; source id l3_s"/>
+          <p:cNvSpPr txBox="1"/>
+          <p:nvPr/>
+        </p:nvSpPr>
+        <p:spPr>
+          <a:xfrm>
+            <a:off x="8524874" y="6469062"/>
+            <a:ext cx="2984499" cy="277812"/>
+          </a:xfrm>
+          <a:prstGeom prst="rect">
+            <a:avLst/>
+          </a:prstGeom>
+          <a:noFill/>
+          <a:effectLst/>
+        </p:spPr>
+        <p:txBody>
+          <a:bodyPr wrap="none" anchor="ctr" tIns="0" rIns="0" bIns="0" lIns="0" anchorCtr="0" vertOverflow="overflow">
+            <a:noAutofit/>
+          </a:bodyPr>
+          <a:lstStyle/>
+          <a:p>
+            <a:pPr algn="l" fontAlgn="base">
+              <a:lnSpc>
+                <a:spcPts val="1828"/>
+              </a:lnSpc>
+              <a:spcBef>
+                <a:spcPts val="0"/>
+              </a:spcBef>
+              <a:spcAft>
+                <a:spcPts val="0"/>
+              </a:spcAft>
+              <a:defRPr sz="1249" b="0" i="0" lang="zh-CN" dirty="0">
+                <a:solidFill>
+                  <a:srgbClr val="3F4854"/>
+                </a:solidFill>
+                <a:latin typeface="Noto Sans CJK SC"/>
+                <a:ea typeface="Noto Sans CJK SC"/>
+                <a:cs typeface="Noto Sans CJK SC"/>
+              </a:defRPr>
+            </a:pPr>
+            <a:r>
+              <a:rPr sz="1249" b="0" i="0" lang="zh-CN" dirty="0">
+                <a:solidFill>
+                  <a:srgbClr val="3F4854"/>
+                </a:solidFill>
+                <a:latin typeface="Noto Sans CJK SC"/>
+                <a:ea typeface="Noto Sans CJK SC"/>
+                <a:cs typeface="Noto Sans CJK SC"/>
+              </a:rPr>
+              <a:t>未见直接报道</a:t>
+            </a:r>
+          </a:p>
+        </p:txBody>
+      </p:sp>
+      <p:cxnSp>
+        <p:nvCxnSpPr>
+          <p:cNvPr id="98" name="sl_0" descr="Editable line; source id sl_0"/>
+          <p:cNvCxnSpPr/>
+          <p:nvPr/>
+        </p:nvCxnSpPr>
+        <p:spPr>
+          <a:xfrm flipH="1">
+            <a:off x="4762499" y="4063999"/>
+            <a:ext cx="428625" cy="0"/>
+          </a:xfrm>
+          <a:prstGeom prst="line">
+            <a:avLst/>
+          </a:prstGeom>
+          <a:ln w="14287">
+            <a:solidFill>
+              <a:srgbClr val="4B5563"/>
             </a:solidFill>
           </a:ln>
           <a:effectLst/>
@@ -7954,21 +7944,769 @@
       </p:cxnSp>
       <p:cxnSp>
         <p:nvCxnSpPr>
-          <p:cNvPr id="99" name="l3_g_l3" descr="Editable line; source id l3_g_l3"/>
+          <p:cNvPr id="99" name="slv_0" descr="Editable line; source id slv_0"/>
           <p:cNvCxnSpPr/>
           <p:nvPr/>
         </p:nvCxnSpPr>
         <p:spPr>
           <a:xfrm>
-            <a:off x="8556624" y="6326187"/>
-            <a:ext cx="63500" cy="0"/>
+            <a:off x="4762499" y="1650999"/>
+            <a:ext cx="0" cy="5000625"/>
           </a:xfrm>
           <a:prstGeom prst="line">
             <a:avLst/>
           </a:prstGeom>
-          <a:ln w="7937">
+          <a:ln w="14287">
             <a:solidFill>
-              <a:srgbClr val="1F2937"/>
+              <a:srgbClr val="4B5563"/>
+            </a:solidFill>
+          </a:ln>
+          <a:effectLst/>
+        </p:spPr>
+        <p:style>
+          <a:lnRef idx="2">
+            <a:schemeClr val="accent1"/>
+          </a:lnRef>
+          <a:fillRef idx="0">
+            <a:schemeClr val="accent1"/>
+          </a:fillRef>
+          <a:effectRef idx="0">
+            <a:schemeClr val="accent1"/>
+          </a:effectRef>
+          <a:fontRef idx="minor">
+            <a:schemeClr val="tx1"/>
+          </a:fontRef>
+        </p:style>
+      </p:cxnSp>
+      <p:sp>
+        <p:nvSpPr>
+          <p:cNvPr id="100" name="s_e1_0" descr="Editable line; source id s_e1_0"/>
+          <p:cNvSpPr/>
+          <p:nvPr/>
+        </p:nvSpPr>
+        <p:spPr>
+          <a:xfrm>
+            <a:off x="4206875" y="1611312"/>
+            <a:ext cx="555625" cy="79375"/>
+          </a:xfrm>
+          <a:custGeom>
+            <a:avLst/>
+            <a:gdLst/>
+            <a:ahLst/>
+            <a:cxnLst/>
+            <a:rect l="l" t="t" r="r" b="b"/>
+            <a:pathLst>
+              <a:path w="70000" h="10000">
+                <a:moveTo>
+                  <a:pt x="70000" y="5900"/>
+                </a:moveTo>
+                <a:lnTo>
+                  <a:pt x="12000" y="5900"/>
+                </a:lnTo>
+                <a:lnTo>
+                  <a:pt x="12000" y="10000"/>
+                </a:lnTo>
+                <a:lnTo>
+                  <a:pt x="0" y="5000"/>
+                </a:lnTo>
+                <a:lnTo>
+                  <a:pt x="12000" y="0"/>
+                </a:lnTo>
+                <a:lnTo>
+                  <a:pt x="12000" y="4100"/>
+                </a:lnTo>
+                <a:lnTo>
+                  <a:pt x="70000" y="4100"/>
+                </a:lnTo>
+                <a:close/>
+              </a:path>
+            </a:pathLst>
+          </a:custGeom>
+          <a:solidFill>
+            <a:srgbClr val="4B5563"/>
+          </a:solidFill>
+          <a:ln>
+            <a:noFill/>
+          </a:ln>
+          <a:effectLst/>
+        </p:spPr>
+        <p:style>
+          <a:lnRef idx="1">
+            <a:schemeClr val="accent1"/>
+          </a:lnRef>
+          <a:fillRef idx="3">
+            <a:schemeClr val="accent1"/>
+          </a:fillRef>
+          <a:effectRef idx="0">
+            <a:schemeClr val="accent1"/>
+          </a:effectRef>
+          <a:fontRef idx="minor">
+            <a:schemeClr val="lt1"/>
+          </a:fontRef>
+        </p:style>
+        <p:txBody>
+          <a:bodyPr rtlCol="0" anchor="ctr"/>
+          <a:lstStyle/>
+          <a:p>
+            <a:pPr algn="ctr"/>
+          </a:p>
+        </p:txBody>
+      </p:sp>
+      <p:sp>
+        <p:nvSpPr>
+          <p:cNvPr id="101" name="s_e1_p" descr="Editable shape; source id s_e1_p"/>
+          <p:cNvSpPr/>
+          <p:nvPr/>
+        </p:nvSpPr>
+        <p:spPr>
+          <a:xfrm>
+            <a:off x="4198937" y="1206499"/>
+            <a:ext cx="571499" cy="309562"/>
+          </a:xfrm>
+          <a:prstGeom prst="roundRect">
+            <a:avLst>
+              <a:gd name="adj" fmla="val 50000"/>
+            </a:avLst>
+          </a:prstGeom>
+          <a:solidFill>
+            <a:srgbClr val="FFFFFF"/>
+          </a:solidFill>
+          <a:ln w="8731">
+            <a:solidFill>
+              <a:srgbClr val="CBD3DA"/>
+            </a:solidFill>
+          </a:ln>
+          <a:effectLst/>
+        </p:spPr>
+        <p:style>
+          <a:lnRef idx="1">
+            <a:schemeClr val="accent1"/>
+          </a:lnRef>
+          <a:fillRef idx="3">
+            <a:schemeClr val="accent1"/>
+          </a:fillRef>
+          <a:effectRef idx="0">
+            <a:schemeClr val="accent1"/>
+          </a:effectRef>
+          <a:fontRef idx="minor">
+            <a:schemeClr val="lt1"/>
+          </a:fontRef>
+        </p:style>
+        <p:txBody>
+          <a:bodyPr rtlCol="0" anchor="ctr"/>
+          <a:lstStyle/>
+          <a:p>
+            <a:pPr algn="ctr"/>
+          </a:p>
+        </p:txBody>
+      </p:sp>
+      <p:sp>
+        <p:nvSpPr>
+          <p:cNvPr id="102" name="s_e1_p_t" descr="Editable text; source id s_e1_p_t"/>
+          <p:cNvSpPr txBox="1"/>
+          <p:nvPr/>
+        </p:nvSpPr>
+        <p:spPr>
+          <a:xfrm>
+            <a:off x="4278312" y="1238249"/>
+            <a:ext cx="412749" cy="246062"/>
+          </a:xfrm>
+          <a:prstGeom prst="rect">
+            <a:avLst/>
+          </a:prstGeom>
+          <a:noFill/>
+          <a:effectLst/>
+        </p:spPr>
+        <p:txBody>
+          <a:bodyPr wrap="none" anchor="ctr" tIns="0" rIns="0" bIns="0" lIns="0" anchorCtr="0" vertOverflow="overflow">
+            <a:noAutofit/>
+          </a:bodyPr>
+          <a:lstStyle/>
+          <a:p>
+            <a:pPr algn="ctr" fontAlgn="base">
+              <a:lnSpc>
+                <a:spcPts val="1640"/>
+              </a:lnSpc>
+              <a:spcBef>
+                <a:spcPts val="0"/>
+              </a:spcBef>
+              <a:spcAft>
+                <a:spcPts val="0"/>
+              </a:spcAft>
+              <a:defRPr sz="1124" b="0" i="0" lang="zh-CN" dirty="0">
+                <a:solidFill>
+                  <a:srgbClr val="3F4854"/>
+                </a:solidFill>
+                <a:latin typeface="Noto Sans CJK SC"/>
+                <a:ea typeface="Noto Sans CJK SC"/>
+                <a:cs typeface="Noto Sans CJK SC"/>
+              </a:defRPr>
+            </a:pPr>
+            <a:r>
+              <a:rPr sz="1124" b="0" i="0" lang="zh-CN" dirty="0">
+                <a:solidFill>
+                  <a:srgbClr val="3F4854"/>
+                </a:solidFill>
+                <a:latin typeface="Noto Sans CJK SC"/>
+                <a:ea typeface="Noto Sans CJK SC"/>
+                <a:cs typeface="Noto Sans CJK SC"/>
+              </a:rPr>
+              <a:t>结构</a:t>
+            </a:r>
+          </a:p>
+        </p:txBody>
+      </p:sp>
+      <p:sp>
+        <p:nvSpPr>
+          <p:cNvPr id="103" name="s_e2_0" descr="Editable line; source id s_e2_0"/>
+          <p:cNvSpPr/>
+          <p:nvPr/>
+        </p:nvSpPr>
+        <p:spPr>
+          <a:xfrm>
+            <a:off x="4206875" y="3278187"/>
+            <a:ext cx="555625" cy="79375"/>
+          </a:xfrm>
+          <a:custGeom>
+            <a:avLst/>
+            <a:gdLst/>
+            <a:ahLst/>
+            <a:cxnLst/>
+            <a:rect l="l" t="t" r="r" b="b"/>
+            <a:pathLst>
+              <a:path w="70000" h="10000">
+                <a:moveTo>
+                  <a:pt x="70000" y="5900"/>
+                </a:moveTo>
+                <a:lnTo>
+                  <a:pt x="12000" y="5900"/>
+                </a:lnTo>
+                <a:lnTo>
+                  <a:pt x="12000" y="10000"/>
+                </a:lnTo>
+                <a:lnTo>
+                  <a:pt x="0" y="5000"/>
+                </a:lnTo>
+                <a:lnTo>
+                  <a:pt x="12000" y="0"/>
+                </a:lnTo>
+                <a:lnTo>
+                  <a:pt x="12000" y="4100"/>
+                </a:lnTo>
+                <a:lnTo>
+                  <a:pt x="70000" y="4100"/>
+                </a:lnTo>
+                <a:close/>
+              </a:path>
+            </a:pathLst>
+          </a:custGeom>
+          <a:solidFill>
+            <a:srgbClr val="4B5563"/>
+          </a:solidFill>
+          <a:ln>
+            <a:noFill/>
+          </a:ln>
+          <a:effectLst/>
+        </p:spPr>
+        <p:style>
+          <a:lnRef idx="1">
+            <a:schemeClr val="accent1"/>
+          </a:lnRef>
+          <a:fillRef idx="3">
+            <a:schemeClr val="accent1"/>
+          </a:fillRef>
+          <a:effectRef idx="0">
+            <a:schemeClr val="accent1"/>
+          </a:effectRef>
+          <a:fontRef idx="minor">
+            <a:schemeClr val="lt1"/>
+          </a:fontRef>
+        </p:style>
+        <p:txBody>
+          <a:bodyPr rtlCol="0" anchor="ctr"/>
+          <a:lstStyle/>
+          <a:p>
+            <a:pPr algn="ctr"/>
+          </a:p>
+        </p:txBody>
+      </p:sp>
+      <p:sp>
+        <p:nvSpPr>
+          <p:cNvPr id="104" name="s_e2_p" descr="Editable shape; source id s_e2_p"/>
+          <p:cNvSpPr/>
+          <p:nvPr/>
+        </p:nvSpPr>
+        <p:spPr>
+          <a:xfrm>
+            <a:off x="4198937" y="2873374"/>
+            <a:ext cx="571499" cy="309562"/>
+          </a:xfrm>
+          <a:prstGeom prst="roundRect">
+            <a:avLst>
+              <a:gd name="adj" fmla="val 50000"/>
+            </a:avLst>
+          </a:prstGeom>
+          <a:solidFill>
+            <a:srgbClr val="FFFFFF"/>
+          </a:solidFill>
+          <a:ln w="8731">
+            <a:solidFill>
+              <a:srgbClr val="CBD3DA"/>
+            </a:solidFill>
+          </a:ln>
+          <a:effectLst/>
+        </p:spPr>
+        <p:style>
+          <a:lnRef idx="1">
+            <a:schemeClr val="accent1"/>
+          </a:lnRef>
+          <a:fillRef idx="3">
+            <a:schemeClr val="accent1"/>
+          </a:fillRef>
+          <a:effectRef idx="0">
+            <a:schemeClr val="accent1"/>
+          </a:effectRef>
+          <a:fontRef idx="minor">
+            <a:schemeClr val="lt1"/>
+          </a:fontRef>
+        </p:style>
+        <p:txBody>
+          <a:bodyPr rtlCol="0" anchor="ctr"/>
+          <a:lstStyle/>
+          <a:p>
+            <a:pPr algn="ctr"/>
+          </a:p>
+        </p:txBody>
+      </p:sp>
+      <p:sp>
+        <p:nvSpPr>
+          <p:cNvPr id="105" name="s_e2_p_t" descr="Editable text; source id s_e2_p_t"/>
+          <p:cNvSpPr txBox="1"/>
+          <p:nvPr/>
+        </p:nvSpPr>
+        <p:spPr>
+          <a:xfrm>
+            <a:off x="4278312" y="2905124"/>
+            <a:ext cx="412749" cy="246062"/>
+          </a:xfrm>
+          <a:prstGeom prst="rect">
+            <a:avLst/>
+          </a:prstGeom>
+          <a:noFill/>
+          <a:effectLst/>
+        </p:spPr>
+        <p:txBody>
+          <a:bodyPr wrap="none" anchor="ctr" tIns="0" rIns="0" bIns="0" lIns="0" anchorCtr="0" vertOverflow="overflow">
+            <a:noAutofit/>
+          </a:bodyPr>
+          <a:lstStyle/>
+          <a:p>
+            <a:pPr algn="ctr" fontAlgn="base">
+              <a:lnSpc>
+                <a:spcPts val="1640"/>
+              </a:lnSpc>
+              <a:spcBef>
+                <a:spcPts val="0"/>
+              </a:spcBef>
+              <a:spcAft>
+                <a:spcPts val="0"/>
+              </a:spcAft>
+              <a:defRPr sz="1124" b="0" i="0" lang="zh-CN" dirty="0">
+                <a:solidFill>
+                  <a:srgbClr val="3F4854"/>
+                </a:solidFill>
+                <a:latin typeface="Noto Sans CJK SC"/>
+                <a:ea typeface="Noto Sans CJK SC"/>
+                <a:cs typeface="Noto Sans CJK SC"/>
+              </a:defRPr>
+            </a:pPr>
+            <a:r>
+              <a:rPr sz="1124" b="0" i="0" lang="zh-CN" dirty="0">
+                <a:solidFill>
+                  <a:srgbClr val="3F4854"/>
+                </a:solidFill>
+                <a:latin typeface="Noto Sans CJK SC"/>
+                <a:ea typeface="Noto Sans CJK SC"/>
+                <a:cs typeface="Noto Sans CJK SC"/>
+              </a:rPr>
+              <a:t>制备</a:t>
+            </a:r>
+          </a:p>
+        </p:txBody>
+      </p:sp>
+      <p:sp>
+        <p:nvSpPr>
+          <p:cNvPr id="106" name="s_e3_0" descr="Editable line; source id s_e3_0"/>
+          <p:cNvSpPr/>
+          <p:nvPr/>
+        </p:nvSpPr>
+        <p:spPr>
+          <a:xfrm>
+            <a:off x="4206875" y="4945062"/>
+            <a:ext cx="555625" cy="79375"/>
+          </a:xfrm>
+          <a:custGeom>
+            <a:avLst/>
+            <a:gdLst/>
+            <a:ahLst/>
+            <a:cxnLst/>
+            <a:rect l="l" t="t" r="r" b="b"/>
+            <a:pathLst>
+              <a:path w="70000" h="10000">
+                <a:moveTo>
+                  <a:pt x="70000" y="5900"/>
+                </a:moveTo>
+                <a:lnTo>
+                  <a:pt x="12000" y="5900"/>
+                </a:lnTo>
+                <a:lnTo>
+                  <a:pt x="12000" y="10000"/>
+                </a:lnTo>
+                <a:lnTo>
+                  <a:pt x="0" y="5000"/>
+                </a:lnTo>
+                <a:lnTo>
+                  <a:pt x="12000" y="0"/>
+                </a:lnTo>
+                <a:lnTo>
+                  <a:pt x="12000" y="4100"/>
+                </a:lnTo>
+                <a:lnTo>
+                  <a:pt x="70000" y="4100"/>
+                </a:lnTo>
+                <a:close/>
+              </a:path>
+            </a:pathLst>
+          </a:custGeom>
+          <a:solidFill>
+            <a:srgbClr val="4B5563"/>
+          </a:solidFill>
+          <a:ln>
+            <a:noFill/>
+          </a:ln>
+          <a:effectLst/>
+        </p:spPr>
+        <p:style>
+          <a:lnRef idx="1">
+            <a:schemeClr val="accent1"/>
+          </a:lnRef>
+          <a:fillRef idx="3">
+            <a:schemeClr val="accent1"/>
+          </a:fillRef>
+          <a:effectRef idx="0">
+            <a:schemeClr val="accent1"/>
+          </a:effectRef>
+          <a:fontRef idx="minor">
+            <a:schemeClr val="lt1"/>
+          </a:fontRef>
+        </p:style>
+        <p:txBody>
+          <a:bodyPr rtlCol="0" anchor="ctr"/>
+          <a:lstStyle/>
+          <a:p>
+            <a:pPr algn="ctr"/>
+          </a:p>
+        </p:txBody>
+      </p:sp>
+      <p:sp>
+        <p:nvSpPr>
+          <p:cNvPr id="107" name="s_e3_p" descr="Editable shape; source id s_e3_p"/>
+          <p:cNvSpPr/>
+          <p:nvPr/>
+        </p:nvSpPr>
+        <p:spPr>
+          <a:xfrm>
+            <a:off x="4198937" y="4540249"/>
+            <a:ext cx="571499" cy="309562"/>
+          </a:xfrm>
+          <a:prstGeom prst="roundRect">
+            <a:avLst>
+              <a:gd name="adj" fmla="val 50000"/>
+            </a:avLst>
+          </a:prstGeom>
+          <a:solidFill>
+            <a:srgbClr val="FFFFFF"/>
+          </a:solidFill>
+          <a:ln w="8731">
+            <a:solidFill>
+              <a:srgbClr val="CBD3DA"/>
+            </a:solidFill>
+          </a:ln>
+          <a:effectLst/>
+        </p:spPr>
+        <p:style>
+          <a:lnRef idx="1">
+            <a:schemeClr val="accent1"/>
+          </a:lnRef>
+          <a:fillRef idx="3">
+            <a:schemeClr val="accent1"/>
+          </a:fillRef>
+          <a:effectRef idx="0">
+            <a:schemeClr val="accent1"/>
+          </a:effectRef>
+          <a:fontRef idx="minor">
+            <a:schemeClr val="lt1"/>
+          </a:fontRef>
+        </p:style>
+        <p:txBody>
+          <a:bodyPr rtlCol="0" anchor="ctr"/>
+          <a:lstStyle/>
+          <a:p>
+            <a:pPr algn="ctr"/>
+          </a:p>
+        </p:txBody>
+      </p:sp>
+      <p:sp>
+        <p:nvSpPr>
+          <p:cNvPr id="108" name="s_e3_p_t" descr="Editable text; source id s_e3_p_t"/>
+          <p:cNvSpPr txBox="1"/>
+          <p:nvPr/>
+        </p:nvSpPr>
+        <p:spPr>
+          <a:xfrm>
+            <a:off x="4278312" y="4571999"/>
+            <a:ext cx="412749" cy="246062"/>
+          </a:xfrm>
+          <a:prstGeom prst="rect">
+            <a:avLst/>
+          </a:prstGeom>
+          <a:noFill/>
+          <a:effectLst/>
+        </p:spPr>
+        <p:txBody>
+          <a:bodyPr wrap="none" anchor="ctr" tIns="0" rIns="0" bIns="0" lIns="0" anchorCtr="0" vertOverflow="overflow">
+            <a:noAutofit/>
+          </a:bodyPr>
+          <a:lstStyle/>
+          <a:p>
+            <a:pPr algn="ctr" fontAlgn="base">
+              <a:lnSpc>
+                <a:spcPts val="1640"/>
+              </a:lnSpc>
+              <a:spcBef>
+                <a:spcPts val="0"/>
+              </a:spcBef>
+              <a:spcAft>
+                <a:spcPts val="0"/>
+              </a:spcAft>
+              <a:defRPr sz="1124" b="0" i="0" lang="zh-CN" dirty="0">
+                <a:solidFill>
+                  <a:srgbClr val="3F4854"/>
+                </a:solidFill>
+                <a:latin typeface="Noto Sans CJK SC"/>
+                <a:ea typeface="Noto Sans CJK SC"/>
+                <a:cs typeface="Noto Sans CJK SC"/>
+              </a:defRPr>
+            </a:pPr>
+            <a:r>
+              <a:rPr sz="1124" b="0" i="0" lang="zh-CN" dirty="0">
+                <a:solidFill>
+                  <a:srgbClr val="3F4854"/>
+                </a:solidFill>
+                <a:latin typeface="Noto Sans CJK SC"/>
+                <a:ea typeface="Noto Sans CJK SC"/>
+                <a:cs typeface="Noto Sans CJK SC"/>
+              </a:rPr>
+              <a:t>变量</a:t>
+            </a:r>
+          </a:p>
+        </p:txBody>
+      </p:sp>
+      <p:sp>
+        <p:nvSpPr>
+          <p:cNvPr id="109" name="s_e4_0" descr="Editable line; source id s_e4_0"/>
+          <p:cNvSpPr/>
+          <p:nvPr/>
+        </p:nvSpPr>
+        <p:spPr>
+          <a:xfrm>
+            <a:off x="4206875" y="6611937"/>
+            <a:ext cx="555625" cy="79375"/>
+          </a:xfrm>
+          <a:custGeom>
+            <a:avLst/>
+            <a:gdLst/>
+            <a:ahLst/>
+            <a:cxnLst/>
+            <a:rect l="l" t="t" r="r" b="b"/>
+            <a:pathLst>
+              <a:path w="70000" h="10000">
+                <a:moveTo>
+                  <a:pt x="70000" y="5900"/>
+                </a:moveTo>
+                <a:lnTo>
+                  <a:pt x="12000" y="5900"/>
+                </a:lnTo>
+                <a:lnTo>
+                  <a:pt x="12000" y="10000"/>
+                </a:lnTo>
+                <a:lnTo>
+                  <a:pt x="0" y="5000"/>
+                </a:lnTo>
+                <a:lnTo>
+                  <a:pt x="12000" y="0"/>
+                </a:lnTo>
+                <a:lnTo>
+                  <a:pt x="12000" y="4100"/>
+                </a:lnTo>
+                <a:lnTo>
+                  <a:pt x="70000" y="4100"/>
+                </a:lnTo>
+                <a:close/>
+              </a:path>
+            </a:pathLst>
+          </a:custGeom>
+          <a:solidFill>
+            <a:srgbClr val="4B5563"/>
+          </a:solidFill>
+          <a:ln>
+            <a:noFill/>
+          </a:ln>
+          <a:effectLst/>
+        </p:spPr>
+        <p:style>
+          <a:lnRef idx="1">
+            <a:schemeClr val="accent1"/>
+          </a:lnRef>
+          <a:fillRef idx="3">
+            <a:schemeClr val="accent1"/>
+          </a:fillRef>
+          <a:effectRef idx="0">
+            <a:schemeClr val="accent1"/>
+          </a:effectRef>
+          <a:fontRef idx="minor">
+            <a:schemeClr val="lt1"/>
+          </a:fontRef>
+        </p:style>
+        <p:txBody>
+          <a:bodyPr rtlCol="0" anchor="ctr"/>
+          <a:lstStyle/>
+          <a:p>
+            <a:pPr algn="ctr"/>
+          </a:p>
+        </p:txBody>
+      </p:sp>
+      <p:sp>
+        <p:nvSpPr>
+          <p:cNvPr id="110" name="s_e4_p" descr="Editable shape; source id s_e4_p"/>
+          <p:cNvSpPr/>
+          <p:nvPr/>
+        </p:nvSpPr>
+        <p:spPr>
+          <a:xfrm>
+            <a:off x="4198937" y="6207124"/>
+            <a:ext cx="571499" cy="309562"/>
+          </a:xfrm>
+          <a:prstGeom prst="roundRect">
+            <a:avLst>
+              <a:gd name="adj" fmla="val 50000"/>
+            </a:avLst>
+          </a:prstGeom>
+          <a:solidFill>
+            <a:srgbClr val="FFFFFF"/>
+          </a:solidFill>
+          <a:ln w="8731">
+            <a:solidFill>
+              <a:srgbClr val="CBD3DA"/>
+            </a:solidFill>
+          </a:ln>
+          <a:effectLst/>
+        </p:spPr>
+        <p:style>
+          <a:lnRef idx="1">
+            <a:schemeClr val="accent1"/>
+          </a:lnRef>
+          <a:fillRef idx="3">
+            <a:schemeClr val="accent1"/>
+          </a:fillRef>
+          <a:effectRef idx="0">
+            <a:schemeClr val="accent1"/>
+          </a:effectRef>
+          <a:fontRef idx="minor">
+            <a:schemeClr val="lt1"/>
+          </a:fontRef>
+        </p:style>
+        <p:txBody>
+          <a:bodyPr rtlCol="0" anchor="ctr"/>
+          <a:lstStyle/>
+          <a:p>
+            <a:pPr algn="ctr"/>
+          </a:p>
+        </p:txBody>
+      </p:sp>
+      <p:sp>
+        <p:nvSpPr>
+          <p:cNvPr id="111" name="s_e4_p_t" descr="Editable text; source id s_e4_p_t"/>
+          <p:cNvSpPr txBox="1"/>
+          <p:nvPr/>
+        </p:nvSpPr>
+        <p:spPr>
+          <a:xfrm>
+            <a:off x="4278312" y="6238874"/>
+            <a:ext cx="412749" cy="246062"/>
+          </a:xfrm>
+          <a:prstGeom prst="rect">
+            <a:avLst/>
+          </a:prstGeom>
+          <a:noFill/>
+          <a:effectLst/>
+        </p:spPr>
+        <p:txBody>
+          <a:bodyPr wrap="none" anchor="ctr" tIns="0" rIns="0" bIns="0" lIns="0" anchorCtr="0" vertOverflow="overflow">
+            <a:noAutofit/>
+          </a:bodyPr>
+          <a:lstStyle/>
+          <a:p>
+            <a:pPr algn="ctr" fontAlgn="base">
+              <a:lnSpc>
+                <a:spcPts val="1640"/>
+              </a:lnSpc>
+              <a:spcBef>
+                <a:spcPts val="0"/>
+              </a:spcBef>
+              <a:spcAft>
+                <a:spcPts val="0"/>
+              </a:spcAft>
+              <a:defRPr sz="1124" b="0" i="0" lang="zh-CN" dirty="0">
+                <a:solidFill>
+                  <a:srgbClr val="3F4854"/>
+                </a:solidFill>
+                <a:latin typeface="Noto Sans CJK SC"/>
+                <a:ea typeface="Noto Sans CJK SC"/>
+                <a:cs typeface="Noto Sans CJK SC"/>
+              </a:defRPr>
+            </a:pPr>
+            <a:r>
+              <a:rPr sz="1124" b="0" i="0" lang="zh-CN" dirty="0">
+                <a:solidFill>
+                  <a:srgbClr val="3F4854"/>
+                </a:solidFill>
+                <a:latin typeface="Noto Sans CJK SC"/>
+                <a:ea typeface="Noto Sans CJK SC"/>
+                <a:cs typeface="Noto Sans CJK SC"/>
+              </a:rPr>
+              <a:t>晶化</a:t>
+            </a:r>
+          </a:p>
+        </p:txBody>
+      </p:sp>
+      <p:cxnSp>
+        <p:nvCxnSpPr>
+          <p:cNvPr id="112" name="sr_0" descr="Editable line; source id sr_0"/>
+          <p:cNvCxnSpPr/>
+          <p:nvPr/>
+        </p:nvCxnSpPr>
+        <p:spPr>
+          <a:xfrm>
+            <a:off x="7000874" y="4063999"/>
+            <a:ext cx="142875" cy="0"/>
+          </a:xfrm>
+          <a:prstGeom prst="line">
+            <a:avLst/>
+          </a:prstGeom>
+          <a:ln w="14287">
+            <a:solidFill>
+              <a:srgbClr val="4B5563"/>
             </a:solidFill>
           </a:ln>
           <a:effectLst/>
@@ -7990,21 +8728,21 @@
       </p:cxnSp>
       <p:cxnSp>
         <p:nvCxnSpPr>
-          <p:cNvPr id="100" name="l3_g_q_0" descr="Editable line; source id l3_g_q_0"/>
+          <p:cNvPr id="113" name="srv_0" descr="Editable line; source id srv_0"/>
           <p:cNvCxnSpPr/>
           <p:nvPr/>
         </p:nvCxnSpPr>
         <p:spPr>
           <a:xfrm>
-            <a:off x="8588374" y="6262687"/>
-            <a:ext cx="39688" cy="0"/>
+            <a:off x="7143749" y="1984374"/>
+            <a:ext cx="0" cy="4445000"/>
           </a:xfrm>
           <a:prstGeom prst="line">
             <a:avLst/>
           </a:prstGeom>
-          <a:ln w="7937">
+          <a:ln w="14287">
             <a:solidFill>
-              <a:srgbClr val="1F2937"/>
+              <a:srgbClr val="4B5563"/>
             </a:solidFill>
           </a:ln>
           <a:effectLst/>
@@ -8024,356 +8762,16 @@
           </a:fontRef>
         </p:style>
       </p:cxnSp>
-      <p:cxnSp>
-        <p:nvCxnSpPr>
-          <p:cNvPr id="101" name="l3_g_q_1" descr="Editable line; source id l3_g_q_1"/>
-          <p:cNvCxnSpPr/>
-          <p:nvPr/>
-        </p:nvCxnSpPr>
-        <p:spPr>
-          <a:xfrm>
-            <a:off x="8628062" y="6262687"/>
-            <a:ext cx="0" cy="39687"/>
-          </a:xfrm>
-          <a:prstGeom prst="line">
-            <a:avLst/>
-          </a:prstGeom>
-          <a:ln w="7937">
-            <a:solidFill>
-              <a:srgbClr val="1F2937"/>
-            </a:solidFill>
-          </a:ln>
-          <a:effectLst/>
-        </p:spPr>
-        <p:style>
-          <a:lnRef idx="2">
-            <a:schemeClr val="accent1"/>
-          </a:lnRef>
-          <a:fillRef idx="0">
-            <a:schemeClr val="accent1"/>
-          </a:fillRef>
-          <a:effectRef idx="0">
-            <a:schemeClr val="accent1"/>
-          </a:effectRef>
-          <a:fontRef idx="minor">
-            <a:schemeClr val="tx1"/>
-          </a:fontRef>
-        </p:style>
-      </p:cxnSp>
-      <p:cxnSp>
-        <p:nvCxnSpPr>
-          <p:cNvPr id="102" name="l3_g_q_2" descr="Editable line; source id l3_g_q_2"/>
-          <p:cNvCxnSpPr/>
-          <p:nvPr/>
-        </p:nvCxnSpPr>
-        <p:spPr>
-          <a:xfrm flipH="1">
-            <a:off x="8604249" y="6302374"/>
-            <a:ext cx="23813" cy="0"/>
-          </a:xfrm>
-          <a:prstGeom prst="line">
-            <a:avLst/>
-          </a:prstGeom>
-          <a:ln w="7937">
-            <a:solidFill>
-              <a:srgbClr val="1F2937"/>
-            </a:solidFill>
-          </a:ln>
-          <a:effectLst/>
-        </p:spPr>
-        <p:style>
-          <a:lnRef idx="2">
-            <a:schemeClr val="accent1"/>
-          </a:lnRef>
-          <a:fillRef idx="0">
-            <a:schemeClr val="accent1"/>
-          </a:fillRef>
-          <a:effectRef idx="0">
-            <a:schemeClr val="accent1"/>
-          </a:effectRef>
-          <a:fontRef idx="minor">
-            <a:schemeClr val="tx1"/>
-          </a:fontRef>
-        </p:style>
-      </p:cxnSp>
-      <p:cxnSp>
-        <p:nvCxnSpPr>
-          <p:cNvPr id="103" name="l3_g_q_3" descr="Editable line; source id l3_g_q_3"/>
-          <p:cNvCxnSpPr/>
-          <p:nvPr/>
-        </p:nvCxnSpPr>
-        <p:spPr>
-          <a:xfrm>
-            <a:off x="8604249" y="6302374"/>
-            <a:ext cx="0" cy="31750"/>
-          </a:xfrm>
-          <a:prstGeom prst="line">
-            <a:avLst/>
-          </a:prstGeom>
-          <a:ln w="7937">
-            <a:solidFill>
-              <a:srgbClr val="1F2937"/>
-            </a:solidFill>
-          </a:ln>
-          <a:effectLst/>
-        </p:spPr>
-        <p:style>
-          <a:lnRef idx="2">
-            <a:schemeClr val="accent1"/>
-          </a:lnRef>
-          <a:fillRef idx="0">
-            <a:schemeClr val="accent1"/>
-          </a:fillRef>
-          <a:effectRef idx="0">
-            <a:schemeClr val="accent1"/>
-          </a:effectRef>
-          <a:fontRef idx="minor">
-            <a:schemeClr val="tx1"/>
-          </a:fontRef>
-        </p:style>
-      </p:cxnSp>
-      <p:sp>
-        <p:nvSpPr>
-          <p:cNvPr id="104" name="l3_t" descr="Editable text; source id l3_t"/>
-          <p:cNvSpPr txBox="1"/>
-          <p:nvPr/>
-        </p:nvSpPr>
-        <p:spPr>
-          <a:xfrm>
-            <a:off x="8826499" y="6143624"/>
-            <a:ext cx="2809874" cy="269874"/>
-          </a:xfrm>
-          <a:prstGeom prst="rect">
-            <a:avLst/>
-          </a:prstGeom>
-          <a:noFill/>
-          <a:effectLst/>
-        </p:spPr>
-        <p:txBody>
-          <a:bodyPr wrap="none" anchor="ctr" tIns="0" rIns="0" bIns="0" lIns="0" anchorCtr="0" vertOverflow="overflow">
-            <a:noAutofit/>
-          </a:bodyPr>
-          <a:lstStyle/>
-          <a:p>
-            <a:pPr algn="l" fontAlgn="base">
-              <a:lnSpc>
-                <a:spcPts val="1687"/>
-              </a:lnSpc>
-              <a:spcBef>
-                <a:spcPts val="0"/>
-              </a:spcBef>
-              <a:spcAft>
-                <a:spcPts val="0"/>
-              </a:spcAft>
-              <a:defRPr sz="1441" b="1" i="0" lang="zh-CN" dirty="0">
-                <a:solidFill>
-                  <a:srgbClr val="7A5410"/>
-                </a:solidFill>
-                <a:latin typeface="DejaVu Sans"/>
-                <a:ea typeface="DejaVu Sans"/>
-                <a:cs typeface="DejaVu Sans"/>
-              </a:defRPr>
-            </a:pPr>
-            <a:r>
-              <a:rPr sz="1441" b="1" i="0" lang="zh-CN" dirty="0">
-                <a:solidFill>
-                  <a:srgbClr val="7A5410"/>
-                </a:solidFill>
-                <a:latin typeface="DejaVu Sans"/>
-                <a:ea typeface="DejaVu Sans"/>
-                <a:cs typeface="DejaVu Sans"/>
-              </a:rPr>
-              <a:t>Ba5Y12Zn[O(SiO4)]8</a:t>
-            </a:r>
-          </a:p>
-        </p:txBody>
-      </p:sp>
-      <p:sp>
-        <p:nvSpPr>
-          <p:cNvPr id="105" name="l3_s" descr="Editable shape; source id l3_s"/>
+      <p:sp>
+        <p:nvSpPr>
+          <p:cNvPr id="114" name="v_l1_0" descr="Editable line; source id v_l1_0"/>
           <p:cNvSpPr/>
           <p:nvPr/>
         </p:nvSpPr>
         <p:spPr>
           <a:xfrm>
-            <a:off x="8477249" y="6572249"/>
-            <a:ext cx="3159124" cy="460374"/>
-          </a:xfrm>
-          <a:prstGeom prst="roundRect">
-            <a:avLst>
-              <a:gd name="adj" fmla="val 10344"/>
-            </a:avLst>
-          </a:prstGeom>
-          <a:solidFill>
-            <a:srgbClr val="F7F9FB"/>
-          </a:solidFill>
-          <a:ln w="9524">
-            <a:solidFill>
-              <a:srgbClr val="CBD3DA"/>
-            </a:solidFill>
-          </a:ln>
-          <a:effectLst/>
-        </p:spPr>
-        <p:style>
-          <a:lnRef idx="1">
-            <a:schemeClr val="accent1"/>
-          </a:lnRef>
-          <a:fillRef idx="3">
-            <a:schemeClr val="accent1"/>
-          </a:fillRef>
-          <a:effectRef idx="0">
-            <a:schemeClr val="accent1"/>
-          </a:effectRef>
-          <a:fontRef idx="minor">
-            <a:schemeClr val="lt1"/>
-          </a:fontRef>
-        </p:style>
-        <p:txBody>
-          <a:bodyPr rtlCol="0" anchor="ctr"/>
-          <a:lstStyle/>
-          <a:p>
-            <a:pPr algn="ctr"/>
-          </a:p>
-        </p:txBody>
-      </p:sp>
-      <p:sp>
-        <p:nvSpPr>
-          <p:cNvPr id="106" name="l3_s_t" descr="Editable text; source id l3_s_t"/>
-          <p:cNvSpPr txBox="1"/>
-          <p:nvPr/>
-        </p:nvSpPr>
-        <p:spPr>
-          <a:xfrm>
-            <a:off x="8532812" y="6603999"/>
-            <a:ext cx="3047999" cy="396874"/>
-          </a:xfrm>
-          <a:prstGeom prst="rect">
-            <a:avLst/>
-          </a:prstGeom>
-          <a:noFill/>
-          <a:effectLst/>
-        </p:spPr>
-        <p:txBody>
-          <a:bodyPr wrap="none" anchor="ctr" tIns="0" rIns="0" bIns="0" lIns="0" anchorCtr="0" vertOverflow="overflow">
-            <a:noAutofit/>
-          </a:bodyPr>
-          <a:lstStyle/>
-          <a:p>
-            <a:pPr algn="ctr" fontAlgn="base">
-              <a:lnSpc>
-                <a:spcPts val="1734"/>
-              </a:lnSpc>
-              <a:spcBef>
-                <a:spcPts val="0"/>
-              </a:spcBef>
-              <a:spcAft>
-                <a:spcPts val="0"/>
-              </a:spcAft>
-              <a:defRPr sz="1187" b="0" i="0" lang="zh-CN" dirty="0">
-                <a:solidFill>
-                  <a:srgbClr val="3F4854"/>
-                </a:solidFill>
-                <a:latin typeface="Noto Sans CJK SC"/>
-                <a:ea typeface="Noto Sans CJK SC"/>
-                <a:cs typeface="Noto Sans CJK SC"/>
-              </a:defRPr>
-            </a:pPr>
-            <a:r>
-              <a:rPr sz="1187" b="0" i="0" lang="zh-CN" dirty="0">
-                <a:solidFill>
-                  <a:srgbClr val="3F4854"/>
-                </a:solidFill>
-                <a:latin typeface="Noto Sans CJK SC"/>
-                <a:ea typeface="Noto Sans CJK SC"/>
-                <a:cs typeface="Noto Sans CJK SC"/>
-              </a:rPr>
-              <a:t>未见直接报道</a:t>
-            </a:r>
-          </a:p>
-        </p:txBody>
-      </p:sp>
-      <p:cxnSp>
-        <p:nvCxnSpPr>
-          <p:cNvPr id="107" name="t0_0" descr="Editable line; source id t0_0"/>
-          <p:cNvCxnSpPr/>
-          <p:nvPr/>
-        </p:nvCxnSpPr>
-        <p:spPr>
-          <a:xfrm>
-            <a:off x="2397124" y="4032249"/>
-            <a:ext cx="349250" cy="0"/>
-          </a:xfrm>
-          <a:prstGeom prst="line">
-            <a:avLst/>
-          </a:prstGeom>
-          <a:ln w="14287">
-            <a:solidFill>
-              <a:srgbClr val="4B5563"/>
-            </a:solidFill>
-          </a:ln>
-          <a:effectLst/>
-        </p:spPr>
-        <p:style>
-          <a:lnRef idx="2">
-            <a:schemeClr val="accent1"/>
-          </a:lnRef>
-          <a:fillRef idx="0">
-            <a:schemeClr val="accent1"/>
-          </a:fillRef>
-          <a:effectRef idx="0">
-            <a:schemeClr val="accent1"/>
-          </a:effectRef>
-          <a:fontRef idx="minor">
-            <a:schemeClr val="tx1"/>
-          </a:fontRef>
-        </p:style>
-      </p:cxnSp>
-      <p:cxnSp>
-        <p:nvCxnSpPr>
-          <p:cNvPr id="108" name="tv_0" descr="Editable line; source id tv_0"/>
-          <p:cNvCxnSpPr/>
-          <p:nvPr/>
-        </p:nvCxnSpPr>
-        <p:spPr>
-          <a:xfrm>
-            <a:off x="2746374" y="1333499"/>
-            <a:ext cx="0" cy="5715000"/>
-          </a:xfrm>
-          <a:prstGeom prst="line">
-            <a:avLst/>
-          </a:prstGeom>
-          <a:ln w="14287">
-            <a:solidFill>
-              <a:srgbClr val="4B5563"/>
-            </a:solidFill>
-          </a:ln>
-          <a:effectLst/>
-        </p:spPr>
-        <p:style>
-          <a:lnRef idx="2">
-            <a:schemeClr val="accent1"/>
-          </a:lnRef>
-          <a:fillRef idx="0">
-            <a:schemeClr val="accent1"/>
-          </a:fillRef>
-          <a:effectRef idx="0">
-            <a:schemeClr val="accent1"/>
-          </a:effectRef>
-          <a:fontRef idx="minor">
-            <a:schemeClr val="tx1"/>
-          </a:fontRef>
-        </p:style>
-      </p:cxnSp>
-      <p:sp>
-        <p:nvSpPr>
-          <p:cNvPr id="109" name="s_e1_0" descr="Editable line; source id s_e1_0"/>
-          <p:cNvSpPr/>
-          <p:nvPr/>
-        </p:nvSpPr>
-        <p:spPr>
-          <a:xfrm>
-            <a:off x="2746375" y="1293812"/>
-            <a:ext cx="619125" cy="79375"/>
+            <a:off x="7143750" y="1944687"/>
+            <a:ext cx="603250" cy="79375"/>
           </a:xfrm>
           <a:custGeom>
             <a:avLst/>
@@ -8382,24 +8780,24 @@
             <a:cxnLst/>
             <a:rect l="l" t="t" r="r" b="b"/>
             <a:pathLst>
-              <a:path w="78000" h="10000">
+              <a:path w="76000" h="10000">
                 <a:moveTo>
                   <a:pt x="0" y="4100"/>
                 </a:moveTo>
                 <a:lnTo>
-                  <a:pt x="66000" y="4100"/>
+                  <a:pt x="64000" y="4100"/>
                 </a:lnTo>
                 <a:lnTo>
-                  <a:pt x="66000" y="0"/>
+                  <a:pt x="64000" y="0"/>
                 </a:lnTo>
                 <a:lnTo>
-                  <a:pt x="78000" y="5000"/>
+                  <a:pt x="76000" y="5000"/>
                 </a:lnTo>
                 <a:lnTo>
-                  <a:pt x="66000" y="10000"/>
+                  <a:pt x="64000" y="10000"/>
                 </a:lnTo>
                 <a:lnTo>
-                  <a:pt x="66000" y="5900"/>
+                  <a:pt x="64000" y="5900"/>
                 </a:lnTo>
                 <a:lnTo>
                   <a:pt x="0" y="5900"/>
@@ -8440,14 +8838,14 @@
       </p:sp>
       <p:sp>
         <p:nvSpPr>
-          <p:cNvPr id="110" name="s_e1_p" descr="Editable shape; source id s_e1_p"/>
+          <p:cNvPr id="115" name="v_l1_p" descr="Editable shape; source id v_l1_p"/>
           <p:cNvSpPr/>
           <p:nvPr/>
         </p:nvSpPr>
         <p:spPr>
           <a:xfrm>
-            <a:off x="2778124" y="936624"/>
-            <a:ext cx="555624" cy="293687"/>
+            <a:off x="7159624" y="1539874"/>
+            <a:ext cx="571499" cy="309562"/>
           </a:xfrm>
           <a:prstGeom prst="roundRect">
             <a:avLst>
@@ -8488,14 +8886,14 @@
       </p:sp>
       <p:sp>
         <p:nvSpPr>
-          <p:cNvPr id="111" name="s_e1_p_t" descr="Editable text; source id s_e1_p_t"/>
+          <p:cNvPr id="116" name="v_l1_p_t" descr="Editable text; source id v_l1_p_t"/>
           <p:cNvSpPr txBox="1"/>
           <p:nvPr/>
         </p:nvSpPr>
         <p:spPr>
           <a:xfrm>
-            <a:off x="2857499" y="968374"/>
-            <a:ext cx="396874" cy="230187"/>
+            <a:off x="7238999" y="1571624"/>
+            <a:ext cx="412749" cy="246062"/>
           </a:xfrm>
           <a:prstGeom prst="rect">
             <a:avLst/>
@@ -8511,7 +8909,7 @@
           <a:p>
             <a:pPr algn="ctr" fontAlgn="base">
               <a:lnSpc>
-                <a:spcPts val="1546"/>
+                <a:spcPts val="1640"/>
               </a:lnSpc>
               <a:spcBef>
                 <a:spcPts val="0"/>
@@ -8519,7 +8917,7 @@
               <a:spcAft>
                 <a:spcPts val="0"/>
               </a:spcAft>
-              <a:defRPr sz="1062" b="0" i="0" lang="zh-CN" dirty="0">
+              <a:defRPr sz="1124" b="0" i="0" lang="zh-CN" dirty="0">
                 <a:solidFill>
                   <a:srgbClr val="3F4854"/>
                 </a:solidFill>
@@ -8529,7 +8927,7 @@
               </a:defRPr>
             </a:pPr>
             <a:r>
-              <a:rPr sz="1062" b="0" i="0" lang="zh-CN" dirty="0">
+              <a:rPr sz="1124" b="0" i="0" lang="zh-CN" dirty="0">
                 <a:solidFill>
                   <a:srgbClr val="3F4854"/>
                 </a:solidFill>
@@ -8537,21 +8935,21 @@
                 <a:ea typeface="Noto Sans CJK SC"/>
                 <a:cs typeface="Noto Sans CJK SC"/>
               </a:rPr>
-              <a:t>结构</a:t>
-            </a:r>
-          </a:p>
-        </p:txBody>
-      </p:sp>
-      <p:sp>
-        <p:nvSpPr>
-          <p:cNvPr id="112" name="s_e2_0" descr="Editable line; source id s_e2_0"/>
+              <a:t>近邻</a:t>
+            </a:r>
+          </a:p>
+        </p:txBody>
+      </p:sp>
+      <p:sp>
+        <p:nvSpPr>
+          <p:cNvPr id="117" name="v_l2_0" descr="Editable line; source id v_l2_0"/>
           <p:cNvSpPr/>
           <p:nvPr/>
         </p:nvSpPr>
         <p:spPr>
           <a:xfrm>
-            <a:off x="2746375" y="3198812"/>
-            <a:ext cx="619125" cy="79375"/>
+            <a:off x="7143750" y="4167187"/>
+            <a:ext cx="603250" cy="79375"/>
           </a:xfrm>
           <a:custGeom>
             <a:avLst/>
@@ -8560,24 +8958,24 @@
             <a:cxnLst/>
             <a:rect l="l" t="t" r="r" b="b"/>
             <a:pathLst>
-              <a:path w="78000" h="10000">
+              <a:path w="76000" h="10000">
                 <a:moveTo>
                   <a:pt x="0" y="4100"/>
                 </a:moveTo>
                 <a:lnTo>
-                  <a:pt x="66000" y="4100"/>
+                  <a:pt x="64000" y="4100"/>
                 </a:lnTo>
                 <a:lnTo>
-                  <a:pt x="66000" y="0"/>
+                  <a:pt x="64000" y="0"/>
                 </a:lnTo>
                 <a:lnTo>
-                  <a:pt x="78000" y="5000"/>
+                  <a:pt x="76000" y="5000"/>
                 </a:lnTo>
                 <a:lnTo>
-                  <a:pt x="66000" y="10000"/>
+                  <a:pt x="64000" y="10000"/>
                 </a:lnTo>
                 <a:lnTo>
-                  <a:pt x="66000" y="5900"/>
+                  <a:pt x="64000" y="5900"/>
                 </a:lnTo>
                 <a:lnTo>
                   <a:pt x="0" y="5900"/>
@@ -8618,14 +9016,14 @@
       </p:sp>
       <p:sp>
         <p:nvSpPr>
-          <p:cNvPr id="113" name="s_e2_p" descr="Editable shape; source id s_e2_p"/>
+          <p:cNvPr id="118" name="v_l2_p" descr="Editable shape; source id v_l2_p"/>
           <p:cNvSpPr/>
           <p:nvPr/>
         </p:nvSpPr>
         <p:spPr>
           <a:xfrm>
-            <a:off x="2778124" y="2841624"/>
-            <a:ext cx="555624" cy="293687"/>
+            <a:off x="7159624" y="3762374"/>
+            <a:ext cx="571499" cy="309562"/>
           </a:xfrm>
           <a:prstGeom prst="roundRect">
             <a:avLst>
@@ -8666,14 +9064,14 @@
       </p:sp>
       <p:sp>
         <p:nvSpPr>
-          <p:cNvPr id="114" name="s_e2_p_t" descr="Editable text; source id s_e2_p_t"/>
+          <p:cNvPr id="119" name="v_l2_p_t" descr="Editable text; source id v_l2_p_t"/>
           <p:cNvSpPr txBox="1"/>
           <p:nvPr/>
         </p:nvSpPr>
         <p:spPr>
           <a:xfrm>
-            <a:off x="2857499" y="2873374"/>
-            <a:ext cx="396874" cy="230187"/>
+            <a:off x="7238999" y="3794124"/>
+            <a:ext cx="412749" cy="246062"/>
           </a:xfrm>
           <a:prstGeom prst="rect">
             <a:avLst/>
@@ -8689,7 +9087,7 @@
           <a:p>
             <a:pPr algn="ctr" fontAlgn="base">
               <a:lnSpc>
-                <a:spcPts val="1546"/>
+                <a:spcPts val="1640"/>
               </a:lnSpc>
               <a:spcBef>
                 <a:spcPts val="0"/>
@@ -8697,7 +9095,7 @@
               <a:spcAft>
                 <a:spcPts val="0"/>
               </a:spcAft>
-              <a:defRPr sz="1062" b="0" i="0" lang="zh-CN" dirty="0">
+              <a:defRPr sz="1124" b="0" i="0" lang="zh-CN" dirty="0">
                 <a:solidFill>
                   <a:srgbClr val="3F4854"/>
                 </a:solidFill>
@@ -8707,827 +9105,7 @@
               </a:defRPr>
             </a:pPr>
             <a:r>
-              <a:rPr sz="1062" b="0" i="0" lang="zh-CN" dirty="0">
-                <a:solidFill>
-                  <a:srgbClr val="3F4854"/>
-                </a:solidFill>
-                <a:latin typeface="Noto Sans CJK SC"/>
-                <a:ea typeface="Noto Sans CJK SC"/>
-                <a:cs typeface="Noto Sans CJK SC"/>
-              </a:rPr>
-              <a:t>制备</a:t>
-            </a:r>
-          </a:p>
-        </p:txBody>
-      </p:sp>
-      <p:sp>
-        <p:nvSpPr>
-          <p:cNvPr id="115" name="s_e3_0" descr="Editable line; source id s_e3_0"/>
-          <p:cNvSpPr/>
-          <p:nvPr/>
-        </p:nvSpPr>
-        <p:spPr>
-          <a:xfrm>
-            <a:off x="2746375" y="5103812"/>
-            <a:ext cx="619125" cy="79375"/>
-          </a:xfrm>
-          <a:custGeom>
-            <a:avLst/>
-            <a:gdLst/>
-            <a:ahLst/>
-            <a:cxnLst/>
-            <a:rect l="l" t="t" r="r" b="b"/>
-            <a:pathLst>
-              <a:path w="78000" h="10000">
-                <a:moveTo>
-                  <a:pt x="0" y="4100"/>
-                </a:moveTo>
-                <a:lnTo>
-                  <a:pt x="66000" y="4100"/>
-                </a:lnTo>
-                <a:lnTo>
-                  <a:pt x="66000" y="0"/>
-                </a:lnTo>
-                <a:lnTo>
-                  <a:pt x="78000" y="5000"/>
-                </a:lnTo>
-                <a:lnTo>
-                  <a:pt x="66000" y="10000"/>
-                </a:lnTo>
-                <a:lnTo>
-                  <a:pt x="66000" y="5900"/>
-                </a:lnTo>
-                <a:lnTo>
-                  <a:pt x="0" y="5900"/>
-                </a:lnTo>
-                <a:close/>
-              </a:path>
-            </a:pathLst>
-          </a:custGeom>
-          <a:solidFill>
-            <a:srgbClr val="4B5563"/>
-          </a:solidFill>
-          <a:ln>
-            <a:noFill/>
-          </a:ln>
-          <a:effectLst/>
-        </p:spPr>
-        <p:style>
-          <a:lnRef idx="1">
-            <a:schemeClr val="accent1"/>
-          </a:lnRef>
-          <a:fillRef idx="3">
-            <a:schemeClr val="accent1"/>
-          </a:fillRef>
-          <a:effectRef idx="0">
-            <a:schemeClr val="accent1"/>
-          </a:effectRef>
-          <a:fontRef idx="minor">
-            <a:schemeClr val="lt1"/>
-          </a:fontRef>
-        </p:style>
-        <p:txBody>
-          <a:bodyPr rtlCol="0" anchor="ctr"/>
-          <a:lstStyle/>
-          <a:p>
-            <a:pPr algn="ctr"/>
-          </a:p>
-        </p:txBody>
-      </p:sp>
-      <p:sp>
-        <p:nvSpPr>
-          <p:cNvPr id="116" name="s_e3_p" descr="Editable shape; source id s_e3_p"/>
-          <p:cNvSpPr/>
-          <p:nvPr/>
-        </p:nvSpPr>
-        <p:spPr>
-          <a:xfrm>
-            <a:off x="2778124" y="4746624"/>
-            <a:ext cx="555624" cy="293687"/>
-          </a:xfrm>
-          <a:prstGeom prst="roundRect">
-            <a:avLst>
-              <a:gd name="adj" fmla="val 50000"/>
-            </a:avLst>
-          </a:prstGeom>
-          <a:solidFill>
-            <a:srgbClr val="FFFFFF"/>
-          </a:solidFill>
-          <a:ln w="8731">
-            <a:solidFill>
-              <a:srgbClr val="CBD3DA"/>
-            </a:solidFill>
-          </a:ln>
-          <a:effectLst/>
-        </p:spPr>
-        <p:style>
-          <a:lnRef idx="1">
-            <a:schemeClr val="accent1"/>
-          </a:lnRef>
-          <a:fillRef idx="3">
-            <a:schemeClr val="accent1"/>
-          </a:fillRef>
-          <a:effectRef idx="0">
-            <a:schemeClr val="accent1"/>
-          </a:effectRef>
-          <a:fontRef idx="minor">
-            <a:schemeClr val="lt1"/>
-          </a:fontRef>
-        </p:style>
-        <p:txBody>
-          <a:bodyPr rtlCol="0" anchor="ctr"/>
-          <a:lstStyle/>
-          <a:p>
-            <a:pPr algn="ctr"/>
-          </a:p>
-        </p:txBody>
-      </p:sp>
-      <p:sp>
-        <p:nvSpPr>
-          <p:cNvPr id="117" name="s_e3_p_t" descr="Editable text; source id s_e3_p_t"/>
-          <p:cNvSpPr txBox="1"/>
-          <p:nvPr/>
-        </p:nvSpPr>
-        <p:spPr>
-          <a:xfrm>
-            <a:off x="2857499" y="4778374"/>
-            <a:ext cx="396874" cy="230187"/>
-          </a:xfrm>
-          <a:prstGeom prst="rect">
-            <a:avLst/>
-          </a:prstGeom>
-          <a:noFill/>
-          <a:effectLst/>
-        </p:spPr>
-        <p:txBody>
-          <a:bodyPr wrap="none" anchor="ctr" tIns="0" rIns="0" bIns="0" lIns="0" anchorCtr="0" vertOverflow="overflow">
-            <a:noAutofit/>
-          </a:bodyPr>
-          <a:lstStyle/>
-          <a:p>
-            <a:pPr algn="ctr" fontAlgn="base">
-              <a:lnSpc>
-                <a:spcPts val="1546"/>
-              </a:lnSpc>
-              <a:spcBef>
-                <a:spcPts val="0"/>
-              </a:spcBef>
-              <a:spcAft>
-                <a:spcPts val="0"/>
-              </a:spcAft>
-              <a:defRPr sz="1062" b="0" i="0" lang="zh-CN" dirty="0">
-                <a:solidFill>
-                  <a:srgbClr val="3F4854"/>
-                </a:solidFill>
-                <a:latin typeface="Noto Sans CJK SC"/>
-                <a:ea typeface="Noto Sans CJK SC"/>
-                <a:cs typeface="Noto Sans CJK SC"/>
-              </a:defRPr>
-            </a:pPr>
-            <a:r>
-              <a:rPr sz="1062" b="0" i="0" lang="zh-CN" dirty="0">
-                <a:solidFill>
-                  <a:srgbClr val="3F4854"/>
-                </a:solidFill>
-                <a:latin typeface="Noto Sans CJK SC"/>
-                <a:ea typeface="Noto Sans CJK SC"/>
-                <a:cs typeface="Noto Sans CJK SC"/>
-              </a:rPr>
-              <a:t>变量</a:t>
-            </a:r>
-          </a:p>
-        </p:txBody>
-      </p:sp>
-      <p:sp>
-        <p:nvSpPr>
-          <p:cNvPr id="118" name="s_e4_0" descr="Editable line; source id s_e4_0"/>
-          <p:cNvSpPr/>
-          <p:nvPr/>
-        </p:nvSpPr>
-        <p:spPr>
-          <a:xfrm>
-            <a:off x="2746375" y="7008812"/>
-            <a:ext cx="619125" cy="79375"/>
-          </a:xfrm>
-          <a:custGeom>
-            <a:avLst/>
-            <a:gdLst/>
-            <a:ahLst/>
-            <a:cxnLst/>
-            <a:rect l="l" t="t" r="r" b="b"/>
-            <a:pathLst>
-              <a:path w="78000" h="10000">
-                <a:moveTo>
-                  <a:pt x="0" y="4100"/>
-                </a:moveTo>
-                <a:lnTo>
-                  <a:pt x="66000" y="4100"/>
-                </a:lnTo>
-                <a:lnTo>
-                  <a:pt x="66000" y="0"/>
-                </a:lnTo>
-                <a:lnTo>
-                  <a:pt x="78000" y="5000"/>
-                </a:lnTo>
-                <a:lnTo>
-                  <a:pt x="66000" y="10000"/>
-                </a:lnTo>
-                <a:lnTo>
-                  <a:pt x="66000" y="5900"/>
-                </a:lnTo>
-                <a:lnTo>
-                  <a:pt x="0" y="5900"/>
-                </a:lnTo>
-                <a:close/>
-              </a:path>
-            </a:pathLst>
-          </a:custGeom>
-          <a:solidFill>
-            <a:srgbClr val="4B5563"/>
-          </a:solidFill>
-          <a:ln>
-            <a:noFill/>
-          </a:ln>
-          <a:effectLst/>
-        </p:spPr>
-        <p:style>
-          <a:lnRef idx="1">
-            <a:schemeClr val="accent1"/>
-          </a:lnRef>
-          <a:fillRef idx="3">
-            <a:schemeClr val="accent1"/>
-          </a:fillRef>
-          <a:effectRef idx="0">
-            <a:schemeClr val="accent1"/>
-          </a:effectRef>
-          <a:fontRef idx="minor">
-            <a:schemeClr val="lt1"/>
-          </a:fontRef>
-        </p:style>
-        <p:txBody>
-          <a:bodyPr rtlCol="0" anchor="ctr"/>
-          <a:lstStyle/>
-          <a:p>
-            <a:pPr algn="ctr"/>
-          </a:p>
-        </p:txBody>
-      </p:sp>
-      <p:sp>
-        <p:nvSpPr>
-          <p:cNvPr id="119" name="s_e4_p" descr="Editable shape; source id s_e4_p"/>
-          <p:cNvSpPr/>
-          <p:nvPr/>
-        </p:nvSpPr>
-        <p:spPr>
-          <a:xfrm>
-            <a:off x="2778124" y="6651624"/>
-            <a:ext cx="555624" cy="293687"/>
-          </a:xfrm>
-          <a:prstGeom prst="roundRect">
-            <a:avLst>
-              <a:gd name="adj" fmla="val 50000"/>
-            </a:avLst>
-          </a:prstGeom>
-          <a:solidFill>
-            <a:srgbClr val="FFFFFF"/>
-          </a:solidFill>
-          <a:ln w="8731">
-            <a:solidFill>
-              <a:srgbClr val="CBD3DA"/>
-            </a:solidFill>
-          </a:ln>
-          <a:effectLst/>
-        </p:spPr>
-        <p:style>
-          <a:lnRef idx="1">
-            <a:schemeClr val="accent1"/>
-          </a:lnRef>
-          <a:fillRef idx="3">
-            <a:schemeClr val="accent1"/>
-          </a:fillRef>
-          <a:effectRef idx="0">
-            <a:schemeClr val="accent1"/>
-          </a:effectRef>
-          <a:fontRef idx="minor">
-            <a:schemeClr val="lt1"/>
-          </a:fontRef>
-        </p:style>
-        <p:txBody>
-          <a:bodyPr rtlCol="0" anchor="ctr"/>
-          <a:lstStyle/>
-          <a:p>
-            <a:pPr algn="ctr"/>
-          </a:p>
-        </p:txBody>
-      </p:sp>
-      <p:sp>
-        <p:nvSpPr>
-          <p:cNvPr id="120" name="s_e4_p_t" descr="Editable text; source id s_e4_p_t"/>
-          <p:cNvSpPr txBox="1"/>
-          <p:nvPr/>
-        </p:nvSpPr>
-        <p:spPr>
-          <a:xfrm>
-            <a:off x="2857499" y="6683374"/>
-            <a:ext cx="396874" cy="230187"/>
-          </a:xfrm>
-          <a:prstGeom prst="rect">
-            <a:avLst/>
-          </a:prstGeom>
-          <a:noFill/>
-          <a:effectLst/>
-        </p:spPr>
-        <p:txBody>
-          <a:bodyPr wrap="none" anchor="ctr" tIns="0" rIns="0" bIns="0" lIns="0" anchorCtr="0" vertOverflow="overflow">
-            <a:noAutofit/>
-          </a:bodyPr>
-          <a:lstStyle/>
-          <a:p>
-            <a:pPr algn="ctr" fontAlgn="base">
-              <a:lnSpc>
-                <a:spcPts val="1546"/>
-              </a:lnSpc>
-              <a:spcBef>
-                <a:spcPts val="0"/>
-              </a:spcBef>
-              <a:spcAft>
-                <a:spcPts val="0"/>
-              </a:spcAft>
-              <a:defRPr sz="1062" b="0" i="0" lang="zh-CN" dirty="0">
-                <a:solidFill>
-                  <a:srgbClr val="3F4854"/>
-                </a:solidFill>
-                <a:latin typeface="Noto Sans CJK SC"/>
-                <a:ea typeface="Noto Sans CJK SC"/>
-                <a:cs typeface="Noto Sans CJK SC"/>
-              </a:defRPr>
-            </a:pPr>
-            <a:r>
-              <a:rPr sz="1062" b="0" i="0" lang="zh-CN" dirty="0">
-                <a:solidFill>
-                  <a:srgbClr val="3F4854"/>
-                </a:solidFill>
-                <a:latin typeface="Noto Sans CJK SC"/>
-                <a:ea typeface="Noto Sans CJK SC"/>
-                <a:cs typeface="Noto Sans CJK SC"/>
-              </a:rPr>
-              <a:t>晶化</a:t>
-            </a:r>
-          </a:p>
-        </p:txBody>
-      </p:sp>
-      <p:cxnSp>
-        <p:nvCxnSpPr>
-          <p:cNvPr id="121" name="u0_0" descr="Editable line; source id u0_0"/>
-          <p:cNvCxnSpPr/>
-          <p:nvPr/>
-        </p:nvCxnSpPr>
-        <p:spPr>
-          <a:xfrm>
-            <a:off x="1301749" y="5429249"/>
-            <a:ext cx="0" cy="2333625"/>
-          </a:xfrm>
-          <a:prstGeom prst="line">
-            <a:avLst/>
-          </a:prstGeom>
-          <a:ln w="14287">
-            <a:solidFill>
-              <a:srgbClr val="4B5563"/>
-            </a:solidFill>
-          </a:ln>
-          <a:effectLst/>
-        </p:spPr>
-        <p:style>
-          <a:lnRef idx="2">
-            <a:schemeClr val="accent1"/>
-          </a:lnRef>
-          <a:fillRef idx="0">
-            <a:schemeClr val="accent1"/>
-          </a:fillRef>
-          <a:effectRef idx="0">
-            <a:schemeClr val="accent1"/>
-          </a:effectRef>
-          <a:fontRef idx="minor">
-            <a:schemeClr val="tx1"/>
-          </a:fontRef>
-        </p:style>
-      </p:cxnSp>
-      <p:cxnSp>
-        <p:nvCxnSpPr>
-          <p:cNvPr id="122" name="u0_1" descr="Editable line; source id u0_1"/>
-          <p:cNvCxnSpPr/>
-          <p:nvPr/>
-        </p:nvCxnSpPr>
-        <p:spPr>
-          <a:xfrm>
-            <a:off x="1301749" y="7762874"/>
-            <a:ext cx="6683375" cy="0"/>
-          </a:xfrm>
-          <a:prstGeom prst="line">
-            <a:avLst/>
-          </a:prstGeom>
-          <a:ln w="14287">
-            <a:solidFill>
-              <a:srgbClr val="4B5563"/>
-            </a:solidFill>
-          </a:ln>
-          <a:effectLst/>
-        </p:spPr>
-        <p:style>
-          <a:lnRef idx="2">
-            <a:schemeClr val="accent1"/>
-          </a:lnRef>
-          <a:fillRef idx="0">
-            <a:schemeClr val="accent1"/>
-          </a:fillRef>
-          <a:effectRef idx="0">
-            <a:schemeClr val="accent1"/>
-          </a:effectRef>
-          <a:fontRef idx="minor">
-            <a:schemeClr val="tx1"/>
-          </a:fontRef>
-        </p:style>
-      </p:cxnSp>
-      <p:cxnSp>
-        <p:nvCxnSpPr>
-          <p:cNvPr id="123" name="u0_2" descr="Editable line; source id u0_2"/>
-          <p:cNvCxnSpPr/>
-          <p:nvPr/>
-        </p:nvCxnSpPr>
-        <p:spPr>
-          <a:xfrm flipV="1">
-            <a:off x="7985124" y="1412874"/>
-            <a:ext cx="0" cy="6350000"/>
-          </a:xfrm>
-          <a:prstGeom prst="line">
-            <a:avLst/>
-          </a:prstGeom>
-          <a:ln w="14287">
-            <a:solidFill>
-              <a:srgbClr val="4B5563"/>
-            </a:solidFill>
-          </a:ln>
-          <a:effectLst/>
-        </p:spPr>
-        <p:style>
-          <a:lnRef idx="2">
-            <a:schemeClr val="accent1"/>
-          </a:lnRef>
-          <a:fillRef idx="0">
-            <a:schemeClr val="accent1"/>
-          </a:fillRef>
-          <a:effectRef idx="0">
-            <a:schemeClr val="accent1"/>
-          </a:effectRef>
-          <a:fontRef idx="minor">
-            <a:schemeClr val="tx1"/>
-          </a:fontRef>
-        </p:style>
-      </p:cxnSp>
-      <p:sp>
-        <p:nvSpPr>
-          <p:cNvPr id="124" name="v_l1_0" descr="Editable line; source id v_l1_0"/>
-          <p:cNvSpPr/>
-          <p:nvPr/>
-        </p:nvSpPr>
-        <p:spPr>
-          <a:xfrm>
-            <a:off x="7985125" y="1373187"/>
-            <a:ext cx="317500" cy="79375"/>
-          </a:xfrm>
-          <a:custGeom>
-            <a:avLst/>
-            <a:gdLst/>
-            <a:ahLst/>
-            <a:cxnLst/>
-            <a:rect l="l" t="t" r="r" b="b"/>
-            <a:pathLst>
-              <a:path w="40000" h="10000">
-                <a:moveTo>
-                  <a:pt x="0" y="4100"/>
-                </a:moveTo>
-                <a:lnTo>
-                  <a:pt x="28000" y="4100"/>
-                </a:lnTo>
-                <a:lnTo>
-                  <a:pt x="28000" y="0"/>
-                </a:lnTo>
-                <a:lnTo>
-                  <a:pt x="40000" y="5000"/>
-                </a:lnTo>
-                <a:lnTo>
-                  <a:pt x="28000" y="10000"/>
-                </a:lnTo>
-                <a:lnTo>
-                  <a:pt x="28000" y="5900"/>
-                </a:lnTo>
-                <a:lnTo>
-                  <a:pt x="0" y="5900"/>
-                </a:lnTo>
-                <a:close/>
-              </a:path>
-            </a:pathLst>
-          </a:custGeom>
-          <a:solidFill>
-            <a:srgbClr val="4B5563"/>
-          </a:solidFill>
-          <a:ln>
-            <a:noFill/>
-          </a:ln>
-          <a:effectLst/>
-        </p:spPr>
-        <p:style>
-          <a:lnRef idx="1">
-            <a:schemeClr val="accent1"/>
-          </a:lnRef>
-          <a:fillRef idx="3">
-            <a:schemeClr val="accent1"/>
-          </a:fillRef>
-          <a:effectRef idx="0">
-            <a:schemeClr val="accent1"/>
-          </a:effectRef>
-          <a:fontRef idx="minor">
-            <a:schemeClr val="lt1"/>
-          </a:fontRef>
-        </p:style>
-        <p:txBody>
-          <a:bodyPr rtlCol="0" anchor="ctr"/>
-          <a:lstStyle/>
-          <a:p>
-            <a:pPr algn="ctr"/>
-          </a:p>
-        </p:txBody>
-      </p:sp>
-      <p:sp>
-        <p:nvSpPr>
-          <p:cNvPr id="125" name="v_l1_p" descr="Editable shape; source id v_l1_p"/>
-          <p:cNvSpPr/>
-          <p:nvPr/>
-        </p:nvSpPr>
-        <p:spPr>
-          <a:xfrm>
-            <a:off x="7866062" y="1015999"/>
-            <a:ext cx="555624" cy="293687"/>
-          </a:xfrm>
-          <a:prstGeom prst="roundRect">
-            <a:avLst>
-              <a:gd name="adj" fmla="val 50000"/>
-            </a:avLst>
-          </a:prstGeom>
-          <a:solidFill>
-            <a:srgbClr val="FFFFFF"/>
-          </a:solidFill>
-          <a:ln w="8731">
-            <a:solidFill>
-              <a:srgbClr val="CBD3DA"/>
-            </a:solidFill>
-          </a:ln>
-          <a:effectLst/>
-        </p:spPr>
-        <p:style>
-          <a:lnRef idx="1">
-            <a:schemeClr val="accent1"/>
-          </a:lnRef>
-          <a:fillRef idx="3">
-            <a:schemeClr val="accent1"/>
-          </a:fillRef>
-          <a:effectRef idx="0">
-            <a:schemeClr val="accent1"/>
-          </a:effectRef>
-          <a:fontRef idx="minor">
-            <a:schemeClr val="lt1"/>
-          </a:fontRef>
-        </p:style>
-        <p:txBody>
-          <a:bodyPr rtlCol="0" anchor="ctr"/>
-          <a:lstStyle/>
-          <a:p>
-            <a:pPr algn="ctr"/>
-          </a:p>
-        </p:txBody>
-      </p:sp>
-      <p:sp>
-        <p:nvSpPr>
-          <p:cNvPr id="126" name="v_l1_p_t" descr="Editable text; source id v_l1_p_t"/>
-          <p:cNvSpPr txBox="1"/>
-          <p:nvPr/>
-        </p:nvSpPr>
-        <p:spPr>
-          <a:xfrm>
-            <a:off x="7945437" y="1047749"/>
-            <a:ext cx="396874" cy="230187"/>
-          </a:xfrm>
-          <a:prstGeom prst="rect">
-            <a:avLst/>
-          </a:prstGeom>
-          <a:noFill/>
-          <a:effectLst/>
-        </p:spPr>
-        <p:txBody>
-          <a:bodyPr wrap="none" anchor="ctr" tIns="0" rIns="0" bIns="0" lIns="0" anchorCtr="0" vertOverflow="overflow">
-            <a:noAutofit/>
-          </a:bodyPr>
-          <a:lstStyle/>
-          <a:p>
-            <a:pPr algn="ctr" fontAlgn="base">
-              <a:lnSpc>
-                <a:spcPts val="1546"/>
-              </a:lnSpc>
-              <a:spcBef>
-                <a:spcPts val="0"/>
-              </a:spcBef>
-              <a:spcAft>
-                <a:spcPts val="0"/>
-              </a:spcAft>
-              <a:defRPr sz="1062" b="0" i="0" lang="zh-CN" dirty="0">
-                <a:solidFill>
-                  <a:srgbClr val="3F4854"/>
-                </a:solidFill>
-                <a:latin typeface="Noto Sans CJK SC"/>
-                <a:ea typeface="Noto Sans CJK SC"/>
-                <a:cs typeface="Noto Sans CJK SC"/>
-              </a:defRPr>
-            </a:pPr>
-            <a:r>
-              <a:rPr sz="1062" b="0" i="0" lang="zh-CN" dirty="0">
-                <a:solidFill>
-                  <a:srgbClr val="3F4854"/>
-                </a:solidFill>
-                <a:latin typeface="Noto Sans CJK SC"/>
-                <a:ea typeface="Noto Sans CJK SC"/>
-                <a:cs typeface="Noto Sans CJK SC"/>
-              </a:rPr>
-              <a:t>近邻</a:t>
-            </a:r>
-          </a:p>
-        </p:txBody>
-      </p:sp>
-      <p:sp>
-        <p:nvSpPr>
-          <p:cNvPr id="127" name="v_l2_0" descr="Editable line; source id v_l2_0"/>
-          <p:cNvSpPr/>
-          <p:nvPr/>
-        </p:nvSpPr>
-        <p:spPr>
-          <a:xfrm>
-            <a:off x="7985125" y="4008437"/>
-            <a:ext cx="317500" cy="79375"/>
-          </a:xfrm>
-          <a:custGeom>
-            <a:avLst/>
-            <a:gdLst/>
-            <a:ahLst/>
-            <a:cxnLst/>
-            <a:rect l="l" t="t" r="r" b="b"/>
-            <a:pathLst>
-              <a:path w="40000" h="10000">
-                <a:moveTo>
-                  <a:pt x="0" y="4100"/>
-                </a:moveTo>
-                <a:lnTo>
-                  <a:pt x="28000" y="4100"/>
-                </a:lnTo>
-                <a:lnTo>
-                  <a:pt x="28000" y="0"/>
-                </a:lnTo>
-                <a:lnTo>
-                  <a:pt x="40000" y="5000"/>
-                </a:lnTo>
-                <a:lnTo>
-                  <a:pt x="28000" y="10000"/>
-                </a:lnTo>
-                <a:lnTo>
-                  <a:pt x="28000" y="5900"/>
-                </a:lnTo>
-                <a:lnTo>
-                  <a:pt x="0" y="5900"/>
-                </a:lnTo>
-                <a:close/>
-              </a:path>
-            </a:pathLst>
-          </a:custGeom>
-          <a:solidFill>
-            <a:srgbClr val="4B5563"/>
-          </a:solidFill>
-          <a:ln>
-            <a:noFill/>
-          </a:ln>
-          <a:effectLst/>
-        </p:spPr>
-        <p:style>
-          <a:lnRef idx="1">
-            <a:schemeClr val="accent1"/>
-          </a:lnRef>
-          <a:fillRef idx="3">
-            <a:schemeClr val="accent1"/>
-          </a:fillRef>
-          <a:effectRef idx="0">
-            <a:schemeClr val="accent1"/>
-          </a:effectRef>
-          <a:fontRef idx="minor">
-            <a:schemeClr val="lt1"/>
-          </a:fontRef>
-        </p:style>
-        <p:txBody>
-          <a:bodyPr rtlCol="0" anchor="ctr"/>
-          <a:lstStyle/>
-          <a:p>
-            <a:pPr algn="ctr"/>
-          </a:p>
-        </p:txBody>
-      </p:sp>
-      <p:sp>
-        <p:nvSpPr>
-          <p:cNvPr id="128" name="v_l2_p" descr="Editable shape; source id v_l2_p"/>
-          <p:cNvSpPr/>
-          <p:nvPr/>
-        </p:nvSpPr>
-        <p:spPr>
-          <a:xfrm>
-            <a:off x="7866062" y="3651249"/>
-            <a:ext cx="555624" cy="293687"/>
-          </a:xfrm>
-          <a:prstGeom prst="roundRect">
-            <a:avLst>
-              <a:gd name="adj" fmla="val 50000"/>
-            </a:avLst>
-          </a:prstGeom>
-          <a:solidFill>
-            <a:srgbClr val="FFFFFF"/>
-          </a:solidFill>
-          <a:ln w="8731">
-            <a:solidFill>
-              <a:srgbClr val="CBD3DA"/>
-            </a:solidFill>
-          </a:ln>
-          <a:effectLst/>
-        </p:spPr>
-        <p:style>
-          <a:lnRef idx="1">
-            <a:schemeClr val="accent1"/>
-          </a:lnRef>
-          <a:fillRef idx="3">
-            <a:schemeClr val="accent1"/>
-          </a:fillRef>
-          <a:effectRef idx="0">
-            <a:schemeClr val="accent1"/>
-          </a:effectRef>
-          <a:fontRef idx="minor">
-            <a:schemeClr val="lt1"/>
-          </a:fontRef>
-        </p:style>
-        <p:txBody>
-          <a:bodyPr rtlCol="0" anchor="ctr"/>
-          <a:lstStyle/>
-          <a:p>
-            <a:pPr algn="ctr"/>
-          </a:p>
-        </p:txBody>
-      </p:sp>
-      <p:sp>
-        <p:nvSpPr>
-          <p:cNvPr id="129" name="v_l2_p_t" descr="Editable text; source id v_l2_p_t"/>
-          <p:cNvSpPr txBox="1"/>
-          <p:nvPr/>
-        </p:nvSpPr>
-        <p:spPr>
-          <a:xfrm>
-            <a:off x="7945437" y="3682999"/>
-            <a:ext cx="396874" cy="230187"/>
-          </a:xfrm>
-          <a:prstGeom prst="rect">
-            <a:avLst/>
-          </a:prstGeom>
-          <a:noFill/>
-          <a:effectLst/>
-        </p:spPr>
-        <p:txBody>
-          <a:bodyPr wrap="none" anchor="ctr" tIns="0" rIns="0" bIns="0" lIns="0" anchorCtr="0" vertOverflow="overflow">
-            <a:noAutofit/>
-          </a:bodyPr>
-          <a:lstStyle/>
-          <a:p>
-            <a:pPr algn="ctr" fontAlgn="base">
-              <a:lnSpc>
-                <a:spcPts val="1546"/>
-              </a:lnSpc>
-              <a:spcBef>
-                <a:spcPts val="0"/>
-              </a:spcBef>
-              <a:spcAft>
-                <a:spcPts val="0"/>
-              </a:spcAft>
-              <a:defRPr sz="1062" b="0" i="0" lang="zh-CN" dirty="0">
-                <a:solidFill>
-                  <a:srgbClr val="3F4854"/>
-                </a:solidFill>
-                <a:latin typeface="Noto Sans CJK SC"/>
-                <a:ea typeface="Noto Sans CJK SC"/>
-                <a:cs typeface="Noto Sans CJK SC"/>
-              </a:defRPr>
-            </a:pPr>
-            <a:r>
-              <a:rPr sz="1062" b="0" i="0" lang="zh-CN" dirty="0">
+              <a:rPr sz="1124" b="0" i="0" lang="zh-CN" dirty="0">
                 <a:solidFill>
                   <a:srgbClr val="3F4854"/>
                 </a:solidFill>
@@ -9542,14 +9120,14 @@
       </p:sp>
       <p:cxnSp>
         <p:nvCxnSpPr>
-          <p:cNvPr id="130" name="v_l3_0" descr="Editable line; source id v_l3_0"/>
+          <p:cNvPr id="120" name="v_l3_0" descr="Editable line; source id v_l3_0"/>
           <p:cNvCxnSpPr/>
           <p:nvPr/>
         </p:nvCxnSpPr>
         <p:spPr>
           <a:xfrm>
-            <a:off x="7985124" y="6683374"/>
-            <a:ext cx="317500" cy="0"/>
+            <a:off x="7143749" y="6429374"/>
+            <a:ext cx="603250" cy="0"/>
           </a:xfrm>
           <a:prstGeom prst="line">
             <a:avLst/>
@@ -9582,14 +9160,14 @@
       </p:cxnSp>
       <p:sp>
         <p:nvSpPr>
-          <p:cNvPr id="131" name="v_l3_p" descr="Editable shape; source id v_l3_p"/>
+          <p:cNvPr id="121" name="v_l3_p" descr="Editable shape; source id v_l3_p"/>
           <p:cNvSpPr/>
           <p:nvPr/>
         </p:nvSpPr>
         <p:spPr>
           <a:xfrm>
-            <a:off x="7866062" y="6286499"/>
-            <a:ext cx="555624" cy="293687"/>
+            <a:off x="7159624" y="5984874"/>
+            <a:ext cx="571499" cy="309562"/>
           </a:xfrm>
           <a:prstGeom prst="roundRect">
             <a:avLst>
@@ -9630,14 +9208,14 @@
       </p:sp>
       <p:sp>
         <p:nvSpPr>
-          <p:cNvPr id="132" name="v_l3_p_t" descr="Editable text; source id v_l3_p_t"/>
+          <p:cNvPr id="122" name="v_l3_p_t" descr="Editable text; source id v_l3_p_t"/>
           <p:cNvSpPr txBox="1"/>
           <p:nvPr/>
         </p:nvSpPr>
         <p:spPr>
           <a:xfrm>
-            <a:off x="7945437" y="6318249"/>
-            <a:ext cx="396874" cy="230187"/>
+            <a:off x="7238999" y="6016624"/>
+            <a:ext cx="412749" cy="246062"/>
           </a:xfrm>
           <a:prstGeom prst="rect">
             <a:avLst/>
@@ -9653,7 +9231,7 @@
           <a:p>
             <a:pPr algn="ctr" fontAlgn="base">
               <a:lnSpc>
-                <a:spcPts val="1546"/>
+                <a:spcPts val="1640"/>
               </a:lnSpc>
               <a:spcBef>
                 <a:spcPts val="0"/>
@@ -9661,7 +9239,7 @@
               <a:spcAft>
                 <a:spcPts val="0"/>
               </a:spcAft>
-              <a:defRPr sz="1062" b="0" i="0" lang="zh-CN" dirty="0">
+              <a:defRPr sz="1124" b="0" i="0" lang="zh-CN" dirty="0">
                 <a:solidFill>
                   <a:srgbClr val="7A5410"/>
                 </a:solidFill>
@@ -9671,7 +9249,7 @@
               </a:defRPr>
             </a:pPr>
             <a:r>
-              <a:rPr sz="1062" b="0" i="0" lang="zh-CN" dirty="0">
+              <a:rPr sz="1124" b="0" i="0" lang="zh-CN" dirty="0">
                 <a:solidFill>
                   <a:srgbClr val="7A5410"/>
                 </a:solidFill>

--- a/media/figstudio/bzso_taxonomy/taxonomy_phase_control_editable.pptx
+++ b/media/figstudio/bzso_taxonomy/taxonomy_phase_control_editable.pptx
@@ -3535,7 +3535,7 @@
           <a:solidFill>
             <a:srgbClr val="E6F2F3"/>
           </a:solidFill>
-          <a:ln w="9524">
+          <a:ln w="12699">
             <a:solidFill>
               <a:srgbClr val="1F7F8C"/>
             </a:solidFill>
@@ -3639,7 +3639,7 @@
           <a:solidFill>
             <a:srgbClr val="EEF2F7"/>
           </a:solidFill>
-          <a:ln w="9524">
+          <a:ln w="12699">
             <a:solidFill>
               <a:srgbClr val="5B7592"/>
             </a:solidFill>
@@ -3743,7 +3743,7 @@
           <a:solidFill>
             <a:srgbClr val="FFFFFF"/>
           </a:solidFill>
-          <a:ln w="11112">
+          <a:ln w="15081">
             <a:solidFill>
               <a:srgbClr val="1F7F8C"/>
             </a:solidFill>
@@ -3786,9 +3786,9 @@
           <a:prstGeom prst="line">
             <a:avLst/>
           </a:prstGeom>
-          <a:ln w="15874">
+          <a:ln w="21431">
             <a:solidFill>
-              <a:srgbClr val="1F2937"/>
+              <a:srgbClr val="111A24"/>
             </a:solidFill>
           </a:ln>
           <a:effectLst/>
@@ -3822,9 +3822,9 @@
           <a:prstGeom prst="line">
             <a:avLst/>
           </a:prstGeom>
-          <a:ln w="15874">
+          <a:ln w="21431">
             <a:solidFill>
-              <a:srgbClr val="1F2937"/>
+              <a:srgbClr val="111A24"/>
             </a:solidFill>
           </a:ln>
           <a:effectLst/>
@@ -3858,9 +3858,9 @@
           <a:prstGeom prst="line">
             <a:avLst/>
           </a:prstGeom>
-          <a:ln w="15874">
+          <a:ln w="21431">
             <a:solidFill>
-              <a:srgbClr val="1F2937"/>
+              <a:srgbClr val="111A24"/>
             </a:solidFill>
           </a:ln>
           <a:effectLst/>
@@ -3894,9 +3894,9 @@
           <a:prstGeom prst="line">
             <a:avLst/>
           </a:prstGeom>
-          <a:ln w="15874">
+          <a:ln w="21431">
             <a:solidFill>
-              <a:srgbClr val="1F2937"/>
+              <a:srgbClr val="111A24"/>
             </a:solidFill>
           </a:ln>
           <a:effectLst/>
@@ -3930,9 +3930,9 @@
           <a:prstGeom prst="line">
             <a:avLst/>
           </a:prstGeom>
-          <a:ln w="15874">
+          <a:ln w="21431">
             <a:solidFill>
-              <a:srgbClr val="1F2937"/>
+              <a:srgbClr val="111A24"/>
             </a:solidFill>
           </a:ln>
           <a:effectLst/>
@@ -3966,9 +3966,9 @@
           <a:prstGeom prst="line">
             <a:avLst/>
           </a:prstGeom>
-          <a:ln w="15874">
+          <a:ln w="21431">
             <a:solidFill>
-              <a:srgbClr val="1F2937"/>
+              <a:srgbClr val="111A24"/>
             </a:solidFill>
           </a:ln>
           <a:effectLst/>
@@ -4179,7 +4179,7 @@
             <a:avLst/>
           </a:prstGeom>
           <a:solidFill>
-            <a:srgbClr val="1F2937"/>
+            <a:srgbClr val="111A24"/>
           </a:solidFill>
           <a:ln>
             <a:noFill/>
@@ -4473,7 +4473,7 @@
               <a:spcAft>
                 <a:spcPts val="0"/>
               </a:spcAft>
-              <a:defRPr sz="1249" b="0" i="0" lang="zh-CN" dirty="0">
+              <a:defRPr sz="1249" b="1" i="0" lang="zh-CN" dirty="0">
                 <a:solidFill>
                   <a:srgbClr val="0F4F58"/>
                 </a:solidFill>
@@ -4483,7 +4483,7 @@
               </a:defRPr>
             </a:pPr>
             <a:r>
-              <a:rPr sz="1249" b="0" i="0" lang="zh-CN" dirty="0">
+              <a:rPr sz="1249" b="1" i="0" lang="zh-CN" dirty="0">
                 <a:solidFill>
                   <a:srgbClr val="0F4F58"/>
                 </a:solidFill>
@@ -4515,7 +4515,7 @@
           <a:solidFill>
             <a:srgbClr val="FFFFFF"/>
           </a:solidFill>
-          <a:ln w="11112">
+          <a:ln w="15081">
             <a:solidFill>
               <a:srgbClr val="1F7F8C"/>
             </a:solidFill>
@@ -4604,9 +4604,9 @@
           <a:prstGeom prst="line">
             <a:avLst/>
           </a:prstGeom>
-          <a:ln w="8572">
+          <a:ln w="18216">
             <a:solidFill>
-              <a:srgbClr val="1F2937"/>
+              <a:srgbClr val="111A24"/>
             </a:solidFill>
           </a:ln>
           <a:effectLst/>
@@ -4640,9 +4640,9 @@
           <a:prstGeom prst="line">
             <a:avLst/>
           </a:prstGeom>
-          <a:ln w="8572">
+          <a:ln w="18216">
             <a:solidFill>
-              <a:srgbClr val="1F2937"/>
+              <a:srgbClr val="111A24"/>
             </a:solidFill>
           </a:ln>
           <a:effectLst/>
@@ -4676,9 +4676,9 @@
           <a:prstGeom prst="line">
             <a:avLst/>
           </a:prstGeom>
-          <a:ln w="8572">
+          <a:ln w="18216">
             <a:solidFill>
-              <a:srgbClr val="1F2937"/>
+              <a:srgbClr val="111A24"/>
             </a:solidFill>
           </a:ln>
           <a:effectLst/>
@@ -4712,9 +4712,9 @@
           <a:prstGeom prst="line">
             <a:avLst/>
           </a:prstGeom>
-          <a:ln w="8572">
+          <a:ln w="18216">
             <a:solidFill>
-              <a:srgbClr val="1F2937"/>
+              <a:srgbClr val="111A24"/>
             </a:solidFill>
           </a:ln>
           <a:effectLst/>
@@ -4748,9 +4748,9 @@
           <a:prstGeom prst="line">
             <a:avLst/>
           </a:prstGeom>
-          <a:ln w="8572">
+          <a:ln w="18216">
             <a:solidFill>
-              <a:srgbClr val="1F2937"/>
+              <a:srgbClr val="111A24"/>
             </a:solidFill>
           </a:ln>
           <a:effectLst/>
@@ -4784,9 +4784,9 @@
           <a:prstGeom prst="line">
             <a:avLst/>
           </a:prstGeom>
-          <a:ln w="8572">
+          <a:ln w="18216">
             <a:solidFill>
-              <a:srgbClr val="1F2937"/>
+              <a:srgbClr val="111A24"/>
             </a:solidFill>
           </a:ln>
           <a:effectLst/>
@@ -4997,7 +4997,7 @@
             <a:avLst/>
           </a:prstGeom>
           <a:solidFill>
-            <a:srgbClr val="1F2937"/>
+            <a:srgbClr val="111A24"/>
           </a:solidFill>
           <a:ln>
             <a:noFill/>
@@ -5291,9 +5291,9 @@
               <a:spcAft>
                 <a:spcPts val="0"/>
               </a:spcAft>
-              <a:defRPr sz="1249" b="0" i="0" lang="zh-CN" dirty="0">
+              <a:defRPr sz="1249" b="1" i="0" lang="zh-CN" dirty="0">
                 <a:solidFill>
-                  <a:srgbClr val="3F4854"/>
+                  <a:srgbClr val="27303A"/>
                 </a:solidFill>
                 <a:latin typeface="Noto Sans CJK SC"/>
                 <a:ea typeface="Noto Sans CJK SC"/>
@@ -5301,9 +5301,9 @@
               </a:defRPr>
             </a:pPr>
             <a:r>
-              <a:rPr sz="1249" b="0" i="0" lang="zh-CN" dirty="0">
+              <a:rPr sz="1249" b="1" i="0" lang="zh-CN" dirty="0">
                 <a:solidFill>
-                  <a:srgbClr val="3F4854"/>
+                  <a:srgbClr val="27303A"/>
                 </a:solidFill>
                 <a:latin typeface="Noto Sans CJK SC"/>
                 <a:ea typeface="Noto Sans CJK SC"/>
@@ -5312,9 +5312,9 @@
               <a:t>相变</a:t>
             </a:r>
             <a:r>
-              <a:rPr sz="1249" b="0" i="0" lang="zh-CN" dirty="0">
+              <a:rPr sz="1249" b="1" i="0" lang="zh-CN" dirty="0">
                 <a:solidFill>
-                  <a:srgbClr val="3F4854"/>
+                  <a:srgbClr val="27303A"/>
                 </a:solidFill>
                 <a:latin typeface="DejaVu Sans"/>
                 <a:ea typeface="DejaVu Sans"/>
@@ -5323,9 +5323,9 @@
               <a:t> · </a:t>
             </a:r>
             <a:r>
-              <a:rPr sz="1249" b="0" i="0" lang="zh-CN" dirty="0">
+              <a:rPr sz="1249" b="1" i="0" lang="zh-CN" dirty="0">
                 <a:solidFill>
-                  <a:srgbClr val="3F4854"/>
+                  <a:srgbClr val="27303A"/>
                 </a:solidFill>
                 <a:latin typeface="Noto Sans CJK SC"/>
                 <a:ea typeface="Noto Sans CJK SC"/>
@@ -5355,7 +5355,7 @@
           <a:solidFill>
             <a:srgbClr val="FFFFFF"/>
           </a:solidFill>
-          <a:ln w="11112">
+          <a:ln w="15081">
             <a:solidFill>
               <a:srgbClr val="1F7F8C"/>
             </a:solidFill>
@@ -5444,9 +5444,9 @@
           <a:prstGeom prst="line">
             <a:avLst/>
           </a:prstGeom>
-          <a:ln w="8572">
+          <a:ln w="18216">
             <a:solidFill>
-              <a:srgbClr val="1F2937"/>
+              <a:srgbClr val="111A24"/>
             </a:solidFill>
           </a:ln>
           <a:effectLst/>
@@ -5480,9 +5480,9 @@
           <a:prstGeom prst="line">
             <a:avLst/>
           </a:prstGeom>
-          <a:ln w="8572">
+          <a:ln w="18216">
             <a:solidFill>
-              <a:srgbClr val="1F2937"/>
+              <a:srgbClr val="111A24"/>
             </a:solidFill>
           </a:ln>
           <a:effectLst/>
@@ -5516,9 +5516,9 @@
           <a:prstGeom prst="line">
             <a:avLst/>
           </a:prstGeom>
-          <a:ln w="8572">
+          <a:ln w="18216">
             <a:solidFill>
-              <a:srgbClr val="1F2937"/>
+              <a:srgbClr val="111A24"/>
             </a:solidFill>
           </a:ln>
           <a:effectLst/>
@@ -5552,9 +5552,9 @@
           <a:prstGeom prst="line">
             <a:avLst/>
           </a:prstGeom>
-          <a:ln w="8572">
+          <a:ln w="18216">
             <a:solidFill>
-              <a:srgbClr val="1F2937"/>
+              <a:srgbClr val="111A24"/>
             </a:solidFill>
           </a:ln>
           <a:effectLst/>
@@ -5588,9 +5588,9 @@
           <a:prstGeom prst="line">
             <a:avLst/>
           </a:prstGeom>
-          <a:ln w="8572">
+          <a:ln w="18216">
             <a:solidFill>
-              <a:srgbClr val="1F2937"/>
+              <a:srgbClr val="111A24"/>
             </a:solidFill>
           </a:ln>
           <a:effectLst/>
@@ -5624,9 +5624,9 @@
           <a:prstGeom prst="line">
             <a:avLst/>
           </a:prstGeom>
-          <a:ln w="8572">
+          <a:ln w="18216">
             <a:solidFill>
-              <a:srgbClr val="1F2937"/>
+              <a:srgbClr val="111A24"/>
             </a:solidFill>
           </a:ln>
           <a:effectLst/>
@@ -5661,9 +5661,9 @@
             <a:avLst/>
           </a:prstGeom>
           <a:noFill/>
-          <a:ln w="8572">
+          <a:ln w="18216">
             <a:solidFill>
-              <a:srgbClr val="1F2937"/>
+              <a:srgbClr val="111A24"/>
             </a:solidFill>
           </a:ln>
           <a:effectLst/>
@@ -5705,9 +5705,9 @@
             <a:avLst/>
           </a:prstGeom>
           <a:noFill/>
-          <a:ln w="8572">
+          <a:ln w="18216">
             <a:solidFill>
-              <a:srgbClr val="1F2937"/>
+              <a:srgbClr val="111A24"/>
             </a:solidFill>
           </a:ln>
           <a:effectLst/>
@@ -5823,9 +5823,9 @@
               <a:spcAft>
                 <a:spcPts val="0"/>
               </a:spcAft>
-              <a:defRPr sz="1249" b="0" i="0" lang="zh-CN" dirty="0">
+              <a:defRPr sz="1249" b="1" i="0" lang="zh-CN" dirty="0">
                 <a:solidFill>
-                  <a:srgbClr val="3F4854"/>
+                  <a:srgbClr val="27303A"/>
                 </a:solidFill>
                 <a:latin typeface="Noto Sans CJK SC"/>
                 <a:ea typeface="Noto Sans CJK SC"/>
@@ -5833,9 +5833,9 @@
               </a:defRPr>
             </a:pPr>
             <a:r>
-              <a:rPr sz="1249" b="0" i="0" lang="zh-CN" dirty="0">
+              <a:rPr sz="1249" b="1" i="0" lang="zh-CN" dirty="0">
                 <a:solidFill>
-                  <a:srgbClr val="3F4854"/>
+                  <a:srgbClr val="27303A"/>
                 </a:solidFill>
                 <a:latin typeface="Noto Sans CJK SC"/>
                 <a:ea typeface="Noto Sans CJK SC"/>
@@ -5844,9 +5844,9 @@
               <a:t>固相</a:t>
             </a:r>
             <a:r>
-              <a:rPr sz="1249" b="0" i="0" lang="zh-CN" dirty="0">
+              <a:rPr sz="1249" b="1" i="0" lang="zh-CN" dirty="0">
                 <a:solidFill>
-                  <a:srgbClr val="3F4854"/>
+                  <a:srgbClr val="27303A"/>
                 </a:solidFill>
                 <a:latin typeface="DejaVu Sans"/>
                 <a:ea typeface="DejaVu Sans"/>
@@ -5855,9 +5855,9 @@
               <a:t> · </a:t>
             </a:r>
             <a:r>
-              <a:rPr sz="1249" b="0" i="0" lang="zh-CN" dirty="0">
+              <a:rPr sz="1249" b="1" i="0" lang="zh-CN" dirty="0">
                 <a:solidFill>
-                  <a:srgbClr val="3F4854"/>
+                  <a:srgbClr val="27303A"/>
                 </a:solidFill>
                 <a:latin typeface="Noto Sans CJK SC"/>
                 <a:ea typeface="Noto Sans CJK SC"/>
@@ -5866,9 +5866,9 @@
               <a:t>溶胶</a:t>
             </a:r>
             <a:r>
-              <a:rPr sz="1249" b="0" i="0" lang="zh-CN" dirty="0">
+              <a:rPr sz="1249" b="1" i="0" lang="zh-CN" dirty="0">
                 <a:solidFill>
-                  <a:srgbClr val="3F4854"/>
+                  <a:srgbClr val="27303A"/>
                 </a:solidFill>
                 <a:latin typeface="DejaVu Sans"/>
                 <a:ea typeface="DejaVu Sans"/>
@@ -5877,9 +5877,9 @@
               <a:t>—</a:t>
             </a:r>
             <a:r>
-              <a:rPr sz="1249" b="0" i="0" lang="zh-CN" dirty="0">
+              <a:rPr sz="1249" b="1" i="0" lang="zh-CN" dirty="0">
                 <a:solidFill>
-                  <a:srgbClr val="3F4854"/>
+                  <a:srgbClr val="27303A"/>
                 </a:solidFill>
                 <a:latin typeface="Noto Sans CJK SC"/>
                 <a:ea typeface="Noto Sans CJK SC"/>
@@ -5909,7 +5909,7 @@
           <a:solidFill>
             <a:srgbClr val="FFFFFF"/>
           </a:solidFill>
-          <a:ln w="11112">
+          <a:ln w="15081">
             <a:solidFill>
               <a:srgbClr val="1F7F8C"/>
             </a:solidFill>
@@ -6001,9 +6001,9 @@
             </a:avLst>
           </a:prstGeom>
           <a:noFill/>
-          <a:ln w="8572">
+          <a:ln w="18216">
             <a:solidFill>
-              <a:srgbClr val="1F2937"/>
+              <a:srgbClr val="111A24"/>
             </a:solidFill>
           </a:ln>
           <a:effectLst/>
@@ -6045,9 +6045,9 @@
             <a:avLst/>
           </a:prstGeom>
           <a:noFill/>
-          <a:ln w="8572">
+          <a:ln w="18216">
             <a:solidFill>
-              <a:srgbClr val="1F2937"/>
+              <a:srgbClr val="111A24"/>
             </a:solidFill>
           </a:ln>
           <a:effectLst/>
@@ -6088,9 +6088,9 @@
           <a:prstGeom prst="line">
             <a:avLst/>
           </a:prstGeom>
-          <a:ln w="8572">
+          <a:ln w="18216">
             <a:solidFill>
-              <a:srgbClr val="1F2937"/>
+              <a:srgbClr val="111A24"/>
             </a:solidFill>
           </a:ln>
           <a:effectLst/>
@@ -6124,9 +6124,9 @@
           <a:prstGeom prst="line">
             <a:avLst/>
           </a:prstGeom>
-          <a:ln w="8572">
+          <a:ln w="18216">
             <a:solidFill>
-              <a:srgbClr val="1F2937"/>
+              <a:srgbClr val="111A24"/>
             </a:solidFill>
           </a:ln>
           <a:effectLst/>
@@ -6160,9 +6160,9 @@
           <a:prstGeom prst="line">
             <a:avLst/>
           </a:prstGeom>
-          <a:ln w="8572">
+          <a:ln w="18216">
             <a:solidFill>
-              <a:srgbClr val="1F2937"/>
+              <a:srgbClr val="111A24"/>
             </a:solidFill>
           </a:ln>
           <a:effectLst/>
@@ -6271,9 +6271,9 @@
               <a:spcAft>
                 <a:spcPts val="0"/>
               </a:spcAft>
-              <a:defRPr sz="1249" b="0" i="0" lang="zh-CN" dirty="0">
+              <a:defRPr sz="1249" b="1" i="0" lang="zh-CN" dirty="0">
                 <a:solidFill>
-                  <a:srgbClr val="3F4854"/>
+                  <a:srgbClr val="27303A"/>
                 </a:solidFill>
                 <a:latin typeface="DejaVu Sans"/>
                 <a:ea typeface="DejaVu Sans"/>
@@ -6281,9 +6281,9 @@
               </a:defRPr>
             </a:pPr>
             <a:r>
-              <a:rPr sz="1249" b="0" i="0" lang="zh-CN" dirty="0">
+              <a:rPr sz="1249" b="1" i="0" lang="zh-CN" dirty="0">
                 <a:solidFill>
-                  <a:srgbClr val="3F4854"/>
+                  <a:srgbClr val="27303A"/>
                 </a:solidFill>
                 <a:latin typeface="DejaVu Sans"/>
                 <a:ea typeface="DejaVu Sans"/>
@@ -6292,9 +6292,9 @@
               <a:t>Ba/Sr · Zn </a:t>
             </a:r>
             <a:r>
-              <a:rPr sz="1249" b="0" i="0" lang="zh-CN" dirty="0">
+              <a:rPr sz="1249" b="1" i="0" lang="zh-CN" dirty="0">
                 <a:solidFill>
-                  <a:srgbClr val="3F4854"/>
+                  <a:srgbClr val="27303A"/>
                 </a:solidFill>
                 <a:latin typeface="Noto Sans CJK SC"/>
                 <a:ea typeface="Noto Sans CJK SC"/>
@@ -6324,7 +6324,7 @@
           <a:solidFill>
             <a:srgbClr val="FFFFFF"/>
           </a:solidFill>
-          <a:ln w="11112">
+          <a:ln w="15081">
             <a:solidFill>
               <a:srgbClr val="1F7F8C"/>
             </a:solidFill>
@@ -6413,9 +6413,9 @@
           <a:prstGeom prst="line">
             <a:avLst/>
           </a:prstGeom>
-          <a:ln w="8572">
+          <a:ln w="18216">
             <a:solidFill>
-              <a:srgbClr val="1F2937"/>
+              <a:srgbClr val="111A24"/>
             </a:solidFill>
           </a:ln>
           <a:effectLst/>
@@ -6449,9 +6449,9 @@
           <a:prstGeom prst="line">
             <a:avLst/>
           </a:prstGeom>
-          <a:ln w="8572">
+          <a:ln w="18216">
             <a:solidFill>
-              <a:srgbClr val="1F2937"/>
+              <a:srgbClr val="111A24"/>
             </a:solidFill>
           </a:ln>
           <a:effectLst/>
@@ -6485,9 +6485,9 @@
           <a:prstGeom prst="line">
             <a:avLst/>
           </a:prstGeom>
-          <a:ln w="8572">
+          <a:ln w="18216">
             <a:solidFill>
-              <a:srgbClr val="1F2937"/>
+              <a:srgbClr val="111A24"/>
             </a:solidFill>
           </a:ln>
           <a:effectLst/>
@@ -6521,9 +6521,9 @@
           <a:prstGeom prst="line">
             <a:avLst/>
           </a:prstGeom>
-          <a:ln w="8572">
+          <a:ln w="18216">
             <a:solidFill>
-              <a:srgbClr val="1F2937"/>
+              <a:srgbClr val="111A24"/>
             </a:solidFill>
           </a:ln>
           <a:effectLst/>
@@ -6557,9 +6557,9 @@
           <a:prstGeom prst="line">
             <a:avLst/>
           </a:prstGeom>
-          <a:ln w="8572">
+          <a:ln w="18216">
             <a:solidFill>
-              <a:srgbClr val="1F2937"/>
+              <a:srgbClr val="111A24"/>
             </a:solidFill>
           </a:ln>
           <a:effectLst/>
@@ -6593,9 +6593,9 @@
           <a:prstGeom prst="line">
             <a:avLst/>
           </a:prstGeom>
-          <a:ln w="8572">
+          <a:ln w="18216">
             <a:solidFill>
-              <a:srgbClr val="1F2937"/>
+              <a:srgbClr val="111A24"/>
             </a:solidFill>
           </a:ln>
           <a:effectLst/>
@@ -6629,9 +6629,9 @@
           <a:prstGeom prst="line">
             <a:avLst/>
           </a:prstGeom>
-          <a:ln w="8572">
+          <a:ln w="18216">
             <a:solidFill>
-              <a:srgbClr val="1F2937"/>
+              <a:srgbClr val="111A24"/>
             </a:solidFill>
           </a:ln>
           <a:effectLst/>
@@ -6665,9 +6665,9 @@
           <a:prstGeom prst="line">
             <a:avLst/>
           </a:prstGeom>
-          <a:ln w="8572">
+          <a:ln w="18216">
             <a:solidFill>
-              <a:srgbClr val="1F2937"/>
+              <a:srgbClr val="111A24"/>
             </a:solidFill>
           </a:ln>
           <a:effectLst/>
@@ -6776,9 +6776,9 @@
               <a:spcAft>
                 <a:spcPts val="0"/>
               </a:spcAft>
-              <a:defRPr sz="1249" b="0" i="0" lang="zh-CN" dirty="0">
+              <a:defRPr sz="1249" b="1" i="0" lang="zh-CN" dirty="0">
                 <a:solidFill>
-                  <a:srgbClr val="3F4854"/>
+                  <a:srgbClr val="27303A"/>
                 </a:solidFill>
                 <a:latin typeface="Noto Sans CJK SC"/>
                 <a:ea typeface="Noto Sans CJK SC"/>
@@ -6786,9 +6786,9 @@
               </a:defRPr>
             </a:pPr>
             <a:r>
-              <a:rPr sz="1249" b="0" i="0" lang="zh-CN" dirty="0">
+              <a:rPr sz="1249" b="1" i="0" lang="zh-CN" dirty="0">
                 <a:solidFill>
-                  <a:srgbClr val="3F4854"/>
+                  <a:srgbClr val="27303A"/>
                 </a:solidFill>
                 <a:latin typeface="Noto Sans CJK SC"/>
                 <a:ea typeface="Noto Sans CJK SC"/>
@@ -6797,9 +6797,9 @@
               <a:t>成核</a:t>
             </a:r>
             <a:r>
-              <a:rPr sz="1249" b="0" i="0" lang="zh-CN" dirty="0">
+              <a:rPr sz="1249" b="1" i="0" lang="zh-CN" dirty="0">
                 <a:solidFill>
-                  <a:srgbClr val="3F4854"/>
+                  <a:srgbClr val="27303A"/>
                 </a:solidFill>
                 <a:latin typeface="DejaVu Sans"/>
                 <a:ea typeface="DejaVu Sans"/>
@@ -6808,9 +6808,9 @@
               <a:t> · </a:t>
             </a:r>
             <a:r>
-              <a:rPr sz="1249" b="0" i="0" lang="zh-CN" dirty="0">
+              <a:rPr sz="1249" b="1" i="0" lang="zh-CN" dirty="0">
                 <a:solidFill>
-                  <a:srgbClr val="3F4854"/>
+                  <a:srgbClr val="27303A"/>
                 </a:solidFill>
                 <a:latin typeface="Noto Sans CJK SC"/>
                 <a:ea typeface="Noto Sans CJK SC"/>
@@ -6840,7 +6840,7 @@
           <a:solidFill>
             <a:srgbClr val="FFFFFF"/>
           </a:solidFill>
-          <a:ln w="11112">
+          <a:ln w="15081">
             <a:solidFill>
               <a:srgbClr val="5B7592"/>
             </a:solidFill>
@@ -6930,9 +6930,9 @@
             <a:avLst/>
           </a:prstGeom>
           <a:noFill/>
-          <a:ln w="8572">
+          <a:ln w="18216">
             <a:solidFill>
-              <a:srgbClr val="1F2937"/>
+              <a:srgbClr val="111A24"/>
             </a:solidFill>
           </a:ln>
           <a:effectLst/>
@@ -6974,9 +6974,9 @@
             <a:avLst/>
           </a:prstGeom>
           <a:noFill/>
-          <a:ln w="8572">
+          <a:ln w="18216">
             <a:solidFill>
-              <a:srgbClr val="1F2937"/>
+              <a:srgbClr val="111A24"/>
             </a:solidFill>
           </a:ln>
           <a:effectLst/>
@@ -7018,9 +7018,9 @@
             <a:avLst/>
           </a:prstGeom>
           <a:noFill/>
-          <a:ln w="8572">
+          <a:ln w="18216">
             <a:solidFill>
-              <a:srgbClr val="1F2937"/>
+              <a:srgbClr val="111A24"/>
             </a:solidFill>
           </a:ln>
           <a:effectLst/>
@@ -7061,9 +7061,9 @@
           <a:prstGeom prst="line">
             <a:avLst/>
           </a:prstGeom>
-          <a:ln w="8572">
+          <a:ln w="18216">
             <a:solidFill>
-              <a:srgbClr val="1F2937"/>
+              <a:srgbClr val="111A24"/>
             </a:solidFill>
           </a:ln>
           <a:effectLst/>
@@ -7097,9 +7097,9 @@
           <a:prstGeom prst="line">
             <a:avLst/>
           </a:prstGeom>
-          <a:ln w="8572">
+          <a:ln w="18216">
             <a:solidFill>
-              <a:srgbClr val="1F2937"/>
+              <a:srgbClr val="111A24"/>
             </a:solidFill>
           </a:ln>
           <a:effectLst/>
@@ -7208,9 +7208,9 @@
               <a:spcAft>
                 <a:spcPts val="0"/>
               </a:spcAft>
-              <a:defRPr sz="1249" b="0" i="0" lang="zh-CN" dirty="0">
+              <a:defRPr sz="1249" b="1" i="0" lang="zh-CN" dirty="0">
                 <a:solidFill>
-                  <a:srgbClr val="3F4854"/>
+                  <a:srgbClr val="27303A"/>
                 </a:solidFill>
                 <a:latin typeface="DejaVu Sans"/>
                 <a:ea typeface="DejaVu Sans"/>
@@ -7218,9 +7218,9 @@
               </a:defRPr>
             </a:pPr>
             <a:r>
-              <a:rPr sz="1249" b="0" i="0" lang="zh-CN" dirty="0">
+              <a:rPr sz="1249" b="1" i="0" lang="zh-CN" dirty="0">
                 <a:solidFill>
-                  <a:srgbClr val="3F4854"/>
+                  <a:srgbClr val="27303A"/>
                 </a:solidFill>
                 <a:latin typeface="DejaVu Sans"/>
                 <a:ea typeface="DejaVu Sans"/>
@@ -7229,9 +7229,9 @@
               <a:t>Ba2ZnSi2O7 </a:t>
             </a:r>
             <a:r>
-              <a:rPr sz="1249" b="0" i="0" lang="zh-CN" dirty="0">
+              <a:rPr sz="1249" b="1" i="0" lang="zh-CN" dirty="0">
                 <a:solidFill>
-                  <a:srgbClr val="3F4854"/>
+                  <a:srgbClr val="27303A"/>
                 </a:solidFill>
                 <a:latin typeface="Noto Sans CJK SC"/>
                 <a:ea typeface="Noto Sans CJK SC"/>
@@ -7261,7 +7261,7 @@
           <a:solidFill>
             <a:srgbClr val="FFFFFF"/>
           </a:solidFill>
-          <a:ln w="11112">
+          <a:ln w="15081">
             <a:solidFill>
               <a:srgbClr val="5B7592"/>
             </a:solidFill>
@@ -7351,12 +7351,12 @@
             <a:avLst/>
           </a:prstGeom>
           <a:noFill/>
-          <a:ln w="8572">
+          <a:ln w="18216">
             <a:solidFill>
-              <a:srgbClr val="1F2937"/>
+              <a:srgbClr val="111A24"/>
             </a:solidFill>
             <a:custDash>
-              <a:ds d="350000" sp="300000"/>
+              <a:ds d="164706" sp="141176"/>
             </a:custDash>
           </a:ln>
           <a:effectLst/>
@@ -7472,9 +7472,9 @@
               <a:spcAft>
                 <a:spcPts val="0"/>
               </a:spcAft>
-              <a:defRPr sz="1249" b="0" i="0" lang="zh-CN" dirty="0">
+              <a:defRPr sz="1249" b="1" i="0" lang="zh-CN" dirty="0">
                 <a:solidFill>
-                  <a:srgbClr val="3F4854"/>
+                  <a:srgbClr val="27303A"/>
                 </a:solidFill>
                 <a:latin typeface="Noto Sans CJK SC"/>
                 <a:ea typeface="Noto Sans CJK SC"/>
@@ -7482,9 +7482,9 @@
               </a:defRPr>
             </a:pPr>
             <a:r>
-              <a:rPr sz="1249" b="0" i="0" lang="zh-CN" dirty="0">
+              <a:rPr sz="1249" b="1" i="0" lang="zh-CN" dirty="0">
                 <a:solidFill>
-                  <a:srgbClr val="3F4854"/>
+                  <a:srgbClr val="27303A"/>
                 </a:solidFill>
                 <a:latin typeface="Noto Sans CJK SC"/>
                 <a:ea typeface="Noto Sans CJK SC"/>
@@ -7493,9 +7493,9 @@
               <a:t>直接</a:t>
             </a:r>
             <a:r>
-              <a:rPr sz="1249" b="0" i="0" lang="zh-CN" dirty="0">
+              <a:rPr sz="1249" b="1" i="0" lang="zh-CN" dirty="0">
                 <a:solidFill>
-                  <a:srgbClr val="3F4854"/>
+                  <a:srgbClr val="27303A"/>
                 </a:solidFill>
                 <a:latin typeface="DejaVu Sans"/>
                 <a:ea typeface="DejaVu Sans"/>
@@ -7504,9 +7504,9 @@
               <a:t> / </a:t>
             </a:r>
             <a:r>
-              <a:rPr sz="1249" b="0" i="0" lang="zh-CN" dirty="0">
+              <a:rPr sz="1249" b="1" i="0" lang="zh-CN" dirty="0">
                 <a:solidFill>
-                  <a:srgbClr val="3F4854"/>
+                  <a:srgbClr val="27303A"/>
                 </a:solidFill>
                 <a:latin typeface="Noto Sans CJK SC"/>
                 <a:ea typeface="Noto Sans CJK SC"/>
@@ -7515,9 +7515,9 @@
               <a:t>近邻</a:t>
             </a:r>
             <a:r>
-              <a:rPr sz="1249" b="0" i="0" lang="zh-CN" dirty="0">
+              <a:rPr sz="1249" b="1" i="0" lang="zh-CN" dirty="0">
                 <a:solidFill>
-                  <a:srgbClr val="3F4854"/>
+                  <a:srgbClr val="27303A"/>
                 </a:solidFill>
                 <a:latin typeface="DejaVu Sans"/>
                 <a:ea typeface="DejaVu Sans"/>
@@ -7526,9 +7526,9 @@
               <a:t> / </a:t>
             </a:r>
             <a:r>
-              <a:rPr sz="1249" b="0" i="0" lang="zh-CN" dirty="0">
+              <a:rPr sz="1249" b="1" i="0" lang="zh-CN" dirty="0">
                 <a:solidFill>
-                  <a:srgbClr val="3F4854"/>
+                  <a:srgbClr val="27303A"/>
                 </a:solidFill>
                 <a:latin typeface="Noto Sans CJK SC"/>
                 <a:ea typeface="Noto Sans CJK SC"/>
@@ -7558,12 +7558,12 @@
           <a:solidFill>
             <a:srgbClr val="FFFAF0"/>
           </a:solidFill>
-          <a:ln w="11112">
+          <a:ln w="15081">
             <a:solidFill>
               <a:srgbClr val="C48A24"/>
             </a:solidFill>
             <a:custDash>
-              <a:ds d="857143" sp="571429"/>
+              <a:ds d="631579" sp="421053"/>
             </a:custDash>
           </a:ln>
           <a:effectLst/>
@@ -7605,9 +7605,9 @@
             <a:avLst/>
           </a:prstGeom>
           <a:noFill/>
-          <a:ln w="8572">
+          <a:ln w="18216">
             <a:solidFill>
-              <a:srgbClr val="1F2937"/>
+              <a:srgbClr val="111A24"/>
             </a:solidFill>
           </a:ln>
           <a:effectLst/>
@@ -7649,9 +7649,9 @@
             <a:avLst/>
           </a:prstGeom>
           <a:noFill/>
-          <a:ln w="8572">
+          <a:ln w="18216">
             <a:solidFill>
-              <a:srgbClr val="1F2937"/>
+              <a:srgbClr val="111A24"/>
             </a:solidFill>
           </a:ln>
           <a:effectLst/>
@@ -7693,9 +7693,9 @@
             <a:avLst/>
           </a:prstGeom>
           <a:noFill/>
-          <a:ln w="8572">
+          <a:ln w="18216">
             <a:solidFill>
-              <a:srgbClr val="1F2937"/>
+              <a:srgbClr val="111A24"/>
             </a:solidFill>
           </a:ln>
           <a:effectLst/>
@@ -7736,9 +7736,9 @@
           <a:prstGeom prst="line">
             <a:avLst/>
           </a:prstGeom>
-          <a:ln w="8572">
+          <a:ln w="18216">
             <a:solidFill>
-              <a:srgbClr val="1F2937"/>
+              <a:srgbClr val="111A24"/>
             </a:solidFill>
           </a:ln>
           <a:effectLst/>
@@ -7772,9 +7772,9 @@
           <a:prstGeom prst="line">
             <a:avLst/>
           </a:prstGeom>
-          <a:ln w="8572">
+          <a:ln w="18216">
             <a:solidFill>
-              <a:srgbClr val="1F2937"/>
+              <a:srgbClr val="111A24"/>
             </a:solidFill>
           </a:ln>
           <a:effectLst/>
@@ -7883,9 +7883,9 @@
               <a:spcAft>
                 <a:spcPts val="0"/>
               </a:spcAft>
-              <a:defRPr sz="1249" b="0" i="0" lang="zh-CN" dirty="0">
+              <a:defRPr sz="1249" b="1" i="0" lang="zh-CN" dirty="0">
                 <a:solidFill>
-                  <a:srgbClr val="3F4854"/>
+                  <a:srgbClr val="27303A"/>
                 </a:solidFill>
                 <a:latin typeface="Noto Sans CJK SC"/>
                 <a:ea typeface="Noto Sans CJK SC"/>
@@ -7893,9 +7893,9 @@
               </a:defRPr>
             </a:pPr>
             <a:r>
-              <a:rPr sz="1249" b="0" i="0" lang="zh-CN" dirty="0">
+              <a:rPr sz="1249" b="1" i="0" lang="zh-CN" dirty="0">
                 <a:solidFill>
-                  <a:srgbClr val="3F4854"/>
+                  <a:srgbClr val="27303A"/>
                 </a:solidFill>
                 <a:latin typeface="Noto Sans CJK SC"/>
                 <a:ea typeface="Noto Sans CJK SC"/>
@@ -7920,9 +7920,9 @@
           <a:prstGeom prst="line">
             <a:avLst/>
           </a:prstGeom>
-          <a:ln w="14287">
+          <a:ln w="19843">
             <a:solidFill>
-              <a:srgbClr val="4B5563"/>
+              <a:srgbClr val="3C4753"/>
             </a:solidFill>
           </a:ln>
           <a:effectLst/>
@@ -7956,9 +7956,9 @@
           <a:prstGeom prst="line">
             <a:avLst/>
           </a:prstGeom>
-          <a:ln w="14287">
+          <a:ln w="19843">
             <a:solidFill>
-              <a:srgbClr val="4B5563"/>
+              <a:srgbClr val="3C4753"/>
             </a:solidFill>
           </a:ln>
           <a:effectLst/>
@@ -7986,8 +7986,8 @@
         </p:nvSpPr>
         <p:spPr>
           <a:xfrm>
-            <a:off x="4206875" y="1611312"/>
-            <a:ext cx="555625" cy="79375"/>
+            <a:off x="4206875" y="1603375"/>
+            <a:ext cx="555625" cy="95250"/>
           </a:xfrm>
           <a:custGeom>
             <a:avLst/>
@@ -7996,27 +7996,811 @@
             <a:cxnLst/>
             <a:rect l="l" t="t" r="r" b="b"/>
             <a:pathLst>
-              <a:path w="70000" h="10000">
+              <a:path w="70000" h="12000">
                 <a:moveTo>
-                  <a:pt x="70000" y="5900"/>
+                  <a:pt x="70000" y="7250"/>
                 </a:moveTo>
                 <a:lnTo>
-                  <a:pt x="12000" y="5900"/>
+                  <a:pt x="15000" y="7250"/>
                 </a:lnTo>
                 <a:lnTo>
-                  <a:pt x="12000" y="10000"/>
+                  <a:pt x="15000" y="12000"/>
                 </a:lnTo>
                 <a:lnTo>
-                  <a:pt x="0" y="5000"/>
+                  <a:pt x="0" y="6000"/>
                 </a:lnTo>
                 <a:lnTo>
-                  <a:pt x="12000" y="0"/>
+                  <a:pt x="15000" y="0"/>
                 </a:lnTo>
                 <a:lnTo>
-                  <a:pt x="12000" y="4100"/>
+                  <a:pt x="15000" y="4750"/>
                 </a:lnTo>
                 <a:lnTo>
-                  <a:pt x="70000" y="4100"/>
+                  <a:pt x="70000" y="4750"/>
+                </a:lnTo>
+                <a:close/>
+              </a:path>
+            </a:pathLst>
+          </a:custGeom>
+          <a:solidFill>
+            <a:srgbClr val="3C4753"/>
+          </a:solidFill>
+          <a:ln>
+            <a:noFill/>
+          </a:ln>
+          <a:effectLst/>
+        </p:spPr>
+        <p:style>
+          <a:lnRef idx="1">
+            <a:schemeClr val="accent1"/>
+          </a:lnRef>
+          <a:fillRef idx="3">
+            <a:schemeClr val="accent1"/>
+          </a:fillRef>
+          <a:effectRef idx="0">
+            <a:schemeClr val="accent1"/>
+          </a:effectRef>
+          <a:fontRef idx="minor">
+            <a:schemeClr val="lt1"/>
+          </a:fontRef>
+        </p:style>
+        <p:txBody>
+          <a:bodyPr rtlCol="0" anchor="ctr"/>
+          <a:lstStyle/>
+          <a:p>
+            <a:pPr algn="ctr"/>
+          </a:p>
+        </p:txBody>
+      </p:sp>
+      <p:sp>
+        <p:nvSpPr>
+          <p:cNvPr id="101" name="s_e1_p" descr="Editable shape; source id s_e1_p"/>
+          <p:cNvSpPr/>
+          <p:nvPr/>
+        </p:nvSpPr>
+        <p:spPr>
+          <a:xfrm>
+            <a:off x="4198937" y="1206499"/>
+            <a:ext cx="571499" cy="309562"/>
+          </a:xfrm>
+          <a:prstGeom prst="roundRect">
+            <a:avLst>
+              <a:gd name="adj" fmla="val 50000"/>
+            </a:avLst>
+          </a:prstGeom>
+          <a:solidFill>
+            <a:srgbClr val="FFFFFF"/>
+          </a:solidFill>
+          <a:ln w="12699">
+            <a:solidFill>
+              <a:srgbClr val="CBD3DA"/>
+            </a:solidFill>
+          </a:ln>
+          <a:effectLst/>
+        </p:spPr>
+        <p:style>
+          <a:lnRef idx="1">
+            <a:schemeClr val="accent1"/>
+          </a:lnRef>
+          <a:fillRef idx="3">
+            <a:schemeClr val="accent1"/>
+          </a:fillRef>
+          <a:effectRef idx="0">
+            <a:schemeClr val="accent1"/>
+          </a:effectRef>
+          <a:fontRef idx="minor">
+            <a:schemeClr val="lt1"/>
+          </a:fontRef>
+        </p:style>
+        <p:txBody>
+          <a:bodyPr rtlCol="0" anchor="ctr"/>
+          <a:lstStyle/>
+          <a:p>
+            <a:pPr algn="ctr"/>
+          </a:p>
+        </p:txBody>
+      </p:sp>
+      <p:sp>
+        <p:nvSpPr>
+          <p:cNvPr id="102" name="s_e1_p_t" descr="Editable text; source id s_e1_p_t"/>
+          <p:cNvSpPr txBox="1"/>
+          <p:nvPr/>
+        </p:nvSpPr>
+        <p:spPr>
+          <a:xfrm>
+            <a:off x="4278312" y="1238249"/>
+            <a:ext cx="412749" cy="246062"/>
+          </a:xfrm>
+          <a:prstGeom prst="rect">
+            <a:avLst/>
+          </a:prstGeom>
+          <a:noFill/>
+          <a:effectLst/>
+        </p:spPr>
+        <p:txBody>
+          <a:bodyPr wrap="none" anchor="ctr" tIns="0" rIns="0" bIns="0" lIns="0" anchorCtr="0" vertOverflow="overflow">
+            <a:noAutofit/>
+          </a:bodyPr>
+          <a:lstStyle/>
+          <a:p>
+            <a:pPr algn="ctr" fontAlgn="base">
+              <a:lnSpc>
+                <a:spcPts val="1640"/>
+              </a:lnSpc>
+              <a:spcBef>
+                <a:spcPts val="0"/>
+              </a:spcBef>
+              <a:spcAft>
+                <a:spcPts val="0"/>
+              </a:spcAft>
+              <a:defRPr sz="1124" b="1" i="0" lang="zh-CN" dirty="0">
+                <a:solidFill>
+                  <a:srgbClr val="27303A"/>
+                </a:solidFill>
+                <a:latin typeface="Noto Sans CJK SC"/>
+                <a:ea typeface="Noto Sans CJK SC"/>
+                <a:cs typeface="Noto Sans CJK SC"/>
+              </a:defRPr>
+            </a:pPr>
+            <a:r>
+              <a:rPr sz="1124" b="1" i="0" lang="zh-CN" dirty="0">
+                <a:solidFill>
+                  <a:srgbClr val="27303A"/>
+                </a:solidFill>
+                <a:latin typeface="Noto Sans CJK SC"/>
+                <a:ea typeface="Noto Sans CJK SC"/>
+                <a:cs typeface="Noto Sans CJK SC"/>
+              </a:rPr>
+              <a:t>结构</a:t>
+            </a:r>
+          </a:p>
+        </p:txBody>
+      </p:sp>
+      <p:sp>
+        <p:nvSpPr>
+          <p:cNvPr id="103" name="s_e2_0" descr="Editable line; source id s_e2_0"/>
+          <p:cNvSpPr/>
+          <p:nvPr/>
+        </p:nvSpPr>
+        <p:spPr>
+          <a:xfrm>
+            <a:off x="4206875" y="3270250"/>
+            <a:ext cx="555625" cy="95250"/>
+          </a:xfrm>
+          <a:custGeom>
+            <a:avLst/>
+            <a:gdLst/>
+            <a:ahLst/>
+            <a:cxnLst/>
+            <a:rect l="l" t="t" r="r" b="b"/>
+            <a:pathLst>
+              <a:path w="70000" h="12000">
+                <a:moveTo>
+                  <a:pt x="70000" y="7250"/>
+                </a:moveTo>
+                <a:lnTo>
+                  <a:pt x="15000" y="7250"/>
+                </a:lnTo>
+                <a:lnTo>
+                  <a:pt x="15000" y="12000"/>
+                </a:lnTo>
+                <a:lnTo>
+                  <a:pt x="0" y="6000"/>
+                </a:lnTo>
+                <a:lnTo>
+                  <a:pt x="15000" y="0"/>
+                </a:lnTo>
+                <a:lnTo>
+                  <a:pt x="15000" y="4750"/>
+                </a:lnTo>
+                <a:lnTo>
+                  <a:pt x="70000" y="4750"/>
+                </a:lnTo>
+                <a:close/>
+              </a:path>
+            </a:pathLst>
+          </a:custGeom>
+          <a:solidFill>
+            <a:srgbClr val="3C4753"/>
+          </a:solidFill>
+          <a:ln>
+            <a:noFill/>
+          </a:ln>
+          <a:effectLst/>
+        </p:spPr>
+        <p:style>
+          <a:lnRef idx="1">
+            <a:schemeClr val="accent1"/>
+          </a:lnRef>
+          <a:fillRef idx="3">
+            <a:schemeClr val="accent1"/>
+          </a:fillRef>
+          <a:effectRef idx="0">
+            <a:schemeClr val="accent1"/>
+          </a:effectRef>
+          <a:fontRef idx="minor">
+            <a:schemeClr val="lt1"/>
+          </a:fontRef>
+        </p:style>
+        <p:txBody>
+          <a:bodyPr rtlCol="0" anchor="ctr"/>
+          <a:lstStyle/>
+          <a:p>
+            <a:pPr algn="ctr"/>
+          </a:p>
+        </p:txBody>
+      </p:sp>
+      <p:sp>
+        <p:nvSpPr>
+          <p:cNvPr id="104" name="s_e2_p" descr="Editable shape; source id s_e2_p"/>
+          <p:cNvSpPr/>
+          <p:nvPr/>
+        </p:nvSpPr>
+        <p:spPr>
+          <a:xfrm>
+            <a:off x="4198937" y="2873374"/>
+            <a:ext cx="571499" cy="309562"/>
+          </a:xfrm>
+          <a:prstGeom prst="roundRect">
+            <a:avLst>
+              <a:gd name="adj" fmla="val 50000"/>
+            </a:avLst>
+          </a:prstGeom>
+          <a:solidFill>
+            <a:srgbClr val="FFFFFF"/>
+          </a:solidFill>
+          <a:ln w="12699">
+            <a:solidFill>
+              <a:srgbClr val="CBD3DA"/>
+            </a:solidFill>
+          </a:ln>
+          <a:effectLst/>
+        </p:spPr>
+        <p:style>
+          <a:lnRef idx="1">
+            <a:schemeClr val="accent1"/>
+          </a:lnRef>
+          <a:fillRef idx="3">
+            <a:schemeClr val="accent1"/>
+          </a:fillRef>
+          <a:effectRef idx="0">
+            <a:schemeClr val="accent1"/>
+          </a:effectRef>
+          <a:fontRef idx="minor">
+            <a:schemeClr val="lt1"/>
+          </a:fontRef>
+        </p:style>
+        <p:txBody>
+          <a:bodyPr rtlCol="0" anchor="ctr"/>
+          <a:lstStyle/>
+          <a:p>
+            <a:pPr algn="ctr"/>
+          </a:p>
+        </p:txBody>
+      </p:sp>
+      <p:sp>
+        <p:nvSpPr>
+          <p:cNvPr id="105" name="s_e2_p_t" descr="Editable text; source id s_e2_p_t"/>
+          <p:cNvSpPr txBox="1"/>
+          <p:nvPr/>
+        </p:nvSpPr>
+        <p:spPr>
+          <a:xfrm>
+            <a:off x="4278312" y="2905124"/>
+            <a:ext cx="412749" cy="246062"/>
+          </a:xfrm>
+          <a:prstGeom prst="rect">
+            <a:avLst/>
+          </a:prstGeom>
+          <a:noFill/>
+          <a:effectLst/>
+        </p:spPr>
+        <p:txBody>
+          <a:bodyPr wrap="none" anchor="ctr" tIns="0" rIns="0" bIns="0" lIns="0" anchorCtr="0" vertOverflow="overflow">
+            <a:noAutofit/>
+          </a:bodyPr>
+          <a:lstStyle/>
+          <a:p>
+            <a:pPr algn="ctr" fontAlgn="base">
+              <a:lnSpc>
+                <a:spcPts val="1640"/>
+              </a:lnSpc>
+              <a:spcBef>
+                <a:spcPts val="0"/>
+              </a:spcBef>
+              <a:spcAft>
+                <a:spcPts val="0"/>
+              </a:spcAft>
+              <a:defRPr sz="1124" b="1" i="0" lang="zh-CN" dirty="0">
+                <a:solidFill>
+                  <a:srgbClr val="27303A"/>
+                </a:solidFill>
+                <a:latin typeface="Noto Sans CJK SC"/>
+                <a:ea typeface="Noto Sans CJK SC"/>
+                <a:cs typeface="Noto Sans CJK SC"/>
+              </a:defRPr>
+            </a:pPr>
+            <a:r>
+              <a:rPr sz="1124" b="1" i="0" lang="zh-CN" dirty="0">
+                <a:solidFill>
+                  <a:srgbClr val="27303A"/>
+                </a:solidFill>
+                <a:latin typeface="Noto Sans CJK SC"/>
+                <a:ea typeface="Noto Sans CJK SC"/>
+                <a:cs typeface="Noto Sans CJK SC"/>
+              </a:rPr>
+              <a:t>制备</a:t>
+            </a:r>
+          </a:p>
+        </p:txBody>
+      </p:sp>
+      <p:sp>
+        <p:nvSpPr>
+          <p:cNvPr id="106" name="s_e3_0" descr="Editable line; source id s_e3_0"/>
+          <p:cNvSpPr/>
+          <p:nvPr/>
+        </p:nvSpPr>
+        <p:spPr>
+          <a:xfrm>
+            <a:off x="4206875" y="4937125"/>
+            <a:ext cx="555625" cy="95250"/>
+          </a:xfrm>
+          <a:custGeom>
+            <a:avLst/>
+            <a:gdLst/>
+            <a:ahLst/>
+            <a:cxnLst/>
+            <a:rect l="l" t="t" r="r" b="b"/>
+            <a:pathLst>
+              <a:path w="70000" h="12000">
+                <a:moveTo>
+                  <a:pt x="70000" y="7250"/>
+                </a:moveTo>
+                <a:lnTo>
+                  <a:pt x="15000" y="7250"/>
+                </a:lnTo>
+                <a:lnTo>
+                  <a:pt x="15000" y="12000"/>
+                </a:lnTo>
+                <a:lnTo>
+                  <a:pt x="0" y="6000"/>
+                </a:lnTo>
+                <a:lnTo>
+                  <a:pt x="15000" y="0"/>
+                </a:lnTo>
+                <a:lnTo>
+                  <a:pt x="15000" y="4750"/>
+                </a:lnTo>
+                <a:lnTo>
+                  <a:pt x="70000" y="4750"/>
+                </a:lnTo>
+                <a:close/>
+              </a:path>
+            </a:pathLst>
+          </a:custGeom>
+          <a:solidFill>
+            <a:srgbClr val="3C4753"/>
+          </a:solidFill>
+          <a:ln>
+            <a:noFill/>
+          </a:ln>
+          <a:effectLst/>
+        </p:spPr>
+        <p:style>
+          <a:lnRef idx="1">
+            <a:schemeClr val="accent1"/>
+          </a:lnRef>
+          <a:fillRef idx="3">
+            <a:schemeClr val="accent1"/>
+          </a:fillRef>
+          <a:effectRef idx="0">
+            <a:schemeClr val="accent1"/>
+          </a:effectRef>
+          <a:fontRef idx="minor">
+            <a:schemeClr val="lt1"/>
+          </a:fontRef>
+        </p:style>
+        <p:txBody>
+          <a:bodyPr rtlCol="0" anchor="ctr"/>
+          <a:lstStyle/>
+          <a:p>
+            <a:pPr algn="ctr"/>
+          </a:p>
+        </p:txBody>
+      </p:sp>
+      <p:sp>
+        <p:nvSpPr>
+          <p:cNvPr id="107" name="s_e3_p" descr="Editable shape; source id s_e3_p"/>
+          <p:cNvSpPr/>
+          <p:nvPr/>
+        </p:nvSpPr>
+        <p:spPr>
+          <a:xfrm>
+            <a:off x="4198937" y="4540249"/>
+            <a:ext cx="571499" cy="309562"/>
+          </a:xfrm>
+          <a:prstGeom prst="roundRect">
+            <a:avLst>
+              <a:gd name="adj" fmla="val 50000"/>
+            </a:avLst>
+          </a:prstGeom>
+          <a:solidFill>
+            <a:srgbClr val="FFFFFF"/>
+          </a:solidFill>
+          <a:ln w="12699">
+            <a:solidFill>
+              <a:srgbClr val="CBD3DA"/>
+            </a:solidFill>
+          </a:ln>
+          <a:effectLst/>
+        </p:spPr>
+        <p:style>
+          <a:lnRef idx="1">
+            <a:schemeClr val="accent1"/>
+          </a:lnRef>
+          <a:fillRef idx="3">
+            <a:schemeClr val="accent1"/>
+          </a:fillRef>
+          <a:effectRef idx="0">
+            <a:schemeClr val="accent1"/>
+          </a:effectRef>
+          <a:fontRef idx="minor">
+            <a:schemeClr val="lt1"/>
+          </a:fontRef>
+        </p:style>
+        <p:txBody>
+          <a:bodyPr rtlCol="0" anchor="ctr"/>
+          <a:lstStyle/>
+          <a:p>
+            <a:pPr algn="ctr"/>
+          </a:p>
+        </p:txBody>
+      </p:sp>
+      <p:sp>
+        <p:nvSpPr>
+          <p:cNvPr id="108" name="s_e3_p_t" descr="Editable text; source id s_e3_p_t"/>
+          <p:cNvSpPr txBox="1"/>
+          <p:nvPr/>
+        </p:nvSpPr>
+        <p:spPr>
+          <a:xfrm>
+            <a:off x="4278312" y="4571999"/>
+            <a:ext cx="412749" cy="246062"/>
+          </a:xfrm>
+          <a:prstGeom prst="rect">
+            <a:avLst/>
+          </a:prstGeom>
+          <a:noFill/>
+          <a:effectLst/>
+        </p:spPr>
+        <p:txBody>
+          <a:bodyPr wrap="none" anchor="ctr" tIns="0" rIns="0" bIns="0" lIns="0" anchorCtr="0" vertOverflow="overflow">
+            <a:noAutofit/>
+          </a:bodyPr>
+          <a:lstStyle/>
+          <a:p>
+            <a:pPr algn="ctr" fontAlgn="base">
+              <a:lnSpc>
+                <a:spcPts val="1640"/>
+              </a:lnSpc>
+              <a:spcBef>
+                <a:spcPts val="0"/>
+              </a:spcBef>
+              <a:spcAft>
+                <a:spcPts val="0"/>
+              </a:spcAft>
+              <a:defRPr sz="1124" b="1" i="0" lang="zh-CN" dirty="0">
+                <a:solidFill>
+                  <a:srgbClr val="27303A"/>
+                </a:solidFill>
+                <a:latin typeface="Noto Sans CJK SC"/>
+                <a:ea typeface="Noto Sans CJK SC"/>
+                <a:cs typeface="Noto Sans CJK SC"/>
+              </a:defRPr>
+            </a:pPr>
+            <a:r>
+              <a:rPr sz="1124" b="1" i="0" lang="zh-CN" dirty="0">
+                <a:solidFill>
+                  <a:srgbClr val="27303A"/>
+                </a:solidFill>
+                <a:latin typeface="Noto Sans CJK SC"/>
+                <a:ea typeface="Noto Sans CJK SC"/>
+                <a:cs typeface="Noto Sans CJK SC"/>
+              </a:rPr>
+              <a:t>变量</a:t>
+            </a:r>
+          </a:p>
+        </p:txBody>
+      </p:sp>
+      <p:sp>
+        <p:nvSpPr>
+          <p:cNvPr id="109" name="s_e4_0" descr="Editable line; source id s_e4_0"/>
+          <p:cNvSpPr/>
+          <p:nvPr/>
+        </p:nvSpPr>
+        <p:spPr>
+          <a:xfrm>
+            <a:off x="4206875" y="6604000"/>
+            <a:ext cx="555625" cy="95250"/>
+          </a:xfrm>
+          <a:custGeom>
+            <a:avLst/>
+            <a:gdLst/>
+            <a:ahLst/>
+            <a:cxnLst/>
+            <a:rect l="l" t="t" r="r" b="b"/>
+            <a:pathLst>
+              <a:path w="70000" h="12000">
+                <a:moveTo>
+                  <a:pt x="70000" y="7250"/>
+                </a:moveTo>
+                <a:lnTo>
+                  <a:pt x="15000" y="7250"/>
+                </a:lnTo>
+                <a:lnTo>
+                  <a:pt x="15000" y="12000"/>
+                </a:lnTo>
+                <a:lnTo>
+                  <a:pt x="0" y="6000"/>
+                </a:lnTo>
+                <a:lnTo>
+                  <a:pt x="15000" y="0"/>
+                </a:lnTo>
+                <a:lnTo>
+                  <a:pt x="15000" y="4750"/>
+                </a:lnTo>
+                <a:lnTo>
+                  <a:pt x="70000" y="4750"/>
+                </a:lnTo>
+                <a:close/>
+              </a:path>
+            </a:pathLst>
+          </a:custGeom>
+          <a:solidFill>
+            <a:srgbClr val="3C4753"/>
+          </a:solidFill>
+          <a:ln>
+            <a:noFill/>
+          </a:ln>
+          <a:effectLst/>
+        </p:spPr>
+        <p:style>
+          <a:lnRef idx="1">
+            <a:schemeClr val="accent1"/>
+          </a:lnRef>
+          <a:fillRef idx="3">
+            <a:schemeClr val="accent1"/>
+          </a:fillRef>
+          <a:effectRef idx="0">
+            <a:schemeClr val="accent1"/>
+          </a:effectRef>
+          <a:fontRef idx="minor">
+            <a:schemeClr val="lt1"/>
+          </a:fontRef>
+        </p:style>
+        <p:txBody>
+          <a:bodyPr rtlCol="0" anchor="ctr"/>
+          <a:lstStyle/>
+          <a:p>
+            <a:pPr algn="ctr"/>
+          </a:p>
+        </p:txBody>
+      </p:sp>
+      <p:sp>
+        <p:nvSpPr>
+          <p:cNvPr id="110" name="s_e4_p" descr="Editable shape; source id s_e4_p"/>
+          <p:cNvSpPr/>
+          <p:nvPr/>
+        </p:nvSpPr>
+        <p:spPr>
+          <a:xfrm>
+            <a:off x="4198937" y="6207124"/>
+            <a:ext cx="571499" cy="309562"/>
+          </a:xfrm>
+          <a:prstGeom prst="roundRect">
+            <a:avLst>
+              <a:gd name="adj" fmla="val 50000"/>
+            </a:avLst>
+          </a:prstGeom>
+          <a:solidFill>
+            <a:srgbClr val="FFFFFF"/>
+          </a:solidFill>
+          <a:ln w="12699">
+            <a:solidFill>
+              <a:srgbClr val="CBD3DA"/>
+            </a:solidFill>
+          </a:ln>
+          <a:effectLst/>
+        </p:spPr>
+        <p:style>
+          <a:lnRef idx="1">
+            <a:schemeClr val="accent1"/>
+          </a:lnRef>
+          <a:fillRef idx="3">
+            <a:schemeClr val="accent1"/>
+          </a:fillRef>
+          <a:effectRef idx="0">
+            <a:schemeClr val="accent1"/>
+          </a:effectRef>
+          <a:fontRef idx="minor">
+            <a:schemeClr val="lt1"/>
+          </a:fontRef>
+        </p:style>
+        <p:txBody>
+          <a:bodyPr rtlCol="0" anchor="ctr"/>
+          <a:lstStyle/>
+          <a:p>
+            <a:pPr algn="ctr"/>
+          </a:p>
+        </p:txBody>
+      </p:sp>
+      <p:sp>
+        <p:nvSpPr>
+          <p:cNvPr id="111" name="s_e4_p_t" descr="Editable text; source id s_e4_p_t"/>
+          <p:cNvSpPr txBox="1"/>
+          <p:nvPr/>
+        </p:nvSpPr>
+        <p:spPr>
+          <a:xfrm>
+            <a:off x="4278312" y="6238874"/>
+            <a:ext cx="412749" cy="246062"/>
+          </a:xfrm>
+          <a:prstGeom prst="rect">
+            <a:avLst/>
+          </a:prstGeom>
+          <a:noFill/>
+          <a:effectLst/>
+        </p:spPr>
+        <p:txBody>
+          <a:bodyPr wrap="none" anchor="ctr" tIns="0" rIns="0" bIns="0" lIns="0" anchorCtr="0" vertOverflow="overflow">
+            <a:noAutofit/>
+          </a:bodyPr>
+          <a:lstStyle/>
+          <a:p>
+            <a:pPr algn="ctr" fontAlgn="base">
+              <a:lnSpc>
+                <a:spcPts val="1640"/>
+              </a:lnSpc>
+              <a:spcBef>
+                <a:spcPts val="0"/>
+              </a:spcBef>
+              <a:spcAft>
+                <a:spcPts val="0"/>
+              </a:spcAft>
+              <a:defRPr sz="1124" b="1" i="0" lang="zh-CN" dirty="0">
+                <a:solidFill>
+                  <a:srgbClr val="27303A"/>
+                </a:solidFill>
+                <a:latin typeface="Noto Sans CJK SC"/>
+                <a:ea typeface="Noto Sans CJK SC"/>
+                <a:cs typeface="Noto Sans CJK SC"/>
+              </a:defRPr>
+            </a:pPr>
+            <a:r>
+              <a:rPr sz="1124" b="1" i="0" lang="zh-CN" dirty="0">
+                <a:solidFill>
+                  <a:srgbClr val="27303A"/>
+                </a:solidFill>
+                <a:latin typeface="Noto Sans CJK SC"/>
+                <a:ea typeface="Noto Sans CJK SC"/>
+                <a:cs typeface="Noto Sans CJK SC"/>
+              </a:rPr>
+              <a:t>晶化</a:t>
+            </a:r>
+          </a:p>
+        </p:txBody>
+      </p:sp>
+      <p:cxnSp>
+        <p:nvCxnSpPr>
+          <p:cNvPr id="112" name="sr_0" descr="Editable line; source id sr_0"/>
+          <p:cNvCxnSpPr/>
+          <p:nvPr/>
+        </p:nvCxnSpPr>
+        <p:spPr>
+          <a:xfrm>
+            <a:off x="7000874" y="4063999"/>
+            <a:ext cx="142875" cy="0"/>
+          </a:xfrm>
+          <a:prstGeom prst="line">
+            <a:avLst/>
+          </a:prstGeom>
+          <a:ln w="19843">
+            <a:solidFill>
+              <a:srgbClr val="3C4753"/>
+            </a:solidFill>
+          </a:ln>
+          <a:effectLst/>
+        </p:spPr>
+        <p:style>
+          <a:lnRef idx="2">
+            <a:schemeClr val="accent1"/>
+          </a:lnRef>
+          <a:fillRef idx="0">
+            <a:schemeClr val="accent1"/>
+          </a:fillRef>
+          <a:effectRef idx="0">
+            <a:schemeClr val="accent1"/>
+          </a:effectRef>
+          <a:fontRef idx="minor">
+            <a:schemeClr val="tx1"/>
+          </a:fontRef>
+        </p:style>
+      </p:cxnSp>
+      <p:cxnSp>
+        <p:nvCxnSpPr>
+          <p:cNvPr id="113" name="srv_0" descr="Editable line; source id srv_0"/>
+          <p:cNvCxnSpPr/>
+          <p:nvPr/>
+        </p:nvCxnSpPr>
+        <p:spPr>
+          <a:xfrm>
+            <a:off x="7143749" y="1984374"/>
+            <a:ext cx="0" cy="4445000"/>
+          </a:xfrm>
+          <a:prstGeom prst="line">
+            <a:avLst/>
+          </a:prstGeom>
+          <a:ln w="19843">
+            <a:solidFill>
+              <a:srgbClr val="3C4753"/>
+            </a:solidFill>
+          </a:ln>
+          <a:effectLst/>
+        </p:spPr>
+        <p:style>
+          <a:lnRef idx="2">
+            <a:schemeClr val="accent1"/>
+          </a:lnRef>
+          <a:fillRef idx="0">
+            <a:schemeClr val="accent1"/>
+          </a:fillRef>
+          <a:effectRef idx="0">
+            <a:schemeClr val="accent1"/>
+          </a:effectRef>
+          <a:fontRef idx="minor">
+            <a:schemeClr val="tx1"/>
+          </a:fontRef>
+        </p:style>
+      </p:cxnSp>
+      <p:sp>
+        <p:nvSpPr>
+          <p:cNvPr id="114" name="v_l1_0" descr="Editable line; source id v_l1_0"/>
+          <p:cNvSpPr/>
+          <p:nvPr/>
+        </p:nvSpPr>
+        <p:spPr>
+          <a:xfrm>
+            <a:off x="7143750" y="1936750"/>
+            <a:ext cx="603250" cy="95250"/>
+          </a:xfrm>
+          <a:custGeom>
+            <a:avLst/>
+            <a:gdLst/>
+            <a:ahLst/>
+            <a:cxnLst/>
+            <a:rect l="l" t="t" r="r" b="b"/>
+            <a:pathLst>
+              <a:path w="76000" h="12000">
+                <a:moveTo>
+                  <a:pt x="0" y="4750"/>
+                </a:moveTo>
+                <a:lnTo>
+                  <a:pt x="61000" y="4750"/>
+                </a:lnTo>
+                <a:lnTo>
+                  <a:pt x="61000" y="0"/>
+                </a:lnTo>
+                <a:lnTo>
+                  <a:pt x="76000" y="6000"/>
+                </a:lnTo>
+                <a:lnTo>
+                  <a:pt x="61000" y="12000"/>
+                </a:lnTo>
+                <a:lnTo>
+                  <a:pt x="61000" y="7250"/>
+                </a:lnTo>
+                <a:lnTo>
+                  <a:pt x="0" y="7250"/>
                 </a:lnTo>
                 <a:close/>
               </a:path>
@@ -8054,13 +8838,13 @@
       </p:sp>
       <p:sp>
         <p:nvSpPr>
-          <p:cNvPr id="101" name="s_e1_p" descr="Editable shape; source id s_e1_p"/>
+          <p:cNvPr id="115" name="v_l1_p" descr="Editable shape; source id v_l1_p"/>
           <p:cNvSpPr/>
           <p:nvPr/>
         </p:nvSpPr>
         <p:spPr>
           <a:xfrm>
-            <a:off x="4198937" y="1206499"/>
+            <a:off x="7159624" y="1539874"/>
             <a:ext cx="571499" cy="309562"/>
           </a:xfrm>
           <a:prstGeom prst="roundRect">
@@ -8071,7 +8855,7 @@
           <a:solidFill>
             <a:srgbClr val="FFFFFF"/>
           </a:solidFill>
-          <a:ln w="8731">
+          <a:ln w="12699">
             <a:solidFill>
               <a:srgbClr val="CBD3DA"/>
             </a:solidFill>
@@ -8102,13 +8886,13 @@
       </p:sp>
       <p:sp>
         <p:nvSpPr>
-          <p:cNvPr id="102" name="s_e1_p_t" descr="Editable text; source id s_e1_p_t"/>
+          <p:cNvPr id="116" name="v_l1_p_t" descr="Editable text; source id v_l1_p_t"/>
           <p:cNvSpPr txBox="1"/>
           <p:nvPr/>
         </p:nvSpPr>
         <p:spPr>
           <a:xfrm>
-            <a:off x="4278312" y="1238249"/>
+            <a:off x="7238999" y="1571624"/>
             <a:ext cx="412749" cy="246062"/>
           </a:xfrm>
           <a:prstGeom prst="rect">
@@ -8133,9 +8917,9 @@
               <a:spcAft>
                 <a:spcPts val="0"/>
               </a:spcAft>
-              <a:defRPr sz="1124" b="0" i="0" lang="zh-CN" dirty="0">
+              <a:defRPr sz="1124" b="1" i="0" lang="zh-CN" dirty="0">
                 <a:solidFill>
-                  <a:srgbClr val="3F4854"/>
+                  <a:srgbClr val="27303A"/>
                 </a:solidFill>
                 <a:latin typeface="Noto Sans CJK SC"/>
                 <a:ea typeface="Noto Sans CJK SC"/>
@@ -8143,29 +8927,29 @@
               </a:defRPr>
             </a:pPr>
             <a:r>
-              <a:rPr sz="1124" b="0" i="0" lang="zh-CN" dirty="0">
+              <a:rPr sz="1124" b="1" i="0" lang="zh-CN" dirty="0">
                 <a:solidFill>
-                  <a:srgbClr val="3F4854"/>
+                  <a:srgbClr val="27303A"/>
                 </a:solidFill>
                 <a:latin typeface="Noto Sans CJK SC"/>
                 <a:ea typeface="Noto Sans CJK SC"/>
                 <a:cs typeface="Noto Sans CJK SC"/>
               </a:rPr>
-              <a:t>结构</a:t>
-            </a:r>
-          </a:p>
-        </p:txBody>
-      </p:sp>
-      <p:sp>
-        <p:nvSpPr>
-          <p:cNvPr id="103" name="s_e2_0" descr="Editable line; source id s_e2_0"/>
+              <a:t>近邻</a:t>
+            </a:r>
+          </a:p>
+        </p:txBody>
+      </p:sp>
+      <p:sp>
+        <p:nvSpPr>
+          <p:cNvPr id="117" name="v_l2_0" descr="Editable line; source id v_l2_0"/>
           <p:cNvSpPr/>
           <p:nvPr/>
         </p:nvSpPr>
         <p:spPr>
           <a:xfrm>
-            <a:off x="4206875" y="3278187"/>
-            <a:ext cx="555625" cy="79375"/>
+            <a:off x="7143750" y="4159250"/>
+            <a:ext cx="603250" cy="95250"/>
           </a:xfrm>
           <a:custGeom>
             <a:avLst/>
@@ -8174,27 +8958,27 @@
             <a:cxnLst/>
             <a:rect l="l" t="t" r="r" b="b"/>
             <a:pathLst>
-              <a:path w="70000" h="10000">
+              <a:path w="76000" h="12000">
                 <a:moveTo>
-                  <a:pt x="70000" y="5900"/>
+                  <a:pt x="0" y="4750"/>
                 </a:moveTo>
                 <a:lnTo>
-                  <a:pt x="12000" y="5900"/>
+                  <a:pt x="61000" y="4750"/>
                 </a:lnTo>
                 <a:lnTo>
-                  <a:pt x="12000" y="10000"/>
+                  <a:pt x="61000" y="0"/>
                 </a:lnTo>
                 <a:lnTo>
-                  <a:pt x="0" y="5000"/>
+                  <a:pt x="76000" y="6000"/>
                 </a:lnTo>
                 <a:lnTo>
-                  <a:pt x="12000" y="0"/>
+                  <a:pt x="61000" y="12000"/>
                 </a:lnTo>
                 <a:lnTo>
-                  <a:pt x="12000" y="4100"/>
+                  <a:pt x="61000" y="7250"/>
                 </a:lnTo>
                 <a:lnTo>
-                  <a:pt x="70000" y="4100"/>
+                  <a:pt x="0" y="7250"/>
                 </a:lnTo>
                 <a:close/>
               </a:path>
@@ -8232,13 +9016,13 @@
       </p:sp>
       <p:sp>
         <p:nvSpPr>
-          <p:cNvPr id="104" name="s_e2_p" descr="Editable shape; source id s_e2_p"/>
+          <p:cNvPr id="118" name="v_l2_p" descr="Editable shape; source id v_l2_p"/>
           <p:cNvSpPr/>
           <p:nvPr/>
         </p:nvSpPr>
         <p:spPr>
           <a:xfrm>
-            <a:off x="4198937" y="2873374"/>
+            <a:off x="7159624" y="3762374"/>
             <a:ext cx="571499" cy="309562"/>
           </a:xfrm>
           <a:prstGeom prst="roundRect">
@@ -8249,7 +9033,7 @@
           <a:solidFill>
             <a:srgbClr val="FFFFFF"/>
           </a:solidFill>
-          <a:ln w="8731">
+          <a:ln w="12699">
             <a:solidFill>
               <a:srgbClr val="CBD3DA"/>
             </a:solidFill>
@@ -8280,13 +9064,13 @@
       </p:sp>
       <p:sp>
         <p:nvSpPr>
-          <p:cNvPr id="105" name="s_e2_p_t" descr="Editable text; source id s_e2_p_t"/>
+          <p:cNvPr id="119" name="v_l2_p_t" descr="Editable text; source id v_l2_p_t"/>
           <p:cNvSpPr txBox="1"/>
           <p:nvPr/>
         </p:nvSpPr>
         <p:spPr>
           <a:xfrm>
-            <a:off x="4278312" y="2905124"/>
+            <a:off x="7238999" y="3794124"/>
             <a:ext cx="412749" cy="246062"/>
           </a:xfrm>
           <a:prstGeom prst="rect">
@@ -8311,9 +9095,9 @@
               <a:spcAft>
                 <a:spcPts val="0"/>
               </a:spcAft>
-              <a:defRPr sz="1124" b="0" i="0" lang="zh-CN" dirty="0">
+              <a:defRPr sz="1124" b="1" i="0" lang="zh-CN" dirty="0">
                 <a:solidFill>
-                  <a:srgbClr val="3F4854"/>
+                  <a:srgbClr val="27303A"/>
                 </a:solidFill>
                 <a:latin typeface="Noto Sans CJK SC"/>
                 <a:ea typeface="Noto Sans CJK SC"/>
@@ -8321,68 +9105,82 @@
               </a:defRPr>
             </a:pPr>
             <a:r>
-              <a:rPr sz="1124" b="0" i="0" lang="zh-CN" dirty="0">
+              <a:rPr sz="1124" b="1" i="0" lang="zh-CN" dirty="0">
                 <a:solidFill>
-                  <a:srgbClr val="3F4854"/>
+                  <a:srgbClr val="27303A"/>
                 </a:solidFill>
                 <a:latin typeface="Noto Sans CJK SC"/>
                 <a:ea typeface="Noto Sans CJK SC"/>
                 <a:cs typeface="Noto Sans CJK SC"/>
               </a:rPr>
-              <a:t>制备</a:t>
-            </a:r>
-          </a:p>
-        </p:txBody>
-      </p:sp>
-      <p:sp>
-        <p:nvSpPr>
-          <p:cNvPr id="106" name="s_e3_0" descr="Editable line; source id s_e3_0"/>
+              <a:t>判读</a:t>
+            </a:r>
+          </a:p>
+        </p:txBody>
+      </p:sp>
+      <p:cxnSp>
+        <p:nvCxnSpPr>
+          <p:cNvPr id="120" name="v_l3_0" descr="Editable line; source id v_l3_0"/>
+          <p:cNvCxnSpPr/>
+          <p:nvPr/>
+        </p:nvCxnSpPr>
+        <p:spPr>
+          <a:xfrm>
+            <a:off x="7143749" y="6429374"/>
+            <a:ext cx="603250" cy="0"/>
+          </a:xfrm>
+          <a:prstGeom prst="line">
+            <a:avLst/>
+          </a:prstGeom>
+          <a:ln w="19843">
+            <a:solidFill>
+              <a:srgbClr val="C48A24"/>
+            </a:solidFill>
+            <a:custDash>
+              <a:ds d="440000" sp="280000"/>
+            </a:custDash>
+            <a:tailEnd type="triangle"/>
+          </a:ln>
+          <a:effectLst/>
+        </p:spPr>
+        <p:style>
+          <a:lnRef idx="2">
+            <a:schemeClr val="accent1"/>
+          </a:lnRef>
+          <a:fillRef idx="0">
+            <a:schemeClr val="accent1"/>
+          </a:fillRef>
+          <a:effectRef idx="0">
+            <a:schemeClr val="accent1"/>
+          </a:effectRef>
+          <a:fontRef idx="minor">
+            <a:schemeClr val="tx1"/>
+          </a:fontRef>
+        </p:style>
+      </p:cxnSp>
+      <p:sp>
+        <p:nvSpPr>
+          <p:cNvPr id="121" name="v_l3_p" descr="Editable shape; source id v_l3_p"/>
           <p:cNvSpPr/>
           <p:nvPr/>
         </p:nvSpPr>
         <p:spPr>
           <a:xfrm>
-            <a:off x="4206875" y="4945062"/>
-            <a:ext cx="555625" cy="79375"/>
-          </a:xfrm>
-          <a:custGeom>
-            <a:avLst/>
-            <a:gdLst/>
-            <a:ahLst/>
-            <a:cxnLst/>
-            <a:rect l="l" t="t" r="r" b="b"/>
-            <a:pathLst>
-              <a:path w="70000" h="10000">
-                <a:moveTo>
-                  <a:pt x="70000" y="5900"/>
-                </a:moveTo>
-                <a:lnTo>
-                  <a:pt x="12000" y="5900"/>
-                </a:lnTo>
-                <a:lnTo>
-                  <a:pt x="12000" y="10000"/>
-                </a:lnTo>
-                <a:lnTo>
-                  <a:pt x="0" y="5000"/>
-                </a:lnTo>
-                <a:lnTo>
-                  <a:pt x="12000" y="0"/>
-                </a:lnTo>
-                <a:lnTo>
-                  <a:pt x="12000" y="4100"/>
-                </a:lnTo>
-                <a:lnTo>
-                  <a:pt x="70000" y="4100"/>
-                </a:lnTo>
-                <a:close/>
-              </a:path>
-            </a:pathLst>
-          </a:custGeom>
+            <a:off x="7159624" y="5984874"/>
+            <a:ext cx="571499" cy="309562"/>
+          </a:xfrm>
+          <a:prstGeom prst="roundRect">
+            <a:avLst>
+              <a:gd name="adj" fmla="val 50000"/>
+            </a:avLst>
+          </a:prstGeom>
           <a:solidFill>
-            <a:srgbClr val="4B5563"/>
+            <a:srgbClr val="FFF6E3"/>
           </a:solidFill>
-          <a:ln>
-            <a:noFill/>
+          <a:ln w="12699">
+            <a:solidFill>
+              <a:srgbClr val="C48A24"/>
+            </a:solidFill>
           </a:ln>
           <a:effectLst/>
         </p:spPr>
@@ -8410,61 +9208,13 @@
       </p:sp>
       <p:sp>
         <p:nvSpPr>
-          <p:cNvPr id="107" name="s_e3_p" descr="Editable shape; source id s_e3_p"/>
-          <p:cNvSpPr/>
-          <p:nvPr/>
-        </p:nvSpPr>
-        <p:spPr>
-          <a:xfrm>
-            <a:off x="4198937" y="4540249"/>
-            <a:ext cx="571499" cy="309562"/>
-          </a:xfrm>
-          <a:prstGeom prst="roundRect">
-            <a:avLst>
-              <a:gd name="adj" fmla="val 50000"/>
-            </a:avLst>
-          </a:prstGeom>
-          <a:solidFill>
-            <a:srgbClr val="FFFFFF"/>
-          </a:solidFill>
-          <a:ln w="8731">
-            <a:solidFill>
-              <a:srgbClr val="CBD3DA"/>
-            </a:solidFill>
-          </a:ln>
-          <a:effectLst/>
-        </p:spPr>
-        <p:style>
-          <a:lnRef idx="1">
-            <a:schemeClr val="accent1"/>
-          </a:lnRef>
-          <a:fillRef idx="3">
-            <a:schemeClr val="accent1"/>
-          </a:fillRef>
-          <a:effectRef idx="0">
-            <a:schemeClr val="accent1"/>
-          </a:effectRef>
-          <a:fontRef idx="minor">
-            <a:schemeClr val="lt1"/>
-          </a:fontRef>
-        </p:style>
-        <p:txBody>
-          <a:bodyPr rtlCol="0" anchor="ctr"/>
-          <a:lstStyle/>
-          <a:p>
-            <a:pPr algn="ctr"/>
-          </a:p>
-        </p:txBody>
-      </p:sp>
-      <p:sp>
-        <p:nvSpPr>
-          <p:cNvPr id="108" name="s_e3_p_t" descr="Editable text; source id s_e3_p_t"/>
+          <p:cNvPr id="122" name="v_l3_p_t" descr="Editable text; source id v_l3_p_t"/>
           <p:cNvSpPr txBox="1"/>
           <p:nvPr/>
         </p:nvSpPr>
         <p:spPr>
           <a:xfrm>
-            <a:off x="4278312" y="4571999"/>
+            <a:off x="7238999" y="6016624"/>
             <a:ext cx="412749" cy="246062"/>
           </a:xfrm>
           <a:prstGeom prst="rect">
@@ -8489,757 +9239,7 @@
               <a:spcAft>
                 <a:spcPts val="0"/>
               </a:spcAft>
-              <a:defRPr sz="1124" b="0" i="0" lang="zh-CN" dirty="0">
-                <a:solidFill>
-                  <a:srgbClr val="3F4854"/>
-                </a:solidFill>
-                <a:latin typeface="Noto Sans CJK SC"/>
-                <a:ea typeface="Noto Sans CJK SC"/>
-                <a:cs typeface="Noto Sans CJK SC"/>
-              </a:defRPr>
-            </a:pPr>
-            <a:r>
-              <a:rPr sz="1124" b="0" i="0" lang="zh-CN" dirty="0">
-                <a:solidFill>
-                  <a:srgbClr val="3F4854"/>
-                </a:solidFill>
-                <a:latin typeface="Noto Sans CJK SC"/>
-                <a:ea typeface="Noto Sans CJK SC"/>
-                <a:cs typeface="Noto Sans CJK SC"/>
-              </a:rPr>
-              <a:t>变量</a:t>
-            </a:r>
-          </a:p>
-        </p:txBody>
-      </p:sp>
-      <p:sp>
-        <p:nvSpPr>
-          <p:cNvPr id="109" name="s_e4_0" descr="Editable line; source id s_e4_0"/>
-          <p:cNvSpPr/>
-          <p:nvPr/>
-        </p:nvSpPr>
-        <p:spPr>
-          <a:xfrm>
-            <a:off x="4206875" y="6611937"/>
-            <a:ext cx="555625" cy="79375"/>
-          </a:xfrm>
-          <a:custGeom>
-            <a:avLst/>
-            <a:gdLst/>
-            <a:ahLst/>
-            <a:cxnLst/>
-            <a:rect l="l" t="t" r="r" b="b"/>
-            <a:pathLst>
-              <a:path w="70000" h="10000">
-                <a:moveTo>
-                  <a:pt x="70000" y="5900"/>
-                </a:moveTo>
-                <a:lnTo>
-                  <a:pt x="12000" y="5900"/>
-                </a:lnTo>
-                <a:lnTo>
-                  <a:pt x="12000" y="10000"/>
-                </a:lnTo>
-                <a:lnTo>
-                  <a:pt x="0" y="5000"/>
-                </a:lnTo>
-                <a:lnTo>
-                  <a:pt x="12000" y="0"/>
-                </a:lnTo>
-                <a:lnTo>
-                  <a:pt x="12000" y="4100"/>
-                </a:lnTo>
-                <a:lnTo>
-                  <a:pt x="70000" y="4100"/>
-                </a:lnTo>
-                <a:close/>
-              </a:path>
-            </a:pathLst>
-          </a:custGeom>
-          <a:solidFill>
-            <a:srgbClr val="4B5563"/>
-          </a:solidFill>
-          <a:ln>
-            <a:noFill/>
-          </a:ln>
-          <a:effectLst/>
-        </p:spPr>
-        <p:style>
-          <a:lnRef idx="1">
-            <a:schemeClr val="accent1"/>
-          </a:lnRef>
-          <a:fillRef idx="3">
-            <a:schemeClr val="accent1"/>
-          </a:fillRef>
-          <a:effectRef idx="0">
-            <a:schemeClr val="accent1"/>
-          </a:effectRef>
-          <a:fontRef idx="minor">
-            <a:schemeClr val="lt1"/>
-          </a:fontRef>
-        </p:style>
-        <p:txBody>
-          <a:bodyPr rtlCol="0" anchor="ctr"/>
-          <a:lstStyle/>
-          <a:p>
-            <a:pPr algn="ctr"/>
-          </a:p>
-        </p:txBody>
-      </p:sp>
-      <p:sp>
-        <p:nvSpPr>
-          <p:cNvPr id="110" name="s_e4_p" descr="Editable shape; source id s_e4_p"/>
-          <p:cNvSpPr/>
-          <p:nvPr/>
-        </p:nvSpPr>
-        <p:spPr>
-          <a:xfrm>
-            <a:off x="4198937" y="6207124"/>
-            <a:ext cx="571499" cy="309562"/>
-          </a:xfrm>
-          <a:prstGeom prst="roundRect">
-            <a:avLst>
-              <a:gd name="adj" fmla="val 50000"/>
-            </a:avLst>
-          </a:prstGeom>
-          <a:solidFill>
-            <a:srgbClr val="FFFFFF"/>
-          </a:solidFill>
-          <a:ln w="8731">
-            <a:solidFill>
-              <a:srgbClr val="CBD3DA"/>
-            </a:solidFill>
-          </a:ln>
-          <a:effectLst/>
-        </p:spPr>
-        <p:style>
-          <a:lnRef idx="1">
-            <a:schemeClr val="accent1"/>
-          </a:lnRef>
-          <a:fillRef idx="3">
-            <a:schemeClr val="accent1"/>
-          </a:fillRef>
-          <a:effectRef idx="0">
-            <a:schemeClr val="accent1"/>
-          </a:effectRef>
-          <a:fontRef idx="minor">
-            <a:schemeClr val="lt1"/>
-          </a:fontRef>
-        </p:style>
-        <p:txBody>
-          <a:bodyPr rtlCol="0" anchor="ctr"/>
-          <a:lstStyle/>
-          <a:p>
-            <a:pPr algn="ctr"/>
-          </a:p>
-        </p:txBody>
-      </p:sp>
-      <p:sp>
-        <p:nvSpPr>
-          <p:cNvPr id="111" name="s_e4_p_t" descr="Editable text; source id s_e4_p_t"/>
-          <p:cNvSpPr txBox="1"/>
-          <p:nvPr/>
-        </p:nvSpPr>
-        <p:spPr>
-          <a:xfrm>
-            <a:off x="4278312" y="6238874"/>
-            <a:ext cx="412749" cy="246062"/>
-          </a:xfrm>
-          <a:prstGeom prst="rect">
-            <a:avLst/>
-          </a:prstGeom>
-          <a:noFill/>
-          <a:effectLst/>
-        </p:spPr>
-        <p:txBody>
-          <a:bodyPr wrap="none" anchor="ctr" tIns="0" rIns="0" bIns="0" lIns="0" anchorCtr="0" vertOverflow="overflow">
-            <a:noAutofit/>
-          </a:bodyPr>
-          <a:lstStyle/>
-          <a:p>
-            <a:pPr algn="ctr" fontAlgn="base">
-              <a:lnSpc>
-                <a:spcPts val="1640"/>
-              </a:lnSpc>
-              <a:spcBef>
-                <a:spcPts val="0"/>
-              </a:spcBef>
-              <a:spcAft>
-                <a:spcPts val="0"/>
-              </a:spcAft>
-              <a:defRPr sz="1124" b="0" i="0" lang="zh-CN" dirty="0">
-                <a:solidFill>
-                  <a:srgbClr val="3F4854"/>
-                </a:solidFill>
-                <a:latin typeface="Noto Sans CJK SC"/>
-                <a:ea typeface="Noto Sans CJK SC"/>
-                <a:cs typeface="Noto Sans CJK SC"/>
-              </a:defRPr>
-            </a:pPr>
-            <a:r>
-              <a:rPr sz="1124" b="0" i="0" lang="zh-CN" dirty="0">
-                <a:solidFill>
-                  <a:srgbClr val="3F4854"/>
-                </a:solidFill>
-                <a:latin typeface="Noto Sans CJK SC"/>
-                <a:ea typeface="Noto Sans CJK SC"/>
-                <a:cs typeface="Noto Sans CJK SC"/>
-              </a:rPr>
-              <a:t>晶化</a:t>
-            </a:r>
-          </a:p>
-        </p:txBody>
-      </p:sp>
-      <p:cxnSp>
-        <p:nvCxnSpPr>
-          <p:cNvPr id="112" name="sr_0" descr="Editable line; source id sr_0"/>
-          <p:cNvCxnSpPr/>
-          <p:nvPr/>
-        </p:nvCxnSpPr>
-        <p:spPr>
-          <a:xfrm>
-            <a:off x="7000874" y="4063999"/>
-            <a:ext cx="142875" cy="0"/>
-          </a:xfrm>
-          <a:prstGeom prst="line">
-            <a:avLst/>
-          </a:prstGeom>
-          <a:ln w="14287">
-            <a:solidFill>
-              <a:srgbClr val="4B5563"/>
-            </a:solidFill>
-          </a:ln>
-          <a:effectLst/>
-        </p:spPr>
-        <p:style>
-          <a:lnRef idx="2">
-            <a:schemeClr val="accent1"/>
-          </a:lnRef>
-          <a:fillRef idx="0">
-            <a:schemeClr val="accent1"/>
-          </a:fillRef>
-          <a:effectRef idx="0">
-            <a:schemeClr val="accent1"/>
-          </a:effectRef>
-          <a:fontRef idx="minor">
-            <a:schemeClr val="tx1"/>
-          </a:fontRef>
-        </p:style>
-      </p:cxnSp>
-      <p:cxnSp>
-        <p:nvCxnSpPr>
-          <p:cNvPr id="113" name="srv_0" descr="Editable line; source id srv_0"/>
-          <p:cNvCxnSpPr/>
-          <p:nvPr/>
-        </p:nvCxnSpPr>
-        <p:spPr>
-          <a:xfrm>
-            <a:off x="7143749" y="1984374"/>
-            <a:ext cx="0" cy="4445000"/>
-          </a:xfrm>
-          <a:prstGeom prst="line">
-            <a:avLst/>
-          </a:prstGeom>
-          <a:ln w="14287">
-            <a:solidFill>
-              <a:srgbClr val="4B5563"/>
-            </a:solidFill>
-          </a:ln>
-          <a:effectLst/>
-        </p:spPr>
-        <p:style>
-          <a:lnRef idx="2">
-            <a:schemeClr val="accent1"/>
-          </a:lnRef>
-          <a:fillRef idx="0">
-            <a:schemeClr val="accent1"/>
-          </a:fillRef>
-          <a:effectRef idx="0">
-            <a:schemeClr val="accent1"/>
-          </a:effectRef>
-          <a:fontRef idx="minor">
-            <a:schemeClr val="tx1"/>
-          </a:fontRef>
-        </p:style>
-      </p:cxnSp>
-      <p:sp>
-        <p:nvSpPr>
-          <p:cNvPr id="114" name="v_l1_0" descr="Editable line; source id v_l1_0"/>
-          <p:cNvSpPr/>
-          <p:nvPr/>
-        </p:nvSpPr>
-        <p:spPr>
-          <a:xfrm>
-            <a:off x="7143750" y="1944687"/>
-            <a:ext cx="603250" cy="79375"/>
-          </a:xfrm>
-          <a:custGeom>
-            <a:avLst/>
-            <a:gdLst/>
-            <a:ahLst/>
-            <a:cxnLst/>
-            <a:rect l="l" t="t" r="r" b="b"/>
-            <a:pathLst>
-              <a:path w="76000" h="10000">
-                <a:moveTo>
-                  <a:pt x="0" y="4100"/>
-                </a:moveTo>
-                <a:lnTo>
-                  <a:pt x="64000" y="4100"/>
-                </a:lnTo>
-                <a:lnTo>
-                  <a:pt x="64000" y="0"/>
-                </a:lnTo>
-                <a:lnTo>
-                  <a:pt x="76000" y="5000"/>
-                </a:lnTo>
-                <a:lnTo>
-                  <a:pt x="64000" y="10000"/>
-                </a:lnTo>
-                <a:lnTo>
-                  <a:pt x="64000" y="5900"/>
-                </a:lnTo>
-                <a:lnTo>
-                  <a:pt x="0" y="5900"/>
-                </a:lnTo>
-                <a:close/>
-              </a:path>
-            </a:pathLst>
-          </a:custGeom>
-          <a:solidFill>
-            <a:srgbClr val="4B5563"/>
-          </a:solidFill>
-          <a:ln>
-            <a:noFill/>
-          </a:ln>
-          <a:effectLst/>
-        </p:spPr>
-        <p:style>
-          <a:lnRef idx="1">
-            <a:schemeClr val="accent1"/>
-          </a:lnRef>
-          <a:fillRef idx="3">
-            <a:schemeClr val="accent1"/>
-          </a:fillRef>
-          <a:effectRef idx="0">
-            <a:schemeClr val="accent1"/>
-          </a:effectRef>
-          <a:fontRef idx="minor">
-            <a:schemeClr val="lt1"/>
-          </a:fontRef>
-        </p:style>
-        <p:txBody>
-          <a:bodyPr rtlCol="0" anchor="ctr"/>
-          <a:lstStyle/>
-          <a:p>
-            <a:pPr algn="ctr"/>
-          </a:p>
-        </p:txBody>
-      </p:sp>
-      <p:sp>
-        <p:nvSpPr>
-          <p:cNvPr id="115" name="v_l1_p" descr="Editable shape; source id v_l1_p"/>
-          <p:cNvSpPr/>
-          <p:nvPr/>
-        </p:nvSpPr>
-        <p:spPr>
-          <a:xfrm>
-            <a:off x="7159624" y="1539874"/>
-            <a:ext cx="571499" cy="309562"/>
-          </a:xfrm>
-          <a:prstGeom prst="roundRect">
-            <a:avLst>
-              <a:gd name="adj" fmla="val 50000"/>
-            </a:avLst>
-          </a:prstGeom>
-          <a:solidFill>
-            <a:srgbClr val="FFFFFF"/>
-          </a:solidFill>
-          <a:ln w="8731">
-            <a:solidFill>
-              <a:srgbClr val="CBD3DA"/>
-            </a:solidFill>
-          </a:ln>
-          <a:effectLst/>
-        </p:spPr>
-        <p:style>
-          <a:lnRef idx="1">
-            <a:schemeClr val="accent1"/>
-          </a:lnRef>
-          <a:fillRef idx="3">
-            <a:schemeClr val="accent1"/>
-          </a:fillRef>
-          <a:effectRef idx="0">
-            <a:schemeClr val="accent1"/>
-          </a:effectRef>
-          <a:fontRef idx="minor">
-            <a:schemeClr val="lt1"/>
-          </a:fontRef>
-        </p:style>
-        <p:txBody>
-          <a:bodyPr rtlCol="0" anchor="ctr"/>
-          <a:lstStyle/>
-          <a:p>
-            <a:pPr algn="ctr"/>
-          </a:p>
-        </p:txBody>
-      </p:sp>
-      <p:sp>
-        <p:nvSpPr>
-          <p:cNvPr id="116" name="v_l1_p_t" descr="Editable text; source id v_l1_p_t"/>
-          <p:cNvSpPr txBox="1"/>
-          <p:nvPr/>
-        </p:nvSpPr>
-        <p:spPr>
-          <a:xfrm>
-            <a:off x="7238999" y="1571624"/>
-            <a:ext cx="412749" cy="246062"/>
-          </a:xfrm>
-          <a:prstGeom prst="rect">
-            <a:avLst/>
-          </a:prstGeom>
-          <a:noFill/>
-          <a:effectLst/>
-        </p:spPr>
-        <p:txBody>
-          <a:bodyPr wrap="none" anchor="ctr" tIns="0" rIns="0" bIns="0" lIns="0" anchorCtr="0" vertOverflow="overflow">
-            <a:noAutofit/>
-          </a:bodyPr>
-          <a:lstStyle/>
-          <a:p>
-            <a:pPr algn="ctr" fontAlgn="base">
-              <a:lnSpc>
-                <a:spcPts val="1640"/>
-              </a:lnSpc>
-              <a:spcBef>
-                <a:spcPts val="0"/>
-              </a:spcBef>
-              <a:spcAft>
-                <a:spcPts val="0"/>
-              </a:spcAft>
-              <a:defRPr sz="1124" b="0" i="0" lang="zh-CN" dirty="0">
-                <a:solidFill>
-                  <a:srgbClr val="3F4854"/>
-                </a:solidFill>
-                <a:latin typeface="Noto Sans CJK SC"/>
-                <a:ea typeface="Noto Sans CJK SC"/>
-                <a:cs typeface="Noto Sans CJK SC"/>
-              </a:defRPr>
-            </a:pPr>
-            <a:r>
-              <a:rPr sz="1124" b="0" i="0" lang="zh-CN" dirty="0">
-                <a:solidFill>
-                  <a:srgbClr val="3F4854"/>
-                </a:solidFill>
-                <a:latin typeface="Noto Sans CJK SC"/>
-                <a:ea typeface="Noto Sans CJK SC"/>
-                <a:cs typeface="Noto Sans CJK SC"/>
-              </a:rPr>
-              <a:t>近邻</a:t>
-            </a:r>
-          </a:p>
-        </p:txBody>
-      </p:sp>
-      <p:sp>
-        <p:nvSpPr>
-          <p:cNvPr id="117" name="v_l2_0" descr="Editable line; source id v_l2_0"/>
-          <p:cNvSpPr/>
-          <p:nvPr/>
-        </p:nvSpPr>
-        <p:spPr>
-          <a:xfrm>
-            <a:off x="7143750" y="4167187"/>
-            <a:ext cx="603250" cy="79375"/>
-          </a:xfrm>
-          <a:custGeom>
-            <a:avLst/>
-            <a:gdLst/>
-            <a:ahLst/>
-            <a:cxnLst/>
-            <a:rect l="l" t="t" r="r" b="b"/>
-            <a:pathLst>
-              <a:path w="76000" h="10000">
-                <a:moveTo>
-                  <a:pt x="0" y="4100"/>
-                </a:moveTo>
-                <a:lnTo>
-                  <a:pt x="64000" y="4100"/>
-                </a:lnTo>
-                <a:lnTo>
-                  <a:pt x="64000" y="0"/>
-                </a:lnTo>
-                <a:lnTo>
-                  <a:pt x="76000" y="5000"/>
-                </a:lnTo>
-                <a:lnTo>
-                  <a:pt x="64000" y="10000"/>
-                </a:lnTo>
-                <a:lnTo>
-                  <a:pt x="64000" y="5900"/>
-                </a:lnTo>
-                <a:lnTo>
-                  <a:pt x="0" y="5900"/>
-                </a:lnTo>
-                <a:close/>
-              </a:path>
-            </a:pathLst>
-          </a:custGeom>
-          <a:solidFill>
-            <a:srgbClr val="4B5563"/>
-          </a:solidFill>
-          <a:ln>
-            <a:noFill/>
-          </a:ln>
-          <a:effectLst/>
-        </p:spPr>
-        <p:style>
-          <a:lnRef idx="1">
-            <a:schemeClr val="accent1"/>
-          </a:lnRef>
-          <a:fillRef idx="3">
-            <a:schemeClr val="accent1"/>
-          </a:fillRef>
-          <a:effectRef idx="0">
-            <a:schemeClr val="accent1"/>
-          </a:effectRef>
-          <a:fontRef idx="minor">
-            <a:schemeClr val="lt1"/>
-          </a:fontRef>
-        </p:style>
-        <p:txBody>
-          <a:bodyPr rtlCol="0" anchor="ctr"/>
-          <a:lstStyle/>
-          <a:p>
-            <a:pPr algn="ctr"/>
-          </a:p>
-        </p:txBody>
-      </p:sp>
-      <p:sp>
-        <p:nvSpPr>
-          <p:cNvPr id="118" name="v_l2_p" descr="Editable shape; source id v_l2_p"/>
-          <p:cNvSpPr/>
-          <p:nvPr/>
-        </p:nvSpPr>
-        <p:spPr>
-          <a:xfrm>
-            <a:off x="7159624" y="3762374"/>
-            <a:ext cx="571499" cy="309562"/>
-          </a:xfrm>
-          <a:prstGeom prst="roundRect">
-            <a:avLst>
-              <a:gd name="adj" fmla="val 50000"/>
-            </a:avLst>
-          </a:prstGeom>
-          <a:solidFill>
-            <a:srgbClr val="FFFFFF"/>
-          </a:solidFill>
-          <a:ln w="8731">
-            <a:solidFill>
-              <a:srgbClr val="CBD3DA"/>
-            </a:solidFill>
-          </a:ln>
-          <a:effectLst/>
-        </p:spPr>
-        <p:style>
-          <a:lnRef idx="1">
-            <a:schemeClr val="accent1"/>
-          </a:lnRef>
-          <a:fillRef idx="3">
-            <a:schemeClr val="accent1"/>
-          </a:fillRef>
-          <a:effectRef idx="0">
-            <a:schemeClr val="accent1"/>
-          </a:effectRef>
-          <a:fontRef idx="minor">
-            <a:schemeClr val="lt1"/>
-          </a:fontRef>
-        </p:style>
-        <p:txBody>
-          <a:bodyPr rtlCol="0" anchor="ctr"/>
-          <a:lstStyle/>
-          <a:p>
-            <a:pPr algn="ctr"/>
-          </a:p>
-        </p:txBody>
-      </p:sp>
-      <p:sp>
-        <p:nvSpPr>
-          <p:cNvPr id="119" name="v_l2_p_t" descr="Editable text; source id v_l2_p_t"/>
-          <p:cNvSpPr txBox="1"/>
-          <p:nvPr/>
-        </p:nvSpPr>
-        <p:spPr>
-          <a:xfrm>
-            <a:off x="7238999" y="3794124"/>
-            <a:ext cx="412749" cy="246062"/>
-          </a:xfrm>
-          <a:prstGeom prst="rect">
-            <a:avLst/>
-          </a:prstGeom>
-          <a:noFill/>
-          <a:effectLst/>
-        </p:spPr>
-        <p:txBody>
-          <a:bodyPr wrap="none" anchor="ctr" tIns="0" rIns="0" bIns="0" lIns="0" anchorCtr="0" vertOverflow="overflow">
-            <a:noAutofit/>
-          </a:bodyPr>
-          <a:lstStyle/>
-          <a:p>
-            <a:pPr algn="ctr" fontAlgn="base">
-              <a:lnSpc>
-                <a:spcPts val="1640"/>
-              </a:lnSpc>
-              <a:spcBef>
-                <a:spcPts val="0"/>
-              </a:spcBef>
-              <a:spcAft>
-                <a:spcPts val="0"/>
-              </a:spcAft>
-              <a:defRPr sz="1124" b="0" i="0" lang="zh-CN" dirty="0">
-                <a:solidFill>
-                  <a:srgbClr val="3F4854"/>
-                </a:solidFill>
-                <a:latin typeface="Noto Sans CJK SC"/>
-                <a:ea typeface="Noto Sans CJK SC"/>
-                <a:cs typeface="Noto Sans CJK SC"/>
-              </a:defRPr>
-            </a:pPr>
-            <a:r>
-              <a:rPr sz="1124" b="0" i="0" lang="zh-CN" dirty="0">
-                <a:solidFill>
-                  <a:srgbClr val="3F4854"/>
-                </a:solidFill>
-                <a:latin typeface="Noto Sans CJK SC"/>
-                <a:ea typeface="Noto Sans CJK SC"/>
-                <a:cs typeface="Noto Sans CJK SC"/>
-              </a:rPr>
-              <a:t>判读</a:t>
-            </a:r>
-          </a:p>
-        </p:txBody>
-      </p:sp>
-      <p:cxnSp>
-        <p:nvCxnSpPr>
-          <p:cNvPr id="120" name="v_l3_0" descr="Editable line; source id v_l3_0"/>
-          <p:cNvCxnSpPr/>
-          <p:nvPr/>
-        </p:nvCxnSpPr>
-        <p:spPr>
-          <a:xfrm>
-            <a:off x="7143749" y="6429374"/>
-            <a:ext cx="603250" cy="0"/>
-          </a:xfrm>
-          <a:prstGeom prst="line">
-            <a:avLst/>
-          </a:prstGeom>
-          <a:ln w="14287">
-            <a:solidFill>
-              <a:srgbClr val="C48A24"/>
-            </a:solidFill>
-            <a:custDash>
-              <a:ds d="611111" sp="388889"/>
-            </a:custDash>
-            <a:tailEnd type="triangle"/>
-          </a:ln>
-          <a:effectLst/>
-        </p:spPr>
-        <p:style>
-          <a:lnRef idx="2">
-            <a:schemeClr val="accent1"/>
-          </a:lnRef>
-          <a:fillRef idx="0">
-            <a:schemeClr val="accent1"/>
-          </a:fillRef>
-          <a:effectRef idx="0">
-            <a:schemeClr val="accent1"/>
-          </a:effectRef>
-          <a:fontRef idx="minor">
-            <a:schemeClr val="tx1"/>
-          </a:fontRef>
-        </p:style>
-      </p:cxnSp>
-      <p:sp>
-        <p:nvSpPr>
-          <p:cNvPr id="121" name="v_l3_p" descr="Editable shape; source id v_l3_p"/>
-          <p:cNvSpPr/>
-          <p:nvPr/>
-        </p:nvSpPr>
-        <p:spPr>
-          <a:xfrm>
-            <a:off x="7159624" y="5984874"/>
-            <a:ext cx="571499" cy="309562"/>
-          </a:xfrm>
-          <a:prstGeom prst="roundRect">
-            <a:avLst>
-              <a:gd name="adj" fmla="val 50000"/>
-            </a:avLst>
-          </a:prstGeom>
-          <a:solidFill>
-            <a:srgbClr val="FFF6E3"/>
-          </a:solidFill>
-          <a:ln w="8731">
-            <a:solidFill>
-              <a:srgbClr val="C48A24"/>
-            </a:solidFill>
-          </a:ln>
-          <a:effectLst/>
-        </p:spPr>
-        <p:style>
-          <a:lnRef idx="1">
-            <a:schemeClr val="accent1"/>
-          </a:lnRef>
-          <a:fillRef idx="3">
-            <a:schemeClr val="accent1"/>
-          </a:fillRef>
-          <a:effectRef idx="0">
-            <a:schemeClr val="accent1"/>
-          </a:effectRef>
-          <a:fontRef idx="minor">
-            <a:schemeClr val="lt1"/>
-          </a:fontRef>
-        </p:style>
-        <p:txBody>
-          <a:bodyPr rtlCol="0" anchor="ctr"/>
-          <a:lstStyle/>
-          <a:p>
-            <a:pPr algn="ctr"/>
-          </a:p>
-        </p:txBody>
-      </p:sp>
-      <p:sp>
-        <p:nvSpPr>
-          <p:cNvPr id="122" name="v_l3_p_t" descr="Editable text; source id v_l3_p_t"/>
-          <p:cNvSpPr txBox="1"/>
-          <p:nvPr/>
-        </p:nvSpPr>
-        <p:spPr>
-          <a:xfrm>
-            <a:off x="7238999" y="6016624"/>
-            <a:ext cx="412749" cy="246062"/>
-          </a:xfrm>
-          <a:prstGeom prst="rect">
-            <a:avLst/>
-          </a:prstGeom>
-          <a:noFill/>
-          <a:effectLst/>
-        </p:spPr>
-        <p:txBody>
-          <a:bodyPr wrap="none" anchor="ctr" tIns="0" rIns="0" bIns="0" lIns="0" anchorCtr="0" vertOverflow="overflow">
-            <a:noAutofit/>
-          </a:bodyPr>
-          <a:lstStyle/>
-          <a:p>
-            <a:pPr algn="ctr" fontAlgn="base">
-              <a:lnSpc>
-                <a:spcPts val="1640"/>
-              </a:lnSpc>
-              <a:spcBef>
-                <a:spcPts val="0"/>
-              </a:spcBef>
-              <a:spcAft>
-                <a:spcPts val="0"/>
-              </a:spcAft>
-              <a:defRPr sz="1124" b="0" i="0" lang="zh-CN" dirty="0">
+              <a:defRPr sz="1124" b="1" i="0" lang="zh-CN" dirty="0">
                 <a:solidFill>
                   <a:srgbClr val="7A5410"/>
                 </a:solidFill>
@@ -9249,7 +9249,7 @@
               </a:defRPr>
             </a:pPr>
             <a:r>
-              <a:rPr sz="1124" b="0" i="0" lang="zh-CN" dirty="0">
+              <a:rPr sz="1124" b="1" i="0" lang="zh-CN" dirty="0">
                 <a:solidFill>
                   <a:srgbClr val="7A5410"/>
                 </a:solidFill>

--- a/media/figstudio/bzso_taxonomy/taxonomy_phase_control_editable.pptx
+++ b/media/figstudio/bzso_taxonomy/taxonomy_phase_control_editable.pptx
@@ -7,7 +7,7 @@
   <p:sldIdLst>
     <p:sldId id="256" r:id="rId7"/>
   </p:sldIdLst>
-  <p:sldSz cx="12191999" cy="8127999" type="screen4x3"/>
+  <p:sldSz cx="12191999" cy="6048374" type="screen4x3"/>
   <p:notesSz cx="6858000" cy="9144000"/>
   <p:defaultTextStyle>
     <a:defPPr>
@@ -502,7 +502,7 @@
           <a:lstStyle/>
           <a:p>
             <a:r>
-              <a:t>BaZn2Si2O7 合成与相控制的分类框架（第五轮 F02 双栏对照 → super_img2ppt 重建；箭头一律由枢纽指向分支，全图只有一段虚线）</a:t>
+              <a:t>BaZn2Si2O7 合成与相控制的分类框架（第六轮：印刷字号 + 内容定尺寸；箭头一律由枢纽指向分支，全图只有一段虚线） [paper=bzso] [print_width_pt=435.2]</a:t>
             </a:r>
           </a:p>
         </p:txBody>
@@ -3524,12 +3524,12 @@
         </p:nvSpPr>
         <p:spPr>
           <a:xfrm>
-            <a:off x="285749" y="317499"/>
-            <a:ext cx="4921249" cy="7492999"/>
+            <a:off x="206374" y="206374"/>
+            <a:ext cx="4349749" cy="5635624"/>
           </a:xfrm>
           <a:prstGeom prst="roundRect">
             <a:avLst>
-              <a:gd name="adj" fmla="val 2258"/>
+              <a:gd name="adj" fmla="val 2554"/>
             </a:avLst>
           </a:prstGeom>
           <a:solidFill>
@@ -3572,8 +3572,8 @@
         </p:nvSpPr>
         <p:spPr>
           <a:xfrm>
-            <a:off x="428624" y="396874"/>
-            <a:ext cx="1063624" cy="357187"/>
+            <a:off x="349249" y="285749"/>
+            <a:ext cx="1285874" cy="444499"/>
           </a:xfrm>
           <a:prstGeom prst="rect">
             <a:avLst/>
@@ -3589,7 +3589,7 @@
           <a:p>
             <a:pPr algn="l" fontAlgn="base">
               <a:lnSpc>
-                <a:spcPts val="2359"/>
+                <a:spcPts val="3015"/>
               </a:lnSpc>
               <a:spcBef>
                 <a:spcPts val="0"/>
@@ -3597,7 +3597,7 @@
               <a:spcAft>
                 <a:spcPts val="0"/>
               </a:spcAft>
-              <a:defRPr sz="1624" b="1" i="0" lang="zh-CN" dirty="0">
+              <a:defRPr sz="2062" b="1" i="0" lang="zh-CN" dirty="0">
                 <a:solidFill>
                   <a:srgbClr val="0F4F58"/>
                 </a:solidFill>
@@ -3607,7 +3607,7 @@
               </a:defRPr>
             </a:pPr>
             <a:r>
-              <a:rPr sz="1624" b="1" i="0" lang="zh-CN" dirty="0">
+              <a:rPr sz="2062" b="1" i="0" lang="zh-CN" dirty="0">
                 <a:solidFill>
                   <a:srgbClr val="0F4F58"/>
                 </a:solidFill>
@@ -3628,12 +3628,12 @@
         </p:nvSpPr>
         <p:spPr>
           <a:xfrm>
-            <a:off x="6984999" y="317499"/>
-            <a:ext cx="4889499" cy="7492999"/>
+            <a:off x="6969124" y="206374"/>
+            <a:ext cx="5016499" cy="5635624"/>
           </a:xfrm>
           <a:prstGeom prst="roundRect">
             <a:avLst>
-              <a:gd name="adj" fmla="val 2272"/>
+              <a:gd name="adj" fmla="val 2215"/>
             </a:avLst>
           </a:prstGeom>
           <a:solidFill>
@@ -3676,8 +3676,8 @@
         </p:nvSpPr>
         <p:spPr>
           <a:xfrm>
-            <a:off x="7127874" y="396874"/>
-            <a:ext cx="1063624" cy="357187"/>
+            <a:off x="7111999" y="285749"/>
+            <a:ext cx="1285874" cy="444499"/>
           </a:xfrm>
           <a:prstGeom prst="rect">
             <a:avLst/>
@@ -3693,7 +3693,7 @@
           <a:p>
             <a:pPr algn="l" fontAlgn="base">
               <a:lnSpc>
-                <a:spcPts val="2359"/>
+                <a:spcPts val="3015"/>
               </a:lnSpc>
               <a:spcBef>
                 <a:spcPts val="0"/>
@@ -3701,7 +3701,7 @@
               <a:spcAft>
                 <a:spcPts val="0"/>
               </a:spcAft>
-              <a:defRPr sz="1624" b="1" i="0" lang="zh-CN" dirty="0">
+              <a:defRPr sz="2062" b="1" i="0" lang="zh-CN" dirty="0">
                 <a:solidFill>
                   <a:srgbClr val="2B3E57"/>
                 </a:solidFill>
@@ -3711,7 +3711,7 @@
               </a:defRPr>
             </a:pPr>
             <a:r>
-              <a:rPr sz="1624" b="1" i="0" lang="zh-CN" dirty="0">
+              <a:rPr sz="2062" b="1" i="0" lang="zh-CN" dirty="0">
                 <a:solidFill>
                   <a:srgbClr val="2B3E57"/>
                 </a:solidFill>
@@ -3732,12 +3732,12 @@
         </p:nvSpPr>
         <p:spPr>
           <a:xfrm>
-            <a:off x="5222874" y="3016249"/>
-            <a:ext cx="1746249" cy="2222499"/>
+            <a:off x="4810124" y="2246312"/>
+            <a:ext cx="1904999" cy="2016124"/>
           </a:xfrm>
           <a:prstGeom prst="roundRect">
             <a:avLst>
-              <a:gd name="adj" fmla="val 4090"/>
+              <a:gd name="adj" fmla="val 3750"/>
             </a:avLst>
           </a:prstGeom>
           <a:solidFill>
@@ -3780,7 +3780,7 @@
         </p:nvCxnSpPr>
         <p:spPr>
           <a:xfrm>
-            <a:off x="5841999" y="3476624"/>
+            <a:off x="5508624" y="2563812"/>
             <a:ext cx="508000" cy="0"/>
           </a:xfrm>
           <a:prstGeom prst="line">
@@ -3816,7 +3816,7 @@
         </p:nvCxnSpPr>
         <p:spPr>
           <a:xfrm>
-            <a:off x="5841999" y="3476624"/>
+            <a:off x="5508624" y="2563812"/>
             <a:ext cx="0" cy="508000"/>
           </a:xfrm>
           <a:prstGeom prst="line">
@@ -3852,7 +3852,7 @@
         </p:nvCxnSpPr>
         <p:spPr>
           <a:xfrm>
-            <a:off x="5841999" y="3730624"/>
+            <a:off x="5508624" y="2817812"/>
             <a:ext cx="508000" cy="0"/>
           </a:xfrm>
           <a:prstGeom prst="line">
@@ -3888,7 +3888,7 @@
         </p:nvCxnSpPr>
         <p:spPr>
           <a:xfrm>
-            <a:off x="6095999" y="3476624"/>
+            <a:off x="5762624" y="2563812"/>
             <a:ext cx="0" cy="508000"/>
           </a:xfrm>
           <a:prstGeom prst="line">
@@ -3924,7 +3924,7 @@
         </p:nvCxnSpPr>
         <p:spPr>
           <a:xfrm>
-            <a:off x="5841999" y="3984624"/>
+            <a:off x="5508624" y="3071812"/>
             <a:ext cx="508000" cy="0"/>
           </a:xfrm>
           <a:prstGeom prst="line">
@@ -3960,7 +3960,7 @@
         </p:nvCxnSpPr>
         <p:spPr>
           <a:xfrm>
-            <a:off x="6349999" y="3476624"/>
+            <a:off x="6016624" y="2563812"/>
             <a:ext cx="0" cy="508000"/>
           </a:xfrm>
           <a:prstGeom prst="line">
@@ -3996,7 +3996,7 @@
         </p:nvSpPr>
         <p:spPr>
           <a:xfrm>
-            <a:off x="5786437" y="3421062"/>
+            <a:off x="5453062" y="2508249"/>
             <a:ext cx="111124" cy="111124"/>
           </a:xfrm>
           <a:prstGeom prst="ellipse">
@@ -4040,7 +4040,7 @@
         </p:nvSpPr>
         <p:spPr>
           <a:xfrm>
-            <a:off x="5786437" y="3675062"/>
+            <a:off x="5453062" y="2762249"/>
             <a:ext cx="111124" cy="111124"/>
           </a:xfrm>
           <a:prstGeom prst="ellipse">
@@ -4084,7 +4084,7 @@
         </p:nvSpPr>
         <p:spPr>
           <a:xfrm>
-            <a:off x="5786437" y="3929062"/>
+            <a:off x="5453062" y="3016249"/>
             <a:ext cx="111124" cy="111124"/>
           </a:xfrm>
           <a:prstGeom prst="ellipse">
@@ -4128,7 +4128,7 @@
         </p:nvSpPr>
         <p:spPr>
           <a:xfrm>
-            <a:off x="6040437" y="3421062"/>
+            <a:off x="5707062" y="2508249"/>
             <a:ext cx="111124" cy="111124"/>
           </a:xfrm>
           <a:prstGeom prst="ellipse">
@@ -4172,7 +4172,7 @@
         </p:nvSpPr>
         <p:spPr>
           <a:xfrm>
-            <a:off x="6040437" y="3675062"/>
+            <a:off x="5707062" y="2762249"/>
             <a:ext cx="111124" cy="111124"/>
           </a:xfrm>
           <a:prstGeom prst="ellipse">
@@ -4216,7 +4216,7 @@
         </p:nvSpPr>
         <p:spPr>
           <a:xfrm>
-            <a:off x="6040437" y="3929062"/>
+            <a:off x="5707062" y="3016249"/>
             <a:ext cx="111124" cy="111124"/>
           </a:xfrm>
           <a:prstGeom prst="ellipse">
@@ -4260,7 +4260,7 @@
         </p:nvSpPr>
         <p:spPr>
           <a:xfrm>
-            <a:off x="6294437" y="3421062"/>
+            <a:off x="5961062" y="2508249"/>
             <a:ext cx="111124" cy="111124"/>
           </a:xfrm>
           <a:prstGeom prst="ellipse">
@@ -4304,7 +4304,7 @@
         </p:nvSpPr>
         <p:spPr>
           <a:xfrm>
-            <a:off x="6294437" y="3675062"/>
+            <a:off x="5961062" y="2762249"/>
             <a:ext cx="111124" cy="111124"/>
           </a:xfrm>
           <a:prstGeom prst="ellipse">
@@ -4348,7 +4348,7 @@
         </p:nvSpPr>
         <p:spPr>
           <a:xfrm>
-            <a:off x="6294437" y="3929062"/>
+            <a:off x="5961062" y="3016249"/>
             <a:ext cx="111124" cy="111124"/>
           </a:xfrm>
           <a:prstGeom prst="ellipse">
@@ -4392,8 +4392,8 @@
         </p:nvSpPr>
         <p:spPr>
           <a:xfrm>
-            <a:off x="5286374" y="4302124"/>
-            <a:ext cx="1619249" cy="380999"/>
+            <a:off x="4905374" y="3294062"/>
+            <a:ext cx="1714499" cy="420687"/>
           </a:xfrm>
           <a:prstGeom prst="rect">
             <a:avLst/>
@@ -4409,7 +4409,7 @@
           <a:p>
             <a:pPr algn="ctr" fontAlgn="base">
               <a:lnSpc>
-                <a:spcPts val="1984"/>
+                <a:spcPts val="2281"/>
               </a:lnSpc>
               <a:spcBef>
                 <a:spcPts val="0"/>
@@ -4417,7 +4417,7 @@
               <a:spcAft>
                 <a:spcPts val="0"/>
               </a:spcAft>
-              <a:defRPr sz="1687" b="1" i="0" lang="zh-CN" dirty="0">
+              <a:defRPr sz="1937" b="1" i="0" lang="zh-CN" dirty="0">
                 <a:solidFill>
                   <a:srgbClr val="0F4F58"/>
                 </a:solidFill>
@@ -4427,7 +4427,7 @@
               </a:defRPr>
             </a:pPr>
             <a:r>
-              <a:rPr sz="1687" b="1" i="0" lang="zh-CN" dirty="0">
+              <a:rPr sz="1937" b="1" i="0" lang="zh-CN" dirty="0">
                 <a:solidFill>
                   <a:srgbClr val="0F4F58"/>
                 </a:solidFill>
@@ -4448,8 +4448,8 @@
         </p:nvSpPr>
         <p:spPr>
           <a:xfrm>
-            <a:off x="5381624" y="4714874"/>
-            <a:ext cx="1428749" cy="285749"/>
+            <a:off x="4905374" y="3714749"/>
+            <a:ext cx="1714499" cy="373062"/>
           </a:xfrm>
           <a:prstGeom prst="rect">
             <a:avLst/>
@@ -4465,7 +4465,7 @@
           <a:p>
             <a:pPr algn="ctr" fontAlgn="base">
               <a:lnSpc>
-                <a:spcPts val="1828"/>
+                <a:spcPts val="2546"/>
               </a:lnSpc>
               <a:spcBef>
                 <a:spcPts val="0"/>
@@ -4473,7 +4473,7 @@
               <a:spcAft>
                 <a:spcPts val="0"/>
               </a:spcAft>
-              <a:defRPr sz="1249" b="1" i="0" lang="zh-CN" dirty="0">
+              <a:defRPr sz="1749" b="0" i="0" lang="zh-CN" dirty="0">
                 <a:solidFill>
                   <a:srgbClr val="0F4F58"/>
                 </a:solidFill>
@@ -4483,7 +4483,7 @@
               </a:defRPr>
             </a:pPr>
             <a:r>
-              <a:rPr sz="1249" b="1" i="0" lang="zh-CN" dirty="0">
+              <a:rPr sz="1749" b="0" i="0" lang="zh-CN" dirty="0">
                 <a:solidFill>
                   <a:srgbClr val="0F4F58"/>
                 </a:solidFill>
@@ -4504,12 +4504,12 @@
         </p:nvSpPr>
         <p:spPr>
           <a:xfrm>
-            <a:off x="523874" y="952499"/>
-            <a:ext cx="3651249" cy="1396999"/>
+            <a:off x="333374" y="809624"/>
+            <a:ext cx="3222624" cy="1079499"/>
           </a:xfrm>
           <a:prstGeom prst="roundRect">
             <a:avLst>
-              <a:gd name="adj" fmla="val 5113"/>
+              <a:gd name="adj" fmla="val 6617"/>
             </a:avLst>
           </a:prstGeom>
           <a:solidFill>
@@ -4552,12 +4552,12 @@
         </p:nvSpPr>
         <p:spPr>
           <a:xfrm>
-            <a:off x="523874" y="952499"/>
-            <a:ext cx="63499" cy="1396999"/>
+            <a:off x="333374" y="809624"/>
+            <a:ext cx="47624" cy="1079499"/>
           </a:xfrm>
           <a:prstGeom prst="roundRect">
             <a:avLst>
-              <a:gd name="adj" fmla="val 37500"/>
+              <a:gd name="adj" fmla="val 50000"/>
             </a:avLst>
           </a:prstGeom>
           <a:solidFill>
@@ -4598,8 +4598,8 @@
         </p:nvCxnSpPr>
         <p:spPr>
           <a:xfrm>
-            <a:off x="825499" y="1357312"/>
-            <a:ext cx="269875" cy="0"/>
+            <a:off x="547687" y="1230312"/>
+            <a:ext cx="238125" cy="0"/>
           </a:xfrm>
           <a:prstGeom prst="line">
             <a:avLst/>
@@ -4634,8 +4634,8 @@
         </p:nvCxnSpPr>
         <p:spPr>
           <a:xfrm>
-            <a:off x="825499" y="1357312"/>
-            <a:ext cx="0" cy="277812"/>
+            <a:off x="547687" y="1230312"/>
+            <a:ext cx="0" cy="238125"/>
           </a:xfrm>
           <a:prstGeom prst="line">
             <a:avLst/>
@@ -4670,8 +4670,8 @@
         </p:nvCxnSpPr>
         <p:spPr>
           <a:xfrm>
-            <a:off x="825499" y="1492249"/>
-            <a:ext cx="269875" cy="0"/>
+            <a:off x="547687" y="1349374"/>
+            <a:ext cx="238125" cy="0"/>
           </a:xfrm>
           <a:prstGeom prst="line">
             <a:avLst/>
@@ -4706,8 +4706,8 @@
         </p:nvCxnSpPr>
         <p:spPr>
           <a:xfrm>
-            <a:off x="960437" y="1357312"/>
-            <a:ext cx="0" cy="277812"/>
+            <a:off x="666749" y="1230312"/>
+            <a:ext cx="0" cy="238125"/>
           </a:xfrm>
           <a:prstGeom prst="line">
             <a:avLst/>
@@ -4742,8 +4742,8 @@
         </p:nvCxnSpPr>
         <p:spPr>
           <a:xfrm>
-            <a:off x="825499" y="1635124"/>
-            <a:ext cx="269875" cy="0"/>
+            <a:off x="547687" y="1468437"/>
+            <a:ext cx="238125" cy="0"/>
           </a:xfrm>
           <a:prstGeom prst="line">
             <a:avLst/>
@@ -4778,8 +4778,8 @@
         </p:nvCxnSpPr>
         <p:spPr>
           <a:xfrm>
-            <a:off x="1095374" y="1357312"/>
-            <a:ext cx="0" cy="277812"/>
+            <a:off x="785812" y="1230312"/>
+            <a:ext cx="0" cy="238125"/>
           </a:xfrm>
           <a:prstGeom prst="line">
             <a:avLst/>
@@ -4814,8 +4814,8 @@
         </p:nvSpPr>
         <p:spPr>
           <a:xfrm>
-            <a:off x="793749" y="1325562"/>
-            <a:ext cx="63499" cy="63499"/>
+            <a:off x="515937" y="1198562"/>
+            <a:ext cx="55562" cy="55562"/>
           </a:xfrm>
           <a:prstGeom prst="ellipse">
             <a:avLst/>
@@ -4858,8 +4858,8 @@
         </p:nvSpPr>
         <p:spPr>
           <a:xfrm>
-            <a:off x="793749" y="1468437"/>
-            <a:ext cx="63499" cy="63499"/>
+            <a:off x="515937" y="1325562"/>
+            <a:ext cx="55562" cy="55562"/>
           </a:xfrm>
           <a:prstGeom prst="ellipse">
             <a:avLst/>
@@ -4902,8 +4902,8 @@
         </p:nvSpPr>
         <p:spPr>
           <a:xfrm>
-            <a:off x="793749" y="1603374"/>
-            <a:ext cx="63499" cy="63499"/>
+            <a:off x="515937" y="1444624"/>
+            <a:ext cx="55562" cy="55562"/>
           </a:xfrm>
           <a:prstGeom prst="ellipse">
             <a:avLst/>
@@ -4946,8 +4946,8 @@
         </p:nvSpPr>
         <p:spPr>
           <a:xfrm>
-            <a:off x="928687" y="1325562"/>
-            <a:ext cx="63499" cy="63499"/>
+            <a:off x="642937" y="1198562"/>
+            <a:ext cx="55562" cy="55562"/>
           </a:xfrm>
           <a:prstGeom prst="ellipse">
             <a:avLst/>
@@ -4990,8 +4990,8 @@
         </p:nvSpPr>
         <p:spPr>
           <a:xfrm>
-            <a:off x="928687" y="1468437"/>
-            <a:ext cx="63499" cy="63499"/>
+            <a:off x="642937" y="1325562"/>
+            <a:ext cx="55562" cy="55562"/>
           </a:xfrm>
           <a:prstGeom prst="ellipse">
             <a:avLst/>
@@ -5034,8 +5034,8 @@
         </p:nvSpPr>
         <p:spPr>
           <a:xfrm>
-            <a:off x="928687" y="1603374"/>
-            <a:ext cx="63499" cy="63499"/>
+            <a:off x="642937" y="1444624"/>
+            <a:ext cx="55562" cy="55562"/>
           </a:xfrm>
           <a:prstGeom prst="ellipse">
             <a:avLst/>
@@ -5078,8 +5078,8 @@
         </p:nvSpPr>
         <p:spPr>
           <a:xfrm>
-            <a:off x="1063624" y="1325562"/>
-            <a:ext cx="63499" cy="63499"/>
+            <a:off x="761999" y="1198562"/>
+            <a:ext cx="55562" cy="55562"/>
           </a:xfrm>
           <a:prstGeom prst="ellipse">
             <a:avLst/>
@@ -5122,8 +5122,8 @@
         </p:nvSpPr>
         <p:spPr>
           <a:xfrm>
-            <a:off x="1063624" y="1468437"/>
-            <a:ext cx="63499" cy="63499"/>
+            <a:off x="761999" y="1325562"/>
+            <a:ext cx="55562" cy="55562"/>
           </a:xfrm>
           <a:prstGeom prst="ellipse">
             <a:avLst/>
@@ -5166,8 +5166,8 @@
         </p:nvSpPr>
         <p:spPr>
           <a:xfrm>
-            <a:off x="1063624" y="1603374"/>
-            <a:ext cx="63499" cy="63499"/>
+            <a:off x="761999" y="1444624"/>
+            <a:ext cx="55562" cy="55562"/>
           </a:xfrm>
           <a:prstGeom prst="ellipse">
             <a:avLst/>
@@ -5210,8 +5210,8 @@
         </p:nvSpPr>
         <p:spPr>
           <a:xfrm>
-            <a:off x="1269999" y="1325562"/>
-            <a:ext cx="2746374" cy="341312"/>
+            <a:off x="936624" y="944562"/>
+            <a:ext cx="2524124" cy="420687"/>
           </a:xfrm>
           <a:prstGeom prst="rect">
             <a:avLst/>
@@ -5227,7 +5227,7 @@
           <a:p>
             <a:pPr algn="l" fontAlgn="base">
               <a:lnSpc>
-                <a:spcPts val="2265"/>
+                <a:spcPts val="2812"/>
               </a:lnSpc>
               <a:spcBef>
                 <a:spcPts val="0"/>
@@ -5235,7 +5235,7 @@
               <a:spcAft>
                 <a:spcPts val="0"/>
               </a:spcAft>
-              <a:defRPr sz="1562" b="1" i="0" lang="zh-CN" dirty="0">
+              <a:defRPr sz="1937" b="1" i="0" lang="zh-CN" dirty="0">
                 <a:solidFill>
                   <a:srgbClr val="0F4F58"/>
                 </a:solidFill>
@@ -5245,7 +5245,7 @@
               </a:defRPr>
             </a:pPr>
             <a:r>
-              <a:rPr sz="1562" b="1" i="0" lang="zh-CN" dirty="0">
+              <a:rPr sz="1937" b="1" i="0" lang="zh-CN" dirty="0">
                 <a:solidFill>
                   <a:srgbClr val="0F4F58"/>
                 </a:solidFill>
@@ -5266,8 +5266,8 @@
         </p:nvSpPr>
         <p:spPr>
           <a:xfrm>
-            <a:off x="1269999" y="1698624"/>
-            <a:ext cx="2746374" cy="277812"/>
+            <a:off x="936624" y="1381124"/>
+            <a:ext cx="2524124" cy="373062"/>
           </a:xfrm>
           <a:prstGeom prst="rect">
             <a:avLst/>
@@ -5283,7 +5283,7 @@
           <a:p>
             <a:pPr algn="l" fontAlgn="base">
               <a:lnSpc>
-                <a:spcPts val="1828"/>
+                <a:spcPts val="2546"/>
               </a:lnSpc>
               <a:spcBef>
                 <a:spcPts val="0"/>
@@ -5291,7 +5291,7 @@
               <a:spcAft>
                 <a:spcPts val="0"/>
               </a:spcAft>
-              <a:defRPr sz="1249" b="1" i="0" lang="zh-CN" dirty="0">
+              <a:defRPr sz="1749" b="0" i="0" lang="zh-CN" dirty="0">
                 <a:solidFill>
                   <a:srgbClr val="27303A"/>
                 </a:solidFill>
@@ -5301,7 +5301,7 @@
               </a:defRPr>
             </a:pPr>
             <a:r>
-              <a:rPr sz="1249" b="1" i="0" lang="zh-CN" dirty="0">
+              <a:rPr sz="1749" b="0" i="0" lang="zh-CN" dirty="0">
                 <a:solidFill>
                   <a:srgbClr val="27303A"/>
                 </a:solidFill>
@@ -5312,7 +5312,7 @@
               <a:t>相变</a:t>
             </a:r>
             <a:r>
-              <a:rPr sz="1249" b="1" i="0" lang="zh-CN" dirty="0">
+              <a:rPr sz="1749" b="0" i="0" lang="zh-CN" dirty="0">
                 <a:solidFill>
                   <a:srgbClr val="27303A"/>
                 </a:solidFill>
@@ -5323,7 +5323,7 @@
               <a:t> · </a:t>
             </a:r>
             <a:r>
-              <a:rPr sz="1249" b="1" i="0" lang="zh-CN" dirty="0">
+              <a:rPr sz="1749" b="0" i="0" lang="zh-CN" dirty="0">
                 <a:solidFill>
                   <a:srgbClr val="27303A"/>
                 </a:solidFill>
@@ -5344,12 +5344,12 @@
         </p:nvSpPr>
         <p:spPr>
           <a:xfrm>
-            <a:off x="523874" y="2619374"/>
-            <a:ext cx="3651249" cy="1396999"/>
+            <a:off x="333374" y="2079624"/>
+            <a:ext cx="3222624" cy="1079499"/>
           </a:xfrm>
           <a:prstGeom prst="roundRect">
             <a:avLst>
-              <a:gd name="adj" fmla="val 5113"/>
+              <a:gd name="adj" fmla="val 6617"/>
             </a:avLst>
           </a:prstGeom>
           <a:solidFill>
@@ -5392,12 +5392,12 @@
         </p:nvSpPr>
         <p:spPr>
           <a:xfrm>
-            <a:off x="523874" y="2619374"/>
-            <a:ext cx="63499" cy="1396999"/>
+            <a:off x="333374" y="2079624"/>
+            <a:ext cx="47624" cy="1079499"/>
           </a:xfrm>
           <a:prstGeom prst="roundRect">
             <a:avLst>
-              <a:gd name="adj" fmla="val 37500"/>
+              <a:gd name="adj" fmla="val 50000"/>
             </a:avLst>
           </a:prstGeom>
           <a:solidFill>
@@ -5438,8 +5438,8 @@
         </p:nvCxnSpPr>
         <p:spPr>
           <a:xfrm>
-            <a:off x="920749" y="2992437"/>
-            <a:ext cx="0" cy="119062"/>
+            <a:off x="627062" y="2468562"/>
+            <a:ext cx="0" cy="103187"/>
           </a:xfrm>
           <a:prstGeom prst="line">
             <a:avLst/>
@@ -5474,8 +5474,8 @@
         </p:nvCxnSpPr>
         <p:spPr>
           <a:xfrm flipH="1">
-            <a:off x="809624" y="3111499"/>
-            <a:ext cx="111125" cy="214313"/>
+            <a:off x="531812" y="2571749"/>
+            <a:ext cx="95250" cy="190500"/>
           </a:xfrm>
           <a:prstGeom prst="line">
             <a:avLst/>
@@ -5510,8 +5510,8 @@
         </p:nvCxnSpPr>
         <p:spPr>
           <a:xfrm>
-            <a:off x="809624" y="3325812"/>
-            <a:ext cx="301625" cy="0"/>
+            <a:off x="531812" y="2762249"/>
+            <a:ext cx="269875" cy="0"/>
           </a:xfrm>
           <a:prstGeom prst="line">
             <a:avLst/>
@@ -5546,8 +5546,8 @@
         </p:nvCxnSpPr>
         <p:spPr>
           <a:xfrm flipH="1" flipV="1">
-            <a:off x="1000124" y="3111499"/>
-            <a:ext cx="111125" cy="214313"/>
+            <a:off x="706437" y="2571749"/>
+            <a:ext cx="95250" cy="190500"/>
           </a:xfrm>
           <a:prstGeom prst="line">
             <a:avLst/>
@@ -5582,8 +5582,8 @@
         </p:nvCxnSpPr>
         <p:spPr>
           <a:xfrm flipV="1">
-            <a:off x="1000124" y="2992437"/>
-            <a:ext cx="0" cy="119062"/>
+            <a:off x="706437" y="2468562"/>
+            <a:ext cx="0" cy="103187"/>
           </a:xfrm>
           <a:prstGeom prst="line">
             <a:avLst/>
@@ -5618,8 +5618,8 @@
         </p:nvCxnSpPr>
         <p:spPr>
           <a:xfrm>
-            <a:off x="896937" y="2992437"/>
-            <a:ext cx="127000" cy="0"/>
+            <a:off x="611187" y="2468562"/>
+            <a:ext cx="111125" cy="0"/>
           </a:xfrm>
           <a:prstGeom prst="line">
             <a:avLst/>
@@ -5654,7 +5654,7 @@
         </p:nvSpPr>
         <p:spPr>
           <a:xfrm>
-            <a:off x="912812" y="3230562"/>
+            <a:off x="619124" y="2682874"/>
             <a:ext cx="31749" cy="31749"/>
           </a:xfrm>
           <a:prstGeom prst="ellipse">
@@ -5698,7 +5698,7 @@
         </p:nvSpPr>
         <p:spPr>
           <a:xfrm>
-            <a:off x="984249" y="3262312"/>
+            <a:off x="682624" y="2706687"/>
             <a:ext cx="23812" cy="23812"/>
           </a:xfrm>
           <a:prstGeom prst="ellipse">
@@ -5742,8 +5742,8 @@
         </p:nvSpPr>
         <p:spPr>
           <a:xfrm>
-            <a:off x="1269999" y="2992437"/>
-            <a:ext cx="2746374" cy="341312"/>
+            <a:off x="936624" y="2214562"/>
+            <a:ext cx="2524124" cy="420687"/>
           </a:xfrm>
           <a:prstGeom prst="rect">
             <a:avLst/>
@@ -5759,7 +5759,7 @@
           <a:p>
             <a:pPr algn="l" fontAlgn="base">
               <a:lnSpc>
-                <a:spcPts val="2265"/>
+                <a:spcPts val="2812"/>
               </a:lnSpc>
               <a:spcBef>
                 <a:spcPts val="0"/>
@@ -5767,7 +5767,7 @@
               <a:spcAft>
                 <a:spcPts val="0"/>
               </a:spcAft>
-              <a:defRPr sz="1562" b="1" i="0" lang="zh-CN" dirty="0">
+              <a:defRPr sz="1937" b="1" i="0" lang="zh-CN" dirty="0">
                 <a:solidFill>
                   <a:srgbClr val="0F4F58"/>
                 </a:solidFill>
@@ -5777,7 +5777,7 @@
               </a:defRPr>
             </a:pPr>
             <a:r>
-              <a:rPr sz="1562" b="1" i="0" lang="zh-CN" dirty="0">
+              <a:rPr sz="1937" b="1" i="0" lang="zh-CN" dirty="0">
                 <a:solidFill>
                   <a:srgbClr val="0F4F58"/>
                 </a:solidFill>
@@ -5798,8 +5798,8 @@
         </p:nvSpPr>
         <p:spPr>
           <a:xfrm>
-            <a:off x="1269999" y="3365499"/>
-            <a:ext cx="2746374" cy="277812"/>
+            <a:off x="936624" y="2651124"/>
+            <a:ext cx="2524124" cy="373062"/>
           </a:xfrm>
           <a:prstGeom prst="rect">
             <a:avLst/>
@@ -5815,7 +5815,7 @@
           <a:p>
             <a:pPr algn="l" fontAlgn="base">
               <a:lnSpc>
-                <a:spcPts val="1828"/>
+                <a:spcPts val="2546"/>
               </a:lnSpc>
               <a:spcBef>
                 <a:spcPts val="0"/>
@@ -5823,7 +5823,7 @@
               <a:spcAft>
                 <a:spcPts val="0"/>
               </a:spcAft>
-              <a:defRPr sz="1249" b="1" i="0" lang="zh-CN" dirty="0">
+              <a:defRPr sz="1749" b="0" i="0" lang="zh-CN" dirty="0">
                 <a:solidFill>
                   <a:srgbClr val="27303A"/>
                 </a:solidFill>
@@ -5833,7 +5833,7 @@
               </a:defRPr>
             </a:pPr>
             <a:r>
-              <a:rPr sz="1249" b="1" i="0" lang="zh-CN" dirty="0">
+              <a:rPr sz="1749" b="0" i="0" lang="zh-CN" dirty="0">
                 <a:solidFill>
                   <a:srgbClr val="27303A"/>
                 </a:solidFill>
@@ -5844,7 +5844,7 @@
               <a:t>固相</a:t>
             </a:r>
             <a:r>
-              <a:rPr sz="1249" b="1" i="0" lang="zh-CN" dirty="0">
+              <a:rPr sz="1749" b="0" i="0" lang="zh-CN" dirty="0">
                 <a:solidFill>
                   <a:srgbClr val="27303A"/>
                 </a:solidFill>
@@ -5855,7 +5855,7 @@
               <a:t> · </a:t>
             </a:r>
             <a:r>
-              <a:rPr sz="1249" b="1" i="0" lang="zh-CN" dirty="0">
+              <a:rPr sz="1749" b="0" i="0" lang="zh-CN" dirty="0">
                 <a:solidFill>
                   <a:srgbClr val="27303A"/>
                 </a:solidFill>
@@ -5866,7 +5866,7 @@
               <a:t>溶胶</a:t>
             </a:r>
             <a:r>
-              <a:rPr sz="1249" b="1" i="0" lang="zh-CN" dirty="0">
+              <a:rPr sz="1749" b="0" i="0" lang="zh-CN" dirty="0">
                 <a:solidFill>
                   <a:srgbClr val="27303A"/>
                 </a:solidFill>
@@ -5877,7 +5877,7 @@
               <a:t>—</a:t>
             </a:r>
             <a:r>
-              <a:rPr sz="1249" b="1" i="0" lang="zh-CN" dirty="0">
+              <a:rPr sz="1749" b="0" i="0" lang="zh-CN" dirty="0">
                 <a:solidFill>
                   <a:srgbClr val="27303A"/>
                 </a:solidFill>
@@ -5898,12 +5898,12 @@
         </p:nvSpPr>
         <p:spPr>
           <a:xfrm>
-            <a:off x="523874" y="4286249"/>
-            <a:ext cx="3651249" cy="1396999"/>
+            <a:off x="333374" y="3349624"/>
+            <a:ext cx="3222624" cy="1079499"/>
           </a:xfrm>
           <a:prstGeom prst="roundRect">
             <a:avLst>
-              <a:gd name="adj" fmla="val 5113"/>
+              <a:gd name="adj" fmla="val 6617"/>
             </a:avLst>
           </a:prstGeom>
           <a:solidFill>
@@ -5946,12 +5946,12 @@
         </p:nvSpPr>
         <p:spPr>
           <a:xfrm>
-            <a:off x="523874" y="4286249"/>
-            <a:ext cx="63499" cy="1396999"/>
+            <a:off x="333374" y="3349624"/>
+            <a:ext cx="47624" cy="1079499"/>
           </a:xfrm>
           <a:prstGeom prst="roundRect">
             <a:avLst>
-              <a:gd name="adj" fmla="val 37500"/>
+              <a:gd name="adj" fmla="val 50000"/>
             </a:avLst>
           </a:prstGeom>
           <a:solidFill>
@@ -5992,12 +5992,12 @@
         </p:nvSpPr>
         <p:spPr>
           <a:xfrm>
-            <a:off x="920749" y="4651374"/>
-            <a:ext cx="87312" cy="246062"/>
+            <a:off x="627062" y="3730624"/>
+            <a:ext cx="79374" cy="222249"/>
           </a:xfrm>
           <a:prstGeom prst="roundRect">
             <a:avLst>
-              <a:gd name="adj" fmla="val 49090"/>
+              <a:gd name="adj" fmla="val 48000"/>
             </a:avLst>
           </a:prstGeom>
           <a:noFill/>
@@ -6038,8 +6038,8 @@
         </p:nvSpPr>
         <p:spPr>
           <a:xfrm>
-            <a:off x="888999" y="4889499"/>
-            <a:ext cx="134937" cy="134937"/>
+            <a:off x="603249" y="3944937"/>
+            <a:ext cx="119062" cy="119062"/>
           </a:xfrm>
           <a:prstGeom prst="ellipse">
             <a:avLst/>
@@ -6082,8 +6082,8 @@
         </p:nvCxnSpPr>
         <p:spPr>
           <a:xfrm>
-            <a:off x="1008062" y="4714874"/>
-            <a:ext cx="55562" cy="0"/>
+            <a:off x="714374" y="3794124"/>
+            <a:ext cx="47625" cy="0"/>
           </a:xfrm>
           <a:prstGeom prst="line">
             <a:avLst/>
@@ -6118,8 +6118,8 @@
         </p:nvCxnSpPr>
         <p:spPr>
           <a:xfrm>
-            <a:off x="1008062" y="4770437"/>
-            <a:ext cx="55562" cy="0"/>
+            <a:off x="714374" y="3833812"/>
+            <a:ext cx="47625" cy="0"/>
           </a:xfrm>
           <a:prstGeom prst="line">
             <a:avLst/>
@@ -6154,8 +6154,8 @@
         </p:nvCxnSpPr>
         <p:spPr>
           <a:xfrm>
-            <a:off x="1008062" y="4818062"/>
-            <a:ext cx="55562" cy="0"/>
+            <a:off x="714374" y="3881437"/>
+            <a:ext cx="47625" cy="0"/>
           </a:xfrm>
           <a:prstGeom prst="line">
             <a:avLst/>
@@ -6190,8 +6190,8 @@
         </p:nvSpPr>
         <p:spPr>
           <a:xfrm>
-            <a:off x="1269999" y="4659312"/>
-            <a:ext cx="2746374" cy="341312"/>
+            <a:off x="936624" y="3484562"/>
+            <a:ext cx="2524124" cy="420687"/>
           </a:xfrm>
           <a:prstGeom prst="rect">
             <a:avLst/>
@@ -6207,7 +6207,7 @@
           <a:p>
             <a:pPr algn="l" fontAlgn="base">
               <a:lnSpc>
-                <a:spcPts val="2265"/>
+                <a:spcPts val="2812"/>
               </a:lnSpc>
               <a:spcBef>
                 <a:spcPts val="0"/>
@@ -6215,7 +6215,7 @@
               <a:spcAft>
                 <a:spcPts val="0"/>
               </a:spcAft>
-              <a:defRPr sz="1562" b="1" i="0" lang="zh-CN" dirty="0">
+              <a:defRPr sz="1937" b="1" i="0" lang="zh-CN" dirty="0">
                 <a:solidFill>
                   <a:srgbClr val="0F4F58"/>
                 </a:solidFill>
@@ -6225,7 +6225,7 @@
               </a:defRPr>
             </a:pPr>
             <a:r>
-              <a:rPr sz="1562" b="1" i="0" lang="zh-CN" dirty="0">
+              <a:rPr sz="1937" b="1" i="0" lang="zh-CN" dirty="0">
                 <a:solidFill>
                   <a:srgbClr val="0F4F58"/>
                 </a:solidFill>
@@ -6246,8 +6246,8 @@
         </p:nvSpPr>
         <p:spPr>
           <a:xfrm>
-            <a:off x="1269999" y="5032374"/>
-            <a:ext cx="2746374" cy="277812"/>
+            <a:off x="936624" y="3921124"/>
+            <a:ext cx="2524124" cy="373062"/>
           </a:xfrm>
           <a:prstGeom prst="rect">
             <a:avLst/>
@@ -6263,7 +6263,7 @@
           <a:p>
             <a:pPr algn="l" fontAlgn="base">
               <a:lnSpc>
-                <a:spcPts val="1828"/>
+                <a:spcPts val="2546"/>
               </a:lnSpc>
               <a:spcBef>
                 <a:spcPts val="0"/>
@@ -6271,7 +6271,7 @@
               <a:spcAft>
                 <a:spcPts val="0"/>
               </a:spcAft>
-              <a:defRPr sz="1249" b="1" i="0" lang="zh-CN" dirty="0">
+              <a:defRPr sz="1749" b="0" i="0" lang="zh-CN" dirty="0">
                 <a:solidFill>
                   <a:srgbClr val="27303A"/>
                 </a:solidFill>
@@ -6281,7 +6281,7 @@
               </a:defRPr>
             </a:pPr>
             <a:r>
-              <a:rPr sz="1249" b="1" i="0" lang="zh-CN" dirty="0">
+              <a:rPr sz="1749" b="0" i="0" lang="zh-CN" dirty="0">
                 <a:solidFill>
                   <a:srgbClr val="27303A"/>
                 </a:solidFill>
@@ -6292,7 +6292,7 @@
               <a:t>Ba/Sr · Zn </a:t>
             </a:r>
             <a:r>
-              <a:rPr sz="1249" b="1" i="0" lang="zh-CN" dirty="0">
+              <a:rPr sz="1749" b="0" i="0" lang="zh-CN" dirty="0">
                 <a:solidFill>
                   <a:srgbClr val="27303A"/>
                 </a:solidFill>
@@ -6313,12 +6313,12 @@
         </p:nvSpPr>
         <p:spPr>
           <a:xfrm>
-            <a:off x="523874" y="5953124"/>
-            <a:ext cx="3651249" cy="1396999"/>
+            <a:off x="333374" y="4619624"/>
+            <a:ext cx="3222624" cy="1079499"/>
           </a:xfrm>
           <a:prstGeom prst="roundRect">
             <a:avLst>
-              <a:gd name="adj" fmla="val 5113"/>
+              <a:gd name="adj" fmla="val 6617"/>
             </a:avLst>
           </a:prstGeom>
           <a:solidFill>
@@ -6361,12 +6361,12 @@
         </p:nvSpPr>
         <p:spPr>
           <a:xfrm>
-            <a:off x="523874" y="5953124"/>
-            <a:ext cx="63499" cy="1396999"/>
+            <a:off x="333374" y="4619624"/>
+            <a:ext cx="47624" cy="1079499"/>
           </a:xfrm>
           <a:prstGeom prst="roundRect">
             <a:avLst>
-              <a:gd name="adj" fmla="val 37500"/>
+              <a:gd name="adj" fmla="val 50000"/>
             </a:avLst>
           </a:prstGeom>
           <a:solidFill>
@@ -6407,8 +6407,8 @@
         </p:nvCxnSpPr>
         <p:spPr>
           <a:xfrm flipH="1" flipV="1">
-            <a:off x="849312" y="6476999"/>
-            <a:ext cx="63500" cy="198438"/>
+            <a:off x="571499" y="5143499"/>
+            <a:ext cx="47625" cy="174625"/>
           </a:xfrm>
           <a:prstGeom prst="line">
             <a:avLst/>
@@ -6443,8 +6443,8 @@
         </p:nvCxnSpPr>
         <p:spPr>
           <a:xfrm flipV="1">
-            <a:off x="849312" y="6365874"/>
-            <a:ext cx="71437" cy="111125"/>
+            <a:off x="571499" y="5048249"/>
+            <a:ext cx="55563" cy="95250"/>
           </a:xfrm>
           <a:prstGeom prst="line">
             <a:avLst/>
@@ -6479,8 +6479,8 @@
         </p:nvCxnSpPr>
         <p:spPr>
           <a:xfrm>
-            <a:off x="920749" y="6365874"/>
-            <a:ext cx="47625" cy="127000"/>
+            <a:off x="627062" y="5048249"/>
+            <a:ext cx="47625" cy="111125"/>
           </a:xfrm>
           <a:prstGeom prst="line">
             <a:avLst/>
@@ -6515,8 +6515,8 @@
         </p:nvCxnSpPr>
         <p:spPr>
           <a:xfrm flipH="1">
-            <a:off x="912812" y="6492874"/>
-            <a:ext cx="55562" cy="182563"/>
+            <a:off x="619124" y="5159374"/>
+            <a:ext cx="55563" cy="158750"/>
           </a:xfrm>
           <a:prstGeom prst="line">
             <a:avLst/>
@@ -6551,8 +6551,8 @@
         </p:nvCxnSpPr>
         <p:spPr>
           <a:xfrm flipH="1" flipV="1">
-            <a:off x="976312" y="6516687"/>
-            <a:ext cx="31750" cy="158750"/>
+            <a:off x="682624" y="5175249"/>
+            <a:ext cx="31750" cy="142875"/>
           </a:xfrm>
           <a:prstGeom prst="line">
             <a:avLst/>
@@ -6587,8 +6587,8 @@
         </p:nvCxnSpPr>
         <p:spPr>
           <a:xfrm flipV="1">
-            <a:off x="976312" y="6429374"/>
-            <a:ext cx="63500" cy="87313"/>
+            <a:off x="682624" y="5095874"/>
+            <a:ext cx="55563" cy="79375"/>
           </a:xfrm>
           <a:prstGeom prst="line">
             <a:avLst/>
@@ -6623,8 +6623,8 @@
         </p:nvCxnSpPr>
         <p:spPr>
           <a:xfrm>
-            <a:off x="1039812" y="6429374"/>
-            <a:ext cx="47625" cy="103188"/>
+            <a:off x="738187" y="5095874"/>
+            <a:ext cx="39687" cy="95250"/>
           </a:xfrm>
           <a:prstGeom prst="line">
             <a:avLst/>
@@ -6659,8 +6659,8 @@
         </p:nvCxnSpPr>
         <p:spPr>
           <a:xfrm flipH="1">
-            <a:off x="1055687" y="6532562"/>
-            <a:ext cx="31750" cy="142875"/>
+            <a:off x="754062" y="5191124"/>
+            <a:ext cx="23812" cy="127000"/>
           </a:xfrm>
           <a:prstGeom prst="line">
             <a:avLst/>
@@ -6695,8 +6695,8 @@
         </p:nvSpPr>
         <p:spPr>
           <a:xfrm>
-            <a:off x="1269999" y="6326187"/>
-            <a:ext cx="2746374" cy="341312"/>
+            <a:off x="936624" y="4754562"/>
+            <a:ext cx="2524124" cy="420687"/>
           </a:xfrm>
           <a:prstGeom prst="rect">
             <a:avLst/>
@@ -6712,7 +6712,7 @@
           <a:p>
             <a:pPr algn="l" fontAlgn="base">
               <a:lnSpc>
-                <a:spcPts val="2265"/>
+                <a:spcPts val="2812"/>
               </a:lnSpc>
               <a:spcBef>
                 <a:spcPts val="0"/>
@@ -6720,7 +6720,7 @@
               <a:spcAft>
                 <a:spcPts val="0"/>
               </a:spcAft>
-              <a:defRPr sz="1562" b="1" i="0" lang="zh-CN" dirty="0">
+              <a:defRPr sz="1937" b="1" i="0" lang="zh-CN" dirty="0">
                 <a:solidFill>
                   <a:srgbClr val="0F4F58"/>
                 </a:solidFill>
@@ -6730,7 +6730,7 @@
               </a:defRPr>
             </a:pPr>
             <a:r>
-              <a:rPr sz="1562" b="1" i="0" lang="zh-CN" dirty="0">
+              <a:rPr sz="1937" b="1" i="0" lang="zh-CN" dirty="0">
                 <a:solidFill>
                   <a:srgbClr val="0F4F58"/>
                 </a:solidFill>
@@ -6751,8 +6751,8 @@
         </p:nvSpPr>
         <p:spPr>
           <a:xfrm>
-            <a:off x="1269999" y="6699249"/>
-            <a:ext cx="2746374" cy="277812"/>
+            <a:off x="936624" y="5191124"/>
+            <a:ext cx="2524124" cy="373062"/>
           </a:xfrm>
           <a:prstGeom prst="rect">
             <a:avLst/>
@@ -6768,7 +6768,7 @@
           <a:p>
             <a:pPr algn="l" fontAlgn="base">
               <a:lnSpc>
-                <a:spcPts val="1828"/>
+                <a:spcPts val="2546"/>
               </a:lnSpc>
               <a:spcBef>
                 <a:spcPts val="0"/>
@@ -6776,7 +6776,7 @@
               <a:spcAft>
                 <a:spcPts val="0"/>
               </a:spcAft>
-              <a:defRPr sz="1249" b="1" i="0" lang="zh-CN" dirty="0">
+              <a:defRPr sz="1749" b="0" i="0" lang="zh-CN" dirty="0">
                 <a:solidFill>
                   <a:srgbClr val="27303A"/>
                 </a:solidFill>
@@ -6786,7 +6786,7 @@
               </a:defRPr>
             </a:pPr>
             <a:r>
-              <a:rPr sz="1249" b="1" i="0" lang="zh-CN" dirty="0">
+              <a:rPr sz="1749" b="0" i="0" lang="zh-CN" dirty="0">
                 <a:solidFill>
                   <a:srgbClr val="27303A"/>
                 </a:solidFill>
@@ -6797,7 +6797,7 @@
               <a:t>成核</a:t>
             </a:r>
             <a:r>
-              <a:rPr sz="1249" b="1" i="0" lang="zh-CN" dirty="0">
+              <a:rPr sz="1749" b="0" i="0" lang="zh-CN" dirty="0">
                 <a:solidFill>
                   <a:srgbClr val="27303A"/>
                 </a:solidFill>
@@ -6808,7 +6808,7 @@
               <a:t> · </a:t>
             </a:r>
             <a:r>
-              <a:rPr sz="1249" b="1" i="0" lang="zh-CN" dirty="0">
+              <a:rPr sz="1749" b="0" i="0" lang="zh-CN" dirty="0">
                 <a:solidFill>
                   <a:srgbClr val="27303A"/>
                 </a:solidFill>
@@ -6829,12 +6829,12 @@
         </p:nvSpPr>
         <p:spPr>
           <a:xfrm>
-            <a:off x="7778749" y="1190624"/>
-            <a:ext cx="3889374" cy="1587499"/>
+            <a:off x="7969249" y="809624"/>
+            <a:ext cx="3889374" cy="1420812"/>
           </a:xfrm>
           <a:prstGeom prst="roundRect">
             <a:avLst>
-              <a:gd name="adj" fmla="val 4500"/>
+              <a:gd name="adj" fmla="val 5027"/>
             </a:avLst>
           </a:prstGeom>
           <a:solidFill>
@@ -6877,12 +6877,12 @@
         </p:nvSpPr>
         <p:spPr>
           <a:xfrm>
-            <a:off x="7778749" y="1190624"/>
-            <a:ext cx="63499" cy="1587499"/>
+            <a:off x="7969249" y="809624"/>
+            <a:ext cx="47624" cy="1420812"/>
           </a:xfrm>
           <a:prstGeom prst="roundRect">
             <a:avLst>
-              <a:gd name="adj" fmla="val 37500"/>
+              <a:gd name="adj" fmla="val 50000"/>
             </a:avLst>
           </a:prstGeom>
           <a:solidFill>
@@ -6923,8 +6923,8 @@
         </p:nvSpPr>
         <p:spPr>
           <a:xfrm>
-            <a:off x="8151812" y="1650999"/>
-            <a:ext cx="119062" cy="119062"/>
+            <a:off x="8247062" y="1357312"/>
+            <a:ext cx="103187" cy="103187"/>
           </a:xfrm>
           <a:prstGeom prst="rect">
             <a:avLst/>
@@ -6967,8 +6967,8 @@
         </p:nvSpPr>
         <p:spPr>
           <a:xfrm>
-            <a:off x="8024812" y="1873249"/>
-            <a:ext cx="119062" cy="119062"/>
+            <a:off x="8135937" y="1555749"/>
+            <a:ext cx="103187" cy="103187"/>
           </a:xfrm>
           <a:prstGeom prst="rect">
             <a:avLst/>
@@ -7011,8 +7011,8 @@
         </p:nvSpPr>
         <p:spPr>
           <a:xfrm>
-            <a:off x="8286749" y="1873249"/>
-            <a:ext cx="119062" cy="119062"/>
+            <a:off x="8366124" y="1555749"/>
+            <a:ext cx="103187" cy="103187"/>
           </a:xfrm>
           <a:prstGeom prst="rect">
             <a:avLst/>
@@ -7055,8 +7055,8 @@
         </p:nvCxnSpPr>
         <p:spPr>
           <a:xfrm flipH="1">
-            <a:off x="8088312" y="1770062"/>
-            <a:ext cx="127000" cy="103187"/>
+            <a:off x="8191499" y="1468437"/>
+            <a:ext cx="111125" cy="87312"/>
           </a:xfrm>
           <a:prstGeom prst="line">
             <a:avLst/>
@@ -7091,8 +7091,8 @@
         </p:nvCxnSpPr>
         <p:spPr>
           <a:xfrm>
-            <a:off x="8215312" y="1770062"/>
-            <a:ext cx="127000" cy="103187"/>
+            <a:off x="8302624" y="1468437"/>
+            <a:ext cx="111125" cy="87312"/>
           </a:xfrm>
           <a:prstGeom prst="line">
             <a:avLst/>
@@ -7127,8 +7127,8 @@
         </p:nvSpPr>
         <p:spPr>
           <a:xfrm>
-            <a:off x="8524874" y="1666874"/>
-            <a:ext cx="2984499" cy="325437"/>
+            <a:off x="8572499" y="1111249"/>
+            <a:ext cx="3190874" cy="420687"/>
           </a:xfrm>
           <a:prstGeom prst="rect">
             <a:avLst/>
@@ -7144,7 +7144,7 @@
           <a:p>
             <a:pPr algn="l" fontAlgn="base">
               <a:lnSpc>
-                <a:spcPts val="2187"/>
+                <a:spcPts val="2812"/>
               </a:lnSpc>
               <a:spcBef>
                 <a:spcPts val="0"/>
@@ -7152,7 +7152,7 @@
               <a:spcAft>
                 <a:spcPts val="0"/>
               </a:spcAft>
-              <a:defRPr sz="1499" b="1" i="0" lang="zh-CN" dirty="0">
+              <a:defRPr sz="1937" b="1" i="0" lang="zh-CN" dirty="0">
                 <a:solidFill>
                   <a:srgbClr val="2B3E57"/>
                 </a:solidFill>
@@ -7162,7 +7162,7 @@
               </a:defRPr>
             </a:pPr>
             <a:r>
-              <a:rPr sz="1499" b="1" i="0" lang="zh-CN" dirty="0">
+              <a:rPr sz="1937" b="1" i="0" lang="zh-CN" dirty="0">
                 <a:solidFill>
                   <a:srgbClr val="2B3E57"/>
                 </a:solidFill>
@@ -7183,8 +7183,8 @@
         </p:nvSpPr>
         <p:spPr>
           <a:xfrm>
-            <a:off x="8524874" y="2024062"/>
-            <a:ext cx="2984499" cy="277812"/>
+            <a:off x="8572499" y="1547812"/>
+            <a:ext cx="3190874" cy="373062"/>
           </a:xfrm>
           <a:prstGeom prst="rect">
             <a:avLst/>
@@ -7200,7 +7200,7 @@
           <a:p>
             <a:pPr algn="l" fontAlgn="base">
               <a:lnSpc>
-                <a:spcPts val="1828"/>
+                <a:spcPts val="2546"/>
               </a:lnSpc>
               <a:spcBef>
                 <a:spcPts val="0"/>
@@ -7208,7 +7208,7 @@
               <a:spcAft>
                 <a:spcPts val="0"/>
               </a:spcAft>
-              <a:defRPr sz="1249" b="1" i="0" lang="zh-CN" dirty="0">
+              <a:defRPr sz="1749" b="0" i="0" lang="zh-CN" dirty="0">
                 <a:solidFill>
                   <a:srgbClr val="27303A"/>
                 </a:solidFill>
@@ -7218,7 +7218,7 @@
               </a:defRPr>
             </a:pPr>
             <a:r>
-              <a:rPr sz="1249" b="1" i="0" lang="zh-CN" dirty="0">
+              <a:rPr sz="1749" b="0" i="0" lang="zh-CN" dirty="0">
                 <a:solidFill>
                   <a:srgbClr val="27303A"/>
                 </a:solidFill>
@@ -7229,7 +7229,7 @@
               <a:t>Ba2ZnSi2O7 </a:t>
             </a:r>
             <a:r>
-              <a:rPr sz="1249" b="1" i="0" lang="zh-CN" dirty="0">
+              <a:rPr sz="1749" b="0" i="0" lang="zh-CN" dirty="0">
                 <a:solidFill>
                   <a:srgbClr val="27303A"/>
                 </a:solidFill>
@@ -7250,12 +7250,12 @@
         </p:nvSpPr>
         <p:spPr>
           <a:xfrm>
-            <a:off x="7778749" y="3413124"/>
-            <a:ext cx="3889374" cy="1587499"/>
+            <a:off x="7969249" y="2547937"/>
+            <a:ext cx="3889374" cy="1420812"/>
           </a:xfrm>
           <a:prstGeom prst="roundRect">
             <a:avLst>
-              <a:gd name="adj" fmla="val 4500"/>
+              <a:gd name="adj" fmla="val 5027"/>
             </a:avLst>
           </a:prstGeom>
           <a:solidFill>
@@ -7298,12 +7298,12 @@
         </p:nvSpPr>
         <p:spPr>
           <a:xfrm>
-            <a:off x="7778749" y="3413124"/>
-            <a:ext cx="63499" cy="1587499"/>
+            <a:off x="7969249" y="2547937"/>
+            <a:ext cx="47624" cy="1420812"/>
           </a:xfrm>
           <a:prstGeom prst="roundRect">
             <a:avLst>
-              <a:gd name="adj" fmla="val 37500"/>
+              <a:gd name="adj" fmla="val 50000"/>
             </a:avLst>
           </a:prstGeom>
           <a:solidFill>
@@ -7344,8 +7344,8 @@
         </p:nvSpPr>
         <p:spPr>
           <a:xfrm>
-            <a:off x="8048624" y="3921124"/>
-            <a:ext cx="325437" cy="261937"/>
+            <a:off x="8159749" y="3143249"/>
+            <a:ext cx="285749" cy="238124"/>
           </a:xfrm>
           <a:prstGeom prst="rect">
             <a:avLst/>
@@ -7356,7 +7356,7 @@
               <a:srgbClr val="111A24"/>
             </a:solidFill>
             <a:custDash>
-              <a:ds d="164706" sp="141176"/>
+              <a:ds d="146405" sp="125490"/>
             </a:custDash>
           </a:ln>
           <a:effectLst/>
@@ -7391,8 +7391,8 @@
         </p:nvSpPr>
         <p:spPr>
           <a:xfrm>
-            <a:off x="8524874" y="3889374"/>
-            <a:ext cx="2984499" cy="325437"/>
+            <a:off x="8572499" y="2849562"/>
+            <a:ext cx="3190874" cy="420687"/>
           </a:xfrm>
           <a:prstGeom prst="rect">
             <a:avLst/>
@@ -7408,7 +7408,7 @@
           <a:p>
             <a:pPr algn="l" fontAlgn="base">
               <a:lnSpc>
-                <a:spcPts val="2187"/>
+                <a:spcPts val="2812"/>
               </a:lnSpc>
               <a:spcBef>
                 <a:spcPts val="0"/>
@@ -7416,7 +7416,7 @@
               <a:spcAft>
                 <a:spcPts val="0"/>
               </a:spcAft>
-              <a:defRPr sz="1499" b="1" i="0" lang="zh-CN" dirty="0">
+              <a:defRPr sz="1937" b="1" i="0" lang="zh-CN" dirty="0">
                 <a:solidFill>
                   <a:srgbClr val="2B3E57"/>
                 </a:solidFill>
@@ -7426,7 +7426,7 @@
               </a:defRPr>
             </a:pPr>
             <a:r>
-              <a:rPr sz="1499" b="1" i="0" lang="zh-CN" dirty="0">
+              <a:rPr sz="1937" b="1" i="0" lang="zh-CN" dirty="0">
                 <a:solidFill>
                   <a:srgbClr val="2B3E57"/>
                 </a:solidFill>
@@ -7447,8 +7447,8 @@
         </p:nvSpPr>
         <p:spPr>
           <a:xfrm>
-            <a:off x="8524874" y="4246562"/>
-            <a:ext cx="2984499" cy="277812"/>
+            <a:off x="8572499" y="3286124"/>
+            <a:ext cx="3190874" cy="373062"/>
           </a:xfrm>
           <a:prstGeom prst="rect">
             <a:avLst/>
@@ -7464,7 +7464,7 @@
           <a:p>
             <a:pPr algn="l" fontAlgn="base">
               <a:lnSpc>
-                <a:spcPts val="1828"/>
+                <a:spcPts val="2546"/>
               </a:lnSpc>
               <a:spcBef>
                 <a:spcPts val="0"/>
@@ -7472,7 +7472,7 @@
               <a:spcAft>
                 <a:spcPts val="0"/>
               </a:spcAft>
-              <a:defRPr sz="1249" b="1" i="0" lang="zh-CN" dirty="0">
+              <a:defRPr sz="1749" b="0" i="0" lang="zh-CN" dirty="0">
                 <a:solidFill>
                   <a:srgbClr val="27303A"/>
                 </a:solidFill>
@@ -7482,7 +7482,7 @@
               </a:defRPr>
             </a:pPr>
             <a:r>
-              <a:rPr sz="1249" b="1" i="0" lang="zh-CN" dirty="0">
+              <a:rPr sz="1749" b="0" i="0" lang="zh-CN" dirty="0">
                 <a:solidFill>
                   <a:srgbClr val="27303A"/>
                 </a:solidFill>
@@ -7493,7 +7493,7 @@
               <a:t>直接</a:t>
             </a:r>
             <a:r>
-              <a:rPr sz="1249" b="1" i="0" lang="zh-CN" dirty="0">
+              <a:rPr sz="1749" b="0" i="0" lang="zh-CN" dirty="0">
                 <a:solidFill>
                   <a:srgbClr val="27303A"/>
                 </a:solidFill>
@@ -7504,7 +7504,7 @@
               <a:t> / </a:t>
             </a:r>
             <a:r>
-              <a:rPr sz="1249" b="1" i="0" lang="zh-CN" dirty="0">
+              <a:rPr sz="1749" b="0" i="0" lang="zh-CN" dirty="0">
                 <a:solidFill>
                   <a:srgbClr val="27303A"/>
                 </a:solidFill>
@@ -7515,7 +7515,7 @@
               <a:t>近邻</a:t>
             </a:r>
             <a:r>
-              <a:rPr sz="1249" b="1" i="0" lang="zh-CN" dirty="0">
+              <a:rPr sz="1749" b="0" i="0" lang="zh-CN" dirty="0">
                 <a:solidFill>
                   <a:srgbClr val="27303A"/>
                 </a:solidFill>
@@ -7526,7 +7526,7 @@
               <a:t> / </a:t>
             </a:r>
             <a:r>
-              <a:rPr sz="1249" b="1" i="0" lang="zh-CN" dirty="0">
+              <a:rPr sz="1749" b="0" i="0" lang="zh-CN" dirty="0">
                 <a:solidFill>
                   <a:srgbClr val="27303A"/>
                 </a:solidFill>
@@ -7547,12 +7547,12 @@
         </p:nvSpPr>
         <p:spPr>
           <a:xfrm>
-            <a:off x="7778749" y="5635624"/>
-            <a:ext cx="3889374" cy="1587499"/>
+            <a:off x="7969249" y="4278312"/>
+            <a:ext cx="3889374" cy="1420812"/>
           </a:xfrm>
           <a:prstGeom prst="roundRect">
             <a:avLst>
-              <a:gd name="adj" fmla="val 4500"/>
+              <a:gd name="adj" fmla="val 5027"/>
             </a:avLst>
           </a:prstGeom>
           <a:solidFill>
@@ -7598,8 +7598,8 @@
         </p:nvSpPr>
         <p:spPr>
           <a:xfrm>
-            <a:off x="8151812" y="6095999"/>
-            <a:ext cx="119062" cy="119062"/>
+            <a:off x="8247062" y="4833937"/>
+            <a:ext cx="103187" cy="103187"/>
           </a:xfrm>
           <a:prstGeom prst="rect">
             <a:avLst/>
@@ -7642,8 +7642,8 @@
         </p:nvSpPr>
         <p:spPr>
           <a:xfrm>
-            <a:off x="8024812" y="6318249"/>
-            <a:ext cx="119062" cy="119062"/>
+            <a:off x="8135937" y="5024437"/>
+            <a:ext cx="103187" cy="103187"/>
           </a:xfrm>
           <a:prstGeom prst="rect">
             <a:avLst/>
@@ -7686,8 +7686,8 @@
         </p:nvSpPr>
         <p:spPr>
           <a:xfrm>
-            <a:off x="8286749" y="6318249"/>
-            <a:ext cx="119062" cy="119062"/>
+            <a:off x="8366124" y="5024437"/>
+            <a:ext cx="103187" cy="103187"/>
           </a:xfrm>
           <a:prstGeom prst="rect">
             <a:avLst/>
@@ -7730,8 +7730,8 @@
         </p:nvCxnSpPr>
         <p:spPr>
           <a:xfrm flipH="1">
-            <a:off x="8088312" y="6215062"/>
-            <a:ext cx="127000" cy="103187"/>
+            <a:off x="8191499" y="4937124"/>
+            <a:ext cx="111125" cy="87313"/>
           </a:xfrm>
           <a:prstGeom prst="line">
             <a:avLst/>
@@ -7766,8 +7766,8 @@
         </p:nvCxnSpPr>
         <p:spPr>
           <a:xfrm>
-            <a:off x="8215312" y="6215062"/>
-            <a:ext cx="127000" cy="103187"/>
+            <a:off x="8302624" y="4937124"/>
+            <a:ext cx="111125" cy="87313"/>
           </a:xfrm>
           <a:prstGeom prst="line">
             <a:avLst/>
@@ -7802,8 +7802,8 @@
         </p:nvSpPr>
         <p:spPr>
           <a:xfrm>
-            <a:off x="8524874" y="6111874"/>
-            <a:ext cx="2984499" cy="325437"/>
+            <a:off x="8572499" y="4587874"/>
+            <a:ext cx="3190874" cy="420687"/>
           </a:xfrm>
           <a:prstGeom prst="rect">
             <a:avLst/>
@@ -7819,7 +7819,7 @@
           <a:p>
             <a:pPr algn="l" fontAlgn="base">
               <a:lnSpc>
-                <a:spcPts val="1765"/>
+                <a:spcPts val="2281"/>
               </a:lnSpc>
               <a:spcBef>
                 <a:spcPts val="0"/>
@@ -7827,7 +7827,7 @@
               <a:spcAft>
                 <a:spcPts val="0"/>
               </a:spcAft>
-              <a:defRPr sz="1499" b="1" i="0" lang="zh-CN" dirty="0">
+              <a:defRPr sz="1937" b="1" i="0" lang="zh-CN" dirty="0">
                 <a:solidFill>
                   <a:srgbClr val="7A5410"/>
                 </a:solidFill>
@@ -7837,7 +7837,7 @@
               </a:defRPr>
             </a:pPr>
             <a:r>
-              <a:rPr sz="1499" b="1" i="0" lang="zh-CN" dirty="0">
+              <a:rPr sz="1937" b="1" i="0" lang="zh-CN" dirty="0">
                 <a:solidFill>
                   <a:srgbClr val="7A5410"/>
                 </a:solidFill>
@@ -7858,8 +7858,8 @@
         </p:nvSpPr>
         <p:spPr>
           <a:xfrm>
-            <a:off x="8524874" y="6469062"/>
-            <a:ext cx="2984499" cy="277812"/>
+            <a:off x="8572499" y="5024437"/>
+            <a:ext cx="3190874" cy="373062"/>
           </a:xfrm>
           <a:prstGeom prst="rect">
             <a:avLst/>
@@ -7875,7 +7875,7 @@
           <a:p>
             <a:pPr algn="l" fontAlgn="base">
               <a:lnSpc>
-                <a:spcPts val="1828"/>
+                <a:spcPts val="2546"/>
               </a:lnSpc>
               <a:spcBef>
                 <a:spcPts val="0"/>
@@ -7883,7 +7883,7 @@
               <a:spcAft>
                 <a:spcPts val="0"/>
               </a:spcAft>
-              <a:defRPr sz="1249" b="1" i="0" lang="zh-CN" dirty="0">
+              <a:defRPr sz="1749" b="0" i="0" lang="zh-CN" dirty="0">
                 <a:solidFill>
                   <a:srgbClr val="27303A"/>
                 </a:solidFill>
@@ -7893,7 +7893,7 @@
               </a:defRPr>
             </a:pPr>
             <a:r>
-              <a:rPr sz="1249" b="1" i="0" lang="zh-CN" dirty="0">
+              <a:rPr sz="1749" b="0" i="0" lang="zh-CN" dirty="0">
                 <a:solidFill>
                   <a:srgbClr val="27303A"/>
                 </a:solidFill>
@@ -7914,8 +7914,8 @@
         </p:nvCxnSpPr>
         <p:spPr>
           <a:xfrm flipH="1">
-            <a:off x="4762499" y="4063999"/>
-            <a:ext cx="428625" cy="0"/>
+            <a:off x="4317999" y="3254374"/>
+            <a:ext cx="452438" cy="0"/>
           </a:xfrm>
           <a:prstGeom prst="line">
             <a:avLst/>
@@ -7950,8 +7950,8 @@
         </p:nvCxnSpPr>
         <p:spPr>
           <a:xfrm>
-            <a:off x="4762499" y="1650999"/>
-            <a:ext cx="0" cy="5000625"/>
+            <a:off x="4317999" y="1349374"/>
+            <a:ext cx="0" cy="3810000"/>
           </a:xfrm>
           <a:prstGeom prst="line">
             <a:avLst/>
@@ -7986,8 +7986,8 @@
         </p:nvSpPr>
         <p:spPr>
           <a:xfrm>
-            <a:off x="4206875" y="1603375"/>
-            <a:ext cx="555625" cy="95250"/>
+            <a:off x="3587750" y="1301750"/>
+            <a:ext cx="730250" cy="95250"/>
           </a:xfrm>
           <a:custGeom>
             <a:avLst/>
@@ -7996,9 +7996,9 @@
             <a:cxnLst/>
             <a:rect l="l" t="t" r="r" b="b"/>
             <a:pathLst>
-              <a:path w="70000" h="12000">
+              <a:path w="92000" h="12000">
                 <a:moveTo>
-                  <a:pt x="70000" y="7250"/>
+                  <a:pt x="92000" y="7250"/>
                 </a:moveTo>
                 <a:lnTo>
                   <a:pt x="15000" y="7250"/>
@@ -8016,7 +8016,7 @@
                   <a:pt x="15000" y="4750"/>
                 </a:lnTo>
                 <a:lnTo>
-                  <a:pt x="70000" y="4750"/>
+                  <a:pt x="92000" y="4750"/>
                 </a:lnTo>
                 <a:close/>
               </a:path>
@@ -8060,8 +8060,8 @@
         </p:nvSpPr>
         <p:spPr>
           <a:xfrm>
-            <a:off x="4198937" y="1206499"/>
-            <a:ext cx="571499" cy="309562"/>
+            <a:off x="3587749" y="881062"/>
+            <a:ext cx="698499" cy="404812"/>
           </a:xfrm>
           <a:prstGeom prst="roundRect">
             <a:avLst>
@@ -8108,8 +8108,8 @@
         </p:nvSpPr>
         <p:spPr>
           <a:xfrm>
-            <a:off x="4278312" y="1238249"/>
-            <a:ext cx="412749" cy="246062"/>
+            <a:off x="3667124" y="912812"/>
+            <a:ext cx="539749" cy="341312"/>
           </a:xfrm>
           <a:prstGeom prst="rect">
             <a:avLst/>
@@ -8125,7 +8125,7 @@
           <a:p>
             <a:pPr algn="ctr" fontAlgn="base">
               <a:lnSpc>
-                <a:spcPts val="1640"/>
+                <a:spcPts val="2359"/>
               </a:lnSpc>
               <a:spcBef>
                 <a:spcPts val="0"/>
@@ -8133,7 +8133,7 @@
               <a:spcAft>
                 <a:spcPts val="0"/>
               </a:spcAft>
-              <a:defRPr sz="1124" b="1" i="0" lang="zh-CN" dirty="0">
+              <a:defRPr sz="1624" b="0" i="0" lang="zh-CN" dirty="0">
                 <a:solidFill>
                   <a:srgbClr val="27303A"/>
                 </a:solidFill>
@@ -8143,7 +8143,7 @@
               </a:defRPr>
             </a:pPr>
             <a:r>
-              <a:rPr sz="1124" b="1" i="0" lang="zh-CN" dirty="0">
+              <a:rPr sz="1624" b="0" i="0" lang="zh-CN" dirty="0">
                 <a:solidFill>
                   <a:srgbClr val="27303A"/>
                 </a:solidFill>
@@ -8164,8 +8164,8 @@
         </p:nvSpPr>
         <p:spPr>
           <a:xfrm>
-            <a:off x="4206875" y="3270250"/>
-            <a:ext cx="555625" cy="95250"/>
+            <a:off x="3587750" y="2571750"/>
+            <a:ext cx="730250" cy="95250"/>
           </a:xfrm>
           <a:custGeom>
             <a:avLst/>
@@ -8174,9 +8174,9 @@
             <a:cxnLst/>
             <a:rect l="l" t="t" r="r" b="b"/>
             <a:pathLst>
-              <a:path w="70000" h="12000">
+              <a:path w="92000" h="12000">
                 <a:moveTo>
-                  <a:pt x="70000" y="7250"/>
+                  <a:pt x="92000" y="7250"/>
                 </a:moveTo>
                 <a:lnTo>
                   <a:pt x="15000" y="7250"/>
@@ -8194,7 +8194,7 @@
                   <a:pt x="15000" y="4750"/>
                 </a:lnTo>
                 <a:lnTo>
-                  <a:pt x="70000" y="4750"/>
+                  <a:pt x="92000" y="4750"/>
                 </a:lnTo>
                 <a:close/>
               </a:path>
@@ -8238,8 +8238,8 @@
         </p:nvSpPr>
         <p:spPr>
           <a:xfrm>
-            <a:off x="4198937" y="2873374"/>
-            <a:ext cx="571499" cy="309562"/>
+            <a:off x="3587749" y="2151062"/>
+            <a:ext cx="698499" cy="404812"/>
           </a:xfrm>
           <a:prstGeom prst="roundRect">
             <a:avLst>
@@ -8286,8 +8286,8 @@
         </p:nvSpPr>
         <p:spPr>
           <a:xfrm>
-            <a:off x="4278312" y="2905124"/>
-            <a:ext cx="412749" cy="246062"/>
+            <a:off x="3667124" y="2182812"/>
+            <a:ext cx="539749" cy="341312"/>
           </a:xfrm>
           <a:prstGeom prst="rect">
             <a:avLst/>
@@ -8303,7 +8303,7 @@
           <a:p>
             <a:pPr algn="ctr" fontAlgn="base">
               <a:lnSpc>
-                <a:spcPts val="1640"/>
+                <a:spcPts val="2359"/>
               </a:lnSpc>
               <a:spcBef>
                 <a:spcPts val="0"/>
@@ -8311,7 +8311,7 @@
               <a:spcAft>
                 <a:spcPts val="0"/>
               </a:spcAft>
-              <a:defRPr sz="1124" b="1" i="0" lang="zh-CN" dirty="0">
+              <a:defRPr sz="1624" b="0" i="0" lang="zh-CN" dirty="0">
                 <a:solidFill>
                   <a:srgbClr val="27303A"/>
                 </a:solidFill>
@@ -8321,7 +8321,7 @@
               </a:defRPr>
             </a:pPr>
             <a:r>
-              <a:rPr sz="1124" b="1" i="0" lang="zh-CN" dirty="0">
+              <a:rPr sz="1624" b="0" i="0" lang="zh-CN" dirty="0">
                 <a:solidFill>
                   <a:srgbClr val="27303A"/>
                 </a:solidFill>
@@ -8342,8 +8342,8 @@
         </p:nvSpPr>
         <p:spPr>
           <a:xfrm>
-            <a:off x="4206875" y="4937125"/>
-            <a:ext cx="555625" cy="95250"/>
+            <a:off x="3587750" y="3841750"/>
+            <a:ext cx="730250" cy="95250"/>
           </a:xfrm>
           <a:custGeom>
             <a:avLst/>
@@ -8352,9 +8352,9 @@
             <a:cxnLst/>
             <a:rect l="l" t="t" r="r" b="b"/>
             <a:pathLst>
-              <a:path w="70000" h="12000">
+              <a:path w="92000" h="12000">
                 <a:moveTo>
-                  <a:pt x="70000" y="7250"/>
+                  <a:pt x="92000" y="7250"/>
                 </a:moveTo>
                 <a:lnTo>
                   <a:pt x="15000" y="7250"/>
@@ -8372,7 +8372,7 @@
                   <a:pt x="15000" y="4750"/>
                 </a:lnTo>
                 <a:lnTo>
-                  <a:pt x="70000" y="4750"/>
+                  <a:pt x="92000" y="4750"/>
                 </a:lnTo>
                 <a:close/>
               </a:path>
@@ -8416,8 +8416,8 @@
         </p:nvSpPr>
         <p:spPr>
           <a:xfrm>
-            <a:off x="4198937" y="4540249"/>
-            <a:ext cx="571499" cy="309562"/>
+            <a:off x="3587749" y="3421062"/>
+            <a:ext cx="698499" cy="404812"/>
           </a:xfrm>
           <a:prstGeom prst="roundRect">
             <a:avLst>
@@ -8464,8 +8464,8 @@
         </p:nvSpPr>
         <p:spPr>
           <a:xfrm>
-            <a:off x="4278312" y="4571999"/>
-            <a:ext cx="412749" cy="246062"/>
+            <a:off x="3667124" y="3452812"/>
+            <a:ext cx="539749" cy="341312"/>
           </a:xfrm>
           <a:prstGeom prst="rect">
             <a:avLst/>
@@ -8481,7 +8481,7 @@
           <a:p>
             <a:pPr algn="ctr" fontAlgn="base">
               <a:lnSpc>
-                <a:spcPts val="1640"/>
+                <a:spcPts val="2359"/>
               </a:lnSpc>
               <a:spcBef>
                 <a:spcPts val="0"/>
@@ -8489,7 +8489,7 @@
               <a:spcAft>
                 <a:spcPts val="0"/>
               </a:spcAft>
-              <a:defRPr sz="1124" b="1" i="0" lang="zh-CN" dirty="0">
+              <a:defRPr sz="1624" b="0" i="0" lang="zh-CN" dirty="0">
                 <a:solidFill>
                   <a:srgbClr val="27303A"/>
                 </a:solidFill>
@@ -8499,7 +8499,7 @@
               </a:defRPr>
             </a:pPr>
             <a:r>
-              <a:rPr sz="1124" b="1" i="0" lang="zh-CN" dirty="0">
+              <a:rPr sz="1624" b="0" i="0" lang="zh-CN" dirty="0">
                 <a:solidFill>
                   <a:srgbClr val="27303A"/>
                 </a:solidFill>
@@ -8520,8 +8520,8 @@
         </p:nvSpPr>
         <p:spPr>
           <a:xfrm>
-            <a:off x="4206875" y="6604000"/>
-            <a:ext cx="555625" cy="95250"/>
+            <a:off x="3587750" y="5111750"/>
+            <a:ext cx="730250" cy="95250"/>
           </a:xfrm>
           <a:custGeom>
             <a:avLst/>
@@ -8530,9 +8530,9 @@
             <a:cxnLst/>
             <a:rect l="l" t="t" r="r" b="b"/>
             <a:pathLst>
-              <a:path w="70000" h="12000">
+              <a:path w="92000" h="12000">
                 <a:moveTo>
-                  <a:pt x="70000" y="7250"/>
+                  <a:pt x="92000" y="7250"/>
                 </a:moveTo>
                 <a:lnTo>
                   <a:pt x="15000" y="7250"/>
@@ -8550,7 +8550,7 @@
                   <a:pt x="15000" y="4750"/>
                 </a:lnTo>
                 <a:lnTo>
-                  <a:pt x="70000" y="4750"/>
+                  <a:pt x="92000" y="4750"/>
                 </a:lnTo>
                 <a:close/>
               </a:path>
@@ -8594,8 +8594,8 @@
         </p:nvSpPr>
         <p:spPr>
           <a:xfrm>
-            <a:off x="4198937" y="6207124"/>
-            <a:ext cx="571499" cy="309562"/>
+            <a:off x="3587749" y="4691062"/>
+            <a:ext cx="698499" cy="404812"/>
           </a:xfrm>
           <a:prstGeom prst="roundRect">
             <a:avLst>
@@ -8642,8 +8642,8 @@
         </p:nvSpPr>
         <p:spPr>
           <a:xfrm>
-            <a:off x="4278312" y="6238874"/>
-            <a:ext cx="412749" cy="246062"/>
+            <a:off x="3667124" y="4722812"/>
+            <a:ext cx="539749" cy="341312"/>
           </a:xfrm>
           <a:prstGeom prst="rect">
             <a:avLst/>
@@ -8659,7 +8659,7 @@
           <a:p>
             <a:pPr algn="ctr" fontAlgn="base">
               <a:lnSpc>
-                <a:spcPts val="1640"/>
+                <a:spcPts val="2359"/>
               </a:lnSpc>
               <a:spcBef>
                 <a:spcPts val="0"/>
@@ -8667,7 +8667,7 @@
               <a:spcAft>
                 <a:spcPts val="0"/>
               </a:spcAft>
-              <a:defRPr sz="1124" b="1" i="0" lang="zh-CN" dirty="0">
+              <a:defRPr sz="1624" b="0" i="0" lang="zh-CN" dirty="0">
                 <a:solidFill>
                   <a:srgbClr val="27303A"/>
                 </a:solidFill>
@@ -8677,7 +8677,7 @@
               </a:defRPr>
             </a:pPr>
             <a:r>
-              <a:rPr sz="1124" b="1" i="0" lang="zh-CN" dirty="0">
+              <a:rPr sz="1624" b="0" i="0" lang="zh-CN" dirty="0">
                 <a:solidFill>
                   <a:srgbClr val="27303A"/>
                 </a:solidFill>
@@ -8698,8 +8698,8 @@
         </p:nvCxnSpPr>
         <p:spPr>
           <a:xfrm>
-            <a:off x="7000874" y="4063999"/>
-            <a:ext cx="142875" cy="0"/>
+            <a:off x="6754812" y="3254374"/>
+            <a:ext cx="452437" cy="0"/>
           </a:xfrm>
           <a:prstGeom prst="line">
             <a:avLst/>
@@ -8734,8 +8734,8 @@
         </p:nvCxnSpPr>
         <p:spPr>
           <a:xfrm>
-            <a:off x="7143749" y="1984374"/>
-            <a:ext cx="0" cy="4445000"/>
+            <a:off x="7207249" y="1516062"/>
+            <a:ext cx="0" cy="3476625"/>
           </a:xfrm>
           <a:prstGeom prst="line">
             <a:avLst/>
@@ -8770,8 +8770,8 @@
         </p:nvSpPr>
         <p:spPr>
           <a:xfrm>
-            <a:off x="7143750" y="1936750"/>
-            <a:ext cx="603250" cy="95250"/>
+            <a:off x="7207250" y="1468437"/>
+            <a:ext cx="730250" cy="95250"/>
           </a:xfrm>
           <a:custGeom>
             <a:avLst/>
@@ -8780,24 +8780,24 @@
             <a:cxnLst/>
             <a:rect l="l" t="t" r="r" b="b"/>
             <a:pathLst>
-              <a:path w="76000" h="12000">
+              <a:path w="92000" h="12000">
                 <a:moveTo>
                   <a:pt x="0" y="4750"/>
                 </a:moveTo>
                 <a:lnTo>
-                  <a:pt x="61000" y="4750"/>
+                  <a:pt x="77000" y="4750"/>
                 </a:lnTo>
                 <a:lnTo>
-                  <a:pt x="61000" y="0"/>
+                  <a:pt x="77000" y="0"/>
                 </a:lnTo>
                 <a:lnTo>
-                  <a:pt x="76000" y="6000"/>
+                  <a:pt x="92000" y="6000"/>
                 </a:lnTo>
                 <a:lnTo>
-                  <a:pt x="61000" y="12000"/>
+                  <a:pt x="77000" y="12000"/>
                 </a:lnTo>
                 <a:lnTo>
-                  <a:pt x="61000" y="7250"/>
+                  <a:pt x="77000" y="7250"/>
                 </a:lnTo>
                 <a:lnTo>
                   <a:pt x="0" y="7250"/>
@@ -8844,8 +8844,8 @@
         </p:nvSpPr>
         <p:spPr>
           <a:xfrm>
-            <a:off x="7159624" y="1539874"/>
-            <a:ext cx="571499" cy="309562"/>
+            <a:off x="7238999" y="1047749"/>
+            <a:ext cx="698499" cy="404812"/>
           </a:xfrm>
           <a:prstGeom prst="roundRect">
             <a:avLst>
@@ -8892,8 +8892,8 @@
         </p:nvSpPr>
         <p:spPr>
           <a:xfrm>
-            <a:off x="7238999" y="1571624"/>
-            <a:ext cx="412749" cy="246062"/>
+            <a:off x="7318374" y="1079499"/>
+            <a:ext cx="539749" cy="341312"/>
           </a:xfrm>
           <a:prstGeom prst="rect">
             <a:avLst/>
@@ -8909,7 +8909,7 @@
           <a:p>
             <a:pPr algn="ctr" fontAlgn="base">
               <a:lnSpc>
-                <a:spcPts val="1640"/>
+                <a:spcPts val="2359"/>
               </a:lnSpc>
               <a:spcBef>
                 <a:spcPts val="0"/>
@@ -8917,7 +8917,7 @@
               <a:spcAft>
                 <a:spcPts val="0"/>
               </a:spcAft>
-              <a:defRPr sz="1124" b="1" i="0" lang="zh-CN" dirty="0">
+              <a:defRPr sz="1624" b="0" i="0" lang="zh-CN" dirty="0">
                 <a:solidFill>
                   <a:srgbClr val="27303A"/>
                 </a:solidFill>
@@ -8927,7 +8927,7 @@
               </a:defRPr>
             </a:pPr>
             <a:r>
-              <a:rPr sz="1124" b="1" i="0" lang="zh-CN" dirty="0">
+              <a:rPr sz="1624" b="0" i="0" lang="zh-CN" dirty="0">
                 <a:solidFill>
                   <a:srgbClr val="27303A"/>
                 </a:solidFill>
@@ -8948,8 +8948,8 @@
         </p:nvSpPr>
         <p:spPr>
           <a:xfrm>
-            <a:off x="7143750" y="4159250"/>
-            <a:ext cx="603250" cy="95250"/>
+            <a:off x="7207250" y="3206750"/>
+            <a:ext cx="730250" cy="95250"/>
           </a:xfrm>
           <a:custGeom>
             <a:avLst/>
@@ -8958,24 +8958,24 @@
             <a:cxnLst/>
             <a:rect l="l" t="t" r="r" b="b"/>
             <a:pathLst>
-              <a:path w="76000" h="12000">
+              <a:path w="92000" h="12000">
                 <a:moveTo>
                   <a:pt x="0" y="4750"/>
                 </a:moveTo>
                 <a:lnTo>
-                  <a:pt x="61000" y="4750"/>
+                  <a:pt x="77000" y="4750"/>
                 </a:lnTo>
                 <a:lnTo>
-                  <a:pt x="61000" y="0"/>
+                  <a:pt x="77000" y="0"/>
                 </a:lnTo>
                 <a:lnTo>
-                  <a:pt x="76000" y="6000"/>
+                  <a:pt x="92000" y="6000"/>
                 </a:lnTo>
                 <a:lnTo>
-                  <a:pt x="61000" y="12000"/>
+                  <a:pt x="77000" y="12000"/>
                 </a:lnTo>
                 <a:lnTo>
-                  <a:pt x="61000" y="7250"/>
+                  <a:pt x="77000" y="7250"/>
                 </a:lnTo>
                 <a:lnTo>
                   <a:pt x="0" y="7250"/>
@@ -9022,8 +9022,8 @@
         </p:nvSpPr>
         <p:spPr>
           <a:xfrm>
-            <a:off x="7159624" y="3762374"/>
-            <a:ext cx="571499" cy="309562"/>
+            <a:off x="7238999" y="2786062"/>
+            <a:ext cx="698499" cy="404812"/>
           </a:xfrm>
           <a:prstGeom prst="roundRect">
             <a:avLst>
@@ -9070,8 +9070,8 @@
         </p:nvSpPr>
         <p:spPr>
           <a:xfrm>
-            <a:off x="7238999" y="3794124"/>
-            <a:ext cx="412749" cy="246062"/>
+            <a:off x="7318374" y="2817812"/>
+            <a:ext cx="539749" cy="341312"/>
           </a:xfrm>
           <a:prstGeom prst="rect">
             <a:avLst/>
@@ -9087,7 +9087,7 @@
           <a:p>
             <a:pPr algn="ctr" fontAlgn="base">
               <a:lnSpc>
-                <a:spcPts val="1640"/>
+                <a:spcPts val="2359"/>
               </a:lnSpc>
               <a:spcBef>
                 <a:spcPts val="0"/>
@@ -9095,7 +9095,7 @@
               <a:spcAft>
                 <a:spcPts val="0"/>
               </a:spcAft>
-              <a:defRPr sz="1124" b="1" i="0" lang="zh-CN" dirty="0">
+              <a:defRPr sz="1624" b="0" i="0" lang="zh-CN" dirty="0">
                 <a:solidFill>
                   <a:srgbClr val="27303A"/>
                 </a:solidFill>
@@ -9105,7 +9105,7 @@
               </a:defRPr>
             </a:pPr>
             <a:r>
-              <a:rPr sz="1124" b="1" i="0" lang="zh-CN" dirty="0">
+              <a:rPr sz="1624" b="0" i="0" lang="zh-CN" dirty="0">
                 <a:solidFill>
                   <a:srgbClr val="27303A"/>
                 </a:solidFill>
@@ -9126,8 +9126,8 @@
         </p:nvCxnSpPr>
         <p:spPr>
           <a:xfrm>
-            <a:off x="7143749" y="6429374"/>
-            <a:ext cx="603250" cy="0"/>
+            <a:off x="7207249" y="4992687"/>
+            <a:ext cx="730250" cy="0"/>
           </a:xfrm>
           <a:prstGeom prst="line">
             <a:avLst/>
@@ -9166,8 +9166,8 @@
         </p:nvSpPr>
         <p:spPr>
           <a:xfrm>
-            <a:off x="7159624" y="5984874"/>
-            <a:ext cx="571499" cy="309562"/>
+            <a:off x="7238999" y="4524374"/>
+            <a:ext cx="698499" cy="404812"/>
           </a:xfrm>
           <a:prstGeom prst="roundRect">
             <a:avLst>
@@ -9214,8 +9214,8 @@
         </p:nvSpPr>
         <p:spPr>
           <a:xfrm>
-            <a:off x="7238999" y="6016624"/>
-            <a:ext cx="412749" cy="246062"/>
+            <a:off x="7318374" y="4556124"/>
+            <a:ext cx="539749" cy="341312"/>
           </a:xfrm>
           <a:prstGeom prst="rect">
             <a:avLst/>
@@ -9231,7 +9231,7 @@
           <a:p>
             <a:pPr algn="ctr" fontAlgn="base">
               <a:lnSpc>
-                <a:spcPts val="1640"/>
+                <a:spcPts val="2359"/>
               </a:lnSpc>
               <a:spcBef>
                 <a:spcPts val="0"/>
@@ -9239,7 +9239,7 @@
               <a:spcAft>
                 <a:spcPts val="0"/>
               </a:spcAft>
-              <a:defRPr sz="1124" b="1" i="0" lang="zh-CN" dirty="0">
+              <a:defRPr sz="1624" b="0" i="0" lang="zh-CN" dirty="0">
                 <a:solidFill>
                   <a:srgbClr val="7A5410"/>
                 </a:solidFill>
@@ -9249,7 +9249,7 @@
               </a:defRPr>
             </a:pPr>
             <a:r>
-              <a:rPr sz="1124" b="1" i="0" lang="zh-CN" dirty="0">
+              <a:rPr sz="1624" b="0" i="0" lang="zh-CN" dirty="0">
                 <a:solidFill>
                   <a:srgbClr val="7A5410"/>
                 </a:solidFill>
